--- a/conf/DSS_20260618/presentation/pptx/DSS_2026_Tutorial.pptx
+++ b/conf/DSS_20260618/presentation/pptx/DSS_2026_Tutorial.pptx
@@ -90,7 +90,7 @@
         <p:txBody>
           <a:bodyPr/>
           <a:p>
-            <a:fld id="{49D02A25-AD96-47D6-BB88-841BC28AF848}" type="slidenum">
+            <a:fld id="{C186F9B4-3943-4DBE-A0BE-6A354225D237}" type="slidenum">
               <a:t>&lt;#&gt;</a:t>
             </a:fld>
           </a:p>
@@ -278,7 +278,7 @@
         <p:txBody>
           <a:bodyPr/>
           <a:p>
-            <a:fld id="{0327FA41-760C-44EA-8731-0CE51A25710F}" type="slidenum">
+            <a:fld id="{71ED0607-7395-4C0B-B6ED-EE18ED16FB77}" type="slidenum">
               <a:t>&lt;#&gt;</a:t>
             </a:fld>
           </a:p>
@@ -534,7 +534,7 @@
         <p:txBody>
           <a:bodyPr/>
           <a:p>
-            <a:fld id="{8F2219A5-1C17-4171-84B0-CE10DC6EA6CA}" type="slidenum">
+            <a:fld id="{465E5308-8995-4A8F-B163-C4DB7DF9E202}" type="slidenum">
               <a:t>&lt;#&gt;</a:t>
             </a:fld>
           </a:p>
@@ -858,7 +858,7 @@
         <p:txBody>
           <a:bodyPr/>
           <a:p>
-            <a:fld id="{C6E6D863-7474-4A64-9FC9-6F785DA71E3A}" type="slidenum">
+            <a:fld id="{27894206-E35E-4A41-920F-B03EBDD03519}" type="slidenum">
               <a:t>&lt;#&gt;</a:t>
             </a:fld>
           </a:p>
@@ -1015,7 +1015,7 @@
         <p:txBody>
           <a:bodyPr/>
           <a:p>
-            <a:fld id="{44875A1E-6B95-44D6-8D49-23060E870533}" type="slidenum">
+            <a:fld id="{F0EF5701-AF7D-4196-B1A0-18CD88CDC45C}" type="slidenum">
               <a:t>&lt;#&gt;</a:t>
             </a:fld>
           </a:p>
@@ -1169,7 +1169,7 @@
         <p:txBody>
           <a:bodyPr/>
           <a:p>
-            <a:fld id="{49D9D346-1EEC-4404-9B62-006CA25344CD}" type="slidenum">
+            <a:fld id="{0AF4641E-6FE1-421A-A034-D32FF7C37E6C}" type="slidenum">
               <a:t>&lt;#&gt;</a:t>
             </a:fld>
           </a:p>
@@ -1357,7 +1357,7 @@
         <p:txBody>
           <a:bodyPr/>
           <a:p>
-            <a:fld id="{7A019884-4B4F-4719-AEAF-82984BEE6EC1}" type="slidenum">
+            <a:fld id="{FDC91440-6E7F-4FA8-AF33-3378A90B7B15}" type="slidenum">
               <a:t>&lt;#&gt;</a:t>
             </a:fld>
           </a:p>
@@ -1477,7 +1477,7 @@
         <p:txBody>
           <a:bodyPr/>
           <a:p>
-            <a:fld id="{E5828FBC-9149-4EAB-B691-6676BA98CC99}" type="slidenum">
+            <a:fld id="{A508AB01-4650-4BCC-BF4D-B02AD32D27C8}" type="slidenum">
               <a:t>&lt;#&gt;</a:t>
             </a:fld>
           </a:p>
@@ -1597,7 +1597,7 @@
         <p:txBody>
           <a:bodyPr/>
           <a:p>
-            <a:fld id="{1B8AD53D-A56E-448B-9B87-7063675B5587}" type="slidenum">
+            <a:fld id="{E6BB7E17-8CE4-4F18-9F8A-06258C218191}" type="slidenum">
               <a:t>&lt;#&gt;</a:t>
             </a:fld>
           </a:p>
@@ -1819,7 +1819,7 @@
         <p:txBody>
           <a:bodyPr/>
           <a:p>
-            <a:fld id="{8107298B-1E0A-492D-84C9-CE1FAD7C60EC}" type="slidenum">
+            <a:fld id="{6C7D6527-0973-496D-AAE1-0680FD534A9C}" type="slidenum">
               <a:t>&lt;#&gt;</a:t>
             </a:fld>
           </a:p>
@@ -2041,7 +2041,7 @@
         <p:txBody>
           <a:bodyPr/>
           <a:p>
-            <a:fld id="{D6C6D55D-7FEB-48C6-8EED-818DC79C84E5}" type="slidenum">
+            <a:fld id="{1AFCA493-8D60-4FF1-977B-CC625CA379E5}" type="slidenum">
               <a:t>&lt;#&gt;</a:t>
             </a:fld>
           </a:p>
@@ -2263,7 +2263,7 @@
         <p:txBody>
           <a:bodyPr/>
           <a:p>
-            <a:fld id="{776A94EA-2A75-423F-8319-6D25523AE8AF}" type="slidenum">
+            <a:fld id="{5D710A94-9211-4F2D-9CDB-280895084D1E}" type="slidenum">
               <a:t>&lt;#&gt;</a:t>
             </a:fld>
           </a:p>
@@ -2332,7 +2332,7 @@
         <p:spPr>
           <a:xfrm>
             <a:off x="3124080" y="6356520"/>
-            <a:ext cx="2894760" cy="364320"/>
+            <a:ext cx="2894040" cy="363600"/>
           </a:xfrm>
           <a:prstGeom prst="rect">
             <a:avLst/>
@@ -2368,7 +2368,7 @@
               <a:rPr b="0" lang="pl-PL" sz="1400" spc="-1" strike="noStrike">
                 <a:latin typeface="Times New Roman"/>
               </a:rPr>
-              <a:t>&lt;stopka&gt;</a:t>
+              <a:t> </a:t>
             </a:r>
             <a:endParaRPr b="0" lang="pl-PL" sz="1400" spc="-1" strike="noStrike">
               <a:latin typeface="Times New Roman"/>
@@ -2389,7 +2389,7 @@
         <p:spPr>
           <a:xfrm>
             <a:off x="6553080" y="6356520"/>
-            <a:ext cx="2133000" cy="364320"/>
+            <a:ext cx="2132280" cy="363600"/>
           </a:xfrm>
           <a:prstGeom prst="rect">
             <a:avLst/>
@@ -2424,14 +2424,14 @@
               </a:lnSpc>
               <a:buNone/>
             </a:pPr>
-            <a:fld id="{A6B48CD3-EAD2-4843-A885-C037D8CEF381}" type="slidenum">
+            <a:fld id="{BBA65A2A-8F65-4A77-B9AA-B4C8A409B32A}" type="slidenum">
               <a:rPr b="0" lang="en-US" sz="1200" spc="-1" strike="noStrike">
                 <a:solidFill>
                   <a:srgbClr val="8b8b8b"/>
                 </a:solidFill>
                 <a:latin typeface="Calibri"/>
               </a:rPr>
-              <a:t>&lt;numer&gt;</a:t>
+              <a:t>1</a:t>
             </a:fld>
             <a:endParaRPr b="0" lang="pl-PL" sz="1200" spc="-1" strike="noStrike">
               <a:latin typeface="Times New Roman"/>
@@ -2452,7 +2452,7 @@
         <p:spPr>
           <a:xfrm>
             <a:off x="457200" y="6356520"/>
-            <a:ext cx="2133000" cy="364320"/>
+            <a:ext cx="2132280" cy="363600"/>
           </a:xfrm>
           <a:prstGeom prst="rect">
             <a:avLst/>
@@ -2478,7 +2478,7 @@
               <a:rPr b="0" lang="pl-PL" sz="1400" spc="-1" strike="noStrike">
                 <a:latin typeface="Times New Roman"/>
               </a:rPr>
-              <a:t>&lt;data/godzina&gt;</a:t>
+              <a:t> </a:t>
             </a:r>
             <a:endParaRPr b="0" lang="pl-PL" sz="1400" spc="-1" strike="noStrike">
               <a:latin typeface="Times New Roman"/>
@@ -2765,7 +2765,7 @@
         <p:spPr>
           <a:xfrm>
             <a:off x="0" y="2331720"/>
-            <a:ext cx="1828080" cy="62640"/>
+            <a:ext cx="1827360" cy="61920"/>
           </a:xfrm>
           <a:prstGeom prst="rect">
             <a:avLst/>
@@ -2806,7 +2806,7 @@
         <p:spPr>
           <a:xfrm>
             <a:off x="768240" y="868680"/>
-            <a:ext cx="2285280" cy="213120"/>
+            <a:ext cx="2284560" cy="212760"/>
           </a:xfrm>
           <a:prstGeom prst="rect">
             <a:avLst/>
@@ -2858,7 +2858,7 @@
         <p:spPr>
           <a:xfrm>
             <a:off x="768240" y="2514600"/>
-            <a:ext cx="10423440" cy="1471680"/>
+            <a:ext cx="10422720" cy="1471320"/>
           </a:xfrm>
           <a:prstGeom prst="rect">
             <a:avLst/>
@@ -2931,7 +2931,7 @@
         <p:spPr>
           <a:xfrm>
             <a:off x="768240" y="4343400"/>
-            <a:ext cx="10057680" cy="630720"/>
+            <a:ext cx="10056960" cy="630360"/>
           </a:xfrm>
           <a:prstGeom prst="rect">
             <a:avLst/>
@@ -2983,7 +2983,7 @@
         <p:spPr>
           <a:xfrm>
             <a:off x="768240" y="5623560"/>
-            <a:ext cx="7314480" cy="243360"/>
+            <a:ext cx="7313760" cy="486360"/>
           </a:xfrm>
           <a:prstGeom prst="rect">
             <a:avLst/>
@@ -3018,43 +3018,12 @@
                 <a:latin typeface="Arial"/>
                 <a:ea typeface="DejaVu Sans"/>
               </a:rPr>
-              <a:t>radlab.dev – Research and Development Laboratory</a:t>
+              <a:t>Paweł Kędzia - Research and Development Laboratory, radlab.dev</a:t>
             </a:r>
             <a:endParaRPr b="0" lang="pl-PL" sz="1600" spc="-1" strike="noStrike">
               <a:latin typeface="Arial"/>
             </a:endParaRPr>
           </a:p>
-        </p:txBody>
-      </p:sp>
-      <p:sp>
-        <p:nvSpPr>
-          <p:cNvPr id="46" name="TextBox 6"/>
-          <p:cNvSpPr/>
-          <p:nvPr/>
-        </p:nvSpPr>
-        <p:spPr>
-          <a:xfrm>
-            <a:off x="768240" y="5989320"/>
-            <a:ext cx="10057680" cy="198000"/>
-          </a:xfrm>
-          <a:prstGeom prst="rect">
-            <a:avLst/>
-          </a:prstGeom>
-          <a:noFill/>
-          <a:ln w="0">
-            <a:noFill/>
-          </a:ln>
-        </p:spPr>
-        <p:style>
-          <a:lnRef idx="0"/>
-          <a:fillRef idx="0"/>
-          <a:effectRef idx="0"/>
-          <a:fontRef idx="minor"/>
-        </p:style>
-        <p:txBody>
-          <a:bodyPr lIns="0" rIns="0" tIns="0" bIns="0" anchor="t">
-            <a:spAutoFit/>
-          </a:bodyPr>
           <a:p>
             <a:pPr>
               <a:lnSpc>
@@ -3063,21 +3032,44 @@
               <a:buNone/>
             </a:pPr>
             <a:r>
-              <a:rPr b="0" lang="en-US" sz="1300" spc="-1" strike="noStrike">
-                <a:solidFill>
-                  <a:srgbClr val="6b6478"/>
-                </a:solidFill>
-                <a:latin typeface="Arial"/>
-                <a:ea typeface="DejaVu Sans"/>
-              </a:rPr>
-              <a:t>Tutorial · ~60 min prezentacji + sesja pytań · interaktywna sesja anotacyjna</a:t>
-            </a:r>
-            <a:endParaRPr b="0" lang="pl-PL" sz="1300" spc="-1" strike="noStrike">
-              <a:latin typeface="Arial"/>
-            </a:endParaRPr>
-          </a:p>
-        </p:txBody>
-      </p:sp>
+              <a:rPr b="1" lang="en-US" sz="1600" spc="-1" strike="noStrike">
+                <a:solidFill>
+                  <a:srgbClr val="00befe"/>
+                </a:solidFill>
+                <a:latin typeface="Arial"/>
+                <a:ea typeface="DejaVu Sans"/>
+              </a:rPr>
+              <a:t>Marta Murzyn – Centrum Wspierania Rodzin “Rodzinna Warszawa”</a:t>
+            </a:r>
+            <a:endParaRPr b="0" lang="pl-PL" sz="1600" spc="-1" strike="noStrike">
+              <a:latin typeface="Arial"/>
+            </a:endParaRPr>
+          </a:p>
+        </p:txBody>
+      </p:sp>
+      <p:pic>
+        <p:nvPicPr>
+          <p:cNvPr id="46" name="" descr=""/>
+          <p:cNvPicPr/>
+          <p:nvPr/>
+        </p:nvPicPr>
+        <p:blipFill>
+          <a:blip r:embed="rId1"/>
+          <a:stretch/>
+        </p:blipFill>
+        <p:spPr>
+          <a:xfrm>
+            <a:off x="10983960" y="6336000"/>
+            <a:ext cx="1062000" cy="597240"/>
+          </a:xfrm>
+          <a:prstGeom prst="rect">
+            <a:avLst/>
+          </a:prstGeom>
+          <a:ln w="0">
+            <a:noFill/>
+          </a:ln>
+        </p:spPr>
+      </p:pic>
     </p:spTree>
   </p:cSld>
   <mc:AlternateContent>
@@ -3117,14 +3109,14 @@
       </p:grpSpPr>
       <p:sp>
         <p:nvSpPr>
-          <p:cNvPr id="179" name="TextBox 1"/>
+          <p:cNvPr id="187" name="TextBox 1"/>
           <p:cNvSpPr/>
           <p:nvPr/>
         </p:nvSpPr>
         <p:spPr>
           <a:xfrm>
             <a:off x="768240" y="420480"/>
-            <a:ext cx="10606320" cy="441720"/>
+            <a:ext cx="10605600" cy="441360"/>
           </a:xfrm>
           <a:prstGeom prst="rect">
             <a:avLst/>
@@ -3169,14 +3161,14 @@
       </p:sp>
       <p:sp>
         <p:nvSpPr>
-          <p:cNvPr id="180" name="Rectangle 2"/>
+          <p:cNvPr id="188" name="Rectangle 2"/>
           <p:cNvSpPr/>
           <p:nvPr/>
         </p:nvSpPr>
         <p:spPr>
           <a:xfrm>
             <a:off x="768240" y="1170360"/>
-            <a:ext cx="1370880" cy="43560"/>
+            <a:ext cx="1370160" cy="42840"/>
           </a:xfrm>
           <a:prstGeom prst="rect">
             <a:avLst/>
@@ -3210,14 +3202,14 @@
       </p:sp>
       <p:sp>
         <p:nvSpPr>
-          <p:cNvPr id="181" name="TextBox 3"/>
+          <p:cNvPr id="189" name="TextBox 3"/>
           <p:cNvSpPr/>
           <p:nvPr/>
         </p:nvSpPr>
         <p:spPr>
           <a:xfrm>
             <a:off x="768240" y="1298520"/>
-            <a:ext cx="10606320" cy="228240"/>
+            <a:ext cx="10605600" cy="227880"/>
           </a:xfrm>
           <a:prstGeom prst="rect">
             <a:avLst/>
@@ -3262,14 +3254,14 @@
       </p:sp>
       <p:sp>
         <p:nvSpPr>
-          <p:cNvPr id="182" name="Rectangle 4"/>
+          <p:cNvPr id="190" name="Rectangle 4"/>
           <p:cNvSpPr/>
           <p:nvPr/>
         </p:nvSpPr>
         <p:spPr>
           <a:xfrm>
             <a:off x="0" y="6437520"/>
-            <a:ext cx="12191040" cy="14400"/>
+            <a:ext cx="12190320" cy="13680"/>
           </a:xfrm>
           <a:prstGeom prst="rect">
             <a:avLst/>
@@ -3303,14 +3295,14 @@
       </p:sp>
       <p:sp>
         <p:nvSpPr>
-          <p:cNvPr id="183" name="TextBox 5"/>
+          <p:cNvPr id="191" name="TextBox 5"/>
           <p:cNvSpPr/>
           <p:nvPr/>
         </p:nvSpPr>
         <p:spPr>
           <a:xfrm>
             <a:off x="768240" y="6473880"/>
-            <a:ext cx="8228880" cy="137160"/>
+            <a:ext cx="8228160" cy="136800"/>
           </a:xfrm>
           <a:prstGeom prst="rect">
             <a:avLst/>
@@ -3355,14 +3347,14 @@
       </p:sp>
       <p:sp>
         <p:nvSpPr>
-          <p:cNvPr id="184" name="TextBox 6"/>
+          <p:cNvPr id="192" name="TextBox 6"/>
           <p:cNvSpPr/>
           <p:nvPr/>
         </p:nvSpPr>
         <p:spPr>
           <a:xfrm>
             <a:off x="10607040" y="6473880"/>
-            <a:ext cx="822240" cy="137160"/>
+            <a:ext cx="821520" cy="136800"/>
           </a:xfrm>
           <a:prstGeom prst="rect">
             <a:avLst/>
@@ -3407,14 +3399,14 @@
       </p:sp>
       <p:sp>
         <p:nvSpPr>
-          <p:cNvPr id="185" name="Rounded Rectangle 7"/>
+          <p:cNvPr id="193" name="Rounded Rectangle 7"/>
           <p:cNvSpPr/>
           <p:nvPr/>
         </p:nvSpPr>
         <p:spPr>
           <a:xfrm>
             <a:off x="768240" y="1828800"/>
-            <a:ext cx="5028480" cy="1462320"/>
+            <a:ext cx="5027760" cy="1461600"/>
           </a:xfrm>
           <a:prstGeom prst="roundRect">
             <a:avLst>
@@ -3450,14 +3442,14 @@
       </p:sp>
       <p:sp>
         <p:nvSpPr>
-          <p:cNvPr id="186" name="Rectangle 8"/>
+          <p:cNvPr id="194" name="Rectangle 8"/>
           <p:cNvSpPr/>
           <p:nvPr/>
         </p:nvSpPr>
         <p:spPr>
           <a:xfrm>
             <a:off x="768240" y="1828800"/>
-            <a:ext cx="50040" cy="1462320"/>
+            <a:ext cx="49320" cy="1461600"/>
           </a:xfrm>
           <a:prstGeom prst="rect">
             <a:avLst/>
@@ -3491,14 +3483,14 @@
       </p:sp>
       <p:sp>
         <p:nvSpPr>
-          <p:cNvPr id="187" name="TextBox 9"/>
+          <p:cNvPr id="195" name="TextBox 9"/>
           <p:cNvSpPr/>
           <p:nvPr/>
         </p:nvSpPr>
         <p:spPr>
           <a:xfrm>
             <a:off x="1042560" y="1993320"/>
-            <a:ext cx="4571280" cy="243360"/>
+            <a:ext cx="4570560" cy="243000"/>
           </a:xfrm>
           <a:prstGeom prst="rect">
             <a:avLst/>
@@ -3543,14 +3535,14 @@
       </p:sp>
       <p:sp>
         <p:nvSpPr>
-          <p:cNvPr id="188" name="TextBox 10"/>
+          <p:cNvPr id="196" name="TextBox 10"/>
           <p:cNvSpPr/>
           <p:nvPr/>
         </p:nvSpPr>
         <p:spPr>
           <a:xfrm>
             <a:off x="1042560" y="2423160"/>
-            <a:ext cx="4571280" cy="435600"/>
+            <a:ext cx="4570560" cy="435240"/>
           </a:xfrm>
           <a:prstGeom prst="rect">
             <a:avLst/>
@@ -3595,14 +3587,14 @@
       </p:sp>
       <p:sp>
         <p:nvSpPr>
-          <p:cNvPr id="189" name="Rounded Rectangle 11"/>
+          <p:cNvPr id="197" name="Rounded Rectangle 11"/>
           <p:cNvSpPr/>
           <p:nvPr/>
         </p:nvSpPr>
         <p:spPr>
           <a:xfrm>
             <a:off x="6400800" y="1828800"/>
-            <a:ext cx="5028480" cy="1462320"/>
+            <a:ext cx="5027760" cy="1461600"/>
           </a:xfrm>
           <a:prstGeom prst="roundRect">
             <a:avLst>
@@ -3638,14 +3630,14 @@
       </p:sp>
       <p:sp>
         <p:nvSpPr>
-          <p:cNvPr id="190" name="Rectangle 12"/>
+          <p:cNvPr id="198" name="Rectangle 12"/>
           <p:cNvSpPr/>
           <p:nvPr/>
         </p:nvSpPr>
         <p:spPr>
           <a:xfrm>
             <a:off x="6400800" y="1828800"/>
-            <a:ext cx="50040" cy="1462320"/>
+            <a:ext cx="49320" cy="1461600"/>
           </a:xfrm>
           <a:prstGeom prst="rect">
             <a:avLst/>
@@ -3679,14 +3671,14 @@
       </p:sp>
       <p:sp>
         <p:nvSpPr>
-          <p:cNvPr id="191" name="TextBox 13"/>
+          <p:cNvPr id="199" name="TextBox 13"/>
           <p:cNvSpPr/>
           <p:nvPr/>
         </p:nvSpPr>
         <p:spPr>
           <a:xfrm>
             <a:off x="6675120" y="1993320"/>
-            <a:ext cx="4571280" cy="243360"/>
+            <a:ext cx="4570560" cy="243000"/>
           </a:xfrm>
           <a:prstGeom prst="rect">
             <a:avLst/>
@@ -3731,14 +3723,14 @@
       </p:sp>
       <p:sp>
         <p:nvSpPr>
-          <p:cNvPr id="192" name="TextBox 14"/>
+          <p:cNvPr id="200" name="TextBox 14"/>
           <p:cNvSpPr/>
           <p:nvPr/>
         </p:nvSpPr>
         <p:spPr>
           <a:xfrm>
             <a:off x="6675120" y="2423160"/>
-            <a:ext cx="4571280" cy="435600"/>
+            <a:ext cx="4570560" cy="435240"/>
           </a:xfrm>
           <a:prstGeom prst="rect">
             <a:avLst/>
@@ -3783,14 +3775,14 @@
       </p:sp>
       <p:sp>
         <p:nvSpPr>
-          <p:cNvPr id="193" name="Rounded Rectangle 15"/>
+          <p:cNvPr id="201" name="Rounded Rectangle 15"/>
           <p:cNvSpPr/>
           <p:nvPr/>
         </p:nvSpPr>
         <p:spPr>
           <a:xfrm>
             <a:off x="768240" y="3566160"/>
-            <a:ext cx="5028480" cy="1462320"/>
+            <a:ext cx="5027760" cy="1461600"/>
           </a:xfrm>
           <a:prstGeom prst="roundRect">
             <a:avLst>
@@ -3826,14 +3818,14 @@
       </p:sp>
       <p:sp>
         <p:nvSpPr>
-          <p:cNvPr id="194" name="Rectangle 16"/>
+          <p:cNvPr id="202" name="Rectangle 16"/>
           <p:cNvSpPr/>
           <p:nvPr/>
         </p:nvSpPr>
         <p:spPr>
           <a:xfrm>
             <a:off x="768240" y="3566160"/>
-            <a:ext cx="50040" cy="1462320"/>
+            <a:ext cx="49320" cy="1461600"/>
           </a:xfrm>
           <a:prstGeom prst="rect">
             <a:avLst/>
@@ -3867,14 +3859,14 @@
       </p:sp>
       <p:sp>
         <p:nvSpPr>
-          <p:cNvPr id="195" name="TextBox 17"/>
+          <p:cNvPr id="203" name="TextBox 17"/>
           <p:cNvSpPr/>
           <p:nvPr/>
         </p:nvSpPr>
         <p:spPr>
           <a:xfrm>
             <a:off x="1042560" y="3730680"/>
-            <a:ext cx="4571280" cy="243360"/>
+            <a:ext cx="4570560" cy="243000"/>
           </a:xfrm>
           <a:prstGeom prst="rect">
             <a:avLst/>
@@ -3919,14 +3911,14 @@
       </p:sp>
       <p:sp>
         <p:nvSpPr>
-          <p:cNvPr id="196" name="TextBox 18"/>
+          <p:cNvPr id="204" name="TextBox 18"/>
           <p:cNvSpPr/>
           <p:nvPr/>
         </p:nvSpPr>
         <p:spPr>
           <a:xfrm>
             <a:off x="1042560" y="4160520"/>
-            <a:ext cx="4571280" cy="217800"/>
+            <a:ext cx="4570560" cy="217440"/>
           </a:xfrm>
           <a:prstGeom prst="rect">
             <a:avLst/>
@@ -3971,14 +3963,14 @@
       </p:sp>
       <p:sp>
         <p:nvSpPr>
-          <p:cNvPr id="197" name="Rounded Rectangle 19"/>
+          <p:cNvPr id="205" name="Rounded Rectangle 19"/>
           <p:cNvSpPr/>
           <p:nvPr/>
         </p:nvSpPr>
         <p:spPr>
           <a:xfrm>
             <a:off x="6400800" y="3566160"/>
-            <a:ext cx="5028480" cy="1462320"/>
+            <a:ext cx="5027760" cy="1461600"/>
           </a:xfrm>
           <a:prstGeom prst="roundRect">
             <a:avLst>
@@ -4014,14 +4006,14 @@
       </p:sp>
       <p:sp>
         <p:nvSpPr>
-          <p:cNvPr id="198" name="Rectangle 20"/>
+          <p:cNvPr id="206" name="Rectangle 20"/>
           <p:cNvSpPr/>
           <p:nvPr/>
         </p:nvSpPr>
         <p:spPr>
           <a:xfrm>
             <a:off x="6400800" y="3566160"/>
-            <a:ext cx="50040" cy="1462320"/>
+            <a:ext cx="49320" cy="1461600"/>
           </a:xfrm>
           <a:prstGeom prst="rect">
             <a:avLst/>
@@ -4055,14 +4047,14 @@
       </p:sp>
       <p:sp>
         <p:nvSpPr>
-          <p:cNvPr id="199" name="TextBox 21"/>
+          <p:cNvPr id="207" name="TextBox 21"/>
           <p:cNvSpPr/>
           <p:nvPr/>
         </p:nvSpPr>
         <p:spPr>
           <a:xfrm>
             <a:off x="6675120" y="3730680"/>
-            <a:ext cx="4571280" cy="243360"/>
+            <a:ext cx="4570560" cy="243000"/>
           </a:xfrm>
           <a:prstGeom prst="rect">
             <a:avLst/>
@@ -4107,14 +4099,14 @@
       </p:sp>
       <p:sp>
         <p:nvSpPr>
-          <p:cNvPr id="200" name="TextBox 22"/>
+          <p:cNvPr id="208" name="TextBox 22"/>
           <p:cNvSpPr/>
           <p:nvPr/>
         </p:nvSpPr>
         <p:spPr>
           <a:xfrm>
             <a:off x="6675120" y="4160520"/>
-            <a:ext cx="4571280" cy="217800"/>
+            <a:ext cx="4570560" cy="217440"/>
           </a:xfrm>
           <a:prstGeom prst="rect">
             <a:avLst/>
@@ -4196,14 +4188,14 @@
       </p:grpSpPr>
       <p:sp>
         <p:nvSpPr>
-          <p:cNvPr id="201" name="TextBox 1"/>
+          <p:cNvPr id="209" name="TextBox 1"/>
           <p:cNvSpPr/>
           <p:nvPr/>
         </p:nvSpPr>
         <p:spPr>
           <a:xfrm>
             <a:off x="768240" y="420480"/>
-            <a:ext cx="10606320" cy="441720"/>
+            <a:ext cx="10605600" cy="441360"/>
           </a:xfrm>
           <a:prstGeom prst="rect">
             <a:avLst/>
@@ -4248,14 +4240,14 @@
       </p:sp>
       <p:sp>
         <p:nvSpPr>
-          <p:cNvPr id="202" name="Rectangle 2"/>
+          <p:cNvPr id="210" name="Rectangle 2"/>
           <p:cNvSpPr/>
           <p:nvPr/>
         </p:nvSpPr>
         <p:spPr>
           <a:xfrm>
             <a:off x="768240" y="1170360"/>
-            <a:ext cx="1370880" cy="43560"/>
+            <a:ext cx="1370160" cy="42840"/>
           </a:xfrm>
           <a:prstGeom prst="rect">
             <a:avLst/>
@@ -4289,14 +4281,14 @@
       </p:sp>
       <p:sp>
         <p:nvSpPr>
-          <p:cNvPr id="203" name="Rectangle 3"/>
+          <p:cNvPr id="211" name="Rectangle 3"/>
           <p:cNvSpPr/>
           <p:nvPr/>
         </p:nvSpPr>
         <p:spPr>
           <a:xfrm>
             <a:off x="0" y="6437520"/>
-            <a:ext cx="12191040" cy="14400"/>
+            <a:ext cx="12190320" cy="13680"/>
           </a:xfrm>
           <a:prstGeom prst="rect">
             <a:avLst/>
@@ -4330,14 +4322,14 @@
       </p:sp>
       <p:sp>
         <p:nvSpPr>
-          <p:cNvPr id="204" name="TextBox 4"/>
+          <p:cNvPr id="212" name="TextBox 4"/>
           <p:cNvSpPr/>
           <p:nvPr/>
         </p:nvSpPr>
         <p:spPr>
           <a:xfrm>
             <a:off x="768240" y="6473880"/>
-            <a:ext cx="8228880" cy="137160"/>
+            <a:ext cx="8228160" cy="136800"/>
           </a:xfrm>
           <a:prstGeom prst="rect">
             <a:avLst/>
@@ -4382,14 +4374,14 @@
       </p:sp>
       <p:sp>
         <p:nvSpPr>
-          <p:cNvPr id="205" name="TextBox 5"/>
+          <p:cNvPr id="213" name="TextBox 5"/>
           <p:cNvSpPr/>
           <p:nvPr/>
         </p:nvSpPr>
         <p:spPr>
           <a:xfrm>
             <a:off x="10607040" y="6473880"/>
-            <a:ext cx="822240" cy="137160"/>
+            <a:ext cx="821520" cy="136800"/>
           </a:xfrm>
           <a:prstGeom prst="rect">
             <a:avLst/>
@@ -4434,14 +4426,14 @@
       </p:sp>
       <p:sp>
         <p:nvSpPr>
-          <p:cNvPr id="206" name="Rounded Rectangle 6"/>
+          <p:cNvPr id="214" name="Rounded Rectangle 6"/>
           <p:cNvSpPr/>
           <p:nvPr/>
         </p:nvSpPr>
         <p:spPr>
           <a:xfrm>
             <a:off x="768240" y="1417320"/>
-            <a:ext cx="3382560" cy="1188000"/>
+            <a:ext cx="3381840" cy="1187280"/>
           </a:xfrm>
           <a:prstGeom prst="roundRect">
             <a:avLst>
@@ -4477,14 +4469,14 @@
       </p:sp>
       <p:sp>
         <p:nvSpPr>
-          <p:cNvPr id="207" name="Rounded Rectangle 7"/>
+          <p:cNvPr id="215" name="Rounded Rectangle 7"/>
           <p:cNvSpPr/>
           <p:nvPr/>
         </p:nvSpPr>
         <p:spPr>
           <a:xfrm>
             <a:off x="768240" y="1417320"/>
-            <a:ext cx="3382560" cy="456480"/>
+            <a:ext cx="3381840" cy="455760"/>
           </a:xfrm>
           <a:prstGeom prst="roundRect">
             <a:avLst>
@@ -4520,14 +4512,14 @@
       </p:sp>
       <p:sp>
         <p:nvSpPr>
-          <p:cNvPr id="208" name="TextBox 8"/>
+          <p:cNvPr id="216" name="TextBox 8"/>
           <p:cNvSpPr/>
           <p:nvPr/>
         </p:nvSpPr>
         <p:spPr>
           <a:xfrm>
             <a:off x="768240" y="1481400"/>
-            <a:ext cx="3382560" cy="213120"/>
+            <a:ext cx="3381840" cy="212760"/>
           </a:xfrm>
           <a:prstGeom prst="rect">
             <a:avLst/>
@@ -4562,7 +4554,7 @@
                 <a:latin typeface="Arial"/>
                 <a:ea typeface="DejaVu Sans"/>
               </a:rPr>
-              <a:t>Augmentacja</a:t>
+              <a:t>Augmentacja i labelowanie</a:t>
             </a:r>
             <a:endParaRPr b="0" lang="pl-PL" sz="1400" spc="-1" strike="noStrike">
               <a:latin typeface="Arial"/>
@@ -4572,14 +4564,14 @@
       </p:sp>
       <p:sp>
         <p:nvSpPr>
-          <p:cNvPr id="209" name="TextBox 9"/>
+          <p:cNvPr id="217" name="TextBox 9"/>
           <p:cNvSpPr/>
           <p:nvPr/>
         </p:nvSpPr>
         <p:spPr>
           <a:xfrm>
             <a:off x="951120" y="2011680"/>
-            <a:ext cx="3016800" cy="198000"/>
+            <a:ext cx="3016080" cy="197640"/>
           </a:xfrm>
           <a:prstGeom prst="rect">
             <a:avLst/>
@@ -4624,14 +4616,14 @@
       </p:sp>
       <p:sp>
         <p:nvSpPr>
-          <p:cNvPr id="210" name="Rounded Rectangle 10"/>
+          <p:cNvPr id="218" name="Rounded Rectangle 10"/>
           <p:cNvSpPr/>
           <p:nvPr/>
         </p:nvSpPr>
         <p:spPr>
           <a:xfrm>
             <a:off x="4380120" y="1417320"/>
-            <a:ext cx="3382560" cy="1188000"/>
+            <a:ext cx="3381840" cy="1187280"/>
           </a:xfrm>
           <a:prstGeom prst="roundRect">
             <a:avLst>
@@ -4667,14 +4659,14 @@
       </p:sp>
       <p:sp>
         <p:nvSpPr>
-          <p:cNvPr id="211" name="Rounded Rectangle 11"/>
+          <p:cNvPr id="219" name="Rounded Rectangle 11"/>
           <p:cNvSpPr/>
           <p:nvPr/>
         </p:nvSpPr>
         <p:spPr>
           <a:xfrm>
             <a:off x="4380120" y="1417320"/>
-            <a:ext cx="3382560" cy="456480"/>
+            <a:ext cx="3381840" cy="455760"/>
           </a:xfrm>
           <a:prstGeom prst="roundRect">
             <a:avLst>
@@ -4710,14 +4702,14 @@
       </p:sp>
       <p:sp>
         <p:nvSpPr>
-          <p:cNvPr id="212" name="TextBox 12"/>
+          <p:cNvPr id="220" name="TextBox 12"/>
           <p:cNvSpPr/>
           <p:nvPr/>
         </p:nvSpPr>
         <p:spPr>
           <a:xfrm>
             <a:off x="4380120" y="1481400"/>
-            <a:ext cx="3382560" cy="213120"/>
+            <a:ext cx="3381840" cy="212760"/>
           </a:xfrm>
           <a:prstGeom prst="rect">
             <a:avLst/>
@@ -4762,14 +4754,14 @@
       </p:sp>
       <p:sp>
         <p:nvSpPr>
-          <p:cNvPr id="213" name="TextBox 13"/>
+          <p:cNvPr id="221" name="TextBox 13"/>
           <p:cNvSpPr/>
           <p:nvPr/>
         </p:nvSpPr>
         <p:spPr>
           <a:xfrm>
             <a:off x="4563000" y="2011680"/>
-            <a:ext cx="3016800" cy="198000"/>
+            <a:ext cx="3016080" cy="197640"/>
           </a:xfrm>
           <a:prstGeom prst="rect">
             <a:avLst/>
@@ -4814,14 +4806,14 @@
       </p:sp>
       <p:sp>
         <p:nvSpPr>
-          <p:cNvPr id="214" name="Rounded Rectangle 14"/>
+          <p:cNvPr id="222" name="Rounded Rectangle 14"/>
           <p:cNvSpPr/>
           <p:nvPr/>
         </p:nvSpPr>
         <p:spPr>
           <a:xfrm>
             <a:off x="7992000" y="1417320"/>
-            <a:ext cx="3382560" cy="1188000"/>
+            <a:ext cx="3381840" cy="1187280"/>
           </a:xfrm>
           <a:prstGeom prst="roundRect">
             <a:avLst>
@@ -4857,14 +4849,14 @@
       </p:sp>
       <p:sp>
         <p:nvSpPr>
-          <p:cNvPr id="215" name="Rounded Rectangle 15"/>
+          <p:cNvPr id="223" name="Rounded Rectangle 15"/>
           <p:cNvSpPr/>
           <p:nvPr/>
         </p:nvSpPr>
         <p:spPr>
           <a:xfrm>
             <a:off x="7992000" y="1417320"/>
-            <a:ext cx="3382560" cy="456480"/>
+            <a:ext cx="3381840" cy="455760"/>
           </a:xfrm>
           <a:prstGeom prst="roundRect">
             <a:avLst>
@@ -4900,14 +4892,14 @@
       </p:sp>
       <p:sp>
         <p:nvSpPr>
-          <p:cNvPr id="216" name="TextBox 16"/>
+          <p:cNvPr id="224" name="TextBox 16"/>
           <p:cNvSpPr/>
           <p:nvPr/>
         </p:nvSpPr>
         <p:spPr>
           <a:xfrm>
             <a:off x="7992000" y="1481400"/>
-            <a:ext cx="3382560" cy="213120"/>
+            <a:ext cx="3381840" cy="212760"/>
           </a:xfrm>
           <a:prstGeom prst="rect">
             <a:avLst/>
@@ -4952,14 +4944,14 @@
       </p:sp>
       <p:sp>
         <p:nvSpPr>
-          <p:cNvPr id="217" name="TextBox 17"/>
+          <p:cNvPr id="225" name="TextBox 17"/>
           <p:cNvSpPr/>
           <p:nvPr/>
         </p:nvSpPr>
         <p:spPr>
           <a:xfrm>
             <a:off x="8174880" y="2011680"/>
-            <a:ext cx="3016800" cy="198000"/>
+            <a:ext cx="3016080" cy="197640"/>
           </a:xfrm>
           <a:prstGeom prst="rect">
             <a:avLst/>
@@ -5004,14 +4996,14 @@
       </p:sp>
       <p:sp>
         <p:nvSpPr>
-          <p:cNvPr id="218" name="TextBox 18"/>
+          <p:cNvPr id="226" name="TextBox 18"/>
           <p:cNvSpPr/>
           <p:nvPr/>
         </p:nvSpPr>
         <p:spPr>
           <a:xfrm>
             <a:off x="768240" y="3017520"/>
-            <a:ext cx="10606320" cy="213120"/>
+            <a:ext cx="10605600" cy="212760"/>
           </a:xfrm>
           <a:prstGeom prst="rect">
             <a:avLst/>
@@ -5056,14 +5048,14 @@
       </p:sp>
       <p:sp>
         <p:nvSpPr>
-          <p:cNvPr id="219" name="Rounded Rectangle 19"/>
+          <p:cNvPr id="227" name="Rounded Rectangle 19"/>
           <p:cNvSpPr/>
           <p:nvPr/>
         </p:nvSpPr>
         <p:spPr>
           <a:xfrm>
             <a:off x="768240" y="3474720"/>
-            <a:ext cx="1206360" cy="639360"/>
+            <a:ext cx="1205640" cy="638640"/>
           </a:xfrm>
           <a:prstGeom prst="roundRect">
             <a:avLst>
@@ -5099,14 +5091,14 @@
       </p:sp>
       <p:sp>
         <p:nvSpPr>
-          <p:cNvPr id="220" name="TextBox 20"/>
+          <p:cNvPr id="228" name="TextBox 20"/>
           <p:cNvSpPr/>
           <p:nvPr/>
         </p:nvSpPr>
         <p:spPr>
           <a:xfrm>
             <a:off x="804600" y="3721680"/>
-            <a:ext cx="1133280" cy="145080"/>
+            <a:ext cx="1132560" cy="144360"/>
           </a:xfrm>
           <a:prstGeom prst="rect">
             <a:avLst/>
@@ -5151,14 +5143,14 @@
       </p:sp>
       <p:sp>
         <p:nvSpPr>
-          <p:cNvPr id="221" name="TextBox 21"/>
+          <p:cNvPr id="229" name="TextBox 21"/>
           <p:cNvSpPr/>
           <p:nvPr/>
         </p:nvSpPr>
         <p:spPr>
           <a:xfrm>
             <a:off x="1956960" y="3672360"/>
-            <a:ext cx="163800" cy="243720"/>
+            <a:ext cx="163080" cy="243000"/>
           </a:xfrm>
           <a:prstGeom prst="rect">
             <a:avLst/>
@@ -5203,14 +5195,14 @@
       </p:sp>
       <p:sp>
         <p:nvSpPr>
-          <p:cNvPr id="222" name="Rounded Rectangle 22"/>
+          <p:cNvPr id="230" name="Rounded Rectangle 22"/>
           <p:cNvSpPr/>
           <p:nvPr/>
         </p:nvSpPr>
         <p:spPr>
           <a:xfrm>
             <a:off x="2103120" y="3474720"/>
-            <a:ext cx="1206360" cy="639360"/>
+            <a:ext cx="1205640" cy="638640"/>
           </a:xfrm>
           <a:prstGeom prst="roundRect">
             <a:avLst>
@@ -5246,14 +5238,14 @@
       </p:sp>
       <p:sp>
         <p:nvSpPr>
-          <p:cNvPr id="223" name="TextBox 23"/>
+          <p:cNvPr id="231" name="TextBox 23"/>
           <p:cNvSpPr/>
           <p:nvPr/>
         </p:nvSpPr>
         <p:spPr>
           <a:xfrm>
             <a:off x="2139840" y="3721680"/>
-            <a:ext cx="1133280" cy="145080"/>
+            <a:ext cx="1132560" cy="144360"/>
           </a:xfrm>
           <a:prstGeom prst="rect">
             <a:avLst/>
@@ -5298,14 +5290,14 @@
       </p:sp>
       <p:sp>
         <p:nvSpPr>
-          <p:cNvPr id="224" name="TextBox 24"/>
+          <p:cNvPr id="232" name="TextBox 24"/>
           <p:cNvSpPr/>
           <p:nvPr/>
         </p:nvSpPr>
         <p:spPr>
           <a:xfrm>
             <a:off x="3291840" y="3672360"/>
-            <a:ext cx="163800" cy="243720"/>
+            <a:ext cx="163080" cy="243000"/>
           </a:xfrm>
           <a:prstGeom prst="rect">
             <a:avLst/>
@@ -5350,14 +5342,14 @@
       </p:sp>
       <p:sp>
         <p:nvSpPr>
-          <p:cNvPr id="225" name="Rounded Rectangle 25"/>
+          <p:cNvPr id="233" name="Rounded Rectangle 25"/>
           <p:cNvSpPr/>
           <p:nvPr/>
         </p:nvSpPr>
         <p:spPr>
           <a:xfrm>
             <a:off x="3438000" y="3474720"/>
-            <a:ext cx="1206360" cy="639360"/>
+            <a:ext cx="1205640" cy="638640"/>
           </a:xfrm>
           <a:prstGeom prst="roundRect">
             <a:avLst>
@@ -5393,14 +5385,14 @@
       </p:sp>
       <p:sp>
         <p:nvSpPr>
-          <p:cNvPr id="226" name="TextBox 26"/>
+          <p:cNvPr id="234" name="TextBox 26"/>
           <p:cNvSpPr/>
           <p:nvPr/>
         </p:nvSpPr>
         <p:spPr>
           <a:xfrm>
             <a:off x="3474720" y="3721680"/>
-            <a:ext cx="1133280" cy="145080"/>
+            <a:ext cx="1132560" cy="144360"/>
           </a:xfrm>
           <a:prstGeom prst="rect">
             <a:avLst/>
@@ -5445,14 +5437,14 @@
       </p:sp>
       <p:sp>
         <p:nvSpPr>
-          <p:cNvPr id="227" name="TextBox 27"/>
+          <p:cNvPr id="235" name="TextBox 27"/>
           <p:cNvSpPr/>
           <p:nvPr/>
         </p:nvSpPr>
         <p:spPr>
           <a:xfrm>
             <a:off x="4626720" y="3672360"/>
-            <a:ext cx="163800" cy="243720"/>
+            <a:ext cx="163080" cy="243000"/>
           </a:xfrm>
           <a:prstGeom prst="rect">
             <a:avLst/>
@@ -5497,14 +5489,14 @@
       </p:sp>
       <p:sp>
         <p:nvSpPr>
-          <p:cNvPr id="228" name="Rounded Rectangle 28"/>
+          <p:cNvPr id="236" name="Rounded Rectangle 28"/>
           <p:cNvSpPr/>
           <p:nvPr/>
         </p:nvSpPr>
         <p:spPr>
           <a:xfrm>
             <a:off x="4773240" y="3474720"/>
-            <a:ext cx="1206360" cy="639360"/>
+            <a:ext cx="1205640" cy="638640"/>
           </a:xfrm>
           <a:prstGeom prst="roundRect">
             <a:avLst>
@@ -5540,14 +5532,14 @@
       </p:sp>
       <p:sp>
         <p:nvSpPr>
-          <p:cNvPr id="229" name="TextBox 29"/>
+          <p:cNvPr id="237" name="TextBox 29"/>
           <p:cNvSpPr/>
           <p:nvPr/>
         </p:nvSpPr>
         <p:spPr>
           <a:xfrm>
             <a:off x="4809600" y="3649320"/>
-            <a:ext cx="1133280" cy="289800"/>
+            <a:ext cx="1132560" cy="289080"/>
           </a:xfrm>
           <a:prstGeom prst="rect">
             <a:avLst/>
@@ -5592,14 +5584,14 @@
       </p:sp>
       <p:sp>
         <p:nvSpPr>
-          <p:cNvPr id="230" name="TextBox 30"/>
+          <p:cNvPr id="238" name="TextBox 30"/>
           <p:cNvSpPr/>
           <p:nvPr/>
         </p:nvSpPr>
         <p:spPr>
           <a:xfrm>
             <a:off x="5961960" y="3672360"/>
-            <a:ext cx="163800" cy="243720"/>
+            <a:ext cx="163080" cy="243000"/>
           </a:xfrm>
           <a:prstGeom prst="rect">
             <a:avLst/>
@@ -5644,14 +5636,14 @@
       </p:sp>
       <p:sp>
         <p:nvSpPr>
-          <p:cNvPr id="231" name="Rounded Rectangle 31"/>
+          <p:cNvPr id="239" name="Rounded Rectangle 31"/>
           <p:cNvSpPr/>
           <p:nvPr/>
         </p:nvSpPr>
         <p:spPr>
           <a:xfrm>
             <a:off x="6108120" y="3474720"/>
-            <a:ext cx="1206360" cy="639360"/>
+            <a:ext cx="1205640" cy="638640"/>
           </a:xfrm>
           <a:prstGeom prst="roundRect">
             <a:avLst>
@@ -5687,14 +5679,14 @@
       </p:sp>
       <p:sp>
         <p:nvSpPr>
-          <p:cNvPr id="232" name="TextBox 32"/>
+          <p:cNvPr id="240" name="TextBox 32"/>
           <p:cNvSpPr/>
           <p:nvPr/>
         </p:nvSpPr>
         <p:spPr>
           <a:xfrm>
             <a:off x="6144840" y="3721680"/>
-            <a:ext cx="1133280" cy="145080"/>
+            <a:ext cx="1132560" cy="144360"/>
           </a:xfrm>
           <a:prstGeom prst="rect">
             <a:avLst/>
@@ -5739,14 +5731,14 @@
       </p:sp>
       <p:sp>
         <p:nvSpPr>
-          <p:cNvPr id="233" name="TextBox 33"/>
+          <p:cNvPr id="241" name="TextBox 33"/>
           <p:cNvSpPr/>
           <p:nvPr/>
         </p:nvSpPr>
         <p:spPr>
           <a:xfrm>
             <a:off x="7296840" y="3672360"/>
-            <a:ext cx="163800" cy="243720"/>
+            <a:ext cx="163080" cy="243000"/>
           </a:xfrm>
           <a:prstGeom prst="rect">
             <a:avLst/>
@@ -5791,14 +5783,14 @@
       </p:sp>
       <p:sp>
         <p:nvSpPr>
-          <p:cNvPr id="234" name="Rounded Rectangle 34"/>
+          <p:cNvPr id="242" name="Rounded Rectangle 34"/>
           <p:cNvSpPr/>
           <p:nvPr/>
         </p:nvSpPr>
         <p:spPr>
           <a:xfrm>
             <a:off x="7443360" y="3474720"/>
-            <a:ext cx="1206360" cy="639360"/>
+            <a:ext cx="1205640" cy="638640"/>
           </a:xfrm>
           <a:prstGeom prst="roundRect">
             <a:avLst>
@@ -5834,14 +5826,14 @@
       </p:sp>
       <p:sp>
         <p:nvSpPr>
-          <p:cNvPr id="235" name="TextBox 35"/>
+          <p:cNvPr id="243" name="TextBox 35"/>
           <p:cNvSpPr/>
           <p:nvPr/>
         </p:nvSpPr>
         <p:spPr>
           <a:xfrm>
             <a:off x="7479720" y="3721680"/>
-            <a:ext cx="1133280" cy="145080"/>
+            <a:ext cx="1132560" cy="144360"/>
           </a:xfrm>
           <a:prstGeom prst="rect">
             <a:avLst/>
@@ -5886,14 +5878,14 @@
       </p:sp>
       <p:sp>
         <p:nvSpPr>
-          <p:cNvPr id="236" name="TextBox 36"/>
+          <p:cNvPr id="244" name="TextBox 36"/>
           <p:cNvSpPr/>
           <p:nvPr/>
         </p:nvSpPr>
         <p:spPr>
           <a:xfrm>
             <a:off x="8632080" y="3672360"/>
-            <a:ext cx="163800" cy="243720"/>
+            <a:ext cx="163080" cy="243000"/>
           </a:xfrm>
           <a:prstGeom prst="rect">
             <a:avLst/>
@@ -5938,14 +5930,14 @@
       </p:sp>
       <p:sp>
         <p:nvSpPr>
-          <p:cNvPr id="237" name="Rounded Rectangle 37"/>
+          <p:cNvPr id="245" name="Rounded Rectangle 37"/>
           <p:cNvSpPr/>
           <p:nvPr/>
         </p:nvSpPr>
         <p:spPr>
           <a:xfrm>
             <a:off x="8778240" y="3474720"/>
-            <a:ext cx="1206360" cy="639360"/>
+            <a:ext cx="1205640" cy="638640"/>
           </a:xfrm>
           <a:prstGeom prst="roundRect">
             <a:avLst>
@@ -5981,14 +5973,14 @@
       </p:sp>
       <p:sp>
         <p:nvSpPr>
-          <p:cNvPr id="238" name="TextBox 38"/>
+          <p:cNvPr id="246" name="TextBox 38"/>
           <p:cNvSpPr/>
           <p:nvPr/>
         </p:nvSpPr>
         <p:spPr>
           <a:xfrm>
             <a:off x="8814960" y="3721680"/>
-            <a:ext cx="1133280" cy="145080"/>
+            <a:ext cx="1132560" cy="144360"/>
           </a:xfrm>
           <a:prstGeom prst="rect">
             <a:avLst/>
@@ -6033,14 +6025,14 @@
       </p:sp>
       <p:sp>
         <p:nvSpPr>
-          <p:cNvPr id="239" name="TextBox 39"/>
+          <p:cNvPr id="247" name="TextBox 39"/>
           <p:cNvSpPr/>
           <p:nvPr/>
         </p:nvSpPr>
         <p:spPr>
           <a:xfrm>
             <a:off x="9966960" y="3672360"/>
-            <a:ext cx="163800" cy="243720"/>
+            <a:ext cx="163080" cy="243000"/>
           </a:xfrm>
           <a:prstGeom prst="rect">
             <a:avLst/>
@@ -6085,14 +6077,14 @@
       </p:sp>
       <p:sp>
         <p:nvSpPr>
-          <p:cNvPr id="240" name="Rounded Rectangle 40"/>
+          <p:cNvPr id="248" name="Rounded Rectangle 40"/>
           <p:cNvSpPr/>
           <p:nvPr/>
         </p:nvSpPr>
         <p:spPr>
           <a:xfrm>
             <a:off x="10113120" y="3474720"/>
-            <a:ext cx="1206360" cy="639360"/>
+            <a:ext cx="1205640" cy="638640"/>
           </a:xfrm>
           <a:prstGeom prst="roundRect">
             <a:avLst>
@@ -6128,14 +6120,14 @@
       </p:sp>
       <p:sp>
         <p:nvSpPr>
-          <p:cNvPr id="241" name="TextBox 41"/>
+          <p:cNvPr id="249" name="TextBox 41"/>
           <p:cNvSpPr/>
           <p:nvPr/>
         </p:nvSpPr>
         <p:spPr>
           <a:xfrm>
             <a:off x="10149840" y="3721680"/>
-            <a:ext cx="1133280" cy="145080"/>
+            <a:ext cx="1132560" cy="144360"/>
           </a:xfrm>
           <a:prstGeom prst="rect">
             <a:avLst/>
@@ -6180,14 +6172,14 @@
       </p:sp>
       <p:sp>
         <p:nvSpPr>
-          <p:cNvPr id="242" name="Rounded Rectangle 42"/>
+          <p:cNvPr id="250" name="Rounded Rectangle 42"/>
           <p:cNvSpPr/>
           <p:nvPr/>
         </p:nvSpPr>
         <p:spPr>
           <a:xfrm>
             <a:off x="768240" y="4389120"/>
-            <a:ext cx="10652040" cy="685080"/>
+            <a:ext cx="10651320" cy="684360"/>
           </a:xfrm>
           <a:prstGeom prst="roundRect">
             <a:avLst>
@@ -6223,14 +6215,14 @@
       </p:sp>
       <p:sp>
         <p:nvSpPr>
-          <p:cNvPr id="243" name="Rectangle 43"/>
+          <p:cNvPr id="251" name="Rectangle 43"/>
           <p:cNvSpPr/>
           <p:nvPr/>
         </p:nvSpPr>
         <p:spPr>
           <a:xfrm>
             <a:off x="768240" y="4389120"/>
-            <a:ext cx="50040" cy="685080"/>
+            <a:ext cx="49320" cy="684360"/>
           </a:xfrm>
           <a:prstGeom prst="rect">
             <a:avLst/>
@@ -6264,14 +6256,14 @@
       </p:sp>
       <p:sp>
         <p:nvSpPr>
-          <p:cNvPr id="244" name="TextBox 44"/>
+          <p:cNvPr id="252" name="TextBox 44"/>
           <p:cNvSpPr/>
           <p:nvPr/>
         </p:nvSpPr>
         <p:spPr>
           <a:xfrm>
             <a:off x="1024200" y="4542120"/>
-            <a:ext cx="10194840" cy="415800"/>
+            <a:ext cx="10194120" cy="415080"/>
           </a:xfrm>
           <a:prstGeom prst="rect">
             <a:avLst/>
@@ -6353,14 +6345,14 @@
       </p:grpSpPr>
       <p:sp>
         <p:nvSpPr>
-          <p:cNvPr id="245" name="Google Shape;99;p2"/>
+          <p:cNvPr id="253" name="Google Shape;99;p2"/>
           <p:cNvSpPr/>
           <p:nvPr/>
         </p:nvSpPr>
         <p:spPr>
           <a:xfrm>
             <a:off x="683280" y="495000"/>
-            <a:ext cx="11111400" cy="965520"/>
+            <a:ext cx="11110680" cy="964800"/>
           </a:xfrm>
           <a:prstGeom prst="rect">
             <a:avLst/>
@@ -6379,14 +6371,14 @@
       </p:sp>
       <p:sp>
         <p:nvSpPr>
-          <p:cNvPr id="246" name="Google Shape;100;p2"/>
+          <p:cNvPr id="254" name="Google Shape;100;p2"/>
           <p:cNvSpPr/>
           <p:nvPr/>
         </p:nvSpPr>
         <p:spPr>
           <a:xfrm>
             <a:off x="4010760" y="2105280"/>
-            <a:ext cx="8180640" cy="3030480"/>
+            <a:ext cx="8179920" cy="3029760"/>
           </a:xfrm>
           <a:prstGeom prst="rect">
             <a:avLst/>
@@ -6547,14 +6539,14 @@
       </p:sp>
       <p:sp>
         <p:nvSpPr>
-          <p:cNvPr id="247" name="Google Shape;101;p2"/>
+          <p:cNvPr id="255" name="Google Shape;101;p2"/>
           <p:cNvSpPr/>
           <p:nvPr/>
         </p:nvSpPr>
         <p:spPr>
           <a:xfrm>
             <a:off x="223200" y="6287400"/>
-            <a:ext cx="541800" cy="364320"/>
+            <a:ext cx="541080" cy="363600"/>
           </a:xfrm>
           <a:prstGeom prst="rect">
             <a:avLst/>
@@ -6573,14 +6565,14 @@
       </p:sp>
       <p:sp>
         <p:nvSpPr>
-          <p:cNvPr id="248" name="Google Shape;102;p2"/>
+          <p:cNvPr id="256" name="Google Shape;102;p2"/>
           <p:cNvSpPr/>
           <p:nvPr/>
         </p:nvSpPr>
         <p:spPr>
           <a:xfrm>
             <a:off x="765720" y="6287400"/>
-            <a:ext cx="4619160" cy="364320"/>
+            <a:ext cx="4618440" cy="363600"/>
           </a:xfrm>
           <a:prstGeom prst="rect">
             <a:avLst/>
@@ -6599,14 +6591,14 @@
       </p:sp>
       <p:sp>
         <p:nvSpPr>
-          <p:cNvPr id="249" name="pole tekstowe 2"/>
+          <p:cNvPr id="257" name="pole tekstowe 2"/>
           <p:cNvSpPr/>
           <p:nvPr/>
         </p:nvSpPr>
         <p:spPr>
           <a:xfrm>
             <a:off x="3049200" y="3275280"/>
-            <a:ext cx="6093000" cy="363960"/>
+            <a:ext cx="6092280" cy="363960"/>
           </a:xfrm>
           <a:prstGeom prst="rect">
             <a:avLst/>
@@ -6651,7 +6643,7 @@
       </p:sp>
       <p:pic>
         <p:nvPicPr>
-          <p:cNvPr id="250" name="Obraz 3" descr=""/>
+          <p:cNvPr id="258" name="Obraz 3" descr=""/>
           <p:cNvPicPr/>
           <p:nvPr/>
         </p:nvPicPr>
@@ -6662,7 +6654,7 @@
         <p:spPr>
           <a:xfrm>
             <a:off x="6506640" y="426240"/>
-            <a:ext cx="2635560" cy="1224000"/>
+            <a:ext cx="2634840" cy="1223280"/>
           </a:xfrm>
           <a:prstGeom prst="rect">
             <a:avLst/>
@@ -6674,7 +6666,7 @@
       </p:pic>
       <p:pic>
         <p:nvPicPr>
-          <p:cNvPr id="251" name="Obraz 5" descr=""/>
+          <p:cNvPr id="259" name="Obraz 5" descr=""/>
           <p:cNvPicPr/>
           <p:nvPr/>
         </p:nvPicPr>
@@ -6686,7 +6678,7 @@
         <p:spPr>
           <a:xfrm>
             <a:off x="500040" y="495000"/>
-            <a:ext cx="2942640" cy="5838840"/>
+            <a:ext cx="2941920" cy="5838120"/>
           </a:xfrm>
           <a:prstGeom prst="rect">
             <a:avLst/>
@@ -6698,14 +6690,14 @@
       </p:pic>
       <p:sp>
         <p:nvSpPr>
-          <p:cNvPr id="252" name="Rectangle 102"/>
+          <p:cNvPr id="260" name="Rectangle 102"/>
           <p:cNvSpPr/>
           <p:nvPr/>
         </p:nvSpPr>
         <p:spPr>
           <a:xfrm>
             <a:off x="0" y="6437520"/>
-            <a:ext cx="12191040" cy="14400"/>
+            <a:ext cx="12190320" cy="13680"/>
           </a:xfrm>
           <a:prstGeom prst="rect">
             <a:avLst/>
@@ -6739,14 +6731,14 @@
       </p:sp>
       <p:sp>
         <p:nvSpPr>
-          <p:cNvPr id="253" name="TextBox 103"/>
+          <p:cNvPr id="261" name="TextBox 103"/>
           <p:cNvSpPr/>
           <p:nvPr/>
         </p:nvSpPr>
         <p:spPr>
           <a:xfrm>
             <a:off x="3514320" y="6473880"/>
-            <a:ext cx="2736360" cy="226800"/>
+            <a:ext cx="2735640" cy="226800"/>
           </a:xfrm>
           <a:prstGeom prst="rect">
             <a:avLst/>
@@ -6791,14 +6783,14 @@
       </p:sp>
       <p:sp>
         <p:nvSpPr>
-          <p:cNvPr id="254" name="TextBox 104"/>
+          <p:cNvPr id="262" name="TextBox 104"/>
           <p:cNvSpPr/>
           <p:nvPr/>
         </p:nvSpPr>
         <p:spPr>
           <a:xfrm>
             <a:off x="10863720" y="6473880"/>
-            <a:ext cx="308880" cy="226800"/>
+            <a:ext cx="308160" cy="226800"/>
           </a:xfrm>
           <a:prstGeom prst="rect">
             <a:avLst/>
@@ -6880,14 +6872,14 @@
       </p:grpSpPr>
       <p:sp>
         <p:nvSpPr>
-          <p:cNvPr id="255" name="Google Shape;62;p3"/>
+          <p:cNvPr id="263" name="Google Shape;62;p3"/>
           <p:cNvSpPr/>
           <p:nvPr/>
         </p:nvSpPr>
         <p:spPr>
           <a:xfrm>
             <a:off x="825480" y="419760"/>
-            <a:ext cx="5636160" cy="929880"/>
+            <a:ext cx="5635440" cy="929160"/>
           </a:xfrm>
           <a:prstGeom prst="rect">
             <a:avLst/>
@@ -6932,14 +6924,14 @@
       </p:sp>
       <p:sp>
         <p:nvSpPr>
-          <p:cNvPr id="256" name="Google Shape;63;p3"/>
+          <p:cNvPr id="264" name="Google Shape;63;p3"/>
           <p:cNvSpPr/>
           <p:nvPr/>
         </p:nvSpPr>
         <p:spPr>
           <a:xfrm>
             <a:off x="825480" y="1455840"/>
-            <a:ext cx="5636160" cy="882000"/>
+            <a:ext cx="5635440" cy="881280"/>
           </a:xfrm>
           <a:prstGeom prst="rect">
             <a:avLst/>
@@ -7004,14 +6996,14 @@
       </p:sp>
       <p:sp>
         <p:nvSpPr>
-          <p:cNvPr id="257" name="Google Shape;64;p3"/>
+          <p:cNvPr id="265" name="Google Shape;64;p3"/>
           <p:cNvSpPr/>
           <p:nvPr/>
         </p:nvSpPr>
         <p:spPr>
           <a:xfrm>
             <a:off x="825480" y="2445480"/>
-            <a:ext cx="5472000" cy="1693800"/>
+            <a:ext cx="5471280" cy="1693080"/>
           </a:xfrm>
           <a:prstGeom prst="roundRect">
             <a:avLst>
@@ -7044,14 +7036,14 @@
       </p:sp>
       <p:sp>
         <p:nvSpPr>
-          <p:cNvPr id="258" name="Google Shape;65;p3"/>
+          <p:cNvPr id="266" name="Google Shape;65;p3"/>
           <p:cNvSpPr/>
           <p:nvPr/>
         </p:nvSpPr>
         <p:spPr>
           <a:xfrm>
             <a:off x="1074600" y="2777040"/>
-            <a:ext cx="5122800" cy="756000"/>
+            <a:ext cx="5122080" cy="755280"/>
           </a:xfrm>
           <a:prstGeom prst="rect">
             <a:avLst/>
@@ -7096,14 +7088,14 @@
       </p:sp>
       <p:sp>
         <p:nvSpPr>
-          <p:cNvPr id="259" name="Google Shape;66;p3"/>
+          <p:cNvPr id="267" name="Google Shape;66;p3"/>
           <p:cNvSpPr/>
           <p:nvPr/>
         </p:nvSpPr>
         <p:spPr>
           <a:xfrm>
             <a:off x="1074600" y="3597480"/>
-            <a:ext cx="5122800" cy="451440"/>
+            <a:ext cx="5122080" cy="450720"/>
           </a:xfrm>
           <a:prstGeom prst="rect">
             <a:avLst/>
@@ -7148,14 +7140,14 @@
       </p:sp>
       <p:sp>
         <p:nvSpPr>
-          <p:cNvPr id="260" name="Google Shape;67;p3"/>
+          <p:cNvPr id="268" name="Google Shape;67;p3"/>
           <p:cNvSpPr/>
           <p:nvPr/>
         </p:nvSpPr>
         <p:spPr>
           <a:xfrm>
             <a:off x="825480" y="4417920"/>
-            <a:ext cx="5472000" cy="1839960"/>
+            <a:ext cx="5471280" cy="1839240"/>
           </a:xfrm>
           <a:prstGeom prst="roundRect">
             <a:avLst>
@@ -7192,14 +7184,14 @@
       </p:sp>
       <p:sp>
         <p:nvSpPr>
-          <p:cNvPr id="261" name="Google Shape;68;p3"/>
+          <p:cNvPr id="269" name="Google Shape;68;p3"/>
           <p:cNvSpPr/>
           <p:nvPr/>
         </p:nvSpPr>
         <p:spPr>
           <a:xfrm>
             <a:off x="1074600" y="4592880"/>
-            <a:ext cx="4973760" cy="259560"/>
+            <a:ext cx="4973040" cy="258840"/>
           </a:xfrm>
           <a:prstGeom prst="roundRect">
             <a:avLst>
@@ -7222,14 +7214,14 @@
       </p:sp>
       <p:sp>
         <p:nvSpPr>
-          <p:cNvPr id="262" name="Google Shape;69;p3"/>
+          <p:cNvPr id="270" name="Google Shape;69;p3"/>
           <p:cNvSpPr/>
           <p:nvPr/>
         </p:nvSpPr>
         <p:spPr>
           <a:xfrm>
             <a:off x="1176120" y="4607640"/>
-            <a:ext cx="4919760" cy="244800"/>
+            <a:ext cx="4919040" cy="244080"/>
           </a:xfrm>
           <a:prstGeom prst="rect">
             <a:avLst/>
@@ -7274,14 +7266,14 @@
       </p:sp>
       <p:sp>
         <p:nvSpPr>
-          <p:cNvPr id="263" name="Google Shape;70;p3"/>
+          <p:cNvPr id="271" name="Google Shape;70;p3"/>
           <p:cNvSpPr/>
           <p:nvPr/>
         </p:nvSpPr>
         <p:spPr>
           <a:xfrm>
             <a:off x="1074600" y="4846680"/>
-            <a:ext cx="5122800" cy="1194120"/>
+            <a:ext cx="5122080" cy="1193400"/>
           </a:xfrm>
           <a:prstGeom prst="rect">
             <a:avLst/>
@@ -7299,7 +7291,7 @@
         </p:style>
         <p:txBody>
           <a:bodyPr lIns="16920" rIns="16920" tIns="16920" bIns="16920" anchor="t">
-            <a:normAutofit fontScale="95000"/>
+            <a:normAutofit fontScale="94000"/>
           </a:bodyPr>
           <a:p>
             <a:pPr>
@@ -7486,14 +7478,14 @@
       </p:sp>
       <p:sp>
         <p:nvSpPr>
-          <p:cNvPr id="264" name="Google Shape;71;p3"/>
+          <p:cNvPr id="272" name="Google Shape;71;p3"/>
           <p:cNvSpPr/>
           <p:nvPr/>
         </p:nvSpPr>
         <p:spPr>
           <a:xfrm>
             <a:off x="6896160" y="784080"/>
-            <a:ext cx="4277520" cy="4831920"/>
+            <a:ext cx="4276800" cy="4831200"/>
           </a:xfrm>
           <a:prstGeom prst="roundRect">
             <a:avLst>
@@ -7526,7 +7518,7 @@
       </p:sp>
       <p:pic>
         <p:nvPicPr>
-          <p:cNvPr id="265" name="Google Shape;72;p3" descr="preencoded.png"/>
+          <p:cNvPr id="273" name="Google Shape;72;p3" descr="preencoded.png"/>
           <p:cNvPicPr/>
           <p:nvPr/>
         </p:nvPicPr>
@@ -7537,7 +7529,7 @@
         <p:spPr>
           <a:xfrm>
             <a:off x="6904440" y="792000"/>
-            <a:ext cx="4261680" cy="4816080"/>
+            <a:ext cx="4260960" cy="4815360"/>
           </a:xfrm>
           <a:prstGeom prst="rect">
             <a:avLst/>
@@ -7549,14 +7541,14 @@
       </p:pic>
       <p:sp>
         <p:nvSpPr>
-          <p:cNvPr id="266" name="Google Shape;73;p3"/>
+          <p:cNvPr id="274" name="Google Shape;73;p3"/>
           <p:cNvSpPr/>
           <p:nvPr/>
         </p:nvSpPr>
         <p:spPr>
           <a:xfrm>
             <a:off x="6634800" y="5730840"/>
-            <a:ext cx="4800960" cy="253080"/>
+            <a:ext cx="4800240" cy="252360"/>
           </a:xfrm>
           <a:prstGeom prst="rect">
             <a:avLst/>
@@ -7601,14 +7593,14 @@
       </p:sp>
       <p:sp>
         <p:nvSpPr>
-          <p:cNvPr id="267" name="Rectangle 73"/>
+          <p:cNvPr id="275" name="Rectangle 73"/>
           <p:cNvSpPr/>
           <p:nvPr/>
         </p:nvSpPr>
         <p:spPr>
           <a:xfrm>
             <a:off x="0" y="6437520"/>
-            <a:ext cx="12191040" cy="14400"/>
+            <a:ext cx="12190320" cy="13680"/>
           </a:xfrm>
           <a:prstGeom prst="rect">
             <a:avLst/>
@@ -7642,14 +7634,14 @@
       </p:sp>
       <p:sp>
         <p:nvSpPr>
-          <p:cNvPr id="268" name="TextBox 74"/>
+          <p:cNvPr id="276" name="TextBox 74"/>
           <p:cNvSpPr/>
           <p:nvPr/>
         </p:nvSpPr>
         <p:spPr>
           <a:xfrm>
             <a:off x="3514320" y="6473880"/>
-            <a:ext cx="2736360" cy="226800"/>
+            <a:ext cx="2735640" cy="226800"/>
           </a:xfrm>
           <a:prstGeom prst="rect">
             <a:avLst/>
@@ -7694,14 +7686,14 @@
       </p:sp>
       <p:sp>
         <p:nvSpPr>
-          <p:cNvPr id="269" name="TextBox 75"/>
+          <p:cNvPr id="277" name="TextBox 75"/>
           <p:cNvSpPr/>
           <p:nvPr/>
         </p:nvSpPr>
         <p:spPr>
           <a:xfrm>
             <a:off x="10863720" y="6473880"/>
-            <a:ext cx="308880" cy="226800"/>
+            <a:ext cx="308160" cy="226800"/>
           </a:xfrm>
           <a:prstGeom prst="rect">
             <a:avLst/>
@@ -7746,14 +7738,14 @@
       </p:sp>
       <p:sp>
         <p:nvSpPr>
-          <p:cNvPr id="270" name="Rectangle 76"/>
+          <p:cNvPr id="278" name="Rectangle 76"/>
           <p:cNvSpPr/>
           <p:nvPr/>
         </p:nvSpPr>
         <p:spPr>
           <a:xfrm>
             <a:off x="825480" y="1360080"/>
-            <a:ext cx="1370880" cy="43560"/>
+            <a:ext cx="1370160" cy="42840"/>
           </a:xfrm>
           <a:prstGeom prst="rect">
             <a:avLst/>
@@ -7824,14 +7816,14 @@
       </p:grpSpPr>
       <p:sp>
         <p:nvSpPr>
-          <p:cNvPr id="271" name="Google Shape;79;p4"/>
+          <p:cNvPr id="279" name="Google Shape;79;p4"/>
           <p:cNvSpPr/>
           <p:nvPr/>
         </p:nvSpPr>
         <p:spPr>
           <a:xfrm>
             <a:off x="1020240" y="571680"/>
-            <a:ext cx="4069440" cy="5028840"/>
+            <a:ext cx="4068720" cy="5028120"/>
           </a:xfrm>
           <a:prstGeom prst="roundRect">
             <a:avLst>
@@ -7864,7 +7856,7 @@
       </p:sp>
       <p:pic>
         <p:nvPicPr>
-          <p:cNvPr id="272" name="Google Shape;80;p4" descr="preencoded.png">
+          <p:cNvPr id="280" name="Google Shape;80;p4" descr="preencoded.png">
             <a:hlinkClick r:id="rId1"/>
           </p:cNvPr>
           <p:cNvPicPr/>
@@ -7877,7 +7869,7 @@
         <p:spPr>
           <a:xfrm>
             <a:off x="1028160" y="579600"/>
-            <a:ext cx="4053600" cy="5013000"/>
+            <a:ext cx="4052880" cy="5012280"/>
           </a:xfrm>
           <a:prstGeom prst="rect">
             <a:avLst/>
@@ -7889,14 +7881,14 @@
       </p:pic>
       <p:sp>
         <p:nvSpPr>
-          <p:cNvPr id="273" name="Google Shape;81;p4"/>
+          <p:cNvPr id="281" name="Google Shape;81;p4"/>
           <p:cNvSpPr/>
           <p:nvPr/>
         </p:nvSpPr>
         <p:spPr>
           <a:xfrm>
             <a:off x="758520" y="5715360"/>
-            <a:ext cx="4592160" cy="481680"/>
+            <a:ext cx="4591440" cy="480960"/>
           </a:xfrm>
           <a:prstGeom prst="rect">
             <a:avLst/>
@@ -7914,7 +7906,7 @@
         </p:style>
         <p:txBody>
           <a:bodyPr lIns="16920" rIns="16920" tIns="16920" bIns="16920" anchor="t">
-            <a:normAutofit fontScale="82000"/>
+            <a:normAutofit fontScale="81000"/>
           </a:bodyPr>
           <a:p>
             <a:pPr algn="ctr">
@@ -7941,14 +7933,14 @@
       </p:sp>
       <p:sp>
         <p:nvSpPr>
-          <p:cNvPr id="274" name="Google Shape;83;p4"/>
+          <p:cNvPr id="282" name="Google Shape;83;p4"/>
           <p:cNvSpPr/>
           <p:nvPr/>
         </p:nvSpPr>
         <p:spPr>
           <a:xfrm>
             <a:off x="5691240" y="1323360"/>
-            <a:ext cx="5844960" cy="929880"/>
+            <a:ext cx="5844240" cy="929160"/>
           </a:xfrm>
           <a:prstGeom prst="rect">
             <a:avLst/>
@@ -7993,14 +7985,14 @@
       </p:sp>
       <p:sp>
         <p:nvSpPr>
-          <p:cNvPr id="275" name="Google Shape;84;p4"/>
+          <p:cNvPr id="283" name="Google Shape;84;p4"/>
           <p:cNvSpPr/>
           <p:nvPr/>
         </p:nvSpPr>
         <p:spPr>
           <a:xfrm>
             <a:off x="5691240" y="2418840"/>
-            <a:ext cx="5844960" cy="882000"/>
+            <a:ext cx="5844240" cy="881280"/>
           </a:xfrm>
           <a:prstGeom prst="rect">
             <a:avLst/>
@@ -8085,14 +8077,14 @@
       </p:sp>
       <p:sp>
         <p:nvSpPr>
-          <p:cNvPr id="276" name="Google Shape;85;p4"/>
+          <p:cNvPr id="284" name="Google Shape;85;p4"/>
           <p:cNvSpPr/>
           <p:nvPr/>
         </p:nvSpPr>
         <p:spPr>
           <a:xfrm>
             <a:off x="5691240" y="3467880"/>
-            <a:ext cx="2748240" cy="1684440"/>
+            <a:ext cx="2747520" cy="1683720"/>
           </a:xfrm>
           <a:prstGeom prst="roundRect">
             <a:avLst>
@@ -8125,14 +8117,14 @@
       </p:sp>
       <p:sp>
         <p:nvSpPr>
-          <p:cNvPr id="277" name="Google Shape;86;p4"/>
+          <p:cNvPr id="285" name="Google Shape;86;p4"/>
           <p:cNvSpPr/>
           <p:nvPr/>
         </p:nvSpPr>
         <p:spPr>
           <a:xfrm>
             <a:off x="5927400" y="3687120"/>
-            <a:ext cx="2343240" cy="756000"/>
+            <a:ext cx="2342520" cy="755280"/>
           </a:xfrm>
           <a:prstGeom prst="rect">
             <a:avLst/>
@@ -8177,14 +8169,14 @@
       </p:sp>
       <p:sp>
         <p:nvSpPr>
-          <p:cNvPr id="278" name="Google Shape;87;p4"/>
+          <p:cNvPr id="286" name="Google Shape;87;p4"/>
           <p:cNvSpPr/>
           <p:nvPr/>
         </p:nvSpPr>
         <p:spPr>
           <a:xfrm>
             <a:off x="5791680" y="4507200"/>
-            <a:ext cx="2647440" cy="451440"/>
+            <a:ext cx="2646720" cy="450720"/>
           </a:xfrm>
           <a:prstGeom prst="rect">
             <a:avLst/>
@@ -8229,14 +8221,14 @@
       </p:sp>
       <p:sp>
         <p:nvSpPr>
-          <p:cNvPr id="279" name="Google Shape;88;p4"/>
+          <p:cNvPr id="287" name="Google Shape;88;p4"/>
           <p:cNvSpPr/>
           <p:nvPr/>
         </p:nvSpPr>
         <p:spPr>
           <a:xfrm>
             <a:off x="8617680" y="3467880"/>
-            <a:ext cx="2748240" cy="1684440"/>
+            <a:ext cx="2747520" cy="1683720"/>
           </a:xfrm>
           <a:prstGeom prst="roundRect">
             <a:avLst>
@@ -8269,14 +8261,14 @@
       </p:sp>
       <p:sp>
         <p:nvSpPr>
-          <p:cNvPr id="280" name="Google Shape;89;p4"/>
+          <p:cNvPr id="288" name="Google Shape;89;p4"/>
           <p:cNvSpPr/>
           <p:nvPr/>
         </p:nvSpPr>
         <p:spPr>
           <a:xfrm>
             <a:off x="8854200" y="3678840"/>
-            <a:ext cx="2343240" cy="756000"/>
+            <a:ext cx="2342520" cy="755280"/>
           </a:xfrm>
           <a:prstGeom prst="rect">
             <a:avLst/>
@@ -8321,14 +8313,14 @@
       </p:sp>
       <p:sp>
         <p:nvSpPr>
-          <p:cNvPr id="281" name="Google Shape;90;p4"/>
+          <p:cNvPr id="289" name="Google Shape;90;p4"/>
           <p:cNvSpPr/>
           <p:nvPr/>
         </p:nvSpPr>
         <p:spPr>
           <a:xfrm>
             <a:off x="8854200" y="4499280"/>
-            <a:ext cx="2343240" cy="467280"/>
+            <a:ext cx="2342520" cy="466560"/>
           </a:xfrm>
           <a:prstGeom prst="rect">
             <a:avLst/>
@@ -8413,14 +8405,14 @@
       </p:sp>
       <p:sp>
         <p:nvSpPr>
-          <p:cNvPr id="282" name="Google Shape;91;p4"/>
+          <p:cNvPr id="290" name="Google Shape;91;p4"/>
           <p:cNvSpPr/>
           <p:nvPr/>
         </p:nvSpPr>
         <p:spPr>
           <a:xfrm>
             <a:off x="5691240" y="5346720"/>
-            <a:ext cx="5844960" cy="536400"/>
+            <a:ext cx="5844240" cy="535680"/>
           </a:xfrm>
           <a:prstGeom prst="rect">
             <a:avLst/>
@@ -8485,14 +8477,14 @@
       </p:sp>
       <p:sp>
         <p:nvSpPr>
-          <p:cNvPr id="283" name="Rectangle 91"/>
+          <p:cNvPr id="291" name="Rectangle 91"/>
           <p:cNvSpPr/>
           <p:nvPr/>
         </p:nvSpPr>
         <p:spPr>
           <a:xfrm>
             <a:off x="0" y="6437520"/>
-            <a:ext cx="12191040" cy="14400"/>
+            <a:ext cx="12190320" cy="13680"/>
           </a:xfrm>
           <a:prstGeom prst="rect">
             <a:avLst/>
@@ -8526,14 +8518,14 @@
       </p:sp>
       <p:sp>
         <p:nvSpPr>
-          <p:cNvPr id="284" name="TextBox 92"/>
+          <p:cNvPr id="292" name="TextBox 92"/>
           <p:cNvSpPr/>
           <p:nvPr/>
         </p:nvSpPr>
         <p:spPr>
           <a:xfrm>
             <a:off x="3514320" y="6473880"/>
-            <a:ext cx="2736360" cy="226800"/>
+            <a:ext cx="2735640" cy="226800"/>
           </a:xfrm>
           <a:prstGeom prst="rect">
             <a:avLst/>
@@ -8578,14 +8570,14 @@
       </p:sp>
       <p:sp>
         <p:nvSpPr>
-          <p:cNvPr id="285" name="TextBox 93"/>
+          <p:cNvPr id="293" name="TextBox 93"/>
           <p:cNvSpPr/>
           <p:nvPr/>
         </p:nvSpPr>
         <p:spPr>
           <a:xfrm>
             <a:off x="10863720" y="6473880"/>
-            <a:ext cx="308880" cy="226800"/>
+            <a:ext cx="308160" cy="226800"/>
           </a:xfrm>
           <a:prstGeom prst="rect">
             <a:avLst/>
@@ -8630,14 +8622,14 @@
       </p:sp>
       <p:sp>
         <p:nvSpPr>
-          <p:cNvPr id="286" name="Rectangle 94"/>
+          <p:cNvPr id="294" name="Rectangle 94"/>
           <p:cNvSpPr/>
           <p:nvPr/>
         </p:nvSpPr>
         <p:spPr>
           <a:xfrm>
             <a:off x="5691240" y="2299320"/>
-            <a:ext cx="1370880" cy="43560"/>
+            <a:ext cx="1370160" cy="42840"/>
           </a:xfrm>
           <a:prstGeom prst="rect">
             <a:avLst/>
@@ -8708,14 +8700,14 @@
       </p:grpSpPr>
       <p:sp>
         <p:nvSpPr>
-          <p:cNvPr id="287" name="Google Shape;98;p5"/>
+          <p:cNvPr id="295" name="Google Shape;98;p5"/>
           <p:cNvSpPr/>
           <p:nvPr/>
         </p:nvSpPr>
         <p:spPr>
           <a:xfrm>
             <a:off x="825480" y="852480"/>
-            <a:ext cx="10856520" cy="477360"/>
+            <a:ext cx="10855800" cy="476640"/>
           </a:xfrm>
           <a:prstGeom prst="rect">
             <a:avLst/>
@@ -8770,14 +8762,14 @@
       </p:sp>
       <p:sp>
         <p:nvSpPr>
-          <p:cNvPr id="288" name="Google Shape;99;p5"/>
+          <p:cNvPr id="296" name="Google Shape;99;p5"/>
           <p:cNvSpPr/>
           <p:nvPr/>
         </p:nvSpPr>
         <p:spPr>
           <a:xfrm>
             <a:off x="825480" y="1548360"/>
-            <a:ext cx="9155880" cy="596160"/>
+            <a:ext cx="9155160" cy="595440"/>
           </a:xfrm>
           <a:prstGeom prst="rect">
             <a:avLst/>
@@ -8822,14 +8814,14 @@
       </p:sp>
       <p:sp>
         <p:nvSpPr>
-          <p:cNvPr id="289" name="Google Shape;100;p5"/>
+          <p:cNvPr id="297" name="Google Shape;100;p5"/>
           <p:cNvSpPr/>
           <p:nvPr/>
         </p:nvSpPr>
         <p:spPr>
           <a:xfrm>
             <a:off x="825480" y="2435040"/>
-            <a:ext cx="4718520" cy="3889080"/>
+            <a:ext cx="4717800" cy="3888360"/>
           </a:xfrm>
           <a:prstGeom prst="roundRect">
             <a:avLst>
@@ -8862,14 +8854,14 @@
       </p:sp>
       <p:sp>
         <p:nvSpPr>
-          <p:cNvPr id="290" name="Google Shape;101;p5"/>
+          <p:cNvPr id="298" name="Google Shape;101;p5"/>
           <p:cNvSpPr/>
           <p:nvPr/>
         </p:nvSpPr>
         <p:spPr>
           <a:xfrm>
             <a:off x="1138320" y="3220920"/>
-            <a:ext cx="4093200" cy="259560"/>
+            <a:ext cx="4092480" cy="258840"/>
           </a:xfrm>
           <a:prstGeom prst="roundRect">
             <a:avLst>
@@ -8892,14 +8884,14 @@
       </p:sp>
       <p:sp>
         <p:nvSpPr>
-          <p:cNvPr id="291" name="Google Shape;102;p5"/>
+          <p:cNvPr id="299" name="Google Shape;102;p5"/>
           <p:cNvSpPr/>
           <p:nvPr/>
         </p:nvSpPr>
         <p:spPr>
           <a:xfrm>
             <a:off x="1239840" y="3271680"/>
-            <a:ext cx="4012560" cy="183240"/>
+            <a:ext cx="4011840" cy="182520"/>
           </a:xfrm>
           <a:prstGeom prst="rect">
             <a:avLst/>
@@ -8917,7 +8909,7 @@
         </p:style>
         <p:txBody>
           <a:bodyPr lIns="16920" rIns="16920" tIns="16920" bIns="16920" anchor="ctr">
-            <a:normAutofit fontScale="99000"/>
+            <a:normAutofit fontScale="98000"/>
           </a:bodyPr>
           <a:p>
             <a:pPr>
@@ -8944,14 +8936,14 @@
       </p:sp>
       <p:sp>
         <p:nvSpPr>
-          <p:cNvPr id="292" name="Google Shape;103;p5"/>
+          <p:cNvPr id="300" name="Google Shape;103;p5"/>
           <p:cNvSpPr/>
           <p:nvPr/>
         </p:nvSpPr>
         <p:spPr>
           <a:xfrm>
             <a:off x="1138320" y="3620880"/>
-            <a:ext cx="212760" cy="287640"/>
+            <a:ext cx="212040" cy="286920"/>
           </a:xfrm>
           <a:prstGeom prst="rect">
             <a:avLst/>
@@ -8996,14 +8988,14 @@
       </p:sp>
       <p:sp>
         <p:nvSpPr>
-          <p:cNvPr id="293" name="Google Shape;104;p5"/>
+          <p:cNvPr id="301" name="Google Shape;104;p5"/>
           <p:cNvSpPr/>
           <p:nvPr/>
         </p:nvSpPr>
         <p:spPr>
           <a:xfrm>
             <a:off x="1415160" y="3624120"/>
-            <a:ext cx="1162080" cy="280440"/>
+            <a:ext cx="1161360" cy="279720"/>
           </a:xfrm>
           <a:prstGeom prst="rect">
             <a:avLst/>
@@ -9048,14 +9040,14 @@
       </p:sp>
       <p:sp>
         <p:nvSpPr>
-          <p:cNvPr id="294" name="Google Shape;105;p5"/>
+          <p:cNvPr id="302" name="Google Shape;105;p5"/>
           <p:cNvSpPr/>
           <p:nvPr/>
         </p:nvSpPr>
         <p:spPr>
           <a:xfrm>
             <a:off x="1886040" y="3972240"/>
-            <a:ext cx="392040" cy="253440"/>
+            <a:ext cx="391320" cy="252720"/>
           </a:xfrm>
           <a:prstGeom prst="rect">
             <a:avLst/>
@@ -9100,14 +9092,14 @@
       </p:sp>
       <p:sp>
         <p:nvSpPr>
-          <p:cNvPr id="295" name="Google Shape;106;p5"/>
+          <p:cNvPr id="303" name="Google Shape;106;p5"/>
           <p:cNvSpPr/>
           <p:nvPr/>
         </p:nvSpPr>
         <p:spPr>
           <a:xfrm>
             <a:off x="1138320" y="4289760"/>
-            <a:ext cx="212760" cy="287640"/>
+            <a:ext cx="212040" cy="286920"/>
           </a:xfrm>
           <a:prstGeom prst="rect">
             <a:avLst/>
@@ -9152,14 +9144,14 @@
       </p:sp>
       <p:sp>
         <p:nvSpPr>
-          <p:cNvPr id="296" name="Google Shape;107;p5"/>
+          <p:cNvPr id="304" name="Google Shape;107;p5"/>
           <p:cNvSpPr/>
           <p:nvPr/>
         </p:nvSpPr>
         <p:spPr>
           <a:xfrm>
             <a:off x="1415160" y="4293360"/>
-            <a:ext cx="1601280" cy="280440"/>
+            <a:ext cx="1600560" cy="279720"/>
           </a:xfrm>
           <a:prstGeom prst="rect">
             <a:avLst/>
@@ -9204,14 +9196,14 @@
       </p:sp>
       <p:sp>
         <p:nvSpPr>
-          <p:cNvPr id="297" name="Google Shape;108;p5"/>
+          <p:cNvPr id="305" name="Google Shape;108;p5"/>
           <p:cNvSpPr/>
           <p:nvPr/>
         </p:nvSpPr>
         <p:spPr>
           <a:xfrm>
             <a:off x="1886040" y="4641480"/>
-            <a:ext cx="392040" cy="253440"/>
+            <a:ext cx="391320" cy="252720"/>
           </a:xfrm>
           <a:prstGeom prst="rect">
             <a:avLst/>
@@ -9256,14 +9248,14 @@
       </p:sp>
       <p:sp>
         <p:nvSpPr>
-          <p:cNvPr id="298" name="Google Shape;109;p5"/>
+          <p:cNvPr id="306" name="Google Shape;109;p5"/>
           <p:cNvSpPr/>
           <p:nvPr/>
         </p:nvSpPr>
         <p:spPr>
           <a:xfrm>
             <a:off x="1138320" y="4958640"/>
-            <a:ext cx="212760" cy="287640"/>
+            <a:ext cx="212040" cy="286920"/>
           </a:xfrm>
           <a:prstGeom prst="rect">
             <a:avLst/>
@@ -9308,14 +9300,14 @@
       </p:sp>
       <p:sp>
         <p:nvSpPr>
-          <p:cNvPr id="299" name="Google Shape;110;p5"/>
+          <p:cNvPr id="307" name="Google Shape;110;p5"/>
           <p:cNvSpPr/>
           <p:nvPr/>
         </p:nvSpPr>
         <p:spPr>
           <a:xfrm>
             <a:off x="1415160" y="4962240"/>
-            <a:ext cx="1334520" cy="280440"/>
+            <a:ext cx="1333800" cy="279720"/>
           </a:xfrm>
           <a:prstGeom prst="rect">
             <a:avLst/>
@@ -9360,14 +9352,14 @@
       </p:sp>
       <p:sp>
         <p:nvSpPr>
-          <p:cNvPr id="300" name="Google Shape;111;p5"/>
+          <p:cNvPr id="308" name="Google Shape;111;p5"/>
           <p:cNvSpPr/>
           <p:nvPr/>
         </p:nvSpPr>
         <p:spPr>
           <a:xfrm>
             <a:off x="1290600" y="5310360"/>
-            <a:ext cx="4063320" cy="253080"/>
+            <a:ext cx="4062600" cy="252360"/>
           </a:xfrm>
           <a:prstGeom prst="rect">
             <a:avLst/>
@@ -9422,14 +9414,14 @@
       </p:sp>
       <p:sp>
         <p:nvSpPr>
-          <p:cNvPr id="301" name="Google Shape;112;p5"/>
+          <p:cNvPr id="309" name="Google Shape;112;p5"/>
           <p:cNvSpPr/>
           <p:nvPr/>
         </p:nvSpPr>
         <p:spPr>
           <a:xfrm>
             <a:off x="5849280" y="2435040"/>
-            <a:ext cx="2681640" cy="1656720"/>
+            <a:ext cx="2680920" cy="1656000"/>
           </a:xfrm>
           <a:prstGeom prst="roundRect">
             <a:avLst>
@@ -9462,14 +9454,14 @@
       </p:sp>
       <p:sp>
         <p:nvSpPr>
-          <p:cNvPr id="302" name="Google Shape;113;p5"/>
+          <p:cNvPr id="310" name="Google Shape;113;p5"/>
           <p:cNvSpPr/>
           <p:nvPr/>
         </p:nvSpPr>
         <p:spPr>
           <a:xfrm>
             <a:off x="6073200" y="2777400"/>
-            <a:ext cx="2301120" cy="481680"/>
+            <a:ext cx="2300400" cy="480960"/>
           </a:xfrm>
           <a:prstGeom prst="rect">
             <a:avLst/>
@@ -9514,14 +9506,14 @@
       </p:sp>
       <p:sp>
         <p:nvSpPr>
-          <p:cNvPr id="303" name="Google Shape;114;p5"/>
+          <p:cNvPr id="311" name="Google Shape;114;p5"/>
           <p:cNvSpPr/>
           <p:nvPr/>
         </p:nvSpPr>
         <p:spPr>
           <a:xfrm>
             <a:off x="6073200" y="3323520"/>
-            <a:ext cx="2301120" cy="451440"/>
+            <a:ext cx="2300400" cy="450720"/>
           </a:xfrm>
           <a:prstGeom prst="rect">
             <a:avLst/>
@@ -9566,14 +9558,14 @@
       </p:sp>
       <p:sp>
         <p:nvSpPr>
-          <p:cNvPr id="304" name="Google Shape;115;p5"/>
+          <p:cNvPr id="312" name="Google Shape;115;p5"/>
           <p:cNvSpPr/>
           <p:nvPr/>
         </p:nvSpPr>
         <p:spPr>
           <a:xfrm>
             <a:off x="8683920" y="2435040"/>
-            <a:ext cx="2681640" cy="1656720"/>
+            <a:ext cx="2680920" cy="1656000"/>
           </a:xfrm>
           <a:prstGeom prst="roundRect">
             <a:avLst>
@@ -9606,14 +9598,14 @@
       </p:sp>
       <p:sp>
         <p:nvSpPr>
-          <p:cNvPr id="305" name="Google Shape;116;p5"/>
+          <p:cNvPr id="313" name="Google Shape;116;p5"/>
           <p:cNvSpPr/>
           <p:nvPr/>
         </p:nvSpPr>
         <p:spPr>
           <a:xfrm>
             <a:off x="8907840" y="2777400"/>
-            <a:ext cx="2301480" cy="481680"/>
+            <a:ext cx="2300760" cy="480960"/>
           </a:xfrm>
           <a:prstGeom prst="rect">
             <a:avLst/>
@@ -9658,14 +9650,14 @@
       </p:sp>
       <p:sp>
         <p:nvSpPr>
-          <p:cNvPr id="306" name="Google Shape;117;p5"/>
+          <p:cNvPr id="314" name="Google Shape;117;p5"/>
           <p:cNvSpPr/>
           <p:nvPr/>
         </p:nvSpPr>
         <p:spPr>
           <a:xfrm>
             <a:off x="8907840" y="3323520"/>
-            <a:ext cx="2301480" cy="451440"/>
+            <a:ext cx="2300760" cy="450720"/>
           </a:xfrm>
           <a:prstGeom prst="rect">
             <a:avLst/>
@@ -9710,14 +9702,14 @@
       </p:sp>
       <p:sp>
         <p:nvSpPr>
-          <p:cNvPr id="307" name="Google Shape;118;p5"/>
+          <p:cNvPr id="315" name="Google Shape;118;p5"/>
           <p:cNvSpPr/>
           <p:nvPr/>
         </p:nvSpPr>
         <p:spPr>
           <a:xfrm>
             <a:off x="5849280" y="4245120"/>
-            <a:ext cx="5516640" cy="2079000"/>
+            <a:ext cx="5515920" cy="2078280"/>
           </a:xfrm>
           <a:prstGeom prst="roundRect">
             <a:avLst>
@@ -9750,14 +9742,14 @@
       </p:sp>
       <p:sp>
         <p:nvSpPr>
-          <p:cNvPr id="308" name="Google Shape;119;p5"/>
+          <p:cNvPr id="316" name="Google Shape;119;p5"/>
           <p:cNvSpPr/>
           <p:nvPr/>
         </p:nvSpPr>
         <p:spPr>
           <a:xfrm>
             <a:off x="6085800" y="4581360"/>
-            <a:ext cx="1510560" cy="481680"/>
+            <a:ext cx="1509840" cy="480960"/>
           </a:xfrm>
           <a:prstGeom prst="rect">
             <a:avLst/>
@@ -9802,14 +9794,14 @@
       </p:sp>
       <p:sp>
         <p:nvSpPr>
-          <p:cNvPr id="309" name="Google Shape;120;p5"/>
+          <p:cNvPr id="317" name="Google Shape;120;p5"/>
           <p:cNvSpPr/>
           <p:nvPr/>
         </p:nvSpPr>
         <p:spPr>
           <a:xfrm>
             <a:off x="7673400" y="4755960"/>
-            <a:ext cx="669960" cy="276120"/>
+            <a:ext cx="669240" cy="275400"/>
           </a:xfrm>
           <a:prstGeom prst="rect">
             <a:avLst/>
@@ -9854,14 +9846,14 @@
       </p:sp>
       <p:sp>
         <p:nvSpPr>
-          <p:cNvPr id="310" name="Google Shape;121;p5"/>
+          <p:cNvPr id="318" name="Google Shape;121;p5"/>
           <p:cNvSpPr/>
           <p:nvPr/>
         </p:nvSpPr>
         <p:spPr>
           <a:xfrm>
             <a:off x="6085800" y="5127120"/>
-            <a:ext cx="5194800" cy="885960"/>
+            <a:ext cx="5194080" cy="885240"/>
           </a:xfrm>
           <a:prstGeom prst="rect">
             <a:avLst/>
@@ -9946,14 +9938,14 @@
       </p:sp>
       <p:sp>
         <p:nvSpPr>
-          <p:cNvPr id="311" name="Rectangle 121"/>
+          <p:cNvPr id="319" name="Rectangle 121"/>
           <p:cNvSpPr/>
           <p:nvPr/>
         </p:nvSpPr>
         <p:spPr>
           <a:xfrm>
             <a:off x="0" y="6437520"/>
-            <a:ext cx="12191040" cy="14400"/>
+            <a:ext cx="12190320" cy="13680"/>
           </a:xfrm>
           <a:prstGeom prst="rect">
             <a:avLst/>
@@ -9987,14 +9979,14 @@
       </p:sp>
       <p:sp>
         <p:nvSpPr>
-          <p:cNvPr id="312" name="TextBox 122"/>
+          <p:cNvPr id="320" name="TextBox 122"/>
           <p:cNvSpPr/>
           <p:nvPr/>
         </p:nvSpPr>
         <p:spPr>
           <a:xfrm>
             <a:off x="3514320" y="6473880"/>
-            <a:ext cx="2736360" cy="226800"/>
+            <a:ext cx="2735640" cy="226800"/>
           </a:xfrm>
           <a:prstGeom prst="rect">
             <a:avLst/>
@@ -10039,14 +10031,14 @@
       </p:sp>
       <p:sp>
         <p:nvSpPr>
-          <p:cNvPr id="313" name="TextBox 123"/>
+          <p:cNvPr id="321" name="TextBox 123"/>
           <p:cNvSpPr/>
           <p:nvPr/>
         </p:nvSpPr>
         <p:spPr>
           <a:xfrm>
             <a:off x="10863720" y="6473880"/>
-            <a:ext cx="308880" cy="226800"/>
+            <a:ext cx="308160" cy="226800"/>
           </a:xfrm>
           <a:prstGeom prst="rect">
             <a:avLst/>
@@ -10091,14 +10083,14 @@
       </p:sp>
       <p:sp>
         <p:nvSpPr>
-          <p:cNvPr id="314" name="Rectangle 124"/>
+          <p:cNvPr id="322" name="Rectangle 124"/>
           <p:cNvSpPr/>
           <p:nvPr/>
         </p:nvSpPr>
         <p:spPr>
           <a:xfrm>
             <a:off x="825480" y="1375920"/>
-            <a:ext cx="1370880" cy="43560"/>
+            <a:ext cx="1370160" cy="42840"/>
           </a:xfrm>
           <a:prstGeom prst="rect">
             <a:avLst/>
@@ -10169,14 +10161,14 @@
       </p:grpSpPr>
       <p:sp>
         <p:nvSpPr>
-          <p:cNvPr id="315" name="Rectangle 1"/>
+          <p:cNvPr id="323" name="Rectangle 1"/>
           <p:cNvSpPr/>
           <p:nvPr/>
         </p:nvSpPr>
         <p:spPr>
           <a:xfrm>
             <a:off x="768240" y="1554480"/>
-            <a:ext cx="1828080" cy="50040"/>
+            <a:ext cx="1827360" cy="49320"/>
           </a:xfrm>
           <a:prstGeom prst="rect">
             <a:avLst/>
@@ -10210,14 +10202,14 @@
       </p:sp>
       <p:sp>
         <p:nvSpPr>
-          <p:cNvPr id="316" name="TextBox 2"/>
+          <p:cNvPr id="324" name="TextBox 2"/>
           <p:cNvSpPr/>
           <p:nvPr/>
         </p:nvSpPr>
         <p:spPr>
           <a:xfrm>
             <a:off x="768240" y="1737360"/>
-            <a:ext cx="10423440" cy="579240"/>
+            <a:ext cx="10422720" cy="578880"/>
           </a:xfrm>
           <a:prstGeom prst="rect">
             <a:avLst/>
@@ -10262,14 +10254,14 @@
       </p:sp>
       <p:sp>
         <p:nvSpPr>
-          <p:cNvPr id="317" name="TextBox 3"/>
+          <p:cNvPr id="325" name="TextBox 3"/>
           <p:cNvSpPr/>
           <p:nvPr/>
         </p:nvSpPr>
         <p:spPr>
           <a:xfrm>
             <a:off x="768240" y="2697480"/>
-            <a:ext cx="10057680" cy="274320"/>
+            <a:ext cx="10056960" cy="273960"/>
           </a:xfrm>
           <a:prstGeom prst="rect">
             <a:avLst/>
@@ -10314,14 +10306,14 @@
       </p:sp>
       <p:sp>
         <p:nvSpPr>
-          <p:cNvPr id="318" name="Rounded Rectangle 4"/>
+          <p:cNvPr id="326" name="Rounded Rectangle 4"/>
           <p:cNvSpPr/>
           <p:nvPr/>
         </p:nvSpPr>
         <p:spPr>
           <a:xfrm>
             <a:off x="768240" y="3566160"/>
-            <a:ext cx="6400080" cy="1005120"/>
+            <a:ext cx="6399360" cy="1004400"/>
           </a:xfrm>
           <a:prstGeom prst="roundRect">
             <a:avLst>
@@ -10357,14 +10349,14 @@
       </p:sp>
       <p:sp>
         <p:nvSpPr>
-          <p:cNvPr id="319" name="TextBox 5"/>
+          <p:cNvPr id="327" name="TextBox 5"/>
           <p:cNvSpPr/>
           <p:nvPr/>
         </p:nvSpPr>
         <p:spPr>
           <a:xfrm>
             <a:off x="768240" y="3703320"/>
-            <a:ext cx="6400080" cy="198000"/>
+            <a:ext cx="6399360" cy="197640"/>
           </a:xfrm>
           <a:prstGeom prst="rect">
             <a:avLst/>
@@ -10409,14 +10401,14 @@
       </p:sp>
       <p:sp>
         <p:nvSpPr>
-          <p:cNvPr id="320" name="TextBox 6"/>
+          <p:cNvPr id="328" name="TextBox 6"/>
           <p:cNvSpPr/>
           <p:nvPr/>
         </p:nvSpPr>
         <p:spPr>
           <a:xfrm>
             <a:off x="768240" y="4041720"/>
-            <a:ext cx="6400080" cy="365760"/>
+            <a:ext cx="6399360" cy="365400"/>
           </a:xfrm>
           <a:prstGeom prst="rect">
             <a:avLst/>
@@ -10461,14 +10453,14 @@
       </p:sp>
       <p:sp>
         <p:nvSpPr>
-          <p:cNvPr id="321" name="TextBox 7"/>
+          <p:cNvPr id="329" name="TextBox 7"/>
           <p:cNvSpPr/>
           <p:nvPr/>
         </p:nvSpPr>
         <p:spPr>
           <a:xfrm>
             <a:off x="768240" y="5120640"/>
-            <a:ext cx="2559600" cy="228240"/>
+            <a:ext cx="2558880" cy="227880"/>
           </a:xfrm>
           <a:prstGeom prst="rect">
             <a:avLst/>
@@ -10513,14 +10505,14 @@
       </p:sp>
       <p:sp>
         <p:nvSpPr>
-          <p:cNvPr id="322" name="TextBox 8"/>
+          <p:cNvPr id="330" name="TextBox 8"/>
           <p:cNvSpPr/>
           <p:nvPr/>
         </p:nvSpPr>
         <p:spPr>
           <a:xfrm>
             <a:off x="768240" y="5486400"/>
-            <a:ext cx="2559600" cy="198000"/>
+            <a:ext cx="2558880" cy="197640"/>
           </a:xfrm>
           <a:prstGeom prst="rect">
             <a:avLst/>
@@ -10565,14 +10557,14 @@
       </p:sp>
       <p:sp>
         <p:nvSpPr>
-          <p:cNvPr id="323" name="TextBox 9"/>
+          <p:cNvPr id="331" name="TextBox 9"/>
           <p:cNvSpPr/>
           <p:nvPr/>
         </p:nvSpPr>
         <p:spPr>
           <a:xfrm>
             <a:off x="3465720" y="5120640"/>
-            <a:ext cx="2559600" cy="228240"/>
+            <a:ext cx="2558880" cy="227880"/>
           </a:xfrm>
           <a:prstGeom prst="rect">
             <a:avLst/>
@@ -10617,14 +10609,14 @@
       </p:sp>
       <p:sp>
         <p:nvSpPr>
-          <p:cNvPr id="324" name="TextBox 10"/>
+          <p:cNvPr id="332" name="TextBox 10"/>
           <p:cNvSpPr/>
           <p:nvPr/>
         </p:nvSpPr>
         <p:spPr>
           <a:xfrm>
             <a:off x="3465720" y="5486400"/>
-            <a:ext cx="2559600" cy="198000"/>
+            <a:ext cx="2558880" cy="395640"/>
           </a:xfrm>
           <a:prstGeom prst="rect">
             <a:avLst/>
@@ -10659,7 +10651,7 @@
                 <a:latin typeface="Arial"/>
                 <a:ea typeface="DejaVu Sans"/>
               </a:rPr>
-              <a:t>jaka jest intencja</a:t>
+              <a:t>jaka jest intencja I dominująca emocja z jaką polaryzacją</a:t>
             </a:r>
             <a:endParaRPr b="0" lang="pl-PL" sz="1300" spc="-1" strike="noStrike">
               <a:latin typeface="Arial"/>
@@ -10669,14 +10661,14 @@
       </p:sp>
       <p:sp>
         <p:nvSpPr>
-          <p:cNvPr id="325" name="TextBox 11"/>
+          <p:cNvPr id="333" name="TextBox 11"/>
           <p:cNvSpPr/>
           <p:nvPr/>
         </p:nvSpPr>
         <p:spPr>
           <a:xfrm>
             <a:off x="6163200" y="5120640"/>
-            <a:ext cx="2559600" cy="228240"/>
+            <a:ext cx="2558880" cy="227880"/>
           </a:xfrm>
           <a:prstGeom prst="rect">
             <a:avLst/>
@@ -10721,14 +10713,14 @@
       </p:sp>
       <p:sp>
         <p:nvSpPr>
-          <p:cNvPr id="326" name="TextBox 12"/>
+          <p:cNvPr id="334" name="TextBox 12"/>
           <p:cNvSpPr/>
           <p:nvPr/>
         </p:nvSpPr>
         <p:spPr>
           <a:xfrm>
             <a:off x="6163200" y="5486400"/>
-            <a:ext cx="2559600" cy="198000"/>
+            <a:ext cx="2558880" cy="197640"/>
           </a:xfrm>
           <a:prstGeom prst="rect">
             <a:avLst/>
@@ -10763,7 +10755,7 @@
                 <a:latin typeface="Arial"/>
                 <a:ea typeface="DejaVu Sans"/>
               </a:rPr>
-              <a:t>najlepszą klasę</a:t>
+              <a:t>najlepiej dopasowaną klasę</a:t>
             </a:r>
             <a:endParaRPr b="0" lang="pl-PL" sz="1300" spc="-1" strike="noStrike">
               <a:latin typeface="Arial"/>
@@ -10773,14 +10765,14 @@
       </p:sp>
       <p:sp>
         <p:nvSpPr>
-          <p:cNvPr id="327" name="TextBox 13"/>
+          <p:cNvPr id="335" name="TextBox 13"/>
           <p:cNvSpPr/>
           <p:nvPr/>
         </p:nvSpPr>
         <p:spPr>
           <a:xfrm>
             <a:off x="8860680" y="5120640"/>
-            <a:ext cx="2559600" cy="228240"/>
+            <a:ext cx="2558880" cy="227880"/>
           </a:xfrm>
           <a:prstGeom prst="rect">
             <a:avLst/>
@@ -10825,14 +10817,14 @@
       </p:sp>
       <p:sp>
         <p:nvSpPr>
-          <p:cNvPr id="328" name="TextBox 14"/>
+          <p:cNvPr id="336" name="TextBox 14"/>
           <p:cNvSpPr/>
           <p:nvPr/>
         </p:nvSpPr>
         <p:spPr>
           <a:xfrm>
             <a:off x="8860680" y="5486400"/>
-            <a:ext cx="2559600" cy="198000"/>
+            <a:ext cx="2558880" cy="197640"/>
           </a:xfrm>
           <a:prstGeom prst="rect">
             <a:avLst/>
@@ -10867,7 +10859,7 @@
                 <a:latin typeface="Arial"/>
                 <a:ea typeface="DejaVu Sans"/>
               </a:rPr>
-              <a:t>na niuanse i kontekst</a:t>
+              <a:t>na niuanse i kontekst (jeżeli jest)</a:t>
             </a:r>
             <a:endParaRPr b="0" lang="pl-PL" sz="1300" spc="-1" strike="noStrike">
               <a:latin typeface="Arial"/>
@@ -10914,14 +10906,14 @@
       </p:grpSpPr>
       <p:sp>
         <p:nvSpPr>
-          <p:cNvPr id="329" name="TextBox 1"/>
+          <p:cNvPr id="337" name="TextBox 1"/>
           <p:cNvSpPr/>
           <p:nvPr/>
         </p:nvSpPr>
         <p:spPr>
           <a:xfrm>
             <a:off x="768240" y="2240280"/>
-            <a:ext cx="1828080" cy="974880"/>
+            <a:ext cx="1827360" cy="974880"/>
           </a:xfrm>
           <a:prstGeom prst="rect">
             <a:avLst/>
@@ -10966,14 +10958,14 @@
       </p:sp>
       <p:sp>
         <p:nvSpPr>
-          <p:cNvPr id="330" name="Rectangle 2"/>
+          <p:cNvPr id="338" name="Rectangle 2"/>
           <p:cNvSpPr/>
           <p:nvPr/>
         </p:nvSpPr>
         <p:spPr>
           <a:xfrm>
             <a:off x="768240" y="3246120"/>
-            <a:ext cx="1828080" cy="50040"/>
+            <a:ext cx="1827360" cy="49320"/>
           </a:xfrm>
           <a:prstGeom prst="rect">
             <a:avLst/>
@@ -11007,14 +10999,14 @@
       </p:sp>
       <p:sp>
         <p:nvSpPr>
-          <p:cNvPr id="331" name="TextBox 3"/>
+          <p:cNvPr id="339" name="TextBox 3"/>
           <p:cNvSpPr/>
           <p:nvPr/>
         </p:nvSpPr>
         <p:spPr>
           <a:xfrm>
             <a:off x="768240" y="3429000"/>
-            <a:ext cx="10423440" cy="639720"/>
+            <a:ext cx="10422720" cy="639360"/>
           </a:xfrm>
           <a:prstGeom prst="rect">
             <a:avLst/>
@@ -11059,14 +11051,14 @@
       </p:sp>
       <p:sp>
         <p:nvSpPr>
-          <p:cNvPr id="332" name="TextBox 4"/>
+          <p:cNvPr id="340" name="TextBox 4"/>
           <p:cNvSpPr/>
           <p:nvPr/>
         </p:nvSpPr>
         <p:spPr>
           <a:xfrm>
             <a:off x="768240" y="4754880"/>
-            <a:ext cx="7314480" cy="243360"/>
+            <a:ext cx="7313760" cy="243000"/>
           </a:xfrm>
           <a:prstGeom prst="rect">
             <a:avLst/>
@@ -11148,14 +11140,14 @@
       </p:grpSpPr>
       <p:sp>
         <p:nvSpPr>
-          <p:cNvPr id="333" name="TextBox 1"/>
+          <p:cNvPr id="341" name="TextBox 1"/>
           <p:cNvSpPr/>
           <p:nvPr/>
         </p:nvSpPr>
         <p:spPr>
           <a:xfrm>
             <a:off x="768240" y="420480"/>
-            <a:ext cx="10606320" cy="441720"/>
+            <a:ext cx="10605600" cy="441360"/>
           </a:xfrm>
           <a:prstGeom prst="rect">
             <a:avLst/>
@@ -11200,14 +11192,14 @@
       </p:sp>
       <p:sp>
         <p:nvSpPr>
-          <p:cNvPr id="334" name="Rectangle 2"/>
+          <p:cNvPr id="342" name="Rectangle 2"/>
           <p:cNvSpPr/>
           <p:nvPr/>
         </p:nvSpPr>
         <p:spPr>
           <a:xfrm>
             <a:off x="768240" y="1170360"/>
-            <a:ext cx="1370880" cy="43560"/>
+            <a:ext cx="1370160" cy="42840"/>
           </a:xfrm>
           <a:prstGeom prst="rect">
             <a:avLst/>
@@ -11241,14 +11233,14 @@
       </p:sp>
       <p:sp>
         <p:nvSpPr>
-          <p:cNvPr id="335" name="Rectangle 3"/>
+          <p:cNvPr id="343" name="Rectangle 3"/>
           <p:cNvSpPr/>
           <p:nvPr/>
         </p:nvSpPr>
         <p:spPr>
           <a:xfrm>
             <a:off x="0" y="6437520"/>
-            <a:ext cx="12191040" cy="14400"/>
+            <a:ext cx="12190320" cy="13680"/>
           </a:xfrm>
           <a:prstGeom prst="rect">
             <a:avLst/>
@@ -11282,14 +11274,14 @@
       </p:sp>
       <p:sp>
         <p:nvSpPr>
-          <p:cNvPr id="336" name="TextBox 4"/>
+          <p:cNvPr id="344" name="TextBox 4"/>
           <p:cNvSpPr/>
           <p:nvPr/>
         </p:nvSpPr>
         <p:spPr>
           <a:xfrm>
             <a:off x="768240" y="6473880"/>
-            <a:ext cx="8228880" cy="137160"/>
+            <a:ext cx="8228160" cy="136800"/>
           </a:xfrm>
           <a:prstGeom prst="rect">
             <a:avLst/>
@@ -11334,14 +11326,14 @@
       </p:sp>
       <p:sp>
         <p:nvSpPr>
-          <p:cNvPr id="337" name="TextBox 5"/>
+          <p:cNvPr id="345" name="TextBox 5"/>
           <p:cNvSpPr/>
           <p:nvPr/>
         </p:nvSpPr>
         <p:spPr>
           <a:xfrm>
             <a:off x="10607040" y="6473880"/>
-            <a:ext cx="822240" cy="137160"/>
+            <a:ext cx="821520" cy="136800"/>
           </a:xfrm>
           <a:prstGeom prst="rect">
             <a:avLst/>
@@ -11386,7 +11378,7 @@
       </p:sp>
       <p:graphicFrame>
         <p:nvGraphicFramePr>
-          <p:cNvPr id="338" name="Table 6"/>
+          <p:cNvPr id="346" name="Table 6"/>
           <p:cNvGraphicFramePr/>
           <p:nvPr/>
         </p:nvGraphicFramePr>
@@ -12670,14 +12662,14 @@
       </p:graphicFrame>
       <p:sp>
         <p:nvSpPr>
-          <p:cNvPr id="339" name="Rounded Rectangle 7"/>
+          <p:cNvPr id="347" name="Rounded Rectangle 7"/>
           <p:cNvSpPr/>
           <p:nvPr/>
         </p:nvSpPr>
         <p:spPr>
           <a:xfrm>
             <a:off x="768240" y="4480560"/>
-            <a:ext cx="10652040" cy="685080"/>
+            <a:ext cx="10651320" cy="684360"/>
           </a:xfrm>
           <a:prstGeom prst="roundRect">
             <a:avLst>
@@ -12713,14 +12705,14 @@
       </p:sp>
       <p:sp>
         <p:nvSpPr>
-          <p:cNvPr id="340" name="Rectangle 8"/>
+          <p:cNvPr id="348" name="Rectangle 8"/>
           <p:cNvSpPr/>
           <p:nvPr/>
         </p:nvSpPr>
         <p:spPr>
           <a:xfrm>
             <a:off x="768240" y="4480560"/>
-            <a:ext cx="50040" cy="685080"/>
+            <a:ext cx="49320" cy="684360"/>
           </a:xfrm>
           <a:prstGeom prst="rect">
             <a:avLst/>
@@ -12754,14 +12746,14 @@
       </p:sp>
       <p:sp>
         <p:nvSpPr>
-          <p:cNvPr id="341" name="TextBox 9"/>
+          <p:cNvPr id="349" name="TextBox 9"/>
           <p:cNvSpPr/>
           <p:nvPr/>
         </p:nvSpPr>
         <p:spPr>
           <a:xfrm>
             <a:off x="1024200" y="4633560"/>
-            <a:ext cx="10194840" cy="415800"/>
+            <a:ext cx="10194120" cy="415080"/>
           </a:xfrm>
           <a:prstGeom prst="rect">
             <a:avLst/>
@@ -12843,14 +12835,14 @@
       </p:grpSpPr>
       <p:sp>
         <p:nvSpPr>
-          <p:cNvPr id="342" name="TextBox 1"/>
+          <p:cNvPr id="350" name="TextBox 1"/>
           <p:cNvSpPr/>
           <p:nvPr/>
         </p:nvSpPr>
         <p:spPr>
           <a:xfrm>
             <a:off x="768240" y="420480"/>
-            <a:ext cx="10606320" cy="441720"/>
+            <a:ext cx="10605600" cy="441360"/>
           </a:xfrm>
           <a:prstGeom prst="rect">
             <a:avLst/>
@@ -12895,14 +12887,14 @@
       </p:sp>
       <p:sp>
         <p:nvSpPr>
-          <p:cNvPr id="343" name="Rectangle 2"/>
+          <p:cNvPr id="351" name="Rectangle 2"/>
           <p:cNvSpPr/>
           <p:nvPr/>
         </p:nvSpPr>
         <p:spPr>
           <a:xfrm>
             <a:off x="768240" y="1170360"/>
-            <a:ext cx="1370880" cy="43560"/>
+            <a:ext cx="1370160" cy="42840"/>
           </a:xfrm>
           <a:prstGeom prst="rect">
             <a:avLst/>
@@ -12936,14 +12928,14 @@
       </p:sp>
       <p:sp>
         <p:nvSpPr>
-          <p:cNvPr id="344" name="TextBox 3"/>
+          <p:cNvPr id="352" name="TextBox 3"/>
           <p:cNvSpPr/>
           <p:nvPr/>
         </p:nvSpPr>
         <p:spPr>
           <a:xfrm>
             <a:off x="768240" y="1298520"/>
-            <a:ext cx="10606320" cy="228240"/>
+            <a:ext cx="10605600" cy="227880"/>
           </a:xfrm>
           <a:prstGeom prst="rect">
             <a:avLst/>
@@ -12988,14 +12980,14 @@
       </p:sp>
       <p:sp>
         <p:nvSpPr>
-          <p:cNvPr id="345" name="Rectangle 4"/>
+          <p:cNvPr id="353" name="Rectangle 4"/>
           <p:cNvSpPr/>
           <p:nvPr/>
         </p:nvSpPr>
         <p:spPr>
           <a:xfrm>
             <a:off x="0" y="6437520"/>
-            <a:ext cx="12191040" cy="14400"/>
+            <a:ext cx="12190320" cy="13680"/>
           </a:xfrm>
           <a:prstGeom prst="rect">
             <a:avLst/>
@@ -13029,14 +13021,14 @@
       </p:sp>
       <p:sp>
         <p:nvSpPr>
-          <p:cNvPr id="346" name="TextBox 5"/>
+          <p:cNvPr id="354" name="TextBox 5"/>
           <p:cNvSpPr/>
           <p:nvPr/>
         </p:nvSpPr>
         <p:spPr>
           <a:xfrm>
             <a:off x="768240" y="6473880"/>
-            <a:ext cx="8228880" cy="137160"/>
+            <a:ext cx="8228160" cy="136800"/>
           </a:xfrm>
           <a:prstGeom prst="rect">
             <a:avLst/>
@@ -13081,14 +13073,14 @@
       </p:sp>
       <p:sp>
         <p:nvSpPr>
-          <p:cNvPr id="347" name="TextBox 6"/>
+          <p:cNvPr id="355" name="TextBox 6"/>
           <p:cNvSpPr/>
           <p:nvPr/>
         </p:nvSpPr>
         <p:spPr>
           <a:xfrm>
             <a:off x="10607040" y="6473880"/>
-            <a:ext cx="822240" cy="137160"/>
+            <a:ext cx="821520" cy="136800"/>
           </a:xfrm>
           <a:prstGeom prst="rect">
             <a:avLst/>
@@ -13133,14 +13125,14 @@
       </p:sp>
       <p:sp>
         <p:nvSpPr>
-          <p:cNvPr id="348" name="Rounded Rectangle 7"/>
+          <p:cNvPr id="356" name="Rounded Rectangle 7"/>
           <p:cNvSpPr/>
           <p:nvPr/>
         </p:nvSpPr>
         <p:spPr>
           <a:xfrm>
             <a:off x="768240" y="1828800"/>
-            <a:ext cx="10652040" cy="602640"/>
+            <a:ext cx="10651320" cy="601920"/>
           </a:xfrm>
           <a:prstGeom prst="roundRect">
             <a:avLst>
@@ -13176,14 +13168,14 @@
       </p:sp>
       <p:sp>
         <p:nvSpPr>
-          <p:cNvPr id="349" name="Rounded Rectangle 8"/>
+          <p:cNvPr id="357" name="Rounded Rectangle 8"/>
           <p:cNvSpPr/>
           <p:nvPr/>
         </p:nvSpPr>
         <p:spPr>
           <a:xfrm>
             <a:off x="768240" y="1828800"/>
-            <a:ext cx="1553760" cy="602640"/>
+            <a:ext cx="1553040" cy="601920"/>
           </a:xfrm>
           <a:prstGeom prst="roundRect">
             <a:avLst>
@@ -13219,14 +13211,14 @@
       </p:sp>
       <p:sp>
         <p:nvSpPr>
-          <p:cNvPr id="350" name="TextBox 9"/>
+          <p:cNvPr id="358" name="TextBox 9"/>
           <p:cNvSpPr/>
           <p:nvPr/>
         </p:nvSpPr>
         <p:spPr>
           <a:xfrm>
             <a:off x="768240" y="1938600"/>
-            <a:ext cx="1553760" cy="228240"/>
+            <a:ext cx="1553040" cy="227880"/>
           </a:xfrm>
           <a:prstGeom prst="rect">
             <a:avLst/>
@@ -13271,14 +13263,14 @@
       </p:sp>
       <p:sp>
         <p:nvSpPr>
-          <p:cNvPr id="351" name="TextBox 10"/>
+          <p:cNvPr id="359" name="TextBox 10"/>
           <p:cNvSpPr/>
           <p:nvPr/>
         </p:nvSpPr>
         <p:spPr>
           <a:xfrm>
             <a:off x="2551320" y="2027160"/>
-            <a:ext cx="8594640" cy="205920"/>
+            <a:ext cx="8593920" cy="205200"/>
           </a:xfrm>
           <a:prstGeom prst="rect">
             <a:avLst/>
@@ -13323,14 +13315,14 @@
       </p:sp>
       <p:sp>
         <p:nvSpPr>
-          <p:cNvPr id="352" name="Rounded Rectangle 11"/>
+          <p:cNvPr id="360" name="Rounded Rectangle 11"/>
           <p:cNvSpPr/>
           <p:nvPr/>
         </p:nvSpPr>
         <p:spPr>
           <a:xfrm>
             <a:off x="768240" y="2541960"/>
-            <a:ext cx="10652040" cy="602640"/>
+            <a:ext cx="10651320" cy="601920"/>
           </a:xfrm>
           <a:prstGeom prst="roundRect">
             <a:avLst>
@@ -13366,14 +13358,14 @@
       </p:sp>
       <p:sp>
         <p:nvSpPr>
-          <p:cNvPr id="353" name="Rounded Rectangle 12"/>
+          <p:cNvPr id="361" name="Rounded Rectangle 12"/>
           <p:cNvSpPr/>
           <p:nvPr/>
         </p:nvSpPr>
         <p:spPr>
           <a:xfrm>
             <a:off x="768240" y="2541960"/>
-            <a:ext cx="1553760" cy="602640"/>
+            <a:ext cx="1553040" cy="601920"/>
           </a:xfrm>
           <a:prstGeom prst="roundRect">
             <a:avLst>
@@ -13409,14 +13401,14 @@
       </p:sp>
       <p:sp>
         <p:nvSpPr>
-          <p:cNvPr id="354" name="TextBox 13"/>
+          <p:cNvPr id="362" name="TextBox 13"/>
           <p:cNvSpPr/>
           <p:nvPr/>
         </p:nvSpPr>
         <p:spPr>
           <a:xfrm>
             <a:off x="768240" y="2651760"/>
-            <a:ext cx="1553760" cy="228240"/>
+            <a:ext cx="1553040" cy="227880"/>
           </a:xfrm>
           <a:prstGeom prst="rect">
             <a:avLst/>
@@ -13461,14 +13453,14 @@
       </p:sp>
       <p:sp>
         <p:nvSpPr>
-          <p:cNvPr id="355" name="TextBox 14"/>
+          <p:cNvPr id="363" name="TextBox 14"/>
           <p:cNvSpPr/>
           <p:nvPr/>
         </p:nvSpPr>
         <p:spPr>
           <a:xfrm>
             <a:off x="2551320" y="2740320"/>
-            <a:ext cx="8594640" cy="205920"/>
+            <a:ext cx="8593920" cy="205200"/>
           </a:xfrm>
           <a:prstGeom prst="rect">
             <a:avLst/>
@@ -13513,14 +13505,14 @@
       </p:sp>
       <p:sp>
         <p:nvSpPr>
-          <p:cNvPr id="356" name="Rounded Rectangle 15"/>
+          <p:cNvPr id="364" name="Rounded Rectangle 15"/>
           <p:cNvSpPr/>
           <p:nvPr/>
         </p:nvSpPr>
         <p:spPr>
           <a:xfrm>
             <a:off x="768240" y="3255120"/>
-            <a:ext cx="10652040" cy="602640"/>
+            <a:ext cx="10651320" cy="601920"/>
           </a:xfrm>
           <a:prstGeom prst="roundRect">
             <a:avLst>
@@ -13556,14 +13548,14 @@
       </p:sp>
       <p:sp>
         <p:nvSpPr>
-          <p:cNvPr id="357" name="Rounded Rectangle 16"/>
+          <p:cNvPr id="365" name="Rounded Rectangle 16"/>
           <p:cNvSpPr/>
           <p:nvPr/>
         </p:nvSpPr>
         <p:spPr>
           <a:xfrm>
             <a:off x="768240" y="3255120"/>
-            <a:ext cx="1553760" cy="602640"/>
+            <a:ext cx="1553040" cy="601920"/>
           </a:xfrm>
           <a:prstGeom prst="roundRect">
             <a:avLst>
@@ -13599,14 +13591,14 @@
       </p:sp>
       <p:sp>
         <p:nvSpPr>
-          <p:cNvPr id="358" name="TextBox 17"/>
+          <p:cNvPr id="366" name="TextBox 17"/>
           <p:cNvSpPr/>
           <p:nvPr/>
         </p:nvSpPr>
         <p:spPr>
           <a:xfrm>
             <a:off x="768240" y="3364920"/>
-            <a:ext cx="1553760" cy="228240"/>
+            <a:ext cx="1553040" cy="227880"/>
           </a:xfrm>
           <a:prstGeom prst="rect">
             <a:avLst/>
@@ -13651,14 +13643,14 @@
       </p:sp>
       <p:sp>
         <p:nvSpPr>
-          <p:cNvPr id="359" name="TextBox 18"/>
+          <p:cNvPr id="367" name="TextBox 18"/>
           <p:cNvSpPr/>
           <p:nvPr/>
         </p:nvSpPr>
         <p:spPr>
           <a:xfrm>
             <a:off x="2551320" y="3453480"/>
-            <a:ext cx="8594640" cy="205920"/>
+            <a:ext cx="8593920" cy="205200"/>
           </a:xfrm>
           <a:prstGeom prst="rect">
             <a:avLst/>
@@ -13703,7 +13695,7 @@
       </p:sp>
       <p:graphicFrame>
         <p:nvGraphicFramePr>
-          <p:cNvPr id="360" name="Table 19"/>
+          <p:cNvPr id="368" name="Table 19"/>
           <p:cNvGraphicFramePr/>
           <p:nvPr/>
         </p:nvGraphicFramePr>
@@ -15085,7 +15077,7 @@
         <p:spPr>
           <a:xfrm>
             <a:off x="768240" y="420480"/>
-            <a:ext cx="10606320" cy="441720"/>
+            <a:ext cx="10605600" cy="441360"/>
           </a:xfrm>
           <a:prstGeom prst="rect">
             <a:avLst/>
@@ -15137,7 +15129,7 @@
         <p:spPr>
           <a:xfrm>
             <a:off x="768240" y="1170360"/>
-            <a:ext cx="1370880" cy="43560"/>
+            <a:ext cx="1370160" cy="42840"/>
           </a:xfrm>
           <a:prstGeom prst="rect">
             <a:avLst/>
@@ -15178,7 +15170,7 @@
         <p:spPr>
           <a:xfrm>
             <a:off x="0" y="6437520"/>
-            <a:ext cx="12191040" cy="14400"/>
+            <a:ext cx="12190320" cy="13680"/>
           </a:xfrm>
           <a:prstGeom prst="rect">
             <a:avLst/>
@@ -15219,7 +15211,7 @@
         <p:spPr>
           <a:xfrm>
             <a:off x="768240" y="6473880"/>
-            <a:ext cx="8228880" cy="137160"/>
+            <a:ext cx="8228160" cy="136800"/>
           </a:xfrm>
           <a:prstGeom prst="rect">
             <a:avLst/>
@@ -15271,7 +15263,7 @@
         <p:spPr>
           <a:xfrm>
             <a:off x="10607040" y="6473880"/>
-            <a:ext cx="822240" cy="137160"/>
+            <a:ext cx="821520" cy="136800"/>
           </a:xfrm>
           <a:prstGeom prst="rect">
             <a:avLst/>
@@ -15323,7 +15315,7 @@
         <p:spPr>
           <a:xfrm>
             <a:off x="768240" y="1417320"/>
-            <a:ext cx="10606320" cy="785520"/>
+            <a:ext cx="10605600" cy="784800"/>
           </a:xfrm>
           <a:prstGeom prst="roundRect">
             <a:avLst>
@@ -15366,7 +15358,7 @@
         <p:spPr>
           <a:xfrm>
             <a:off x="951120" y="1581840"/>
-            <a:ext cx="456480" cy="456480"/>
+            <a:ext cx="455760" cy="455760"/>
           </a:xfrm>
           <a:prstGeom prst="ellipse">
             <a:avLst/>
@@ -15407,7 +15399,7 @@
         <p:spPr>
           <a:xfrm>
             <a:off x="951120" y="1668240"/>
-            <a:ext cx="456480" cy="274680"/>
+            <a:ext cx="455760" cy="273960"/>
           </a:xfrm>
           <a:prstGeom prst="rect">
             <a:avLst/>
@@ -15459,7 +15451,7 @@
         <p:spPr>
           <a:xfrm>
             <a:off x="1636920" y="1508760"/>
-            <a:ext cx="6400080" cy="243360"/>
+            <a:ext cx="6399360" cy="243000"/>
           </a:xfrm>
           <a:prstGeom prst="rect">
             <a:avLst/>
@@ -15511,7 +15503,7 @@
         <p:spPr>
           <a:xfrm>
             <a:off x="1636920" y="1837800"/>
-            <a:ext cx="7771680" cy="182520"/>
+            <a:ext cx="7770960" cy="182160"/>
           </a:xfrm>
           <a:prstGeom prst="rect">
             <a:avLst/>
@@ -15563,7 +15555,7 @@
         <p:spPr>
           <a:xfrm>
             <a:off x="9546480" y="1703160"/>
-            <a:ext cx="1736640" cy="213480"/>
+            <a:ext cx="1735920" cy="212760"/>
           </a:xfrm>
           <a:prstGeom prst="rect">
             <a:avLst/>
@@ -15615,7 +15607,7 @@
         <p:spPr>
           <a:xfrm>
             <a:off x="768240" y="2350080"/>
-            <a:ext cx="10606320" cy="785520"/>
+            <a:ext cx="10605600" cy="784800"/>
           </a:xfrm>
           <a:prstGeom prst="roundRect">
             <a:avLst>
@@ -15658,7 +15650,7 @@
         <p:spPr>
           <a:xfrm>
             <a:off x="951120" y="2514600"/>
-            <a:ext cx="456480" cy="456480"/>
+            <a:ext cx="455760" cy="455760"/>
           </a:xfrm>
           <a:prstGeom prst="ellipse">
             <a:avLst/>
@@ -15699,7 +15691,7 @@
         <p:spPr>
           <a:xfrm>
             <a:off x="951120" y="2601000"/>
-            <a:ext cx="456480" cy="274680"/>
+            <a:ext cx="455760" cy="273960"/>
           </a:xfrm>
           <a:prstGeom prst="rect">
             <a:avLst/>
@@ -15751,7 +15743,7 @@
         <p:spPr>
           <a:xfrm>
             <a:off x="1636920" y="2441520"/>
-            <a:ext cx="6400080" cy="243360"/>
+            <a:ext cx="6399360" cy="243000"/>
           </a:xfrm>
           <a:prstGeom prst="rect">
             <a:avLst/>
@@ -15803,7 +15795,7 @@
         <p:spPr>
           <a:xfrm>
             <a:off x="1636920" y="2770560"/>
-            <a:ext cx="7771680" cy="182520"/>
+            <a:ext cx="7770960" cy="182160"/>
           </a:xfrm>
           <a:prstGeom prst="rect">
             <a:avLst/>
@@ -15855,7 +15847,7 @@
         <p:spPr>
           <a:xfrm>
             <a:off x="9546480" y="2635920"/>
-            <a:ext cx="1736640" cy="213480"/>
+            <a:ext cx="1735920" cy="212760"/>
           </a:xfrm>
           <a:prstGeom prst="rect">
             <a:avLst/>
@@ -15907,7 +15899,7 @@
         <p:spPr>
           <a:xfrm>
             <a:off x="768240" y="3282840"/>
-            <a:ext cx="10606320" cy="785520"/>
+            <a:ext cx="10605600" cy="784800"/>
           </a:xfrm>
           <a:prstGeom prst="roundRect">
             <a:avLst>
@@ -15950,7 +15942,7 @@
         <p:spPr>
           <a:xfrm>
             <a:off x="951120" y="3447360"/>
-            <a:ext cx="456480" cy="456480"/>
+            <a:ext cx="455760" cy="455760"/>
           </a:xfrm>
           <a:prstGeom prst="ellipse">
             <a:avLst/>
@@ -15991,7 +15983,7 @@
         <p:spPr>
           <a:xfrm>
             <a:off x="951120" y="3533760"/>
-            <a:ext cx="456480" cy="274680"/>
+            <a:ext cx="455760" cy="273960"/>
           </a:xfrm>
           <a:prstGeom prst="rect">
             <a:avLst/>
@@ -16043,7 +16035,7 @@
         <p:spPr>
           <a:xfrm>
             <a:off x="1636920" y="3374280"/>
-            <a:ext cx="6400080" cy="243360"/>
+            <a:ext cx="6399360" cy="243000"/>
           </a:xfrm>
           <a:prstGeom prst="rect">
             <a:avLst/>
@@ -16095,7 +16087,7 @@
         <p:spPr>
           <a:xfrm>
             <a:off x="1636920" y="3703320"/>
-            <a:ext cx="7771680" cy="182520"/>
+            <a:ext cx="7770960" cy="182160"/>
           </a:xfrm>
           <a:prstGeom prst="rect">
             <a:avLst/>
@@ -16147,7 +16139,7 @@
         <p:spPr>
           <a:xfrm>
             <a:off x="9546480" y="3568680"/>
-            <a:ext cx="1736640" cy="213480"/>
+            <a:ext cx="1735920" cy="212760"/>
           </a:xfrm>
           <a:prstGeom prst="rect">
             <a:avLst/>
@@ -16199,7 +16191,7 @@
         <p:spPr>
           <a:xfrm>
             <a:off x="768240" y="4215240"/>
-            <a:ext cx="10606320" cy="785520"/>
+            <a:ext cx="10605600" cy="784800"/>
           </a:xfrm>
           <a:prstGeom prst="roundRect">
             <a:avLst>
@@ -16242,7 +16234,7 @@
         <p:spPr>
           <a:xfrm>
             <a:off x="951120" y="4380120"/>
-            <a:ext cx="456480" cy="456480"/>
+            <a:ext cx="455760" cy="455760"/>
           </a:xfrm>
           <a:prstGeom prst="ellipse">
             <a:avLst/>
@@ -16283,7 +16275,7 @@
         <p:spPr>
           <a:xfrm>
             <a:off x="951120" y="4466160"/>
-            <a:ext cx="456480" cy="274680"/>
+            <a:ext cx="455760" cy="273960"/>
           </a:xfrm>
           <a:prstGeom prst="rect">
             <a:avLst/>
@@ -16335,7 +16327,7 @@
         <p:spPr>
           <a:xfrm>
             <a:off x="1636920" y="4306680"/>
-            <a:ext cx="6400080" cy="243360"/>
+            <a:ext cx="6399360" cy="243000"/>
           </a:xfrm>
           <a:prstGeom prst="rect">
             <a:avLst/>
@@ -16387,7 +16379,7 @@
         <p:spPr>
           <a:xfrm>
             <a:off x="1636920" y="4636080"/>
-            <a:ext cx="7771680" cy="182520"/>
+            <a:ext cx="7770960" cy="182160"/>
           </a:xfrm>
           <a:prstGeom prst="rect">
             <a:avLst/>
@@ -16439,7 +16431,7 @@
         <p:spPr>
           <a:xfrm>
             <a:off x="9546480" y="4501080"/>
-            <a:ext cx="1736640" cy="213480"/>
+            <a:ext cx="1735920" cy="212760"/>
           </a:xfrm>
           <a:prstGeom prst="rect">
             <a:avLst/>
@@ -16491,7 +16483,7 @@
         <p:spPr>
           <a:xfrm>
             <a:off x="768240" y="5148000"/>
-            <a:ext cx="10606320" cy="785520"/>
+            <a:ext cx="10605600" cy="784800"/>
           </a:xfrm>
           <a:prstGeom prst="roundRect">
             <a:avLst>
@@ -16534,7 +16526,7 @@
         <p:spPr>
           <a:xfrm>
             <a:off x="951120" y="5312520"/>
-            <a:ext cx="456480" cy="456480"/>
+            <a:ext cx="455760" cy="455760"/>
           </a:xfrm>
           <a:prstGeom prst="ellipse">
             <a:avLst/>
@@ -16575,7 +16567,7 @@
         <p:spPr>
           <a:xfrm>
             <a:off x="951120" y="5398920"/>
-            <a:ext cx="456480" cy="274680"/>
+            <a:ext cx="455760" cy="273960"/>
           </a:xfrm>
           <a:prstGeom prst="rect">
             <a:avLst/>
@@ -16627,7 +16619,7 @@
         <p:spPr>
           <a:xfrm>
             <a:off x="1636920" y="5239440"/>
-            <a:ext cx="6400080" cy="243360"/>
+            <a:ext cx="6399360" cy="243000"/>
           </a:xfrm>
           <a:prstGeom prst="rect">
             <a:avLst/>
@@ -16679,7 +16671,7 @@
         <p:spPr>
           <a:xfrm>
             <a:off x="1636920" y="5568840"/>
-            <a:ext cx="7771680" cy="182520"/>
+            <a:ext cx="7770960" cy="182160"/>
           </a:xfrm>
           <a:prstGeom prst="rect">
             <a:avLst/>
@@ -16731,7 +16723,7 @@
         <p:spPr>
           <a:xfrm>
             <a:off x="9546480" y="5433840"/>
-            <a:ext cx="1736640" cy="213480"/>
+            <a:ext cx="1735920" cy="212760"/>
           </a:xfrm>
           <a:prstGeom prst="rect">
             <a:avLst/>
@@ -16813,14 +16805,14 @@
       </p:grpSpPr>
       <p:sp>
         <p:nvSpPr>
-          <p:cNvPr id="361" name="TextBox 1"/>
+          <p:cNvPr id="369" name="TextBox 1"/>
           <p:cNvSpPr/>
           <p:nvPr/>
         </p:nvSpPr>
         <p:spPr>
           <a:xfrm>
             <a:off x="768240" y="420480"/>
-            <a:ext cx="10606320" cy="441720"/>
+            <a:ext cx="10605600" cy="441360"/>
           </a:xfrm>
           <a:prstGeom prst="rect">
             <a:avLst/>
@@ -16865,14 +16857,14 @@
       </p:sp>
       <p:sp>
         <p:nvSpPr>
-          <p:cNvPr id="362" name="Rectangle 2"/>
+          <p:cNvPr id="370" name="Rectangle 2"/>
           <p:cNvSpPr/>
           <p:nvPr/>
         </p:nvSpPr>
         <p:spPr>
           <a:xfrm>
             <a:off x="768240" y="1170360"/>
-            <a:ext cx="1370880" cy="43560"/>
+            <a:ext cx="1370160" cy="42840"/>
           </a:xfrm>
           <a:prstGeom prst="rect">
             <a:avLst/>
@@ -16906,14 +16898,14 @@
       </p:sp>
       <p:sp>
         <p:nvSpPr>
-          <p:cNvPr id="363" name="TextBox 3"/>
+          <p:cNvPr id="371" name="TextBox 3"/>
           <p:cNvSpPr/>
           <p:nvPr/>
         </p:nvSpPr>
         <p:spPr>
           <a:xfrm>
             <a:off x="768240" y="1298520"/>
-            <a:ext cx="10606320" cy="228240"/>
+            <a:ext cx="10605600" cy="227880"/>
           </a:xfrm>
           <a:prstGeom prst="rect">
             <a:avLst/>
@@ -16958,14 +16950,14 @@
       </p:sp>
       <p:sp>
         <p:nvSpPr>
-          <p:cNvPr id="364" name="Rectangle 4"/>
+          <p:cNvPr id="372" name="Rectangle 4"/>
           <p:cNvSpPr/>
           <p:nvPr/>
         </p:nvSpPr>
         <p:spPr>
           <a:xfrm>
             <a:off x="0" y="6437520"/>
-            <a:ext cx="12191040" cy="14400"/>
+            <a:ext cx="12190320" cy="13680"/>
           </a:xfrm>
           <a:prstGeom prst="rect">
             <a:avLst/>
@@ -16999,14 +16991,14 @@
       </p:sp>
       <p:sp>
         <p:nvSpPr>
-          <p:cNvPr id="365" name="TextBox 5"/>
+          <p:cNvPr id="373" name="TextBox 5"/>
           <p:cNvSpPr/>
           <p:nvPr/>
         </p:nvSpPr>
         <p:spPr>
           <a:xfrm>
             <a:off x="768240" y="6473880"/>
-            <a:ext cx="8228880" cy="137160"/>
+            <a:ext cx="8228160" cy="136800"/>
           </a:xfrm>
           <a:prstGeom prst="rect">
             <a:avLst/>
@@ -17051,14 +17043,14 @@
       </p:sp>
       <p:sp>
         <p:nvSpPr>
-          <p:cNvPr id="366" name="TextBox 6"/>
+          <p:cNvPr id="374" name="TextBox 6"/>
           <p:cNvSpPr/>
           <p:nvPr/>
         </p:nvSpPr>
         <p:spPr>
           <a:xfrm>
             <a:off x="10607040" y="6473880"/>
-            <a:ext cx="822240" cy="137160"/>
+            <a:ext cx="821520" cy="136800"/>
           </a:xfrm>
           <a:prstGeom prst="rect">
             <a:avLst/>
@@ -17103,14 +17095,14 @@
       </p:sp>
       <p:sp>
         <p:nvSpPr>
-          <p:cNvPr id="367" name="TextBox 7"/>
+          <p:cNvPr id="375" name="TextBox 7"/>
           <p:cNvSpPr/>
           <p:nvPr/>
         </p:nvSpPr>
         <p:spPr>
           <a:xfrm>
             <a:off x="768240" y="1828800"/>
-            <a:ext cx="5028480" cy="213120"/>
+            <a:ext cx="5027760" cy="212760"/>
           </a:xfrm>
           <a:prstGeom prst="rect">
             <a:avLst/>
@@ -17155,14 +17147,14 @@
       </p:sp>
       <p:sp>
         <p:nvSpPr>
-          <p:cNvPr id="368" name="Rounded Rectangle 8"/>
+          <p:cNvPr id="376" name="Rounded Rectangle 8"/>
           <p:cNvSpPr/>
           <p:nvPr/>
         </p:nvSpPr>
         <p:spPr>
           <a:xfrm>
             <a:off x="768240" y="2194560"/>
-            <a:ext cx="5119920" cy="863280"/>
+            <a:ext cx="5119200" cy="862560"/>
           </a:xfrm>
           <a:prstGeom prst="roundRect">
             <a:avLst>
@@ -17198,14 +17190,14 @@
       </p:sp>
       <p:sp>
         <p:nvSpPr>
-          <p:cNvPr id="369" name="TextBox 9"/>
+          <p:cNvPr id="377" name="TextBox 9"/>
           <p:cNvSpPr/>
           <p:nvPr/>
         </p:nvSpPr>
         <p:spPr>
           <a:xfrm>
             <a:off x="1989720" y="2277000"/>
-            <a:ext cx="2676960" cy="660960"/>
+            <a:ext cx="2676240" cy="660960"/>
           </a:xfrm>
           <a:prstGeom prst="rect">
             <a:avLst/>
@@ -17302,14 +17294,14 @@
       </p:sp>
       <p:sp>
         <p:nvSpPr>
-          <p:cNvPr id="370" name="TextBox 10"/>
+          <p:cNvPr id="378" name="TextBox 10"/>
           <p:cNvSpPr/>
           <p:nvPr/>
         </p:nvSpPr>
         <p:spPr>
           <a:xfrm>
             <a:off x="6400800" y="1828800"/>
-            <a:ext cx="5028480" cy="213120"/>
+            <a:ext cx="5027760" cy="212760"/>
           </a:xfrm>
           <a:prstGeom prst="rect">
             <a:avLst/>
@@ -17354,14 +17346,14 @@
       </p:sp>
       <p:sp>
         <p:nvSpPr>
-          <p:cNvPr id="371" name="Rounded Rectangle 11"/>
+          <p:cNvPr id="379" name="Rounded Rectangle 11"/>
           <p:cNvSpPr/>
           <p:nvPr/>
         </p:nvSpPr>
         <p:spPr>
           <a:xfrm>
             <a:off x="6400800" y="2194560"/>
-            <a:ext cx="5028480" cy="1329840"/>
+            <a:ext cx="5027760" cy="1329120"/>
           </a:xfrm>
           <a:prstGeom prst="roundRect">
             <a:avLst>
@@ -17397,14 +17389,14 @@
       </p:sp>
       <p:sp>
         <p:nvSpPr>
-          <p:cNvPr id="372" name="TextBox 12"/>
+          <p:cNvPr id="380" name="TextBox 12"/>
           <p:cNvSpPr/>
           <p:nvPr/>
         </p:nvSpPr>
         <p:spPr>
           <a:xfrm>
             <a:off x="6904440" y="2277000"/>
-            <a:ext cx="4021200" cy="1041840"/>
+            <a:ext cx="4020480" cy="1041840"/>
           </a:xfrm>
           <a:prstGeom prst="rect">
             <a:avLst/>
@@ -17573,14 +17565,14 @@
       </p:sp>
       <p:sp>
         <p:nvSpPr>
-          <p:cNvPr id="373" name="Rounded Rectangle 13"/>
+          <p:cNvPr id="381" name="Rounded Rectangle 13"/>
           <p:cNvSpPr/>
           <p:nvPr/>
         </p:nvSpPr>
         <p:spPr>
           <a:xfrm>
             <a:off x="768240" y="4206240"/>
-            <a:ext cx="10652040" cy="730800"/>
+            <a:ext cx="10651320" cy="730080"/>
           </a:xfrm>
           <a:prstGeom prst="roundRect">
             <a:avLst>
@@ -17616,14 +17608,14 @@
       </p:sp>
       <p:sp>
         <p:nvSpPr>
-          <p:cNvPr id="374" name="Rectangle 14"/>
+          <p:cNvPr id="382" name="Rectangle 14"/>
           <p:cNvSpPr/>
           <p:nvPr/>
         </p:nvSpPr>
         <p:spPr>
           <a:xfrm>
             <a:off x="768240" y="4206240"/>
-            <a:ext cx="50040" cy="730800"/>
+            <a:ext cx="49320" cy="730080"/>
           </a:xfrm>
           <a:prstGeom prst="rect">
             <a:avLst/>
@@ -17657,14 +17649,14 @@
       </p:sp>
       <p:sp>
         <p:nvSpPr>
-          <p:cNvPr id="375" name="TextBox 15"/>
+          <p:cNvPr id="383" name="TextBox 15"/>
           <p:cNvSpPr/>
           <p:nvPr/>
         </p:nvSpPr>
         <p:spPr>
           <a:xfrm>
             <a:off x="1024200" y="4271040"/>
-            <a:ext cx="10194840" cy="638280"/>
+            <a:ext cx="10194120" cy="638280"/>
           </a:xfrm>
           <a:prstGeom prst="rect">
             <a:avLst/>
@@ -17777,14 +17769,14 @@
       </p:grpSpPr>
       <p:sp>
         <p:nvSpPr>
-          <p:cNvPr id="376" name="TextBox 1"/>
+          <p:cNvPr id="384" name="TextBox 1"/>
           <p:cNvSpPr/>
           <p:nvPr/>
         </p:nvSpPr>
         <p:spPr>
           <a:xfrm>
             <a:off x="768240" y="420480"/>
-            <a:ext cx="10606320" cy="441720"/>
+            <a:ext cx="10605600" cy="441360"/>
           </a:xfrm>
           <a:prstGeom prst="rect">
             <a:avLst/>
@@ -17829,14 +17821,14 @@
       </p:sp>
       <p:sp>
         <p:nvSpPr>
-          <p:cNvPr id="377" name="Rectangle 2"/>
+          <p:cNvPr id="385" name="Rectangle 2"/>
           <p:cNvSpPr/>
           <p:nvPr/>
         </p:nvSpPr>
         <p:spPr>
           <a:xfrm>
             <a:off x="768240" y="1170360"/>
-            <a:ext cx="1370880" cy="43560"/>
+            <a:ext cx="1370160" cy="42840"/>
           </a:xfrm>
           <a:prstGeom prst="rect">
             <a:avLst/>
@@ -17870,14 +17862,14 @@
       </p:sp>
       <p:sp>
         <p:nvSpPr>
-          <p:cNvPr id="378" name="TextBox 3"/>
+          <p:cNvPr id="386" name="TextBox 3"/>
           <p:cNvSpPr/>
           <p:nvPr/>
         </p:nvSpPr>
         <p:spPr>
           <a:xfrm>
             <a:off x="768240" y="1298520"/>
-            <a:ext cx="10606320" cy="228240"/>
+            <a:ext cx="10605600" cy="227880"/>
           </a:xfrm>
           <a:prstGeom prst="rect">
             <a:avLst/>
@@ -17922,14 +17914,14 @@
       </p:sp>
       <p:sp>
         <p:nvSpPr>
-          <p:cNvPr id="379" name="Rectangle 4"/>
+          <p:cNvPr id="387" name="Rectangle 4"/>
           <p:cNvSpPr/>
           <p:nvPr/>
         </p:nvSpPr>
         <p:spPr>
           <a:xfrm>
             <a:off x="0" y="6437520"/>
-            <a:ext cx="12191040" cy="14400"/>
+            <a:ext cx="12190320" cy="13680"/>
           </a:xfrm>
           <a:prstGeom prst="rect">
             <a:avLst/>
@@ -17963,14 +17955,14 @@
       </p:sp>
       <p:sp>
         <p:nvSpPr>
-          <p:cNvPr id="380" name="TextBox 5"/>
+          <p:cNvPr id="388" name="TextBox 5"/>
           <p:cNvSpPr/>
           <p:nvPr/>
         </p:nvSpPr>
         <p:spPr>
           <a:xfrm>
             <a:off x="768240" y="6473880"/>
-            <a:ext cx="8228880" cy="137160"/>
+            <a:ext cx="8228160" cy="136800"/>
           </a:xfrm>
           <a:prstGeom prst="rect">
             <a:avLst/>
@@ -18015,14 +18007,14 @@
       </p:sp>
       <p:sp>
         <p:nvSpPr>
-          <p:cNvPr id="381" name="TextBox 6"/>
+          <p:cNvPr id="389" name="TextBox 6"/>
           <p:cNvSpPr/>
           <p:nvPr/>
         </p:nvSpPr>
         <p:spPr>
           <a:xfrm>
             <a:off x="10607040" y="6473880"/>
-            <a:ext cx="822240" cy="137160"/>
+            <a:ext cx="821520" cy="136800"/>
           </a:xfrm>
           <a:prstGeom prst="rect">
             <a:avLst/>
@@ -18067,14 +18059,14 @@
       </p:sp>
       <p:sp>
         <p:nvSpPr>
-          <p:cNvPr id="382" name="TextBox 7"/>
+          <p:cNvPr id="390" name="TextBox 7"/>
           <p:cNvSpPr/>
           <p:nvPr/>
         </p:nvSpPr>
         <p:spPr>
           <a:xfrm>
             <a:off x="768240" y="1828800"/>
-            <a:ext cx="5394240" cy="1283760"/>
+            <a:ext cx="5393520" cy="1283760"/>
           </a:xfrm>
           <a:prstGeom prst="rect">
             <a:avLst/>
@@ -18234,14 +18226,14 @@
       </p:sp>
       <p:sp>
         <p:nvSpPr>
-          <p:cNvPr id="383" name="TextBox 8"/>
+          <p:cNvPr id="391" name="TextBox 8"/>
           <p:cNvSpPr/>
           <p:nvPr/>
         </p:nvSpPr>
         <p:spPr>
           <a:xfrm>
             <a:off x="6400800" y="1783080"/>
-            <a:ext cx="5028480" cy="213120"/>
+            <a:ext cx="5027760" cy="212760"/>
           </a:xfrm>
           <a:prstGeom prst="rect">
             <a:avLst/>
@@ -18286,7 +18278,7 @@
       </p:sp>
       <p:graphicFrame>
         <p:nvGraphicFramePr>
-          <p:cNvPr id="384" name="Table 9"/>
+          <p:cNvPr id="392" name="Table 9"/>
           <p:cNvGraphicFramePr/>
           <p:nvPr/>
         </p:nvGraphicFramePr>
@@ -19050,14 +19042,14 @@
       </p:graphicFrame>
       <p:sp>
         <p:nvSpPr>
-          <p:cNvPr id="385" name="Rounded Rectangle 10"/>
+          <p:cNvPr id="393" name="Rounded Rectangle 10"/>
           <p:cNvSpPr/>
           <p:nvPr/>
         </p:nvSpPr>
         <p:spPr>
           <a:xfrm>
             <a:off x="768240" y="3931920"/>
-            <a:ext cx="5394240" cy="863280"/>
+            <a:ext cx="5393520" cy="862560"/>
           </a:xfrm>
           <a:prstGeom prst="roundRect">
             <a:avLst>
@@ -19093,14 +19085,14 @@
       </p:sp>
       <p:sp>
         <p:nvSpPr>
-          <p:cNvPr id="386" name="TextBox 11"/>
+          <p:cNvPr id="394" name="TextBox 11"/>
           <p:cNvSpPr/>
           <p:nvPr/>
         </p:nvSpPr>
         <p:spPr>
           <a:xfrm>
             <a:off x="1911960" y="4014360"/>
-            <a:ext cx="3106800" cy="637200"/>
+            <a:ext cx="3106080" cy="637200"/>
           </a:xfrm>
           <a:prstGeom prst="rect">
             <a:avLst/>
@@ -19207,14 +19199,14 @@
       </p:sp>
       <p:sp>
         <p:nvSpPr>
-          <p:cNvPr id="387" name="Rounded Rectangle 12"/>
+          <p:cNvPr id="395" name="Rounded Rectangle 12"/>
           <p:cNvSpPr/>
           <p:nvPr/>
         </p:nvSpPr>
         <p:spPr>
           <a:xfrm>
             <a:off x="768240" y="5074920"/>
-            <a:ext cx="5394240" cy="730800"/>
+            <a:ext cx="5393520" cy="730080"/>
           </a:xfrm>
           <a:prstGeom prst="roundRect">
             <a:avLst>
@@ -19250,14 +19242,14 @@
       </p:sp>
       <p:sp>
         <p:nvSpPr>
-          <p:cNvPr id="388" name="Rectangle 13"/>
+          <p:cNvPr id="396" name="Rectangle 13"/>
           <p:cNvSpPr/>
           <p:nvPr/>
         </p:nvSpPr>
         <p:spPr>
           <a:xfrm>
             <a:off x="768240" y="5074920"/>
-            <a:ext cx="50040" cy="730800"/>
+            <a:ext cx="49320" cy="730080"/>
           </a:xfrm>
           <a:prstGeom prst="rect">
             <a:avLst/>
@@ -19291,14 +19283,14 @@
       </p:sp>
       <p:sp>
         <p:nvSpPr>
-          <p:cNvPr id="389" name="TextBox 14"/>
+          <p:cNvPr id="397" name="TextBox 14"/>
           <p:cNvSpPr/>
           <p:nvPr/>
         </p:nvSpPr>
         <p:spPr>
           <a:xfrm>
             <a:off x="1024200" y="5139720"/>
-            <a:ext cx="4937040" cy="638280"/>
+            <a:ext cx="4936320" cy="638280"/>
           </a:xfrm>
           <a:prstGeom prst="rect">
             <a:avLst/>
@@ -19411,14 +19403,14 @@
       </p:grpSpPr>
       <p:sp>
         <p:nvSpPr>
-          <p:cNvPr id="390" name="TextBox 1"/>
+          <p:cNvPr id="398" name="TextBox 1"/>
           <p:cNvSpPr/>
           <p:nvPr/>
         </p:nvSpPr>
         <p:spPr>
           <a:xfrm>
             <a:off x="768240" y="420480"/>
-            <a:ext cx="10606320" cy="441720"/>
+            <a:ext cx="10605600" cy="441360"/>
           </a:xfrm>
           <a:prstGeom prst="rect">
             <a:avLst/>
@@ -19463,14 +19455,14 @@
       </p:sp>
       <p:sp>
         <p:nvSpPr>
-          <p:cNvPr id="391" name="Rectangle 2"/>
+          <p:cNvPr id="399" name="Rectangle 2"/>
           <p:cNvSpPr/>
           <p:nvPr/>
         </p:nvSpPr>
         <p:spPr>
           <a:xfrm>
             <a:off x="768240" y="1170360"/>
-            <a:ext cx="1370880" cy="43560"/>
+            <a:ext cx="1370160" cy="42840"/>
           </a:xfrm>
           <a:prstGeom prst="rect">
             <a:avLst/>
@@ -19504,14 +19496,14 @@
       </p:sp>
       <p:sp>
         <p:nvSpPr>
-          <p:cNvPr id="392" name="TextBox 3"/>
+          <p:cNvPr id="400" name="TextBox 3"/>
           <p:cNvSpPr/>
           <p:nvPr/>
         </p:nvSpPr>
         <p:spPr>
           <a:xfrm>
             <a:off x="768240" y="1298520"/>
-            <a:ext cx="10606320" cy="228240"/>
+            <a:ext cx="10605600" cy="227880"/>
           </a:xfrm>
           <a:prstGeom prst="rect">
             <a:avLst/>
@@ -19556,14 +19548,14 @@
       </p:sp>
       <p:sp>
         <p:nvSpPr>
-          <p:cNvPr id="393" name="Rectangle 4"/>
+          <p:cNvPr id="401" name="Rectangle 4"/>
           <p:cNvSpPr/>
           <p:nvPr/>
         </p:nvSpPr>
         <p:spPr>
           <a:xfrm>
             <a:off x="0" y="6437520"/>
-            <a:ext cx="12191040" cy="14400"/>
+            <a:ext cx="12190320" cy="13680"/>
           </a:xfrm>
           <a:prstGeom prst="rect">
             <a:avLst/>
@@ -19597,14 +19589,14 @@
       </p:sp>
       <p:sp>
         <p:nvSpPr>
-          <p:cNvPr id="394" name="TextBox 5"/>
+          <p:cNvPr id="402" name="TextBox 5"/>
           <p:cNvSpPr/>
           <p:nvPr/>
         </p:nvSpPr>
         <p:spPr>
           <a:xfrm>
             <a:off x="768240" y="6473880"/>
-            <a:ext cx="8228880" cy="137160"/>
+            <a:ext cx="8228160" cy="136800"/>
           </a:xfrm>
           <a:prstGeom prst="rect">
             <a:avLst/>
@@ -19649,14 +19641,14 @@
       </p:sp>
       <p:sp>
         <p:nvSpPr>
-          <p:cNvPr id="395" name="TextBox 6"/>
+          <p:cNvPr id="403" name="TextBox 6"/>
           <p:cNvSpPr/>
           <p:nvPr/>
         </p:nvSpPr>
         <p:spPr>
           <a:xfrm>
             <a:off x="10607040" y="6473880"/>
-            <a:ext cx="822240" cy="137160"/>
+            <a:ext cx="821520" cy="136800"/>
           </a:xfrm>
           <a:prstGeom prst="rect">
             <a:avLst/>
@@ -19701,14 +19693,14 @@
       </p:sp>
       <p:sp>
         <p:nvSpPr>
-          <p:cNvPr id="396" name="Rounded Rectangle 7"/>
+          <p:cNvPr id="404" name="Rounded Rectangle 7"/>
           <p:cNvSpPr/>
           <p:nvPr/>
         </p:nvSpPr>
         <p:spPr>
           <a:xfrm>
             <a:off x="768240" y="1828800"/>
-            <a:ext cx="5851440" cy="2029320"/>
+            <a:ext cx="5850720" cy="2028600"/>
           </a:xfrm>
           <a:prstGeom prst="roundRect">
             <a:avLst>
@@ -19744,14 +19736,14 @@
       </p:sp>
       <p:sp>
         <p:nvSpPr>
-          <p:cNvPr id="397" name="TextBox 8"/>
+          <p:cNvPr id="405" name="TextBox 8"/>
           <p:cNvSpPr/>
           <p:nvPr/>
         </p:nvSpPr>
         <p:spPr>
           <a:xfrm>
             <a:off x="1703160" y="1911240"/>
-            <a:ext cx="3981600" cy="1492200"/>
+            <a:ext cx="3980880" cy="1492200"/>
           </a:xfrm>
           <a:prstGeom prst="rect">
             <a:avLst/>
@@ -20013,14 +20005,14 @@
       </p:sp>
       <p:sp>
         <p:nvSpPr>
-          <p:cNvPr id="398" name="TextBox 9"/>
+          <p:cNvPr id="406" name="TextBox 9"/>
           <p:cNvSpPr/>
           <p:nvPr/>
         </p:nvSpPr>
         <p:spPr>
           <a:xfrm>
             <a:off x="6446520" y="1783080"/>
-            <a:ext cx="4937040" cy="213120"/>
+            <a:ext cx="4936320" cy="212760"/>
           </a:xfrm>
           <a:prstGeom prst="rect">
             <a:avLst/>
@@ -20065,14 +20057,14 @@
       </p:sp>
       <p:sp>
         <p:nvSpPr>
-          <p:cNvPr id="399" name="TextBox 10"/>
+          <p:cNvPr id="407" name="TextBox 10"/>
           <p:cNvSpPr/>
           <p:nvPr/>
         </p:nvSpPr>
         <p:spPr>
           <a:xfrm>
             <a:off x="6446520" y="2148840"/>
-            <a:ext cx="4937040" cy="1218960"/>
+            <a:ext cx="4936320" cy="1218960"/>
           </a:xfrm>
           <a:prstGeom prst="rect">
             <a:avLst/>
@@ -20232,14 +20224,14 @@
       </p:sp>
       <p:sp>
         <p:nvSpPr>
-          <p:cNvPr id="400" name="Rounded Rectangle 11"/>
+          <p:cNvPr id="408" name="Rounded Rectangle 11"/>
           <p:cNvSpPr/>
           <p:nvPr/>
         </p:nvSpPr>
         <p:spPr>
           <a:xfrm>
             <a:off x="768240" y="4343400"/>
-            <a:ext cx="10652040" cy="1096560"/>
+            <a:ext cx="10651320" cy="1095840"/>
           </a:xfrm>
           <a:prstGeom prst="roundRect">
             <a:avLst>
@@ -20275,14 +20267,14 @@
       </p:sp>
       <p:sp>
         <p:nvSpPr>
-          <p:cNvPr id="401" name="Rectangle 12"/>
+          <p:cNvPr id="409" name="Rectangle 12"/>
           <p:cNvSpPr/>
           <p:nvPr/>
         </p:nvSpPr>
         <p:spPr>
           <a:xfrm>
             <a:off x="768240" y="4343400"/>
-            <a:ext cx="50040" cy="1096560"/>
+            <a:ext cx="49320" cy="1095840"/>
           </a:xfrm>
           <a:prstGeom prst="rect">
             <a:avLst/>
@@ -20316,14 +20308,14 @@
       </p:sp>
       <p:sp>
         <p:nvSpPr>
-          <p:cNvPr id="402" name="TextBox 13"/>
+          <p:cNvPr id="410" name="TextBox 13"/>
           <p:cNvSpPr/>
           <p:nvPr/>
         </p:nvSpPr>
         <p:spPr>
           <a:xfrm>
             <a:off x="1024200" y="4590360"/>
-            <a:ext cx="10194840" cy="639360"/>
+            <a:ext cx="10194120" cy="638640"/>
           </a:xfrm>
           <a:prstGeom prst="rect">
             <a:avLst/>
@@ -20436,14 +20428,14 @@
       </p:grpSpPr>
       <p:sp>
         <p:nvSpPr>
-          <p:cNvPr id="403" name="TextBox 1"/>
+          <p:cNvPr id="411" name="TextBox 1"/>
           <p:cNvSpPr/>
           <p:nvPr/>
         </p:nvSpPr>
         <p:spPr>
           <a:xfrm>
             <a:off x="768240" y="420480"/>
-            <a:ext cx="10606320" cy="441720"/>
+            <a:ext cx="10605600" cy="441360"/>
           </a:xfrm>
           <a:prstGeom prst="rect">
             <a:avLst/>
@@ -20488,14 +20480,14 @@
       </p:sp>
       <p:sp>
         <p:nvSpPr>
-          <p:cNvPr id="404" name="Rectangle 2"/>
+          <p:cNvPr id="412" name="Rectangle 2"/>
           <p:cNvSpPr/>
           <p:nvPr/>
         </p:nvSpPr>
         <p:spPr>
           <a:xfrm>
             <a:off x="768240" y="1170360"/>
-            <a:ext cx="1370880" cy="43560"/>
+            <a:ext cx="1370160" cy="42840"/>
           </a:xfrm>
           <a:prstGeom prst="rect">
             <a:avLst/>
@@ -20529,14 +20521,14 @@
       </p:sp>
       <p:sp>
         <p:nvSpPr>
-          <p:cNvPr id="405" name="TextBox 3"/>
+          <p:cNvPr id="413" name="TextBox 3"/>
           <p:cNvSpPr/>
           <p:nvPr/>
         </p:nvSpPr>
         <p:spPr>
           <a:xfrm>
             <a:off x="768240" y="1298520"/>
-            <a:ext cx="10606320" cy="228240"/>
+            <a:ext cx="10605600" cy="227880"/>
           </a:xfrm>
           <a:prstGeom prst="rect">
             <a:avLst/>
@@ -20581,14 +20573,14 @@
       </p:sp>
       <p:sp>
         <p:nvSpPr>
-          <p:cNvPr id="406" name="Rectangle 4"/>
+          <p:cNvPr id="414" name="Rectangle 4"/>
           <p:cNvSpPr/>
           <p:nvPr/>
         </p:nvSpPr>
         <p:spPr>
           <a:xfrm>
             <a:off x="0" y="6437520"/>
-            <a:ext cx="12191040" cy="14400"/>
+            <a:ext cx="12190320" cy="13680"/>
           </a:xfrm>
           <a:prstGeom prst="rect">
             <a:avLst/>
@@ -20622,14 +20614,14 @@
       </p:sp>
       <p:sp>
         <p:nvSpPr>
-          <p:cNvPr id="407" name="TextBox 5"/>
+          <p:cNvPr id="415" name="TextBox 5"/>
           <p:cNvSpPr/>
           <p:nvPr/>
         </p:nvSpPr>
         <p:spPr>
           <a:xfrm>
             <a:off x="768240" y="6473880"/>
-            <a:ext cx="8228880" cy="137160"/>
+            <a:ext cx="8228160" cy="136800"/>
           </a:xfrm>
           <a:prstGeom prst="rect">
             <a:avLst/>
@@ -20674,14 +20666,14 @@
       </p:sp>
       <p:sp>
         <p:nvSpPr>
-          <p:cNvPr id="408" name="TextBox 6"/>
+          <p:cNvPr id="416" name="TextBox 6"/>
           <p:cNvSpPr/>
           <p:nvPr/>
         </p:nvSpPr>
         <p:spPr>
           <a:xfrm>
             <a:off x="10607040" y="6473880"/>
-            <a:ext cx="822240" cy="137160"/>
+            <a:ext cx="821520" cy="136800"/>
           </a:xfrm>
           <a:prstGeom prst="rect">
             <a:avLst/>
@@ -20726,14 +20718,14 @@
       </p:sp>
       <p:sp>
         <p:nvSpPr>
-          <p:cNvPr id="409" name="Rounded Rectangle 7"/>
+          <p:cNvPr id="417" name="Rounded Rectangle 7"/>
           <p:cNvSpPr/>
           <p:nvPr/>
         </p:nvSpPr>
         <p:spPr>
           <a:xfrm>
             <a:off x="768240" y="1828800"/>
-            <a:ext cx="5851440" cy="2029320"/>
+            <a:ext cx="5850720" cy="2028600"/>
           </a:xfrm>
           <a:prstGeom prst="roundRect">
             <a:avLst>
@@ -20769,14 +20761,14 @@
       </p:sp>
       <p:sp>
         <p:nvSpPr>
-          <p:cNvPr id="410" name="TextBox 8"/>
+          <p:cNvPr id="418" name="TextBox 8"/>
           <p:cNvSpPr/>
           <p:nvPr/>
         </p:nvSpPr>
         <p:spPr>
           <a:xfrm>
             <a:off x="1835640" y="1911240"/>
-            <a:ext cx="3716280" cy="1492200"/>
+            <a:ext cx="3715560" cy="1492200"/>
           </a:xfrm>
           <a:prstGeom prst="rect">
             <a:avLst/>
@@ -21038,14 +21030,14 @@
       </p:sp>
       <p:sp>
         <p:nvSpPr>
-          <p:cNvPr id="411" name="TextBox 9"/>
+          <p:cNvPr id="419" name="TextBox 9"/>
           <p:cNvSpPr/>
           <p:nvPr/>
         </p:nvSpPr>
         <p:spPr>
           <a:xfrm>
             <a:off x="6446520" y="1783080"/>
-            <a:ext cx="4937040" cy="198000"/>
+            <a:ext cx="4936320" cy="197640"/>
           </a:xfrm>
           <a:prstGeom prst="rect">
             <a:avLst/>
@@ -21090,14 +21082,14 @@
       </p:sp>
       <p:sp>
         <p:nvSpPr>
-          <p:cNvPr id="412" name="Rounded Rectangle 10"/>
+          <p:cNvPr id="420" name="Rounded Rectangle 10"/>
           <p:cNvSpPr/>
           <p:nvPr/>
         </p:nvSpPr>
         <p:spPr>
           <a:xfrm>
             <a:off x="6446520" y="2194560"/>
-            <a:ext cx="4937040" cy="1329840"/>
+            <a:ext cx="4936320" cy="1329120"/>
           </a:xfrm>
           <a:prstGeom prst="roundRect">
             <a:avLst>
@@ -21133,14 +21125,14 @@
       </p:sp>
       <p:sp>
         <p:nvSpPr>
-          <p:cNvPr id="413" name="TextBox 11"/>
+          <p:cNvPr id="421" name="TextBox 11"/>
           <p:cNvSpPr/>
           <p:nvPr/>
         </p:nvSpPr>
         <p:spPr>
           <a:xfrm>
             <a:off x="7734960" y="2277000"/>
-            <a:ext cx="2360160" cy="926640"/>
+            <a:ext cx="2359440" cy="926640"/>
           </a:xfrm>
           <a:prstGeom prst="rect">
             <a:avLst/>
@@ -21289,14 +21281,14 @@
       </p:sp>
       <p:sp>
         <p:nvSpPr>
-          <p:cNvPr id="414" name="Rounded Rectangle 12"/>
+          <p:cNvPr id="422" name="Rounded Rectangle 12"/>
           <p:cNvSpPr/>
           <p:nvPr/>
         </p:nvSpPr>
         <p:spPr>
           <a:xfrm>
             <a:off x="768240" y="4343400"/>
-            <a:ext cx="10652040" cy="1096560"/>
+            <a:ext cx="10651320" cy="1095840"/>
           </a:xfrm>
           <a:prstGeom prst="roundRect">
             <a:avLst>
@@ -21332,14 +21324,14 @@
       </p:sp>
       <p:sp>
         <p:nvSpPr>
-          <p:cNvPr id="415" name="Rectangle 13"/>
+          <p:cNvPr id="423" name="Rectangle 13"/>
           <p:cNvSpPr/>
           <p:nvPr/>
         </p:nvSpPr>
         <p:spPr>
           <a:xfrm>
             <a:off x="768240" y="4343400"/>
-            <a:ext cx="50040" cy="1096560"/>
+            <a:ext cx="49320" cy="1095840"/>
           </a:xfrm>
           <a:prstGeom prst="rect">
             <a:avLst/>
@@ -21373,14 +21365,14 @@
       </p:sp>
       <p:sp>
         <p:nvSpPr>
-          <p:cNvPr id="416" name="TextBox 14"/>
+          <p:cNvPr id="424" name="TextBox 14"/>
           <p:cNvSpPr/>
           <p:nvPr/>
         </p:nvSpPr>
         <p:spPr>
           <a:xfrm>
             <a:off x="1024200" y="4590360"/>
-            <a:ext cx="10194840" cy="639360"/>
+            <a:ext cx="10194120" cy="638640"/>
           </a:xfrm>
           <a:prstGeom prst="rect">
             <a:avLst/>
@@ -21493,14 +21485,14 @@
       </p:grpSpPr>
       <p:sp>
         <p:nvSpPr>
-          <p:cNvPr id="417" name="TextBox 1"/>
+          <p:cNvPr id="425" name="TextBox 1"/>
           <p:cNvSpPr/>
           <p:nvPr/>
         </p:nvSpPr>
         <p:spPr>
           <a:xfrm>
             <a:off x="768240" y="420480"/>
-            <a:ext cx="10606320" cy="441720"/>
+            <a:ext cx="10605600" cy="441360"/>
           </a:xfrm>
           <a:prstGeom prst="rect">
             <a:avLst/>
@@ -21545,14 +21537,14 @@
       </p:sp>
       <p:sp>
         <p:nvSpPr>
-          <p:cNvPr id="418" name="Rectangle 2"/>
+          <p:cNvPr id="426" name="Rectangle 2"/>
           <p:cNvSpPr/>
           <p:nvPr/>
         </p:nvSpPr>
         <p:spPr>
           <a:xfrm>
             <a:off x="768240" y="1170360"/>
-            <a:ext cx="1370880" cy="43560"/>
+            <a:ext cx="1370160" cy="42840"/>
           </a:xfrm>
           <a:prstGeom prst="rect">
             <a:avLst/>
@@ -21586,14 +21578,14 @@
       </p:sp>
       <p:sp>
         <p:nvSpPr>
-          <p:cNvPr id="419" name="TextBox 3"/>
+          <p:cNvPr id="427" name="TextBox 3"/>
           <p:cNvSpPr/>
           <p:nvPr/>
         </p:nvSpPr>
         <p:spPr>
           <a:xfrm>
             <a:off x="768240" y="1298520"/>
-            <a:ext cx="10606320" cy="228240"/>
+            <a:ext cx="10605600" cy="227880"/>
           </a:xfrm>
           <a:prstGeom prst="rect">
             <a:avLst/>
@@ -21638,14 +21630,14 @@
       </p:sp>
       <p:sp>
         <p:nvSpPr>
-          <p:cNvPr id="420" name="Rectangle 4"/>
+          <p:cNvPr id="428" name="Rectangle 4"/>
           <p:cNvSpPr/>
           <p:nvPr/>
         </p:nvSpPr>
         <p:spPr>
           <a:xfrm>
             <a:off x="0" y="6437520"/>
-            <a:ext cx="12191040" cy="14400"/>
+            <a:ext cx="12190320" cy="13680"/>
           </a:xfrm>
           <a:prstGeom prst="rect">
             <a:avLst/>
@@ -21679,14 +21671,14 @@
       </p:sp>
       <p:sp>
         <p:nvSpPr>
-          <p:cNvPr id="421" name="TextBox 5"/>
+          <p:cNvPr id="429" name="TextBox 5"/>
           <p:cNvSpPr/>
           <p:nvPr/>
         </p:nvSpPr>
         <p:spPr>
           <a:xfrm>
             <a:off x="768240" y="6473880"/>
-            <a:ext cx="8228880" cy="137160"/>
+            <a:ext cx="8228160" cy="136800"/>
           </a:xfrm>
           <a:prstGeom prst="rect">
             <a:avLst/>
@@ -21731,14 +21723,14 @@
       </p:sp>
       <p:sp>
         <p:nvSpPr>
-          <p:cNvPr id="422" name="TextBox 6"/>
+          <p:cNvPr id="430" name="TextBox 6"/>
           <p:cNvSpPr/>
           <p:nvPr/>
         </p:nvSpPr>
         <p:spPr>
           <a:xfrm>
             <a:off x="10607040" y="6473880"/>
-            <a:ext cx="822240" cy="137160"/>
+            <a:ext cx="821520" cy="136800"/>
           </a:xfrm>
           <a:prstGeom prst="rect">
             <a:avLst/>
@@ -21783,14 +21775,14 @@
       </p:sp>
       <p:sp>
         <p:nvSpPr>
-          <p:cNvPr id="423" name="TextBox 7"/>
+          <p:cNvPr id="431" name="TextBox 7"/>
           <p:cNvSpPr/>
           <p:nvPr/>
         </p:nvSpPr>
         <p:spPr>
           <a:xfrm>
             <a:off x="768240" y="1828800"/>
-            <a:ext cx="5394240" cy="213120"/>
+            <a:ext cx="5393520" cy="212760"/>
           </a:xfrm>
           <a:prstGeom prst="rect">
             <a:avLst/>
@@ -21835,14 +21827,14 @@
       </p:sp>
       <p:sp>
         <p:nvSpPr>
-          <p:cNvPr id="424" name="Rounded Rectangle 8"/>
+          <p:cNvPr id="432" name="Rounded Rectangle 8"/>
           <p:cNvSpPr/>
           <p:nvPr/>
         </p:nvSpPr>
         <p:spPr>
           <a:xfrm>
             <a:off x="768240" y="2240280"/>
-            <a:ext cx="5394240" cy="474840"/>
+            <a:ext cx="5393520" cy="474120"/>
           </a:xfrm>
           <a:prstGeom prst="roundRect">
             <a:avLst>
@@ -21878,14 +21870,14 @@
       </p:sp>
       <p:sp>
         <p:nvSpPr>
-          <p:cNvPr id="425" name="Rectangle 9"/>
+          <p:cNvPr id="433" name="Rectangle 9"/>
           <p:cNvSpPr/>
           <p:nvPr/>
         </p:nvSpPr>
         <p:spPr>
           <a:xfrm>
             <a:off x="768240" y="2240280"/>
-            <a:ext cx="50040" cy="474840"/>
+            <a:ext cx="49320" cy="474120"/>
           </a:xfrm>
           <a:prstGeom prst="rect">
             <a:avLst/>
@@ -21919,14 +21911,14 @@
       </p:sp>
       <p:sp>
         <p:nvSpPr>
-          <p:cNvPr id="426" name="TextBox 10"/>
+          <p:cNvPr id="434" name="TextBox 10"/>
           <p:cNvSpPr/>
           <p:nvPr/>
         </p:nvSpPr>
         <p:spPr>
           <a:xfrm>
             <a:off x="996840" y="2383200"/>
-            <a:ext cx="1462320" cy="198360"/>
+            <a:ext cx="1461600" cy="197640"/>
           </a:xfrm>
           <a:prstGeom prst="rect">
             <a:avLst/>
@@ -21971,14 +21963,14 @@
       </p:sp>
       <p:sp>
         <p:nvSpPr>
-          <p:cNvPr id="427" name="TextBox 11"/>
+          <p:cNvPr id="435" name="TextBox 11"/>
           <p:cNvSpPr/>
           <p:nvPr/>
         </p:nvSpPr>
         <p:spPr>
           <a:xfrm>
             <a:off x="2368440" y="2389680"/>
-            <a:ext cx="3702600" cy="175680"/>
+            <a:ext cx="3701880" cy="174960"/>
           </a:xfrm>
           <a:prstGeom prst="rect">
             <a:avLst/>
@@ -22023,14 +22015,14 @@
       </p:sp>
       <p:sp>
         <p:nvSpPr>
-          <p:cNvPr id="428" name="Rounded Rectangle 12"/>
+          <p:cNvPr id="436" name="Rounded Rectangle 12"/>
           <p:cNvSpPr/>
           <p:nvPr/>
         </p:nvSpPr>
         <p:spPr>
           <a:xfrm>
             <a:off x="768240" y="2807280"/>
-            <a:ext cx="5394240" cy="474840"/>
+            <a:ext cx="5393520" cy="474120"/>
           </a:xfrm>
           <a:prstGeom prst="roundRect">
             <a:avLst>
@@ -22066,14 +22058,14 @@
       </p:sp>
       <p:sp>
         <p:nvSpPr>
-          <p:cNvPr id="429" name="Rectangle 13"/>
+          <p:cNvPr id="437" name="Rectangle 13"/>
           <p:cNvSpPr/>
           <p:nvPr/>
         </p:nvSpPr>
         <p:spPr>
           <a:xfrm>
             <a:off x="768240" y="2807280"/>
-            <a:ext cx="50040" cy="474840"/>
+            <a:ext cx="49320" cy="474120"/>
           </a:xfrm>
           <a:prstGeom prst="rect">
             <a:avLst/>
@@ -22107,14 +22099,14 @@
       </p:sp>
       <p:sp>
         <p:nvSpPr>
-          <p:cNvPr id="430" name="TextBox 14"/>
+          <p:cNvPr id="438" name="TextBox 14"/>
           <p:cNvSpPr/>
           <p:nvPr/>
         </p:nvSpPr>
         <p:spPr>
           <a:xfrm>
             <a:off x="996840" y="2949840"/>
-            <a:ext cx="1462320" cy="198360"/>
+            <a:ext cx="1461600" cy="197640"/>
           </a:xfrm>
           <a:prstGeom prst="rect">
             <a:avLst/>
@@ -22159,14 +22151,14 @@
       </p:sp>
       <p:sp>
         <p:nvSpPr>
-          <p:cNvPr id="431" name="TextBox 15"/>
+          <p:cNvPr id="439" name="TextBox 15"/>
           <p:cNvSpPr/>
           <p:nvPr/>
         </p:nvSpPr>
         <p:spPr>
           <a:xfrm>
             <a:off x="2368440" y="2956680"/>
-            <a:ext cx="3702600" cy="175680"/>
+            <a:ext cx="3701880" cy="174960"/>
           </a:xfrm>
           <a:prstGeom prst="rect">
             <a:avLst/>
@@ -22211,14 +22203,14 @@
       </p:sp>
       <p:sp>
         <p:nvSpPr>
-          <p:cNvPr id="432" name="Rounded Rectangle 16"/>
+          <p:cNvPr id="440" name="Rounded Rectangle 16"/>
           <p:cNvSpPr/>
           <p:nvPr/>
         </p:nvSpPr>
         <p:spPr>
           <a:xfrm>
             <a:off x="768240" y="3374280"/>
-            <a:ext cx="5394240" cy="474840"/>
+            <a:ext cx="5393520" cy="474120"/>
           </a:xfrm>
           <a:prstGeom prst="roundRect">
             <a:avLst>
@@ -22254,14 +22246,14 @@
       </p:sp>
       <p:sp>
         <p:nvSpPr>
-          <p:cNvPr id="433" name="Rectangle 17"/>
+          <p:cNvPr id="441" name="Rectangle 17"/>
           <p:cNvSpPr/>
           <p:nvPr/>
         </p:nvSpPr>
         <p:spPr>
           <a:xfrm>
             <a:off x="768240" y="3374280"/>
-            <a:ext cx="50040" cy="474840"/>
+            <a:ext cx="49320" cy="474120"/>
           </a:xfrm>
           <a:prstGeom prst="rect">
             <a:avLst/>
@@ -22295,14 +22287,14 @@
       </p:sp>
       <p:sp>
         <p:nvSpPr>
-          <p:cNvPr id="434" name="TextBox 18"/>
+          <p:cNvPr id="442" name="TextBox 18"/>
           <p:cNvSpPr/>
           <p:nvPr/>
         </p:nvSpPr>
         <p:spPr>
           <a:xfrm>
             <a:off x="996840" y="3516840"/>
-            <a:ext cx="1462320" cy="198360"/>
+            <a:ext cx="1461600" cy="197640"/>
           </a:xfrm>
           <a:prstGeom prst="rect">
             <a:avLst/>
@@ -22347,14 +22339,14 @@
       </p:sp>
       <p:sp>
         <p:nvSpPr>
-          <p:cNvPr id="435" name="TextBox 19"/>
+          <p:cNvPr id="443" name="TextBox 19"/>
           <p:cNvSpPr/>
           <p:nvPr/>
         </p:nvSpPr>
         <p:spPr>
           <a:xfrm>
             <a:off x="2368440" y="3523680"/>
-            <a:ext cx="3702600" cy="175680"/>
+            <a:ext cx="3701880" cy="174960"/>
           </a:xfrm>
           <a:prstGeom prst="rect">
             <a:avLst/>
@@ -22399,7 +22391,7 @@
       </p:sp>
       <p:graphicFrame>
         <p:nvGraphicFramePr>
-          <p:cNvPr id="436" name="Table 20"/>
+          <p:cNvPr id="444" name="Table 20"/>
           <p:cNvGraphicFramePr/>
           <p:nvPr/>
         </p:nvGraphicFramePr>
@@ -23269,14 +23261,14 @@
       </p:graphicFrame>
       <p:sp>
         <p:nvSpPr>
-          <p:cNvPr id="437" name="Rounded Rectangle 21"/>
+          <p:cNvPr id="445" name="Rounded Rectangle 21"/>
           <p:cNvSpPr/>
           <p:nvPr/>
         </p:nvSpPr>
         <p:spPr>
           <a:xfrm>
             <a:off x="768240" y="4434840"/>
-            <a:ext cx="5394240" cy="1005120"/>
+            <a:ext cx="5393520" cy="1004400"/>
           </a:xfrm>
           <a:prstGeom prst="roundRect">
             <a:avLst>
@@ -23312,14 +23304,14 @@
       </p:sp>
       <p:sp>
         <p:nvSpPr>
-          <p:cNvPr id="438" name="Rectangle 22"/>
+          <p:cNvPr id="446" name="Rectangle 22"/>
           <p:cNvSpPr/>
           <p:nvPr/>
         </p:nvSpPr>
         <p:spPr>
           <a:xfrm>
             <a:off x="768240" y="4434840"/>
-            <a:ext cx="50040" cy="1005120"/>
+            <a:ext cx="49320" cy="1004400"/>
           </a:xfrm>
           <a:prstGeom prst="rect">
             <a:avLst/>
@@ -23353,14 +23345,14 @@
       </p:sp>
       <p:sp>
         <p:nvSpPr>
-          <p:cNvPr id="439" name="TextBox 23"/>
+          <p:cNvPr id="447" name="TextBox 23"/>
           <p:cNvSpPr/>
           <p:nvPr/>
         </p:nvSpPr>
         <p:spPr>
           <a:xfrm>
             <a:off x="1024200" y="4636080"/>
-            <a:ext cx="4937040" cy="639360"/>
+            <a:ext cx="4936320" cy="638640"/>
           </a:xfrm>
           <a:prstGeom prst="rect">
             <a:avLst/>
@@ -23473,14 +23465,14 @@
       </p:grpSpPr>
       <p:sp>
         <p:nvSpPr>
-          <p:cNvPr id="440" name="TextBox 1"/>
+          <p:cNvPr id="448" name="TextBox 1"/>
           <p:cNvSpPr/>
           <p:nvPr/>
         </p:nvSpPr>
         <p:spPr>
           <a:xfrm>
             <a:off x="768240" y="2240280"/>
-            <a:ext cx="1828080" cy="974880"/>
+            <a:ext cx="1827360" cy="974880"/>
           </a:xfrm>
           <a:prstGeom prst="rect">
             <a:avLst/>
@@ -23525,14 +23517,14 @@
       </p:sp>
       <p:sp>
         <p:nvSpPr>
-          <p:cNvPr id="441" name="Rectangle 2"/>
+          <p:cNvPr id="449" name="Rectangle 2"/>
           <p:cNvSpPr/>
           <p:nvPr/>
         </p:nvSpPr>
         <p:spPr>
           <a:xfrm>
             <a:off x="768240" y="3246120"/>
-            <a:ext cx="1828080" cy="50040"/>
+            <a:ext cx="1827360" cy="49320"/>
           </a:xfrm>
           <a:prstGeom prst="rect">
             <a:avLst/>
@@ -23566,14 +23558,14 @@
       </p:sp>
       <p:sp>
         <p:nvSpPr>
-          <p:cNvPr id="442" name="TextBox 3"/>
+          <p:cNvPr id="450" name="TextBox 3"/>
           <p:cNvSpPr/>
           <p:nvPr/>
         </p:nvSpPr>
         <p:spPr>
           <a:xfrm>
             <a:off x="768240" y="3429000"/>
-            <a:ext cx="10423440" cy="639720"/>
+            <a:ext cx="10422720" cy="639360"/>
           </a:xfrm>
           <a:prstGeom prst="rect">
             <a:avLst/>
@@ -23618,14 +23610,14 @@
       </p:sp>
       <p:sp>
         <p:nvSpPr>
-          <p:cNvPr id="443" name="TextBox 4"/>
+          <p:cNvPr id="451" name="TextBox 4"/>
           <p:cNvSpPr/>
           <p:nvPr/>
         </p:nvSpPr>
         <p:spPr>
           <a:xfrm>
             <a:off x="768240" y="4754880"/>
-            <a:ext cx="7314480" cy="243360"/>
+            <a:ext cx="7313760" cy="243000"/>
           </a:xfrm>
           <a:prstGeom prst="rect">
             <a:avLst/>
@@ -23707,14 +23699,14 @@
       </p:grpSpPr>
       <p:sp>
         <p:nvSpPr>
-          <p:cNvPr id="444" name="TextBox 1"/>
+          <p:cNvPr id="452" name="TextBox 1"/>
           <p:cNvSpPr/>
           <p:nvPr/>
         </p:nvSpPr>
         <p:spPr>
           <a:xfrm>
             <a:off x="768240" y="420480"/>
-            <a:ext cx="10606320" cy="441720"/>
+            <a:ext cx="10605600" cy="441360"/>
           </a:xfrm>
           <a:prstGeom prst="rect">
             <a:avLst/>
@@ -23759,14 +23751,14 @@
       </p:sp>
       <p:sp>
         <p:nvSpPr>
-          <p:cNvPr id="445" name="Rectangle 2"/>
+          <p:cNvPr id="453" name="Rectangle 2"/>
           <p:cNvSpPr/>
           <p:nvPr/>
         </p:nvSpPr>
         <p:spPr>
           <a:xfrm>
             <a:off x="768240" y="1170360"/>
-            <a:ext cx="1370880" cy="43560"/>
+            <a:ext cx="1370160" cy="42840"/>
           </a:xfrm>
           <a:prstGeom prst="rect">
             <a:avLst/>
@@ -23800,14 +23792,14 @@
       </p:sp>
       <p:sp>
         <p:nvSpPr>
-          <p:cNvPr id="446" name="Rectangle 3"/>
+          <p:cNvPr id="454" name="Rectangle 3"/>
           <p:cNvSpPr/>
           <p:nvPr/>
         </p:nvSpPr>
         <p:spPr>
           <a:xfrm>
             <a:off x="0" y="6437520"/>
-            <a:ext cx="12191040" cy="14400"/>
+            <a:ext cx="12190320" cy="13680"/>
           </a:xfrm>
           <a:prstGeom prst="rect">
             <a:avLst/>
@@ -23841,14 +23833,14 @@
       </p:sp>
       <p:sp>
         <p:nvSpPr>
-          <p:cNvPr id="447" name="TextBox 4"/>
+          <p:cNvPr id="455" name="TextBox 4"/>
           <p:cNvSpPr/>
           <p:nvPr/>
         </p:nvSpPr>
         <p:spPr>
           <a:xfrm>
             <a:off x="768240" y="6473880"/>
-            <a:ext cx="8228880" cy="137160"/>
+            <a:ext cx="8228160" cy="136800"/>
           </a:xfrm>
           <a:prstGeom prst="rect">
             <a:avLst/>
@@ -23893,14 +23885,14 @@
       </p:sp>
       <p:sp>
         <p:nvSpPr>
-          <p:cNvPr id="448" name="TextBox 5"/>
+          <p:cNvPr id="456" name="TextBox 5"/>
           <p:cNvSpPr/>
           <p:nvPr/>
         </p:nvSpPr>
         <p:spPr>
           <a:xfrm>
             <a:off x="10607040" y="6473880"/>
-            <a:ext cx="822240" cy="137160"/>
+            <a:ext cx="821520" cy="136800"/>
           </a:xfrm>
           <a:prstGeom prst="rect">
             <a:avLst/>
@@ -23945,14 +23937,14 @@
       </p:sp>
       <p:sp>
         <p:nvSpPr>
-          <p:cNvPr id="449" name="TextBox 6"/>
+          <p:cNvPr id="457" name="TextBox 6"/>
           <p:cNvSpPr/>
           <p:nvPr/>
         </p:nvSpPr>
         <p:spPr>
           <a:xfrm>
             <a:off x="768240" y="1417320"/>
-            <a:ext cx="5577120" cy="2321640"/>
+            <a:ext cx="5576400" cy="2321640"/>
           </a:xfrm>
           <a:prstGeom prst="rect">
             <a:avLst/>
@@ -24136,7 +24128,7 @@
                 <a:latin typeface="Arial"/>
                 <a:ea typeface="DejaVu Sans"/>
               </a:rPr>
-              <a:t>Trening 3 wariantów (herbert-base-cased)</a:t>
+              <a:t>Trening 3 wariantów (allegro/herbert-base-cased)</a:t>
             </a:r>
             <a:endParaRPr b="0" lang="pl-PL" sz="1450" spc="-1" strike="noStrike">
               <a:latin typeface="Arial"/>
@@ -24214,14 +24206,14 @@
       </p:sp>
       <p:sp>
         <p:nvSpPr>
-          <p:cNvPr id="450" name="TextBox 7"/>
+          <p:cNvPr id="458" name="TextBox 7"/>
           <p:cNvSpPr/>
           <p:nvPr/>
         </p:nvSpPr>
         <p:spPr>
           <a:xfrm>
             <a:off x="6583680" y="1371600"/>
-            <a:ext cx="4845600" cy="213120"/>
+            <a:ext cx="4844880" cy="212760"/>
           </a:xfrm>
           <a:prstGeom prst="rect">
             <a:avLst/>
@@ -24266,14 +24258,14 @@
       </p:sp>
       <p:sp>
         <p:nvSpPr>
-          <p:cNvPr id="451" name="TextBox 8"/>
+          <p:cNvPr id="459" name="TextBox 8"/>
           <p:cNvSpPr/>
           <p:nvPr/>
         </p:nvSpPr>
         <p:spPr>
           <a:xfrm>
             <a:off x="6583680" y="1783080"/>
-            <a:ext cx="4845600" cy="1218960"/>
+            <a:ext cx="4844880" cy="1218960"/>
           </a:xfrm>
           <a:prstGeom prst="rect">
             <a:avLst/>
@@ -24355,7 +24347,7 @@
                 <a:latin typeface="Arial"/>
                 <a:ea typeface="DejaVu Sans"/>
               </a:rPr>
-              <a:t>Confusion matrix — które klasy mylone</a:t>
+              <a:t>Confusion matrix — które klasy są mylone</a:t>
             </a:r>
             <a:endParaRPr b="0" lang="pl-PL" sz="1350" spc="-1" strike="noStrike">
               <a:latin typeface="Arial"/>
@@ -24389,7 +24381,7 @@
                 <a:latin typeface="Arial"/>
                 <a:ea typeface="DejaVu Sans"/>
               </a:rPr>
-              <a:t>porównanie 3 wariantów na jednym wykresie</a:t>
+              <a:t>porównanie 3 wariantów </a:t>
             </a:r>
             <a:endParaRPr b="0" lang="pl-PL" sz="1350" spc="-1" strike="noStrike">
               <a:latin typeface="Arial"/>
@@ -24423,7 +24415,7 @@
                 <a:latin typeface="Arial"/>
                 <a:ea typeface="DejaVu Sans"/>
               </a:rPr>
-              <a:t>dane z Web App: kto i co poprawił</a:t>
+              <a:t>dane z Web App: czy jest poprawa?</a:t>
             </a:r>
             <a:endParaRPr b="0" lang="pl-PL" sz="1350" spc="-1" strike="noStrike">
               <a:latin typeface="Arial"/>
@@ -24433,14 +24425,14 @@
       </p:sp>
       <p:sp>
         <p:nvSpPr>
-          <p:cNvPr id="452" name="Rounded Rectangle 9"/>
+          <p:cNvPr id="460" name="Rounded Rectangle 9"/>
           <p:cNvSpPr/>
           <p:nvPr/>
         </p:nvSpPr>
         <p:spPr>
           <a:xfrm>
             <a:off x="6583680" y="4069080"/>
-            <a:ext cx="4845600" cy="867960"/>
+            <a:ext cx="4844880" cy="867240"/>
           </a:xfrm>
           <a:prstGeom prst="roundRect">
             <a:avLst>
@@ -24476,14 +24468,14 @@
       </p:sp>
       <p:sp>
         <p:nvSpPr>
-          <p:cNvPr id="453" name="Rectangle 10"/>
+          <p:cNvPr id="461" name="Rectangle 10"/>
           <p:cNvSpPr/>
           <p:nvPr/>
         </p:nvSpPr>
         <p:spPr>
           <a:xfrm>
             <a:off x="6583680" y="4069080"/>
-            <a:ext cx="50040" cy="867960"/>
+            <a:ext cx="49320" cy="867240"/>
           </a:xfrm>
           <a:prstGeom prst="rect">
             <a:avLst/>
@@ -24517,14 +24509,14 @@
       </p:sp>
       <p:sp>
         <p:nvSpPr>
-          <p:cNvPr id="454" name="TextBox 11"/>
+          <p:cNvPr id="462" name="TextBox 11"/>
           <p:cNvSpPr/>
           <p:nvPr/>
         </p:nvSpPr>
         <p:spPr>
           <a:xfrm>
             <a:off x="6839640" y="4305600"/>
-            <a:ext cx="4388400" cy="431640"/>
+            <a:ext cx="4387680" cy="430920"/>
           </a:xfrm>
           <a:prstGeom prst="rect">
             <a:avLst/>
@@ -24569,7 +24561,7 @@
                 <a:latin typeface="Arial"/>
                 <a:ea typeface="DejaVu Sans"/>
               </a:rPr>
-              <a:t>Podgląd w real-time</a:t>
+              <a:t>Anotacja w real-time</a:t>
             </a:r>
             <a:endParaRPr b="0" lang="pl-PL" sz="1400" spc="-1" strike="noStrike">
               <a:latin typeface="Arial"/>
@@ -24590,7 +24582,7 @@
                 <a:latin typeface="Arial"/>
                 <a:ea typeface="DejaVu Sans"/>
               </a:rPr>
-              <a:t>Wyniki na żywo: dss2026.radlab.dev + Weights &amp; Biases.</a:t>
+              <a:t>Anotacja na żywo: dss2026.radlab.dev + Weights &amp; Biases.</a:t>
             </a:r>
             <a:endParaRPr b="0" lang="pl-PL" sz="1300" spc="-1" strike="noStrike">
               <a:latin typeface="Arial"/>
@@ -24637,14 +24629,14 @@
       </p:grpSpPr>
       <p:sp>
         <p:nvSpPr>
-          <p:cNvPr id="455" name="TextBox 1"/>
+          <p:cNvPr id="463" name="TextBox 1"/>
           <p:cNvSpPr/>
           <p:nvPr/>
         </p:nvSpPr>
         <p:spPr>
           <a:xfrm>
             <a:off x="768240" y="420480"/>
-            <a:ext cx="10606320" cy="441720"/>
+            <a:ext cx="10605600" cy="441360"/>
           </a:xfrm>
           <a:prstGeom prst="rect">
             <a:avLst/>
@@ -24689,14 +24681,14 @@
       </p:sp>
       <p:sp>
         <p:nvSpPr>
-          <p:cNvPr id="456" name="Rectangle 2"/>
+          <p:cNvPr id="464" name="Rectangle 2"/>
           <p:cNvSpPr/>
           <p:nvPr/>
         </p:nvSpPr>
         <p:spPr>
           <a:xfrm>
             <a:off x="768240" y="1170360"/>
-            <a:ext cx="1370880" cy="43560"/>
+            <a:ext cx="1370160" cy="42840"/>
           </a:xfrm>
           <a:prstGeom prst="rect">
             <a:avLst/>
@@ -24730,14 +24722,14 @@
       </p:sp>
       <p:sp>
         <p:nvSpPr>
-          <p:cNvPr id="457" name="Rectangle 3"/>
+          <p:cNvPr id="465" name="Rectangle 3"/>
           <p:cNvSpPr/>
           <p:nvPr/>
         </p:nvSpPr>
         <p:spPr>
           <a:xfrm>
             <a:off x="0" y="6437520"/>
-            <a:ext cx="12191040" cy="14400"/>
+            <a:ext cx="12190320" cy="13680"/>
           </a:xfrm>
           <a:prstGeom prst="rect">
             <a:avLst/>
@@ -24771,14 +24763,14 @@
       </p:sp>
       <p:sp>
         <p:nvSpPr>
-          <p:cNvPr id="458" name="TextBox 4"/>
+          <p:cNvPr id="466" name="TextBox 4"/>
           <p:cNvSpPr/>
           <p:nvPr/>
         </p:nvSpPr>
         <p:spPr>
           <a:xfrm>
             <a:off x="768240" y="6473880"/>
-            <a:ext cx="8228880" cy="137160"/>
+            <a:ext cx="8228160" cy="136800"/>
           </a:xfrm>
           <a:prstGeom prst="rect">
             <a:avLst/>
@@ -24823,14 +24815,14 @@
       </p:sp>
       <p:sp>
         <p:nvSpPr>
-          <p:cNvPr id="459" name="TextBox 5"/>
+          <p:cNvPr id="467" name="TextBox 5"/>
           <p:cNvSpPr/>
           <p:nvPr/>
         </p:nvSpPr>
         <p:spPr>
           <a:xfrm>
             <a:off x="10607040" y="6473880"/>
-            <a:ext cx="822240" cy="137160"/>
+            <a:ext cx="821520" cy="136800"/>
           </a:xfrm>
           <a:prstGeom prst="rect">
             <a:avLst/>
@@ -24875,14 +24867,14 @@
       </p:sp>
       <p:sp>
         <p:nvSpPr>
-          <p:cNvPr id="460" name="Rounded Rectangle 6"/>
+          <p:cNvPr id="468" name="Rounded Rectangle 6"/>
           <p:cNvSpPr/>
           <p:nvPr/>
         </p:nvSpPr>
         <p:spPr>
           <a:xfrm>
             <a:off x="768240" y="1417320"/>
-            <a:ext cx="3428280" cy="3656880"/>
+            <a:ext cx="3427560" cy="3656160"/>
           </a:xfrm>
           <a:prstGeom prst="roundRect">
             <a:avLst>
@@ -24918,14 +24910,14 @@
       </p:sp>
       <p:sp>
         <p:nvSpPr>
-          <p:cNvPr id="461" name="Rounded Rectangle 7"/>
+          <p:cNvPr id="469" name="Rounded Rectangle 7"/>
           <p:cNvSpPr/>
           <p:nvPr/>
         </p:nvSpPr>
         <p:spPr>
           <a:xfrm>
             <a:off x="768240" y="1417320"/>
-            <a:ext cx="3428280" cy="502200"/>
+            <a:ext cx="3427560" cy="501480"/>
           </a:xfrm>
           <a:prstGeom prst="roundRect">
             <a:avLst>
@@ -24961,14 +24953,14 @@
       </p:sp>
       <p:sp>
         <p:nvSpPr>
-          <p:cNvPr id="462" name="TextBox 8"/>
+          <p:cNvPr id="470" name="TextBox 8"/>
           <p:cNvSpPr/>
           <p:nvPr/>
         </p:nvSpPr>
         <p:spPr>
           <a:xfrm>
             <a:off x="768240" y="1490400"/>
-            <a:ext cx="3428280" cy="228240"/>
+            <a:ext cx="3427560" cy="227880"/>
           </a:xfrm>
           <a:prstGeom prst="rect">
             <a:avLst/>
@@ -25013,14 +25005,14 @@
       </p:sp>
       <p:sp>
         <p:nvSpPr>
-          <p:cNvPr id="463" name="TextBox 9"/>
+          <p:cNvPr id="471" name="TextBox 9"/>
           <p:cNvSpPr/>
           <p:nvPr/>
         </p:nvSpPr>
         <p:spPr>
           <a:xfrm>
             <a:off x="996840" y="2103120"/>
-            <a:ext cx="3016800" cy="1232280"/>
+            <a:ext cx="3016080" cy="1232280"/>
           </a:xfrm>
           <a:prstGeom prst="rect">
             <a:avLst/>
@@ -25180,14 +25172,14 @@
       </p:sp>
       <p:sp>
         <p:nvSpPr>
-          <p:cNvPr id="464" name="Rounded Rectangle 10"/>
+          <p:cNvPr id="472" name="Rounded Rectangle 10"/>
           <p:cNvSpPr/>
           <p:nvPr/>
         </p:nvSpPr>
         <p:spPr>
           <a:xfrm>
             <a:off x="4380120" y="1417320"/>
-            <a:ext cx="3428280" cy="3656880"/>
+            <a:ext cx="3427560" cy="3656160"/>
           </a:xfrm>
           <a:prstGeom prst="roundRect">
             <a:avLst>
@@ -25223,14 +25215,14 @@
       </p:sp>
       <p:sp>
         <p:nvSpPr>
-          <p:cNvPr id="465" name="Rounded Rectangle 11"/>
+          <p:cNvPr id="473" name="Rounded Rectangle 11"/>
           <p:cNvSpPr/>
           <p:nvPr/>
         </p:nvSpPr>
         <p:spPr>
           <a:xfrm>
             <a:off x="4380120" y="1417320"/>
-            <a:ext cx="3428280" cy="502200"/>
+            <a:ext cx="3427560" cy="501480"/>
           </a:xfrm>
           <a:prstGeom prst="roundRect">
             <a:avLst>
@@ -25266,14 +25258,14 @@
       </p:sp>
       <p:sp>
         <p:nvSpPr>
-          <p:cNvPr id="466" name="TextBox 12"/>
+          <p:cNvPr id="474" name="TextBox 12"/>
           <p:cNvSpPr/>
           <p:nvPr/>
         </p:nvSpPr>
         <p:spPr>
           <a:xfrm>
             <a:off x="4380120" y="1490400"/>
-            <a:ext cx="3428280" cy="228240"/>
+            <a:ext cx="3427560" cy="227880"/>
           </a:xfrm>
           <a:prstGeom prst="rect">
             <a:avLst/>
@@ -25318,14 +25310,14 @@
       </p:sp>
       <p:sp>
         <p:nvSpPr>
-          <p:cNvPr id="467" name="TextBox 13"/>
+          <p:cNvPr id="475" name="TextBox 13"/>
           <p:cNvSpPr/>
           <p:nvPr/>
         </p:nvSpPr>
         <p:spPr>
           <a:xfrm>
             <a:off x="4608720" y="2103120"/>
-            <a:ext cx="3016800" cy="1232280"/>
+            <a:ext cx="3016080" cy="1232280"/>
           </a:xfrm>
           <a:prstGeom prst="rect">
             <a:avLst/>
@@ -25485,14 +25477,14 @@
       </p:sp>
       <p:sp>
         <p:nvSpPr>
-          <p:cNvPr id="468" name="Rounded Rectangle 14"/>
+          <p:cNvPr id="476" name="Rounded Rectangle 14"/>
           <p:cNvSpPr/>
           <p:nvPr/>
         </p:nvSpPr>
         <p:spPr>
           <a:xfrm>
             <a:off x="7992000" y="1417320"/>
-            <a:ext cx="3428280" cy="3656880"/>
+            <a:ext cx="3427560" cy="3656160"/>
           </a:xfrm>
           <a:prstGeom prst="roundRect">
             <a:avLst>
@@ -25528,14 +25520,14 @@
       </p:sp>
       <p:sp>
         <p:nvSpPr>
-          <p:cNvPr id="469" name="Rounded Rectangle 15"/>
+          <p:cNvPr id="477" name="Rounded Rectangle 15"/>
           <p:cNvSpPr/>
           <p:nvPr/>
         </p:nvSpPr>
         <p:spPr>
           <a:xfrm>
             <a:off x="7992000" y="1417320"/>
-            <a:ext cx="3428280" cy="502200"/>
+            <a:ext cx="3427560" cy="501480"/>
           </a:xfrm>
           <a:prstGeom prst="roundRect">
             <a:avLst>
@@ -25571,14 +25563,14 @@
       </p:sp>
       <p:sp>
         <p:nvSpPr>
-          <p:cNvPr id="470" name="TextBox 16"/>
+          <p:cNvPr id="478" name="TextBox 16"/>
           <p:cNvSpPr/>
           <p:nvPr/>
         </p:nvSpPr>
         <p:spPr>
           <a:xfrm>
             <a:off x="7992000" y="1490400"/>
-            <a:ext cx="3428280" cy="228240"/>
+            <a:ext cx="3427560" cy="227880"/>
           </a:xfrm>
           <a:prstGeom prst="rect">
             <a:avLst/>
@@ -25623,14 +25615,14 @@
       </p:sp>
       <p:sp>
         <p:nvSpPr>
-          <p:cNvPr id="471" name="TextBox 17"/>
+          <p:cNvPr id="479" name="TextBox 17"/>
           <p:cNvSpPr/>
           <p:nvPr/>
         </p:nvSpPr>
         <p:spPr>
           <a:xfrm>
             <a:off x="8220600" y="2103120"/>
-            <a:ext cx="3016800" cy="1232280"/>
+            <a:ext cx="3016080" cy="1232280"/>
           </a:xfrm>
           <a:prstGeom prst="rect">
             <a:avLst/>
@@ -25790,14 +25782,14 @@
       </p:sp>
       <p:sp>
         <p:nvSpPr>
-          <p:cNvPr id="472" name="Rounded Rectangle 18"/>
+          <p:cNvPr id="480" name="Rounded Rectangle 18"/>
           <p:cNvSpPr/>
           <p:nvPr/>
         </p:nvSpPr>
         <p:spPr>
           <a:xfrm>
             <a:off x="768240" y="5212080"/>
-            <a:ext cx="10652040" cy="502200"/>
+            <a:ext cx="10651320" cy="501480"/>
           </a:xfrm>
           <a:prstGeom prst="roundRect">
             <a:avLst>
@@ -25833,14 +25825,14 @@
       </p:sp>
       <p:sp>
         <p:nvSpPr>
-          <p:cNvPr id="473" name="Rectangle 19"/>
+          <p:cNvPr id="481" name="Rectangle 19"/>
           <p:cNvSpPr/>
           <p:nvPr/>
         </p:nvSpPr>
         <p:spPr>
           <a:xfrm>
             <a:off x="768240" y="5212080"/>
-            <a:ext cx="50040" cy="502200"/>
+            <a:ext cx="49320" cy="501480"/>
           </a:xfrm>
           <a:prstGeom prst="rect">
             <a:avLst/>
@@ -25874,14 +25866,14 @@
       </p:sp>
       <p:sp>
         <p:nvSpPr>
-          <p:cNvPr id="474" name="TextBox 20"/>
+          <p:cNvPr id="482" name="TextBox 20"/>
           <p:cNvSpPr/>
           <p:nvPr/>
         </p:nvSpPr>
         <p:spPr>
           <a:xfrm>
             <a:off x="1024200" y="5377320"/>
-            <a:ext cx="10194840" cy="208080"/>
+            <a:ext cx="10194120" cy="207360"/>
           </a:xfrm>
           <a:prstGeom prst="rect">
             <a:avLst/>
@@ -25963,14 +25955,14 @@
       </p:grpSpPr>
       <p:sp>
         <p:nvSpPr>
-          <p:cNvPr id="475" name="Rectangle 1"/>
+          <p:cNvPr id="483" name="Rectangle 1"/>
           <p:cNvSpPr/>
           <p:nvPr/>
         </p:nvSpPr>
         <p:spPr>
           <a:xfrm>
             <a:off x="0" y="2606040"/>
-            <a:ext cx="1828080" cy="62640"/>
+            <a:ext cx="1827360" cy="61920"/>
           </a:xfrm>
           <a:prstGeom prst="rect">
             <a:avLst/>
@@ -26004,14 +25996,14 @@
       </p:sp>
       <p:sp>
         <p:nvSpPr>
-          <p:cNvPr id="476" name="TextBox 2"/>
+          <p:cNvPr id="484" name="TextBox 2"/>
           <p:cNvSpPr/>
           <p:nvPr/>
         </p:nvSpPr>
         <p:spPr>
           <a:xfrm>
             <a:off x="768240" y="2788920"/>
-            <a:ext cx="10423440" cy="822960"/>
+            <a:ext cx="10422720" cy="822600"/>
           </a:xfrm>
           <a:prstGeom prst="rect">
             <a:avLst/>
@@ -26046,7 +26038,7 @@
                 <a:latin typeface="Play"/>
                 <a:ea typeface="DejaVu Sans"/>
               </a:rPr>
-              <a:t>Dziękujemy!</a:t>
+              <a:t>Dziękujemy za uwagę!</a:t>
             </a:r>
             <a:endParaRPr b="0" lang="pl-PL" sz="5400" spc="-1" strike="noStrike">
               <a:latin typeface="Arial"/>
@@ -26056,14 +26048,14 @@
       </p:sp>
       <p:sp>
         <p:nvSpPr>
-          <p:cNvPr id="477" name="TextBox 3"/>
+          <p:cNvPr id="485" name="TextBox 3"/>
           <p:cNvSpPr/>
           <p:nvPr/>
         </p:nvSpPr>
         <p:spPr>
           <a:xfrm>
             <a:off x="768240" y="3977640"/>
-            <a:ext cx="10057680" cy="304920"/>
+            <a:ext cx="10056960" cy="304560"/>
           </a:xfrm>
           <a:prstGeom prst="rect">
             <a:avLst/>
@@ -26098,7 +26090,7 @@
                 <a:latin typeface="Arial"/>
                 <a:ea typeface="DejaVu Sans"/>
               </a:rPr>
-              <a:t>Pytania i dyskusja — zachęcamy do anotacji na żywo.</a:t>
+              <a:t>Pytania i dyskusja.</a:t>
             </a:r>
             <a:endParaRPr b="0" lang="pl-PL" sz="2000" spc="-1" strike="noStrike">
               <a:latin typeface="Arial"/>
@@ -26108,14 +26100,14 @@
       </p:sp>
       <p:sp>
         <p:nvSpPr>
-          <p:cNvPr id="478" name="TextBox 4"/>
+          <p:cNvPr id="486" name="TextBox 4"/>
           <p:cNvSpPr/>
           <p:nvPr/>
         </p:nvSpPr>
         <p:spPr>
           <a:xfrm>
             <a:off x="768240" y="4754880"/>
-            <a:ext cx="10057680" cy="274320"/>
+            <a:ext cx="10056960" cy="273960"/>
           </a:xfrm>
           <a:prstGeom prst="rect">
             <a:avLst/>
@@ -26160,14 +26152,14 @@
       </p:sp>
       <p:sp>
         <p:nvSpPr>
-          <p:cNvPr id="479" name="TextBox 5"/>
+          <p:cNvPr id="487" name="TextBox 5"/>
           <p:cNvSpPr/>
           <p:nvPr/>
         </p:nvSpPr>
         <p:spPr>
           <a:xfrm>
             <a:off x="768240" y="5852160"/>
-            <a:ext cx="7314480" cy="198000"/>
+            <a:ext cx="7313760" cy="197640"/>
           </a:xfrm>
           <a:prstGeom prst="rect">
             <a:avLst/>
@@ -26210,6 +26202,29 @@
           </a:p>
         </p:txBody>
       </p:sp>
+      <p:pic>
+        <p:nvPicPr>
+          <p:cNvPr id="488" name="" descr=""/>
+          <p:cNvPicPr/>
+          <p:nvPr/>
+        </p:nvPicPr>
+        <p:blipFill>
+          <a:blip r:embed="rId1"/>
+          <a:stretch/>
+        </p:blipFill>
+        <p:spPr>
+          <a:xfrm>
+            <a:off x="11016000" y="6170400"/>
+            <a:ext cx="1062000" cy="597240"/>
+          </a:xfrm>
+          <a:prstGeom prst="rect">
+            <a:avLst/>
+          </a:prstGeom>
+          <a:ln w="0">
+            <a:noFill/>
+          </a:ln>
+        </p:spPr>
+      </p:pic>
     </p:spTree>
   </p:cSld>
   <mc:AlternateContent>
@@ -26256,7 +26271,7 @@
         <p:spPr>
           <a:xfrm>
             <a:off x="768240" y="420480"/>
-            <a:ext cx="10606320" cy="441720"/>
+            <a:ext cx="10605600" cy="441360"/>
           </a:xfrm>
           <a:prstGeom prst="rect">
             <a:avLst/>
@@ -26308,7 +26323,7 @@
         <p:spPr>
           <a:xfrm>
             <a:off x="768240" y="1170360"/>
-            <a:ext cx="1370880" cy="43560"/>
+            <a:ext cx="1370160" cy="42840"/>
           </a:xfrm>
           <a:prstGeom prst="rect">
             <a:avLst/>
@@ -26349,7 +26364,7 @@
         <p:spPr>
           <a:xfrm>
             <a:off x="0" y="6437520"/>
-            <a:ext cx="12191040" cy="14400"/>
+            <a:ext cx="12190320" cy="13680"/>
           </a:xfrm>
           <a:prstGeom prst="rect">
             <a:avLst/>
@@ -26390,7 +26405,7 @@
         <p:spPr>
           <a:xfrm>
             <a:off x="768240" y="6473880"/>
-            <a:ext cx="8228880" cy="137160"/>
+            <a:ext cx="8228160" cy="136800"/>
           </a:xfrm>
           <a:prstGeom prst="rect">
             <a:avLst/>
@@ -26442,7 +26457,7 @@
         <p:spPr>
           <a:xfrm>
             <a:off x="10607040" y="6473880"/>
-            <a:ext cx="822240" cy="137160"/>
+            <a:ext cx="821520" cy="136800"/>
           </a:xfrm>
           <a:prstGeom prst="rect">
             <a:avLst/>
@@ -26494,7 +26509,7 @@
         <p:spPr>
           <a:xfrm>
             <a:off x="768240" y="1417320"/>
-            <a:ext cx="10606320" cy="622080"/>
+            <a:ext cx="10605600" cy="621720"/>
           </a:xfrm>
           <a:prstGeom prst="rect">
             <a:avLst/>
@@ -26546,7 +26561,7 @@
         <p:spPr>
           <a:xfrm>
             <a:off x="768240" y="2423160"/>
-            <a:ext cx="5485680" cy="1958760"/>
+            <a:ext cx="5484960" cy="1958760"/>
           </a:xfrm>
           <a:prstGeom prst="rect">
             <a:avLst/>
@@ -26747,7 +26762,7 @@
         <p:spPr>
           <a:xfrm>
             <a:off x="6583680" y="2423160"/>
-            <a:ext cx="4845600" cy="2376720"/>
+            <a:ext cx="4844880" cy="2376000"/>
           </a:xfrm>
           <a:prstGeom prst="roundRect">
             <a:avLst>
@@ -26790,7 +26805,7 @@
         <p:spPr>
           <a:xfrm>
             <a:off x="6583680" y="2423160"/>
-            <a:ext cx="50040" cy="2376720"/>
+            <a:ext cx="49320" cy="2376000"/>
           </a:xfrm>
           <a:prstGeom prst="rect">
             <a:avLst/>
@@ -26831,7 +26846,7 @@
         <p:spPr>
           <a:xfrm>
             <a:off x="6839640" y="3206160"/>
-            <a:ext cx="4388400" cy="847080"/>
+            <a:ext cx="4387680" cy="846360"/>
           </a:xfrm>
           <a:prstGeom prst="rect">
             <a:avLst/>
@@ -26914,7 +26929,7 @@
         <p:spPr>
           <a:xfrm>
             <a:off x="6583680" y="4983480"/>
-            <a:ext cx="4845600" cy="198000"/>
+            <a:ext cx="4844880" cy="197640"/>
           </a:xfrm>
           <a:prstGeom prst="rect">
             <a:avLst/>
@@ -27003,7 +27018,7 @@
         <p:spPr>
           <a:xfrm>
             <a:off x="768240" y="2240280"/>
-            <a:ext cx="1828080" cy="974880"/>
+            <a:ext cx="1827360" cy="974880"/>
           </a:xfrm>
           <a:prstGeom prst="rect">
             <a:avLst/>
@@ -27055,7 +27070,7 @@
         <p:spPr>
           <a:xfrm>
             <a:off x="768240" y="3246120"/>
-            <a:ext cx="1828080" cy="50040"/>
+            <a:ext cx="1827360" cy="49320"/>
           </a:xfrm>
           <a:prstGeom prst="rect">
             <a:avLst/>
@@ -27096,7 +27111,7 @@
         <p:spPr>
           <a:xfrm>
             <a:off x="768240" y="3429000"/>
-            <a:ext cx="10423440" cy="639720"/>
+            <a:ext cx="10422720" cy="639360"/>
           </a:xfrm>
           <a:prstGeom prst="rect">
             <a:avLst/>
@@ -27148,7 +27163,7 @@
         <p:spPr>
           <a:xfrm>
             <a:off x="768240" y="4754880"/>
-            <a:ext cx="7314480" cy="243360"/>
+            <a:ext cx="7313760" cy="243000"/>
           </a:xfrm>
           <a:prstGeom prst="rect">
             <a:avLst/>
@@ -27237,7 +27252,7 @@
         <p:spPr>
           <a:xfrm>
             <a:off x="768240" y="420480"/>
-            <a:ext cx="10606320" cy="441720"/>
+            <a:ext cx="10605600" cy="441360"/>
           </a:xfrm>
           <a:prstGeom prst="rect">
             <a:avLst/>
@@ -27272,7 +27287,7 @@
                 <a:latin typeface="Play"/>
                 <a:ea typeface="DejaVu Sans"/>
               </a:rPr>
-              <a:t>Augmentacja danych</a:t>
+              <a:t>Labelowanie danych z wykorzystaniem LLM</a:t>
             </a:r>
             <a:endParaRPr b="0" lang="pl-PL" sz="2900" spc="-1" strike="noStrike">
               <a:latin typeface="Arial"/>
@@ -27289,7 +27304,7 @@
         <p:spPr>
           <a:xfrm>
             <a:off x="768240" y="1170360"/>
-            <a:ext cx="1370880" cy="43560"/>
+            <a:ext cx="1370160" cy="42840"/>
           </a:xfrm>
           <a:prstGeom prst="rect">
             <a:avLst/>
@@ -27330,7 +27345,7 @@
         <p:spPr>
           <a:xfrm>
             <a:off x="768240" y="1298520"/>
-            <a:ext cx="10606320" cy="228240"/>
+            <a:ext cx="10605600" cy="227880"/>
           </a:xfrm>
           <a:prstGeom prst="rect">
             <a:avLst/>
@@ -27365,7 +27380,7 @@
                 <a:latin typeface="Arial"/>
                 <a:ea typeface="DejaVu Sans"/>
               </a:rPr>
-              <a:t>Tworzenie nowych przykładów treningowych na bazie istniejącego zbioru</a:t>
+              <a:t>Przypisywanie etykiet przykładom — klasyczne (człowiek) vs wspierane LLM</a:t>
             </a:r>
             <a:endParaRPr b="0" lang="pl-PL" sz="1500" spc="-1" strike="noStrike">
               <a:latin typeface="Arial"/>
@@ -27382,7 +27397,7 @@
         <p:spPr>
           <a:xfrm>
             <a:off x="0" y="6437520"/>
-            <a:ext cx="12191040" cy="14400"/>
+            <a:ext cx="12190320" cy="13680"/>
           </a:xfrm>
           <a:prstGeom prst="rect">
             <a:avLst/>
@@ -27423,7 +27438,7 @@
         <p:spPr>
           <a:xfrm>
             <a:off x="768240" y="6473880"/>
-            <a:ext cx="8228880" cy="137160"/>
+            <a:ext cx="8228160" cy="136800"/>
           </a:xfrm>
           <a:prstGeom prst="rect">
             <a:avLst/>
@@ -27458,7 +27473,7 @@
                 <a:latin typeface="Arial"/>
                 <a:ea typeface="DejaVu Sans"/>
               </a:rPr>
-              <a:t>DSS 2026 AI Edition  ·  Teoria · Augmentacja</a:t>
+              <a:t>DSS 2026 AI Edition  ·  Teoria · Labelowanie</a:t>
             </a:r>
             <a:endParaRPr b="0" lang="pl-PL" sz="900" spc="-1" strike="noStrike">
               <a:latin typeface="Arial"/>
@@ -27475,7 +27490,7 @@
         <p:spPr>
           <a:xfrm>
             <a:off x="10607040" y="6473880"/>
-            <a:ext cx="822240" cy="137160"/>
+            <a:ext cx="821520" cy="136800"/>
           </a:xfrm>
           <a:prstGeom prst="rect">
             <a:avLst/>
@@ -27510,7 +27525,7 @@
                 <a:latin typeface="Arial"/>
                 <a:ea typeface="DejaVu Sans"/>
               </a:rPr>
-              <a:t>5</a:t>
+              <a:t>6</a:t>
             </a:r>
             <a:endParaRPr b="0" lang="pl-PL" sz="900" spc="-1" strike="noStrike">
               <a:latin typeface="Arial"/>
@@ -27527,7 +27542,7 @@
         <p:spPr>
           <a:xfrm>
             <a:off x="768240" y="1828800"/>
-            <a:ext cx="5119920" cy="228240"/>
+            <a:ext cx="5302080" cy="227880"/>
           </a:xfrm>
           <a:prstGeom prst="rect">
             <a:avLst/>
@@ -27562,7 +27577,7 @@
                 <a:latin typeface="Arial"/>
                 <a:ea typeface="DejaVu Sans"/>
               </a:rPr>
-              <a:t>Dobra augmentacja zapewnia, że przykłady:</a:t>
+              <a:t>Szczególnie przydatne, gdy:</a:t>
             </a:r>
             <a:endParaRPr b="0" lang="pl-PL" sz="1500" spc="-1" strike="noStrike">
               <a:latin typeface="Arial"/>
@@ -27579,7 +27594,7 @@
         <p:spPr>
           <a:xfrm>
             <a:off x="768240" y="2286000"/>
-            <a:ext cx="5302800" cy="1823760"/>
+            <a:ext cx="5393520" cy="1692720"/>
           </a:xfrm>
           <a:prstGeom prst="rect">
             <a:avLst/>
@@ -27605,12 +27620,12 @@
                 <a:spcPct val="105000"/>
               </a:lnSpc>
               <a:spcAft>
-                <a:spcPts val="901"/>
+                <a:spcPts val="799"/>
               </a:spcAft>
               <a:buNone/>
             </a:pPr>
             <a:r>
-              <a:rPr b="0" lang="en-US" sz="1600" spc="-1" strike="noStrike">
+              <a:rPr b="0" lang="en-US" sz="1500" spc="-1" strike="noStrike">
                 <a:solidFill>
                   <a:srgbClr val="1b0532"/>
                 </a:solidFill>
@@ -27620,16 +27635,16 @@
               <a:t>▸  </a:t>
             </a:r>
             <a:r>
-              <a:rPr b="0" lang="en-US" sz="1600" spc="-1" strike="noStrike">
+              <a:rPr b="0" lang="en-US" sz="1500" spc="-1" strike="noStrike">
                 <a:solidFill>
                   <a:srgbClr val="1b0532"/>
                 </a:solidFill>
                 <a:latin typeface="Arial"/>
                 <a:ea typeface="DejaVu Sans"/>
               </a:rPr>
-              <a:t>są zgodne z problemem</a:t>
-            </a:r>
-            <a:endParaRPr b="0" lang="pl-PL" sz="1600" spc="-1" strike="noStrike">
+              <a:t>mamy dużo nieoznaczonych danych</a:t>
+            </a:r>
+            <a:endParaRPr b="0" lang="pl-PL" sz="1500" spc="-1" strike="noStrike">
               <a:latin typeface="Arial"/>
             </a:endParaRPr>
           </a:p>
@@ -27639,12 +27654,12 @@
                 <a:spcPct val="105000"/>
               </a:lnSpc>
               <a:spcAft>
-                <a:spcPts val="901"/>
+                <a:spcPts val="799"/>
               </a:spcAft>
               <a:buNone/>
             </a:pPr>
             <a:r>
-              <a:rPr b="0" lang="en-US" sz="1600" spc="-1" strike="noStrike">
+              <a:rPr b="0" lang="en-US" sz="1500" spc="-1" strike="noStrike">
                 <a:solidFill>
                   <a:srgbClr val="1b0532"/>
                 </a:solidFill>
@@ -27654,16 +27669,16 @@
               <a:t>▸  </a:t>
             </a:r>
             <a:r>
-              <a:rPr b="0" lang="en-US" sz="1600" spc="-1" strike="noStrike">
+              <a:rPr b="0" lang="en-US" sz="1500" spc="-1" strike="noStrike">
                 <a:solidFill>
                   <a:srgbClr val="1b0532"/>
                 </a:solidFill>
                 <a:latin typeface="Arial"/>
                 <a:ea typeface="DejaVu Sans"/>
               </a:rPr>
-              <a:t>zachowują poprawną etykietę</a:t>
-            </a:r>
-            <a:endParaRPr b="0" lang="pl-PL" sz="1600" spc="-1" strike="noStrike">
+              <a:t>chcemy szybko pierwszy zbiór treningowy</a:t>
+            </a:r>
+            <a:endParaRPr b="0" lang="pl-PL" sz="1500" spc="-1" strike="noStrike">
               <a:latin typeface="Arial"/>
             </a:endParaRPr>
           </a:p>
@@ -27673,12 +27688,12 @@
                 <a:spcPct val="105000"/>
               </a:lnSpc>
               <a:spcAft>
-                <a:spcPts val="901"/>
+                <a:spcPts val="799"/>
               </a:spcAft>
               <a:buNone/>
             </a:pPr>
             <a:r>
-              <a:rPr b="0" lang="en-US" sz="1600" spc="-1" strike="noStrike">
+              <a:rPr b="0" lang="en-US" sz="1500" spc="-1" strike="noStrike">
                 <a:solidFill>
                   <a:srgbClr val="1b0532"/>
                 </a:solidFill>
@@ -27688,16 +27703,16 @@
               <a:t>▸  </a:t>
             </a:r>
             <a:r>
-              <a:rPr b="0" lang="en-US" sz="1600" spc="-1" strike="noStrike">
+              <a:rPr b="0" lang="en-US" sz="1500" spc="-1" strike="noStrike">
                 <a:solidFill>
                   <a:srgbClr val="1b0532"/>
                 </a:solidFill>
                 <a:latin typeface="Arial"/>
                 <a:ea typeface="DejaVu Sans"/>
               </a:rPr>
-              <a:t>zwiększają różnorodność zbioru</a:t>
-            </a:r>
-            <a:endParaRPr b="0" lang="pl-PL" sz="1600" spc="-1" strike="noStrike">
+              <a:t>potrzebne wstępne etykiety do eksperymentów</a:t>
+            </a:r>
+            <a:endParaRPr b="0" lang="pl-PL" sz="1500" spc="-1" strike="noStrike">
               <a:latin typeface="Arial"/>
             </a:endParaRPr>
           </a:p>
@@ -27707,12 +27722,12 @@
                 <a:spcPct val="105000"/>
               </a:lnSpc>
               <a:spcAft>
-                <a:spcPts val="901"/>
+                <a:spcPts val="799"/>
               </a:spcAft>
               <a:buNone/>
             </a:pPr>
             <a:r>
-              <a:rPr b="0" lang="en-US" sz="1600" spc="-1" strike="noStrike">
+              <a:rPr b="0" lang="en-US" sz="1500" spc="-1" strike="noStrike">
                 <a:solidFill>
                   <a:srgbClr val="1b0532"/>
                 </a:solidFill>
@@ -27722,16 +27737,16 @@
               <a:t>▸  </a:t>
             </a:r>
             <a:r>
-              <a:rPr b="0" lang="en-US" sz="1600" spc="-1" strike="noStrike">
+              <a:rPr b="0" lang="en-US" sz="1500" spc="-1" strike="noStrike">
                 <a:solidFill>
                   <a:srgbClr val="1b0532"/>
                 </a:solidFill>
                 <a:latin typeface="Arial"/>
                 <a:ea typeface="DejaVu Sans"/>
               </a:rPr>
-              <a:t>pomagają modelowi generalizować</a:t>
-            </a:r>
-            <a:endParaRPr b="0" lang="pl-PL" sz="1600" spc="-1" strike="noStrike">
+              <a:t>chcemy ograniczyć koszt ręcznej anotacji</a:t>
+            </a:r>
+            <a:endParaRPr b="0" lang="pl-PL" sz="1500" spc="-1" strike="noStrike">
               <a:latin typeface="Arial"/>
             </a:endParaRPr>
           </a:p>
@@ -27741,12 +27756,12 @@
                 <a:spcPct val="105000"/>
               </a:lnSpc>
               <a:spcAft>
-                <a:spcPts val="901"/>
+                <a:spcPts val="799"/>
               </a:spcAft>
               <a:buNone/>
             </a:pPr>
             <a:r>
-              <a:rPr b="0" lang="en-US" sz="1600" spc="-1" strike="noStrike">
+              <a:rPr b="0" lang="en-US" sz="1500" spc="-1" strike="noStrike">
                 <a:solidFill>
                   <a:srgbClr val="1b0532"/>
                 </a:solidFill>
@@ -27756,284 +27771,31 @@
               <a:t>▸  </a:t>
             </a:r>
             <a:r>
-              <a:rPr b="0" lang="en-US" sz="1600" spc="-1" strike="noStrike">
+              <a:rPr b="0" lang="en-US" sz="1500" spc="-1" strike="noStrike">
                 <a:solidFill>
                   <a:srgbClr val="1b0532"/>
                 </a:solidFill>
                 <a:latin typeface="Arial"/>
                 <a:ea typeface="DejaVu Sans"/>
               </a:rPr>
-              <a:t>uzupełniają klasy słabo reprezentowane</a:t>
-            </a:r>
-            <a:endParaRPr b="0" lang="pl-PL" sz="1600" spc="-1" strike="noStrike">
-              <a:latin typeface="Arial"/>
-            </a:endParaRPr>
-          </a:p>
-        </p:txBody>
-      </p:sp>
-      <p:sp>
-        <p:nvSpPr>
-          <p:cNvPr id="105" name="TextBox 9"/>
+              <a:t>klasy da się jasno zdefiniować w promptach</a:t>
+            </a:r>
+            <a:endParaRPr b="0" lang="pl-PL" sz="1500" spc="-1" strike="noStrike">
+              <a:latin typeface="Arial"/>
+            </a:endParaRPr>
+          </a:p>
+        </p:txBody>
+      </p:sp>
+      <p:sp>
+        <p:nvSpPr>
+          <p:cNvPr id="105" name="Rounded Rectangle 9"/>
           <p:cNvSpPr/>
           <p:nvPr/>
         </p:nvSpPr>
         <p:spPr>
           <a:xfrm>
             <a:off x="6400800" y="1828800"/>
-            <a:ext cx="5028480" cy="228240"/>
-          </a:xfrm>
-          <a:prstGeom prst="rect">
-            <a:avLst/>
-          </a:prstGeom>
-          <a:noFill/>
-          <a:ln w="0">
-            <a:noFill/>
-          </a:ln>
-        </p:spPr>
-        <p:style>
-          <a:lnRef idx="0"/>
-          <a:fillRef idx="0"/>
-          <a:effectRef idx="0"/>
-          <a:fontRef idx="minor"/>
-        </p:style>
-        <p:txBody>
-          <a:bodyPr lIns="0" rIns="0" tIns="0" bIns="0" anchor="t">
-            <a:spAutoFit/>
-          </a:bodyPr>
-          <a:p>
-            <a:pPr>
-              <a:lnSpc>
-                <a:spcPct val="100000"/>
-              </a:lnSpc>
-              <a:buNone/>
-            </a:pPr>
-            <a:r>
-              <a:rPr b="1" lang="en-US" sz="1500" spc="-1" strike="noStrike">
-                <a:solidFill>
-                  <a:srgbClr val="1b0532"/>
-                </a:solidFill>
-                <a:latin typeface="Arial"/>
-                <a:ea typeface="DejaVu Sans"/>
-              </a:rPr>
-              <a:t>Metody dla tekstu:</a:t>
-            </a:r>
-            <a:endParaRPr b="0" lang="pl-PL" sz="1500" spc="-1" strike="noStrike">
-              <a:latin typeface="Arial"/>
-            </a:endParaRPr>
-          </a:p>
-        </p:txBody>
-      </p:sp>
-      <p:sp>
-        <p:nvSpPr>
-          <p:cNvPr id="106" name="TextBox 10"/>
-          <p:cNvSpPr/>
-          <p:nvPr/>
-        </p:nvSpPr>
-        <p:spPr>
-          <a:xfrm>
-            <a:off x="6400800" y="2286000"/>
-            <a:ext cx="5028480" cy="1823760"/>
-          </a:xfrm>
-          <a:prstGeom prst="rect">
-            <a:avLst/>
-          </a:prstGeom>
-          <a:noFill/>
-          <a:ln w="0">
-            <a:noFill/>
-          </a:ln>
-        </p:spPr>
-        <p:style>
-          <a:lnRef idx="0"/>
-          <a:fillRef idx="0"/>
-          <a:effectRef idx="0"/>
-          <a:fontRef idx="minor"/>
-        </p:style>
-        <p:txBody>
-          <a:bodyPr lIns="90000" rIns="90000" tIns="45000" bIns="45000" anchor="t">
-            <a:spAutoFit/>
-          </a:bodyPr>
-          <a:p>
-            <a:pPr>
-              <a:lnSpc>
-                <a:spcPct val="105000"/>
-              </a:lnSpc>
-              <a:spcAft>
-                <a:spcPts val="901"/>
-              </a:spcAft>
-              <a:buNone/>
-            </a:pPr>
-            <a:r>
-              <a:rPr b="0" lang="en-US" sz="1600" spc="-1" strike="noStrike">
-                <a:solidFill>
-                  <a:srgbClr val="1b0532"/>
-                </a:solidFill>
-                <a:latin typeface="Arial"/>
-                <a:ea typeface="DejaVu Sans"/>
-              </a:rPr>
-              <a:t>▸  </a:t>
-            </a:r>
-            <a:r>
-              <a:rPr b="0" lang="en-US" sz="1600" spc="-1" strike="noStrike">
-                <a:solidFill>
-                  <a:srgbClr val="1b0532"/>
-                </a:solidFill>
-                <a:latin typeface="Arial"/>
-                <a:ea typeface="DejaVu Sans"/>
-              </a:rPr>
-              <a:t>parafrazowanie przykładów</a:t>
-            </a:r>
-            <a:endParaRPr b="0" lang="pl-PL" sz="1600" spc="-1" strike="noStrike">
-              <a:latin typeface="Arial"/>
-            </a:endParaRPr>
-          </a:p>
-          <a:p>
-            <a:pPr>
-              <a:lnSpc>
-                <a:spcPct val="105000"/>
-              </a:lnSpc>
-              <a:spcAft>
-                <a:spcPts val="901"/>
-              </a:spcAft>
-              <a:buNone/>
-            </a:pPr>
-            <a:r>
-              <a:rPr b="0" lang="en-US" sz="1600" spc="-1" strike="noStrike">
-                <a:solidFill>
-                  <a:srgbClr val="1b0532"/>
-                </a:solidFill>
-                <a:latin typeface="Arial"/>
-                <a:ea typeface="DejaVu Sans"/>
-              </a:rPr>
-              <a:t>▸  </a:t>
-            </a:r>
-            <a:r>
-              <a:rPr b="0" lang="en-US" sz="1600" spc="-1" strike="noStrike">
-                <a:solidFill>
-                  <a:srgbClr val="1b0532"/>
-                </a:solidFill>
-                <a:latin typeface="Arial"/>
-                <a:ea typeface="DejaVu Sans"/>
-              </a:rPr>
-              <a:t>zmiana stylu / długości wypowiedzi</a:t>
-            </a:r>
-            <a:endParaRPr b="0" lang="pl-PL" sz="1600" spc="-1" strike="noStrike">
-              <a:latin typeface="Arial"/>
-            </a:endParaRPr>
-          </a:p>
-          <a:p>
-            <a:pPr>
-              <a:lnSpc>
-                <a:spcPct val="105000"/>
-              </a:lnSpc>
-              <a:spcAft>
-                <a:spcPts val="901"/>
-              </a:spcAft>
-              <a:buNone/>
-            </a:pPr>
-            <a:r>
-              <a:rPr b="0" lang="en-US" sz="1600" spc="-1" strike="noStrike">
-                <a:solidFill>
-                  <a:srgbClr val="1b0532"/>
-                </a:solidFill>
-                <a:latin typeface="Arial"/>
-                <a:ea typeface="DejaVu Sans"/>
-              </a:rPr>
-              <a:t>▸  </a:t>
-            </a:r>
-            <a:r>
-              <a:rPr b="0" lang="en-US" sz="1600" spc="-1" strike="noStrike">
-                <a:solidFill>
-                  <a:srgbClr val="1b0532"/>
-                </a:solidFill>
-                <a:latin typeface="Arial"/>
-                <a:ea typeface="DejaVu Sans"/>
-              </a:rPr>
-              <a:t>warianty formalne i nieformalne</a:t>
-            </a:r>
-            <a:endParaRPr b="0" lang="pl-PL" sz="1600" spc="-1" strike="noStrike">
-              <a:latin typeface="Arial"/>
-            </a:endParaRPr>
-          </a:p>
-          <a:p>
-            <a:pPr>
-              <a:lnSpc>
-                <a:spcPct val="105000"/>
-              </a:lnSpc>
-              <a:spcAft>
-                <a:spcPts val="901"/>
-              </a:spcAft>
-              <a:buNone/>
-            </a:pPr>
-            <a:r>
-              <a:rPr b="0" lang="en-US" sz="1600" spc="-1" strike="noStrike">
-                <a:solidFill>
-                  <a:srgbClr val="1b0532"/>
-                </a:solidFill>
-                <a:latin typeface="Arial"/>
-                <a:ea typeface="DejaVu Sans"/>
-              </a:rPr>
-              <a:t>▸  </a:t>
-            </a:r>
-            <a:r>
-              <a:rPr b="0" lang="en-US" sz="1600" spc="-1" strike="noStrike">
-                <a:solidFill>
-                  <a:srgbClr val="1b0532"/>
-                </a:solidFill>
-                <a:latin typeface="Arial"/>
-                <a:ea typeface="DejaVu Sans"/>
-              </a:rPr>
-              <a:t>literówki, slang, język potoczny</a:t>
-            </a:r>
-            <a:endParaRPr b="0" lang="pl-PL" sz="1600" spc="-1" strike="noStrike">
-              <a:latin typeface="Arial"/>
-            </a:endParaRPr>
-          </a:p>
-          <a:p>
-            <a:pPr>
-              <a:lnSpc>
-                <a:spcPct val="105000"/>
-              </a:lnSpc>
-              <a:spcAft>
-                <a:spcPts val="901"/>
-              </a:spcAft>
-              <a:buNone/>
-            </a:pPr>
-            <a:r>
-              <a:rPr b="0" lang="en-US" sz="1600" spc="-1" strike="noStrike">
-                <a:solidFill>
-                  <a:srgbClr val="1b0532"/>
-                </a:solidFill>
-                <a:latin typeface="Arial"/>
-                <a:ea typeface="DejaVu Sans"/>
-              </a:rPr>
-              <a:t>▸  </a:t>
-            </a:r>
-            <a:r>
-              <a:rPr b="0" lang="en-US" sz="1600" spc="-1" strike="noStrike">
-                <a:solidFill>
-                  <a:srgbClr val="1b0532"/>
-                </a:solidFill>
-                <a:latin typeface="Arial"/>
-                <a:ea typeface="DejaVu Sans"/>
-              </a:rPr>
-              <a:t>przykłady rzadkie i graniczne</a:t>
-            </a:r>
-            <a:endParaRPr b="0" lang="pl-PL" sz="1600" spc="-1" strike="noStrike">
-              <a:latin typeface="Arial"/>
-            </a:endParaRPr>
-          </a:p>
-        </p:txBody>
-      </p:sp>
-      <p:sp>
-        <p:nvSpPr>
-          <p:cNvPr id="107" name="Rounded Rectangle 11"/>
-          <p:cNvSpPr/>
-          <p:nvPr/>
-        </p:nvSpPr>
-        <p:spPr>
-          <a:xfrm>
-            <a:off x="768240" y="5074920"/>
-            <a:ext cx="10652040" cy="867960"/>
+            <a:ext cx="5027760" cy="1553040"/>
           </a:xfrm>
           <a:prstGeom prst="roundRect">
             <a:avLst>
@@ -28069,20 +27831,20 @@
       </p:sp>
       <p:sp>
         <p:nvSpPr>
-          <p:cNvPr id="108" name="Rectangle 12"/>
-          <p:cNvSpPr/>
-          <p:nvPr/>
-        </p:nvSpPr>
-        <p:spPr>
-          <a:xfrm>
-            <a:off x="768240" y="5074920"/>
-            <a:ext cx="50040" cy="867960"/>
+          <p:cNvPr id="106" name="Rectangle 10"/>
+          <p:cNvSpPr/>
+          <p:nvPr/>
+        </p:nvSpPr>
+        <p:spPr>
+          <a:xfrm>
+            <a:off x="6400800" y="1828800"/>
+            <a:ext cx="49320" cy="1553040"/>
           </a:xfrm>
           <a:prstGeom prst="rect">
             <a:avLst/>
           </a:prstGeom>
           <a:solidFill>
-            <a:srgbClr val="00befe"/>
+            <a:srgbClr val="c97a00"/>
           </a:solidFill>
           <a:ln>
             <a:noFill/>
@@ -28110,14 +27872,14 @@
       </p:sp>
       <p:sp>
         <p:nvSpPr>
-          <p:cNvPr id="109" name="TextBox 13"/>
-          <p:cNvSpPr/>
-          <p:nvPr/>
-        </p:nvSpPr>
-        <p:spPr>
-          <a:xfrm>
-            <a:off x="1024200" y="5311440"/>
-            <a:ext cx="10194840" cy="431640"/>
+          <p:cNvPr id="107" name="TextBox 11"/>
+          <p:cNvSpPr/>
+          <p:nvPr/>
+        </p:nvSpPr>
+        <p:spPr>
+          <a:xfrm>
+            <a:off x="6656760" y="2304360"/>
+            <a:ext cx="4570560" cy="638640"/>
           </a:xfrm>
           <a:prstGeom prst="rect">
             <a:avLst/>
@@ -28152,7 +27914,7 @@
                 <a:latin typeface="Arial"/>
                 <a:ea typeface="DejaVu Sans"/>
               </a:rPr>
-              <a:t>▸  </a:t>
+              <a:t>⚠  </a:t>
             </a:r>
             <a:r>
               <a:rPr b="1" lang="en-US" sz="1400" spc="-1" strike="noStrike">
@@ -28162,7 +27924,7 @@
                 <a:latin typeface="Arial"/>
                 <a:ea typeface="DejaVu Sans"/>
               </a:rPr>
-              <a:t>Przykład (etykieta zachowana)</a:t>
+              <a:t>Uwaga</a:t>
             </a:r>
             <a:endParaRPr b="0" lang="pl-PL" sz="1400" spc="-1" strike="noStrike">
               <a:latin typeface="Arial"/>
@@ -28183,8 +27945,165 @@
                 <a:latin typeface="Arial"/>
                 <a:ea typeface="DejaVu Sans"/>
               </a:rPr>
-              <a:t>„</a:t>
-            </a:r>
+              <a:t>Etykiety LLM to tylko propozycje. Model myli się przy ironii, niejednoznaczności, braku kontekstu i slangu.</a:t>
+            </a:r>
+            <a:endParaRPr b="0" lang="pl-PL" sz="1300" spc="-1" strike="noStrike">
+              <a:latin typeface="Arial"/>
+            </a:endParaRPr>
+          </a:p>
+        </p:txBody>
+      </p:sp>
+      <p:sp>
+        <p:nvSpPr>
+          <p:cNvPr id="108" name="Rounded Rectangle 12"/>
+          <p:cNvSpPr/>
+          <p:nvPr/>
+        </p:nvSpPr>
+        <p:spPr>
+          <a:xfrm>
+            <a:off x="6400800" y="3566160"/>
+            <a:ext cx="5027760" cy="1507320"/>
+          </a:xfrm>
+          <a:prstGeom prst="roundRect">
+            <a:avLst>
+              <a:gd name="adj" fmla="val 16667"/>
+            </a:avLst>
+          </a:prstGeom>
+          <a:solidFill>
+            <a:srgbClr val="f2f1f6"/>
+          </a:solidFill>
+          <a:ln>
+            <a:noFill/>
+          </a:ln>
+          <a:effectLst>
+            <a:outerShdw blurRad="39960" dir="5400000" dist="23040" rotWithShape="0">
+              <a:srgbClr val="000000">
+                <a:alpha val="35000"/>
+              </a:srgbClr>
+            </a:outerShdw>
+          </a:effectLst>
+        </p:spPr>
+        <p:style>
+          <a:lnRef idx="1">
+            <a:schemeClr val="accent1"/>
+          </a:lnRef>
+          <a:fillRef idx="3">
+            <a:schemeClr val="accent1"/>
+          </a:fillRef>
+          <a:effectRef idx="2">
+            <a:schemeClr val="accent1"/>
+          </a:effectRef>
+          <a:fontRef idx="minor"/>
+        </p:style>
+      </p:sp>
+      <p:sp>
+        <p:nvSpPr>
+          <p:cNvPr id="109" name="Rectangle 13"/>
+          <p:cNvSpPr/>
+          <p:nvPr/>
+        </p:nvSpPr>
+        <p:spPr>
+          <a:xfrm>
+            <a:off x="6400800" y="3566160"/>
+            <a:ext cx="49320" cy="1507320"/>
+          </a:xfrm>
+          <a:prstGeom prst="rect">
+            <a:avLst/>
+          </a:prstGeom>
+          <a:solidFill>
+            <a:srgbClr val="1f9e55"/>
+          </a:solidFill>
+          <a:ln>
+            <a:noFill/>
+          </a:ln>
+          <a:effectLst>
+            <a:outerShdw blurRad="39960" dir="5400000" dist="23040" rotWithShape="0">
+              <a:srgbClr val="000000">
+                <a:alpha val="35000"/>
+              </a:srgbClr>
+            </a:outerShdw>
+          </a:effectLst>
+        </p:spPr>
+        <p:style>
+          <a:lnRef idx="1">
+            <a:schemeClr val="accent1"/>
+          </a:lnRef>
+          <a:fillRef idx="3">
+            <a:schemeClr val="accent1"/>
+          </a:fillRef>
+          <a:effectRef idx="2">
+            <a:schemeClr val="accent1"/>
+          </a:effectRef>
+          <a:fontRef idx="minor"/>
+        </p:style>
+      </p:sp>
+      <p:sp>
+        <p:nvSpPr>
+          <p:cNvPr id="110" name="TextBox 14"/>
+          <p:cNvSpPr/>
+          <p:nvPr/>
+        </p:nvSpPr>
+        <p:spPr>
+          <a:xfrm>
+            <a:off x="6656760" y="3915000"/>
+            <a:ext cx="4570560" cy="846360"/>
+          </a:xfrm>
+          <a:prstGeom prst="rect">
+            <a:avLst/>
+          </a:prstGeom>
+          <a:noFill/>
+          <a:ln w="0">
+            <a:noFill/>
+          </a:ln>
+        </p:spPr>
+        <p:style>
+          <a:lnRef idx="0"/>
+          <a:fillRef idx="0"/>
+          <a:effectRef idx="0"/>
+          <a:fontRef idx="minor"/>
+        </p:style>
+        <p:txBody>
+          <a:bodyPr lIns="0" rIns="0" tIns="0" bIns="0" anchor="ctr">
+            <a:spAutoFit/>
+          </a:bodyPr>
+          <a:p>
+            <a:pPr>
+              <a:lnSpc>
+                <a:spcPct val="105000"/>
+              </a:lnSpc>
+              <a:buNone/>
+            </a:pPr>
+            <a:r>
+              <a:rPr b="1" lang="en-US" sz="1400" spc="-1" strike="noStrike">
+                <a:solidFill>
+                  <a:srgbClr val="1b0532"/>
+                </a:solidFill>
+                <a:latin typeface="Arial"/>
+                <a:ea typeface="DejaVu Sans"/>
+              </a:rPr>
+              <a:t>✓  </a:t>
+            </a:r>
+            <a:r>
+              <a:rPr b="1" lang="en-US" sz="1400" spc="-1" strike="noStrike">
+                <a:solidFill>
+                  <a:srgbClr val="1b0532"/>
+                </a:solidFill>
+                <a:latin typeface="Arial"/>
+                <a:ea typeface="DejaVu Sans"/>
+              </a:rPr>
+              <a:t>Zasada</a:t>
+            </a:r>
+            <a:endParaRPr b="0" lang="pl-PL" sz="1400" spc="-1" strike="noStrike">
+              <a:latin typeface="Arial"/>
+            </a:endParaRPr>
+          </a:p>
+          <a:p>
+            <a:pPr>
+              <a:lnSpc>
+                <a:spcPct val="105000"/>
+              </a:lnSpc>
+              <a:buNone/>
+            </a:pPr>
             <a:r>
               <a:rPr b="0" lang="en-US" sz="1300" spc="-1" strike="noStrike">
                 <a:solidFill>
@@ -28193,9 +28112,159 @@
                 <a:latin typeface="Arial"/>
                 <a:ea typeface="DejaVu Sans"/>
               </a:rPr>
-              <a:t>Chcę zwrócić produkt…” [zwrot]  →  „Jak odesłać towar?” · „Czy da się zrobić zwrot?” — wszystkie warianty pozostają w tej samej klasie.</a:t>
+              <a:t>LLM nie zastępuje człowieka — przyspiesza etykietowanie. Człowiek kontroluje jakość, poprawia błędy i rozstrzyga trudne przypadki.</a:t>
             </a:r>
             <a:endParaRPr b="0" lang="pl-PL" sz="1300" spc="-1" strike="noStrike">
+              <a:latin typeface="Arial"/>
+            </a:endParaRPr>
+          </a:p>
+        </p:txBody>
+      </p:sp>
+      <p:pic>
+        <p:nvPicPr>
+          <p:cNvPr id="111" name="" descr=""/>
+          <p:cNvPicPr/>
+          <p:nvPr/>
+        </p:nvPicPr>
+        <p:blipFill>
+          <a:blip r:embed="rId1"/>
+          <a:stretch/>
+        </p:blipFill>
+        <p:spPr>
+          <a:xfrm>
+            <a:off x="144000" y="4077720"/>
+            <a:ext cx="3037320" cy="1897920"/>
+          </a:xfrm>
+          <a:prstGeom prst="rect">
+            <a:avLst/>
+          </a:prstGeom>
+          <a:ln w="0">
+            <a:noFill/>
+          </a:ln>
+        </p:spPr>
+      </p:pic>
+      <p:pic>
+        <p:nvPicPr>
+          <p:cNvPr id="112" name="" descr=""/>
+          <p:cNvPicPr/>
+          <p:nvPr/>
+        </p:nvPicPr>
+        <p:blipFill>
+          <a:blip r:embed="rId2"/>
+          <a:stretch/>
+        </p:blipFill>
+        <p:spPr>
+          <a:xfrm>
+            <a:off x="3384000" y="4176000"/>
+            <a:ext cx="2922840" cy="1826280"/>
+          </a:xfrm>
+          <a:prstGeom prst="rect">
+            <a:avLst/>
+          </a:prstGeom>
+          <a:ln w="0">
+            <a:noFill/>
+          </a:ln>
+        </p:spPr>
+      </p:pic>
+      <p:sp>
+        <p:nvSpPr>
+          <p:cNvPr id="113" name="TextBox 37"/>
+          <p:cNvSpPr/>
+          <p:nvPr/>
+        </p:nvSpPr>
+        <p:spPr>
+          <a:xfrm>
+            <a:off x="864000" y="5976000"/>
+            <a:ext cx="1727640" cy="136800"/>
+          </a:xfrm>
+          <a:prstGeom prst="rect">
+            <a:avLst/>
+          </a:prstGeom>
+          <a:noFill/>
+          <a:ln w="0">
+            <a:noFill/>
+          </a:ln>
+        </p:spPr>
+        <p:style>
+          <a:lnRef idx="0"/>
+          <a:fillRef idx="0"/>
+          <a:effectRef idx="0"/>
+          <a:fontRef idx="minor"/>
+        </p:style>
+        <p:txBody>
+          <a:bodyPr lIns="0" rIns="0" tIns="0" bIns="0" anchor="t">
+            <a:spAutoFit/>
+          </a:bodyPr>
+          <a:p>
+            <a:pPr>
+              <a:lnSpc>
+                <a:spcPct val="100000"/>
+              </a:lnSpc>
+              <a:buNone/>
+            </a:pPr>
+            <a:r>
+              <a:rPr b="0" lang="en-US" sz="900" spc="-1" strike="noStrike">
+                <a:solidFill>
+                  <a:srgbClr val="6b6478"/>
+                </a:solidFill>
+                <a:latin typeface="Arial"/>
+                <a:ea typeface="DejaVu Sans"/>
+              </a:rPr>
+              <a:t>Rozkład klas – ręczna anotacja</a:t>
+            </a:r>
+            <a:endParaRPr b="0" lang="pl-PL" sz="900" spc="-1" strike="noStrike">
+              <a:latin typeface="Arial"/>
+            </a:endParaRPr>
+          </a:p>
+        </p:txBody>
+      </p:sp>
+      <p:sp>
+        <p:nvSpPr>
+          <p:cNvPr id="114" name="TextBox 40"/>
+          <p:cNvSpPr/>
+          <p:nvPr/>
+        </p:nvSpPr>
+        <p:spPr>
+          <a:xfrm>
+            <a:off x="3816000" y="6002640"/>
+            <a:ext cx="1727640" cy="273960"/>
+          </a:xfrm>
+          <a:prstGeom prst="rect">
+            <a:avLst/>
+          </a:prstGeom>
+          <a:noFill/>
+          <a:ln w="0">
+            <a:noFill/>
+          </a:ln>
+        </p:spPr>
+        <p:style>
+          <a:lnRef idx="0"/>
+          <a:fillRef idx="0"/>
+          <a:effectRef idx="0"/>
+          <a:fontRef idx="minor"/>
+        </p:style>
+        <p:txBody>
+          <a:bodyPr lIns="0" rIns="0" tIns="0" bIns="0" anchor="t">
+            <a:spAutoFit/>
+          </a:bodyPr>
+          <a:p>
+            <a:pPr>
+              <a:lnSpc>
+                <a:spcPct val="100000"/>
+              </a:lnSpc>
+              <a:buNone/>
+            </a:pPr>
+            <a:r>
+              <a:rPr b="0" lang="en-US" sz="900" spc="-1" strike="noStrike">
+                <a:solidFill>
+                  <a:srgbClr val="6b6478"/>
+                </a:solidFill>
+                <a:latin typeface="Arial"/>
+                <a:ea typeface="DejaVu Sans"/>
+              </a:rPr>
+              <a:t>Rozkład klas – automatyczne labelowanie</a:t>
+            </a:r>
+            <a:endParaRPr b="0" lang="pl-PL" sz="900" spc="-1" strike="noStrike">
               <a:latin typeface="Arial"/>
             </a:endParaRPr>
           </a:p>
@@ -28240,14 +28309,14 @@
       </p:grpSpPr>
       <p:sp>
         <p:nvSpPr>
-          <p:cNvPr id="110" name="TextBox 1"/>
+          <p:cNvPr id="115" name="TextBox 1"/>
           <p:cNvSpPr/>
           <p:nvPr/>
         </p:nvSpPr>
         <p:spPr>
           <a:xfrm>
             <a:off x="768240" y="420480"/>
-            <a:ext cx="10606320" cy="441720"/>
+            <a:ext cx="10605600" cy="441360"/>
           </a:xfrm>
           <a:prstGeom prst="rect">
             <a:avLst/>
@@ -28282,7 +28351,7 @@
                 <a:latin typeface="Play"/>
                 <a:ea typeface="DejaVu Sans"/>
               </a:rPr>
-              <a:t>Labelowanie danych z wykorzystaniem LLM</a:t>
+              <a:t>Augmentacja danych</a:t>
             </a:r>
             <a:endParaRPr b="0" lang="pl-PL" sz="2900" spc="-1" strike="noStrike">
               <a:latin typeface="Arial"/>
@@ -28292,14 +28361,14 @@
       </p:sp>
       <p:sp>
         <p:nvSpPr>
-          <p:cNvPr id="111" name="Rectangle 2"/>
+          <p:cNvPr id="116" name="Rectangle 2"/>
           <p:cNvSpPr/>
           <p:nvPr/>
         </p:nvSpPr>
         <p:spPr>
           <a:xfrm>
             <a:off x="768240" y="1170360"/>
-            <a:ext cx="1370880" cy="43560"/>
+            <a:ext cx="1370160" cy="42840"/>
           </a:xfrm>
           <a:prstGeom prst="rect">
             <a:avLst/>
@@ -28333,14 +28402,14 @@
       </p:sp>
       <p:sp>
         <p:nvSpPr>
-          <p:cNvPr id="112" name="TextBox 3"/>
+          <p:cNvPr id="117" name="TextBox 3"/>
           <p:cNvSpPr/>
           <p:nvPr/>
         </p:nvSpPr>
         <p:spPr>
           <a:xfrm>
             <a:off x="768240" y="1298520"/>
-            <a:ext cx="10606320" cy="228240"/>
+            <a:ext cx="10605600" cy="227880"/>
           </a:xfrm>
           <a:prstGeom prst="rect">
             <a:avLst/>
@@ -28375,7 +28444,7 @@
                 <a:latin typeface="Arial"/>
                 <a:ea typeface="DejaVu Sans"/>
               </a:rPr>
-              <a:t>Przypisywanie etykiet przykładom — klasyczne (człowiek) vs wspierane LLM</a:t>
+              <a:t>Tworzenie nowych przykładów treningowych na bazie istniejącego zbioru</a:t>
             </a:r>
             <a:endParaRPr b="0" lang="pl-PL" sz="1500" spc="-1" strike="noStrike">
               <a:latin typeface="Arial"/>
@@ -28385,14 +28454,14 @@
       </p:sp>
       <p:sp>
         <p:nvSpPr>
-          <p:cNvPr id="113" name="Rectangle 4"/>
+          <p:cNvPr id="118" name="Rectangle 4"/>
           <p:cNvSpPr/>
           <p:nvPr/>
         </p:nvSpPr>
         <p:spPr>
           <a:xfrm>
             <a:off x="0" y="6437520"/>
-            <a:ext cx="12191040" cy="14400"/>
+            <a:ext cx="12190320" cy="13680"/>
           </a:xfrm>
           <a:prstGeom prst="rect">
             <a:avLst/>
@@ -28426,14 +28495,14 @@
       </p:sp>
       <p:sp>
         <p:nvSpPr>
-          <p:cNvPr id="114" name="TextBox 5"/>
+          <p:cNvPr id="119" name="TextBox 5"/>
           <p:cNvSpPr/>
           <p:nvPr/>
         </p:nvSpPr>
         <p:spPr>
           <a:xfrm>
             <a:off x="768240" y="6473880"/>
-            <a:ext cx="8228880" cy="137160"/>
+            <a:ext cx="8228160" cy="136800"/>
           </a:xfrm>
           <a:prstGeom prst="rect">
             <a:avLst/>
@@ -28468,7 +28537,7 @@
                 <a:latin typeface="Arial"/>
                 <a:ea typeface="DejaVu Sans"/>
               </a:rPr>
-              <a:t>DSS 2026 AI Edition  ·  Teoria · Labelowanie</a:t>
+              <a:t>DSS 2026 AI Edition  ·  Teoria · Augmentacja</a:t>
             </a:r>
             <a:endParaRPr b="0" lang="pl-PL" sz="900" spc="-1" strike="noStrike">
               <a:latin typeface="Arial"/>
@@ -28478,14 +28547,14 @@
       </p:sp>
       <p:sp>
         <p:nvSpPr>
-          <p:cNvPr id="115" name="TextBox 6"/>
+          <p:cNvPr id="120" name="TextBox 6"/>
           <p:cNvSpPr/>
           <p:nvPr/>
         </p:nvSpPr>
         <p:spPr>
           <a:xfrm>
             <a:off x="10607040" y="6473880"/>
-            <a:ext cx="822240" cy="137160"/>
+            <a:ext cx="821520" cy="136800"/>
           </a:xfrm>
           <a:prstGeom prst="rect">
             <a:avLst/>
@@ -28520,7 +28589,7 @@
                 <a:latin typeface="Arial"/>
                 <a:ea typeface="DejaVu Sans"/>
               </a:rPr>
-              <a:t>6</a:t>
+              <a:t>5</a:t>
             </a:r>
             <a:endParaRPr b="0" lang="pl-PL" sz="900" spc="-1" strike="noStrike">
               <a:latin typeface="Arial"/>
@@ -28530,14 +28599,14 @@
       </p:sp>
       <p:sp>
         <p:nvSpPr>
-          <p:cNvPr id="116" name="TextBox 7"/>
+          <p:cNvPr id="121" name="TextBox 7"/>
           <p:cNvSpPr/>
           <p:nvPr/>
         </p:nvSpPr>
         <p:spPr>
           <a:xfrm>
             <a:off x="768240" y="1828800"/>
-            <a:ext cx="5302800" cy="228240"/>
+            <a:ext cx="5119200" cy="227880"/>
           </a:xfrm>
           <a:prstGeom prst="rect">
             <a:avLst/>
@@ -28572,7 +28641,7 @@
                 <a:latin typeface="Arial"/>
                 <a:ea typeface="DejaVu Sans"/>
               </a:rPr>
-              <a:t>Szczególnie przydatne, gdy:</a:t>
+              <a:t>Dobra augmentacja zapewnia, że przykłady:</a:t>
             </a:r>
             <a:endParaRPr b="0" lang="pl-PL" sz="1500" spc="-1" strike="noStrike">
               <a:latin typeface="Arial"/>
@@ -28582,14 +28651,14 @@
       </p:sp>
       <p:sp>
         <p:nvSpPr>
-          <p:cNvPr id="117" name="TextBox 8"/>
+          <p:cNvPr id="122" name="TextBox 8"/>
           <p:cNvSpPr/>
           <p:nvPr/>
         </p:nvSpPr>
         <p:spPr>
           <a:xfrm>
             <a:off x="768240" y="2286000"/>
-            <a:ext cx="5394240" cy="1692720"/>
+            <a:ext cx="5302080" cy="1823760"/>
           </a:xfrm>
           <a:prstGeom prst="rect">
             <a:avLst/>
@@ -28615,12 +28684,12 @@
                 <a:spcPct val="105000"/>
               </a:lnSpc>
               <a:spcAft>
-                <a:spcPts val="799"/>
+                <a:spcPts val="901"/>
               </a:spcAft>
               <a:buNone/>
             </a:pPr>
             <a:r>
-              <a:rPr b="0" lang="en-US" sz="1500" spc="-1" strike="noStrike">
+              <a:rPr b="0" lang="en-US" sz="1600" spc="-1" strike="noStrike">
                 <a:solidFill>
                   <a:srgbClr val="1b0532"/>
                 </a:solidFill>
@@ -28630,31 +28699,250 @@
               <a:t>▸  </a:t>
             </a:r>
             <a:r>
-              <a:rPr b="0" lang="en-US" sz="1500" spc="-1" strike="noStrike">
+              <a:rPr b="0" lang="en-US" sz="1600" spc="-1" strike="noStrike">
                 <a:solidFill>
                   <a:srgbClr val="1b0532"/>
                 </a:solidFill>
                 <a:latin typeface="Arial"/>
                 <a:ea typeface="DejaVu Sans"/>
               </a:rPr>
-              <a:t>mamy dużo nieoznaczonych danych</a:t>
+              <a:t>są zgodne z problemem</a:t>
+            </a:r>
+            <a:endParaRPr b="0" lang="pl-PL" sz="1600" spc="-1" strike="noStrike">
+              <a:latin typeface="Arial"/>
+            </a:endParaRPr>
+          </a:p>
+          <a:p>
+            <a:pPr>
+              <a:lnSpc>
+                <a:spcPct val="105000"/>
+              </a:lnSpc>
+              <a:spcAft>
+                <a:spcPts val="901"/>
+              </a:spcAft>
+              <a:buNone/>
+            </a:pPr>
+            <a:r>
+              <a:rPr b="0" lang="en-US" sz="1600" spc="-1" strike="noStrike">
+                <a:solidFill>
+                  <a:srgbClr val="1b0532"/>
+                </a:solidFill>
+                <a:latin typeface="Arial"/>
+                <a:ea typeface="DejaVu Sans"/>
+              </a:rPr>
+              <a:t>▸  </a:t>
+            </a:r>
+            <a:r>
+              <a:rPr b="0" lang="en-US" sz="1600" spc="-1" strike="noStrike">
+                <a:solidFill>
+                  <a:srgbClr val="1b0532"/>
+                </a:solidFill>
+                <a:latin typeface="Arial"/>
+                <a:ea typeface="DejaVu Sans"/>
+              </a:rPr>
+              <a:t>zachowują poprawną etykietę</a:t>
+            </a:r>
+            <a:endParaRPr b="0" lang="pl-PL" sz="1600" spc="-1" strike="noStrike">
+              <a:latin typeface="Arial"/>
+            </a:endParaRPr>
+          </a:p>
+          <a:p>
+            <a:pPr>
+              <a:lnSpc>
+                <a:spcPct val="105000"/>
+              </a:lnSpc>
+              <a:spcAft>
+                <a:spcPts val="901"/>
+              </a:spcAft>
+              <a:buNone/>
+            </a:pPr>
+            <a:r>
+              <a:rPr b="0" lang="en-US" sz="1600" spc="-1" strike="noStrike">
+                <a:solidFill>
+                  <a:srgbClr val="1b0532"/>
+                </a:solidFill>
+                <a:latin typeface="Arial"/>
+                <a:ea typeface="DejaVu Sans"/>
+              </a:rPr>
+              <a:t>▸  </a:t>
+            </a:r>
+            <a:r>
+              <a:rPr b="0" lang="en-US" sz="1600" spc="-1" strike="noStrike">
+                <a:solidFill>
+                  <a:srgbClr val="1b0532"/>
+                </a:solidFill>
+                <a:latin typeface="Arial"/>
+                <a:ea typeface="DejaVu Sans"/>
+              </a:rPr>
+              <a:t>zwiększają różnorodność zbioru</a:t>
+            </a:r>
+            <a:endParaRPr b="0" lang="pl-PL" sz="1600" spc="-1" strike="noStrike">
+              <a:latin typeface="Arial"/>
+            </a:endParaRPr>
+          </a:p>
+          <a:p>
+            <a:pPr>
+              <a:lnSpc>
+                <a:spcPct val="105000"/>
+              </a:lnSpc>
+              <a:spcAft>
+                <a:spcPts val="901"/>
+              </a:spcAft>
+              <a:buNone/>
+            </a:pPr>
+            <a:r>
+              <a:rPr b="0" lang="en-US" sz="1600" spc="-1" strike="noStrike">
+                <a:solidFill>
+                  <a:srgbClr val="1b0532"/>
+                </a:solidFill>
+                <a:latin typeface="Arial"/>
+                <a:ea typeface="DejaVu Sans"/>
+              </a:rPr>
+              <a:t>▸  </a:t>
+            </a:r>
+            <a:r>
+              <a:rPr b="0" lang="en-US" sz="1600" spc="-1" strike="noStrike">
+                <a:solidFill>
+                  <a:srgbClr val="1b0532"/>
+                </a:solidFill>
+                <a:latin typeface="Arial"/>
+                <a:ea typeface="DejaVu Sans"/>
+              </a:rPr>
+              <a:t>pomagają modelowi generalizować</a:t>
+            </a:r>
+            <a:endParaRPr b="0" lang="pl-PL" sz="1600" spc="-1" strike="noStrike">
+              <a:latin typeface="Arial"/>
+            </a:endParaRPr>
+          </a:p>
+          <a:p>
+            <a:pPr>
+              <a:lnSpc>
+                <a:spcPct val="105000"/>
+              </a:lnSpc>
+              <a:spcAft>
+                <a:spcPts val="901"/>
+              </a:spcAft>
+              <a:buNone/>
+            </a:pPr>
+            <a:r>
+              <a:rPr b="0" lang="en-US" sz="1600" spc="-1" strike="noStrike">
+                <a:solidFill>
+                  <a:srgbClr val="1b0532"/>
+                </a:solidFill>
+                <a:latin typeface="Arial"/>
+                <a:ea typeface="DejaVu Sans"/>
+              </a:rPr>
+              <a:t>▸  </a:t>
+            </a:r>
+            <a:r>
+              <a:rPr b="0" lang="en-US" sz="1600" spc="-1" strike="noStrike">
+                <a:solidFill>
+                  <a:srgbClr val="1b0532"/>
+                </a:solidFill>
+                <a:latin typeface="Arial"/>
+                <a:ea typeface="DejaVu Sans"/>
+              </a:rPr>
+              <a:t>uzupełniają klasy słabo reprezentowane</a:t>
+            </a:r>
+            <a:endParaRPr b="0" lang="pl-PL" sz="1600" spc="-1" strike="noStrike">
+              <a:latin typeface="Arial"/>
+            </a:endParaRPr>
+          </a:p>
+        </p:txBody>
+      </p:sp>
+      <p:sp>
+        <p:nvSpPr>
+          <p:cNvPr id="123" name="TextBox 9"/>
+          <p:cNvSpPr/>
+          <p:nvPr/>
+        </p:nvSpPr>
+        <p:spPr>
+          <a:xfrm>
+            <a:off x="6400800" y="1828800"/>
+            <a:ext cx="5027760" cy="227880"/>
+          </a:xfrm>
+          <a:prstGeom prst="rect">
+            <a:avLst/>
+          </a:prstGeom>
+          <a:noFill/>
+          <a:ln w="0">
+            <a:noFill/>
+          </a:ln>
+        </p:spPr>
+        <p:style>
+          <a:lnRef idx="0"/>
+          <a:fillRef idx="0"/>
+          <a:effectRef idx="0"/>
+          <a:fontRef idx="minor"/>
+        </p:style>
+        <p:txBody>
+          <a:bodyPr lIns="0" rIns="0" tIns="0" bIns="0" anchor="t">
+            <a:spAutoFit/>
+          </a:bodyPr>
+          <a:p>
+            <a:pPr>
+              <a:lnSpc>
+                <a:spcPct val="100000"/>
+              </a:lnSpc>
+              <a:buNone/>
+            </a:pPr>
+            <a:r>
+              <a:rPr b="1" lang="en-US" sz="1500" spc="-1" strike="noStrike">
+                <a:solidFill>
+                  <a:srgbClr val="1b0532"/>
+                </a:solidFill>
+                <a:latin typeface="Arial"/>
+                <a:ea typeface="DejaVu Sans"/>
+              </a:rPr>
+              <a:t>Metody dla tekstu:</a:t>
             </a:r>
             <a:endParaRPr b="0" lang="pl-PL" sz="1500" spc="-1" strike="noStrike">
               <a:latin typeface="Arial"/>
             </a:endParaRPr>
           </a:p>
+        </p:txBody>
+      </p:sp>
+      <p:sp>
+        <p:nvSpPr>
+          <p:cNvPr id="124" name="TextBox 10"/>
+          <p:cNvSpPr/>
+          <p:nvPr/>
+        </p:nvSpPr>
+        <p:spPr>
+          <a:xfrm>
+            <a:off x="6400800" y="2286000"/>
+            <a:ext cx="5027760" cy="1823760"/>
+          </a:xfrm>
+          <a:prstGeom prst="rect">
+            <a:avLst/>
+          </a:prstGeom>
+          <a:noFill/>
+          <a:ln w="0">
+            <a:noFill/>
+          </a:ln>
+        </p:spPr>
+        <p:style>
+          <a:lnRef idx="0"/>
+          <a:fillRef idx="0"/>
+          <a:effectRef idx="0"/>
+          <a:fontRef idx="minor"/>
+        </p:style>
+        <p:txBody>
+          <a:bodyPr lIns="90000" rIns="90000" tIns="45000" bIns="45000" anchor="t">
+            <a:spAutoFit/>
+          </a:bodyPr>
           <a:p>
             <a:pPr>
               <a:lnSpc>
                 <a:spcPct val="105000"/>
               </a:lnSpc>
               <a:spcAft>
-                <a:spcPts val="799"/>
+                <a:spcPts val="901"/>
               </a:spcAft>
               <a:buNone/>
             </a:pPr>
             <a:r>
-              <a:rPr b="0" lang="en-US" sz="1500" spc="-1" strike="noStrike">
+              <a:rPr b="0" lang="en-US" sz="1600" spc="-1" strike="noStrike">
                 <a:solidFill>
                   <a:srgbClr val="1b0532"/>
                 </a:solidFill>
@@ -28664,16 +28952,16 @@
               <a:t>▸  </a:t>
             </a:r>
             <a:r>
-              <a:rPr b="0" lang="en-US" sz="1500" spc="-1" strike="noStrike">
+              <a:rPr b="0" lang="en-US" sz="1600" spc="-1" strike="noStrike">
                 <a:solidFill>
                   <a:srgbClr val="1b0532"/>
                 </a:solidFill>
                 <a:latin typeface="Arial"/>
                 <a:ea typeface="DejaVu Sans"/>
               </a:rPr>
-              <a:t>chcemy szybko pierwszy zbiór treningowy</a:t>
-            </a:r>
-            <a:endParaRPr b="0" lang="pl-PL" sz="1500" spc="-1" strike="noStrike">
+              <a:t>parafrazowanie przykładów</a:t>
+            </a:r>
+            <a:endParaRPr b="0" lang="pl-PL" sz="1600" spc="-1" strike="noStrike">
               <a:latin typeface="Arial"/>
             </a:endParaRPr>
           </a:p>
@@ -28683,12 +28971,12 @@
                 <a:spcPct val="105000"/>
               </a:lnSpc>
               <a:spcAft>
-                <a:spcPts val="799"/>
+                <a:spcPts val="901"/>
               </a:spcAft>
               <a:buNone/>
             </a:pPr>
             <a:r>
-              <a:rPr b="0" lang="en-US" sz="1500" spc="-1" strike="noStrike">
+              <a:rPr b="0" lang="en-US" sz="1600" spc="-1" strike="noStrike">
                 <a:solidFill>
                   <a:srgbClr val="1b0532"/>
                 </a:solidFill>
@@ -28698,16 +28986,16 @@
               <a:t>▸  </a:t>
             </a:r>
             <a:r>
-              <a:rPr b="0" lang="en-US" sz="1500" spc="-1" strike="noStrike">
+              <a:rPr b="0" lang="en-US" sz="1600" spc="-1" strike="noStrike">
                 <a:solidFill>
                   <a:srgbClr val="1b0532"/>
                 </a:solidFill>
                 <a:latin typeface="Arial"/>
                 <a:ea typeface="DejaVu Sans"/>
               </a:rPr>
-              <a:t>potrzebne wstępne etykiety do eksperymentów</a:t>
-            </a:r>
-            <a:endParaRPr b="0" lang="pl-PL" sz="1500" spc="-1" strike="noStrike">
+              <a:t>zmiana stylu / długości wypowiedzi</a:t>
+            </a:r>
+            <a:endParaRPr b="0" lang="pl-PL" sz="1600" spc="-1" strike="noStrike">
               <a:latin typeface="Arial"/>
             </a:endParaRPr>
           </a:p>
@@ -28717,12 +29005,12 @@
                 <a:spcPct val="105000"/>
               </a:lnSpc>
               <a:spcAft>
-                <a:spcPts val="799"/>
+                <a:spcPts val="901"/>
               </a:spcAft>
               <a:buNone/>
             </a:pPr>
             <a:r>
-              <a:rPr b="0" lang="en-US" sz="1500" spc="-1" strike="noStrike">
+              <a:rPr b="0" lang="en-US" sz="1600" spc="-1" strike="noStrike">
                 <a:solidFill>
                   <a:srgbClr val="1b0532"/>
                 </a:solidFill>
@@ -28732,16 +29020,16 @@
               <a:t>▸  </a:t>
             </a:r>
             <a:r>
-              <a:rPr b="0" lang="en-US" sz="1500" spc="-1" strike="noStrike">
+              <a:rPr b="0" lang="en-US" sz="1600" spc="-1" strike="noStrike">
                 <a:solidFill>
                   <a:srgbClr val="1b0532"/>
                 </a:solidFill>
                 <a:latin typeface="Arial"/>
                 <a:ea typeface="DejaVu Sans"/>
               </a:rPr>
-              <a:t>chcemy ograniczyć koszt ręcznej anotacji</a:t>
-            </a:r>
-            <a:endParaRPr b="0" lang="pl-PL" sz="1500" spc="-1" strike="noStrike">
+              <a:t>warianty formalne i nieformalne</a:t>
+            </a:r>
+            <a:endParaRPr b="0" lang="pl-PL" sz="1600" spc="-1" strike="noStrike">
               <a:latin typeface="Arial"/>
             </a:endParaRPr>
           </a:p>
@@ -28751,12 +29039,12 @@
                 <a:spcPct val="105000"/>
               </a:lnSpc>
               <a:spcAft>
-                <a:spcPts val="799"/>
+                <a:spcPts val="901"/>
               </a:spcAft>
               <a:buNone/>
             </a:pPr>
             <a:r>
-              <a:rPr b="0" lang="en-US" sz="1500" spc="-1" strike="noStrike">
+              <a:rPr b="0" lang="en-US" sz="1600" spc="-1" strike="noStrike">
                 <a:solidFill>
                   <a:srgbClr val="1b0532"/>
                 </a:solidFill>
@@ -28766,31 +29054,65 @@
               <a:t>▸  </a:t>
             </a:r>
             <a:r>
-              <a:rPr b="0" lang="en-US" sz="1500" spc="-1" strike="noStrike">
+              <a:rPr b="0" lang="en-US" sz="1600" spc="-1" strike="noStrike">
                 <a:solidFill>
                   <a:srgbClr val="1b0532"/>
                 </a:solidFill>
                 <a:latin typeface="Arial"/>
                 <a:ea typeface="DejaVu Sans"/>
               </a:rPr>
-              <a:t>klasy da się jasno zdefiniować w promptach</a:t>
-            </a:r>
-            <a:endParaRPr b="0" lang="pl-PL" sz="1500" spc="-1" strike="noStrike">
-              <a:latin typeface="Arial"/>
-            </a:endParaRPr>
-          </a:p>
-        </p:txBody>
-      </p:sp>
-      <p:sp>
-        <p:nvSpPr>
-          <p:cNvPr id="118" name="Rounded Rectangle 9"/>
-          <p:cNvSpPr/>
-          <p:nvPr/>
-        </p:nvSpPr>
-        <p:spPr>
-          <a:xfrm>
-            <a:off x="6400800" y="1828800"/>
-            <a:ext cx="5028480" cy="1553760"/>
+              <a:t>literówki, slang, język potoczny</a:t>
+            </a:r>
+            <a:endParaRPr b="0" lang="pl-PL" sz="1600" spc="-1" strike="noStrike">
+              <a:latin typeface="Arial"/>
+            </a:endParaRPr>
+          </a:p>
+          <a:p>
+            <a:pPr>
+              <a:lnSpc>
+                <a:spcPct val="105000"/>
+              </a:lnSpc>
+              <a:spcAft>
+                <a:spcPts val="901"/>
+              </a:spcAft>
+              <a:buNone/>
+            </a:pPr>
+            <a:r>
+              <a:rPr b="0" lang="en-US" sz="1600" spc="-1" strike="noStrike">
+                <a:solidFill>
+                  <a:srgbClr val="1b0532"/>
+                </a:solidFill>
+                <a:latin typeface="Arial"/>
+                <a:ea typeface="DejaVu Sans"/>
+              </a:rPr>
+              <a:t>▸  </a:t>
+            </a:r>
+            <a:r>
+              <a:rPr b="0" lang="en-US" sz="1600" spc="-1" strike="noStrike">
+                <a:solidFill>
+                  <a:srgbClr val="1b0532"/>
+                </a:solidFill>
+                <a:latin typeface="Arial"/>
+                <a:ea typeface="DejaVu Sans"/>
+              </a:rPr>
+              <a:t>przykłady rzadkie i graniczne</a:t>
+            </a:r>
+            <a:endParaRPr b="0" lang="pl-PL" sz="1600" spc="-1" strike="noStrike">
+              <a:latin typeface="Arial"/>
+            </a:endParaRPr>
+          </a:p>
+        </p:txBody>
+      </p:sp>
+      <p:sp>
+        <p:nvSpPr>
+          <p:cNvPr id="125" name="Rounded Rectangle 11"/>
+          <p:cNvSpPr/>
+          <p:nvPr/>
+        </p:nvSpPr>
+        <p:spPr>
+          <a:xfrm>
+            <a:off x="768240" y="5074920"/>
+            <a:ext cx="10651320" cy="867240"/>
           </a:xfrm>
           <a:prstGeom prst="roundRect">
             <a:avLst>
@@ -28826,20 +29148,20 @@
       </p:sp>
       <p:sp>
         <p:nvSpPr>
-          <p:cNvPr id="119" name="Rectangle 10"/>
-          <p:cNvSpPr/>
-          <p:nvPr/>
-        </p:nvSpPr>
-        <p:spPr>
-          <a:xfrm>
-            <a:off x="6400800" y="1828800"/>
-            <a:ext cx="50040" cy="1553760"/>
+          <p:cNvPr id="126" name="Rectangle 12"/>
+          <p:cNvSpPr/>
+          <p:nvPr/>
+        </p:nvSpPr>
+        <p:spPr>
+          <a:xfrm>
+            <a:off x="768240" y="5074920"/>
+            <a:ext cx="49320" cy="867240"/>
           </a:xfrm>
           <a:prstGeom prst="rect">
             <a:avLst/>
           </a:prstGeom>
           <a:solidFill>
-            <a:srgbClr val="c97a00"/>
+            <a:srgbClr val="00befe"/>
           </a:solidFill>
           <a:ln>
             <a:noFill/>
@@ -28867,14 +29189,14 @@
       </p:sp>
       <p:sp>
         <p:nvSpPr>
-          <p:cNvPr id="120" name="TextBox 11"/>
-          <p:cNvSpPr/>
-          <p:nvPr/>
-        </p:nvSpPr>
-        <p:spPr>
-          <a:xfrm>
-            <a:off x="6656760" y="2304360"/>
-            <a:ext cx="4571280" cy="639360"/>
+          <p:cNvPr id="127" name="TextBox 13"/>
+          <p:cNvSpPr/>
+          <p:nvPr/>
+        </p:nvSpPr>
+        <p:spPr>
+          <a:xfrm>
+            <a:off x="1024200" y="5311440"/>
+            <a:ext cx="10194120" cy="430920"/>
           </a:xfrm>
           <a:prstGeom prst="rect">
             <a:avLst/>
@@ -28909,7 +29231,7 @@
                 <a:latin typeface="Arial"/>
                 <a:ea typeface="DejaVu Sans"/>
               </a:rPr>
-              <a:t>⚠  </a:t>
+              <a:t>▸  </a:t>
             </a:r>
             <a:r>
               <a:rPr b="1" lang="en-US" sz="1400" spc="-1" strike="noStrike">
@@ -28919,7 +29241,7 @@
                 <a:latin typeface="Arial"/>
                 <a:ea typeface="DejaVu Sans"/>
               </a:rPr>
-              <a:t>Uwaga</a:t>
+              <a:t>Przykład (etykieta zachowana)</a:t>
             </a:r>
             <a:endParaRPr b="0" lang="pl-PL" sz="1400" spc="-1" strike="noStrike">
               <a:latin typeface="Arial"/>
@@ -28940,165 +29262,8 @@
                 <a:latin typeface="Arial"/>
                 <a:ea typeface="DejaVu Sans"/>
               </a:rPr>
-              <a:t>Etykiety LLM to tylko propozycje. Model myli się przy ironii, niejednoznaczności, braku kontekstu i slangu.</a:t>
-            </a:r>
-            <a:endParaRPr b="0" lang="pl-PL" sz="1300" spc="-1" strike="noStrike">
-              <a:latin typeface="Arial"/>
-            </a:endParaRPr>
-          </a:p>
-        </p:txBody>
-      </p:sp>
-      <p:sp>
-        <p:nvSpPr>
-          <p:cNvPr id="121" name="Rounded Rectangle 12"/>
-          <p:cNvSpPr/>
-          <p:nvPr/>
-        </p:nvSpPr>
-        <p:spPr>
-          <a:xfrm>
-            <a:off x="6400800" y="3566160"/>
-            <a:ext cx="5028480" cy="1508040"/>
-          </a:xfrm>
-          <a:prstGeom prst="roundRect">
-            <a:avLst>
-              <a:gd name="adj" fmla="val 16667"/>
-            </a:avLst>
-          </a:prstGeom>
-          <a:solidFill>
-            <a:srgbClr val="f2f1f6"/>
-          </a:solidFill>
-          <a:ln>
-            <a:noFill/>
-          </a:ln>
-          <a:effectLst>
-            <a:outerShdw blurRad="39960" dir="5400000" dist="23040" rotWithShape="0">
-              <a:srgbClr val="000000">
-                <a:alpha val="35000"/>
-              </a:srgbClr>
-            </a:outerShdw>
-          </a:effectLst>
-        </p:spPr>
-        <p:style>
-          <a:lnRef idx="1">
-            <a:schemeClr val="accent1"/>
-          </a:lnRef>
-          <a:fillRef idx="3">
-            <a:schemeClr val="accent1"/>
-          </a:fillRef>
-          <a:effectRef idx="2">
-            <a:schemeClr val="accent1"/>
-          </a:effectRef>
-          <a:fontRef idx="minor"/>
-        </p:style>
-      </p:sp>
-      <p:sp>
-        <p:nvSpPr>
-          <p:cNvPr id="122" name="Rectangle 13"/>
-          <p:cNvSpPr/>
-          <p:nvPr/>
-        </p:nvSpPr>
-        <p:spPr>
-          <a:xfrm>
-            <a:off x="6400800" y="3566160"/>
-            <a:ext cx="50040" cy="1508040"/>
-          </a:xfrm>
-          <a:prstGeom prst="rect">
-            <a:avLst/>
-          </a:prstGeom>
-          <a:solidFill>
-            <a:srgbClr val="1f9e55"/>
-          </a:solidFill>
-          <a:ln>
-            <a:noFill/>
-          </a:ln>
-          <a:effectLst>
-            <a:outerShdw blurRad="39960" dir="5400000" dist="23040" rotWithShape="0">
-              <a:srgbClr val="000000">
-                <a:alpha val="35000"/>
-              </a:srgbClr>
-            </a:outerShdw>
-          </a:effectLst>
-        </p:spPr>
-        <p:style>
-          <a:lnRef idx="1">
-            <a:schemeClr val="accent1"/>
-          </a:lnRef>
-          <a:fillRef idx="3">
-            <a:schemeClr val="accent1"/>
-          </a:fillRef>
-          <a:effectRef idx="2">
-            <a:schemeClr val="accent1"/>
-          </a:effectRef>
-          <a:fontRef idx="minor"/>
-        </p:style>
-      </p:sp>
-      <p:sp>
-        <p:nvSpPr>
-          <p:cNvPr id="123" name="TextBox 14"/>
-          <p:cNvSpPr/>
-          <p:nvPr/>
-        </p:nvSpPr>
-        <p:spPr>
-          <a:xfrm>
-            <a:off x="6656760" y="3915000"/>
-            <a:ext cx="4571280" cy="847080"/>
-          </a:xfrm>
-          <a:prstGeom prst="rect">
-            <a:avLst/>
-          </a:prstGeom>
-          <a:noFill/>
-          <a:ln w="0">
-            <a:noFill/>
-          </a:ln>
-        </p:spPr>
-        <p:style>
-          <a:lnRef idx="0"/>
-          <a:fillRef idx="0"/>
-          <a:effectRef idx="0"/>
-          <a:fontRef idx="minor"/>
-        </p:style>
-        <p:txBody>
-          <a:bodyPr lIns="0" rIns="0" tIns="0" bIns="0" anchor="ctr">
-            <a:spAutoFit/>
-          </a:bodyPr>
-          <a:p>
-            <a:pPr>
-              <a:lnSpc>
-                <a:spcPct val="105000"/>
-              </a:lnSpc>
-              <a:buNone/>
-            </a:pPr>
-            <a:r>
-              <a:rPr b="1" lang="en-US" sz="1400" spc="-1" strike="noStrike">
-                <a:solidFill>
-                  <a:srgbClr val="1b0532"/>
-                </a:solidFill>
-                <a:latin typeface="Arial"/>
-                <a:ea typeface="DejaVu Sans"/>
-              </a:rPr>
-              <a:t>✓  </a:t>
-            </a:r>
-            <a:r>
-              <a:rPr b="1" lang="en-US" sz="1400" spc="-1" strike="noStrike">
-                <a:solidFill>
-                  <a:srgbClr val="1b0532"/>
-                </a:solidFill>
-                <a:latin typeface="Arial"/>
-                <a:ea typeface="DejaVu Sans"/>
-              </a:rPr>
-              <a:t>Zasada</a:t>
-            </a:r>
-            <a:endParaRPr b="0" lang="pl-PL" sz="1400" spc="-1" strike="noStrike">
-              <a:latin typeface="Arial"/>
-            </a:endParaRPr>
-          </a:p>
-          <a:p>
-            <a:pPr>
-              <a:lnSpc>
-                <a:spcPct val="105000"/>
-              </a:lnSpc>
-              <a:buNone/>
-            </a:pPr>
+              <a:t>„</a:t>
+            </a:r>
             <a:r>
               <a:rPr b="0" lang="en-US" sz="1300" spc="-1" strike="noStrike">
                 <a:solidFill>
@@ -29107,7 +29272,7 @@
                 <a:latin typeface="Arial"/>
                 <a:ea typeface="DejaVu Sans"/>
               </a:rPr>
-              <a:t>LLM nie zastępuje człowieka — przyspiesza etykietowanie. Człowiek kontroluje jakość, poprawia błędy i rozstrzyga trudne przypadki.</a:t>
+              <a:t>Chcę zwrócić produkt…” [zwrot]  →  „Jak odesłać towar?” · „Czy da się zrobić zwrot?” — wszystkie warianty pozostają w tej samej klasie.</a:t>
             </a:r>
             <a:endParaRPr b="0" lang="pl-PL" sz="1300" spc="-1" strike="noStrike">
               <a:latin typeface="Arial"/>
@@ -29154,14 +29319,14 @@
       </p:grpSpPr>
       <p:sp>
         <p:nvSpPr>
-          <p:cNvPr id="124" name="TextBox 1"/>
+          <p:cNvPr id="128" name="TextBox 1"/>
           <p:cNvSpPr/>
           <p:nvPr/>
         </p:nvSpPr>
         <p:spPr>
           <a:xfrm>
             <a:off x="768240" y="420480"/>
-            <a:ext cx="10606320" cy="441720"/>
+            <a:ext cx="10605600" cy="441360"/>
           </a:xfrm>
           <a:prstGeom prst="rect">
             <a:avLst/>
@@ -29206,14 +29371,14 @@
       </p:sp>
       <p:sp>
         <p:nvSpPr>
-          <p:cNvPr id="125" name="Rectangle 2"/>
+          <p:cNvPr id="129" name="Rectangle 2"/>
           <p:cNvSpPr/>
           <p:nvPr/>
         </p:nvSpPr>
         <p:spPr>
           <a:xfrm>
             <a:off x="768240" y="1170360"/>
-            <a:ext cx="1370880" cy="43560"/>
+            <a:ext cx="1370160" cy="42840"/>
           </a:xfrm>
           <a:prstGeom prst="rect">
             <a:avLst/>
@@ -29247,14 +29412,14 @@
       </p:sp>
       <p:sp>
         <p:nvSpPr>
-          <p:cNvPr id="126" name="Rectangle 3"/>
+          <p:cNvPr id="130" name="Rectangle 3"/>
           <p:cNvSpPr/>
           <p:nvPr/>
         </p:nvSpPr>
         <p:spPr>
           <a:xfrm>
             <a:off x="0" y="6437520"/>
-            <a:ext cx="12191040" cy="14400"/>
+            <a:ext cx="12190320" cy="13680"/>
           </a:xfrm>
           <a:prstGeom prst="rect">
             <a:avLst/>
@@ -29288,14 +29453,14 @@
       </p:sp>
       <p:sp>
         <p:nvSpPr>
-          <p:cNvPr id="127" name="TextBox 4"/>
+          <p:cNvPr id="131" name="TextBox 4"/>
           <p:cNvSpPr/>
           <p:nvPr/>
         </p:nvSpPr>
         <p:spPr>
           <a:xfrm>
             <a:off x="768240" y="6473880"/>
-            <a:ext cx="8228880" cy="137160"/>
+            <a:ext cx="8228160" cy="136800"/>
           </a:xfrm>
           <a:prstGeom prst="rect">
             <a:avLst/>
@@ -29340,14 +29505,14 @@
       </p:sp>
       <p:sp>
         <p:nvSpPr>
-          <p:cNvPr id="128" name="TextBox 5"/>
+          <p:cNvPr id="132" name="TextBox 5"/>
           <p:cNvSpPr/>
           <p:nvPr/>
         </p:nvSpPr>
         <p:spPr>
           <a:xfrm>
             <a:off x="10607040" y="6473880"/>
-            <a:ext cx="822240" cy="137160"/>
+            <a:ext cx="821520" cy="136800"/>
           </a:xfrm>
           <a:prstGeom prst="rect">
             <a:avLst/>
@@ -29392,14 +29557,14 @@
       </p:sp>
       <p:sp>
         <p:nvSpPr>
-          <p:cNvPr id="129" name="Rounded Rectangle 6"/>
+          <p:cNvPr id="133" name="Rounded Rectangle 6"/>
           <p:cNvSpPr/>
           <p:nvPr/>
         </p:nvSpPr>
         <p:spPr>
           <a:xfrm>
             <a:off x="768240" y="1417320"/>
-            <a:ext cx="5257080" cy="3565440"/>
+            <a:ext cx="5256360" cy="3564720"/>
           </a:xfrm>
           <a:prstGeom prst="roundRect">
             <a:avLst>
@@ -29438,14 +29603,14 @@
       </p:sp>
       <p:sp>
         <p:nvSpPr>
-          <p:cNvPr id="130" name="Rounded Rectangle 7"/>
+          <p:cNvPr id="134" name="Rounded Rectangle 7"/>
           <p:cNvSpPr/>
           <p:nvPr/>
         </p:nvSpPr>
         <p:spPr>
           <a:xfrm>
             <a:off x="768240" y="1417320"/>
-            <a:ext cx="5257080" cy="547920"/>
+            <a:ext cx="5256360" cy="547200"/>
           </a:xfrm>
           <a:prstGeom prst="roundRect">
             <a:avLst>
@@ -29481,14 +29646,14 @@
       </p:sp>
       <p:sp>
         <p:nvSpPr>
-          <p:cNvPr id="131" name="TextBox 8"/>
+          <p:cNvPr id="135" name="TextBox 8"/>
           <p:cNvSpPr/>
           <p:nvPr/>
         </p:nvSpPr>
         <p:spPr>
           <a:xfrm>
             <a:off x="768240" y="1472040"/>
-            <a:ext cx="5257080" cy="228240"/>
+            <a:ext cx="5256360" cy="227880"/>
           </a:xfrm>
           <a:prstGeom prst="rect">
             <a:avLst/>
@@ -29533,14 +29698,14 @@
       </p:sp>
       <p:sp>
         <p:nvSpPr>
-          <p:cNvPr id="132" name="TextBox 9"/>
+          <p:cNvPr id="136" name="TextBox 9"/>
           <p:cNvSpPr/>
           <p:nvPr/>
         </p:nvSpPr>
         <p:spPr>
           <a:xfrm>
             <a:off x="996840" y="2148840"/>
-            <a:ext cx="1416600" cy="182520"/>
+            <a:ext cx="1415880" cy="182160"/>
           </a:xfrm>
           <a:prstGeom prst="rect">
             <a:avLst/>
@@ -29585,14 +29750,14 @@
       </p:sp>
       <p:sp>
         <p:nvSpPr>
-          <p:cNvPr id="133" name="TextBox 10"/>
+          <p:cNvPr id="137" name="TextBox 10"/>
           <p:cNvSpPr/>
           <p:nvPr/>
         </p:nvSpPr>
         <p:spPr>
           <a:xfrm>
             <a:off x="2368440" y="2148840"/>
-            <a:ext cx="3474000" cy="190440"/>
+            <a:ext cx="3473280" cy="190080"/>
           </a:xfrm>
           <a:prstGeom prst="rect">
             <a:avLst/>
@@ -29647,14 +29812,14 @@
       </p:sp>
       <p:sp>
         <p:nvSpPr>
-          <p:cNvPr id="134" name="TextBox 11"/>
+          <p:cNvPr id="138" name="TextBox 11"/>
           <p:cNvSpPr/>
           <p:nvPr/>
         </p:nvSpPr>
         <p:spPr>
           <a:xfrm>
             <a:off x="996840" y="2679120"/>
-            <a:ext cx="1416600" cy="182520"/>
+            <a:ext cx="1415880" cy="182160"/>
           </a:xfrm>
           <a:prstGeom prst="rect">
             <a:avLst/>
@@ -29699,14 +29864,14 @@
       </p:sp>
       <p:sp>
         <p:nvSpPr>
-          <p:cNvPr id="135" name="TextBox 12"/>
+          <p:cNvPr id="139" name="TextBox 12"/>
           <p:cNvSpPr/>
           <p:nvPr/>
         </p:nvSpPr>
         <p:spPr>
           <a:xfrm>
             <a:off x="2368440" y="2679120"/>
-            <a:ext cx="3474000" cy="190440"/>
+            <a:ext cx="3473280" cy="190080"/>
           </a:xfrm>
           <a:prstGeom prst="rect">
             <a:avLst/>
@@ -29751,14 +29916,14 @@
       </p:sp>
       <p:sp>
         <p:nvSpPr>
-          <p:cNvPr id="136" name="TextBox 13"/>
+          <p:cNvPr id="140" name="TextBox 13"/>
           <p:cNvSpPr/>
           <p:nvPr/>
         </p:nvSpPr>
         <p:spPr>
           <a:xfrm>
             <a:off x="996840" y="3209400"/>
-            <a:ext cx="1416600" cy="182520"/>
+            <a:ext cx="1415880" cy="182160"/>
           </a:xfrm>
           <a:prstGeom prst="rect">
             <a:avLst/>
@@ -29803,14 +29968,14 @@
       </p:sp>
       <p:sp>
         <p:nvSpPr>
-          <p:cNvPr id="137" name="TextBox 14"/>
+          <p:cNvPr id="141" name="TextBox 14"/>
           <p:cNvSpPr/>
           <p:nvPr/>
         </p:nvSpPr>
         <p:spPr>
           <a:xfrm>
             <a:off x="2368440" y="3209400"/>
-            <a:ext cx="3474000" cy="190440"/>
+            <a:ext cx="3473280" cy="190080"/>
           </a:xfrm>
           <a:prstGeom prst="rect">
             <a:avLst/>
@@ -29855,14 +30020,14 @@
       </p:sp>
       <p:sp>
         <p:nvSpPr>
-          <p:cNvPr id="138" name="TextBox 15"/>
+          <p:cNvPr id="142" name="TextBox 15"/>
           <p:cNvSpPr/>
           <p:nvPr/>
         </p:nvSpPr>
         <p:spPr>
           <a:xfrm>
             <a:off x="996840" y="3740040"/>
-            <a:ext cx="1416600" cy="182520"/>
+            <a:ext cx="1415880" cy="182160"/>
           </a:xfrm>
           <a:prstGeom prst="rect">
             <a:avLst/>
@@ -29907,14 +30072,14 @@
       </p:sp>
       <p:sp>
         <p:nvSpPr>
-          <p:cNvPr id="139" name="TextBox 16"/>
+          <p:cNvPr id="143" name="TextBox 16"/>
           <p:cNvSpPr/>
           <p:nvPr/>
         </p:nvSpPr>
         <p:spPr>
           <a:xfrm>
             <a:off x="2368440" y="3740040"/>
-            <a:ext cx="3474000" cy="190440"/>
+            <a:ext cx="3473280" cy="190080"/>
           </a:xfrm>
           <a:prstGeom prst="rect">
             <a:avLst/>
@@ -29959,14 +30124,14 @@
       </p:sp>
       <p:sp>
         <p:nvSpPr>
-          <p:cNvPr id="140" name="TextBox 17"/>
+          <p:cNvPr id="144" name="TextBox 17"/>
           <p:cNvSpPr/>
           <p:nvPr/>
         </p:nvSpPr>
         <p:spPr>
           <a:xfrm>
             <a:off x="996840" y="4270320"/>
-            <a:ext cx="1416600" cy="182520"/>
+            <a:ext cx="1415880" cy="182160"/>
           </a:xfrm>
           <a:prstGeom prst="rect">
             <a:avLst/>
@@ -30011,14 +30176,14 @@
       </p:sp>
       <p:sp>
         <p:nvSpPr>
-          <p:cNvPr id="141" name="TextBox 18"/>
+          <p:cNvPr id="145" name="TextBox 18"/>
           <p:cNvSpPr/>
           <p:nvPr/>
         </p:nvSpPr>
         <p:spPr>
           <a:xfrm>
             <a:off x="2368440" y="4270320"/>
-            <a:ext cx="3474000" cy="190440"/>
+            <a:ext cx="3473280" cy="190080"/>
           </a:xfrm>
           <a:prstGeom prst="rect">
             <a:avLst/>
@@ -30063,14 +30228,14 @@
       </p:sp>
       <p:sp>
         <p:nvSpPr>
-          <p:cNvPr id="142" name="Rounded Rectangle 19"/>
+          <p:cNvPr id="146" name="Rounded Rectangle 19"/>
           <p:cNvSpPr/>
           <p:nvPr/>
         </p:nvSpPr>
         <p:spPr>
           <a:xfrm>
             <a:off x="6400800" y="1417320"/>
-            <a:ext cx="5257080" cy="3565440"/>
+            <a:ext cx="5256360" cy="3564720"/>
           </a:xfrm>
           <a:prstGeom prst="roundRect">
             <a:avLst>
@@ -30109,14 +30274,14 @@
       </p:sp>
       <p:sp>
         <p:nvSpPr>
-          <p:cNvPr id="143" name="Rounded Rectangle 20"/>
+          <p:cNvPr id="147" name="Rounded Rectangle 20"/>
           <p:cNvSpPr/>
           <p:nvPr/>
         </p:nvSpPr>
         <p:spPr>
           <a:xfrm>
             <a:off x="6400800" y="1417320"/>
-            <a:ext cx="5257080" cy="547920"/>
+            <a:ext cx="5256360" cy="547200"/>
           </a:xfrm>
           <a:prstGeom prst="roundRect">
             <a:avLst>
@@ -30152,14 +30317,14 @@
       </p:sp>
       <p:sp>
         <p:nvSpPr>
-          <p:cNvPr id="144" name="TextBox 21"/>
+          <p:cNvPr id="148" name="TextBox 21"/>
           <p:cNvSpPr/>
           <p:nvPr/>
         </p:nvSpPr>
         <p:spPr>
           <a:xfrm>
             <a:off x="6400800" y="1472040"/>
-            <a:ext cx="5257080" cy="228240"/>
+            <a:ext cx="5256360" cy="227880"/>
           </a:xfrm>
           <a:prstGeom prst="rect">
             <a:avLst/>
@@ -30204,14 +30369,14 @@
       </p:sp>
       <p:sp>
         <p:nvSpPr>
-          <p:cNvPr id="145" name="TextBox 22"/>
+          <p:cNvPr id="149" name="TextBox 22"/>
           <p:cNvSpPr/>
           <p:nvPr/>
         </p:nvSpPr>
         <p:spPr>
           <a:xfrm>
             <a:off x="6629400" y="2148840"/>
-            <a:ext cx="1416600" cy="182520"/>
+            <a:ext cx="1415880" cy="182160"/>
           </a:xfrm>
           <a:prstGeom prst="rect">
             <a:avLst/>
@@ -30256,14 +30421,14 @@
       </p:sp>
       <p:sp>
         <p:nvSpPr>
-          <p:cNvPr id="146" name="TextBox 23"/>
+          <p:cNvPr id="150" name="TextBox 23"/>
           <p:cNvSpPr/>
           <p:nvPr/>
         </p:nvSpPr>
         <p:spPr>
           <a:xfrm>
             <a:off x="8001000" y="2148840"/>
-            <a:ext cx="3474000" cy="190440"/>
+            <a:ext cx="3473280" cy="190080"/>
           </a:xfrm>
           <a:prstGeom prst="rect">
             <a:avLst/>
@@ -30308,14 +30473,14 @@
       </p:sp>
       <p:sp>
         <p:nvSpPr>
-          <p:cNvPr id="147" name="TextBox 24"/>
+          <p:cNvPr id="151" name="TextBox 24"/>
           <p:cNvSpPr/>
           <p:nvPr/>
         </p:nvSpPr>
         <p:spPr>
           <a:xfrm>
             <a:off x="6629400" y="2679120"/>
-            <a:ext cx="1416600" cy="182520"/>
+            <a:ext cx="1415880" cy="182160"/>
           </a:xfrm>
           <a:prstGeom prst="rect">
             <a:avLst/>
@@ -30360,14 +30525,14 @@
       </p:sp>
       <p:sp>
         <p:nvSpPr>
-          <p:cNvPr id="148" name="TextBox 25"/>
+          <p:cNvPr id="152" name="TextBox 25"/>
           <p:cNvSpPr/>
           <p:nvPr/>
         </p:nvSpPr>
         <p:spPr>
           <a:xfrm>
             <a:off x="8001000" y="2679120"/>
-            <a:ext cx="3474000" cy="190440"/>
+            <a:ext cx="3473280" cy="190080"/>
           </a:xfrm>
           <a:prstGeom prst="rect">
             <a:avLst/>
@@ -30412,14 +30577,14 @@
       </p:sp>
       <p:sp>
         <p:nvSpPr>
-          <p:cNvPr id="149" name="TextBox 26"/>
+          <p:cNvPr id="153" name="TextBox 26"/>
           <p:cNvSpPr/>
           <p:nvPr/>
         </p:nvSpPr>
         <p:spPr>
           <a:xfrm>
             <a:off x="6629400" y="3209400"/>
-            <a:ext cx="1416600" cy="182520"/>
+            <a:ext cx="1415880" cy="182160"/>
           </a:xfrm>
           <a:prstGeom prst="rect">
             <a:avLst/>
@@ -30464,14 +30629,14 @@
       </p:sp>
       <p:sp>
         <p:nvSpPr>
-          <p:cNvPr id="150" name="TextBox 27"/>
+          <p:cNvPr id="154" name="TextBox 27"/>
           <p:cNvSpPr/>
           <p:nvPr/>
         </p:nvSpPr>
         <p:spPr>
           <a:xfrm>
             <a:off x="8001000" y="3209400"/>
-            <a:ext cx="3474000" cy="190440"/>
+            <a:ext cx="3473280" cy="190080"/>
           </a:xfrm>
           <a:prstGeom prst="rect">
             <a:avLst/>
@@ -30516,14 +30681,14 @@
       </p:sp>
       <p:sp>
         <p:nvSpPr>
-          <p:cNvPr id="151" name="TextBox 28"/>
+          <p:cNvPr id="155" name="TextBox 28"/>
           <p:cNvSpPr/>
           <p:nvPr/>
         </p:nvSpPr>
         <p:spPr>
           <a:xfrm>
             <a:off x="6629400" y="3740040"/>
-            <a:ext cx="1416600" cy="182520"/>
+            <a:ext cx="1415880" cy="182160"/>
           </a:xfrm>
           <a:prstGeom prst="rect">
             <a:avLst/>
@@ -30568,14 +30733,14 @@
       </p:sp>
       <p:sp>
         <p:nvSpPr>
-          <p:cNvPr id="152" name="TextBox 29"/>
+          <p:cNvPr id="156" name="TextBox 29"/>
           <p:cNvSpPr/>
           <p:nvPr/>
         </p:nvSpPr>
         <p:spPr>
           <a:xfrm>
             <a:off x="8001000" y="3740040"/>
-            <a:ext cx="3474000" cy="190440"/>
+            <a:ext cx="3473280" cy="190080"/>
           </a:xfrm>
           <a:prstGeom prst="rect">
             <a:avLst/>
@@ -30620,14 +30785,14 @@
       </p:sp>
       <p:sp>
         <p:nvSpPr>
-          <p:cNvPr id="153" name="TextBox 30"/>
+          <p:cNvPr id="157" name="TextBox 30"/>
           <p:cNvSpPr/>
           <p:nvPr/>
         </p:nvSpPr>
         <p:spPr>
           <a:xfrm>
             <a:off x="6629400" y="4270320"/>
-            <a:ext cx="1416600" cy="182520"/>
+            <a:ext cx="1415880" cy="182160"/>
           </a:xfrm>
           <a:prstGeom prst="rect">
             <a:avLst/>
@@ -30672,14 +30837,14 @@
       </p:sp>
       <p:sp>
         <p:nvSpPr>
-          <p:cNvPr id="154" name="TextBox 31"/>
+          <p:cNvPr id="158" name="TextBox 31"/>
           <p:cNvSpPr/>
           <p:nvPr/>
         </p:nvSpPr>
         <p:spPr>
           <a:xfrm>
             <a:off x="8001000" y="4270320"/>
-            <a:ext cx="3474000" cy="190440"/>
+            <a:ext cx="3473280" cy="190080"/>
           </a:xfrm>
           <a:prstGeom prst="rect">
             <a:avLst/>
@@ -30724,14 +30889,14 @@
       </p:sp>
       <p:sp>
         <p:nvSpPr>
-          <p:cNvPr id="155" name="Rounded Rectangle 32"/>
+          <p:cNvPr id="159" name="Rounded Rectangle 32"/>
           <p:cNvSpPr/>
           <p:nvPr/>
         </p:nvSpPr>
         <p:spPr>
           <a:xfrm>
             <a:off x="768240" y="5120640"/>
-            <a:ext cx="10652040" cy="593640"/>
+            <a:ext cx="10651320" cy="592920"/>
           </a:xfrm>
           <a:prstGeom prst="roundRect">
             <a:avLst>
@@ -30767,14 +30932,14 @@
       </p:sp>
       <p:sp>
         <p:nvSpPr>
-          <p:cNvPr id="156" name="Rectangle 33"/>
+          <p:cNvPr id="160" name="Rectangle 33"/>
           <p:cNvSpPr/>
           <p:nvPr/>
         </p:nvSpPr>
         <p:spPr>
           <a:xfrm>
             <a:off x="768240" y="5120640"/>
-            <a:ext cx="50040" cy="593640"/>
+            <a:ext cx="49320" cy="592920"/>
           </a:xfrm>
           <a:prstGeom prst="rect">
             <a:avLst/>
@@ -30808,14 +30973,14 @@
       </p:sp>
       <p:sp>
         <p:nvSpPr>
-          <p:cNvPr id="157" name="TextBox 34"/>
+          <p:cNvPr id="161" name="TextBox 34"/>
           <p:cNvSpPr/>
           <p:nvPr/>
         </p:nvSpPr>
         <p:spPr>
           <a:xfrm>
             <a:off x="1024200" y="5331600"/>
-            <a:ext cx="10194840" cy="208080"/>
+            <a:ext cx="10194120" cy="207360"/>
           </a:xfrm>
           <a:prstGeom prst="rect">
             <a:avLst/>
@@ -30897,14 +31062,14 @@
       </p:grpSpPr>
       <p:sp>
         <p:nvSpPr>
-          <p:cNvPr id="158" name="TextBox 1"/>
+          <p:cNvPr id="162" name="TextBox 1"/>
           <p:cNvSpPr/>
           <p:nvPr/>
         </p:nvSpPr>
         <p:spPr>
           <a:xfrm>
             <a:off x="768240" y="420480"/>
-            <a:ext cx="10606320" cy="441720"/>
+            <a:ext cx="10605600" cy="441360"/>
           </a:xfrm>
           <a:prstGeom prst="rect">
             <a:avLst/>
@@ -30949,14 +31114,14 @@
       </p:sp>
       <p:sp>
         <p:nvSpPr>
-          <p:cNvPr id="159" name="Rectangle 2"/>
+          <p:cNvPr id="163" name="Rectangle 2"/>
           <p:cNvSpPr/>
           <p:nvPr/>
         </p:nvSpPr>
         <p:spPr>
           <a:xfrm>
             <a:off x="768240" y="1170360"/>
-            <a:ext cx="1370880" cy="43560"/>
+            <a:ext cx="1370160" cy="42840"/>
           </a:xfrm>
           <a:prstGeom prst="rect">
             <a:avLst/>
@@ -30990,14 +31155,14 @@
       </p:sp>
       <p:sp>
         <p:nvSpPr>
-          <p:cNvPr id="160" name="TextBox 3"/>
+          <p:cNvPr id="164" name="TextBox 3"/>
           <p:cNvSpPr/>
           <p:nvPr/>
         </p:nvSpPr>
         <p:spPr>
           <a:xfrm>
             <a:off x="768240" y="1298520"/>
-            <a:ext cx="10606320" cy="228240"/>
+            <a:ext cx="10605600" cy="227880"/>
           </a:xfrm>
           <a:prstGeom prst="rect">
             <a:avLst/>
@@ -31042,14 +31207,14 @@
       </p:sp>
       <p:sp>
         <p:nvSpPr>
-          <p:cNvPr id="161" name="Rectangle 4"/>
+          <p:cNvPr id="165" name="Rectangle 4"/>
           <p:cNvSpPr/>
           <p:nvPr/>
         </p:nvSpPr>
         <p:spPr>
           <a:xfrm>
             <a:off x="0" y="6437520"/>
-            <a:ext cx="12191040" cy="14400"/>
+            <a:ext cx="12190320" cy="13680"/>
           </a:xfrm>
           <a:prstGeom prst="rect">
             <a:avLst/>
@@ -31083,14 +31248,14 @@
       </p:sp>
       <p:sp>
         <p:nvSpPr>
-          <p:cNvPr id="162" name="TextBox 5"/>
+          <p:cNvPr id="166" name="TextBox 5"/>
           <p:cNvSpPr/>
           <p:nvPr/>
         </p:nvSpPr>
         <p:spPr>
           <a:xfrm>
             <a:off x="768240" y="6473880"/>
-            <a:ext cx="8228880" cy="137160"/>
+            <a:ext cx="8228160" cy="136800"/>
           </a:xfrm>
           <a:prstGeom prst="rect">
             <a:avLst/>
@@ -31135,14 +31300,14 @@
       </p:sp>
       <p:sp>
         <p:nvSpPr>
-          <p:cNvPr id="163" name="TextBox 6"/>
+          <p:cNvPr id="167" name="TextBox 6"/>
           <p:cNvSpPr/>
           <p:nvPr/>
         </p:nvSpPr>
         <p:spPr>
           <a:xfrm>
             <a:off x="10607040" y="6473880"/>
-            <a:ext cx="822240" cy="137160"/>
+            <a:ext cx="821520" cy="136800"/>
           </a:xfrm>
           <a:prstGeom prst="rect">
             <a:avLst/>
@@ -31187,14 +31352,14 @@
       </p:sp>
       <p:sp>
         <p:nvSpPr>
-          <p:cNvPr id="164" name="TextBox 7"/>
+          <p:cNvPr id="168" name="TextBox 7"/>
           <p:cNvSpPr/>
           <p:nvPr/>
         </p:nvSpPr>
         <p:spPr>
           <a:xfrm>
             <a:off x="768240" y="1828800"/>
-            <a:ext cx="5394240" cy="228240"/>
+            <a:ext cx="5393520" cy="227880"/>
           </a:xfrm>
           <a:prstGeom prst="rect">
             <a:avLst/>
@@ -31239,14 +31404,14 @@
       </p:sp>
       <p:sp>
         <p:nvSpPr>
-          <p:cNvPr id="165" name="TextBox 8"/>
+          <p:cNvPr id="169" name="TextBox 8"/>
           <p:cNvSpPr/>
           <p:nvPr/>
         </p:nvSpPr>
         <p:spPr>
           <a:xfrm>
             <a:off x="768240" y="2286000"/>
-            <a:ext cx="5485680" cy="1692720"/>
+            <a:ext cx="5484960" cy="1692720"/>
           </a:xfrm>
           <a:prstGeom prst="rect">
             <a:avLst/>
@@ -31362,7 +31527,7 @@
                 <a:latin typeface="Arial"/>
                 <a:ea typeface="DejaVu Sans"/>
               </a:rPr>
-              <a:t>daje wysokie p-stwo dla kilku klas naraz</a:t>
+              <a:t>daje wysokie p-stwo dla kilku klas jednocześnie</a:t>
             </a:r>
             <a:endParaRPr b="0" lang="pl-PL" sz="1500" spc="-1" strike="noStrike">
               <a:latin typeface="Arial"/>
@@ -31396,7 +31561,7 @@
                 <a:latin typeface="Arial"/>
                 <a:ea typeface="DejaVu Sans"/>
               </a:rPr>
-              <a:t>jest niezgodny z inną regułą / modelem</a:t>
+              <a:t>jest niezgodny z regułą / modelem biznesowym</a:t>
             </a:r>
             <a:endParaRPr b="0" lang="pl-PL" sz="1500" spc="-1" strike="noStrike">
               <a:latin typeface="Arial"/>
@@ -31440,14 +31605,14 @@
       </p:sp>
       <p:sp>
         <p:nvSpPr>
-          <p:cNvPr id="166" name="Rounded Rectangle 9"/>
+          <p:cNvPr id="170" name="Rounded Rectangle 9"/>
           <p:cNvSpPr/>
           <p:nvPr/>
         </p:nvSpPr>
         <p:spPr>
           <a:xfrm>
             <a:off x="6446520" y="1828800"/>
-            <a:ext cx="4982760" cy="2102400"/>
+            <a:ext cx="4982040" cy="2101680"/>
           </a:xfrm>
           <a:prstGeom prst="roundRect">
             <a:avLst>
@@ -31483,14 +31648,14 @@
       </p:sp>
       <p:sp>
         <p:nvSpPr>
-          <p:cNvPr id="167" name="Rectangle 10"/>
+          <p:cNvPr id="171" name="Rectangle 10"/>
           <p:cNvSpPr/>
           <p:nvPr/>
         </p:nvSpPr>
         <p:spPr>
           <a:xfrm>
             <a:off x="6446520" y="1828800"/>
-            <a:ext cx="50040" cy="2102400"/>
+            <a:ext cx="49320" cy="2101680"/>
           </a:xfrm>
           <a:prstGeom prst="rect">
             <a:avLst/>
@@ -31524,14 +31689,14 @@
       </p:sp>
       <p:sp>
         <p:nvSpPr>
-          <p:cNvPr id="168" name="TextBox 11"/>
+          <p:cNvPr id="172" name="TextBox 11"/>
           <p:cNvSpPr/>
           <p:nvPr/>
         </p:nvSpPr>
         <p:spPr>
           <a:xfrm>
             <a:off x="6702480" y="2267640"/>
-            <a:ext cx="4525560" cy="1261440"/>
+            <a:ext cx="4524840" cy="1261440"/>
           </a:xfrm>
           <a:prstGeom prst="rect">
             <a:avLst/>
@@ -31628,8 +31793,19 @@
                 <a:latin typeface="Arial"/>
                 <a:ea typeface="DejaVu Sans"/>
               </a:rPr>
-              <a:t>zwrot 0.42 · reklamacja 0.39 · status_dostawy 0.15 </a:t>
-            </a:r>
+              <a:t>zwrot 0.42 · reklamacja 0.39 · status_dostawy 0.15 · nieznany 0.04</a:t>
+            </a:r>
+            <a:endParaRPr b="0" lang="pl-PL" sz="1300" spc="-1" strike="noStrike">
+              <a:latin typeface="Arial"/>
+            </a:endParaRPr>
+          </a:p>
+          <a:p>
+            <a:pPr>
+              <a:lnSpc>
+                <a:spcPct val="105000"/>
+              </a:lnSpc>
+              <a:buNone/>
+            </a:pPr>
             <a:r>
               <a:rPr b="0" lang="en-US" sz="1300" spc="-1" strike="noStrike">
                 <a:solidFill>
@@ -31638,35 +31814,37 @@
                 <a:latin typeface="Arial"/>
                 <a:ea typeface="DejaVu Sans"/>
               </a:rPr>
-              <a:t>· nieznany 0.04</a:t>
+              <a:t>Trudny przykład — poprawne oznaczenie uczy rozróżniania klas granicznych.</a:t>
             </a:r>
             <a:endParaRPr b="0" lang="pl-PL" sz="1300" spc="-1" strike="noStrike">
               <a:latin typeface="Arial"/>
             </a:endParaRPr>
           </a:p>
-          <a:p>
-            <a:pPr>
-              <a:lnSpc>
-                <a:spcPct val="105000"/>
-              </a:lnSpc>
-              <a:buNone/>
-            </a:pPr>
-            <a:r>
-              <a:rPr b="0" lang="en-US" sz="1300" spc="-1" strike="noStrike">
-                <a:solidFill>
-                  <a:srgbClr val="6b6478"/>
-                </a:solidFill>
-                <a:latin typeface="Arial"/>
-                <a:ea typeface="DejaVu Sans"/>
-              </a:rPr>
-              <a:t>Trudny przykład — poprawne oznaczenie uczy rozróżniania klas granicznych.</a:t>
-            </a:r>
-            <a:endParaRPr b="0" lang="pl-PL" sz="1300" spc="-1" strike="noStrike">
-              <a:latin typeface="Arial"/>
-            </a:endParaRPr>
-          </a:p>
-        </p:txBody>
-      </p:sp>
+        </p:txBody>
+      </p:sp>
+      <p:pic>
+        <p:nvPicPr>
+          <p:cNvPr id="173" name="" descr=""/>
+          <p:cNvPicPr/>
+          <p:nvPr/>
+        </p:nvPicPr>
+        <p:blipFill>
+          <a:blip r:embed="rId1"/>
+          <a:stretch/>
+        </p:blipFill>
+        <p:spPr>
+          <a:xfrm>
+            <a:off x="911160" y="4189320"/>
+            <a:ext cx="2688480" cy="2074320"/>
+          </a:xfrm>
+          <a:prstGeom prst="rect">
+            <a:avLst/>
+          </a:prstGeom>
+          <a:ln w="0">
+            <a:noFill/>
+          </a:ln>
+        </p:spPr>
+      </p:pic>
     </p:spTree>
   </p:cSld>
   <mc:AlternateContent>
@@ -31706,14 +31884,14 @@
       </p:grpSpPr>
       <p:sp>
         <p:nvSpPr>
-          <p:cNvPr id="169" name="TextBox 1"/>
+          <p:cNvPr id="174" name="TextBox 1"/>
           <p:cNvSpPr/>
           <p:nvPr/>
         </p:nvSpPr>
         <p:spPr>
           <a:xfrm>
             <a:off x="768240" y="420480"/>
-            <a:ext cx="10606320" cy="441720"/>
+            <a:ext cx="10605600" cy="441360"/>
           </a:xfrm>
           <a:prstGeom prst="rect">
             <a:avLst/>
@@ -31758,14 +31936,14 @@
       </p:sp>
       <p:sp>
         <p:nvSpPr>
-          <p:cNvPr id="170" name="Rectangle 2"/>
+          <p:cNvPr id="175" name="Rectangle 2"/>
           <p:cNvSpPr/>
           <p:nvPr/>
         </p:nvSpPr>
         <p:spPr>
           <a:xfrm>
             <a:off x="768240" y="1170360"/>
-            <a:ext cx="1370880" cy="43560"/>
+            <a:ext cx="1370160" cy="42840"/>
           </a:xfrm>
           <a:prstGeom prst="rect">
             <a:avLst/>
@@ -31799,14 +31977,14 @@
       </p:sp>
       <p:sp>
         <p:nvSpPr>
-          <p:cNvPr id="171" name="TextBox 3"/>
+          <p:cNvPr id="176" name="TextBox 3"/>
           <p:cNvSpPr/>
           <p:nvPr/>
         </p:nvSpPr>
         <p:spPr>
           <a:xfrm>
             <a:off x="768240" y="1298520"/>
-            <a:ext cx="10606320" cy="228240"/>
+            <a:ext cx="10605600" cy="227880"/>
           </a:xfrm>
           <a:prstGeom prst="rect">
             <a:avLst/>
@@ -31841,7 +32019,7 @@
                 <a:latin typeface="Arial"/>
                 <a:ea typeface="DejaVu Sans"/>
               </a:rPr>
-              <a:t>Nie zawsze cały zbiór po równo — liczebność klasy to nie wszystko</a:t>
+              <a:t>Nie zawsze cały zbiór po równo</a:t>
             </a:r>
             <a:endParaRPr b="0" lang="pl-PL" sz="1500" spc="-1" strike="noStrike">
               <a:latin typeface="Arial"/>
@@ -31851,14 +32029,14 @@
       </p:sp>
       <p:sp>
         <p:nvSpPr>
-          <p:cNvPr id="172" name="Rectangle 4"/>
+          <p:cNvPr id="177" name="Rectangle 4"/>
           <p:cNvSpPr/>
           <p:nvPr/>
         </p:nvSpPr>
         <p:spPr>
           <a:xfrm>
             <a:off x="0" y="6437520"/>
-            <a:ext cx="12191040" cy="14400"/>
+            <a:ext cx="12190320" cy="13680"/>
           </a:xfrm>
           <a:prstGeom prst="rect">
             <a:avLst/>
@@ -31892,14 +32070,14 @@
       </p:sp>
       <p:sp>
         <p:nvSpPr>
-          <p:cNvPr id="173" name="TextBox 5"/>
+          <p:cNvPr id="178" name="TextBox 5"/>
           <p:cNvSpPr/>
           <p:nvPr/>
         </p:nvSpPr>
         <p:spPr>
           <a:xfrm>
             <a:off x="768240" y="6473880"/>
-            <a:ext cx="8228880" cy="137160"/>
+            <a:ext cx="8228160" cy="136800"/>
           </a:xfrm>
           <a:prstGeom prst="rect">
             <a:avLst/>
@@ -31944,14 +32122,14 @@
       </p:sp>
       <p:sp>
         <p:nvSpPr>
-          <p:cNvPr id="174" name="TextBox 6"/>
+          <p:cNvPr id="179" name="TextBox 6"/>
           <p:cNvSpPr/>
           <p:nvPr/>
         </p:nvSpPr>
         <p:spPr>
           <a:xfrm>
             <a:off x="10607040" y="6473880"/>
-            <a:ext cx="822240" cy="137160"/>
+            <a:ext cx="821520" cy="136800"/>
           </a:xfrm>
           <a:prstGeom prst="rect">
             <a:avLst/>
@@ -31996,14 +32174,14 @@
       </p:sp>
       <p:sp>
         <p:nvSpPr>
-          <p:cNvPr id="175" name="TextBox 7"/>
+          <p:cNvPr id="180" name="TextBox 7"/>
           <p:cNvSpPr/>
           <p:nvPr/>
         </p:nvSpPr>
         <p:spPr>
           <a:xfrm>
             <a:off x="768240" y="1828800"/>
-            <a:ext cx="5394240" cy="1692720"/>
+            <a:ext cx="5393520" cy="1692720"/>
           </a:xfrm>
           <a:prstGeom prst="rect">
             <a:avLst/>
@@ -32197,14 +32375,14 @@
       </p:sp>
       <p:sp>
         <p:nvSpPr>
-          <p:cNvPr id="176" name="TextBox 8"/>
+          <p:cNvPr id="181" name="TextBox 8"/>
           <p:cNvSpPr/>
           <p:nvPr/>
         </p:nvSpPr>
         <p:spPr>
           <a:xfrm>
             <a:off x="6400800" y="1737360"/>
-            <a:ext cx="5028480" cy="213120"/>
+            <a:ext cx="5027760" cy="212760"/>
           </a:xfrm>
           <a:prstGeom prst="rect">
             <a:avLst/>
@@ -32249,14 +32427,14 @@
       </p:sp>
       <p:sp>
         <p:nvSpPr>
-          <p:cNvPr id="177" name="Rounded Rectangle 9"/>
-          <p:cNvSpPr/>
-          <p:nvPr/>
-        </p:nvSpPr>
-        <p:spPr>
-          <a:xfrm>
-            <a:off x="6400800" y="2148840"/>
-            <a:ext cx="5028480" cy="1796040"/>
+          <p:cNvPr id="182" name="Rounded Rectangle 9"/>
+          <p:cNvSpPr/>
+          <p:nvPr/>
+        </p:nvSpPr>
+        <p:spPr>
+          <a:xfrm>
+            <a:off x="6400800" y="2076840"/>
+            <a:ext cx="5027760" cy="1795320"/>
           </a:xfrm>
           <a:prstGeom prst="roundRect">
             <a:avLst>
@@ -32292,14 +32470,14 @@
       </p:sp>
       <p:sp>
         <p:nvSpPr>
-          <p:cNvPr id="178" name="TextBox 10"/>
+          <p:cNvPr id="183" name="TextBox 10"/>
           <p:cNvSpPr/>
           <p:nvPr/>
         </p:nvSpPr>
         <p:spPr>
           <a:xfrm>
             <a:off x="7096320" y="2231280"/>
-            <a:ext cx="3637080" cy="1422720"/>
+            <a:ext cx="3636360" cy="1422720"/>
           </a:xfrm>
           <a:prstGeom prst="rect">
             <a:avLst/>
@@ -32467,6 +32645,117 @@
             </a:endParaRPr>
           </a:p>
         </p:txBody>
+      </p:sp>
+      <p:pic>
+        <p:nvPicPr>
+          <p:cNvPr id="184" name="" descr=""/>
+          <p:cNvPicPr/>
+          <p:nvPr/>
+        </p:nvPicPr>
+        <p:blipFill>
+          <a:blip r:embed="rId1"/>
+          <a:stretch/>
+        </p:blipFill>
+        <p:spPr>
+          <a:xfrm>
+            <a:off x="1199160" y="3960000"/>
+            <a:ext cx="3192480" cy="2463120"/>
+          </a:xfrm>
+          <a:prstGeom prst="rect">
+            <a:avLst/>
+          </a:prstGeom>
+          <a:ln w="0">
+            <a:noFill/>
+          </a:ln>
+        </p:spPr>
+      </p:pic>
+      <p:pic>
+        <p:nvPicPr>
+          <p:cNvPr id="185" name="" descr=""/>
+          <p:cNvPicPr/>
+          <p:nvPr/>
+        </p:nvPicPr>
+        <p:blipFill>
+          <a:blip r:embed="rId2"/>
+          <a:stretch/>
+        </p:blipFill>
+        <p:spPr>
+          <a:xfrm>
+            <a:off x="6050520" y="3971880"/>
+            <a:ext cx="3165120" cy="2441880"/>
+          </a:xfrm>
+          <a:prstGeom prst="rect">
+            <a:avLst/>
+          </a:prstGeom>
+          <a:ln w="0">
+            <a:noFill/>
+          </a:ln>
+        </p:spPr>
+      </p:pic>
+      <p:sp>
+        <p:nvSpPr>
+          <p:cNvPr id="186" name=""/>
+          <p:cNvSpPr/>
+          <p:nvPr/>
+        </p:nvSpPr>
+        <p:spPr>
+          <a:xfrm>
+            <a:off x="4608000" y="5184000"/>
+            <a:ext cx="1151640" cy="215640"/>
+          </a:xfrm>
+          <a:custGeom>
+            <a:avLst/>
+            <a:gdLst/>
+            <a:ahLst/>
+            <a:rect l="l" t="t" r="r" b="b"/>
+            <a:pathLst>
+              <a:path w="21600" h="21600">
+                <a:moveTo>
+                  <a:pt x="0" y="5400"/>
+                </a:moveTo>
+                <a:lnTo>
+                  <a:pt x="16200" y="5400"/>
+                </a:lnTo>
+                <a:lnTo>
+                  <a:pt x="16200" y="0"/>
+                </a:lnTo>
+                <a:lnTo>
+                  <a:pt x="21600" y="10800"/>
+                </a:lnTo>
+                <a:lnTo>
+                  <a:pt x="16200" y="21600"/>
+                </a:lnTo>
+                <a:lnTo>
+                  <a:pt x="16200" y="16200"/>
+                </a:lnTo>
+                <a:lnTo>
+                  <a:pt x="0" y="16200"/>
+                </a:lnTo>
+                <a:lnTo>
+                  <a:pt x="2700" y="10800"/>
+                </a:lnTo>
+                <a:lnTo>
+                  <a:pt x="0" y="5400"/>
+                </a:lnTo>
+                <a:close/>
+              </a:path>
+            </a:pathLst>
+          </a:custGeom>
+          <a:solidFill>
+            <a:srgbClr val="729fcf"/>
+          </a:solidFill>
+          <a:ln w="0">
+            <a:solidFill>
+              <a:srgbClr val="3465a4"/>
+            </a:solidFill>
+          </a:ln>
+        </p:spPr>
+        <p:style>
+          <a:lnRef idx="0"/>
+          <a:fillRef idx="0"/>
+          <a:effectRef idx="0"/>
+          <a:fontRef idx="minor"/>
+        </p:style>
       </p:sp>
     </p:spTree>
   </p:cSld>

--- a/conf/DSS_20260618/presentation/pptx/DSS_2026_Tutorial.pptx
+++ b/conf/DSS_20260618/presentation/pptx/DSS_2026_Tutorial.pptx
@@ -90,7 +90,7 @@
         <p:txBody>
           <a:bodyPr/>
           <a:p>
-            <a:fld id="{5101661E-8A09-47BA-9E81-75D277B10C21}" type="slidenum">
+            <a:fld id="{F87F9A81-F035-4C61-ABFA-22393BABF1FE}" type="slidenum">
               <a:t>&lt;#&gt;</a:t>
             </a:fld>
           </a:p>
@@ -278,7 +278,7 @@
         <p:txBody>
           <a:bodyPr/>
           <a:p>
-            <a:fld id="{F3CB9F84-D694-416D-9C7B-B324EDC68F5F}" type="slidenum">
+            <a:fld id="{1435677F-853C-41EF-8453-1DD42EC66ACC}" type="slidenum">
               <a:t>&lt;#&gt;</a:t>
             </a:fld>
           </a:p>
@@ -534,7 +534,7 @@
         <p:txBody>
           <a:bodyPr/>
           <a:p>
-            <a:fld id="{9C06FBA8-F943-4CCB-B895-E45D74FAFA95}" type="slidenum">
+            <a:fld id="{8E78B32B-8E32-4AFB-BD33-FCE5DF63E1EB}" type="slidenum">
               <a:t>&lt;#&gt;</a:t>
             </a:fld>
           </a:p>
@@ -858,7 +858,7 @@
         <p:txBody>
           <a:bodyPr/>
           <a:p>
-            <a:fld id="{9A2DAB03-4AD0-425A-915E-F234982B171B}" type="slidenum">
+            <a:fld id="{BE5762A2-A5A1-4F90-801C-D2873A6E96F2}" type="slidenum">
               <a:t>&lt;#&gt;</a:t>
             </a:fld>
           </a:p>
@@ -1015,7 +1015,7 @@
         <p:txBody>
           <a:bodyPr/>
           <a:p>
-            <a:fld id="{49D70EB9-C825-4AB8-B998-D3F0F7B16175}" type="slidenum">
+            <a:fld id="{28E15D07-8E73-47BB-BE08-E76FD806D778}" type="slidenum">
               <a:t>&lt;#&gt;</a:t>
             </a:fld>
           </a:p>
@@ -1169,7 +1169,7 @@
         <p:txBody>
           <a:bodyPr/>
           <a:p>
-            <a:fld id="{100121FF-1ABC-4CDD-9D01-9D9AE51F37C4}" type="slidenum">
+            <a:fld id="{D47453A2-7C75-4F31-8C7F-4B6833B8746C}" type="slidenum">
               <a:t>&lt;#&gt;</a:t>
             </a:fld>
           </a:p>
@@ -1357,7 +1357,7 @@
         <p:txBody>
           <a:bodyPr/>
           <a:p>
-            <a:fld id="{519B887E-7FB2-4AEB-A424-8EC260D2DC71}" type="slidenum">
+            <a:fld id="{FB86A9CC-5A0D-46A7-90D7-DEC863035CDB}" type="slidenum">
               <a:t>&lt;#&gt;</a:t>
             </a:fld>
           </a:p>
@@ -1477,7 +1477,7 @@
         <p:txBody>
           <a:bodyPr/>
           <a:p>
-            <a:fld id="{9A0760E4-DF0A-4AE5-BA1D-FC36945B7CA6}" type="slidenum">
+            <a:fld id="{BAF0B5DD-EB9F-40E9-A26F-69F27895D15E}" type="slidenum">
               <a:t>&lt;#&gt;</a:t>
             </a:fld>
           </a:p>
@@ -1597,7 +1597,7 @@
         <p:txBody>
           <a:bodyPr/>
           <a:p>
-            <a:fld id="{5F9B9644-641C-4A68-A9CF-6631086A6BFD}" type="slidenum">
+            <a:fld id="{7F4951E1-D6F5-4471-8D35-E29893B2AB23}" type="slidenum">
               <a:t>&lt;#&gt;</a:t>
             </a:fld>
           </a:p>
@@ -1819,7 +1819,7 @@
         <p:txBody>
           <a:bodyPr/>
           <a:p>
-            <a:fld id="{450A76AF-FAE6-4EE4-B9DA-8F98EDB795FA}" type="slidenum">
+            <a:fld id="{E655AECB-245B-4B36-8FBA-40B8DE5DECC4}" type="slidenum">
               <a:t>&lt;#&gt;</a:t>
             </a:fld>
           </a:p>
@@ -2041,7 +2041,7 @@
         <p:txBody>
           <a:bodyPr/>
           <a:p>
-            <a:fld id="{346DBDC5-3997-4A6E-B483-17A7CBB38D30}" type="slidenum">
+            <a:fld id="{C1CEB98D-8414-4749-8792-8DDB3867598F}" type="slidenum">
               <a:t>&lt;#&gt;</a:t>
             </a:fld>
           </a:p>
@@ -2263,7 +2263,7 @@
         <p:txBody>
           <a:bodyPr/>
           <a:p>
-            <a:fld id="{04F04ECF-95B3-49BD-ABC3-D3396261ED3B}" type="slidenum">
+            <a:fld id="{A2DF1B2E-3000-40DA-AEC5-FE1E111A49FC}" type="slidenum">
               <a:t>&lt;#&gt;</a:t>
             </a:fld>
           </a:p>
@@ -2332,7 +2332,7 @@
         <p:spPr>
           <a:xfrm>
             <a:off x="3124080" y="6356520"/>
-            <a:ext cx="2893680" cy="363240"/>
+            <a:ext cx="2893320" cy="362880"/>
           </a:xfrm>
           <a:prstGeom prst="rect">
             <a:avLst/>
@@ -2389,7 +2389,7 @@
         <p:spPr>
           <a:xfrm>
             <a:off x="6553080" y="6356520"/>
-            <a:ext cx="2131920" cy="363240"/>
+            <a:ext cx="2131560" cy="362880"/>
           </a:xfrm>
           <a:prstGeom prst="rect">
             <a:avLst/>
@@ -2424,7 +2424,7 @@
               </a:lnSpc>
               <a:buNone/>
             </a:pPr>
-            <a:fld id="{3D0C0C50-03B0-4C60-9EB1-D8E3A6B026FF}" type="slidenum">
+            <a:fld id="{7AAAF06A-4272-4869-8A0C-CF2B1BDC071B}" type="slidenum">
               <a:rPr b="0" lang="en-US" sz="1200" spc="-1" strike="noStrike">
                 <a:solidFill>
                   <a:srgbClr val="8b8b8b"/>
@@ -2452,7 +2452,7 @@
         <p:spPr>
           <a:xfrm>
             <a:off x="457200" y="6356520"/>
-            <a:ext cx="2131920" cy="363240"/>
+            <a:ext cx="2131560" cy="362880"/>
           </a:xfrm>
           <a:prstGeom prst="rect">
             <a:avLst/>
@@ -2521,181 +2521,7 @@
               <a:rPr b="0" lang="pl-PL" sz="4400" spc="-1" strike="noStrike">
                 <a:latin typeface="Arial"/>
               </a:rPr>
-              <a:t>K</a:t>
-            </a:r>
-            <a:r>
-              <a:rPr b="0" lang="pl-PL" sz="4400" spc="-1" strike="noStrike">
-                <a:latin typeface="Arial"/>
-              </a:rPr>
-              <a:t>li</a:t>
-            </a:r>
-            <a:r>
-              <a:rPr b="0" lang="pl-PL" sz="4400" spc="-1" strike="noStrike">
-                <a:latin typeface="Arial"/>
-              </a:rPr>
-              <a:t>k</a:t>
-            </a:r>
-            <a:r>
-              <a:rPr b="0" lang="pl-PL" sz="4400" spc="-1" strike="noStrike">
-                <a:latin typeface="Arial"/>
-              </a:rPr>
-              <a:t>ni</a:t>
-            </a:r>
-            <a:r>
-              <a:rPr b="0" lang="pl-PL" sz="4400" spc="-1" strike="noStrike">
-                <a:latin typeface="Arial"/>
-              </a:rPr>
-              <a:t>j, </a:t>
-            </a:r>
-            <a:r>
-              <a:rPr b="0" lang="pl-PL" sz="4400" spc="-1" strike="noStrike">
-                <a:latin typeface="Arial"/>
-              </a:rPr>
-              <a:t>a</a:t>
-            </a:r>
-            <a:r>
-              <a:rPr b="0" lang="pl-PL" sz="4400" spc="-1" strike="noStrike">
-                <a:latin typeface="Arial"/>
-              </a:rPr>
-              <a:t>b</a:t>
-            </a:r>
-            <a:r>
-              <a:rPr b="0" lang="pl-PL" sz="4400" spc="-1" strike="noStrike">
-                <a:latin typeface="Arial"/>
-              </a:rPr>
-              <a:t>y </a:t>
-            </a:r>
-            <a:r>
-              <a:rPr b="0" lang="pl-PL" sz="4400" spc="-1" strike="noStrike">
-                <a:latin typeface="Arial"/>
-              </a:rPr>
-              <a:t>e</a:t>
-            </a:r>
-            <a:r>
-              <a:rPr b="0" lang="pl-PL" sz="4400" spc="-1" strike="noStrike">
-                <a:latin typeface="Arial"/>
-              </a:rPr>
-              <a:t>d</a:t>
-            </a:r>
-            <a:r>
-              <a:rPr b="0" lang="pl-PL" sz="4400" spc="-1" strike="noStrike">
-                <a:latin typeface="Arial"/>
-              </a:rPr>
-              <a:t>yt</a:t>
-            </a:r>
-            <a:r>
-              <a:rPr b="0" lang="pl-PL" sz="4400" spc="-1" strike="noStrike">
-                <a:latin typeface="Arial"/>
-              </a:rPr>
-              <a:t>o</a:t>
-            </a:r>
-            <a:r>
-              <a:rPr b="0" lang="pl-PL" sz="4400" spc="-1" strike="noStrike">
-                <a:latin typeface="Arial"/>
-              </a:rPr>
-              <a:t>w</a:t>
-            </a:r>
-            <a:r>
-              <a:rPr b="0" lang="pl-PL" sz="4400" spc="-1" strike="noStrike">
-                <a:latin typeface="Arial"/>
-              </a:rPr>
-              <a:t>a</a:t>
-            </a:r>
-            <a:r>
-              <a:rPr b="0" lang="pl-PL" sz="4400" spc="-1" strike="noStrike">
-                <a:latin typeface="Arial"/>
-              </a:rPr>
-              <a:t>ć </a:t>
-            </a:r>
-            <a:r>
-              <a:rPr b="0" lang="pl-PL" sz="4400" spc="-1" strike="noStrike">
-                <a:latin typeface="Arial"/>
-              </a:rPr>
-              <a:t>f</a:t>
-            </a:r>
-            <a:r>
-              <a:rPr b="0" lang="pl-PL" sz="4400" spc="-1" strike="noStrike">
-                <a:latin typeface="Arial"/>
-              </a:rPr>
-              <a:t>o</a:t>
-            </a:r>
-            <a:r>
-              <a:rPr b="0" lang="pl-PL" sz="4400" spc="-1" strike="noStrike">
-                <a:latin typeface="Arial"/>
-              </a:rPr>
-              <a:t>r</a:t>
-            </a:r>
-            <a:r>
-              <a:rPr b="0" lang="pl-PL" sz="4400" spc="-1" strike="noStrike">
-                <a:latin typeface="Arial"/>
-              </a:rPr>
-              <a:t>m</a:t>
-            </a:r>
-            <a:r>
-              <a:rPr b="0" lang="pl-PL" sz="4400" spc="-1" strike="noStrike">
-                <a:latin typeface="Arial"/>
-              </a:rPr>
-              <a:t>a</a:t>
-            </a:r>
-            <a:r>
-              <a:rPr b="0" lang="pl-PL" sz="4400" spc="-1" strike="noStrike">
-                <a:latin typeface="Arial"/>
-              </a:rPr>
-              <a:t>t </a:t>
-            </a:r>
-            <a:r>
-              <a:rPr b="0" lang="pl-PL" sz="4400" spc="-1" strike="noStrike">
-                <a:latin typeface="Arial"/>
-              </a:rPr>
-              <a:t>t</a:t>
-            </a:r>
-            <a:r>
-              <a:rPr b="0" lang="pl-PL" sz="4400" spc="-1" strike="noStrike">
-                <a:latin typeface="Arial"/>
-              </a:rPr>
-              <a:t>e</a:t>
-            </a:r>
-            <a:r>
-              <a:rPr b="0" lang="pl-PL" sz="4400" spc="-1" strike="noStrike">
-                <a:latin typeface="Arial"/>
-              </a:rPr>
-              <a:t>k</a:t>
-            </a:r>
-            <a:r>
-              <a:rPr b="0" lang="pl-PL" sz="4400" spc="-1" strike="noStrike">
-                <a:latin typeface="Arial"/>
-              </a:rPr>
-              <a:t>st</a:t>
-            </a:r>
-            <a:r>
-              <a:rPr b="0" lang="pl-PL" sz="4400" spc="-1" strike="noStrike">
-                <a:latin typeface="Arial"/>
-              </a:rPr>
-              <a:t>u </a:t>
-            </a:r>
-            <a:r>
-              <a:rPr b="0" lang="pl-PL" sz="4400" spc="-1" strike="noStrike">
-                <a:latin typeface="Arial"/>
-              </a:rPr>
-              <a:t>ty</a:t>
-            </a:r>
-            <a:r>
-              <a:rPr b="0" lang="pl-PL" sz="4400" spc="-1" strike="noStrike">
-                <a:latin typeface="Arial"/>
-              </a:rPr>
-              <a:t>t</a:t>
-            </a:r>
-            <a:r>
-              <a:rPr b="0" lang="pl-PL" sz="4400" spc="-1" strike="noStrike">
-                <a:latin typeface="Arial"/>
-              </a:rPr>
-              <a:t>uł</a:t>
-            </a:r>
-            <a:r>
-              <a:rPr b="0" lang="pl-PL" sz="4400" spc="-1" strike="noStrike">
-                <a:latin typeface="Arial"/>
-              </a:rPr>
-              <a:t>u</a:t>
+              <a:t>Kliknij, aby edytować format tekstu tytułu</a:t>
             </a:r>
             <a:endParaRPr b="0" lang="pl-PL" sz="4400" spc="-1" strike="noStrike">
               <a:latin typeface="Arial"/>
@@ -2939,7 +2765,7 @@
         <p:spPr>
           <a:xfrm>
             <a:off x="0" y="2331720"/>
-            <a:ext cx="1827000" cy="61560"/>
+            <a:ext cx="1826640" cy="61200"/>
           </a:xfrm>
           <a:prstGeom prst="rect">
             <a:avLst/>
@@ -2980,7 +2806,7 @@
         <p:spPr>
           <a:xfrm>
             <a:off x="768240" y="868680"/>
-            <a:ext cx="2284200" cy="212760"/>
+            <a:ext cx="2283840" cy="212760"/>
           </a:xfrm>
           <a:prstGeom prst="rect">
             <a:avLst/>
@@ -3032,7 +2858,7 @@
         <p:spPr>
           <a:xfrm>
             <a:off x="768240" y="2514600"/>
-            <a:ext cx="10422360" cy="1471320"/>
+            <a:ext cx="10422000" cy="1471320"/>
           </a:xfrm>
           <a:prstGeom prst="rect">
             <a:avLst/>
@@ -3105,7 +2931,7 @@
         <p:spPr>
           <a:xfrm>
             <a:off x="768240" y="4343400"/>
-            <a:ext cx="10056600" cy="630360"/>
+            <a:ext cx="10056240" cy="630360"/>
           </a:xfrm>
           <a:prstGeom prst="rect">
             <a:avLst/>
@@ -3157,7 +2983,7 @@
         <p:spPr>
           <a:xfrm>
             <a:off x="768240" y="5623560"/>
-            <a:ext cx="7313400" cy="486360"/>
+            <a:ext cx="7313040" cy="486360"/>
           </a:xfrm>
           <a:prstGeom prst="rect">
             <a:avLst/>
@@ -3234,7 +3060,7 @@
         <p:spPr>
           <a:xfrm>
             <a:off x="10983960" y="6336000"/>
-            <a:ext cx="1061640" cy="596880"/>
+            <a:ext cx="1061280" cy="596520"/>
           </a:xfrm>
           <a:prstGeom prst="rect">
             <a:avLst/>
@@ -3290,7 +3116,7 @@
         <p:spPr>
           <a:xfrm>
             <a:off x="768240" y="420480"/>
-            <a:ext cx="10605240" cy="441360"/>
+            <a:ext cx="10604880" cy="441360"/>
           </a:xfrm>
           <a:prstGeom prst="rect">
             <a:avLst/>
@@ -3342,7 +3168,7 @@
         <p:spPr>
           <a:xfrm>
             <a:off x="768240" y="1170360"/>
-            <a:ext cx="1369800" cy="42480"/>
+            <a:ext cx="1369440" cy="42120"/>
           </a:xfrm>
           <a:prstGeom prst="rect">
             <a:avLst/>
@@ -3383,7 +3209,7 @@
         <p:spPr>
           <a:xfrm>
             <a:off x="768240" y="1298520"/>
-            <a:ext cx="10605240" cy="227880"/>
+            <a:ext cx="10604880" cy="227880"/>
           </a:xfrm>
           <a:prstGeom prst="rect">
             <a:avLst/>
@@ -3435,7 +3261,7 @@
         <p:spPr>
           <a:xfrm>
             <a:off x="0" y="6437520"/>
-            <a:ext cx="12189960" cy="13320"/>
+            <a:ext cx="12189600" cy="12960"/>
           </a:xfrm>
           <a:prstGeom prst="rect">
             <a:avLst/>
@@ -3476,7 +3302,7 @@
         <p:spPr>
           <a:xfrm>
             <a:off x="768240" y="6473880"/>
-            <a:ext cx="8227800" cy="136800"/>
+            <a:ext cx="8227440" cy="136800"/>
           </a:xfrm>
           <a:prstGeom prst="rect">
             <a:avLst/>
@@ -3528,7 +3354,7 @@
         <p:spPr>
           <a:xfrm>
             <a:off x="10607040" y="6473880"/>
-            <a:ext cx="821160" cy="136800"/>
+            <a:ext cx="820800" cy="136800"/>
           </a:xfrm>
           <a:prstGeom prst="rect">
             <a:avLst/>
@@ -3580,7 +3406,7 @@
         <p:spPr>
           <a:xfrm>
             <a:off x="768240" y="1828800"/>
-            <a:ext cx="5027400" cy="1461240"/>
+            <a:ext cx="5027040" cy="1460880"/>
           </a:xfrm>
           <a:prstGeom prst="roundRect">
             <a:avLst>
@@ -3623,7 +3449,7 @@
         <p:spPr>
           <a:xfrm>
             <a:off x="768240" y="1828800"/>
-            <a:ext cx="48960" cy="1461240"/>
+            <a:ext cx="48600" cy="1460880"/>
           </a:xfrm>
           <a:prstGeom prst="rect">
             <a:avLst/>
@@ -3664,7 +3490,7 @@
         <p:spPr>
           <a:xfrm>
             <a:off x="1042560" y="1993320"/>
-            <a:ext cx="4570200" cy="243000"/>
+            <a:ext cx="4569840" cy="243000"/>
           </a:xfrm>
           <a:prstGeom prst="rect">
             <a:avLst/>
@@ -3716,7 +3542,7 @@
         <p:spPr>
           <a:xfrm>
             <a:off x="1042560" y="2423160"/>
-            <a:ext cx="4570200" cy="435240"/>
+            <a:ext cx="4569840" cy="435240"/>
           </a:xfrm>
           <a:prstGeom prst="rect">
             <a:avLst/>
@@ -3768,7 +3594,7 @@
         <p:spPr>
           <a:xfrm>
             <a:off x="6400800" y="1828800"/>
-            <a:ext cx="5027400" cy="1461240"/>
+            <a:ext cx="5027040" cy="1460880"/>
           </a:xfrm>
           <a:prstGeom prst="roundRect">
             <a:avLst>
@@ -3811,7 +3637,7 @@
         <p:spPr>
           <a:xfrm>
             <a:off x="6400800" y="1828800"/>
-            <a:ext cx="48960" cy="1461240"/>
+            <a:ext cx="48600" cy="1460880"/>
           </a:xfrm>
           <a:prstGeom prst="rect">
             <a:avLst/>
@@ -3852,7 +3678,7 @@
         <p:spPr>
           <a:xfrm>
             <a:off x="6675120" y="1993320"/>
-            <a:ext cx="4570200" cy="243000"/>
+            <a:ext cx="4569840" cy="243000"/>
           </a:xfrm>
           <a:prstGeom prst="rect">
             <a:avLst/>
@@ -3904,7 +3730,7 @@
         <p:spPr>
           <a:xfrm>
             <a:off x="6675120" y="2423160"/>
-            <a:ext cx="4570200" cy="435240"/>
+            <a:ext cx="4569840" cy="435240"/>
           </a:xfrm>
           <a:prstGeom prst="rect">
             <a:avLst/>
@@ -3956,7 +3782,7 @@
         <p:spPr>
           <a:xfrm>
             <a:off x="768240" y="3566160"/>
-            <a:ext cx="5027400" cy="1461240"/>
+            <a:ext cx="5027040" cy="1460880"/>
           </a:xfrm>
           <a:prstGeom prst="roundRect">
             <a:avLst>
@@ -3999,7 +3825,7 @@
         <p:spPr>
           <a:xfrm>
             <a:off x="768240" y="3566160"/>
-            <a:ext cx="48960" cy="1461240"/>
+            <a:ext cx="48600" cy="1460880"/>
           </a:xfrm>
           <a:prstGeom prst="rect">
             <a:avLst/>
@@ -4040,7 +3866,7 @@
         <p:spPr>
           <a:xfrm>
             <a:off x="1042560" y="3730680"/>
-            <a:ext cx="4570200" cy="243000"/>
+            <a:ext cx="4569840" cy="243000"/>
           </a:xfrm>
           <a:prstGeom prst="rect">
             <a:avLst/>
@@ -4092,7 +3918,7 @@
         <p:spPr>
           <a:xfrm>
             <a:off x="1042560" y="4160520"/>
-            <a:ext cx="4570200" cy="217440"/>
+            <a:ext cx="4569840" cy="217440"/>
           </a:xfrm>
           <a:prstGeom prst="rect">
             <a:avLst/>
@@ -4144,7 +3970,7 @@
         <p:spPr>
           <a:xfrm>
             <a:off x="6400800" y="3566160"/>
-            <a:ext cx="5027400" cy="1461240"/>
+            <a:ext cx="5027040" cy="1460880"/>
           </a:xfrm>
           <a:prstGeom prst="roundRect">
             <a:avLst>
@@ -4187,7 +4013,7 @@
         <p:spPr>
           <a:xfrm>
             <a:off x="6400800" y="3566160"/>
-            <a:ext cx="48960" cy="1461240"/>
+            <a:ext cx="48600" cy="1460880"/>
           </a:xfrm>
           <a:prstGeom prst="rect">
             <a:avLst/>
@@ -4228,7 +4054,7 @@
         <p:spPr>
           <a:xfrm>
             <a:off x="6675120" y="3730680"/>
-            <a:ext cx="4570200" cy="243000"/>
+            <a:ext cx="4569840" cy="243000"/>
           </a:xfrm>
           <a:prstGeom prst="rect">
             <a:avLst/>
@@ -4280,7 +4106,7 @@
         <p:spPr>
           <a:xfrm>
             <a:off x="6675120" y="4160520"/>
-            <a:ext cx="4570200" cy="217440"/>
+            <a:ext cx="4569840" cy="217440"/>
           </a:xfrm>
           <a:prstGeom prst="rect">
             <a:avLst/>
@@ -4369,7 +4195,7 @@
         <p:spPr>
           <a:xfrm>
             <a:off x="768240" y="420480"/>
-            <a:ext cx="10605240" cy="441360"/>
+            <a:ext cx="10604880" cy="441360"/>
           </a:xfrm>
           <a:prstGeom prst="rect">
             <a:avLst/>
@@ -4421,7 +4247,7 @@
         <p:spPr>
           <a:xfrm>
             <a:off x="768240" y="1170360"/>
-            <a:ext cx="1369800" cy="42480"/>
+            <a:ext cx="1369440" cy="42120"/>
           </a:xfrm>
           <a:prstGeom prst="rect">
             <a:avLst/>
@@ -4462,7 +4288,7 @@
         <p:spPr>
           <a:xfrm>
             <a:off x="0" y="6437520"/>
-            <a:ext cx="12189960" cy="13320"/>
+            <a:ext cx="12189600" cy="12960"/>
           </a:xfrm>
           <a:prstGeom prst="rect">
             <a:avLst/>
@@ -4503,7 +4329,7 @@
         <p:spPr>
           <a:xfrm>
             <a:off x="768240" y="6473880"/>
-            <a:ext cx="8227800" cy="136800"/>
+            <a:ext cx="8227440" cy="136800"/>
           </a:xfrm>
           <a:prstGeom prst="rect">
             <a:avLst/>
@@ -4555,7 +4381,7 @@
         <p:spPr>
           <a:xfrm>
             <a:off x="10607040" y="6473880"/>
-            <a:ext cx="821160" cy="136800"/>
+            <a:ext cx="820800" cy="136800"/>
           </a:xfrm>
           <a:prstGeom prst="rect">
             <a:avLst/>
@@ -4607,7 +4433,7 @@
         <p:spPr>
           <a:xfrm>
             <a:off x="768240" y="1417320"/>
-            <a:ext cx="3381480" cy="1186920"/>
+            <a:ext cx="3381120" cy="1186560"/>
           </a:xfrm>
           <a:prstGeom prst="roundRect">
             <a:avLst>
@@ -4650,7 +4476,7 @@
         <p:spPr>
           <a:xfrm>
             <a:off x="768240" y="1417320"/>
-            <a:ext cx="3381480" cy="455400"/>
+            <a:ext cx="3381120" cy="455040"/>
           </a:xfrm>
           <a:prstGeom prst="roundRect">
             <a:avLst>
@@ -4693,7 +4519,7 @@
         <p:spPr>
           <a:xfrm>
             <a:off x="768240" y="1481400"/>
-            <a:ext cx="3381480" cy="212760"/>
+            <a:ext cx="3381120" cy="212760"/>
           </a:xfrm>
           <a:prstGeom prst="rect">
             <a:avLst/>
@@ -4745,7 +4571,7 @@
         <p:spPr>
           <a:xfrm>
             <a:off x="951120" y="2011680"/>
-            <a:ext cx="3015720" cy="197640"/>
+            <a:ext cx="3015360" cy="197640"/>
           </a:xfrm>
           <a:prstGeom prst="rect">
             <a:avLst/>
@@ -4797,7 +4623,7 @@
         <p:spPr>
           <a:xfrm>
             <a:off x="4380120" y="1417320"/>
-            <a:ext cx="3381480" cy="1186920"/>
+            <a:ext cx="3381120" cy="1186560"/>
           </a:xfrm>
           <a:prstGeom prst="roundRect">
             <a:avLst>
@@ -4840,7 +4666,7 @@
         <p:spPr>
           <a:xfrm>
             <a:off x="4380120" y="1417320"/>
-            <a:ext cx="3381480" cy="455400"/>
+            <a:ext cx="3381120" cy="455040"/>
           </a:xfrm>
           <a:prstGeom prst="roundRect">
             <a:avLst>
@@ -4883,7 +4709,7 @@
         <p:spPr>
           <a:xfrm>
             <a:off x="4380120" y="1481400"/>
-            <a:ext cx="3381480" cy="212760"/>
+            <a:ext cx="3381120" cy="212760"/>
           </a:xfrm>
           <a:prstGeom prst="rect">
             <a:avLst/>
@@ -4935,7 +4761,7 @@
         <p:spPr>
           <a:xfrm>
             <a:off x="4563000" y="2011680"/>
-            <a:ext cx="3015720" cy="197640"/>
+            <a:ext cx="3015360" cy="197640"/>
           </a:xfrm>
           <a:prstGeom prst="rect">
             <a:avLst/>
@@ -4987,7 +4813,7 @@
         <p:spPr>
           <a:xfrm>
             <a:off x="7992000" y="1417320"/>
-            <a:ext cx="3381480" cy="1186920"/>
+            <a:ext cx="3381120" cy="1186560"/>
           </a:xfrm>
           <a:prstGeom prst="roundRect">
             <a:avLst>
@@ -5030,7 +4856,7 @@
         <p:spPr>
           <a:xfrm>
             <a:off x="7992000" y="1417320"/>
-            <a:ext cx="3381480" cy="455400"/>
+            <a:ext cx="3381120" cy="455040"/>
           </a:xfrm>
           <a:prstGeom prst="roundRect">
             <a:avLst>
@@ -5073,7 +4899,7 @@
         <p:spPr>
           <a:xfrm>
             <a:off x="7992000" y="1481400"/>
-            <a:ext cx="3381480" cy="212760"/>
+            <a:ext cx="3381120" cy="212760"/>
           </a:xfrm>
           <a:prstGeom prst="rect">
             <a:avLst/>
@@ -5125,7 +4951,7 @@
         <p:spPr>
           <a:xfrm>
             <a:off x="8174880" y="2011680"/>
-            <a:ext cx="3015720" cy="197640"/>
+            <a:ext cx="3015360" cy="197640"/>
           </a:xfrm>
           <a:prstGeom prst="rect">
             <a:avLst/>
@@ -5177,7 +5003,7 @@
         <p:spPr>
           <a:xfrm>
             <a:off x="768240" y="3017520"/>
-            <a:ext cx="10605240" cy="212760"/>
+            <a:ext cx="10604880" cy="212760"/>
           </a:xfrm>
           <a:prstGeom prst="rect">
             <a:avLst/>
@@ -5229,7 +5055,7 @@
         <p:spPr>
           <a:xfrm>
             <a:off x="768240" y="3474720"/>
-            <a:ext cx="1205280" cy="638280"/>
+            <a:ext cx="1204920" cy="637920"/>
           </a:xfrm>
           <a:prstGeom prst="roundRect">
             <a:avLst>
@@ -5272,7 +5098,7 @@
         <p:spPr>
           <a:xfrm>
             <a:off x="804600" y="3721680"/>
-            <a:ext cx="1132200" cy="144000"/>
+            <a:ext cx="1131840" cy="144000"/>
           </a:xfrm>
           <a:prstGeom prst="rect">
             <a:avLst/>
@@ -5324,7 +5150,7 @@
         <p:spPr>
           <a:xfrm>
             <a:off x="1956960" y="3672360"/>
-            <a:ext cx="162720" cy="242640"/>
+            <a:ext cx="162360" cy="242640"/>
           </a:xfrm>
           <a:prstGeom prst="rect">
             <a:avLst/>
@@ -5376,7 +5202,7 @@
         <p:spPr>
           <a:xfrm>
             <a:off x="2103120" y="3474720"/>
-            <a:ext cx="1205280" cy="638280"/>
+            <a:ext cx="1204920" cy="637920"/>
           </a:xfrm>
           <a:prstGeom prst="roundRect">
             <a:avLst>
@@ -5419,7 +5245,7 @@
         <p:spPr>
           <a:xfrm>
             <a:off x="2139840" y="3721680"/>
-            <a:ext cx="1132200" cy="144000"/>
+            <a:ext cx="1131840" cy="144000"/>
           </a:xfrm>
           <a:prstGeom prst="rect">
             <a:avLst/>
@@ -5471,7 +5297,7 @@
         <p:spPr>
           <a:xfrm>
             <a:off x="3291840" y="3672360"/>
-            <a:ext cx="162720" cy="242640"/>
+            <a:ext cx="162360" cy="242640"/>
           </a:xfrm>
           <a:prstGeom prst="rect">
             <a:avLst/>
@@ -5523,7 +5349,7 @@
         <p:spPr>
           <a:xfrm>
             <a:off x="3438000" y="3474720"/>
-            <a:ext cx="1205280" cy="638280"/>
+            <a:ext cx="1204920" cy="637920"/>
           </a:xfrm>
           <a:prstGeom prst="roundRect">
             <a:avLst>
@@ -5566,7 +5392,7 @@
         <p:spPr>
           <a:xfrm>
             <a:off x="3474720" y="3721680"/>
-            <a:ext cx="1132200" cy="144000"/>
+            <a:ext cx="1131840" cy="144000"/>
           </a:xfrm>
           <a:prstGeom prst="rect">
             <a:avLst/>
@@ -5618,7 +5444,7 @@
         <p:spPr>
           <a:xfrm>
             <a:off x="4626720" y="3672360"/>
-            <a:ext cx="162720" cy="242640"/>
+            <a:ext cx="162360" cy="242640"/>
           </a:xfrm>
           <a:prstGeom prst="rect">
             <a:avLst/>
@@ -5670,7 +5496,7 @@
         <p:spPr>
           <a:xfrm>
             <a:off x="4773240" y="3474720"/>
-            <a:ext cx="1205280" cy="638280"/>
+            <a:ext cx="1204920" cy="637920"/>
           </a:xfrm>
           <a:prstGeom prst="roundRect">
             <a:avLst>
@@ -5713,7 +5539,7 @@
         <p:spPr>
           <a:xfrm>
             <a:off x="4809600" y="3649320"/>
-            <a:ext cx="1132200" cy="288720"/>
+            <a:ext cx="1131840" cy="288720"/>
           </a:xfrm>
           <a:prstGeom prst="rect">
             <a:avLst/>
@@ -5765,7 +5591,7 @@
         <p:spPr>
           <a:xfrm>
             <a:off x="5961960" y="3672360"/>
-            <a:ext cx="162720" cy="242640"/>
+            <a:ext cx="162360" cy="242640"/>
           </a:xfrm>
           <a:prstGeom prst="rect">
             <a:avLst/>
@@ -5817,7 +5643,7 @@
         <p:spPr>
           <a:xfrm>
             <a:off x="6108120" y="3474720"/>
-            <a:ext cx="1205280" cy="638280"/>
+            <a:ext cx="1204920" cy="637920"/>
           </a:xfrm>
           <a:prstGeom prst="roundRect">
             <a:avLst>
@@ -5860,7 +5686,7 @@
         <p:spPr>
           <a:xfrm>
             <a:off x="6144840" y="3721680"/>
-            <a:ext cx="1132200" cy="144000"/>
+            <a:ext cx="1131840" cy="144000"/>
           </a:xfrm>
           <a:prstGeom prst="rect">
             <a:avLst/>
@@ -5912,7 +5738,7 @@
         <p:spPr>
           <a:xfrm>
             <a:off x="7296840" y="3672360"/>
-            <a:ext cx="162720" cy="242640"/>
+            <a:ext cx="162360" cy="242640"/>
           </a:xfrm>
           <a:prstGeom prst="rect">
             <a:avLst/>
@@ -5964,7 +5790,7 @@
         <p:spPr>
           <a:xfrm>
             <a:off x="7443360" y="3474720"/>
-            <a:ext cx="1205280" cy="638280"/>
+            <a:ext cx="1204920" cy="637920"/>
           </a:xfrm>
           <a:prstGeom prst="roundRect">
             <a:avLst>
@@ -6007,7 +5833,7 @@
         <p:spPr>
           <a:xfrm>
             <a:off x="7479720" y="3721680"/>
-            <a:ext cx="1132200" cy="144000"/>
+            <a:ext cx="1131840" cy="144000"/>
           </a:xfrm>
           <a:prstGeom prst="rect">
             <a:avLst/>
@@ -6059,7 +5885,7 @@
         <p:spPr>
           <a:xfrm>
             <a:off x="8632080" y="3672360"/>
-            <a:ext cx="162720" cy="242640"/>
+            <a:ext cx="162360" cy="242640"/>
           </a:xfrm>
           <a:prstGeom prst="rect">
             <a:avLst/>
@@ -6111,7 +5937,7 @@
         <p:spPr>
           <a:xfrm>
             <a:off x="8778240" y="3474720"/>
-            <a:ext cx="1205280" cy="638280"/>
+            <a:ext cx="1204920" cy="637920"/>
           </a:xfrm>
           <a:prstGeom prst="roundRect">
             <a:avLst>
@@ -6154,7 +5980,7 @@
         <p:spPr>
           <a:xfrm>
             <a:off x="8814960" y="3721680"/>
-            <a:ext cx="1132200" cy="144000"/>
+            <a:ext cx="1131840" cy="144000"/>
           </a:xfrm>
           <a:prstGeom prst="rect">
             <a:avLst/>
@@ -6206,7 +6032,7 @@
         <p:spPr>
           <a:xfrm>
             <a:off x="9966960" y="3672360"/>
-            <a:ext cx="162720" cy="242640"/>
+            <a:ext cx="162360" cy="242640"/>
           </a:xfrm>
           <a:prstGeom prst="rect">
             <a:avLst/>
@@ -6258,7 +6084,7 @@
         <p:spPr>
           <a:xfrm>
             <a:off x="10113120" y="3474720"/>
-            <a:ext cx="1205280" cy="638280"/>
+            <a:ext cx="1204920" cy="637920"/>
           </a:xfrm>
           <a:prstGeom prst="roundRect">
             <a:avLst>
@@ -6301,7 +6127,7 @@
         <p:spPr>
           <a:xfrm>
             <a:off x="10149840" y="3721680"/>
-            <a:ext cx="1132200" cy="144000"/>
+            <a:ext cx="1131840" cy="144000"/>
           </a:xfrm>
           <a:prstGeom prst="rect">
             <a:avLst/>
@@ -6353,7 +6179,7 @@
         <p:spPr>
           <a:xfrm>
             <a:off x="768240" y="4389120"/>
-            <a:ext cx="10650960" cy="684000"/>
+            <a:ext cx="10650600" cy="683640"/>
           </a:xfrm>
           <a:prstGeom prst="roundRect">
             <a:avLst>
@@ -6396,7 +6222,7 @@
         <p:spPr>
           <a:xfrm>
             <a:off x="768240" y="4389120"/>
-            <a:ext cx="48960" cy="684000"/>
+            <a:ext cx="48600" cy="683640"/>
           </a:xfrm>
           <a:prstGeom prst="rect">
             <a:avLst/>
@@ -6437,7 +6263,7 @@
         <p:spPr>
           <a:xfrm>
             <a:off x="1024200" y="4542120"/>
-            <a:ext cx="10193760" cy="414720"/>
+            <a:ext cx="10193400" cy="414720"/>
           </a:xfrm>
           <a:prstGeom prst="rect">
             <a:avLst/>
@@ -6526,7 +6352,7 @@
         <p:spPr>
           <a:xfrm>
             <a:off x="683280" y="495000"/>
-            <a:ext cx="11110320" cy="964440"/>
+            <a:ext cx="11109960" cy="964080"/>
           </a:xfrm>
           <a:prstGeom prst="rect">
             <a:avLst/>
@@ -6552,7 +6378,7 @@
         <p:spPr>
           <a:xfrm>
             <a:off x="4010760" y="2105280"/>
-            <a:ext cx="8179560" cy="3029400"/>
+            <a:ext cx="8179200" cy="3029040"/>
           </a:xfrm>
           <a:prstGeom prst="rect">
             <a:avLst/>
@@ -6720,7 +6546,7 @@
         <p:spPr>
           <a:xfrm>
             <a:off x="223200" y="6287400"/>
-            <a:ext cx="540720" cy="363240"/>
+            <a:ext cx="540360" cy="362880"/>
           </a:xfrm>
           <a:prstGeom prst="rect">
             <a:avLst/>
@@ -6746,7 +6572,7 @@
         <p:spPr>
           <a:xfrm>
             <a:off x="765720" y="6287400"/>
-            <a:ext cx="4618080" cy="363240"/>
+            <a:ext cx="4617720" cy="362880"/>
           </a:xfrm>
           <a:prstGeom prst="rect">
             <a:avLst/>
@@ -6772,7 +6598,7 @@
         <p:spPr>
           <a:xfrm>
             <a:off x="3049200" y="3275280"/>
-            <a:ext cx="6091920" cy="363960"/>
+            <a:ext cx="6091560" cy="363960"/>
           </a:xfrm>
           <a:prstGeom prst="rect">
             <a:avLst/>
@@ -6828,7 +6654,7 @@
         <p:spPr>
           <a:xfrm>
             <a:off x="6506640" y="426240"/>
-            <a:ext cx="2634480" cy="1222920"/>
+            <a:ext cx="2634120" cy="1222560"/>
           </a:xfrm>
           <a:prstGeom prst="rect">
             <a:avLst/>
@@ -6852,7 +6678,7 @@
         <p:spPr>
           <a:xfrm>
             <a:off x="500040" y="495000"/>
-            <a:ext cx="2941560" cy="5837760"/>
+            <a:ext cx="2941200" cy="5837400"/>
           </a:xfrm>
           <a:prstGeom prst="rect">
             <a:avLst/>
@@ -6871,7 +6697,7 @@
         <p:spPr>
           <a:xfrm>
             <a:off x="0" y="6437520"/>
-            <a:ext cx="12189960" cy="13320"/>
+            <a:ext cx="12189600" cy="12960"/>
           </a:xfrm>
           <a:prstGeom prst="rect">
             <a:avLst/>
@@ -7053,7 +6879,7 @@
         <p:spPr>
           <a:xfrm>
             <a:off x="825480" y="419760"/>
-            <a:ext cx="5635080" cy="928800"/>
+            <a:ext cx="5634720" cy="928440"/>
           </a:xfrm>
           <a:prstGeom prst="rect">
             <a:avLst/>
@@ -7105,7 +6931,7 @@
         <p:spPr>
           <a:xfrm>
             <a:off x="825480" y="1455840"/>
-            <a:ext cx="5635080" cy="880920"/>
+            <a:ext cx="5634720" cy="880560"/>
           </a:xfrm>
           <a:prstGeom prst="rect">
             <a:avLst/>
@@ -7177,7 +7003,7 @@
         <p:spPr>
           <a:xfrm>
             <a:off x="825480" y="2445480"/>
-            <a:ext cx="5470920" cy="1692720"/>
+            <a:ext cx="5470560" cy="1692360"/>
           </a:xfrm>
           <a:prstGeom prst="roundRect">
             <a:avLst>
@@ -7217,7 +7043,7 @@
         <p:spPr>
           <a:xfrm>
             <a:off x="1074600" y="2777040"/>
-            <a:ext cx="5121720" cy="754920"/>
+            <a:ext cx="5121360" cy="754560"/>
           </a:xfrm>
           <a:prstGeom prst="rect">
             <a:avLst/>
@@ -7269,7 +7095,7 @@
         <p:spPr>
           <a:xfrm>
             <a:off x="1074600" y="3597480"/>
-            <a:ext cx="5121720" cy="450360"/>
+            <a:ext cx="5121360" cy="450000"/>
           </a:xfrm>
           <a:prstGeom prst="rect">
             <a:avLst/>
@@ -7321,7 +7147,7 @@
         <p:spPr>
           <a:xfrm>
             <a:off x="825480" y="4417920"/>
-            <a:ext cx="5470920" cy="1838880"/>
+            <a:ext cx="5470560" cy="1838520"/>
           </a:xfrm>
           <a:prstGeom prst="roundRect">
             <a:avLst>
@@ -7365,7 +7191,7 @@
         <p:spPr>
           <a:xfrm>
             <a:off x="1074600" y="4592880"/>
-            <a:ext cx="4972680" cy="258480"/>
+            <a:ext cx="4972320" cy="258120"/>
           </a:xfrm>
           <a:prstGeom prst="roundRect">
             <a:avLst>
@@ -7395,7 +7221,7 @@
         <p:spPr>
           <a:xfrm>
             <a:off x="1176120" y="4607640"/>
-            <a:ext cx="4918680" cy="243720"/>
+            <a:ext cx="4918320" cy="243360"/>
           </a:xfrm>
           <a:prstGeom prst="rect">
             <a:avLst/>
@@ -7447,7 +7273,7 @@
         <p:spPr>
           <a:xfrm>
             <a:off x="1074600" y="4846680"/>
-            <a:ext cx="5121720" cy="1193040"/>
+            <a:ext cx="5121360" cy="1192680"/>
           </a:xfrm>
           <a:prstGeom prst="rect">
             <a:avLst/>
@@ -7659,7 +7485,7 @@
         <p:spPr>
           <a:xfrm>
             <a:off x="6896160" y="784080"/>
-            <a:ext cx="4276440" cy="4830840"/>
+            <a:ext cx="4276080" cy="4830480"/>
           </a:xfrm>
           <a:prstGeom prst="roundRect">
             <a:avLst>
@@ -7703,7 +7529,7 @@
         <p:spPr>
           <a:xfrm>
             <a:off x="6904440" y="792000"/>
-            <a:ext cx="4260600" cy="4815000"/>
+            <a:ext cx="4260240" cy="4814640"/>
           </a:xfrm>
           <a:prstGeom prst="rect">
             <a:avLst/>
@@ -7722,7 +7548,7 @@
         <p:spPr>
           <a:xfrm>
             <a:off x="6634800" y="5730840"/>
-            <a:ext cx="4799880" cy="252000"/>
+            <a:ext cx="4799520" cy="251640"/>
           </a:xfrm>
           <a:prstGeom prst="rect">
             <a:avLst/>
@@ -7740,7 +7566,7 @@
         </p:style>
         <p:txBody>
           <a:bodyPr lIns="16920" rIns="16920" tIns="16920" bIns="16920" anchor="t">
-            <a:normAutofit fontScale="79000"/>
+            <a:normAutofit fontScale="78000"/>
           </a:bodyPr>
           <a:p>
             <a:pPr algn="ctr">
@@ -7774,7 +7600,7 @@
         <p:spPr>
           <a:xfrm>
             <a:off x="0" y="6437520"/>
-            <a:ext cx="12189960" cy="13320"/>
+            <a:ext cx="12189600" cy="12960"/>
           </a:xfrm>
           <a:prstGeom prst="rect">
             <a:avLst/>
@@ -7919,7 +7745,7 @@
         <p:spPr>
           <a:xfrm>
             <a:off x="825480" y="1360080"/>
-            <a:ext cx="1369800" cy="42480"/>
+            <a:ext cx="1369440" cy="42120"/>
           </a:xfrm>
           <a:prstGeom prst="rect">
             <a:avLst/>
@@ -7997,7 +7823,7 @@
         <p:spPr>
           <a:xfrm>
             <a:off x="1020240" y="571680"/>
-            <a:ext cx="4068360" cy="5027760"/>
+            <a:ext cx="4068000" cy="5027400"/>
           </a:xfrm>
           <a:prstGeom prst="roundRect">
             <a:avLst>
@@ -8043,7 +7869,7 @@
         <p:spPr>
           <a:xfrm>
             <a:off x="1028160" y="579600"/>
-            <a:ext cx="4052520" cy="5011920"/>
+            <a:ext cx="4052160" cy="5011560"/>
           </a:xfrm>
           <a:prstGeom prst="rect">
             <a:avLst/>
@@ -8062,7 +7888,7 @@
         <p:spPr>
           <a:xfrm>
             <a:off x="758520" y="5715360"/>
-            <a:ext cx="4591080" cy="480600"/>
+            <a:ext cx="4590720" cy="480240"/>
           </a:xfrm>
           <a:prstGeom prst="rect">
             <a:avLst/>
@@ -8114,7 +7940,7 @@
         <p:spPr>
           <a:xfrm>
             <a:off x="5691240" y="1323360"/>
-            <a:ext cx="5843880" cy="928800"/>
+            <a:ext cx="5843520" cy="928440"/>
           </a:xfrm>
           <a:prstGeom prst="rect">
             <a:avLst/>
@@ -8166,7 +7992,7 @@
         <p:spPr>
           <a:xfrm>
             <a:off x="5691240" y="2418840"/>
-            <a:ext cx="5843880" cy="880920"/>
+            <a:ext cx="5843520" cy="880560"/>
           </a:xfrm>
           <a:prstGeom prst="rect">
             <a:avLst/>
@@ -8258,7 +8084,7 @@
         <p:spPr>
           <a:xfrm>
             <a:off x="5691240" y="3467880"/>
-            <a:ext cx="2747160" cy="1683360"/>
+            <a:ext cx="2746800" cy="1683000"/>
           </a:xfrm>
           <a:prstGeom prst="roundRect">
             <a:avLst>
@@ -8298,7 +8124,7 @@
         <p:spPr>
           <a:xfrm>
             <a:off x="5927400" y="3687120"/>
-            <a:ext cx="2342160" cy="754920"/>
+            <a:ext cx="2341800" cy="754560"/>
           </a:xfrm>
           <a:prstGeom prst="rect">
             <a:avLst/>
@@ -8350,7 +8176,7 @@
         <p:spPr>
           <a:xfrm>
             <a:off x="5791680" y="4507200"/>
-            <a:ext cx="2646360" cy="450360"/>
+            <a:ext cx="2646000" cy="450000"/>
           </a:xfrm>
           <a:prstGeom prst="rect">
             <a:avLst/>
@@ -8402,7 +8228,7 @@
         <p:spPr>
           <a:xfrm>
             <a:off x="8617680" y="3467880"/>
-            <a:ext cx="2747160" cy="1683360"/>
+            <a:ext cx="2746800" cy="1683000"/>
           </a:xfrm>
           <a:prstGeom prst="roundRect">
             <a:avLst>
@@ -8442,7 +8268,7 @@
         <p:spPr>
           <a:xfrm>
             <a:off x="8854200" y="3678840"/>
-            <a:ext cx="2342160" cy="754920"/>
+            <a:ext cx="2341800" cy="754560"/>
           </a:xfrm>
           <a:prstGeom prst="rect">
             <a:avLst/>
@@ -8494,7 +8320,7 @@
         <p:spPr>
           <a:xfrm>
             <a:off x="8854200" y="4499280"/>
-            <a:ext cx="2342160" cy="466200"/>
+            <a:ext cx="2341800" cy="465840"/>
           </a:xfrm>
           <a:prstGeom prst="rect">
             <a:avLst/>
@@ -8586,7 +8412,7 @@
         <p:spPr>
           <a:xfrm>
             <a:off x="5691240" y="5346720"/>
-            <a:ext cx="5843880" cy="535320"/>
+            <a:ext cx="5843520" cy="534960"/>
           </a:xfrm>
           <a:prstGeom prst="rect">
             <a:avLst/>
@@ -8658,7 +8484,7 @@
         <p:spPr>
           <a:xfrm>
             <a:off x="0" y="6437520"/>
-            <a:ext cx="12189960" cy="13320"/>
+            <a:ext cx="12189600" cy="12960"/>
           </a:xfrm>
           <a:prstGeom prst="rect">
             <a:avLst/>
@@ -8803,7 +8629,7 @@
         <p:spPr>
           <a:xfrm>
             <a:off x="5691240" y="2299320"/>
-            <a:ext cx="1369800" cy="42480"/>
+            <a:ext cx="1369440" cy="42120"/>
           </a:xfrm>
           <a:prstGeom prst="rect">
             <a:avLst/>
@@ -8881,7 +8707,7 @@
         <p:spPr>
           <a:xfrm>
             <a:off x="825480" y="852480"/>
-            <a:ext cx="10855440" cy="476280"/>
+            <a:ext cx="10855080" cy="475920"/>
           </a:xfrm>
           <a:prstGeom prst="rect">
             <a:avLst/>
@@ -8943,7 +8769,7 @@
         <p:spPr>
           <a:xfrm>
             <a:off x="825480" y="1548360"/>
-            <a:ext cx="9154800" cy="595080"/>
+            <a:ext cx="9154440" cy="594720"/>
           </a:xfrm>
           <a:prstGeom prst="rect">
             <a:avLst/>
@@ -8995,7 +8821,7 @@
         <p:spPr>
           <a:xfrm>
             <a:off x="825480" y="2435040"/>
-            <a:ext cx="4717440" cy="3888000"/>
+            <a:ext cx="4717080" cy="3887640"/>
           </a:xfrm>
           <a:prstGeom prst="roundRect">
             <a:avLst>
@@ -9035,7 +8861,7 @@
         <p:spPr>
           <a:xfrm>
             <a:off x="1138320" y="3220920"/>
-            <a:ext cx="4092120" cy="258480"/>
+            <a:ext cx="4091760" cy="258120"/>
           </a:xfrm>
           <a:prstGeom prst="roundRect">
             <a:avLst>
@@ -9065,7 +8891,7 @@
         <p:spPr>
           <a:xfrm>
             <a:off x="1239840" y="3271680"/>
-            <a:ext cx="4011480" cy="182160"/>
+            <a:ext cx="4011120" cy="181800"/>
           </a:xfrm>
           <a:prstGeom prst="rect">
             <a:avLst/>
@@ -9117,7 +8943,7 @@
         <p:spPr>
           <a:xfrm>
             <a:off x="1138320" y="3620880"/>
-            <a:ext cx="211680" cy="286560"/>
+            <a:ext cx="211320" cy="286200"/>
           </a:xfrm>
           <a:prstGeom prst="rect">
             <a:avLst/>
@@ -9169,7 +8995,7 @@
         <p:spPr>
           <a:xfrm>
             <a:off x="1415160" y="3624120"/>
-            <a:ext cx="1161000" cy="279360"/>
+            <a:ext cx="1160640" cy="279000"/>
           </a:xfrm>
           <a:prstGeom prst="rect">
             <a:avLst/>
@@ -9221,7 +9047,7 @@
         <p:spPr>
           <a:xfrm>
             <a:off x="1886040" y="3972240"/>
-            <a:ext cx="390960" cy="252360"/>
+            <a:ext cx="390600" cy="252000"/>
           </a:xfrm>
           <a:prstGeom prst="rect">
             <a:avLst/>
@@ -9273,7 +9099,7 @@
         <p:spPr>
           <a:xfrm>
             <a:off x="1138320" y="4289760"/>
-            <a:ext cx="211680" cy="286560"/>
+            <a:ext cx="211320" cy="286200"/>
           </a:xfrm>
           <a:prstGeom prst="rect">
             <a:avLst/>
@@ -9325,7 +9151,7 @@
         <p:spPr>
           <a:xfrm>
             <a:off x="1415160" y="4293360"/>
-            <a:ext cx="1600200" cy="279360"/>
+            <a:ext cx="1599840" cy="279000"/>
           </a:xfrm>
           <a:prstGeom prst="rect">
             <a:avLst/>
@@ -9377,7 +9203,7 @@
         <p:spPr>
           <a:xfrm>
             <a:off x="1886040" y="4641480"/>
-            <a:ext cx="390960" cy="252360"/>
+            <a:ext cx="390600" cy="252000"/>
           </a:xfrm>
           <a:prstGeom prst="rect">
             <a:avLst/>
@@ -9429,7 +9255,7 @@
         <p:spPr>
           <a:xfrm>
             <a:off x="1138320" y="4958640"/>
-            <a:ext cx="211680" cy="286560"/>
+            <a:ext cx="211320" cy="286200"/>
           </a:xfrm>
           <a:prstGeom prst="rect">
             <a:avLst/>
@@ -9481,7 +9307,7 @@
         <p:spPr>
           <a:xfrm>
             <a:off x="1415160" y="4962240"/>
-            <a:ext cx="1333440" cy="279360"/>
+            <a:ext cx="1333080" cy="279000"/>
           </a:xfrm>
           <a:prstGeom prst="rect">
             <a:avLst/>
@@ -9533,7 +9359,7 @@
         <p:spPr>
           <a:xfrm>
             <a:off x="1290600" y="5310360"/>
-            <a:ext cx="4062240" cy="252000"/>
+            <a:ext cx="4061880" cy="251640"/>
           </a:xfrm>
           <a:prstGeom prst="rect">
             <a:avLst/>
@@ -9551,7 +9377,7 @@
         </p:style>
         <p:txBody>
           <a:bodyPr lIns="16920" rIns="16920" tIns="16920" bIns="16920" anchor="t">
-            <a:normAutofit fontScale="80000"/>
+            <a:normAutofit fontScale="79000"/>
           </a:bodyPr>
           <a:p>
             <a:pPr>
@@ -9595,7 +9421,7 @@
         <p:spPr>
           <a:xfrm>
             <a:off x="5849280" y="2435040"/>
-            <a:ext cx="2680560" cy="1655640"/>
+            <a:ext cx="2680200" cy="1655280"/>
           </a:xfrm>
           <a:prstGeom prst="roundRect">
             <a:avLst>
@@ -9635,7 +9461,7 @@
         <p:spPr>
           <a:xfrm>
             <a:off x="6073200" y="2777400"/>
-            <a:ext cx="2300040" cy="480600"/>
+            <a:ext cx="2299680" cy="480240"/>
           </a:xfrm>
           <a:prstGeom prst="rect">
             <a:avLst/>
@@ -9687,7 +9513,7 @@
         <p:spPr>
           <a:xfrm>
             <a:off x="6073200" y="3323520"/>
-            <a:ext cx="2300040" cy="450360"/>
+            <a:ext cx="2299680" cy="450000"/>
           </a:xfrm>
           <a:prstGeom prst="rect">
             <a:avLst/>
@@ -9739,7 +9565,7 @@
         <p:spPr>
           <a:xfrm>
             <a:off x="8683920" y="2435040"/>
-            <a:ext cx="2680560" cy="1655640"/>
+            <a:ext cx="2680200" cy="1655280"/>
           </a:xfrm>
           <a:prstGeom prst="roundRect">
             <a:avLst>
@@ -9779,7 +9605,7 @@
         <p:spPr>
           <a:xfrm>
             <a:off x="8907840" y="2777400"/>
-            <a:ext cx="2300400" cy="480600"/>
+            <a:ext cx="2300040" cy="480240"/>
           </a:xfrm>
           <a:prstGeom prst="rect">
             <a:avLst/>
@@ -9831,7 +9657,7 @@
         <p:spPr>
           <a:xfrm>
             <a:off x="8907840" y="3323520"/>
-            <a:ext cx="2300400" cy="450360"/>
+            <a:ext cx="2300040" cy="450000"/>
           </a:xfrm>
           <a:prstGeom prst="rect">
             <a:avLst/>
@@ -9883,7 +9709,7 @@
         <p:spPr>
           <a:xfrm>
             <a:off x="5849280" y="4245120"/>
-            <a:ext cx="5515560" cy="2077920"/>
+            <a:ext cx="5515200" cy="2077560"/>
           </a:xfrm>
           <a:prstGeom prst="roundRect">
             <a:avLst>
@@ -9923,7 +9749,7 @@
         <p:spPr>
           <a:xfrm>
             <a:off x="6085800" y="4581360"/>
-            <a:ext cx="1509480" cy="480600"/>
+            <a:ext cx="1509120" cy="480240"/>
           </a:xfrm>
           <a:prstGeom prst="rect">
             <a:avLst/>
@@ -9975,7 +9801,7 @@
         <p:spPr>
           <a:xfrm>
             <a:off x="7673400" y="4755960"/>
-            <a:ext cx="668880" cy="275040"/>
+            <a:ext cx="668520" cy="274680"/>
           </a:xfrm>
           <a:prstGeom prst="rect">
             <a:avLst/>
@@ -9993,7 +9819,7 @@
         </p:style>
         <p:txBody>
           <a:bodyPr lIns="16920" rIns="16920" tIns="16920" bIns="16920" anchor="t">
-            <a:normAutofit fontScale="78000"/>
+            <a:normAutofit fontScale="77000"/>
           </a:bodyPr>
           <a:p>
             <a:pPr>
@@ -10027,7 +9853,7 @@
         <p:spPr>
           <a:xfrm>
             <a:off x="6085800" y="5127120"/>
-            <a:ext cx="5193720" cy="884880"/>
+            <a:ext cx="5193360" cy="884520"/>
           </a:xfrm>
           <a:prstGeom prst="rect">
             <a:avLst/>
@@ -10119,7 +9945,7 @@
         <p:spPr>
           <a:xfrm>
             <a:off x="0" y="6437520"/>
-            <a:ext cx="12189960" cy="13320"/>
+            <a:ext cx="12189600" cy="12960"/>
           </a:xfrm>
           <a:prstGeom prst="rect">
             <a:avLst/>
@@ -10264,7 +10090,7 @@
         <p:spPr>
           <a:xfrm>
             <a:off x="825480" y="1375920"/>
-            <a:ext cx="1369800" cy="42480"/>
+            <a:ext cx="1369440" cy="42120"/>
           </a:xfrm>
           <a:prstGeom prst="rect">
             <a:avLst/>
@@ -10342,7 +10168,7 @@
         <p:spPr>
           <a:xfrm>
             <a:off x="768240" y="1554480"/>
-            <a:ext cx="1827000" cy="48960"/>
+            <a:ext cx="1826640" cy="48600"/>
           </a:xfrm>
           <a:prstGeom prst="rect">
             <a:avLst/>
@@ -10383,7 +10209,7 @@
         <p:spPr>
           <a:xfrm>
             <a:off x="768240" y="1737360"/>
-            <a:ext cx="10422360" cy="578880"/>
+            <a:ext cx="10422000" cy="578880"/>
           </a:xfrm>
           <a:prstGeom prst="rect">
             <a:avLst/>
@@ -10435,7 +10261,7 @@
         <p:spPr>
           <a:xfrm>
             <a:off x="768240" y="2697480"/>
-            <a:ext cx="10056600" cy="273960"/>
+            <a:ext cx="10056240" cy="273960"/>
           </a:xfrm>
           <a:prstGeom prst="rect">
             <a:avLst/>
@@ -10487,7 +10313,7 @@
         <p:spPr>
           <a:xfrm>
             <a:off x="768240" y="3566160"/>
-            <a:ext cx="6399000" cy="1004040"/>
+            <a:ext cx="6398640" cy="1003680"/>
           </a:xfrm>
           <a:prstGeom prst="roundRect">
             <a:avLst>
@@ -10530,7 +10356,7 @@
         <p:spPr>
           <a:xfrm>
             <a:off x="768240" y="3703320"/>
-            <a:ext cx="6399000" cy="197640"/>
+            <a:ext cx="6398640" cy="197640"/>
           </a:xfrm>
           <a:prstGeom prst="rect">
             <a:avLst/>
@@ -10582,7 +10408,7 @@
         <p:spPr>
           <a:xfrm>
             <a:off x="768240" y="4041720"/>
-            <a:ext cx="6399000" cy="365400"/>
+            <a:ext cx="6398640" cy="365400"/>
           </a:xfrm>
           <a:prstGeom prst="rect">
             <a:avLst/>
@@ -10634,7 +10460,7 @@
         <p:spPr>
           <a:xfrm>
             <a:off x="768240" y="5120640"/>
-            <a:ext cx="2558520" cy="227880"/>
+            <a:ext cx="2558160" cy="227880"/>
           </a:xfrm>
           <a:prstGeom prst="rect">
             <a:avLst/>
@@ -10686,7 +10512,7 @@
         <p:spPr>
           <a:xfrm>
             <a:off x="768240" y="5486400"/>
-            <a:ext cx="2558520" cy="197640"/>
+            <a:ext cx="2558160" cy="197640"/>
           </a:xfrm>
           <a:prstGeom prst="rect">
             <a:avLst/>
@@ -10738,7 +10564,7 @@
         <p:spPr>
           <a:xfrm>
             <a:off x="3465720" y="5120640"/>
-            <a:ext cx="2558520" cy="227880"/>
+            <a:ext cx="2558160" cy="227880"/>
           </a:xfrm>
           <a:prstGeom prst="rect">
             <a:avLst/>
@@ -10790,7 +10616,7 @@
         <p:spPr>
           <a:xfrm>
             <a:off x="3465720" y="5486400"/>
-            <a:ext cx="2558520" cy="395640"/>
+            <a:ext cx="2558160" cy="395640"/>
           </a:xfrm>
           <a:prstGeom prst="rect">
             <a:avLst/>
@@ -10842,7 +10668,7 @@
         <p:spPr>
           <a:xfrm>
             <a:off x="6163200" y="5120640"/>
-            <a:ext cx="2558520" cy="227880"/>
+            <a:ext cx="2558160" cy="227880"/>
           </a:xfrm>
           <a:prstGeom prst="rect">
             <a:avLst/>
@@ -10894,7 +10720,7 @@
         <p:spPr>
           <a:xfrm>
             <a:off x="6163200" y="5486400"/>
-            <a:ext cx="2558520" cy="197640"/>
+            <a:ext cx="2558160" cy="197640"/>
           </a:xfrm>
           <a:prstGeom prst="rect">
             <a:avLst/>
@@ -10946,7 +10772,7 @@
         <p:spPr>
           <a:xfrm>
             <a:off x="8860680" y="5120640"/>
-            <a:ext cx="2558520" cy="227880"/>
+            <a:ext cx="2558160" cy="227880"/>
           </a:xfrm>
           <a:prstGeom prst="rect">
             <a:avLst/>
@@ -10998,7 +10824,7 @@
         <p:spPr>
           <a:xfrm>
             <a:off x="8860680" y="5486400"/>
-            <a:ext cx="2558520" cy="197640"/>
+            <a:ext cx="2558160" cy="197640"/>
           </a:xfrm>
           <a:prstGeom prst="rect">
             <a:avLst/>
@@ -11087,7 +10913,7 @@
         <p:spPr>
           <a:xfrm>
             <a:off x="768240" y="2240280"/>
-            <a:ext cx="1827000" cy="974880"/>
+            <a:ext cx="1826640" cy="974880"/>
           </a:xfrm>
           <a:prstGeom prst="rect">
             <a:avLst/>
@@ -11139,7 +10965,7 @@
         <p:spPr>
           <a:xfrm>
             <a:off x="768240" y="3246120"/>
-            <a:ext cx="1827000" cy="48960"/>
+            <a:ext cx="1826640" cy="48600"/>
           </a:xfrm>
           <a:prstGeom prst="rect">
             <a:avLst/>
@@ -11180,7 +11006,7 @@
         <p:spPr>
           <a:xfrm>
             <a:off x="768240" y="3429000"/>
-            <a:ext cx="10422360" cy="639360"/>
+            <a:ext cx="10422000" cy="639360"/>
           </a:xfrm>
           <a:prstGeom prst="rect">
             <a:avLst/>
@@ -11232,7 +11058,7 @@
         <p:spPr>
           <a:xfrm>
             <a:off x="768240" y="4754880"/>
-            <a:ext cx="7313400" cy="243000"/>
+            <a:ext cx="7313040" cy="243000"/>
           </a:xfrm>
           <a:prstGeom prst="rect">
             <a:avLst/>
@@ -11321,7 +11147,7 @@
         <p:spPr>
           <a:xfrm>
             <a:off x="768240" y="420480"/>
-            <a:ext cx="10605240" cy="441360"/>
+            <a:ext cx="10604880" cy="441360"/>
           </a:xfrm>
           <a:prstGeom prst="rect">
             <a:avLst/>
@@ -11373,7 +11199,7 @@
         <p:spPr>
           <a:xfrm>
             <a:off x="768240" y="1170360"/>
-            <a:ext cx="1369800" cy="42480"/>
+            <a:ext cx="1369440" cy="42120"/>
           </a:xfrm>
           <a:prstGeom prst="rect">
             <a:avLst/>
@@ -11414,7 +11240,7 @@
         <p:spPr>
           <a:xfrm>
             <a:off x="0" y="6437520"/>
-            <a:ext cx="12189960" cy="13320"/>
+            <a:ext cx="12189600" cy="12960"/>
           </a:xfrm>
           <a:prstGeom prst="rect">
             <a:avLst/>
@@ -11455,7 +11281,7 @@
         <p:spPr>
           <a:xfrm>
             <a:off x="768240" y="6473880"/>
-            <a:ext cx="8227800" cy="136800"/>
+            <a:ext cx="8227440" cy="136800"/>
           </a:xfrm>
           <a:prstGeom prst="rect">
             <a:avLst/>
@@ -11507,7 +11333,7 @@
         <p:spPr>
           <a:xfrm>
             <a:off x="10607040" y="6473880"/>
-            <a:ext cx="821160" cy="136800"/>
+            <a:ext cx="820800" cy="136800"/>
           </a:xfrm>
           <a:prstGeom prst="rect">
             <a:avLst/>
@@ -12843,7 +12669,7 @@
         <p:spPr>
           <a:xfrm>
             <a:off x="768240" y="4480560"/>
-            <a:ext cx="10650960" cy="684000"/>
+            <a:ext cx="10650600" cy="683640"/>
           </a:xfrm>
           <a:prstGeom prst="roundRect">
             <a:avLst>
@@ -12886,7 +12712,7 @@
         <p:spPr>
           <a:xfrm>
             <a:off x="768240" y="4480560"/>
-            <a:ext cx="48960" cy="684000"/>
+            <a:ext cx="48600" cy="683640"/>
           </a:xfrm>
           <a:prstGeom prst="rect">
             <a:avLst/>
@@ -12927,7 +12753,7 @@
         <p:spPr>
           <a:xfrm>
             <a:off x="1024200" y="4633560"/>
-            <a:ext cx="10193760" cy="414720"/>
+            <a:ext cx="10193400" cy="414720"/>
           </a:xfrm>
           <a:prstGeom prst="rect">
             <a:avLst/>
@@ -13016,7 +12842,7 @@
         <p:spPr>
           <a:xfrm>
             <a:off x="768240" y="420480"/>
-            <a:ext cx="10605240" cy="441360"/>
+            <a:ext cx="10604880" cy="441360"/>
           </a:xfrm>
           <a:prstGeom prst="rect">
             <a:avLst/>
@@ -13068,7 +12894,7 @@
         <p:spPr>
           <a:xfrm>
             <a:off x="768240" y="1170360"/>
-            <a:ext cx="1369800" cy="42480"/>
+            <a:ext cx="1369440" cy="42120"/>
           </a:xfrm>
           <a:prstGeom prst="rect">
             <a:avLst/>
@@ -13109,7 +12935,7 @@
         <p:spPr>
           <a:xfrm>
             <a:off x="768240" y="1298520"/>
-            <a:ext cx="10605240" cy="227880"/>
+            <a:ext cx="10604880" cy="227880"/>
           </a:xfrm>
           <a:prstGeom prst="rect">
             <a:avLst/>
@@ -13161,7 +12987,7 @@
         <p:spPr>
           <a:xfrm>
             <a:off x="0" y="6437520"/>
-            <a:ext cx="12189960" cy="13320"/>
+            <a:ext cx="12189600" cy="12960"/>
           </a:xfrm>
           <a:prstGeom prst="rect">
             <a:avLst/>
@@ -13202,7 +13028,7 @@
         <p:spPr>
           <a:xfrm>
             <a:off x="768240" y="6473880"/>
-            <a:ext cx="8227800" cy="136800"/>
+            <a:ext cx="8227440" cy="136800"/>
           </a:xfrm>
           <a:prstGeom prst="rect">
             <a:avLst/>
@@ -13254,7 +13080,7 @@
         <p:spPr>
           <a:xfrm>
             <a:off x="10607040" y="6473880"/>
-            <a:ext cx="821160" cy="136800"/>
+            <a:ext cx="820800" cy="136800"/>
           </a:xfrm>
           <a:prstGeom prst="rect">
             <a:avLst/>
@@ -13306,7 +13132,7 @@
         <p:spPr>
           <a:xfrm>
             <a:off x="768240" y="1828800"/>
-            <a:ext cx="10650960" cy="601560"/>
+            <a:ext cx="10650600" cy="601200"/>
           </a:xfrm>
           <a:prstGeom prst="roundRect">
             <a:avLst>
@@ -13349,7 +13175,7 @@
         <p:spPr>
           <a:xfrm>
             <a:off x="768240" y="1828800"/>
-            <a:ext cx="1552680" cy="601560"/>
+            <a:ext cx="1552320" cy="601200"/>
           </a:xfrm>
           <a:prstGeom prst="roundRect">
             <a:avLst>
@@ -13392,7 +13218,7 @@
         <p:spPr>
           <a:xfrm>
             <a:off x="768240" y="1938600"/>
-            <a:ext cx="1552680" cy="227880"/>
+            <a:ext cx="1552320" cy="227880"/>
           </a:xfrm>
           <a:prstGeom prst="rect">
             <a:avLst/>
@@ -13444,7 +13270,7 @@
         <p:spPr>
           <a:xfrm>
             <a:off x="2551320" y="2027160"/>
-            <a:ext cx="8593560" cy="204840"/>
+            <a:ext cx="8593200" cy="204840"/>
           </a:xfrm>
           <a:prstGeom prst="rect">
             <a:avLst/>
@@ -13496,7 +13322,7 @@
         <p:spPr>
           <a:xfrm>
             <a:off x="768240" y="2541960"/>
-            <a:ext cx="10650960" cy="601560"/>
+            <a:ext cx="10650600" cy="601200"/>
           </a:xfrm>
           <a:prstGeom prst="roundRect">
             <a:avLst>
@@ -13539,7 +13365,7 @@
         <p:spPr>
           <a:xfrm>
             <a:off x="768240" y="2541960"/>
-            <a:ext cx="1552680" cy="601560"/>
+            <a:ext cx="1552320" cy="601200"/>
           </a:xfrm>
           <a:prstGeom prst="roundRect">
             <a:avLst>
@@ -13582,7 +13408,7 @@
         <p:spPr>
           <a:xfrm>
             <a:off x="768240" y="2651760"/>
-            <a:ext cx="1552680" cy="227880"/>
+            <a:ext cx="1552320" cy="227880"/>
           </a:xfrm>
           <a:prstGeom prst="rect">
             <a:avLst/>
@@ -13634,7 +13460,7 @@
         <p:spPr>
           <a:xfrm>
             <a:off x="2551320" y="2740320"/>
-            <a:ext cx="8593560" cy="204840"/>
+            <a:ext cx="8593200" cy="204840"/>
           </a:xfrm>
           <a:prstGeom prst="rect">
             <a:avLst/>
@@ -13686,7 +13512,7 @@
         <p:spPr>
           <a:xfrm>
             <a:off x="768240" y="3255120"/>
-            <a:ext cx="10650960" cy="601560"/>
+            <a:ext cx="10650600" cy="601200"/>
           </a:xfrm>
           <a:prstGeom prst="roundRect">
             <a:avLst>
@@ -13729,7 +13555,7 @@
         <p:spPr>
           <a:xfrm>
             <a:off x="768240" y="3255120"/>
-            <a:ext cx="1552680" cy="601560"/>
+            <a:ext cx="1552320" cy="601200"/>
           </a:xfrm>
           <a:prstGeom prst="roundRect">
             <a:avLst>
@@ -13772,7 +13598,7 @@
         <p:spPr>
           <a:xfrm>
             <a:off x="768240" y="3364920"/>
-            <a:ext cx="1552680" cy="227880"/>
+            <a:ext cx="1552320" cy="227880"/>
           </a:xfrm>
           <a:prstGeom prst="rect">
             <a:avLst/>
@@ -13824,7 +13650,7 @@
         <p:spPr>
           <a:xfrm>
             <a:off x="2551320" y="3453480"/>
-            <a:ext cx="8593560" cy="204840"/>
+            <a:ext cx="8593200" cy="204840"/>
           </a:xfrm>
           <a:prstGeom prst="rect">
             <a:avLst/>
@@ -15251,7 +15077,7 @@
         <p:spPr>
           <a:xfrm>
             <a:off x="768240" y="420480"/>
-            <a:ext cx="10605240" cy="441360"/>
+            <a:ext cx="10604880" cy="441360"/>
           </a:xfrm>
           <a:prstGeom prst="rect">
             <a:avLst/>
@@ -15303,7 +15129,7 @@
         <p:spPr>
           <a:xfrm>
             <a:off x="768240" y="1170360"/>
-            <a:ext cx="1369800" cy="42480"/>
+            <a:ext cx="1369440" cy="42120"/>
           </a:xfrm>
           <a:prstGeom prst="rect">
             <a:avLst/>
@@ -15344,7 +15170,7 @@
         <p:spPr>
           <a:xfrm>
             <a:off x="0" y="6437520"/>
-            <a:ext cx="12189960" cy="13320"/>
+            <a:ext cx="12189600" cy="12960"/>
           </a:xfrm>
           <a:prstGeom prst="rect">
             <a:avLst/>
@@ -15385,7 +15211,7 @@
         <p:spPr>
           <a:xfrm>
             <a:off x="768240" y="6473880"/>
-            <a:ext cx="8227800" cy="136800"/>
+            <a:ext cx="8227440" cy="136800"/>
           </a:xfrm>
           <a:prstGeom prst="rect">
             <a:avLst/>
@@ -15437,7 +15263,7 @@
         <p:spPr>
           <a:xfrm>
             <a:off x="10607040" y="6473880"/>
-            <a:ext cx="821160" cy="136800"/>
+            <a:ext cx="820800" cy="136800"/>
           </a:xfrm>
           <a:prstGeom prst="rect">
             <a:avLst/>
@@ -15489,7 +15315,7 @@
         <p:spPr>
           <a:xfrm>
             <a:off x="768240" y="1417320"/>
-            <a:ext cx="10605240" cy="784440"/>
+            <a:ext cx="10604880" cy="784080"/>
           </a:xfrm>
           <a:prstGeom prst="roundRect">
             <a:avLst>
@@ -15532,7 +15358,7 @@
         <p:spPr>
           <a:xfrm>
             <a:off x="951120" y="1581840"/>
-            <a:ext cx="455400" cy="455400"/>
+            <a:ext cx="455040" cy="455040"/>
           </a:xfrm>
           <a:prstGeom prst="ellipse">
             <a:avLst/>
@@ -15573,7 +15399,7 @@
         <p:spPr>
           <a:xfrm>
             <a:off x="951120" y="1668240"/>
-            <a:ext cx="455400" cy="273600"/>
+            <a:ext cx="455040" cy="273600"/>
           </a:xfrm>
           <a:prstGeom prst="rect">
             <a:avLst/>
@@ -15625,7 +15451,7 @@
         <p:spPr>
           <a:xfrm>
             <a:off x="1636920" y="1508760"/>
-            <a:ext cx="6399000" cy="243000"/>
+            <a:ext cx="6398640" cy="243000"/>
           </a:xfrm>
           <a:prstGeom prst="rect">
             <a:avLst/>
@@ -15677,7 +15503,7 @@
         <p:spPr>
           <a:xfrm>
             <a:off x="1636920" y="1837800"/>
-            <a:ext cx="7770600" cy="182160"/>
+            <a:ext cx="7770240" cy="182160"/>
           </a:xfrm>
           <a:prstGeom prst="rect">
             <a:avLst/>
@@ -15729,7 +15555,7 @@
         <p:spPr>
           <a:xfrm>
             <a:off x="9546480" y="1703160"/>
-            <a:ext cx="1735560" cy="212400"/>
+            <a:ext cx="1735200" cy="212400"/>
           </a:xfrm>
           <a:prstGeom prst="rect">
             <a:avLst/>
@@ -15781,7 +15607,7 @@
         <p:spPr>
           <a:xfrm>
             <a:off x="768240" y="2350080"/>
-            <a:ext cx="10605240" cy="784440"/>
+            <a:ext cx="10604880" cy="784080"/>
           </a:xfrm>
           <a:prstGeom prst="roundRect">
             <a:avLst>
@@ -15824,7 +15650,7 @@
         <p:spPr>
           <a:xfrm>
             <a:off x="951120" y="2514600"/>
-            <a:ext cx="455400" cy="455400"/>
+            <a:ext cx="455040" cy="455040"/>
           </a:xfrm>
           <a:prstGeom prst="ellipse">
             <a:avLst/>
@@ -15865,7 +15691,7 @@
         <p:spPr>
           <a:xfrm>
             <a:off x="951120" y="2601000"/>
-            <a:ext cx="455400" cy="273600"/>
+            <a:ext cx="455040" cy="273600"/>
           </a:xfrm>
           <a:prstGeom prst="rect">
             <a:avLst/>
@@ -15917,7 +15743,7 @@
         <p:spPr>
           <a:xfrm>
             <a:off x="1636920" y="2441520"/>
-            <a:ext cx="6399000" cy="243000"/>
+            <a:ext cx="6398640" cy="243000"/>
           </a:xfrm>
           <a:prstGeom prst="rect">
             <a:avLst/>
@@ -15969,7 +15795,7 @@
         <p:spPr>
           <a:xfrm>
             <a:off x="1636920" y="2770560"/>
-            <a:ext cx="7770600" cy="182160"/>
+            <a:ext cx="7770240" cy="182160"/>
           </a:xfrm>
           <a:prstGeom prst="rect">
             <a:avLst/>
@@ -16021,7 +15847,7 @@
         <p:spPr>
           <a:xfrm>
             <a:off x="9546480" y="2635920"/>
-            <a:ext cx="1735560" cy="212400"/>
+            <a:ext cx="1735200" cy="212400"/>
           </a:xfrm>
           <a:prstGeom prst="rect">
             <a:avLst/>
@@ -16073,7 +15899,7 @@
         <p:spPr>
           <a:xfrm>
             <a:off x="768240" y="3282840"/>
-            <a:ext cx="10605240" cy="784440"/>
+            <a:ext cx="10604880" cy="784080"/>
           </a:xfrm>
           <a:prstGeom prst="roundRect">
             <a:avLst>
@@ -16116,7 +15942,7 @@
         <p:spPr>
           <a:xfrm>
             <a:off x="951120" y="3447360"/>
-            <a:ext cx="455400" cy="455400"/>
+            <a:ext cx="455040" cy="455040"/>
           </a:xfrm>
           <a:prstGeom prst="ellipse">
             <a:avLst/>
@@ -16157,7 +15983,7 @@
         <p:spPr>
           <a:xfrm>
             <a:off x="951120" y="3533760"/>
-            <a:ext cx="455400" cy="273600"/>
+            <a:ext cx="455040" cy="273600"/>
           </a:xfrm>
           <a:prstGeom prst="rect">
             <a:avLst/>
@@ -16209,7 +16035,7 @@
         <p:spPr>
           <a:xfrm>
             <a:off x="1636920" y="3374280"/>
-            <a:ext cx="6399000" cy="243000"/>
+            <a:ext cx="6398640" cy="243000"/>
           </a:xfrm>
           <a:prstGeom prst="rect">
             <a:avLst/>
@@ -16261,7 +16087,7 @@
         <p:spPr>
           <a:xfrm>
             <a:off x="1636920" y="3703320"/>
-            <a:ext cx="7770600" cy="182160"/>
+            <a:ext cx="7770240" cy="182160"/>
           </a:xfrm>
           <a:prstGeom prst="rect">
             <a:avLst/>
@@ -16313,7 +16139,7 @@
         <p:spPr>
           <a:xfrm>
             <a:off x="9546480" y="3568680"/>
-            <a:ext cx="1735560" cy="212400"/>
+            <a:ext cx="1735200" cy="212400"/>
           </a:xfrm>
           <a:prstGeom prst="rect">
             <a:avLst/>
@@ -16365,7 +16191,7 @@
         <p:spPr>
           <a:xfrm>
             <a:off x="768240" y="4215240"/>
-            <a:ext cx="10605240" cy="784440"/>
+            <a:ext cx="10604880" cy="784080"/>
           </a:xfrm>
           <a:prstGeom prst="roundRect">
             <a:avLst>
@@ -16408,7 +16234,7 @@
         <p:spPr>
           <a:xfrm>
             <a:off x="951120" y="4380120"/>
-            <a:ext cx="455400" cy="455400"/>
+            <a:ext cx="455040" cy="455040"/>
           </a:xfrm>
           <a:prstGeom prst="ellipse">
             <a:avLst/>
@@ -16449,7 +16275,7 @@
         <p:spPr>
           <a:xfrm>
             <a:off x="951120" y="4466160"/>
-            <a:ext cx="455400" cy="273600"/>
+            <a:ext cx="455040" cy="273600"/>
           </a:xfrm>
           <a:prstGeom prst="rect">
             <a:avLst/>
@@ -16501,7 +16327,7 @@
         <p:spPr>
           <a:xfrm>
             <a:off x="1636920" y="4306680"/>
-            <a:ext cx="6399000" cy="243000"/>
+            <a:ext cx="6398640" cy="243000"/>
           </a:xfrm>
           <a:prstGeom prst="rect">
             <a:avLst/>
@@ -16553,7 +16379,7 @@
         <p:spPr>
           <a:xfrm>
             <a:off x="1636920" y="4636080"/>
-            <a:ext cx="7770600" cy="182160"/>
+            <a:ext cx="7770240" cy="182160"/>
           </a:xfrm>
           <a:prstGeom prst="rect">
             <a:avLst/>
@@ -16605,7 +16431,7 @@
         <p:spPr>
           <a:xfrm>
             <a:off x="9546480" y="4501080"/>
-            <a:ext cx="1735560" cy="212400"/>
+            <a:ext cx="1735200" cy="212400"/>
           </a:xfrm>
           <a:prstGeom prst="rect">
             <a:avLst/>
@@ -16657,7 +16483,7 @@
         <p:spPr>
           <a:xfrm>
             <a:off x="768240" y="5148000"/>
-            <a:ext cx="10605240" cy="784440"/>
+            <a:ext cx="10604880" cy="784080"/>
           </a:xfrm>
           <a:prstGeom prst="roundRect">
             <a:avLst>
@@ -16700,7 +16526,7 @@
         <p:spPr>
           <a:xfrm>
             <a:off x="951120" y="5312520"/>
-            <a:ext cx="455400" cy="455400"/>
+            <a:ext cx="455040" cy="455040"/>
           </a:xfrm>
           <a:prstGeom prst="ellipse">
             <a:avLst/>
@@ -16741,7 +16567,7 @@
         <p:spPr>
           <a:xfrm>
             <a:off x="951120" y="5398920"/>
-            <a:ext cx="455400" cy="273600"/>
+            <a:ext cx="455040" cy="273600"/>
           </a:xfrm>
           <a:prstGeom prst="rect">
             <a:avLst/>
@@ -16793,7 +16619,7 @@
         <p:spPr>
           <a:xfrm>
             <a:off x="1636920" y="5239440"/>
-            <a:ext cx="6399000" cy="243000"/>
+            <a:ext cx="6398640" cy="243000"/>
           </a:xfrm>
           <a:prstGeom prst="rect">
             <a:avLst/>
@@ -16845,7 +16671,7 @@
         <p:spPr>
           <a:xfrm>
             <a:off x="1636920" y="5568840"/>
-            <a:ext cx="7770600" cy="182160"/>
+            <a:ext cx="7770240" cy="182160"/>
           </a:xfrm>
           <a:prstGeom prst="rect">
             <a:avLst/>
@@ -16897,7 +16723,7 @@
         <p:spPr>
           <a:xfrm>
             <a:off x="9546480" y="5433840"/>
-            <a:ext cx="1735560" cy="212400"/>
+            <a:ext cx="1735200" cy="212400"/>
           </a:xfrm>
           <a:prstGeom prst="rect">
             <a:avLst/>
@@ -16986,7 +16812,7 @@
         <p:spPr>
           <a:xfrm>
             <a:off x="768240" y="420480"/>
-            <a:ext cx="10605240" cy="441360"/>
+            <a:ext cx="10604880" cy="441360"/>
           </a:xfrm>
           <a:prstGeom prst="rect">
             <a:avLst/>
@@ -17038,7 +16864,7 @@
         <p:spPr>
           <a:xfrm>
             <a:off x="768240" y="1170360"/>
-            <a:ext cx="1369800" cy="42480"/>
+            <a:ext cx="1369440" cy="42120"/>
           </a:xfrm>
           <a:prstGeom prst="rect">
             <a:avLst/>
@@ -17079,7 +16905,7 @@
         <p:spPr>
           <a:xfrm>
             <a:off x="768240" y="1298520"/>
-            <a:ext cx="10605240" cy="227880"/>
+            <a:ext cx="10604880" cy="227880"/>
           </a:xfrm>
           <a:prstGeom prst="rect">
             <a:avLst/>
@@ -17131,7 +16957,7 @@
         <p:spPr>
           <a:xfrm>
             <a:off x="0" y="6437520"/>
-            <a:ext cx="12189960" cy="13320"/>
+            <a:ext cx="12189600" cy="12960"/>
           </a:xfrm>
           <a:prstGeom prst="rect">
             <a:avLst/>
@@ -17172,7 +16998,7 @@
         <p:spPr>
           <a:xfrm>
             <a:off x="768240" y="6473880"/>
-            <a:ext cx="8227800" cy="136800"/>
+            <a:ext cx="8227440" cy="136800"/>
           </a:xfrm>
           <a:prstGeom prst="rect">
             <a:avLst/>
@@ -17224,7 +17050,7 @@
         <p:spPr>
           <a:xfrm>
             <a:off x="10607040" y="6473880"/>
-            <a:ext cx="821160" cy="136800"/>
+            <a:ext cx="820800" cy="136800"/>
           </a:xfrm>
           <a:prstGeom prst="rect">
             <a:avLst/>
@@ -17276,7 +17102,7 @@
         <p:spPr>
           <a:xfrm>
             <a:off x="768240" y="1828800"/>
-            <a:ext cx="5027400" cy="212760"/>
+            <a:ext cx="5027040" cy="212760"/>
           </a:xfrm>
           <a:prstGeom prst="rect">
             <a:avLst/>
@@ -17328,7 +17154,7 @@
         <p:spPr>
           <a:xfrm>
             <a:off x="768240" y="2194560"/>
-            <a:ext cx="5118840" cy="862200"/>
+            <a:ext cx="5118480" cy="861840"/>
           </a:xfrm>
           <a:prstGeom prst="roundRect">
             <a:avLst>
@@ -17475,7 +17301,7 @@
         <p:spPr>
           <a:xfrm>
             <a:off x="6400800" y="1828800"/>
-            <a:ext cx="5027400" cy="212760"/>
+            <a:ext cx="5027040" cy="212760"/>
           </a:xfrm>
           <a:prstGeom prst="rect">
             <a:avLst/>
@@ -17527,7 +17353,7 @@
         <p:spPr>
           <a:xfrm>
             <a:off x="6400800" y="2194560"/>
-            <a:ext cx="5027400" cy="1328760"/>
+            <a:ext cx="5027040" cy="1328400"/>
           </a:xfrm>
           <a:prstGeom prst="roundRect">
             <a:avLst>
@@ -17746,7 +17572,7 @@
         <p:spPr>
           <a:xfrm>
             <a:off x="768240" y="4206240"/>
-            <a:ext cx="10650960" cy="729720"/>
+            <a:ext cx="10650600" cy="729360"/>
           </a:xfrm>
           <a:prstGeom prst="roundRect">
             <a:avLst>
@@ -17789,7 +17615,7 @@
         <p:spPr>
           <a:xfrm>
             <a:off x="768240" y="4206240"/>
-            <a:ext cx="48960" cy="729720"/>
+            <a:ext cx="48600" cy="729360"/>
           </a:xfrm>
           <a:prstGeom prst="rect">
             <a:avLst/>
@@ -17830,7 +17656,7 @@
         <p:spPr>
           <a:xfrm>
             <a:off x="1024200" y="4271040"/>
-            <a:ext cx="10193760" cy="638280"/>
+            <a:ext cx="10193400" cy="638280"/>
           </a:xfrm>
           <a:prstGeom prst="rect">
             <a:avLst/>
@@ -17950,7 +17776,7 @@
         <p:spPr>
           <a:xfrm>
             <a:off x="768240" y="420480"/>
-            <a:ext cx="10605240" cy="441360"/>
+            <a:ext cx="10604880" cy="441360"/>
           </a:xfrm>
           <a:prstGeom prst="rect">
             <a:avLst/>
@@ -18002,7 +17828,7 @@
         <p:spPr>
           <a:xfrm>
             <a:off x="768240" y="1170360"/>
-            <a:ext cx="1369800" cy="42480"/>
+            <a:ext cx="1369440" cy="42120"/>
           </a:xfrm>
           <a:prstGeom prst="rect">
             <a:avLst/>
@@ -18043,7 +17869,7 @@
         <p:spPr>
           <a:xfrm>
             <a:off x="768240" y="1298520"/>
-            <a:ext cx="10605240" cy="227880"/>
+            <a:ext cx="10604880" cy="227880"/>
           </a:xfrm>
           <a:prstGeom prst="rect">
             <a:avLst/>
@@ -18095,7 +17921,7 @@
         <p:spPr>
           <a:xfrm>
             <a:off x="0" y="6437520"/>
-            <a:ext cx="12189960" cy="13320"/>
+            <a:ext cx="12189600" cy="12960"/>
           </a:xfrm>
           <a:prstGeom prst="rect">
             <a:avLst/>
@@ -18136,7 +17962,7 @@
         <p:spPr>
           <a:xfrm>
             <a:off x="768240" y="6473880"/>
-            <a:ext cx="8227800" cy="136800"/>
+            <a:ext cx="8227440" cy="136800"/>
           </a:xfrm>
           <a:prstGeom prst="rect">
             <a:avLst/>
@@ -18188,7 +18014,7 @@
         <p:spPr>
           <a:xfrm>
             <a:off x="10607040" y="6473880"/>
-            <a:ext cx="821160" cy="136800"/>
+            <a:ext cx="820800" cy="136800"/>
           </a:xfrm>
           <a:prstGeom prst="rect">
             <a:avLst/>
@@ -18240,7 +18066,7 @@
         <p:spPr>
           <a:xfrm>
             <a:off x="768240" y="1828800"/>
-            <a:ext cx="5393160" cy="1283760"/>
+            <a:ext cx="5392800" cy="1283760"/>
           </a:xfrm>
           <a:prstGeom prst="rect">
             <a:avLst/>
@@ -18407,7 +18233,7 @@
         <p:spPr>
           <a:xfrm>
             <a:off x="6400800" y="1783080"/>
-            <a:ext cx="5027400" cy="212760"/>
+            <a:ext cx="5027040" cy="212760"/>
           </a:xfrm>
           <a:prstGeom prst="rect">
             <a:avLst/>
@@ -19223,7 +19049,7 @@
         <p:spPr>
           <a:xfrm>
             <a:off x="768240" y="3931920"/>
-            <a:ext cx="5393160" cy="862200"/>
+            <a:ext cx="5392800" cy="861840"/>
           </a:xfrm>
           <a:prstGeom prst="roundRect">
             <a:avLst>
@@ -19380,7 +19206,7 @@
         <p:spPr>
           <a:xfrm>
             <a:off x="768240" y="5074920"/>
-            <a:ext cx="5393160" cy="729720"/>
+            <a:ext cx="5392800" cy="729360"/>
           </a:xfrm>
           <a:prstGeom prst="roundRect">
             <a:avLst>
@@ -19423,7 +19249,7 @@
         <p:spPr>
           <a:xfrm>
             <a:off x="768240" y="5074920"/>
-            <a:ext cx="48960" cy="729720"/>
+            <a:ext cx="48600" cy="729360"/>
           </a:xfrm>
           <a:prstGeom prst="rect">
             <a:avLst/>
@@ -19464,7 +19290,7 @@
         <p:spPr>
           <a:xfrm>
             <a:off x="1024200" y="5139720"/>
-            <a:ext cx="4935960" cy="638280"/>
+            <a:ext cx="4935600" cy="638280"/>
           </a:xfrm>
           <a:prstGeom prst="rect">
             <a:avLst/>
@@ -19584,7 +19410,7 @@
         <p:spPr>
           <a:xfrm>
             <a:off x="768240" y="420480"/>
-            <a:ext cx="10605240" cy="441360"/>
+            <a:ext cx="10604880" cy="441360"/>
           </a:xfrm>
           <a:prstGeom prst="rect">
             <a:avLst/>
@@ -19636,7 +19462,7 @@
         <p:spPr>
           <a:xfrm>
             <a:off x="768240" y="1170360"/>
-            <a:ext cx="1369800" cy="42480"/>
+            <a:ext cx="1369440" cy="42120"/>
           </a:xfrm>
           <a:prstGeom prst="rect">
             <a:avLst/>
@@ -19677,7 +19503,7 @@
         <p:spPr>
           <a:xfrm>
             <a:off x="768240" y="1298520"/>
-            <a:ext cx="10605240" cy="227880"/>
+            <a:ext cx="10604880" cy="227880"/>
           </a:xfrm>
           <a:prstGeom prst="rect">
             <a:avLst/>
@@ -19729,7 +19555,7 @@
         <p:spPr>
           <a:xfrm>
             <a:off x="0" y="6437520"/>
-            <a:ext cx="12189960" cy="13320"/>
+            <a:ext cx="12189600" cy="12960"/>
           </a:xfrm>
           <a:prstGeom prst="rect">
             <a:avLst/>
@@ -19770,7 +19596,7 @@
         <p:spPr>
           <a:xfrm>
             <a:off x="768240" y="6473880"/>
-            <a:ext cx="8227800" cy="136800"/>
+            <a:ext cx="8227440" cy="136800"/>
           </a:xfrm>
           <a:prstGeom prst="rect">
             <a:avLst/>
@@ -19822,7 +19648,7 @@
         <p:spPr>
           <a:xfrm>
             <a:off x="10607040" y="6473880"/>
-            <a:ext cx="821160" cy="136800"/>
+            <a:ext cx="820800" cy="136800"/>
           </a:xfrm>
           <a:prstGeom prst="rect">
             <a:avLst/>
@@ -19874,7 +19700,7 @@
         <p:spPr>
           <a:xfrm>
             <a:off x="768240" y="1828800"/>
-            <a:ext cx="5850360" cy="2028240"/>
+            <a:ext cx="5850000" cy="2027880"/>
           </a:xfrm>
           <a:prstGeom prst="roundRect">
             <a:avLst>
@@ -20186,7 +20012,7 @@
         <p:spPr>
           <a:xfrm>
             <a:off x="6446520" y="1783080"/>
-            <a:ext cx="4935960" cy="212760"/>
+            <a:ext cx="4935600" cy="212760"/>
           </a:xfrm>
           <a:prstGeom prst="rect">
             <a:avLst/>
@@ -20238,7 +20064,7 @@
         <p:spPr>
           <a:xfrm>
             <a:off x="6446520" y="2148840"/>
-            <a:ext cx="4935960" cy="1218960"/>
+            <a:ext cx="4935600" cy="1218960"/>
           </a:xfrm>
           <a:prstGeom prst="rect">
             <a:avLst/>
@@ -20405,7 +20231,7 @@
         <p:spPr>
           <a:xfrm>
             <a:off x="768240" y="4343400"/>
-            <a:ext cx="10650960" cy="1095480"/>
+            <a:ext cx="10650600" cy="1095120"/>
           </a:xfrm>
           <a:prstGeom prst="roundRect">
             <a:avLst>
@@ -20448,7 +20274,7 @@
         <p:spPr>
           <a:xfrm>
             <a:off x="768240" y="4343400"/>
-            <a:ext cx="48960" cy="1095480"/>
+            <a:ext cx="48600" cy="1095120"/>
           </a:xfrm>
           <a:prstGeom prst="rect">
             <a:avLst/>
@@ -20489,7 +20315,7 @@
         <p:spPr>
           <a:xfrm>
             <a:off x="1024200" y="4590360"/>
-            <a:ext cx="10193760" cy="638280"/>
+            <a:ext cx="10193400" cy="638280"/>
           </a:xfrm>
           <a:prstGeom prst="rect">
             <a:avLst/>
@@ -20609,7 +20435,7 @@
         <p:spPr>
           <a:xfrm>
             <a:off x="768240" y="420480"/>
-            <a:ext cx="10605240" cy="441360"/>
+            <a:ext cx="10604880" cy="441360"/>
           </a:xfrm>
           <a:prstGeom prst="rect">
             <a:avLst/>
@@ -20661,7 +20487,7 @@
         <p:spPr>
           <a:xfrm>
             <a:off x="768240" y="1170360"/>
-            <a:ext cx="1369800" cy="42480"/>
+            <a:ext cx="1369440" cy="42120"/>
           </a:xfrm>
           <a:prstGeom prst="rect">
             <a:avLst/>
@@ -20702,7 +20528,7 @@
         <p:spPr>
           <a:xfrm>
             <a:off x="768240" y="1298520"/>
-            <a:ext cx="10605240" cy="227880"/>
+            <a:ext cx="10604880" cy="227880"/>
           </a:xfrm>
           <a:prstGeom prst="rect">
             <a:avLst/>
@@ -20754,7 +20580,7 @@
         <p:spPr>
           <a:xfrm>
             <a:off x="0" y="6437520"/>
-            <a:ext cx="12189960" cy="13320"/>
+            <a:ext cx="12189600" cy="12960"/>
           </a:xfrm>
           <a:prstGeom prst="rect">
             <a:avLst/>
@@ -20795,7 +20621,7 @@
         <p:spPr>
           <a:xfrm>
             <a:off x="768240" y="6473880"/>
-            <a:ext cx="8227800" cy="136800"/>
+            <a:ext cx="8227440" cy="136800"/>
           </a:xfrm>
           <a:prstGeom prst="rect">
             <a:avLst/>
@@ -20847,7 +20673,7 @@
         <p:spPr>
           <a:xfrm>
             <a:off x="10607040" y="6473880"/>
-            <a:ext cx="821160" cy="136800"/>
+            <a:ext cx="820800" cy="136800"/>
           </a:xfrm>
           <a:prstGeom prst="rect">
             <a:avLst/>
@@ -20899,7 +20725,7 @@
         <p:spPr>
           <a:xfrm>
             <a:off x="768240" y="1828800"/>
-            <a:ext cx="5850360" cy="2028240"/>
+            <a:ext cx="5850000" cy="2027880"/>
           </a:xfrm>
           <a:prstGeom prst="roundRect">
             <a:avLst>
@@ -21211,7 +21037,7 @@
         <p:spPr>
           <a:xfrm>
             <a:off x="6446520" y="1783080"/>
-            <a:ext cx="4935960" cy="197640"/>
+            <a:ext cx="4935600" cy="197640"/>
           </a:xfrm>
           <a:prstGeom prst="rect">
             <a:avLst/>
@@ -21263,7 +21089,7 @@
         <p:spPr>
           <a:xfrm>
             <a:off x="6446520" y="2194560"/>
-            <a:ext cx="4935960" cy="1328760"/>
+            <a:ext cx="4935600" cy="1328400"/>
           </a:xfrm>
           <a:prstGeom prst="roundRect">
             <a:avLst>
@@ -21462,7 +21288,7 @@
         <p:spPr>
           <a:xfrm>
             <a:off x="768240" y="4343400"/>
-            <a:ext cx="10650960" cy="1095480"/>
+            <a:ext cx="10650600" cy="1095120"/>
           </a:xfrm>
           <a:prstGeom prst="roundRect">
             <a:avLst>
@@ -21505,7 +21331,7 @@
         <p:spPr>
           <a:xfrm>
             <a:off x="768240" y="4343400"/>
-            <a:ext cx="48960" cy="1095480"/>
+            <a:ext cx="48600" cy="1095120"/>
           </a:xfrm>
           <a:prstGeom prst="rect">
             <a:avLst/>
@@ -21546,7 +21372,7 @@
         <p:spPr>
           <a:xfrm>
             <a:off x="1024200" y="4590360"/>
-            <a:ext cx="10193760" cy="638280"/>
+            <a:ext cx="10193400" cy="638280"/>
           </a:xfrm>
           <a:prstGeom prst="rect">
             <a:avLst/>
@@ -21666,7 +21492,7 @@
         <p:spPr>
           <a:xfrm>
             <a:off x="768240" y="420480"/>
-            <a:ext cx="10605240" cy="441360"/>
+            <a:ext cx="10604880" cy="441360"/>
           </a:xfrm>
           <a:prstGeom prst="rect">
             <a:avLst/>
@@ -21718,7 +21544,7 @@
         <p:spPr>
           <a:xfrm>
             <a:off x="768240" y="1170360"/>
-            <a:ext cx="1369800" cy="42480"/>
+            <a:ext cx="1369440" cy="42120"/>
           </a:xfrm>
           <a:prstGeom prst="rect">
             <a:avLst/>
@@ -21759,7 +21585,7 @@
         <p:spPr>
           <a:xfrm>
             <a:off x="768240" y="1298520"/>
-            <a:ext cx="10605240" cy="227880"/>
+            <a:ext cx="10604880" cy="227880"/>
           </a:xfrm>
           <a:prstGeom prst="rect">
             <a:avLst/>
@@ -21811,7 +21637,7 @@
         <p:spPr>
           <a:xfrm>
             <a:off x="0" y="6437520"/>
-            <a:ext cx="12189960" cy="13320"/>
+            <a:ext cx="12189600" cy="12960"/>
           </a:xfrm>
           <a:prstGeom prst="rect">
             <a:avLst/>
@@ -21852,7 +21678,7 @@
         <p:spPr>
           <a:xfrm>
             <a:off x="768240" y="6473880"/>
-            <a:ext cx="8227800" cy="136800"/>
+            <a:ext cx="8227440" cy="136800"/>
           </a:xfrm>
           <a:prstGeom prst="rect">
             <a:avLst/>
@@ -21904,7 +21730,7 @@
         <p:spPr>
           <a:xfrm>
             <a:off x="10607040" y="6473880"/>
-            <a:ext cx="821160" cy="136800"/>
+            <a:ext cx="820800" cy="136800"/>
           </a:xfrm>
           <a:prstGeom prst="rect">
             <a:avLst/>
@@ -21956,7 +21782,7 @@
         <p:spPr>
           <a:xfrm>
             <a:off x="768240" y="1828800"/>
-            <a:ext cx="5393160" cy="212760"/>
+            <a:ext cx="5392800" cy="212760"/>
           </a:xfrm>
           <a:prstGeom prst="rect">
             <a:avLst/>
@@ -22008,7 +21834,7 @@
         <p:spPr>
           <a:xfrm>
             <a:off x="768240" y="2240280"/>
-            <a:ext cx="5393160" cy="473760"/>
+            <a:ext cx="5392800" cy="473400"/>
           </a:xfrm>
           <a:prstGeom prst="roundRect">
             <a:avLst>
@@ -22051,7 +21877,7 @@
         <p:spPr>
           <a:xfrm>
             <a:off x="768240" y="2240280"/>
-            <a:ext cx="48960" cy="473760"/>
+            <a:ext cx="48600" cy="473400"/>
           </a:xfrm>
           <a:prstGeom prst="rect">
             <a:avLst/>
@@ -22092,7 +21918,7 @@
         <p:spPr>
           <a:xfrm>
             <a:off x="996840" y="2383200"/>
-            <a:ext cx="1461240" cy="197280"/>
+            <a:ext cx="1460880" cy="197280"/>
           </a:xfrm>
           <a:prstGeom prst="rect">
             <a:avLst/>
@@ -22144,7 +21970,7 @@
         <p:spPr>
           <a:xfrm>
             <a:off x="2368440" y="2389680"/>
-            <a:ext cx="3701520" cy="174600"/>
+            <a:ext cx="3701160" cy="174600"/>
           </a:xfrm>
           <a:prstGeom prst="rect">
             <a:avLst/>
@@ -22196,7 +22022,7 @@
         <p:spPr>
           <a:xfrm>
             <a:off x="768240" y="2807280"/>
-            <a:ext cx="5393160" cy="473760"/>
+            <a:ext cx="5392800" cy="473400"/>
           </a:xfrm>
           <a:prstGeom prst="roundRect">
             <a:avLst>
@@ -22239,7 +22065,7 @@
         <p:spPr>
           <a:xfrm>
             <a:off x="768240" y="2807280"/>
-            <a:ext cx="48960" cy="473760"/>
+            <a:ext cx="48600" cy="473400"/>
           </a:xfrm>
           <a:prstGeom prst="rect">
             <a:avLst/>
@@ -22280,7 +22106,7 @@
         <p:spPr>
           <a:xfrm>
             <a:off x="996840" y="2949840"/>
-            <a:ext cx="1461240" cy="197280"/>
+            <a:ext cx="1460880" cy="197280"/>
           </a:xfrm>
           <a:prstGeom prst="rect">
             <a:avLst/>
@@ -22332,7 +22158,7 @@
         <p:spPr>
           <a:xfrm>
             <a:off x="2368440" y="2956680"/>
-            <a:ext cx="3701520" cy="174600"/>
+            <a:ext cx="3701160" cy="174600"/>
           </a:xfrm>
           <a:prstGeom prst="rect">
             <a:avLst/>
@@ -22384,7 +22210,7 @@
         <p:spPr>
           <a:xfrm>
             <a:off x="768240" y="3374280"/>
-            <a:ext cx="5393160" cy="473760"/>
+            <a:ext cx="5392800" cy="473400"/>
           </a:xfrm>
           <a:prstGeom prst="roundRect">
             <a:avLst>
@@ -22427,7 +22253,7 @@
         <p:spPr>
           <a:xfrm>
             <a:off x="768240" y="3374280"/>
-            <a:ext cx="48960" cy="473760"/>
+            <a:ext cx="48600" cy="473400"/>
           </a:xfrm>
           <a:prstGeom prst="rect">
             <a:avLst/>
@@ -22468,7 +22294,7 @@
         <p:spPr>
           <a:xfrm>
             <a:off x="996840" y="3516840"/>
-            <a:ext cx="1461240" cy="197280"/>
+            <a:ext cx="1460880" cy="197280"/>
           </a:xfrm>
           <a:prstGeom prst="rect">
             <a:avLst/>
@@ -22520,7 +22346,7 @@
         <p:spPr>
           <a:xfrm>
             <a:off x="2368440" y="3523680"/>
-            <a:ext cx="3701520" cy="174600"/>
+            <a:ext cx="3701160" cy="174600"/>
           </a:xfrm>
           <a:prstGeom prst="rect">
             <a:avLst/>
@@ -23442,7 +23268,7 @@
         <p:spPr>
           <a:xfrm>
             <a:off x="768240" y="4434840"/>
-            <a:ext cx="5393160" cy="1004040"/>
+            <a:ext cx="5392800" cy="1003680"/>
           </a:xfrm>
           <a:prstGeom prst="roundRect">
             <a:avLst>
@@ -23485,7 +23311,7 @@
         <p:spPr>
           <a:xfrm>
             <a:off x="768240" y="4434840"/>
-            <a:ext cx="48960" cy="1004040"/>
+            <a:ext cx="48600" cy="1003680"/>
           </a:xfrm>
           <a:prstGeom prst="rect">
             <a:avLst/>
@@ -23526,7 +23352,7 @@
         <p:spPr>
           <a:xfrm>
             <a:off x="1024200" y="4636080"/>
-            <a:ext cx="4935960" cy="638280"/>
+            <a:ext cx="4935600" cy="638280"/>
           </a:xfrm>
           <a:prstGeom prst="rect">
             <a:avLst/>
@@ -23646,7 +23472,7 @@
         <p:spPr>
           <a:xfrm>
             <a:off x="768240" y="2240280"/>
-            <a:ext cx="1827000" cy="974880"/>
+            <a:ext cx="1826640" cy="974880"/>
           </a:xfrm>
           <a:prstGeom prst="rect">
             <a:avLst/>
@@ -23698,7 +23524,7 @@
         <p:spPr>
           <a:xfrm>
             <a:off x="768240" y="3246120"/>
-            <a:ext cx="1827000" cy="48960"/>
+            <a:ext cx="1826640" cy="48600"/>
           </a:xfrm>
           <a:prstGeom prst="rect">
             <a:avLst/>
@@ -23739,7 +23565,7 @@
         <p:spPr>
           <a:xfrm>
             <a:off x="768240" y="3429000"/>
-            <a:ext cx="10422360" cy="639360"/>
+            <a:ext cx="10422000" cy="639360"/>
           </a:xfrm>
           <a:prstGeom prst="rect">
             <a:avLst/>
@@ -23791,7 +23617,7 @@
         <p:spPr>
           <a:xfrm>
             <a:off x="768240" y="4754880"/>
-            <a:ext cx="7313400" cy="243000"/>
+            <a:ext cx="7313040" cy="243000"/>
           </a:xfrm>
           <a:prstGeom prst="rect">
             <a:avLst/>
@@ -23880,7 +23706,7 @@
         <p:spPr>
           <a:xfrm>
             <a:off x="768240" y="420480"/>
-            <a:ext cx="10605240" cy="441360"/>
+            <a:ext cx="10604880" cy="441360"/>
           </a:xfrm>
           <a:prstGeom prst="rect">
             <a:avLst/>
@@ -23932,7 +23758,7 @@
         <p:spPr>
           <a:xfrm>
             <a:off x="768240" y="1170360"/>
-            <a:ext cx="1369800" cy="42480"/>
+            <a:ext cx="1369440" cy="42120"/>
           </a:xfrm>
           <a:prstGeom prst="rect">
             <a:avLst/>
@@ -23973,7 +23799,7 @@
         <p:spPr>
           <a:xfrm>
             <a:off x="0" y="6437520"/>
-            <a:ext cx="12189960" cy="13320"/>
+            <a:ext cx="12189600" cy="12960"/>
           </a:xfrm>
           <a:prstGeom prst="rect">
             <a:avLst/>
@@ -24014,7 +23840,7 @@
         <p:spPr>
           <a:xfrm>
             <a:off x="768240" y="6473880"/>
-            <a:ext cx="8227800" cy="136800"/>
+            <a:ext cx="8227440" cy="136800"/>
           </a:xfrm>
           <a:prstGeom prst="rect">
             <a:avLst/>
@@ -24066,7 +23892,7 @@
         <p:spPr>
           <a:xfrm>
             <a:off x="10607040" y="6473880"/>
-            <a:ext cx="821160" cy="136800"/>
+            <a:ext cx="820800" cy="136800"/>
           </a:xfrm>
           <a:prstGeom prst="rect">
             <a:avLst/>
@@ -24118,7 +23944,7 @@
         <p:spPr>
           <a:xfrm>
             <a:off x="768240" y="1417320"/>
-            <a:ext cx="5576040" cy="2321640"/>
+            <a:ext cx="5575680" cy="2321640"/>
           </a:xfrm>
           <a:prstGeom prst="rect">
             <a:avLst/>
@@ -24387,7 +24213,7 @@
         <p:spPr>
           <a:xfrm>
             <a:off x="6583680" y="1371600"/>
-            <a:ext cx="4844520" cy="212760"/>
+            <a:ext cx="4844160" cy="212760"/>
           </a:xfrm>
           <a:prstGeom prst="rect">
             <a:avLst/>
@@ -24439,7 +24265,7 @@
         <p:spPr>
           <a:xfrm>
             <a:off x="6583680" y="1783080"/>
-            <a:ext cx="4844520" cy="1218960"/>
+            <a:ext cx="4844160" cy="1218960"/>
           </a:xfrm>
           <a:prstGeom prst="rect">
             <a:avLst/>
@@ -24606,7 +24432,7 @@
         <p:spPr>
           <a:xfrm>
             <a:off x="6583680" y="4069080"/>
-            <a:ext cx="4844520" cy="866880"/>
+            <a:ext cx="4844160" cy="866520"/>
           </a:xfrm>
           <a:prstGeom prst="roundRect">
             <a:avLst>
@@ -24649,7 +24475,7 @@
         <p:spPr>
           <a:xfrm>
             <a:off x="6583680" y="4069080"/>
-            <a:ext cx="48960" cy="866880"/>
+            <a:ext cx="48600" cy="866520"/>
           </a:xfrm>
           <a:prstGeom prst="rect">
             <a:avLst/>
@@ -24690,7 +24516,7 @@
         <p:spPr>
           <a:xfrm>
             <a:off x="6839640" y="4305600"/>
-            <a:ext cx="4387320" cy="430560"/>
+            <a:ext cx="4386960" cy="430560"/>
           </a:xfrm>
           <a:prstGeom prst="rect">
             <a:avLst/>
@@ -24810,7 +24636,7 @@
         <p:spPr>
           <a:xfrm>
             <a:off x="768240" y="420480"/>
-            <a:ext cx="10605240" cy="441360"/>
+            <a:ext cx="10604880" cy="441360"/>
           </a:xfrm>
           <a:prstGeom prst="rect">
             <a:avLst/>
@@ -24862,7 +24688,7 @@
         <p:spPr>
           <a:xfrm>
             <a:off x="768240" y="1170360"/>
-            <a:ext cx="1369800" cy="42480"/>
+            <a:ext cx="1369440" cy="42120"/>
           </a:xfrm>
           <a:prstGeom prst="rect">
             <a:avLst/>
@@ -24903,7 +24729,7 @@
         <p:spPr>
           <a:xfrm>
             <a:off x="0" y="6437520"/>
-            <a:ext cx="12189960" cy="13320"/>
+            <a:ext cx="12189600" cy="12960"/>
           </a:xfrm>
           <a:prstGeom prst="rect">
             <a:avLst/>
@@ -24944,7 +24770,7 @@
         <p:spPr>
           <a:xfrm>
             <a:off x="768240" y="6473880"/>
-            <a:ext cx="8227800" cy="136800"/>
+            <a:ext cx="8227440" cy="136800"/>
           </a:xfrm>
           <a:prstGeom prst="rect">
             <a:avLst/>
@@ -24996,7 +24822,7 @@
         <p:spPr>
           <a:xfrm>
             <a:off x="10607040" y="6473880"/>
-            <a:ext cx="821160" cy="136800"/>
+            <a:ext cx="820800" cy="136800"/>
           </a:xfrm>
           <a:prstGeom prst="rect">
             <a:avLst/>
@@ -25048,7 +24874,7 @@
         <p:spPr>
           <a:xfrm>
             <a:off x="768240" y="1417320"/>
-            <a:ext cx="3427200" cy="3655800"/>
+            <a:ext cx="3426840" cy="3655440"/>
           </a:xfrm>
           <a:prstGeom prst="roundRect">
             <a:avLst>
@@ -25091,7 +24917,7 @@
         <p:spPr>
           <a:xfrm>
             <a:off x="768240" y="1417320"/>
-            <a:ext cx="3427200" cy="501120"/>
+            <a:ext cx="3426840" cy="500760"/>
           </a:xfrm>
           <a:prstGeom prst="roundRect">
             <a:avLst>
@@ -25134,7 +24960,7 @@
         <p:spPr>
           <a:xfrm>
             <a:off x="768240" y="1490400"/>
-            <a:ext cx="3427200" cy="227880"/>
+            <a:ext cx="3426840" cy="227880"/>
           </a:xfrm>
           <a:prstGeom prst="rect">
             <a:avLst/>
@@ -25186,7 +25012,7 @@
         <p:spPr>
           <a:xfrm>
             <a:off x="996840" y="2103120"/>
-            <a:ext cx="3015720" cy="1232280"/>
+            <a:ext cx="3015360" cy="1232280"/>
           </a:xfrm>
           <a:prstGeom prst="rect">
             <a:avLst/>
@@ -25353,7 +25179,7 @@
         <p:spPr>
           <a:xfrm>
             <a:off x="4380120" y="1417320"/>
-            <a:ext cx="3427200" cy="3655800"/>
+            <a:ext cx="3426840" cy="3655440"/>
           </a:xfrm>
           <a:prstGeom prst="roundRect">
             <a:avLst>
@@ -25396,7 +25222,7 @@
         <p:spPr>
           <a:xfrm>
             <a:off x="4380120" y="1417320"/>
-            <a:ext cx="3427200" cy="501120"/>
+            <a:ext cx="3426840" cy="500760"/>
           </a:xfrm>
           <a:prstGeom prst="roundRect">
             <a:avLst>
@@ -25439,7 +25265,7 @@
         <p:spPr>
           <a:xfrm>
             <a:off x="4380120" y="1490400"/>
-            <a:ext cx="3427200" cy="227880"/>
+            <a:ext cx="3426840" cy="227880"/>
           </a:xfrm>
           <a:prstGeom prst="rect">
             <a:avLst/>
@@ -25491,7 +25317,7 @@
         <p:spPr>
           <a:xfrm>
             <a:off x="4608720" y="2103120"/>
-            <a:ext cx="3015720" cy="1232280"/>
+            <a:ext cx="3015360" cy="1232280"/>
           </a:xfrm>
           <a:prstGeom prst="rect">
             <a:avLst/>
@@ -25658,7 +25484,7 @@
         <p:spPr>
           <a:xfrm>
             <a:off x="7992000" y="1417320"/>
-            <a:ext cx="3427200" cy="3655800"/>
+            <a:ext cx="3426840" cy="3655440"/>
           </a:xfrm>
           <a:prstGeom prst="roundRect">
             <a:avLst>
@@ -25701,7 +25527,7 @@
         <p:spPr>
           <a:xfrm>
             <a:off x="7992000" y="1417320"/>
-            <a:ext cx="3427200" cy="501120"/>
+            <a:ext cx="3426840" cy="500760"/>
           </a:xfrm>
           <a:prstGeom prst="roundRect">
             <a:avLst>
@@ -25744,7 +25570,7 @@
         <p:spPr>
           <a:xfrm>
             <a:off x="7992000" y="1490400"/>
-            <a:ext cx="3427200" cy="227880"/>
+            <a:ext cx="3426840" cy="227880"/>
           </a:xfrm>
           <a:prstGeom prst="rect">
             <a:avLst/>
@@ -25796,7 +25622,7 @@
         <p:spPr>
           <a:xfrm>
             <a:off x="8220600" y="2103120"/>
-            <a:ext cx="3015720" cy="1232280"/>
+            <a:ext cx="3015360" cy="1232280"/>
           </a:xfrm>
           <a:prstGeom prst="rect">
             <a:avLst/>
@@ -25963,7 +25789,7 @@
         <p:spPr>
           <a:xfrm>
             <a:off x="768240" y="5212080"/>
-            <a:ext cx="10650960" cy="501120"/>
+            <a:ext cx="10650600" cy="500760"/>
           </a:xfrm>
           <a:prstGeom prst="roundRect">
             <a:avLst>
@@ -26006,7 +25832,7 @@
         <p:spPr>
           <a:xfrm>
             <a:off x="768240" y="5212080"/>
-            <a:ext cx="48960" cy="501120"/>
+            <a:ext cx="48600" cy="500760"/>
           </a:xfrm>
           <a:prstGeom prst="rect">
             <a:avLst/>
@@ -26047,7 +25873,7 @@
         <p:spPr>
           <a:xfrm>
             <a:off x="1024200" y="5377320"/>
-            <a:ext cx="10193760" cy="207000"/>
+            <a:ext cx="10193400" cy="207000"/>
           </a:xfrm>
           <a:prstGeom prst="rect">
             <a:avLst/>
@@ -26136,7 +25962,7 @@
         <p:spPr>
           <a:xfrm>
             <a:off x="0" y="2606040"/>
-            <a:ext cx="1827000" cy="61560"/>
+            <a:ext cx="1826640" cy="61200"/>
           </a:xfrm>
           <a:prstGeom prst="rect">
             <a:avLst/>
@@ -26177,7 +26003,7 @@
         <p:spPr>
           <a:xfrm>
             <a:off x="768240" y="2788920"/>
-            <a:ext cx="10422360" cy="822600"/>
+            <a:ext cx="10422000" cy="822600"/>
           </a:xfrm>
           <a:prstGeom prst="rect">
             <a:avLst/>
@@ -26229,7 +26055,7 @@
         <p:spPr>
           <a:xfrm>
             <a:off x="768240" y="3977640"/>
-            <a:ext cx="10056600" cy="304560"/>
+            <a:ext cx="10056240" cy="304560"/>
           </a:xfrm>
           <a:prstGeom prst="rect">
             <a:avLst/>
@@ -26281,7 +26107,7 @@
         <p:spPr>
           <a:xfrm>
             <a:off x="768240" y="4754880"/>
-            <a:ext cx="10056600" cy="273960"/>
+            <a:ext cx="10056240" cy="273960"/>
           </a:xfrm>
           <a:prstGeom prst="rect">
             <a:avLst/>
@@ -26333,7 +26159,7 @@
         <p:spPr>
           <a:xfrm>
             <a:off x="768240" y="5852160"/>
-            <a:ext cx="7313400" cy="197640"/>
+            <a:ext cx="7313040" cy="197640"/>
           </a:xfrm>
           <a:prstGeom prst="rect">
             <a:avLst/>
@@ -26389,7 +26215,7 @@
         <p:spPr>
           <a:xfrm>
             <a:off x="11016000" y="6170400"/>
-            <a:ext cx="1061640" cy="596880"/>
+            <a:ext cx="1061280" cy="596520"/>
           </a:xfrm>
           <a:prstGeom prst="rect">
             <a:avLst/>
@@ -26445,7 +26271,7 @@
         <p:spPr>
           <a:xfrm>
             <a:off x="768240" y="420480"/>
-            <a:ext cx="10605240" cy="441360"/>
+            <a:ext cx="10604880" cy="441360"/>
           </a:xfrm>
           <a:prstGeom prst="rect">
             <a:avLst/>
@@ -26497,7 +26323,7 @@
         <p:spPr>
           <a:xfrm>
             <a:off x="768240" y="1170360"/>
-            <a:ext cx="1369800" cy="42480"/>
+            <a:ext cx="1369440" cy="42120"/>
           </a:xfrm>
           <a:prstGeom prst="rect">
             <a:avLst/>
@@ -26538,7 +26364,7 @@
         <p:spPr>
           <a:xfrm>
             <a:off x="0" y="6437520"/>
-            <a:ext cx="12189960" cy="13320"/>
+            <a:ext cx="12189600" cy="12960"/>
           </a:xfrm>
           <a:prstGeom prst="rect">
             <a:avLst/>
@@ -26579,7 +26405,7 @@
         <p:spPr>
           <a:xfrm>
             <a:off x="768240" y="6473880"/>
-            <a:ext cx="8227800" cy="136800"/>
+            <a:ext cx="8227440" cy="136800"/>
           </a:xfrm>
           <a:prstGeom prst="rect">
             <a:avLst/>
@@ -26631,7 +26457,7 @@
         <p:spPr>
           <a:xfrm>
             <a:off x="10607040" y="6473880"/>
-            <a:ext cx="821160" cy="136800"/>
+            <a:ext cx="820800" cy="136800"/>
           </a:xfrm>
           <a:prstGeom prst="rect">
             <a:avLst/>
@@ -26683,7 +26509,7 @@
         <p:spPr>
           <a:xfrm>
             <a:off x="768240" y="1417320"/>
-            <a:ext cx="10605240" cy="621720"/>
+            <a:ext cx="10604880" cy="621720"/>
           </a:xfrm>
           <a:prstGeom prst="rect">
             <a:avLst/>
@@ -26735,7 +26561,7 @@
         <p:spPr>
           <a:xfrm>
             <a:off x="768240" y="2423160"/>
-            <a:ext cx="5484600" cy="1958760"/>
+            <a:ext cx="5484240" cy="1958760"/>
           </a:xfrm>
           <a:prstGeom prst="rect">
             <a:avLst/>
@@ -26936,7 +26762,7 @@
         <p:spPr>
           <a:xfrm>
             <a:off x="6583680" y="2423160"/>
-            <a:ext cx="4844520" cy="2375640"/>
+            <a:ext cx="4844160" cy="2375280"/>
           </a:xfrm>
           <a:prstGeom prst="roundRect">
             <a:avLst>
@@ -26979,7 +26805,7 @@
         <p:spPr>
           <a:xfrm>
             <a:off x="6583680" y="2423160"/>
-            <a:ext cx="48960" cy="2375640"/>
+            <a:ext cx="48600" cy="2375280"/>
           </a:xfrm>
           <a:prstGeom prst="rect">
             <a:avLst/>
@@ -27020,7 +26846,7 @@
         <p:spPr>
           <a:xfrm>
             <a:off x="6839640" y="3206160"/>
-            <a:ext cx="4387320" cy="846000"/>
+            <a:ext cx="4386960" cy="846000"/>
           </a:xfrm>
           <a:prstGeom prst="rect">
             <a:avLst/>
@@ -27103,7 +26929,7 @@
         <p:spPr>
           <a:xfrm>
             <a:off x="6583680" y="4983480"/>
-            <a:ext cx="4844520" cy="197640"/>
+            <a:ext cx="4844160" cy="197640"/>
           </a:xfrm>
           <a:prstGeom prst="rect">
             <a:avLst/>
@@ -27192,7 +27018,7 @@
         <p:spPr>
           <a:xfrm>
             <a:off x="768240" y="2240280"/>
-            <a:ext cx="1827000" cy="974880"/>
+            <a:ext cx="1826640" cy="974880"/>
           </a:xfrm>
           <a:prstGeom prst="rect">
             <a:avLst/>
@@ -27244,7 +27070,7 @@
         <p:spPr>
           <a:xfrm>
             <a:off x="768240" y="3246120"/>
-            <a:ext cx="1827000" cy="48960"/>
+            <a:ext cx="1826640" cy="48600"/>
           </a:xfrm>
           <a:prstGeom prst="rect">
             <a:avLst/>
@@ -27285,7 +27111,7 @@
         <p:spPr>
           <a:xfrm>
             <a:off x="768240" y="3429000"/>
-            <a:ext cx="10422360" cy="639360"/>
+            <a:ext cx="10422000" cy="639360"/>
           </a:xfrm>
           <a:prstGeom prst="rect">
             <a:avLst/>
@@ -27337,7 +27163,7 @@
         <p:spPr>
           <a:xfrm>
             <a:off x="768240" y="4754880"/>
-            <a:ext cx="7313400" cy="243000"/>
+            <a:ext cx="7313040" cy="243000"/>
           </a:xfrm>
           <a:prstGeom prst="rect">
             <a:avLst/>
@@ -27426,7 +27252,7 @@
         <p:spPr>
           <a:xfrm>
             <a:off x="768240" y="420480"/>
-            <a:ext cx="10605240" cy="441360"/>
+            <a:ext cx="10604880" cy="441360"/>
           </a:xfrm>
           <a:prstGeom prst="rect">
             <a:avLst/>
@@ -27461,7 +27287,7 @@
                 <a:latin typeface="Play"/>
                 <a:ea typeface="DejaVu Sans"/>
               </a:rPr>
-              <a:t>Labelowanie danych z wykorzystaniem LLM</a:t>
+              <a:t>Klasyfikacja vs generowanie</a:t>
             </a:r>
             <a:endParaRPr b="0" lang="pl-PL" sz="2900" spc="-1" strike="noStrike">
               <a:latin typeface="Arial"/>
@@ -27478,7 +27304,7 @@
         <p:spPr>
           <a:xfrm>
             <a:off x="768240" y="1170360"/>
-            <a:ext cx="1369800" cy="42480"/>
+            <a:ext cx="1369440" cy="42120"/>
           </a:xfrm>
           <a:prstGeom prst="rect">
             <a:avLst/>
@@ -27512,66 +27338,14 @@
       </p:sp>
       <p:sp>
         <p:nvSpPr>
-          <p:cNvPr id="99" name="TextBox 3"/>
-          <p:cNvSpPr/>
-          <p:nvPr/>
-        </p:nvSpPr>
-        <p:spPr>
-          <a:xfrm>
-            <a:off x="768240" y="1298520"/>
-            <a:ext cx="10605240" cy="227880"/>
-          </a:xfrm>
-          <a:prstGeom prst="rect">
-            <a:avLst/>
-          </a:prstGeom>
-          <a:noFill/>
-          <a:ln w="0">
-            <a:noFill/>
-          </a:ln>
-        </p:spPr>
-        <p:style>
-          <a:lnRef idx="0"/>
-          <a:fillRef idx="0"/>
-          <a:effectRef idx="0"/>
-          <a:fontRef idx="minor"/>
-        </p:style>
-        <p:txBody>
-          <a:bodyPr lIns="0" rIns="0" tIns="0" bIns="0" anchor="t">
-            <a:spAutoFit/>
-          </a:bodyPr>
-          <a:p>
-            <a:pPr>
-              <a:lnSpc>
-                <a:spcPct val="100000"/>
-              </a:lnSpc>
-              <a:buNone/>
-            </a:pPr>
-            <a:r>
-              <a:rPr b="0" i="1" lang="en-US" sz="1500" spc="-1" strike="noStrike">
-                <a:solidFill>
-                  <a:srgbClr val="6b6478"/>
-                </a:solidFill>
-                <a:latin typeface="Arial"/>
-                <a:ea typeface="DejaVu Sans"/>
-              </a:rPr>
-              <a:t>Przypisywanie etykiet przykładom — klasyczne (człowiek) vs wspierane LLM</a:t>
-            </a:r>
-            <a:endParaRPr b="0" lang="pl-PL" sz="1500" spc="-1" strike="noStrike">
-              <a:latin typeface="Arial"/>
-            </a:endParaRPr>
-          </a:p>
-        </p:txBody>
-      </p:sp>
-      <p:sp>
-        <p:nvSpPr>
-          <p:cNvPr id="100" name="Rectangle 4"/>
+          <p:cNvPr id="99" name="Rectangle 3"/>
           <p:cNvSpPr/>
           <p:nvPr/>
         </p:nvSpPr>
         <p:spPr>
           <a:xfrm>
             <a:off x="0" y="6437520"/>
-            <a:ext cx="12189960" cy="13320"/>
+            <a:ext cx="12189600" cy="12960"/>
           </a:xfrm>
           <a:prstGeom prst="rect">
             <a:avLst/>
@@ -27605,14 +27379,14 @@
       </p:sp>
       <p:sp>
         <p:nvSpPr>
-          <p:cNvPr id="101" name="TextBox 5"/>
+          <p:cNvPr id="100" name="TextBox 4"/>
           <p:cNvSpPr/>
           <p:nvPr/>
         </p:nvSpPr>
         <p:spPr>
           <a:xfrm>
             <a:off x="768240" y="6473880"/>
-            <a:ext cx="8227800" cy="136800"/>
+            <a:ext cx="8227440" cy="136800"/>
           </a:xfrm>
           <a:prstGeom prst="rect">
             <a:avLst/>
@@ -27647,7 +27421,7 @@
                 <a:latin typeface="Arial"/>
                 <a:ea typeface="DejaVu Sans"/>
               </a:rPr>
-              <a:t>DSS 2026 AI Edition  ·  Teoria · Labelowanie</a:t>
+              <a:t>DSS 2026 AI Edition  ·  Teoria · Modele</a:t>
             </a:r>
             <a:endParaRPr b="0" lang="pl-PL" sz="900" spc="-1" strike="noStrike">
               <a:latin typeface="Arial"/>
@@ -27657,14 +27431,14 @@
       </p:sp>
       <p:sp>
         <p:nvSpPr>
-          <p:cNvPr id="102" name="TextBox 6"/>
+          <p:cNvPr id="101" name="TextBox 5"/>
           <p:cNvSpPr/>
           <p:nvPr/>
         </p:nvSpPr>
         <p:spPr>
           <a:xfrm>
             <a:off x="10607040" y="6473880"/>
-            <a:ext cx="821160" cy="136800"/>
+            <a:ext cx="820800" cy="136800"/>
           </a:xfrm>
           <a:prstGeom prst="rect">
             <a:avLst/>
@@ -27699,7 +27473,7 @@
                 <a:latin typeface="Arial"/>
                 <a:ea typeface="DejaVu Sans"/>
               </a:rPr>
-              <a:t>6</a:t>
+              <a:t>7</a:t>
             </a:r>
             <a:endParaRPr b="0" lang="pl-PL" sz="900" spc="-1" strike="noStrike">
               <a:latin typeface="Arial"/>
@@ -27709,267 +27483,14 @@
       </p:sp>
       <p:sp>
         <p:nvSpPr>
-          <p:cNvPr id="103" name="TextBox 7"/>
-          <p:cNvSpPr/>
-          <p:nvPr/>
-        </p:nvSpPr>
-        <p:spPr>
-          <a:xfrm>
-            <a:off x="768240" y="1828800"/>
-            <a:ext cx="5301720" cy="227880"/>
-          </a:xfrm>
-          <a:prstGeom prst="rect">
-            <a:avLst/>
-          </a:prstGeom>
-          <a:noFill/>
-          <a:ln w="0">
-            <a:noFill/>
-          </a:ln>
-        </p:spPr>
-        <p:style>
-          <a:lnRef idx="0"/>
-          <a:fillRef idx="0"/>
-          <a:effectRef idx="0"/>
-          <a:fontRef idx="minor"/>
-        </p:style>
-        <p:txBody>
-          <a:bodyPr lIns="0" rIns="0" tIns="0" bIns="0" anchor="t">
-            <a:spAutoFit/>
-          </a:bodyPr>
-          <a:p>
-            <a:pPr>
-              <a:lnSpc>
-                <a:spcPct val="100000"/>
-              </a:lnSpc>
-              <a:buNone/>
-            </a:pPr>
-            <a:r>
-              <a:rPr b="1" lang="en-US" sz="1500" spc="-1" strike="noStrike">
-                <a:solidFill>
-                  <a:srgbClr val="1b0532"/>
-                </a:solidFill>
-                <a:latin typeface="Arial"/>
-                <a:ea typeface="DejaVu Sans"/>
-              </a:rPr>
-              <a:t>Szczególnie przydatne, gdy:</a:t>
-            </a:r>
-            <a:endParaRPr b="0" lang="pl-PL" sz="1500" spc="-1" strike="noStrike">
-              <a:latin typeface="Arial"/>
-            </a:endParaRPr>
-          </a:p>
-        </p:txBody>
-      </p:sp>
-      <p:sp>
-        <p:nvSpPr>
-          <p:cNvPr id="104" name="TextBox 8"/>
-          <p:cNvSpPr/>
-          <p:nvPr/>
-        </p:nvSpPr>
-        <p:spPr>
-          <a:xfrm>
-            <a:off x="768240" y="2286000"/>
-            <a:ext cx="5393160" cy="1692720"/>
-          </a:xfrm>
-          <a:prstGeom prst="rect">
-            <a:avLst/>
-          </a:prstGeom>
-          <a:noFill/>
-          <a:ln w="0">
-            <a:noFill/>
-          </a:ln>
-        </p:spPr>
-        <p:style>
-          <a:lnRef idx="0"/>
-          <a:fillRef idx="0"/>
-          <a:effectRef idx="0"/>
-          <a:fontRef idx="minor"/>
-        </p:style>
-        <p:txBody>
-          <a:bodyPr lIns="90000" rIns="90000" tIns="45000" bIns="45000" anchor="t">
-            <a:spAutoFit/>
-          </a:bodyPr>
-          <a:p>
-            <a:pPr>
-              <a:lnSpc>
-                <a:spcPct val="105000"/>
-              </a:lnSpc>
-              <a:spcAft>
-                <a:spcPts val="799"/>
-              </a:spcAft>
-              <a:buNone/>
-            </a:pPr>
-            <a:r>
-              <a:rPr b="0" lang="en-US" sz="1500" spc="-1" strike="noStrike">
-                <a:solidFill>
-                  <a:srgbClr val="1b0532"/>
-                </a:solidFill>
-                <a:latin typeface="Arial"/>
-                <a:ea typeface="DejaVu Sans"/>
-              </a:rPr>
-              <a:t>▸  </a:t>
-            </a:r>
-            <a:r>
-              <a:rPr b="0" lang="en-US" sz="1500" spc="-1" strike="noStrike">
-                <a:solidFill>
-                  <a:srgbClr val="1b0532"/>
-                </a:solidFill>
-                <a:latin typeface="Arial"/>
-                <a:ea typeface="DejaVu Sans"/>
-              </a:rPr>
-              <a:t>mamy dużo nieoznaczonych danych</a:t>
-            </a:r>
-            <a:endParaRPr b="0" lang="pl-PL" sz="1500" spc="-1" strike="noStrike">
-              <a:latin typeface="Arial"/>
-            </a:endParaRPr>
-          </a:p>
-          <a:p>
-            <a:pPr>
-              <a:lnSpc>
-                <a:spcPct val="105000"/>
-              </a:lnSpc>
-              <a:spcAft>
-                <a:spcPts val="799"/>
-              </a:spcAft>
-              <a:buNone/>
-            </a:pPr>
-            <a:r>
-              <a:rPr b="0" lang="en-US" sz="1500" spc="-1" strike="noStrike">
-                <a:solidFill>
-                  <a:srgbClr val="1b0532"/>
-                </a:solidFill>
-                <a:latin typeface="Arial"/>
-                <a:ea typeface="DejaVu Sans"/>
-              </a:rPr>
-              <a:t>▸  </a:t>
-            </a:r>
-            <a:r>
-              <a:rPr b="0" lang="en-US" sz="1500" spc="-1" strike="noStrike">
-                <a:solidFill>
-                  <a:srgbClr val="1b0532"/>
-                </a:solidFill>
-                <a:latin typeface="Arial"/>
-                <a:ea typeface="DejaVu Sans"/>
-              </a:rPr>
-              <a:t>chcemy szybko pierwszy zbiór treningowy</a:t>
-            </a:r>
-            <a:endParaRPr b="0" lang="pl-PL" sz="1500" spc="-1" strike="noStrike">
-              <a:latin typeface="Arial"/>
-            </a:endParaRPr>
-          </a:p>
-          <a:p>
-            <a:pPr>
-              <a:lnSpc>
-                <a:spcPct val="105000"/>
-              </a:lnSpc>
-              <a:spcAft>
-                <a:spcPts val="799"/>
-              </a:spcAft>
-              <a:buNone/>
-            </a:pPr>
-            <a:r>
-              <a:rPr b="0" lang="en-US" sz="1500" spc="-1" strike="noStrike">
-                <a:solidFill>
-                  <a:srgbClr val="1b0532"/>
-                </a:solidFill>
-                <a:latin typeface="Arial"/>
-                <a:ea typeface="DejaVu Sans"/>
-              </a:rPr>
-              <a:t>▸  </a:t>
-            </a:r>
-            <a:r>
-              <a:rPr b="0" lang="en-US" sz="1500" spc="-1" strike="noStrike">
-                <a:solidFill>
-                  <a:srgbClr val="1b0532"/>
-                </a:solidFill>
-                <a:latin typeface="Arial"/>
-                <a:ea typeface="DejaVu Sans"/>
-              </a:rPr>
-              <a:t>potrzebne wstępne etykiety do eksperymentów</a:t>
-            </a:r>
-            <a:endParaRPr b="0" lang="pl-PL" sz="1500" spc="-1" strike="noStrike">
-              <a:latin typeface="Arial"/>
-            </a:endParaRPr>
-          </a:p>
-          <a:p>
-            <a:pPr>
-              <a:lnSpc>
-                <a:spcPct val="105000"/>
-              </a:lnSpc>
-              <a:spcAft>
-                <a:spcPts val="799"/>
-              </a:spcAft>
-              <a:buNone/>
-            </a:pPr>
-            <a:r>
-              <a:rPr b="0" lang="en-US" sz="1500" spc="-1" strike="noStrike">
-                <a:solidFill>
-                  <a:srgbClr val="1b0532"/>
-                </a:solidFill>
-                <a:latin typeface="Arial"/>
-                <a:ea typeface="DejaVu Sans"/>
-              </a:rPr>
-              <a:t>▸  </a:t>
-            </a:r>
-            <a:r>
-              <a:rPr b="0" lang="en-US" sz="1500" spc="-1" strike="noStrike">
-                <a:solidFill>
-                  <a:srgbClr val="1b0532"/>
-                </a:solidFill>
-                <a:latin typeface="Arial"/>
-                <a:ea typeface="DejaVu Sans"/>
-              </a:rPr>
-              <a:t>chcemy ograniczyć koszt ręcznej anotacji</a:t>
-            </a:r>
-            <a:endParaRPr b="0" lang="pl-PL" sz="1500" spc="-1" strike="noStrike">
-              <a:latin typeface="Arial"/>
-            </a:endParaRPr>
-          </a:p>
-          <a:p>
-            <a:pPr>
-              <a:lnSpc>
-                <a:spcPct val="105000"/>
-              </a:lnSpc>
-              <a:spcAft>
-                <a:spcPts val="799"/>
-              </a:spcAft>
-              <a:buNone/>
-            </a:pPr>
-            <a:r>
-              <a:rPr b="0" lang="en-US" sz="1500" spc="-1" strike="noStrike">
-                <a:solidFill>
-                  <a:srgbClr val="1b0532"/>
-                </a:solidFill>
-                <a:latin typeface="Arial"/>
-                <a:ea typeface="DejaVu Sans"/>
-              </a:rPr>
-              <a:t>▸  </a:t>
-            </a:r>
-            <a:r>
-              <a:rPr b="0" lang="en-US" sz="1500" spc="-1" strike="noStrike">
-                <a:solidFill>
-                  <a:srgbClr val="1b0532"/>
-                </a:solidFill>
-                <a:latin typeface="Arial"/>
-                <a:ea typeface="DejaVu Sans"/>
-              </a:rPr>
-              <a:t>klasy da się jasno zdefiniować w promptach</a:t>
-            </a:r>
-            <a:endParaRPr b="0" lang="pl-PL" sz="1500" spc="-1" strike="noStrike">
-              <a:latin typeface="Arial"/>
-            </a:endParaRPr>
-          </a:p>
-        </p:txBody>
-      </p:sp>
-      <p:sp>
-        <p:nvSpPr>
-          <p:cNvPr id="105" name="Rounded Rectangle 9"/>
-          <p:cNvSpPr/>
-          <p:nvPr/>
-        </p:nvSpPr>
-        <p:spPr>
-          <a:xfrm>
-            <a:off x="6400800" y="1828800"/>
-            <a:ext cx="5027400" cy="1552680"/>
+          <p:cNvPr id="102" name="Rounded Rectangle 6"/>
+          <p:cNvSpPr/>
+          <p:nvPr/>
+        </p:nvSpPr>
+        <p:spPr>
+          <a:xfrm>
+            <a:off x="768240" y="1417320"/>
+            <a:ext cx="5255640" cy="3564000"/>
           </a:xfrm>
           <a:prstGeom prst="roundRect">
             <a:avLst>
@@ -27977,10 +27498,13 @@
             </a:avLst>
           </a:prstGeom>
           <a:solidFill>
-            <a:srgbClr val="f2f1f6"/>
+            <a:srgbClr val="ffffff"/>
           </a:solidFill>
-          <a:ln>
-            <a:noFill/>
+          <a:ln w="19050">
+            <a:solidFill>
+              <a:srgbClr val="00befe"/>
+            </a:solidFill>
+            <a:round/>
           </a:ln>
           <a:effectLst>
             <a:outerShdw blurRad="39960" dir="5400000" dist="23040" rotWithShape="0">
@@ -28005,20 +27529,22 @@
       </p:sp>
       <p:sp>
         <p:nvSpPr>
-          <p:cNvPr id="106" name="Rectangle 10"/>
-          <p:cNvSpPr/>
-          <p:nvPr/>
-        </p:nvSpPr>
-        <p:spPr>
-          <a:xfrm>
-            <a:off x="6400800" y="1828800"/>
-            <a:ext cx="48960" cy="1552680"/>
-          </a:xfrm>
-          <a:prstGeom prst="rect">
-            <a:avLst/>
+          <p:cNvPr id="103" name="Rounded Rectangle 7"/>
+          <p:cNvSpPr/>
+          <p:nvPr/>
+        </p:nvSpPr>
+        <p:spPr>
+          <a:xfrm>
+            <a:off x="768240" y="1417320"/>
+            <a:ext cx="5255640" cy="546480"/>
+          </a:xfrm>
+          <a:prstGeom prst="roundRect">
+            <a:avLst>
+              <a:gd name="adj" fmla="val 16667"/>
+            </a:avLst>
           </a:prstGeom>
           <a:solidFill>
-            <a:srgbClr val="c97a00"/>
+            <a:srgbClr val="042733"/>
           </a:solidFill>
           <a:ln>
             <a:noFill/>
@@ -28046,14 +27572,14 @@
       </p:sp>
       <p:sp>
         <p:nvSpPr>
-          <p:cNvPr id="107" name="TextBox 11"/>
-          <p:cNvSpPr/>
-          <p:nvPr/>
-        </p:nvSpPr>
-        <p:spPr>
-          <a:xfrm>
-            <a:off x="6656760" y="2304360"/>
-            <a:ext cx="4570200" cy="638280"/>
+          <p:cNvPr id="104" name="TextBox 8"/>
+          <p:cNvSpPr/>
+          <p:nvPr/>
+        </p:nvSpPr>
+        <p:spPr>
+          <a:xfrm>
+            <a:off x="768240" y="1472040"/>
+            <a:ext cx="5255640" cy="227880"/>
           </a:xfrm>
           <a:prstGeom prst="rect">
             <a:avLst/>
@@ -28070,73 +27596,572 @@
           <a:fontRef idx="minor"/>
         </p:style>
         <p:txBody>
-          <a:bodyPr lIns="0" rIns="0" tIns="0" bIns="0" anchor="ctr">
+          <a:bodyPr lIns="0" rIns="0" tIns="0" bIns="0" anchor="t">
             <a:spAutoFit/>
           </a:bodyPr>
           <a:p>
+            <a:pPr algn="ctr">
+              <a:lnSpc>
+                <a:spcPct val="100000"/>
+              </a:lnSpc>
+              <a:buNone/>
+            </a:pPr>
+            <a:r>
+              <a:rPr b="1" lang="en-US" sz="1500" spc="-1" strike="noStrike">
+                <a:solidFill>
+                  <a:srgbClr val="00befe"/>
+                </a:solidFill>
+                <a:latin typeface="Arial"/>
+                <a:ea typeface="DejaVu Sans"/>
+              </a:rPr>
+              <a:t>MODEL KLASYFIKACYJNY</a:t>
+            </a:r>
+            <a:endParaRPr b="0" lang="pl-PL" sz="1500" spc="-1" strike="noStrike">
+              <a:latin typeface="Arial"/>
+            </a:endParaRPr>
+          </a:p>
+        </p:txBody>
+      </p:sp>
+      <p:sp>
+        <p:nvSpPr>
+          <p:cNvPr id="105" name="TextBox 9"/>
+          <p:cNvSpPr/>
+          <p:nvPr/>
+        </p:nvSpPr>
+        <p:spPr>
+          <a:xfrm>
+            <a:off x="996840" y="2148840"/>
+            <a:ext cx="1415160" cy="182160"/>
+          </a:xfrm>
+          <a:prstGeom prst="rect">
+            <a:avLst/>
+          </a:prstGeom>
+          <a:noFill/>
+          <a:ln w="0">
+            <a:noFill/>
+          </a:ln>
+        </p:spPr>
+        <p:style>
+          <a:lnRef idx="0"/>
+          <a:fillRef idx="0"/>
+          <a:effectRef idx="0"/>
+          <a:fontRef idx="minor"/>
+        </p:style>
+        <p:txBody>
+          <a:bodyPr lIns="0" rIns="0" tIns="0" bIns="0" anchor="t">
+            <a:spAutoFit/>
+          </a:bodyPr>
+          <a:p>
             <a:pPr>
               <a:lnSpc>
-                <a:spcPct val="105000"/>
-              </a:lnSpc>
-              <a:buNone/>
-            </a:pPr>
-            <a:r>
-              <a:rPr b="1" lang="en-US" sz="1400" spc="-1" strike="noStrike">
+                <a:spcPct val="100000"/>
+              </a:lnSpc>
+              <a:buNone/>
+            </a:pPr>
+            <a:r>
+              <a:rPr b="1" lang="en-US" sz="1200" spc="-1" strike="noStrike">
+                <a:solidFill>
+                  <a:srgbClr val="8b19fe"/>
+                </a:solidFill>
+                <a:latin typeface="Arial"/>
+                <a:ea typeface="DejaVu Sans"/>
+              </a:rPr>
+              <a:t>Wejście</a:t>
+            </a:r>
+            <a:endParaRPr b="0" lang="pl-PL" sz="1200" spc="-1" strike="noStrike">
+              <a:latin typeface="Arial"/>
+            </a:endParaRPr>
+          </a:p>
+        </p:txBody>
+      </p:sp>
+      <p:sp>
+        <p:nvSpPr>
+          <p:cNvPr id="106" name="TextBox 10"/>
+          <p:cNvSpPr/>
+          <p:nvPr/>
+        </p:nvSpPr>
+        <p:spPr>
+          <a:xfrm>
+            <a:off x="2368440" y="2148840"/>
+            <a:ext cx="3472560" cy="190080"/>
+          </a:xfrm>
+          <a:prstGeom prst="rect">
+            <a:avLst/>
+          </a:prstGeom>
+          <a:noFill/>
+          <a:ln w="0">
+            <a:noFill/>
+          </a:ln>
+        </p:spPr>
+        <p:style>
+          <a:lnRef idx="0"/>
+          <a:fillRef idx="0"/>
+          <a:effectRef idx="0"/>
+          <a:fontRef idx="minor"/>
+        </p:style>
+        <p:txBody>
+          <a:bodyPr lIns="0" rIns="0" tIns="0" bIns="0" anchor="t">
+            <a:spAutoFit/>
+          </a:bodyPr>
+          <a:p>
+            <a:pPr>
+              <a:lnSpc>
+                <a:spcPct val="100000"/>
+              </a:lnSpc>
+              <a:buNone/>
+            </a:pPr>
+            <a:r>
+              <a:rPr b="0" lang="en-US" sz="1250" spc="-1" strike="noStrike">
                 <a:solidFill>
                   <a:srgbClr val="1b0532"/>
                 </a:solidFill>
                 <a:latin typeface="Arial"/>
                 <a:ea typeface="DejaVu Sans"/>
               </a:rPr>
-              <a:t>⚠  </a:t>
-            </a:r>
-            <a:r>
-              <a:rPr b="1" lang="en-US" sz="1400" spc="-1" strike="noStrike">
+              <a:t>„</a:t>
+            </a:r>
+            <a:r>
+              <a:rPr b="0" lang="en-US" sz="1250" spc="-1" strike="noStrike">
                 <a:solidFill>
                   <a:srgbClr val="1b0532"/>
                 </a:solidFill>
                 <a:latin typeface="Arial"/>
                 <a:ea typeface="DejaVu Sans"/>
               </a:rPr>
-              <a:t>Uwaga</a:t>
-            </a:r>
-            <a:endParaRPr b="0" lang="pl-PL" sz="1400" spc="-1" strike="noStrike">
-              <a:latin typeface="Arial"/>
-            </a:endParaRPr>
-          </a:p>
+              <a:t>Nie mogę zalogować się do konta”</a:t>
+            </a:r>
+            <a:endParaRPr b="0" lang="pl-PL" sz="1250" spc="-1" strike="noStrike">
+              <a:latin typeface="Arial"/>
+            </a:endParaRPr>
+          </a:p>
+        </p:txBody>
+      </p:sp>
+      <p:sp>
+        <p:nvSpPr>
+          <p:cNvPr id="107" name="TextBox 11"/>
+          <p:cNvSpPr/>
+          <p:nvPr/>
+        </p:nvSpPr>
+        <p:spPr>
+          <a:xfrm>
+            <a:off x="996840" y="2679120"/>
+            <a:ext cx="1415160" cy="182160"/>
+          </a:xfrm>
+          <a:prstGeom prst="rect">
+            <a:avLst/>
+          </a:prstGeom>
+          <a:noFill/>
+          <a:ln w="0">
+            <a:noFill/>
+          </a:ln>
+        </p:spPr>
+        <p:style>
+          <a:lnRef idx="0"/>
+          <a:fillRef idx="0"/>
+          <a:effectRef idx="0"/>
+          <a:fontRef idx="minor"/>
+        </p:style>
+        <p:txBody>
+          <a:bodyPr lIns="0" rIns="0" tIns="0" bIns="0" anchor="t">
+            <a:spAutoFit/>
+          </a:bodyPr>
           <a:p>
             <a:pPr>
               <a:lnSpc>
-                <a:spcPct val="105000"/>
-              </a:lnSpc>
-              <a:buNone/>
-            </a:pPr>
-            <a:r>
-              <a:rPr b="0" lang="en-US" sz="1300" spc="-1" strike="noStrike">
-                <a:solidFill>
-                  <a:srgbClr val="6b6478"/>
-                </a:solidFill>
-                <a:latin typeface="Arial"/>
-                <a:ea typeface="DejaVu Sans"/>
-              </a:rPr>
-              <a:t>Etykiety LLM to tylko propozycje. Model myli się przy ironii, niejednoznaczności, braku kontekstu i slangu.</a:t>
-            </a:r>
-            <a:endParaRPr b="0" lang="pl-PL" sz="1300" spc="-1" strike="noStrike">
-              <a:latin typeface="Arial"/>
-            </a:endParaRPr>
-          </a:p>
-        </p:txBody>
-      </p:sp>
-      <p:sp>
-        <p:nvSpPr>
-          <p:cNvPr id="108" name="Rounded Rectangle 12"/>
-          <p:cNvSpPr/>
-          <p:nvPr/>
-        </p:nvSpPr>
-        <p:spPr>
-          <a:xfrm>
-            <a:off x="6400800" y="3566160"/>
-            <a:ext cx="5027400" cy="1506960"/>
+                <a:spcPct val="100000"/>
+              </a:lnSpc>
+              <a:buNone/>
+            </a:pPr>
+            <a:r>
+              <a:rPr b="1" lang="en-US" sz="1200" spc="-1" strike="noStrike">
+                <a:solidFill>
+                  <a:srgbClr val="8b19fe"/>
+                </a:solidFill>
+                <a:latin typeface="Arial"/>
+                <a:ea typeface="DejaVu Sans"/>
+              </a:rPr>
+              <a:t>Wyjście</a:t>
+            </a:r>
+            <a:endParaRPr b="0" lang="pl-PL" sz="1200" spc="-1" strike="noStrike">
+              <a:latin typeface="Arial"/>
+            </a:endParaRPr>
+          </a:p>
+        </p:txBody>
+      </p:sp>
+      <p:sp>
+        <p:nvSpPr>
+          <p:cNvPr id="108" name="TextBox 12"/>
+          <p:cNvSpPr/>
+          <p:nvPr/>
+        </p:nvSpPr>
+        <p:spPr>
+          <a:xfrm>
+            <a:off x="2368440" y="2679120"/>
+            <a:ext cx="3472560" cy="190080"/>
+          </a:xfrm>
+          <a:prstGeom prst="rect">
+            <a:avLst/>
+          </a:prstGeom>
+          <a:noFill/>
+          <a:ln w="0">
+            <a:noFill/>
+          </a:ln>
+        </p:spPr>
+        <p:style>
+          <a:lnRef idx="0"/>
+          <a:fillRef idx="0"/>
+          <a:effectRef idx="0"/>
+          <a:fontRef idx="minor"/>
+        </p:style>
+        <p:txBody>
+          <a:bodyPr lIns="0" rIns="0" tIns="0" bIns="0" anchor="t">
+            <a:spAutoFit/>
+          </a:bodyPr>
+          <a:p>
+            <a:pPr>
+              <a:lnSpc>
+                <a:spcPct val="100000"/>
+              </a:lnSpc>
+              <a:buNone/>
+            </a:pPr>
+            <a:r>
+              <a:rPr b="0" lang="en-US" sz="1250" spc="-1" strike="noStrike">
+                <a:solidFill>
+                  <a:srgbClr val="1b0532"/>
+                </a:solidFill>
+                <a:latin typeface="Arial"/>
+                <a:ea typeface="DejaVu Sans"/>
+              </a:rPr>
+              <a:t>klasa: problem_logowania</a:t>
+            </a:r>
+            <a:endParaRPr b="0" lang="pl-PL" sz="1250" spc="-1" strike="noStrike">
+              <a:latin typeface="Arial"/>
+            </a:endParaRPr>
+          </a:p>
+        </p:txBody>
+      </p:sp>
+      <p:sp>
+        <p:nvSpPr>
+          <p:cNvPr id="109" name="TextBox 13"/>
+          <p:cNvSpPr/>
+          <p:nvPr/>
+        </p:nvSpPr>
+        <p:spPr>
+          <a:xfrm>
+            <a:off x="996840" y="3209400"/>
+            <a:ext cx="1415160" cy="182160"/>
+          </a:xfrm>
+          <a:prstGeom prst="rect">
+            <a:avLst/>
+          </a:prstGeom>
+          <a:noFill/>
+          <a:ln w="0">
+            <a:noFill/>
+          </a:ln>
+        </p:spPr>
+        <p:style>
+          <a:lnRef idx="0"/>
+          <a:fillRef idx="0"/>
+          <a:effectRef idx="0"/>
+          <a:fontRef idx="minor"/>
+        </p:style>
+        <p:txBody>
+          <a:bodyPr lIns="0" rIns="0" tIns="0" bIns="0" anchor="t">
+            <a:spAutoFit/>
+          </a:bodyPr>
+          <a:p>
+            <a:pPr>
+              <a:lnSpc>
+                <a:spcPct val="100000"/>
+              </a:lnSpc>
+              <a:buNone/>
+            </a:pPr>
+            <a:r>
+              <a:rPr b="1" lang="en-US" sz="1200" spc="-1" strike="noStrike">
+                <a:solidFill>
+                  <a:srgbClr val="8b19fe"/>
+                </a:solidFill>
+                <a:latin typeface="Arial"/>
+                <a:ea typeface="DejaVu Sans"/>
+              </a:rPr>
+              <a:t>Dodatkowo</a:t>
+            </a:r>
+            <a:endParaRPr b="0" lang="pl-PL" sz="1200" spc="-1" strike="noStrike">
+              <a:latin typeface="Arial"/>
+            </a:endParaRPr>
+          </a:p>
+        </p:txBody>
+      </p:sp>
+      <p:sp>
+        <p:nvSpPr>
+          <p:cNvPr id="110" name="TextBox 14"/>
+          <p:cNvSpPr/>
+          <p:nvPr/>
+        </p:nvSpPr>
+        <p:spPr>
+          <a:xfrm>
+            <a:off x="2368440" y="3209400"/>
+            <a:ext cx="3472560" cy="190080"/>
+          </a:xfrm>
+          <a:prstGeom prst="rect">
+            <a:avLst/>
+          </a:prstGeom>
+          <a:noFill/>
+          <a:ln w="0">
+            <a:noFill/>
+          </a:ln>
+        </p:spPr>
+        <p:style>
+          <a:lnRef idx="0"/>
+          <a:fillRef idx="0"/>
+          <a:effectRef idx="0"/>
+          <a:fontRef idx="minor"/>
+        </p:style>
+        <p:txBody>
+          <a:bodyPr lIns="0" rIns="0" tIns="0" bIns="0" anchor="t">
+            <a:spAutoFit/>
+          </a:bodyPr>
+          <a:p>
+            <a:pPr>
+              <a:lnSpc>
+                <a:spcPct val="100000"/>
+              </a:lnSpc>
+              <a:buNone/>
+            </a:pPr>
+            <a:r>
+              <a:rPr b="0" lang="en-US" sz="1250" spc="-1" strike="noStrike">
+                <a:solidFill>
+                  <a:srgbClr val="1b0532"/>
+                </a:solidFill>
+                <a:latin typeface="Arial"/>
+                <a:ea typeface="DejaVu Sans"/>
+              </a:rPr>
+              <a:t>prawdopodobieństwa klas + thresholdy</a:t>
+            </a:r>
+            <a:endParaRPr b="0" lang="pl-PL" sz="1250" spc="-1" strike="noStrike">
+              <a:latin typeface="Arial"/>
+            </a:endParaRPr>
+          </a:p>
+        </p:txBody>
+      </p:sp>
+      <p:sp>
+        <p:nvSpPr>
+          <p:cNvPr id="111" name="TextBox 15"/>
+          <p:cNvSpPr/>
+          <p:nvPr/>
+        </p:nvSpPr>
+        <p:spPr>
+          <a:xfrm>
+            <a:off x="996840" y="3740040"/>
+            <a:ext cx="1415160" cy="182160"/>
+          </a:xfrm>
+          <a:prstGeom prst="rect">
+            <a:avLst/>
+          </a:prstGeom>
+          <a:noFill/>
+          <a:ln w="0">
+            <a:noFill/>
+          </a:ln>
+        </p:spPr>
+        <p:style>
+          <a:lnRef idx="0"/>
+          <a:fillRef idx="0"/>
+          <a:effectRef idx="0"/>
+          <a:fontRef idx="minor"/>
+        </p:style>
+        <p:txBody>
+          <a:bodyPr lIns="0" rIns="0" tIns="0" bIns="0" anchor="t">
+            <a:spAutoFit/>
+          </a:bodyPr>
+          <a:p>
+            <a:pPr>
+              <a:lnSpc>
+                <a:spcPct val="100000"/>
+              </a:lnSpc>
+              <a:buNone/>
+            </a:pPr>
+            <a:r>
+              <a:rPr b="1" lang="en-US" sz="1200" spc="-1" strike="noStrike">
+                <a:solidFill>
+                  <a:srgbClr val="8b19fe"/>
+                </a:solidFill>
+                <a:latin typeface="Arial"/>
+                <a:ea typeface="DejaVu Sans"/>
+              </a:rPr>
+              <a:t>Pytanie</a:t>
+            </a:r>
+            <a:endParaRPr b="0" lang="pl-PL" sz="1200" spc="-1" strike="noStrike">
+              <a:latin typeface="Arial"/>
+            </a:endParaRPr>
+          </a:p>
+        </p:txBody>
+      </p:sp>
+      <p:sp>
+        <p:nvSpPr>
+          <p:cNvPr id="112" name="TextBox 16"/>
+          <p:cNvSpPr/>
+          <p:nvPr/>
+        </p:nvSpPr>
+        <p:spPr>
+          <a:xfrm>
+            <a:off x="2368440" y="3740040"/>
+            <a:ext cx="3472560" cy="190080"/>
+          </a:xfrm>
+          <a:prstGeom prst="rect">
+            <a:avLst/>
+          </a:prstGeom>
+          <a:noFill/>
+          <a:ln w="0">
+            <a:noFill/>
+          </a:ln>
+        </p:spPr>
+        <p:style>
+          <a:lnRef idx="0"/>
+          <a:fillRef idx="0"/>
+          <a:effectRef idx="0"/>
+          <a:fontRef idx="minor"/>
+        </p:style>
+        <p:txBody>
+          <a:bodyPr lIns="0" rIns="0" tIns="0" bIns="0" anchor="t">
+            <a:spAutoFit/>
+          </a:bodyPr>
+          <a:p>
+            <a:pPr>
+              <a:lnSpc>
+                <a:spcPct val="100000"/>
+              </a:lnSpc>
+              <a:buNone/>
+            </a:pPr>
+            <a:r>
+              <a:rPr b="0" lang="en-US" sz="1250" spc="-1" strike="noStrike">
+                <a:solidFill>
+                  <a:srgbClr val="1b0532"/>
+                </a:solidFill>
+                <a:latin typeface="Arial"/>
+                <a:ea typeface="DejaVu Sans"/>
+              </a:rPr>
+              <a:t>Do której kategorii należy przykład?</a:t>
+            </a:r>
+            <a:endParaRPr b="0" lang="pl-PL" sz="1250" spc="-1" strike="noStrike">
+              <a:latin typeface="Arial"/>
+            </a:endParaRPr>
+          </a:p>
+        </p:txBody>
+      </p:sp>
+      <p:sp>
+        <p:nvSpPr>
+          <p:cNvPr id="113" name="TextBox 17"/>
+          <p:cNvSpPr/>
+          <p:nvPr/>
+        </p:nvSpPr>
+        <p:spPr>
+          <a:xfrm>
+            <a:off x="996840" y="4270320"/>
+            <a:ext cx="1415160" cy="182160"/>
+          </a:xfrm>
+          <a:prstGeom prst="rect">
+            <a:avLst/>
+          </a:prstGeom>
+          <a:noFill/>
+          <a:ln w="0">
+            <a:noFill/>
+          </a:ln>
+        </p:spPr>
+        <p:style>
+          <a:lnRef idx="0"/>
+          <a:fillRef idx="0"/>
+          <a:effectRef idx="0"/>
+          <a:fontRef idx="minor"/>
+        </p:style>
+        <p:txBody>
+          <a:bodyPr lIns="0" rIns="0" tIns="0" bIns="0" anchor="t">
+            <a:spAutoFit/>
+          </a:bodyPr>
+          <a:p>
+            <a:pPr>
+              <a:lnSpc>
+                <a:spcPct val="100000"/>
+              </a:lnSpc>
+              <a:buNone/>
+            </a:pPr>
+            <a:r>
+              <a:rPr b="1" lang="en-US" sz="1200" spc="-1" strike="noStrike">
+                <a:solidFill>
+                  <a:srgbClr val="8b19fe"/>
+                </a:solidFill>
+                <a:latin typeface="Arial"/>
+                <a:ea typeface="DejaVu Sans"/>
+              </a:rPr>
+              <a:t>Zalety</a:t>
+            </a:r>
+            <a:endParaRPr b="0" lang="pl-PL" sz="1200" spc="-1" strike="noStrike">
+              <a:latin typeface="Arial"/>
+            </a:endParaRPr>
+          </a:p>
+        </p:txBody>
+      </p:sp>
+      <p:sp>
+        <p:nvSpPr>
+          <p:cNvPr id="114" name="TextBox 18"/>
+          <p:cNvSpPr/>
+          <p:nvPr/>
+        </p:nvSpPr>
+        <p:spPr>
+          <a:xfrm>
+            <a:off x="2368440" y="4270320"/>
+            <a:ext cx="3472560" cy="190080"/>
+          </a:xfrm>
+          <a:prstGeom prst="rect">
+            <a:avLst/>
+          </a:prstGeom>
+          <a:noFill/>
+          <a:ln w="0">
+            <a:noFill/>
+          </a:ln>
+        </p:spPr>
+        <p:style>
+          <a:lnRef idx="0"/>
+          <a:fillRef idx="0"/>
+          <a:effectRef idx="0"/>
+          <a:fontRef idx="minor"/>
+        </p:style>
+        <p:txBody>
+          <a:bodyPr lIns="0" rIns="0" tIns="0" bIns="0" anchor="t">
+            <a:spAutoFit/>
+          </a:bodyPr>
+          <a:p>
+            <a:pPr>
+              <a:lnSpc>
+                <a:spcPct val="100000"/>
+              </a:lnSpc>
+              <a:buNone/>
+            </a:pPr>
+            <a:r>
+              <a:rPr b="0" lang="en-US" sz="1250" spc="-1" strike="noStrike">
+                <a:solidFill>
+                  <a:srgbClr val="1b0532"/>
+                </a:solidFill>
+                <a:latin typeface="Arial"/>
+                <a:ea typeface="DejaVu Sans"/>
+              </a:rPr>
+              <a:t>szybki, tani, łatwy do wdrożenia</a:t>
+            </a:r>
+            <a:endParaRPr b="0" lang="pl-PL" sz="1250" spc="-1" strike="noStrike">
+              <a:latin typeface="Arial"/>
+            </a:endParaRPr>
+          </a:p>
+        </p:txBody>
+      </p:sp>
+      <p:sp>
+        <p:nvSpPr>
+          <p:cNvPr id="115" name="Rounded Rectangle 19"/>
+          <p:cNvSpPr/>
+          <p:nvPr/>
+        </p:nvSpPr>
+        <p:spPr>
+          <a:xfrm>
+            <a:off x="6400800" y="1417320"/>
+            <a:ext cx="5255640" cy="3564000"/>
           </a:xfrm>
           <a:prstGeom prst="roundRect">
             <a:avLst>
@@ -28144,10 +28169,13 @@
             </a:avLst>
           </a:prstGeom>
           <a:solidFill>
-            <a:srgbClr val="f2f1f6"/>
+            <a:srgbClr val="ffffff"/>
           </a:solidFill>
-          <a:ln>
-            <a:noFill/>
+          <a:ln w="19050">
+            <a:solidFill>
+              <a:srgbClr val="8b19fe"/>
+            </a:solidFill>
+            <a:round/>
           </a:ln>
           <a:effectLst>
             <a:outerShdw blurRad="39960" dir="5400000" dist="23040" rotWithShape="0">
@@ -28172,20 +28200,22 @@
       </p:sp>
       <p:sp>
         <p:nvSpPr>
-          <p:cNvPr id="109" name="Rectangle 13"/>
-          <p:cNvSpPr/>
-          <p:nvPr/>
-        </p:nvSpPr>
-        <p:spPr>
-          <a:xfrm>
-            <a:off x="6400800" y="3566160"/>
-            <a:ext cx="48960" cy="1506960"/>
-          </a:xfrm>
-          <a:prstGeom prst="rect">
-            <a:avLst/>
+          <p:cNvPr id="116" name="Rounded Rectangle 20"/>
+          <p:cNvSpPr/>
+          <p:nvPr/>
+        </p:nvSpPr>
+        <p:spPr>
+          <a:xfrm>
+            <a:off x="6400800" y="1417320"/>
+            <a:ext cx="5255640" cy="546480"/>
+          </a:xfrm>
+          <a:prstGeom prst="roundRect">
+            <a:avLst>
+              <a:gd name="adj" fmla="val 16667"/>
+            </a:avLst>
           </a:prstGeom>
           <a:solidFill>
-            <a:srgbClr val="1f9e55"/>
+            <a:srgbClr val="042733"/>
           </a:solidFill>
           <a:ln>
             <a:noFill/>
@@ -28213,14 +28243,14 @@
       </p:sp>
       <p:sp>
         <p:nvSpPr>
-          <p:cNvPr id="110" name="TextBox 14"/>
-          <p:cNvSpPr/>
-          <p:nvPr/>
-        </p:nvSpPr>
-        <p:spPr>
-          <a:xfrm>
-            <a:off x="6656760" y="3915000"/>
-            <a:ext cx="4570200" cy="846000"/>
+          <p:cNvPr id="117" name="TextBox 21"/>
+          <p:cNvSpPr/>
+          <p:nvPr/>
+        </p:nvSpPr>
+        <p:spPr>
+          <a:xfrm>
+            <a:off x="6400800" y="1472040"/>
+            <a:ext cx="5255640" cy="227880"/>
           </a:xfrm>
           <a:prstGeom prst="rect">
             <a:avLst/>
@@ -28237,6 +28267,662 @@
           <a:fontRef idx="minor"/>
         </p:style>
         <p:txBody>
+          <a:bodyPr lIns="0" rIns="0" tIns="0" bIns="0" anchor="t">
+            <a:spAutoFit/>
+          </a:bodyPr>
+          <a:p>
+            <a:pPr algn="ctr">
+              <a:lnSpc>
+                <a:spcPct val="100000"/>
+              </a:lnSpc>
+              <a:buNone/>
+            </a:pPr>
+            <a:r>
+              <a:rPr b="1" lang="en-US" sz="1500" spc="-1" strike="noStrike">
+                <a:solidFill>
+                  <a:srgbClr val="00befe"/>
+                </a:solidFill>
+                <a:latin typeface="Arial"/>
+                <a:ea typeface="DejaVu Sans"/>
+              </a:rPr>
+              <a:t>MODEL GENERATYWNY</a:t>
+            </a:r>
+            <a:endParaRPr b="0" lang="pl-PL" sz="1500" spc="-1" strike="noStrike">
+              <a:latin typeface="Arial"/>
+            </a:endParaRPr>
+          </a:p>
+        </p:txBody>
+      </p:sp>
+      <p:sp>
+        <p:nvSpPr>
+          <p:cNvPr id="118" name="TextBox 22"/>
+          <p:cNvSpPr/>
+          <p:nvPr/>
+        </p:nvSpPr>
+        <p:spPr>
+          <a:xfrm>
+            <a:off x="6629400" y="2148840"/>
+            <a:ext cx="1415160" cy="182160"/>
+          </a:xfrm>
+          <a:prstGeom prst="rect">
+            <a:avLst/>
+          </a:prstGeom>
+          <a:noFill/>
+          <a:ln w="0">
+            <a:noFill/>
+          </a:ln>
+        </p:spPr>
+        <p:style>
+          <a:lnRef idx="0"/>
+          <a:fillRef idx="0"/>
+          <a:effectRef idx="0"/>
+          <a:fontRef idx="minor"/>
+        </p:style>
+        <p:txBody>
+          <a:bodyPr lIns="0" rIns="0" tIns="0" bIns="0" anchor="t">
+            <a:spAutoFit/>
+          </a:bodyPr>
+          <a:p>
+            <a:pPr>
+              <a:lnSpc>
+                <a:spcPct val="100000"/>
+              </a:lnSpc>
+              <a:buNone/>
+            </a:pPr>
+            <a:r>
+              <a:rPr b="1" lang="en-US" sz="1200" spc="-1" strike="noStrike">
+                <a:solidFill>
+                  <a:srgbClr val="8b19fe"/>
+                </a:solidFill>
+                <a:latin typeface="Arial"/>
+                <a:ea typeface="DejaVu Sans"/>
+              </a:rPr>
+              <a:t>Wejście</a:t>
+            </a:r>
+            <a:endParaRPr b="0" lang="pl-PL" sz="1200" spc="-1" strike="noStrike">
+              <a:latin typeface="Arial"/>
+            </a:endParaRPr>
+          </a:p>
+        </p:txBody>
+      </p:sp>
+      <p:sp>
+        <p:nvSpPr>
+          <p:cNvPr id="119" name="TextBox 23"/>
+          <p:cNvSpPr/>
+          <p:nvPr/>
+        </p:nvSpPr>
+        <p:spPr>
+          <a:xfrm>
+            <a:off x="8001000" y="2148840"/>
+            <a:ext cx="3472560" cy="190080"/>
+          </a:xfrm>
+          <a:prstGeom prst="rect">
+            <a:avLst/>
+          </a:prstGeom>
+          <a:noFill/>
+          <a:ln w="0">
+            <a:noFill/>
+          </a:ln>
+        </p:spPr>
+        <p:style>
+          <a:lnRef idx="0"/>
+          <a:fillRef idx="0"/>
+          <a:effectRef idx="0"/>
+          <a:fontRef idx="minor"/>
+        </p:style>
+        <p:txBody>
+          <a:bodyPr lIns="0" rIns="0" tIns="0" bIns="0" anchor="t">
+            <a:spAutoFit/>
+          </a:bodyPr>
+          <a:p>
+            <a:pPr>
+              <a:lnSpc>
+                <a:spcPct val="100000"/>
+              </a:lnSpc>
+              <a:buNone/>
+            </a:pPr>
+            <a:r>
+              <a:rPr b="0" lang="en-US" sz="1250" spc="-1" strike="noStrike">
+                <a:solidFill>
+                  <a:srgbClr val="1b0532"/>
+                </a:solidFill>
+                <a:latin typeface="Arial"/>
+                <a:ea typeface="DejaVu Sans"/>
+              </a:rPr>
+              <a:t>prompt: „Wygeneruj alternatywy zdania”</a:t>
+            </a:r>
+            <a:endParaRPr b="0" lang="pl-PL" sz="1250" spc="-1" strike="noStrike">
+              <a:latin typeface="Arial"/>
+            </a:endParaRPr>
+          </a:p>
+        </p:txBody>
+      </p:sp>
+      <p:sp>
+        <p:nvSpPr>
+          <p:cNvPr id="120" name="TextBox 24"/>
+          <p:cNvSpPr/>
+          <p:nvPr/>
+        </p:nvSpPr>
+        <p:spPr>
+          <a:xfrm>
+            <a:off x="6629400" y="2679120"/>
+            <a:ext cx="1415160" cy="182160"/>
+          </a:xfrm>
+          <a:prstGeom prst="rect">
+            <a:avLst/>
+          </a:prstGeom>
+          <a:noFill/>
+          <a:ln w="0">
+            <a:noFill/>
+          </a:ln>
+        </p:spPr>
+        <p:style>
+          <a:lnRef idx="0"/>
+          <a:fillRef idx="0"/>
+          <a:effectRef idx="0"/>
+          <a:fontRef idx="minor"/>
+        </p:style>
+        <p:txBody>
+          <a:bodyPr lIns="0" rIns="0" tIns="0" bIns="0" anchor="t">
+            <a:spAutoFit/>
+          </a:bodyPr>
+          <a:p>
+            <a:pPr>
+              <a:lnSpc>
+                <a:spcPct val="100000"/>
+              </a:lnSpc>
+              <a:buNone/>
+            </a:pPr>
+            <a:r>
+              <a:rPr b="1" lang="en-US" sz="1200" spc="-1" strike="noStrike">
+                <a:solidFill>
+                  <a:srgbClr val="8b19fe"/>
+                </a:solidFill>
+                <a:latin typeface="Arial"/>
+                <a:ea typeface="DejaVu Sans"/>
+              </a:rPr>
+              <a:t>Wyjście</a:t>
+            </a:r>
+            <a:endParaRPr b="0" lang="pl-PL" sz="1200" spc="-1" strike="noStrike">
+              <a:latin typeface="Arial"/>
+            </a:endParaRPr>
+          </a:p>
+        </p:txBody>
+      </p:sp>
+      <p:sp>
+        <p:nvSpPr>
+          <p:cNvPr id="121" name="TextBox 25"/>
+          <p:cNvSpPr/>
+          <p:nvPr/>
+        </p:nvSpPr>
+        <p:spPr>
+          <a:xfrm>
+            <a:off x="8001000" y="2679120"/>
+            <a:ext cx="3472560" cy="190080"/>
+          </a:xfrm>
+          <a:prstGeom prst="rect">
+            <a:avLst/>
+          </a:prstGeom>
+          <a:noFill/>
+          <a:ln w="0">
+            <a:noFill/>
+          </a:ln>
+        </p:spPr>
+        <p:style>
+          <a:lnRef idx="0"/>
+          <a:fillRef idx="0"/>
+          <a:effectRef idx="0"/>
+          <a:fontRef idx="minor"/>
+        </p:style>
+        <p:txBody>
+          <a:bodyPr lIns="0" rIns="0" tIns="0" bIns="0" anchor="t">
+            <a:spAutoFit/>
+          </a:bodyPr>
+          <a:p>
+            <a:pPr>
+              <a:lnSpc>
+                <a:spcPct val="100000"/>
+              </a:lnSpc>
+              <a:buNone/>
+            </a:pPr>
+            <a:r>
+              <a:rPr b="0" lang="en-US" sz="1250" spc="-1" strike="noStrike">
+                <a:solidFill>
+                  <a:srgbClr val="1b0532"/>
+                </a:solidFill>
+                <a:latin typeface="Arial"/>
+                <a:ea typeface="DejaVu Sans"/>
+              </a:rPr>
+              <a:t>nowe teksty (warianty)</a:t>
+            </a:r>
+            <a:endParaRPr b="0" lang="pl-PL" sz="1250" spc="-1" strike="noStrike">
+              <a:latin typeface="Arial"/>
+            </a:endParaRPr>
+          </a:p>
+        </p:txBody>
+      </p:sp>
+      <p:sp>
+        <p:nvSpPr>
+          <p:cNvPr id="122" name="TextBox 26"/>
+          <p:cNvSpPr/>
+          <p:nvPr/>
+        </p:nvSpPr>
+        <p:spPr>
+          <a:xfrm>
+            <a:off x="6629400" y="3209400"/>
+            <a:ext cx="1415160" cy="182160"/>
+          </a:xfrm>
+          <a:prstGeom prst="rect">
+            <a:avLst/>
+          </a:prstGeom>
+          <a:noFill/>
+          <a:ln w="0">
+            <a:noFill/>
+          </a:ln>
+        </p:spPr>
+        <p:style>
+          <a:lnRef idx="0"/>
+          <a:fillRef idx="0"/>
+          <a:effectRef idx="0"/>
+          <a:fontRef idx="minor"/>
+        </p:style>
+        <p:txBody>
+          <a:bodyPr lIns="0" rIns="0" tIns="0" bIns="0" anchor="t">
+            <a:spAutoFit/>
+          </a:bodyPr>
+          <a:p>
+            <a:pPr>
+              <a:lnSpc>
+                <a:spcPct val="100000"/>
+              </a:lnSpc>
+              <a:buNone/>
+            </a:pPr>
+            <a:r>
+              <a:rPr b="1" lang="en-US" sz="1200" spc="-1" strike="noStrike">
+                <a:solidFill>
+                  <a:srgbClr val="8b19fe"/>
+                </a:solidFill>
+                <a:latin typeface="Arial"/>
+                <a:ea typeface="DejaVu Sans"/>
+              </a:rPr>
+              <a:t>Rola</a:t>
+            </a:r>
+            <a:endParaRPr b="0" lang="pl-PL" sz="1200" spc="-1" strike="noStrike">
+              <a:latin typeface="Arial"/>
+            </a:endParaRPr>
+          </a:p>
+        </p:txBody>
+      </p:sp>
+      <p:sp>
+        <p:nvSpPr>
+          <p:cNvPr id="123" name="TextBox 27"/>
+          <p:cNvSpPr/>
+          <p:nvPr/>
+        </p:nvSpPr>
+        <p:spPr>
+          <a:xfrm>
+            <a:off x="8001000" y="3209400"/>
+            <a:ext cx="3472560" cy="190080"/>
+          </a:xfrm>
+          <a:prstGeom prst="rect">
+            <a:avLst/>
+          </a:prstGeom>
+          <a:noFill/>
+          <a:ln w="0">
+            <a:noFill/>
+          </a:ln>
+        </p:spPr>
+        <p:style>
+          <a:lnRef idx="0"/>
+          <a:fillRef idx="0"/>
+          <a:effectRef idx="0"/>
+          <a:fontRef idx="minor"/>
+        </p:style>
+        <p:txBody>
+          <a:bodyPr lIns="0" rIns="0" tIns="0" bIns="0" anchor="t">
+            <a:spAutoFit/>
+          </a:bodyPr>
+          <a:p>
+            <a:pPr>
+              <a:lnSpc>
+                <a:spcPct val="100000"/>
+              </a:lnSpc>
+              <a:buNone/>
+            </a:pPr>
+            <a:r>
+              <a:rPr b="0" lang="en-US" sz="1250" spc="-1" strike="noStrike">
+                <a:solidFill>
+                  <a:srgbClr val="1b0532"/>
+                </a:solidFill>
+                <a:latin typeface="Arial"/>
+                <a:ea typeface="DejaVu Sans"/>
+              </a:rPr>
+              <a:t>pomocnicza — przygotowuje dane</a:t>
+            </a:r>
+            <a:endParaRPr b="0" lang="pl-PL" sz="1250" spc="-1" strike="noStrike">
+              <a:latin typeface="Arial"/>
+            </a:endParaRPr>
+          </a:p>
+        </p:txBody>
+      </p:sp>
+      <p:sp>
+        <p:nvSpPr>
+          <p:cNvPr id="124" name="TextBox 28"/>
+          <p:cNvSpPr/>
+          <p:nvPr/>
+        </p:nvSpPr>
+        <p:spPr>
+          <a:xfrm>
+            <a:off x="6629400" y="3740040"/>
+            <a:ext cx="1415160" cy="182160"/>
+          </a:xfrm>
+          <a:prstGeom prst="rect">
+            <a:avLst/>
+          </a:prstGeom>
+          <a:noFill/>
+          <a:ln w="0">
+            <a:noFill/>
+          </a:ln>
+        </p:spPr>
+        <p:style>
+          <a:lnRef idx="0"/>
+          <a:fillRef idx="0"/>
+          <a:effectRef idx="0"/>
+          <a:fontRef idx="minor"/>
+        </p:style>
+        <p:txBody>
+          <a:bodyPr lIns="0" rIns="0" tIns="0" bIns="0" anchor="t">
+            <a:spAutoFit/>
+          </a:bodyPr>
+          <a:p>
+            <a:pPr>
+              <a:lnSpc>
+                <a:spcPct val="100000"/>
+              </a:lnSpc>
+              <a:buNone/>
+            </a:pPr>
+            <a:r>
+              <a:rPr b="1" lang="en-US" sz="1200" spc="-1" strike="noStrike">
+                <a:solidFill>
+                  <a:srgbClr val="8b19fe"/>
+                </a:solidFill>
+                <a:latin typeface="Arial"/>
+                <a:ea typeface="DejaVu Sans"/>
+              </a:rPr>
+              <a:t>Pytanie</a:t>
+            </a:r>
+            <a:endParaRPr b="0" lang="pl-PL" sz="1200" spc="-1" strike="noStrike">
+              <a:latin typeface="Arial"/>
+            </a:endParaRPr>
+          </a:p>
+        </p:txBody>
+      </p:sp>
+      <p:sp>
+        <p:nvSpPr>
+          <p:cNvPr id="125" name="TextBox 29"/>
+          <p:cNvSpPr/>
+          <p:nvPr/>
+        </p:nvSpPr>
+        <p:spPr>
+          <a:xfrm>
+            <a:off x="8001000" y="3740040"/>
+            <a:ext cx="3472560" cy="190080"/>
+          </a:xfrm>
+          <a:prstGeom prst="rect">
+            <a:avLst/>
+          </a:prstGeom>
+          <a:noFill/>
+          <a:ln w="0">
+            <a:noFill/>
+          </a:ln>
+        </p:spPr>
+        <p:style>
+          <a:lnRef idx="0"/>
+          <a:fillRef idx="0"/>
+          <a:effectRef idx="0"/>
+          <a:fontRef idx="minor"/>
+        </p:style>
+        <p:txBody>
+          <a:bodyPr lIns="0" rIns="0" tIns="0" bIns="0" anchor="t">
+            <a:spAutoFit/>
+          </a:bodyPr>
+          <a:p>
+            <a:pPr>
+              <a:lnSpc>
+                <a:spcPct val="100000"/>
+              </a:lnSpc>
+              <a:buNone/>
+            </a:pPr>
+            <a:r>
+              <a:rPr b="0" lang="en-US" sz="1250" spc="-1" strike="noStrike">
+                <a:solidFill>
+                  <a:srgbClr val="1b0532"/>
+                </a:solidFill>
+                <a:latin typeface="Arial"/>
+                <a:ea typeface="DejaVu Sans"/>
+              </a:rPr>
+              <a:t>Co można wygenerować z kontekstu?</a:t>
+            </a:r>
+            <a:endParaRPr b="0" lang="pl-PL" sz="1250" spc="-1" strike="noStrike">
+              <a:latin typeface="Arial"/>
+            </a:endParaRPr>
+          </a:p>
+        </p:txBody>
+      </p:sp>
+      <p:sp>
+        <p:nvSpPr>
+          <p:cNvPr id="126" name="TextBox 30"/>
+          <p:cNvSpPr/>
+          <p:nvPr/>
+        </p:nvSpPr>
+        <p:spPr>
+          <a:xfrm>
+            <a:off x="6629400" y="4270320"/>
+            <a:ext cx="1415160" cy="182160"/>
+          </a:xfrm>
+          <a:prstGeom prst="rect">
+            <a:avLst/>
+          </a:prstGeom>
+          <a:noFill/>
+          <a:ln w="0">
+            <a:noFill/>
+          </a:ln>
+        </p:spPr>
+        <p:style>
+          <a:lnRef idx="0"/>
+          <a:fillRef idx="0"/>
+          <a:effectRef idx="0"/>
+          <a:fontRef idx="minor"/>
+        </p:style>
+        <p:txBody>
+          <a:bodyPr lIns="0" rIns="0" tIns="0" bIns="0" anchor="t">
+            <a:spAutoFit/>
+          </a:bodyPr>
+          <a:p>
+            <a:pPr>
+              <a:lnSpc>
+                <a:spcPct val="100000"/>
+              </a:lnSpc>
+              <a:buNone/>
+            </a:pPr>
+            <a:r>
+              <a:rPr b="1" lang="en-US" sz="1200" spc="-1" strike="noStrike">
+                <a:solidFill>
+                  <a:srgbClr val="8b19fe"/>
+                </a:solidFill>
+                <a:latin typeface="Arial"/>
+                <a:ea typeface="DejaVu Sans"/>
+              </a:rPr>
+              <a:t>Uwaga</a:t>
+            </a:r>
+            <a:endParaRPr b="0" lang="pl-PL" sz="1200" spc="-1" strike="noStrike">
+              <a:latin typeface="Arial"/>
+            </a:endParaRPr>
+          </a:p>
+        </p:txBody>
+      </p:sp>
+      <p:sp>
+        <p:nvSpPr>
+          <p:cNvPr id="127" name="TextBox 31"/>
+          <p:cNvSpPr/>
+          <p:nvPr/>
+        </p:nvSpPr>
+        <p:spPr>
+          <a:xfrm>
+            <a:off x="8001000" y="4270320"/>
+            <a:ext cx="3472560" cy="190080"/>
+          </a:xfrm>
+          <a:prstGeom prst="rect">
+            <a:avLst/>
+          </a:prstGeom>
+          <a:noFill/>
+          <a:ln w="0">
+            <a:noFill/>
+          </a:ln>
+        </p:spPr>
+        <p:style>
+          <a:lnRef idx="0"/>
+          <a:fillRef idx="0"/>
+          <a:effectRef idx="0"/>
+          <a:fontRef idx="minor"/>
+        </p:style>
+        <p:txBody>
+          <a:bodyPr lIns="0" rIns="0" tIns="0" bIns="0" anchor="t">
+            <a:spAutoFit/>
+          </a:bodyPr>
+          <a:p>
+            <a:pPr>
+              <a:lnSpc>
+                <a:spcPct val="100000"/>
+              </a:lnSpc>
+              <a:buNone/>
+            </a:pPr>
+            <a:r>
+              <a:rPr b="0" lang="en-US" sz="1250" spc="-1" strike="noStrike">
+                <a:solidFill>
+                  <a:srgbClr val="1b0532"/>
+                </a:solidFill>
+                <a:latin typeface="Arial"/>
+                <a:ea typeface="DejaVu Sans"/>
+              </a:rPr>
+              <a:t>nie jest modelem docelowym</a:t>
+            </a:r>
+            <a:endParaRPr b="0" lang="pl-PL" sz="1250" spc="-1" strike="noStrike">
+              <a:latin typeface="Arial"/>
+            </a:endParaRPr>
+          </a:p>
+        </p:txBody>
+      </p:sp>
+      <p:sp>
+        <p:nvSpPr>
+          <p:cNvPr id="128" name="Rounded Rectangle 32"/>
+          <p:cNvSpPr/>
+          <p:nvPr/>
+        </p:nvSpPr>
+        <p:spPr>
+          <a:xfrm>
+            <a:off x="768240" y="5120640"/>
+            <a:ext cx="10650600" cy="592200"/>
+          </a:xfrm>
+          <a:prstGeom prst="roundRect">
+            <a:avLst>
+              <a:gd name="adj" fmla="val 16667"/>
+            </a:avLst>
+          </a:prstGeom>
+          <a:solidFill>
+            <a:srgbClr val="f2f1f6"/>
+          </a:solidFill>
+          <a:ln>
+            <a:noFill/>
+          </a:ln>
+          <a:effectLst>
+            <a:outerShdw blurRad="39960" dir="5400000" dist="23040" rotWithShape="0">
+              <a:srgbClr val="000000">
+                <a:alpha val="35000"/>
+              </a:srgbClr>
+            </a:outerShdw>
+          </a:effectLst>
+        </p:spPr>
+        <p:style>
+          <a:lnRef idx="1">
+            <a:schemeClr val="accent1"/>
+          </a:lnRef>
+          <a:fillRef idx="3">
+            <a:schemeClr val="accent1"/>
+          </a:fillRef>
+          <a:effectRef idx="2">
+            <a:schemeClr val="accent1"/>
+          </a:effectRef>
+          <a:fontRef idx="minor"/>
+        </p:style>
+      </p:sp>
+      <p:sp>
+        <p:nvSpPr>
+          <p:cNvPr id="129" name="Rectangle 33"/>
+          <p:cNvSpPr/>
+          <p:nvPr/>
+        </p:nvSpPr>
+        <p:spPr>
+          <a:xfrm>
+            <a:off x="768240" y="5120640"/>
+            <a:ext cx="48600" cy="592200"/>
+          </a:xfrm>
+          <a:prstGeom prst="rect">
+            <a:avLst/>
+          </a:prstGeom>
+          <a:solidFill>
+            <a:srgbClr val="00befe"/>
+          </a:solidFill>
+          <a:ln>
+            <a:noFill/>
+          </a:ln>
+          <a:effectLst>
+            <a:outerShdw blurRad="39960" dir="5400000" dist="23040" rotWithShape="0">
+              <a:srgbClr val="000000">
+                <a:alpha val="35000"/>
+              </a:srgbClr>
+            </a:outerShdw>
+          </a:effectLst>
+        </p:spPr>
+        <p:style>
+          <a:lnRef idx="1">
+            <a:schemeClr val="accent1"/>
+          </a:lnRef>
+          <a:fillRef idx="3">
+            <a:schemeClr val="accent1"/>
+          </a:fillRef>
+          <a:effectRef idx="2">
+            <a:schemeClr val="accent1"/>
+          </a:effectRef>
+          <a:fontRef idx="minor"/>
+        </p:style>
+      </p:sp>
+      <p:sp>
+        <p:nvSpPr>
+          <p:cNvPr id="130" name="TextBox 34"/>
+          <p:cNvSpPr/>
+          <p:nvPr/>
+        </p:nvSpPr>
+        <p:spPr>
+          <a:xfrm>
+            <a:off x="1024200" y="5331600"/>
+            <a:ext cx="10193400" cy="207000"/>
+          </a:xfrm>
+          <a:prstGeom prst="rect">
+            <a:avLst/>
+          </a:prstGeom>
+          <a:noFill/>
+          <a:ln w="0">
+            <a:noFill/>
+          </a:ln>
+        </p:spPr>
+        <p:style>
+          <a:lnRef idx="0"/>
+          <a:fillRef idx="0"/>
+          <a:effectRef idx="0"/>
+          <a:fontRef idx="minor"/>
+        </p:style>
+        <p:txBody>
           <a:bodyPr lIns="0" rIns="0" tIns="0" bIns="0" anchor="ctr">
             <a:spAutoFit/>
           </a:bodyPr>
@@ -28248,37 +28934,6 @@
               <a:buNone/>
             </a:pPr>
             <a:r>
-              <a:rPr b="1" lang="en-US" sz="1400" spc="-1" strike="noStrike">
-                <a:solidFill>
-                  <a:srgbClr val="1b0532"/>
-                </a:solidFill>
-                <a:latin typeface="Arial"/>
-                <a:ea typeface="DejaVu Sans"/>
-              </a:rPr>
-              <a:t>✓  </a:t>
-            </a:r>
-            <a:r>
-              <a:rPr b="1" lang="en-US" sz="1400" spc="-1" strike="noStrike">
-                <a:solidFill>
-                  <a:srgbClr val="1b0532"/>
-                </a:solidFill>
-                <a:latin typeface="Arial"/>
-                <a:ea typeface="DejaVu Sans"/>
-              </a:rPr>
-              <a:t>Zasada</a:t>
-            </a:r>
-            <a:endParaRPr b="0" lang="pl-PL" sz="1400" spc="-1" strike="noStrike">
-              <a:latin typeface="Arial"/>
-            </a:endParaRPr>
-          </a:p>
-          <a:p>
-            <a:pPr>
-              <a:lnSpc>
-                <a:spcPct val="105000"/>
-              </a:lnSpc>
-              <a:buNone/>
-            </a:pPr>
-            <a:r>
               <a:rPr b="0" lang="en-US" sz="1300" spc="-1" strike="noStrike">
                 <a:solidFill>
                   <a:srgbClr val="6b6478"/>
@@ -28286,159 +28941,9 @@
                 <a:latin typeface="Arial"/>
                 <a:ea typeface="DejaVu Sans"/>
               </a:rPr>
-              <a:t>LLM nie zastępuje człowieka — przyspiesza etykietowanie. Człowiek kontroluje jakość, poprawia błędy i rozstrzyga trudne przypadki.</a:t>
+              <a:t>LLM generatywny przygotowuje dane → model klasyfikacyjny uczy się na nich podejmować decyzje.</a:t>
             </a:r>
             <a:endParaRPr b="0" lang="pl-PL" sz="1300" spc="-1" strike="noStrike">
-              <a:latin typeface="Arial"/>
-            </a:endParaRPr>
-          </a:p>
-        </p:txBody>
-      </p:sp>
-      <p:pic>
-        <p:nvPicPr>
-          <p:cNvPr id="111" name="" descr=""/>
-          <p:cNvPicPr/>
-          <p:nvPr/>
-        </p:nvPicPr>
-        <p:blipFill>
-          <a:blip r:embed="rId1"/>
-          <a:stretch/>
-        </p:blipFill>
-        <p:spPr>
-          <a:xfrm>
-            <a:off x="144000" y="4077720"/>
-            <a:ext cx="3036960" cy="1897560"/>
-          </a:xfrm>
-          <a:prstGeom prst="rect">
-            <a:avLst/>
-          </a:prstGeom>
-          <a:ln w="0">
-            <a:noFill/>
-          </a:ln>
-        </p:spPr>
-      </p:pic>
-      <p:pic>
-        <p:nvPicPr>
-          <p:cNvPr id="112" name="" descr=""/>
-          <p:cNvPicPr/>
-          <p:nvPr/>
-        </p:nvPicPr>
-        <p:blipFill>
-          <a:blip r:embed="rId2"/>
-          <a:stretch/>
-        </p:blipFill>
-        <p:spPr>
-          <a:xfrm>
-            <a:off x="3384000" y="4176000"/>
-            <a:ext cx="2922480" cy="1825920"/>
-          </a:xfrm>
-          <a:prstGeom prst="rect">
-            <a:avLst/>
-          </a:prstGeom>
-          <a:ln w="0">
-            <a:noFill/>
-          </a:ln>
-        </p:spPr>
-      </p:pic>
-      <p:sp>
-        <p:nvSpPr>
-          <p:cNvPr id="113" name="TextBox 37"/>
-          <p:cNvSpPr/>
-          <p:nvPr/>
-        </p:nvSpPr>
-        <p:spPr>
-          <a:xfrm>
-            <a:off x="864000" y="5976000"/>
-            <a:ext cx="1727280" cy="136800"/>
-          </a:xfrm>
-          <a:prstGeom prst="rect">
-            <a:avLst/>
-          </a:prstGeom>
-          <a:noFill/>
-          <a:ln w="0">
-            <a:noFill/>
-          </a:ln>
-        </p:spPr>
-        <p:style>
-          <a:lnRef idx="0"/>
-          <a:fillRef idx="0"/>
-          <a:effectRef idx="0"/>
-          <a:fontRef idx="minor"/>
-        </p:style>
-        <p:txBody>
-          <a:bodyPr lIns="0" rIns="0" tIns="0" bIns="0" anchor="t">
-            <a:spAutoFit/>
-          </a:bodyPr>
-          <a:p>
-            <a:pPr>
-              <a:lnSpc>
-                <a:spcPct val="100000"/>
-              </a:lnSpc>
-              <a:buNone/>
-            </a:pPr>
-            <a:r>
-              <a:rPr b="0" lang="en-US" sz="900" spc="-1" strike="noStrike">
-                <a:solidFill>
-                  <a:srgbClr val="6b6478"/>
-                </a:solidFill>
-                <a:latin typeface="Arial"/>
-                <a:ea typeface="DejaVu Sans"/>
-              </a:rPr>
-              <a:t>Rozkład klas – ręczna anotacja</a:t>
-            </a:r>
-            <a:endParaRPr b="0" lang="pl-PL" sz="900" spc="-1" strike="noStrike">
-              <a:latin typeface="Arial"/>
-            </a:endParaRPr>
-          </a:p>
-        </p:txBody>
-      </p:sp>
-      <p:sp>
-        <p:nvSpPr>
-          <p:cNvPr id="114" name="TextBox 40"/>
-          <p:cNvSpPr/>
-          <p:nvPr/>
-        </p:nvSpPr>
-        <p:spPr>
-          <a:xfrm>
-            <a:off x="3816000" y="6002640"/>
-            <a:ext cx="1727280" cy="273960"/>
-          </a:xfrm>
-          <a:prstGeom prst="rect">
-            <a:avLst/>
-          </a:prstGeom>
-          <a:noFill/>
-          <a:ln w="0">
-            <a:noFill/>
-          </a:ln>
-        </p:spPr>
-        <p:style>
-          <a:lnRef idx="0"/>
-          <a:fillRef idx="0"/>
-          <a:effectRef idx="0"/>
-          <a:fontRef idx="minor"/>
-        </p:style>
-        <p:txBody>
-          <a:bodyPr lIns="0" rIns="0" tIns="0" bIns="0" anchor="t">
-            <a:spAutoFit/>
-          </a:bodyPr>
-          <a:p>
-            <a:pPr>
-              <a:lnSpc>
-                <a:spcPct val="100000"/>
-              </a:lnSpc>
-              <a:buNone/>
-            </a:pPr>
-            <a:r>
-              <a:rPr b="0" lang="en-US" sz="900" spc="-1" strike="noStrike">
-                <a:solidFill>
-                  <a:srgbClr val="6b6478"/>
-                </a:solidFill>
-                <a:latin typeface="Arial"/>
-                <a:ea typeface="DejaVu Sans"/>
-              </a:rPr>
-              <a:t>Rozkład klas – automatyczne labelowanie</a:t>
-            </a:r>
-            <a:endParaRPr b="0" lang="pl-PL" sz="900" spc="-1" strike="noStrike">
               <a:latin typeface="Arial"/>
             </a:endParaRPr>
           </a:p>
@@ -28483,14 +28988,14 @@
       </p:grpSpPr>
       <p:sp>
         <p:nvSpPr>
-          <p:cNvPr id="115" name="TextBox 1"/>
+          <p:cNvPr id="131" name="TextBox 1"/>
           <p:cNvSpPr/>
           <p:nvPr/>
         </p:nvSpPr>
         <p:spPr>
           <a:xfrm>
             <a:off x="768240" y="420480"/>
-            <a:ext cx="10605240" cy="441360"/>
+            <a:ext cx="10604880" cy="441360"/>
           </a:xfrm>
           <a:prstGeom prst="rect">
             <a:avLst/>
@@ -28525,7 +29030,7 @@
                 <a:latin typeface="Play"/>
                 <a:ea typeface="DejaVu Sans"/>
               </a:rPr>
-              <a:t>Augmentacja danych</a:t>
+              <a:t>Labelowanie danych z wykorzystaniem LLM</a:t>
             </a:r>
             <a:endParaRPr b="0" lang="pl-PL" sz="2900" spc="-1" strike="noStrike">
               <a:latin typeface="Arial"/>
@@ -28535,14 +29040,14 @@
       </p:sp>
       <p:sp>
         <p:nvSpPr>
-          <p:cNvPr id="116" name="Rectangle 2"/>
+          <p:cNvPr id="132" name="Rectangle 2"/>
           <p:cNvSpPr/>
           <p:nvPr/>
         </p:nvSpPr>
         <p:spPr>
           <a:xfrm>
             <a:off x="768240" y="1170360"/>
-            <a:ext cx="1369800" cy="42480"/>
+            <a:ext cx="1369440" cy="42120"/>
           </a:xfrm>
           <a:prstGeom prst="rect">
             <a:avLst/>
@@ -28576,14 +29081,14 @@
       </p:sp>
       <p:sp>
         <p:nvSpPr>
-          <p:cNvPr id="117" name="TextBox 3"/>
+          <p:cNvPr id="133" name="TextBox 3"/>
           <p:cNvSpPr/>
           <p:nvPr/>
         </p:nvSpPr>
         <p:spPr>
           <a:xfrm>
             <a:off x="768240" y="1298520"/>
-            <a:ext cx="10605240" cy="227880"/>
+            <a:ext cx="10604880" cy="227880"/>
           </a:xfrm>
           <a:prstGeom prst="rect">
             <a:avLst/>
@@ -28618,7 +29123,7 @@
                 <a:latin typeface="Arial"/>
                 <a:ea typeface="DejaVu Sans"/>
               </a:rPr>
-              <a:t>Tworzenie nowych przykładów treningowych na bazie istniejącego zbioru</a:t>
+              <a:t>Przypisywanie etykiet przykładom — klasyczne (człowiek) vs wspierane LLM</a:t>
             </a:r>
             <a:endParaRPr b="0" lang="pl-PL" sz="1500" spc="-1" strike="noStrike">
               <a:latin typeface="Arial"/>
@@ -28628,14 +29133,14 @@
       </p:sp>
       <p:sp>
         <p:nvSpPr>
-          <p:cNvPr id="118" name="Rectangle 4"/>
+          <p:cNvPr id="134" name="Rectangle 4"/>
           <p:cNvSpPr/>
           <p:nvPr/>
         </p:nvSpPr>
         <p:spPr>
           <a:xfrm>
             <a:off x="0" y="6437520"/>
-            <a:ext cx="12189960" cy="13320"/>
+            <a:ext cx="12189600" cy="12960"/>
           </a:xfrm>
           <a:prstGeom prst="rect">
             <a:avLst/>
@@ -28669,14 +29174,14 @@
       </p:sp>
       <p:sp>
         <p:nvSpPr>
-          <p:cNvPr id="119" name="TextBox 5"/>
+          <p:cNvPr id="135" name="TextBox 5"/>
           <p:cNvSpPr/>
           <p:nvPr/>
         </p:nvSpPr>
         <p:spPr>
           <a:xfrm>
             <a:off x="768240" y="6473880"/>
-            <a:ext cx="8227800" cy="136800"/>
+            <a:ext cx="8227440" cy="136800"/>
           </a:xfrm>
           <a:prstGeom prst="rect">
             <a:avLst/>
@@ -28711,7 +29216,7 @@
                 <a:latin typeface="Arial"/>
                 <a:ea typeface="DejaVu Sans"/>
               </a:rPr>
-              <a:t>DSS 2026 AI Edition  ·  Teoria · Augmentacja</a:t>
+              <a:t>DSS 2026 AI Edition  ·  Teoria · Labelowanie</a:t>
             </a:r>
             <a:endParaRPr b="0" lang="pl-PL" sz="900" spc="-1" strike="noStrike">
               <a:latin typeface="Arial"/>
@@ -28721,14 +29226,14 @@
       </p:sp>
       <p:sp>
         <p:nvSpPr>
-          <p:cNvPr id="120" name="TextBox 6"/>
+          <p:cNvPr id="136" name="TextBox 6"/>
           <p:cNvSpPr/>
           <p:nvPr/>
         </p:nvSpPr>
         <p:spPr>
           <a:xfrm>
             <a:off x="10607040" y="6473880"/>
-            <a:ext cx="821160" cy="136800"/>
+            <a:ext cx="820800" cy="136800"/>
           </a:xfrm>
           <a:prstGeom prst="rect">
             <a:avLst/>
@@ -28763,7 +29268,7 @@
                 <a:latin typeface="Arial"/>
                 <a:ea typeface="DejaVu Sans"/>
               </a:rPr>
-              <a:t>5</a:t>
+              <a:t>6</a:t>
             </a:r>
             <a:endParaRPr b="0" lang="pl-PL" sz="900" spc="-1" strike="noStrike">
               <a:latin typeface="Arial"/>
@@ -28773,14 +29278,14 @@
       </p:sp>
       <p:sp>
         <p:nvSpPr>
-          <p:cNvPr id="121" name="TextBox 7"/>
+          <p:cNvPr id="137" name="TextBox 7"/>
           <p:cNvSpPr/>
           <p:nvPr/>
         </p:nvSpPr>
         <p:spPr>
           <a:xfrm>
             <a:off x="768240" y="1828800"/>
-            <a:ext cx="5118840" cy="227880"/>
+            <a:ext cx="5301360" cy="227880"/>
           </a:xfrm>
           <a:prstGeom prst="rect">
             <a:avLst/>
@@ -28815,7 +29320,7 @@
                 <a:latin typeface="Arial"/>
                 <a:ea typeface="DejaVu Sans"/>
               </a:rPr>
-              <a:t>Dobra augmentacja zapewnia, że przykłady:</a:t>
+              <a:t>Szczególnie przydatne, gdy:</a:t>
             </a:r>
             <a:endParaRPr b="0" lang="pl-PL" sz="1500" spc="-1" strike="noStrike">
               <a:latin typeface="Arial"/>
@@ -28825,14 +29330,14 @@
       </p:sp>
       <p:sp>
         <p:nvSpPr>
-          <p:cNvPr id="122" name="TextBox 8"/>
+          <p:cNvPr id="138" name="TextBox 8"/>
           <p:cNvSpPr/>
           <p:nvPr/>
         </p:nvSpPr>
         <p:spPr>
           <a:xfrm>
             <a:off x="768240" y="2286000"/>
-            <a:ext cx="5301720" cy="1823760"/>
+            <a:ext cx="5392800" cy="1692720"/>
           </a:xfrm>
           <a:prstGeom prst="rect">
             <a:avLst/>
@@ -28858,12 +29363,12 @@
                 <a:spcPct val="105000"/>
               </a:lnSpc>
               <a:spcAft>
-                <a:spcPts val="901"/>
+                <a:spcPts val="799"/>
               </a:spcAft>
               <a:buNone/>
             </a:pPr>
             <a:r>
-              <a:rPr b="0" lang="en-US" sz="1600" spc="-1" strike="noStrike">
+              <a:rPr b="0" lang="en-US" sz="1500" spc="-1" strike="noStrike">
                 <a:solidFill>
                   <a:srgbClr val="1b0532"/>
                 </a:solidFill>
@@ -28873,16 +29378,16 @@
               <a:t>▸  </a:t>
             </a:r>
             <a:r>
-              <a:rPr b="0" lang="en-US" sz="1600" spc="-1" strike="noStrike">
+              <a:rPr b="0" lang="en-US" sz="1500" spc="-1" strike="noStrike">
                 <a:solidFill>
                   <a:srgbClr val="1b0532"/>
                 </a:solidFill>
                 <a:latin typeface="Arial"/>
                 <a:ea typeface="DejaVu Sans"/>
               </a:rPr>
-              <a:t>są zgodne z problemem</a:t>
-            </a:r>
-            <a:endParaRPr b="0" lang="pl-PL" sz="1600" spc="-1" strike="noStrike">
+              <a:t>mamy dużo nieoznaczonych danych</a:t>
+            </a:r>
+            <a:endParaRPr b="0" lang="pl-PL" sz="1500" spc="-1" strike="noStrike">
               <a:latin typeface="Arial"/>
             </a:endParaRPr>
           </a:p>
@@ -28892,12 +29397,12 @@
                 <a:spcPct val="105000"/>
               </a:lnSpc>
               <a:spcAft>
-                <a:spcPts val="901"/>
+                <a:spcPts val="799"/>
               </a:spcAft>
               <a:buNone/>
             </a:pPr>
             <a:r>
-              <a:rPr b="0" lang="en-US" sz="1600" spc="-1" strike="noStrike">
+              <a:rPr b="0" lang="en-US" sz="1500" spc="-1" strike="noStrike">
                 <a:solidFill>
                   <a:srgbClr val="1b0532"/>
                 </a:solidFill>
@@ -28907,16 +29412,16 @@
               <a:t>▸  </a:t>
             </a:r>
             <a:r>
-              <a:rPr b="0" lang="en-US" sz="1600" spc="-1" strike="noStrike">
+              <a:rPr b="0" lang="en-US" sz="1500" spc="-1" strike="noStrike">
                 <a:solidFill>
                   <a:srgbClr val="1b0532"/>
                 </a:solidFill>
                 <a:latin typeface="Arial"/>
                 <a:ea typeface="DejaVu Sans"/>
               </a:rPr>
-              <a:t>zachowują poprawną etykietę</a:t>
-            </a:r>
-            <a:endParaRPr b="0" lang="pl-PL" sz="1600" spc="-1" strike="noStrike">
+              <a:t>chcemy szybko pierwszy zbiór treningowy</a:t>
+            </a:r>
+            <a:endParaRPr b="0" lang="pl-PL" sz="1500" spc="-1" strike="noStrike">
               <a:latin typeface="Arial"/>
             </a:endParaRPr>
           </a:p>
@@ -28926,12 +29431,12 @@
                 <a:spcPct val="105000"/>
               </a:lnSpc>
               <a:spcAft>
-                <a:spcPts val="901"/>
+                <a:spcPts val="799"/>
               </a:spcAft>
               <a:buNone/>
             </a:pPr>
             <a:r>
-              <a:rPr b="0" lang="en-US" sz="1600" spc="-1" strike="noStrike">
+              <a:rPr b="0" lang="en-US" sz="1500" spc="-1" strike="noStrike">
                 <a:solidFill>
                   <a:srgbClr val="1b0532"/>
                 </a:solidFill>
@@ -28941,16 +29446,16 @@
               <a:t>▸  </a:t>
             </a:r>
             <a:r>
-              <a:rPr b="0" lang="en-US" sz="1600" spc="-1" strike="noStrike">
+              <a:rPr b="0" lang="en-US" sz="1500" spc="-1" strike="noStrike">
                 <a:solidFill>
                   <a:srgbClr val="1b0532"/>
                 </a:solidFill>
                 <a:latin typeface="Arial"/>
                 <a:ea typeface="DejaVu Sans"/>
               </a:rPr>
-              <a:t>zwiększają różnorodność zbioru</a:t>
-            </a:r>
-            <a:endParaRPr b="0" lang="pl-PL" sz="1600" spc="-1" strike="noStrike">
+              <a:t>potrzebne wstępne etykiety do eksperymentów</a:t>
+            </a:r>
+            <a:endParaRPr b="0" lang="pl-PL" sz="1500" spc="-1" strike="noStrike">
               <a:latin typeface="Arial"/>
             </a:endParaRPr>
           </a:p>
@@ -28960,12 +29465,12 @@
                 <a:spcPct val="105000"/>
               </a:lnSpc>
               <a:spcAft>
-                <a:spcPts val="901"/>
+                <a:spcPts val="799"/>
               </a:spcAft>
               <a:buNone/>
             </a:pPr>
             <a:r>
-              <a:rPr b="0" lang="en-US" sz="1600" spc="-1" strike="noStrike">
+              <a:rPr b="0" lang="en-US" sz="1500" spc="-1" strike="noStrike">
                 <a:solidFill>
                   <a:srgbClr val="1b0532"/>
                 </a:solidFill>
@@ -28975,16 +29480,16 @@
               <a:t>▸  </a:t>
             </a:r>
             <a:r>
-              <a:rPr b="0" lang="en-US" sz="1600" spc="-1" strike="noStrike">
+              <a:rPr b="0" lang="en-US" sz="1500" spc="-1" strike="noStrike">
                 <a:solidFill>
                   <a:srgbClr val="1b0532"/>
                 </a:solidFill>
                 <a:latin typeface="Arial"/>
                 <a:ea typeface="DejaVu Sans"/>
               </a:rPr>
-              <a:t>pomagają modelowi generalizować</a:t>
-            </a:r>
-            <a:endParaRPr b="0" lang="pl-PL" sz="1600" spc="-1" strike="noStrike">
+              <a:t>chcemy ograniczyć koszt ręcznej anotacji</a:t>
+            </a:r>
+            <a:endParaRPr b="0" lang="pl-PL" sz="1500" spc="-1" strike="noStrike">
               <a:latin typeface="Arial"/>
             </a:endParaRPr>
           </a:p>
@@ -28994,12 +29499,12 @@
                 <a:spcPct val="105000"/>
               </a:lnSpc>
               <a:spcAft>
-                <a:spcPts val="901"/>
+                <a:spcPts val="799"/>
               </a:spcAft>
               <a:buNone/>
             </a:pPr>
             <a:r>
-              <a:rPr b="0" lang="en-US" sz="1600" spc="-1" strike="noStrike">
+              <a:rPr b="0" lang="en-US" sz="1500" spc="-1" strike="noStrike">
                 <a:solidFill>
                   <a:srgbClr val="1b0532"/>
                 </a:solidFill>
@@ -29009,284 +29514,31 @@
               <a:t>▸  </a:t>
             </a:r>
             <a:r>
-              <a:rPr b="0" lang="en-US" sz="1600" spc="-1" strike="noStrike">
+              <a:rPr b="0" lang="en-US" sz="1500" spc="-1" strike="noStrike">
                 <a:solidFill>
                   <a:srgbClr val="1b0532"/>
                 </a:solidFill>
                 <a:latin typeface="Arial"/>
                 <a:ea typeface="DejaVu Sans"/>
               </a:rPr>
-              <a:t>uzupełniają klasy słabo reprezentowane</a:t>
-            </a:r>
-            <a:endParaRPr b="0" lang="pl-PL" sz="1600" spc="-1" strike="noStrike">
-              <a:latin typeface="Arial"/>
-            </a:endParaRPr>
-          </a:p>
-        </p:txBody>
-      </p:sp>
-      <p:sp>
-        <p:nvSpPr>
-          <p:cNvPr id="123" name="TextBox 9"/>
+              <a:t>klasy da się jasno zdefiniować w promptach</a:t>
+            </a:r>
+            <a:endParaRPr b="0" lang="pl-PL" sz="1500" spc="-1" strike="noStrike">
+              <a:latin typeface="Arial"/>
+            </a:endParaRPr>
+          </a:p>
+        </p:txBody>
+      </p:sp>
+      <p:sp>
+        <p:nvSpPr>
+          <p:cNvPr id="139" name="Rounded Rectangle 9"/>
           <p:cNvSpPr/>
           <p:nvPr/>
         </p:nvSpPr>
         <p:spPr>
           <a:xfrm>
             <a:off x="6400800" y="1828800"/>
-            <a:ext cx="5027400" cy="227880"/>
-          </a:xfrm>
-          <a:prstGeom prst="rect">
-            <a:avLst/>
-          </a:prstGeom>
-          <a:noFill/>
-          <a:ln w="0">
-            <a:noFill/>
-          </a:ln>
-        </p:spPr>
-        <p:style>
-          <a:lnRef idx="0"/>
-          <a:fillRef idx="0"/>
-          <a:effectRef idx="0"/>
-          <a:fontRef idx="minor"/>
-        </p:style>
-        <p:txBody>
-          <a:bodyPr lIns="0" rIns="0" tIns="0" bIns="0" anchor="t">
-            <a:spAutoFit/>
-          </a:bodyPr>
-          <a:p>
-            <a:pPr>
-              <a:lnSpc>
-                <a:spcPct val="100000"/>
-              </a:lnSpc>
-              <a:buNone/>
-            </a:pPr>
-            <a:r>
-              <a:rPr b="1" lang="en-US" sz="1500" spc="-1" strike="noStrike">
-                <a:solidFill>
-                  <a:srgbClr val="1b0532"/>
-                </a:solidFill>
-                <a:latin typeface="Arial"/>
-                <a:ea typeface="DejaVu Sans"/>
-              </a:rPr>
-              <a:t>Metody dla tekstu:</a:t>
-            </a:r>
-            <a:endParaRPr b="0" lang="pl-PL" sz="1500" spc="-1" strike="noStrike">
-              <a:latin typeface="Arial"/>
-            </a:endParaRPr>
-          </a:p>
-        </p:txBody>
-      </p:sp>
-      <p:sp>
-        <p:nvSpPr>
-          <p:cNvPr id="124" name="TextBox 10"/>
-          <p:cNvSpPr/>
-          <p:nvPr/>
-        </p:nvSpPr>
-        <p:spPr>
-          <a:xfrm>
-            <a:off x="6400800" y="2286000"/>
-            <a:ext cx="5027400" cy="1823760"/>
-          </a:xfrm>
-          <a:prstGeom prst="rect">
-            <a:avLst/>
-          </a:prstGeom>
-          <a:noFill/>
-          <a:ln w="0">
-            <a:noFill/>
-          </a:ln>
-        </p:spPr>
-        <p:style>
-          <a:lnRef idx="0"/>
-          <a:fillRef idx="0"/>
-          <a:effectRef idx="0"/>
-          <a:fontRef idx="minor"/>
-        </p:style>
-        <p:txBody>
-          <a:bodyPr lIns="90000" rIns="90000" tIns="45000" bIns="45000" anchor="t">
-            <a:spAutoFit/>
-          </a:bodyPr>
-          <a:p>
-            <a:pPr>
-              <a:lnSpc>
-                <a:spcPct val="105000"/>
-              </a:lnSpc>
-              <a:spcAft>
-                <a:spcPts val="901"/>
-              </a:spcAft>
-              <a:buNone/>
-            </a:pPr>
-            <a:r>
-              <a:rPr b="0" lang="en-US" sz="1600" spc="-1" strike="noStrike">
-                <a:solidFill>
-                  <a:srgbClr val="1b0532"/>
-                </a:solidFill>
-                <a:latin typeface="Arial"/>
-                <a:ea typeface="DejaVu Sans"/>
-              </a:rPr>
-              <a:t>▸  </a:t>
-            </a:r>
-            <a:r>
-              <a:rPr b="0" lang="en-US" sz="1600" spc="-1" strike="noStrike">
-                <a:solidFill>
-                  <a:srgbClr val="1b0532"/>
-                </a:solidFill>
-                <a:latin typeface="Arial"/>
-                <a:ea typeface="DejaVu Sans"/>
-              </a:rPr>
-              <a:t>parafrazowanie przykładów</a:t>
-            </a:r>
-            <a:endParaRPr b="0" lang="pl-PL" sz="1600" spc="-1" strike="noStrike">
-              <a:latin typeface="Arial"/>
-            </a:endParaRPr>
-          </a:p>
-          <a:p>
-            <a:pPr>
-              <a:lnSpc>
-                <a:spcPct val="105000"/>
-              </a:lnSpc>
-              <a:spcAft>
-                <a:spcPts val="901"/>
-              </a:spcAft>
-              <a:buNone/>
-            </a:pPr>
-            <a:r>
-              <a:rPr b="0" lang="en-US" sz="1600" spc="-1" strike="noStrike">
-                <a:solidFill>
-                  <a:srgbClr val="1b0532"/>
-                </a:solidFill>
-                <a:latin typeface="Arial"/>
-                <a:ea typeface="DejaVu Sans"/>
-              </a:rPr>
-              <a:t>▸  </a:t>
-            </a:r>
-            <a:r>
-              <a:rPr b="0" lang="en-US" sz="1600" spc="-1" strike="noStrike">
-                <a:solidFill>
-                  <a:srgbClr val="1b0532"/>
-                </a:solidFill>
-                <a:latin typeface="Arial"/>
-                <a:ea typeface="DejaVu Sans"/>
-              </a:rPr>
-              <a:t>zmiana stylu / długości wypowiedzi</a:t>
-            </a:r>
-            <a:endParaRPr b="0" lang="pl-PL" sz="1600" spc="-1" strike="noStrike">
-              <a:latin typeface="Arial"/>
-            </a:endParaRPr>
-          </a:p>
-          <a:p>
-            <a:pPr>
-              <a:lnSpc>
-                <a:spcPct val="105000"/>
-              </a:lnSpc>
-              <a:spcAft>
-                <a:spcPts val="901"/>
-              </a:spcAft>
-              <a:buNone/>
-            </a:pPr>
-            <a:r>
-              <a:rPr b="0" lang="en-US" sz="1600" spc="-1" strike="noStrike">
-                <a:solidFill>
-                  <a:srgbClr val="1b0532"/>
-                </a:solidFill>
-                <a:latin typeface="Arial"/>
-                <a:ea typeface="DejaVu Sans"/>
-              </a:rPr>
-              <a:t>▸  </a:t>
-            </a:r>
-            <a:r>
-              <a:rPr b="0" lang="en-US" sz="1600" spc="-1" strike="noStrike">
-                <a:solidFill>
-                  <a:srgbClr val="1b0532"/>
-                </a:solidFill>
-                <a:latin typeface="Arial"/>
-                <a:ea typeface="DejaVu Sans"/>
-              </a:rPr>
-              <a:t>warianty formalne i nieformalne</a:t>
-            </a:r>
-            <a:endParaRPr b="0" lang="pl-PL" sz="1600" spc="-1" strike="noStrike">
-              <a:latin typeface="Arial"/>
-            </a:endParaRPr>
-          </a:p>
-          <a:p>
-            <a:pPr>
-              <a:lnSpc>
-                <a:spcPct val="105000"/>
-              </a:lnSpc>
-              <a:spcAft>
-                <a:spcPts val="901"/>
-              </a:spcAft>
-              <a:buNone/>
-            </a:pPr>
-            <a:r>
-              <a:rPr b="0" lang="en-US" sz="1600" spc="-1" strike="noStrike">
-                <a:solidFill>
-                  <a:srgbClr val="1b0532"/>
-                </a:solidFill>
-                <a:latin typeface="Arial"/>
-                <a:ea typeface="DejaVu Sans"/>
-              </a:rPr>
-              <a:t>▸  </a:t>
-            </a:r>
-            <a:r>
-              <a:rPr b="0" lang="en-US" sz="1600" spc="-1" strike="noStrike">
-                <a:solidFill>
-                  <a:srgbClr val="1b0532"/>
-                </a:solidFill>
-                <a:latin typeface="Arial"/>
-                <a:ea typeface="DejaVu Sans"/>
-              </a:rPr>
-              <a:t>literówki, slang, język potoczny</a:t>
-            </a:r>
-            <a:endParaRPr b="0" lang="pl-PL" sz="1600" spc="-1" strike="noStrike">
-              <a:latin typeface="Arial"/>
-            </a:endParaRPr>
-          </a:p>
-          <a:p>
-            <a:pPr>
-              <a:lnSpc>
-                <a:spcPct val="105000"/>
-              </a:lnSpc>
-              <a:spcAft>
-                <a:spcPts val="901"/>
-              </a:spcAft>
-              <a:buNone/>
-            </a:pPr>
-            <a:r>
-              <a:rPr b="0" lang="en-US" sz="1600" spc="-1" strike="noStrike">
-                <a:solidFill>
-                  <a:srgbClr val="1b0532"/>
-                </a:solidFill>
-                <a:latin typeface="Arial"/>
-                <a:ea typeface="DejaVu Sans"/>
-              </a:rPr>
-              <a:t>▸  </a:t>
-            </a:r>
-            <a:r>
-              <a:rPr b="0" lang="en-US" sz="1600" spc="-1" strike="noStrike">
-                <a:solidFill>
-                  <a:srgbClr val="1b0532"/>
-                </a:solidFill>
-                <a:latin typeface="Arial"/>
-                <a:ea typeface="DejaVu Sans"/>
-              </a:rPr>
-              <a:t>przykłady rzadkie i graniczne</a:t>
-            </a:r>
-            <a:endParaRPr b="0" lang="pl-PL" sz="1600" spc="-1" strike="noStrike">
-              <a:latin typeface="Arial"/>
-            </a:endParaRPr>
-          </a:p>
-        </p:txBody>
-      </p:sp>
-      <p:sp>
-        <p:nvSpPr>
-          <p:cNvPr id="125" name="Rounded Rectangle 11"/>
-          <p:cNvSpPr/>
-          <p:nvPr/>
-        </p:nvSpPr>
-        <p:spPr>
-          <a:xfrm>
-            <a:off x="768240" y="5074920"/>
-            <a:ext cx="10650960" cy="866880"/>
+            <a:ext cx="5027040" cy="1552320"/>
           </a:xfrm>
           <a:prstGeom prst="roundRect">
             <a:avLst>
@@ -29322,20 +29574,20 @@
       </p:sp>
       <p:sp>
         <p:nvSpPr>
-          <p:cNvPr id="126" name="Rectangle 12"/>
-          <p:cNvSpPr/>
-          <p:nvPr/>
-        </p:nvSpPr>
-        <p:spPr>
-          <a:xfrm>
-            <a:off x="768240" y="5074920"/>
-            <a:ext cx="48960" cy="866880"/>
+          <p:cNvPr id="140" name="Rectangle 10"/>
+          <p:cNvSpPr/>
+          <p:nvPr/>
+        </p:nvSpPr>
+        <p:spPr>
+          <a:xfrm>
+            <a:off x="6400800" y="1828800"/>
+            <a:ext cx="48600" cy="1552320"/>
           </a:xfrm>
           <a:prstGeom prst="rect">
             <a:avLst/>
           </a:prstGeom>
           <a:solidFill>
-            <a:srgbClr val="00befe"/>
+            <a:srgbClr val="c97a00"/>
           </a:solidFill>
           <a:ln>
             <a:noFill/>
@@ -29363,14 +29615,14 @@
       </p:sp>
       <p:sp>
         <p:nvSpPr>
-          <p:cNvPr id="127" name="TextBox 13"/>
-          <p:cNvSpPr/>
-          <p:nvPr/>
-        </p:nvSpPr>
-        <p:spPr>
-          <a:xfrm>
-            <a:off x="1024200" y="5311440"/>
-            <a:ext cx="10193760" cy="430560"/>
+          <p:cNvPr id="141" name="TextBox 11"/>
+          <p:cNvSpPr/>
+          <p:nvPr/>
+        </p:nvSpPr>
+        <p:spPr>
+          <a:xfrm>
+            <a:off x="6656760" y="2304360"/>
+            <a:ext cx="4569840" cy="638280"/>
           </a:xfrm>
           <a:prstGeom prst="rect">
             <a:avLst/>
@@ -29405,7 +29657,7 @@
                 <a:latin typeface="Arial"/>
                 <a:ea typeface="DejaVu Sans"/>
               </a:rPr>
-              <a:t>▸  </a:t>
+              <a:t>⚠  </a:t>
             </a:r>
             <a:r>
               <a:rPr b="1" lang="en-US" sz="1400" spc="-1" strike="noStrike">
@@ -29415,7 +29667,7 @@
                 <a:latin typeface="Arial"/>
                 <a:ea typeface="DejaVu Sans"/>
               </a:rPr>
-              <a:t>Przykład (etykieta zachowana)</a:t>
+              <a:t>Uwaga</a:t>
             </a:r>
             <a:endParaRPr b="0" lang="pl-PL" sz="1400" spc="-1" strike="noStrike">
               <a:latin typeface="Arial"/>
@@ -29436,8 +29688,165 @@
                 <a:latin typeface="Arial"/>
                 <a:ea typeface="DejaVu Sans"/>
               </a:rPr>
-              <a:t>„</a:t>
-            </a:r>
+              <a:t>Etykiety LLM to tylko propozycje. Model myli się przy ironii, niejednoznaczności, braku kontekstu i slangu.</a:t>
+            </a:r>
+            <a:endParaRPr b="0" lang="pl-PL" sz="1300" spc="-1" strike="noStrike">
+              <a:latin typeface="Arial"/>
+            </a:endParaRPr>
+          </a:p>
+        </p:txBody>
+      </p:sp>
+      <p:sp>
+        <p:nvSpPr>
+          <p:cNvPr id="142" name="Rounded Rectangle 12"/>
+          <p:cNvSpPr/>
+          <p:nvPr/>
+        </p:nvSpPr>
+        <p:spPr>
+          <a:xfrm>
+            <a:off x="6400800" y="3566160"/>
+            <a:ext cx="5027040" cy="1506600"/>
+          </a:xfrm>
+          <a:prstGeom prst="roundRect">
+            <a:avLst>
+              <a:gd name="adj" fmla="val 16667"/>
+            </a:avLst>
+          </a:prstGeom>
+          <a:solidFill>
+            <a:srgbClr val="f2f1f6"/>
+          </a:solidFill>
+          <a:ln>
+            <a:noFill/>
+          </a:ln>
+          <a:effectLst>
+            <a:outerShdw blurRad="39960" dir="5400000" dist="23040" rotWithShape="0">
+              <a:srgbClr val="000000">
+                <a:alpha val="35000"/>
+              </a:srgbClr>
+            </a:outerShdw>
+          </a:effectLst>
+        </p:spPr>
+        <p:style>
+          <a:lnRef idx="1">
+            <a:schemeClr val="accent1"/>
+          </a:lnRef>
+          <a:fillRef idx="3">
+            <a:schemeClr val="accent1"/>
+          </a:fillRef>
+          <a:effectRef idx="2">
+            <a:schemeClr val="accent1"/>
+          </a:effectRef>
+          <a:fontRef idx="minor"/>
+        </p:style>
+      </p:sp>
+      <p:sp>
+        <p:nvSpPr>
+          <p:cNvPr id="143" name="Rectangle 13"/>
+          <p:cNvSpPr/>
+          <p:nvPr/>
+        </p:nvSpPr>
+        <p:spPr>
+          <a:xfrm>
+            <a:off x="6400800" y="3566160"/>
+            <a:ext cx="48600" cy="1506600"/>
+          </a:xfrm>
+          <a:prstGeom prst="rect">
+            <a:avLst/>
+          </a:prstGeom>
+          <a:solidFill>
+            <a:srgbClr val="1f9e55"/>
+          </a:solidFill>
+          <a:ln>
+            <a:noFill/>
+          </a:ln>
+          <a:effectLst>
+            <a:outerShdw blurRad="39960" dir="5400000" dist="23040" rotWithShape="0">
+              <a:srgbClr val="000000">
+                <a:alpha val="35000"/>
+              </a:srgbClr>
+            </a:outerShdw>
+          </a:effectLst>
+        </p:spPr>
+        <p:style>
+          <a:lnRef idx="1">
+            <a:schemeClr val="accent1"/>
+          </a:lnRef>
+          <a:fillRef idx="3">
+            <a:schemeClr val="accent1"/>
+          </a:fillRef>
+          <a:effectRef idx="2">
+            <a:schemeClr val="accent1"/>
+          </a:effectRef>
+          <a:fontRef idx="minor"/>
+        </p:style>
+      </p:sp>
+      <p:sp>
+        <p:nvSpPr>
+          <p:cNvPr id="144" name="TextBox 14"/>
+          <p:cNvSpPr/>
+          <p:nvPr/>
+        </p:nvSpPr>
+        <p:spPr>
+          <a:xfrm>
+            <a:off x="6656760" y="3915000"/>
+            <a:ext cx="4569840" cy="846000"/>
+          </a:xfrm>
+          <a:prstGeom prst="rect">
+            <a:avLst/>
+          </a:prstGeom>
+          <a:noFill/>
+          <a:ln w="0">
+            <a:noFill/>
+          </a:ln>
+        </p:spPr>
+        <p:style>
+          <a:lnRef idx="0"/>
+          <a:fillRef idx="0"/>
+          <a:effectRef idx="0"/>
+          <a:fontRef idx="minor"/>
+        </p:style>
+        <p:txBody>
+          <a:bodyPr lIns="0" rIns="0" tIns="0" bIns="0" anchor="ctr">
+            <a:spAutoFit/>
+          </a:bodyPr>
+          <a:p>
+            <a:pPr>
+              <a:lnSpc>
+                <a:spcPct val="105000"/>
+              </a:lnSpc>
+              <a:buNone/>
+            </a:pPr>
+            <a:r>
+              <a:rPr b="1" lang="en-US" sz="1400" spc="-1" strike="noStrike">
+                <a:solidFill>
+                  <a:srgbClr val="1b0532"/>
+                </a:solidFill>
+                <a:latin typeface="Arial"/>
+                <a:ea typeface="DejaVu Sans"/>
+              </a:rPr>
+              <a:t>✓  </a:t>
+            </a:r>
+            <a:r>
+              <a:rPr b="1" lang="en-US" sz="1400" spc="-1" strike="noStrike">
+                <a:solidFill>
+                  <a:srgbClr val="1b0532"/>
+                </a:solidFill>
+                <a:latin typeface="Arial"/>
+                <a:ea typeface="DejaVu Sans"/>
+              </a:rPr>
+              <a:t>Zasada</a:t>
+            </a:r>
+            <a:endParaRPr b="0" lang="pl-PL" sz="1400" spc="-1" strike="noStrike">
+              <a:latin typeface="Arial"/>
+            </a:endParaRPr>
+          </a:p>
+          <a:p>
+            <a:pPr>
+              <a:lnSpc>
+                <a:spcPct val="105000"/>
+              </a:lnSpc>
+              <a:buNone/>
+            </a:pPr>
             <a:r>
               <a:rPr b="0" lang="en-US" sz="1300" spc="-1" strike="noStrike">
                 <a:solidFill>
@@ -29446,9 +29855,159 @@
                 <a:latin typeface="Arial"/>
                 <a:ea typeface="DejaVu Sans"/>
               </a:rPr>
-              <a:t>Chcę zwrócić produkt…” [zwrot]  →  „Jak odesłać towar?” · „Czy da się zrobić zwrot?” — wszystkie warianty pozostają w tej samej klasie.</a:t>
+              <a:t>LLM nie zastępuje człowieka — przyspiesza etykietowanie. Człowiek kontroluje jakość, poprawia błędy i rozstrzyga trudne przypadki.</a:t>
             </a:r>
             <a:endParaRPr b="0" lang="pl-PL" sz="1300" spc="-1" strike="noStrike">
+              <a:latin typeface="Arial"/>
+            </a:endParaRPr>
+          </a:p>
+        </p:txBody>
+      </p:sp>
+      <p:pic>
+        <p:nvPicPr>
+          <p:cNvPr id="145" name="" descr=""/>
+          <p:cNvPicPr/>
+          <p:nvPr/>
+        </p:nvPicPr>
+        <p:blipFill>
+          <a:blip r:embed="rId1"/>
+          <a:stretch/>
+        </p:blipFill>
+        <p:spPr>
+          <a:xfrm>
+            <a:off x="144000" y="4077720"/>
+            <a:ext cx="3036600" cy="1897200"/>
+          </a:xfrm>
+          <a:prstGeom prst="rect">
+            <a:avLst/>
+          </a:prstGeom>
+          <a:ln w="0">
+            <a:noFill/>
+          </a:ln>
+        </p:spPr>
+      </p:pic>
+      <p:pic>
+        <p:nvPicPr>
+          <p:cNvPr id="146" name="" descr=""/>
+          <p:cNvPicPr/>
+          <p:nvPr/>
+        </p:nvPicPr>
+        <p:blipFill>
+          <a:blip r:embed="rId2"/>
+          <a:stretch/>
+        </p:blipFill>
+        <p:spPr>
+          <a:xfrm>
+            <a:off x="3384000" y="4176000"/>
+            <a:ext cx="2922120" cy="1825560"/>
+          </a:xfrm>
+          <a:prstGeom prst="rect">
+            <a:avLst/>
+          </a:prstGeom>
+          <a:ln w="0">
+            <a:noFill/>
+          </a:ln>
+        </p:spPr>
+      </p:pic>
+      <p:sp>
+        <p:nvSpPr>
+          <p:cNvPr id="147" name="TextBox 37"/>
+          <p:cNvSpPr/>
+          <p:nvPr/>
+        </p:nvSpPr>
+        <p:spPr>
+          <a:xfrm>
+            <a:off x="864000" y="5976000"/>
+            <a:ext cx="1726920" cy="136800"/>
+          </a:xfrm>
+          <a:prstGeom prst="rect">
+            <a:avLst/>
+          </a:prstGeom>
+          <a:noFill/>
+          <a:ln w="0">
+            <a:noFill/>
+          </a:ln>
+        </p:spPr>
+        <p:style>
+          <a:lnRef idx="0"/>
+          <a:fillRef idx="0"/>
+          <a:effectRef idx="0"/>
+          <a:fontRef idx="minor"/>
+        </p:style>
+        <p:txBody>
+          <a:bodyPr lIns="0" rIns="0" tIns="0" bIns="0" anchor="t">
+            <a:spAutoFit/>
+          </a:bodyPr>
+          <a:p>
+            <a:pPr>
+              <a:lnSpc>
+                <a:spcPct val="100000"/>
+              </a:lnSpc>
+              <a:buNone/>
+            </a:pPr>
+            <a:r>
+              <a:rPr b="0" lang="en-US" sz="900" spc="-1" strike="noStrike">
+                <a:solidFill>
+                  <a:srgbClr val="6b6478"/>
+                </a:solidFill>
+                <a:latin typeface="Arial"/>
+                <a:ea typeface="DejaVu Sans"/>
+              </a:rPr>
+              <a:t>Rozkład klas – ręczna anotacja</a:t>
+            </a:r>
+            <a:endParaRPr b="0" lang="pl-PL" sz="900" spc="-1" strike="noStrike">
+              <a:latin typeface="Arial"/>
+            </a:endParaRPr>
+          </a:p>
+        </p:txBody>
+      </p:sp>
+      <p:sp>
+        <p:nvSpPr>
+          <p:cNvPr id="148" name="TextBox 40"/>
+          <p:cNvSpPr/>
+          <p:nvPr/>
+        </p:nvSpPr>
+        <p:spPr>
+          <a:xfrm>
+            <a:off x="3816000" y="6002640"/>
+            <a:ext cx="1726920" cy="273960"/>
+          </a:xfrm>
+          <a:prstGeom prst="rect">
+            <a:avLst/>
+          </a:prstGeom>
+          <a:noFill/>
+          <a:ln w="0">
+            <a:noFill/>
+          </a:ln>
+        </p:spPr>
+        <p:style>
+          <a:lnRef idx="0"/>
+          <a:fillRef idx="0"/>
+          <a:effectRef idx="0"/>
+          <a:fontRef idx="minor"/>
+        </p:style>
+        <p:txBody>
+          <a:bodyPr lIns="0" rIns="0" tIns="0" bIns="0" anchor="t">
+            <a:spAutoFit/>
+          </a:bodyPr>
+          <a:p>
+            <a:pPr>
+              <a:lnSpc>
+                <a:spcPct val="100000"/>
+              </a:lnSpc>
+              <a:buNone/>
+            </a:pPr>
+            <a:r>
+              <a:rPr b="0" lang="en-US" sz="900" spc="-1" strike="noStrike">
+                <a:solidFill>
+                  <a:srgbClr val="6b6478"/>
+                </a:solidFill>
+                <a:latin typeface="Arial"/>
+                <a:ea typeface="DejaVu Sans"/>
+              </a:rPr>
+              <a:t>Rozkład klas – automatyczne labelowanie</a:t>
+            </a:r>
+            <a:endParaRPr b="0" lang="pl-PL" sz="900" spc="-1" strike="noStrike">
               <a:latin typeface="Arial"/>
             </a:endParaRPr>
           </a:p>
@@ -29493,14 +30052,14 @@
       </p:grpSpPr>
       <p:sp>
         <p:nvSpPr>
-          <p:cNvPr id="128" name="TextBox 1"/>
+          <p:cNvPr id="149" name="TextBox 1"/>
           <p:cNvSpPr/>
           <p:nvPr/>
         </p:nvSpPr>
         <p:spPr>
           <a:xfrm>
             <a:off x="768240" y="420480"/>
-            <a:ext cx="10605240" cy="441360"/>
+            <a:ext cx="10604880" cy="441360"/>
           </a:xfrm>
           <a:prstGeom prst="rect">
             <a:avLst/>
@@ -29535,7 +30094,7 @@
                 <a:latin typeface="Play"/>
                 <a:ea typeface="DejaVu Sans"/>
               </a:rPr>
-              <a:t>Które dane warto augmentować?</a:t>
+              <a:t>Augmentacja danych</a:t>
             </a:r>
             <a:endParaRPr b="0" lang="pl-PL" sz="2900" spc="-1" strike="noStrike">
               <a:latin typeface="Arial"/>
@@ -29545,14 +30104,14 @@
       </p:sp>
       <p:sp>
         <p:nvSpPr>
-          <p:cNvPr id="129" name="Rectangle 2"/>
+          <p:cNvPr id="150" name="Rectangle 2"/>
           <p:cNvSpPr/>
           <p:nvPr/>
         </p:nvSpPr>
         <p:spPr>
           <a:xfrm>
             <a:off x="768240" y="1170360"/>
-            <a:ext cx="1369800" cy="42480"/>
+            <a:ext cx="1369440" cy="42120"/>
           </a:xfrm>
           <a:prstGeom prst="rect">
             <a:avLst/>
@@ -29586,14 +30145,14 @@
       </p:sp>
       <p:sp>
         <p:nvSpPr>
-          <p:cNvPr id="130" name="TextBox 3"/>
+          <p:cNvPr id="151" name="TextBox 3"/>
           <p:cNvSpPr/>
           <p:nvPr/>
         </p:nvSpPr>
         <p:spPr>
           <a:xfrm>
             <a:off x="768240" y="1298520"/>
-            <a:ext cx="10605240" cy="227880"/>
+            <a:ext cx="10604880" cy="227880"/>
           </a:xfrm>
           <a:prstGeom prst="rect">
             <a:avLst/>
@@ -29628,7 +30187,7 @@
                 <a:latin typeface="Arial"/>
                 <a:ea typeface="DejaVu Sans"/>
               </a:rPr>
-              <a:t>Nie zawsze cały zbiór po równo (przykład clarin-pl/twitteremo → sample 5k)</a:t>
+              <a:t>Tworzenie nowych przykładów treningowych na bazie istniejącego zbioru</a:t>
             </a:r>
             <a:endParaRPr b="0" lang="pl-PL" sz="1500" spc="-1" strike="noStrike">
               <a:latin typeface="Arial"/>
@@ -29638,14 +30197,14 @@
       </p:sp>
       <p:sp>
         <p:nvSpPr>
-          <p:cNvPr id="131" name="Rectangle 4"/>
+          <p:cNvPr id="152" name="Rectangle 4"/>
           <p:cNvSpPr/>
           <p:nvPr/>
         </p:nvSpPr>
         <p:spPr>
           <a:xfrm>
             <a:off x="0" y="6437520"/>
-            <a:ext cx="12189960" cy="13320"/>
+            <a:ext cx="12189600" cy="12960"/>
           </a:xfrm>
           <a:prstGeom prst="rect">
             <a:avLst/>
@@ -29679,14 +30238,14 @@
       </p:sp>
       <p:sp>
         <p:nvSpPr>
-          <p:cNvPr id="132" name="TextBox 5"/>
+          <p:cNvPr id="153" name="TextBox 5"/>
           <p:cNvSpPr/>
           <p:nvPr/>
         </p:nvSpPr>
         <p:spPr>
           <a:xfrm>
             <a:off x="768240" y="6473880"/>
-            <a:ext cx="8227800" cy="136800"/>
+            <a:ext cx="8227440" cy="136800"/>
           </a:xfrm>
           <a:prstGeom prst="rect">
             <a:avLst/>
@@ -29721,7 +30280,7 @@
                 <a:latin typeface="Arial"/>
                 <a:ea typeface="DejaVu Sans"/>
               </a:rPr>
-              <a:t>DSS 2026 AI Edition  ·  Teoria · Active Learning</a:t>
+              <a:t>DSS 2026 AI Edition  ·  Teoria · Augmentacja</a:t>
             </a:r>
             <a:endParaRPr b="0" lang="pl-PL" sz="900" spc="-1" strike="noStrike">
               <a:latin typeface="Arial"/>
@@ -29731,14 +30290,14 @@
       </p:sp>
       <p:sp>
         <p:nvSpPr>
-          <p:cNvPr id="133" name="TextBox 6"/>
+          <p:cNvPr id="154" name="TextBox 6"/>
           <p:cNvSpPr/>
           <p:nvPr/>
         </p:nvSpPr>
         <p:spPr>
           <a:xfrm>
             <a:off x="10607040" y="6473880"/>
-            <a:ext cx="821160" cy="136800"/>
+            <a:ext cx="820800" cy="136800"/>
           </a:xfrm>
           <a:prstGeom prst="rect">
             <a:avLst/>
@@ -29773,7 +30332,7 @@
                 <a:latin typeface="Arial"/>
                 <a:ea typeface="DejaVu Sans"/>
               </a:rPr>
-              <a:t>9</a:t>
+              <a:t>5</a:t>
             </a:r>
             <a:endParaRPr b="0" lang="pl-PL" sz="900" spc="-1" strike="noStrike">
               <a:latin typeface="Arial"/>
@@ -29783,14 +30342,14 @@
       </p:sp>
       <p:sp>
         <p:nvSpPr>
-          <p:cNvPr id="134" name="TextBox 7"/>
+          <p:cNvPr id="155" name="TextBox 7"/>
           <p:cNvSpPr/>
           <p:nvPr/>
         </p:nvSpPr>
         <p:spPr>
           <a:xfrm>
             <a:off x="768240" y="1828800"/>
-            <a:ext cx="5393160" cy="1692720"/>
+            <a:ext cx="5118480" cy="227880"/>
           </a:xfrm>
           <a:prstGeom prst="rect">
             <a:avLst/>
@@ -29807,6 +30366,58 @@
           <a:fontRef idx="minor"/>
         </p:style>
         <p:txBody>
+          <a:bodyPr lIns="0" rIns="0" tIns="0" bIns="0" anchor="t">
+            <a:spAutoFit/>
+          </a:bodyPr>
+          <a:p>
+            <a:pPr>
+              <a:lnSpc>
+                <a:spcPct val="100000"/>
+              </a:lnSpc>
+              <a:buNone/>
+            </a:pPr>
+            <a:r>
+              <a:rPr b="1" lang="en-US" sz="1500" spc="-1" strike="noStrike">
+                <a:solidFill>
+                  <a:srgbClr val="1b0532"/>
+                </a:solidFill>
+                <a:latin typeface="Arial"/>
+                <a:ea typeface="DejaVu Sans"/>
+              </a:rPr>
+              <a:t>Dobra augmentacja zapewnia, że przykłady:</a:t>
+            </a:r>
+            <a:endParaRPr b="0" lang="pl-PL" sz="1500" spc="-1" strike="noStrike">
+              <a:latin typeface="Arial"/>
+            </a:endParaRPr>
+          </a:p>
+        </p:txBody>
+      </p:sp>
+      <p:sp>
+        <p:nvSpPr>
+          <p:cNvPr id="156" name="TextBox 8"/>
+          <p:cNvSpPr/>
+          <p:nvPr/>
+        </p:nvSpPr>
+        <p:spPr>
+          <a:xfrm>
+            <a:off x="768240" y="2286000"/>
+            <a:ext cx="5301360" cy="1823760"/>
+          </a:xfrm>
+          <a:prstGeom prst="rect">
+            <a:avLst/>
+          </a:prstGeom>
+          <a:noFill/>
+          <a:ln w="0">
+            <a:noFill/>
+          </a:ln>
+        </p:spPr>
+        <p:style>
+          <a:lnRef idx="0"/>
+          <a:fillRef idx="0"/>
+          <a:effectRef idx="0"/>
+          <a:fontRef idx="minor"/>
+        </p:style>
+        <p:txBody>
           <a:bodyPr lIns="90000" rIns="90000" tIns="45000" bIns="45000" anchor="t">
             <a:spAutoFit/>
           </a:bodyPr>
@@ -29816,12 +30427,12 @@
                 <a:spcPct val="105000"/>
               </a:lnSpc>
               <a:spcAft>
-                <a:spcPts val="799"/>
+                <a:spcPts val="901"/>
               </a:spcAft>
               <a:buNone/>
             </a:pPr>
             <a:r>
-              <a:rPr b="0" lang="en-US" sz="1500" spc="-1" strike="noStrike">
+              <a:rPr b="0" lang="en-US" sz="1600" spc="-1" strike="noStrike">
                 <a:solidFill>
                   <a:srgbClr val="1b0532"/>
                 </a:solidFill>
@@ -29831,16 +30442,16 @@
               <a:t>▸  </a:t>
             </a:r>
             <a:r>
-              <a:rPr b="0" lang="en-US" sz="1500" spc="-1" strike="noStrike">
+              <a:rPr b="0" lang="en-US" sz="1600" spc="-1" strike="noStrike">
                 <a:solidFill>
                   <a:srgbClr val="1b0532"/>
                 </a:solidFill>
                 <a:latin typeface="Arial"/>
                 <a:ea typeface="DejaVu Sans"/>
               </a:rPr>
-              <a:t>klasy o najgorszych wynikach modelu</a:t>
-            </a:r>
-            <a:endParaRPr b="0" lang="pl-PL" sz="1500" spc="-1" strike="noStrike">
+              <a:t>są zgodne z problemem</a:t>
+            </a:r>
+            <a:endParaRPr b="0" lang="pl-PL" sz="1600" spc="-1" strike="noStrike">
               <a:latin typeface="Arial"/>
             </a:endParaRPr>
           </a:p>
@@ -29850,12 +30461,12 @@
                 <a:spcPct val="105000"/>
               </a:lnSpc>
               <a:spcAft>
-                <a:spcPts val="799"/>
+                <a:spcPts val="901"/>
               </a:spcAft>
               <a:buNone/>
             </a:pPr>
             <a:r>
-              <a:rPr b="0" lang="en-US" sz="1500" spc="-1" strike="noStrike">
+              <a:rPr b="0" lang="en-US" sz="1600" spc="-1" strike="noStrike">
                 <a:solidFill>
                   <a:srgbClr val="1b0532"/>
                 </a:solidFill>
@@ -29865,16 +30476,16 @@
               <a:t>▸  </a:t>
             </a:r>
             <a:r>
-              <a:rPr b="0" lang="en-US" sz="1500" spc="-1" strike="noStrike">
+              <a:rPr b="0" lang="en-US" sz="1600" spc="-1" strike="noStrike">
                 <a:solidFill>
                   <a:srgbClr val="1b0532"/>
                 </a:solidFill>
                 <a:latin typeface="Arial"/>
                 <a:ea typeface="DejaVu Sans"/>
               </a:rPr>
-              <a:t>przykłady z pogranicza kilku klas</a:t>
-            </a:r>
-            <a:endParaRPr b="0" lang="pl-PL" sz="1500" spc="-1" strike="noStrike">
+              <a:t>zachowują poprawną etykietę</a:t>
+            </a:r>
+            <a:endParaRPr b="0" lang="pl-PL" sz="1600" spc="-1" strike="noStrike">
               <a:latin typeface="Arial"/>
             </a:endParaRPr>
           </a:p>
@@ -29884,12 +30495,12 @@
                 <a:spcPct val="105000"/>
               </a:lnSpc>
               <a:spcAft>
-                <a:spcPts val="799"/>
+                <a:spcPts val="901"/>
               </a:spcAft>
               <a:buNone/>
             </a:pPr>
             <a:r>
-              <a:rPr b="0" lang="en-US" sz="1500" spc="-1" strike="noStrike">
+              <a:rPr b="0" lang="en-US" sz="1600" spc="-1" strike="noStrike">
                 <a:solidFill>
                   <a:srgbClr val="1b0532"/>
                 </a:solidFill>
@@ -29899,16 +30510,16 @@
               <a:t>▸  </a:t>
             </a:r>
             <a:r>
-              <a:rPr b="0" lang="en-US" sz="1500" spc="-1" strike="noStrike">
+              <a:rPr b="0" lang="en-US" sz="1600" spc="-1" strike="noStrike">
                 <a:solidFill>
                   <a:srgbClr val="1b0532"/>
                 </a:solidFill>
                 <a:latin typeface="Arial"/>
                 <a:ea typeface="DejaVu Sans"/>
               </a:rPr>
-              <a:t>przypadki ważne biznesowo (wskazane przez człowieka)</a:t>
-            </a:r>
-            <a:endParaRPr b="0" lang="pl-PL" sz="1500" spc="-1" strike="noStrike">
+              <a:t>zwiększają różnorodność zbioru</a:t>
+            </a:r>
+            <a:endParaRPr b="0" lang="pl-PL" sz="1600" spc="-1" strike="noStrike">
               <a:latin typeface="Arial"/>
             </a:endParaRPr>
           </a:p>
@@ -29918,12 +30529,12 @@
                 <a:spcPct val="105000"/>
               </a:lnSpc>
               <a:spcAft>
-                <a:spcPts val="799"/>
+                <a:spcPts val="901"/>
               </a:spcAft>
               <a:buNone/>
             </a:pPr>
             <a:r>
-              <a:rPr b="0" lang="en-US" sz="1500" spc="-1" strike="noStrike">
+              <a:rPr b="0" lang="en-US" sz="1600" spc="-1" strike="noStrike">
                 <a:solidFill>
                   <a:srgbClr val="1b0532"/>
                 </a:solidFill>
@@ -29933,16 +30544,16 @@
               <a:t>▸  </a:t>
             </a:r>
             <a:r>
-              <a:rPr b="0" lang="en-US" sz="1500" spc="-1" strike="noStrike">
+              <a:rPr b="0" lang="en-US" sz="1600" spc="-1" strike="noStrike">
                 <a:solidFill>
                   <a:srgbClr val="1b0532"/>
                 </a:solidFill>
                 <a:latin typeface="Arial"/>
                 <a:ea typeface="DejaVu Sans"/>
               </a:rPr>
-              <a:t>przykłady o niskiej pewności modelu</a:t>
-            </a:r>
-            <a:endParaRPr b="0" lang="pl-PL" sz="1500" spc="-1" strike="noStrike">
+              <a:t>pomagają modelowi generalizować</a:t>
+            </a:r>
+            <a:endParaRPr b="0" lang="pl-PL" sz="1600" spc="-1" strike="noStrike">
               <a:latin typeface="Arial"/>
             </a:endParaRPr>
           </a:p>
@@ -29952,12 +30563,12 @@
                 <a:spcPct val="105000"/>
               </a:lnSpc>
               <a:spcAft>
-                <a:spcPts val="799"/>
+                <a:spcPts val="901"/>
               </a:spcAft>
               <a:buNone/>
             </a:pPr>
             <a:r>
-              <a:rPr b="0" lang="en-US" sz="1500" spc="-1" strike="noStrike">
+              <a:rPr b="0" lang="en-US" sz="1600" spc="-1" strike="noStrike">
                 <a:solidFill>
                   <a:srgbClr val="1b0532"/>
                 </a:solidFill>
@@ -29967,31 +30578,31 @@
               <a:t>▸  </a:t>
             </a:r>
             <a:r>
-              <a:rPr b="0" lang="en-US" sz="1500" spc="-1" strike="noStrike">
+              <a:rPr b="0" lang="en-US" sz="1600" spc="-1" strike="noStrike">
                 <a:solidFill>
                   <a:srgbClr val="1b0532"/>
                 </a:solidFill>
                 <a:latin typeface="Arial"/>
                 <a:ea typeface="DejaVu Sans"/>
               </a:rPr>
-              <a:t>nietypowe warianty językowe, slang, błędy</a:t>
-            </a:r>
-            <a:endParaRPr b="0" lang="pl-PL" sz="1500" spc="-1" strike="noStrike">
-              <a:latin typeface="Arial"/>
-            </a:endParaRPr>
-          </a:p>
-        </p:txBody>
-      </p:sp>
-      <p:sp>
-        <p:nvSpPr>
-          <p:cNvPr id="135" name="TextBox 8"/>
-          <p:cNvSpPr/>
-          <p:nvPr/>
-        </p:nvSpPr>
-        <p:spPr>
-          <a:xfrm>
-            <a:off x="6400800" y="1737360"/>
-            <a:ext cx="5027400" cy="212760"/>
+              <a:t>uzupełniają klasy słabo reprezentowane</a:t>
+            </a:r>
+            <a:endParaRPr b="0" lang="pl-PL" sz="1600" spc="-1" strike="noStrike">
+              <a:latin typeface="Arial"/>
+            </a:endParaRPr>
+          </a:p>
+        </p:txBody>
+      </p:sp>
+      <p:sp>
+        <p:nvSpPr>
+          <p:cNvPr id="157" name="TextBox 9"/>
+          <p:cNvSpPr/>
+          <p:nvPr/>
+        </p:nvSpPr>
+        <p:spPr>
+          <a:xfrm>
+            <a:off x="6400800" y="1828800"/>
+            <a:ext cx="5027040" cy="227880"/>
           </a:xfrm>
           <a:prstGeom prst="rect">
             <a:avLst/>
@@ -30019,31 +30630,232 @@
               <a:buNone/>
             </a:pPr>
             <a:r>
-              <a:rPr b="1" lang="en-US" sz="1400" spc="-1" strike="noStrike">
+              <a:rPr b="1" lang="en-US" sz="1500" spc="-1" strike="noStrike">
                 <a:solidFill>
                   <a:srgbClr val="1b0532"/>
                 </a:solidFill>
                 <a:latin typeface="Arial"/>
                 <a:ea typeface="DejaVu Sans"/>
               </a:rPr>
-              <a:t>Proces kontrolowany:</a:t>
-            </a:r>
-            <a:endParaRPr b="0" lang="pl-PL" sz="1400" spc="-1" strike="noStrike">
-              <a:latin typeface="Arial"/>
-            </a:endParaRPr>
-          </a:p>
-        </p:txBody>
-      </p:sp>
-      <p:sp>
-        <p:nvSpPr>
-          <p:cNvPr id="136" name="Rounded Rectangle 9"/>
-          <p:cNvSpPr/>
-          <p:nvPr/>
-        </p:nvSpPr>
-        <p:spPr>
-          <a:xfrm>
-            <a:off x="6400800" y="2076840"/>
-            <a:ext cx="5027400" cy="1794960"/>
+              <a:t>Metody dla tekstu:</a:t>
+            </a:r>
+            <a:endParaRPr b="0" lang="pl-PL" sz="1500" spc="-1" strike="noStrike">
+              <a:latin typeface="Arial"/>
+            </a:endParaRPr>
+          </a:p>
+        </p:txBody>
+      </p:sp>
+      <p:sp>
+        <p:nvSpPr>
+          <p:cNvPr id="158" name="TextBox 10"/>
+          <p:cNvSpPr/>
+          <p:nvPr/>
+        </p:nvSpPr>
+        <p:spPr>
+          <a:xfrm>
+            <a:off x="6400800" y="2286000"/>
+            <a:ext cx="5027040" cy="1823760"/>
+          </a:xfrm>
+          <a:prstGeom prst="rect">
+            <a:avLst/>
+          </a:prstGeom>
+          <a:noFill/>
+          <a:ln w="0">
+            <a:noFill/>
+          </a:ln>
+        </p:spPr>
+        <p:style>
+          <a:lnRef idx="0"/>
+          <a:fillRef idx="0"/>
+          <a:effectRef idx="0"/>
+          <a:fontRef idx="minor"/>
+        </p:style>
+        <p:txBody>
+          <a:bodyPr lIns="90000" rIns="90000" tIns="45000" bIns="45000" anchor="t">
+            <a:spAutoFit/>
+          </a:bodyPr>
+          <a:p>
+            <a:pPr>
+              <a:lnSpc>
+                <a:spcPct val="105000"/>
+              </a:lnSpc>
+              <a:spcAft>
+                <a:spcPts val="901"/>
+              </a:spcAft>
+              <a:buNone/>
+            </a:pPr>
+            <a:r>
+              <a:rPr b="0" lang="en-US" sz="1600" spc="-1" strike="noStrike">
+                <a:solidFill>
+                  <a:srgbClr val="1b0532"/>
+                </a:solidFill>
+                <a:latin typeface="Arial"/>
+                <a:ea typeface="DejaVu Sans"/>
+              </a:rPr>
+              <a:t>▸  </a:t>
+            </a:r>
+            <a:r>
+              <a:rPr b="0" lang="en-US" sz="1600" spc="-1" strike="noStrike">
+                <a:solidFill>
+                  <a:srgbClr val="1b0532"/>
+                </a:solidFill>
+                <a:latin typeface="Arial"/>
+                <a:ea typeface="DejaVu Sans"/>
+              </a:rPr>
+              <a:t>parafrazowanie przykładów</a:t>
+            </a:r>
+            <a:endParaRPr b="0" lang="pl-PL" sz="1600" spc="-1" strike="noStrike">
+              <a:latin typeface="Arial"/>
+            </a:endParaRPr>
+          </a:p>
+          <a:p>
+            <a:pPr>
+              <a:lnSpc>
+                <a:spcPct val="105000"/>
+              </a:lnSpc>
+              <a:spcAft>
+                <a:spcPts val="901"/>
+              </a:spcAft>
+              <a:buNone/>
+            </a:pPr>
+            <a:r>
+              <a:rPr b="0" lang="en-US" sz="1600" spc="-1" strike="noStrike">
+                <a:solidFill>
+                  <a:srgbClr val="1b0532"/>
+                </a:solidFill>
+                <a:latin typeface="Arial"/>
+                <a:ea typeface="DejaVu Sans"/>
+              </a:rPr>
+              <a:t>▸  </a:t>
+            </a:r>
+            <a:r>
+              <a:rPr b="0" lang="en-US" sz="1600" spc="-1" strike="noStrike">
+                <a:solidFill>
+                  <a:srgbClr val="1b0532"/>
+                </a:solidFill>
+                <a:latin typeface="Arial"/>
+                <a:ea typeface="DejaVu Sans"/>
+              </a:rPr>
+              <a:t>zmiana stylu / długości wypowiedzi</a:t>
+            </a:r>
+            <a:endParaRPr b="0" lang="pl-PL" sz="1600" spc="-1" strike="noStrike">
+              <a:latin typeface="Arial"/>
+            </a:endParaRPr>
+          </a:p>
+          <a:p>
+            <a:pPr>
+              <a:lnSpc>
+                <a:spcPct val="105000"/>
+              </a:lnSpc>
+              <a:spcAft>
+                <a:spcPts val="901"/>
+              </a:spcAft>
+              <a:buNone/>
+            </a:pPr>
+            <a:r>
+              <a:rPr b="0" lang="en-US" sz="1600" spc="-1" strike="noStrike">
+                <a:solidFill>
+                  <a:srgbClr val="1b0532"/>
+                </a:solidFill>
+                <a:latin typeface="Arial"/>
+                <a:ea typeface="DejaVu Sans"/>
+              </a:rPr>
+              <a:t>▸  </a:t>
+            </a:r>
+            <a:r>
+              <a:rPr b="0" lang="en-US" sz="1600" spc="-1" strike="noStrike">
+                <a:solidFill>
+                  <a:srgbClr val="1b0532"/>
+                </a:solidFill>
+                <a:latin typeface="Arial"/>
+                <a:ea typeface="DejaVu Sans"/>
+              </a:rPr>
+              <a:t>warianty formalne i nieformalne</a:t>
+            </a:r>
+            <a:endParaRPr b="0" lang="pl-PL" sz="1600" spc="-1" strike="noStrike">
+              <a:latin typeface="Arial"/>
+            </a:endParaRPr>
+          </a:p>
+          <a:p>
+            <a:pPr>
+              <a:lnSpc>
+                <a:spcPct val="105000"/>
+              </a:lnSpc>
+              <a:spcAft>
+                <a:spcPts val="901"/>
+              </a:spcAft>
+              <a:buNone/>
+            </a:pPr>
+            <a:r>
+              <a:rPr b="0" lang="en-US" sz="1600" spc="-1" strike="noStrike">
+                <a:solidFill>
+                  <a:srgbClr val="1b0532"/>
+                </a:solidFill>
+                <a:latin typeface="Arial"/>
+                <a:ea typeface="DejaVu Sans"/>
+              </a:rPr>
+              <a:t>▸  </a:t>
+            </a:r>
+            <a:r>
+              <a:rPr b="0" lang="en-US" sz="1600" spc="-1" strike="noStrike">
+                <a:solidFill>
+                  <a:srgbClr val="1b0532"/>
+                </a:solidFill>
+                <a:latin typeface="Arial"/>
+                <a:ea typeface="DejaVu Sans"/>
+              </a:rPr>
+              <a:t>literówki, slang, język potoczny</a:t>
+            </a:r>
+            <a:endParaRPr b="0" lang="pl-PL" sz="1600" spc="-1" strike="noStrike">
+              <a:latin typeface="Arial"/>
+            </a:endParaRPr>
+          </a:p>
+          <a:p>
+            <a:pPr>
+              <a:lnSpc>
+                <a:spcPct val="105000"/>
+              </a:lnSpc>
+              <a:spcAft>
+                <a:spcPts val="901"/>
+              </a:spcAft>
+              <a:buNone/>
+            </a:pPr>
+            <a:r>
+              <a:rPr b="0" lang="en-US" sz="1600" spc="-1" strike="noStrike">
+                <a:solidFill>
+                  <a:srgbClr val="1b0532"/>
+                </a:solidFill>
+                <a:latin typeface="Arial"/>
+                <a:ea typeface="DejaVu Sans"/>
+              </a:rPr>
+              <a:t>▸  </a:t>
+            </a:r>
+            <a:r>
+              <a:rPr b="0" lang="en-US" sz="1600" spc="-1" strike="noStrike">
+                <a:solidFill>
+                  <a:srgbClr val="1b0532"/>
+                </a:solidFill>
+                <a:latin typeface="Arial"/>
+                <a:ea typeface="DejaVu Sans"/>
+              </a:rPr>
+              <a:t>przykłady rzadkie i graniczne</a:t>
+            </a:r>
+            <a:endParaRPr b="0" lang="pl-PL" sz="1600" spc="-1" strike="noStrike">
+              <a:latin typeface="Arial"/>
+            </a:endParaRPr>
+          </a:p>
+        </p:txBody>
+      </p:sp>
+      <p:sp>
+        <p:nvSpPr>
+          <p:cNvPr id="159" name="Rounded Rectangle 11"/>
+          <p:cNvSpPr/>
+          <p:nvPr/>
+        </p:nvSpPr>
+        <p:spPr>
+          <a:xfrm>
+            <a:off x="768240" y="5074920"/>
+            <a:ext cx="10650600" cy="866520"/>
           </a:xfrm>
           <a:prstGeom prst="roundRect">
             <a:avLst>
@@ -30051,7 +30863,7 @@
             </a:avLst>
           </a:prstGeom>
           <a:solidFill>
-            <a:srgbClr val="110a22"/>
+            <a:srgbClr val="f2f1f6"/>
           </a:solidFill>
           <a:ln>
             <a:noFill/>
@@ -30079,14 +30891,55 @@
       </p:sp>
       <p:sp>
         <p:nvSpPr>
-          <p:cNvPr id="137" name="TextBox 10"/>
-          <p:cNvSpPr/>
-          <p:nvPr/>
-        </p:nvSpPr>
-        <p:spPr>
-          <a:xfrm>
-            <a:off x="7096320" y="2231280"/>
-            <a:ext cx="3636000" cy="1422720"/>
+          <p:cNvPr id="160" name="Rectangle 12"/>
+          <p:cNvSpPr/>
+          <p:nvPr/>
+        </p:nvSpPr>
+        <p:spPr>
+          <a:xfrm>
+            <a:off x="768240" y="5074920"/>
+            <a:ext cx="48600" cy="866520"/>
+          </a:xfrm>
+          <a:prstGeom prst="rect">
+            <a:avLst/>
+          </a:prstGeom>
+          <a:solidFill>
+            <a:srgbClr val="00befe"/>
+          </a:solidFill>
+          <a:ln>
+            <a:noFill/>
+          </a:ln>
+          <a:effectLst>
+            <a:outerShdw blurRad="39960" dir="5400000" dist="23040" rotWithShape="0">
+              <a:srgbClr val="000000">
+                <a:alpha val="35000"/>
+              </a:srgbClr>
+            </a:outerShdw>
+          </a:effectLst>
+        </p:spPr>
+        <p:style>
+          <a:lnRef idx="1">
+            <a:schemeClr val="accent1"/>
+          </a:lnRef>
+          <a:fillRef idx="3">
+            <a:schemeClr val="accent1"/>
+          </a:fillRef>
+          <a:effectRef idx="2">
+            <a:schemeClr val="accent1"/>
+          </a:effectRef>
+          <a:fontRef idx="minor"/>
+        </p:style>
+      </p:sp>
+      <p:sp>
+        <p:nvSpPr>
+          <p:cNvPr id="161" name="TextBox 13"/>
+          <p:cNvSpPr/>
+          <p:nvPr/>
+        </p:nvSpPr>
+        <p:spPr>
+          <a:xfrm>
+            <a:off x="1024200" y="5311440"/>
+            <a:ext cx="10193400" cy="430560"/>
           </a:xfrm>
           <a:prstGeom prst="rect">
             <a:avLst/>
@@ -30103,6 +30956,722 @@
           <a:fontRef idx="minor"/>
         </p:style>
         <p:txBody>
+          <a:bodyPr lIns="0" rIns="0" tIns="0" bIns="0" anchor="ctr">
+            <a:spAutoFit/>
+          </a:bodyPr>
+          <a:p>
+            <a:pPr>
+              <a:lnSpc>
+                <a:spcPct val="105000"/>
+              </a:lnSpc>
+              <a:buNone/>
+            </a:pPr>
+            <a:r>
+              <a:rPr b="1" lang="en-US" sz="1400" spc="-1" strike="noStrike">
+                <a:solidFill>
+                  <a:srgbClr val="1b0532"/>
+                </a:solidFill>
+                <a:latin typeface="Arial"/>
+                <a:ea typeface="DejaVu Sans"/>
+              </a:rPr>
+              <a:t>▸  </a:t>
+            </a:r>
+            <a:r>
+              <a:rPr b="1" lang="en-US" sz="1400" spc="-1" strike="noStrike">
+                <a:solidFill>
+                  <a:srgbClr val="1b0532"/>
+                </a:solidFill>
+                <a:latin typeface="Arial"/>
+                <a:ea typeface="DejaVu Sans"/>
+              </a:rPr>
+              <a:t>Przykład (etykieta zachowana)</a:t>
+            </a:r>
+            <a:endParaRPr b="0" lang="pl-PL" sz="1400" spc="-1" strike="noStrike">
+              <a:latin typeface="Arial"/>
+            </a:endParaRPr>
+          </a:p>
+          <a:p>
+            <a:pPr>
+              <a:lnSpc>
+                <a:spcPct val="105000"/>
+              </a:lnSpc>
+              <a:buNone/>
+            </a:pPr>
+            <a:r>
+              <a:rPr b="0" lang="en-US" sz="1300" spc="-1" strike="noStrike">
+                <a:solidFill>
+                  <a:srgbClr val="6b6478"/>
+                </a:solidFill>
+                <a:latin typeface="Arial"/>
+                <a:ea typeface="DejaVu Sans"/>
+              </a:rPr>
+              <a:t>„</a:t>
+            </a:r>
+            <a:r>
+              <a:rPr b="0" lang="en-US" sz="1300" spc="-1" strike="noStrike">
+                <a:solidFill>
+                  <a:srgbClr val="6b6478"/>
+                </a:solidFill>
+                <a:latin typeface="Arial"/>
+                <a:ea typeface="DejaVu Sans"/>
+              </a:rPr>
+              <a:t>Chcę zwrócić produkt…” [zwrot]  →  „Jak odesłać towar?” · „Czy da się zrobić zwrot?” — wszystkie warianty pozostają w tej samej klasie.</a:t>
+            </a:r>
+            <a:endParaRPr b="0" lang="pl-PL" sz="1300" spc="-1" strike="noStrike">
+              <a:latin typeface="Arial"/>
+            </a:endParaRPr>
+          </a:p>
+        </p:txBody>
+      </p:sp>
+    </p:spTree>
+  </p:cSld>
+  <mc:AlternateContent>
+    <mc:Choice Requires="p14">
+      <p:transition spd="slow" p14:dur="2000"/>
+    </mc:Choice>
+    <mc:Fallback>
+      <p:transition spd="slow"/>
+    </mc:Fallback>
+  </mc:AlternateContent>
+</p:sld>
+</file>
+
+<file path=ppt/slides/slide8.xml><?xml version="1.0" encoding="utf-8"?>
+<p:sld xmlns:a="http://schemas.openxmlformats.org/drawingml/2006/main" xmlns:p="http://schemas.openxmlformats.org/presentationml/2006/main" xmlns:r="http://schemas.openxmlformats.org/officeDocument/2006/relationships" xmlns:p14="http://schemas.microsoft.com/office/powerpoint/2010/main" xmlns:p15="http://schemas.microsoft.com/office/powerpoint/2012/main" xmlns:mc="http://schemas.openxmlformats.org/markup-compatibility/2006">
+  <p:cSld>
+    <p:bg>
+      <p:bgPr>
+        <a:solidFill>
+          <a:srgbClr val="ffffff"/>
+        </a:solidFill>
+      </p:bgPr>
+    </p:bg>
+    <p:spTree>
+      <p:nvGrpSpPr>
+        <p:cNvPr id="1" name=""/>
+        <p:cNvGrpSpPr/>
+        <p:nvPr/>
+      </p:nvGrpSpPr>
+      <p:grpSpPr>
+        <a:xfrm>
+          <a:off x="0" y="0"/>
+          <a:ext cx="0" cy="0"/>
+          <a:chOff x="0" y="0"/>
+          <a:chExt cx="0" cy="0"/>
+        </a:xfrm>
+      </p:grpSpPr>
+      <p:sp>
+        <p:nvSpPr>
+          <p:cNvPr id="162" name="TextBox 1"/>
+          <p:cNvSpPr/>
+          <p:nvPr/>
+        </p:nvSpPr>
+        <p:spPr>
+          <a:xfrm>
+            <a:off x="768240" y="420480"/>
+            <a:ext cx="10604880" cy="441360"/>
+          </a:xfrm>
+          <a:prstGeom prst="rect">
+            <a:avLst/>
+          </a:prstGeom>
+          <a:noFill/>
+          <a:ln w="0">
+            <a:noFill/>
+          </a:ln>
+        </p:spPr>
+        <p:style>
+          <a:lnRef idx="0"/>
+          <a:fillRef idx="0"/>
+          <a:effectRef idx="0"/>
+          <a:fontRef idx="minor"/>
+        </p:style>
+        <p:txBody>
+          <a:bodyPr lIns="0" rIns="0" tIns="0" bIns="0" anchor="t">
+            <a:spAutoFit/>
+          </a:bodyPr>
+          <a:p>
+            <a:pPr>
+              <a:lnSpc>
+                <a:spcPct val="100000"/>
+              </a:lnSpc>
+              <a:buNone/>
+            </a:pPr>
+            <a:r>
+              <a:rPr b="0" lang="en-US" sz="2900" spc="-1" strike="noStrike">
+                <a:solidFill>
+                  <a:srgbClr val="1b0532"/>
+                </a:solidFill>
+                <a:latin typeface="Play"/>
+                <a:ea typeface="DejaVu Sans"/>
+              </a:rPr>
+              <a:t>Które dane warto augmentować?</a:t>
+            </a:r>
+            <a:endParaRPr b="0" lang="pl-PL" sz="2900" spc="-1" strike="noStrike">
+              <a:latin typeface="Arial"/>
+            </a:endParaRPr>
+          </a:p>
+        </p:txBody>
+      </p:sp>
+      <p:sp>
+        <p:nvSpPr>
+          <p:cNvPr id="163" name="Rectangle 2"/>
+          <p:cNvSpPr/>
+          <p:nvPr/>
+        </p:nvSpPr>
+        <p:spPr>
+          <a:xfrm>
+            <a:off x="768240" y="1170360"/>
+            <a:ext cx="1369440" cy="42120"/>
+          </a:xfrm>
+          <a:prstGeom prst="rect">
+            <a:avLst/>
+          </a:prstGeom>
+          <a:solidFill>
+            <a:srgbClr val="00befe"/>
+          </a:solidFill>
+          <a:ln>
+            <a:noFill/>
+          </a:ln>
+          <a:effectLst>
+            <a:outerShdw blurRad="39960" dir="5400000" dist="23040" rotWithShape="0">
+              <a:srgbClr val="000000">
+                <a:alpha val="35000"/>
+              </a:srgbClr>
+            </a:outerShdw>
+          </a:effectLst>
+        </p:spPr>
+        <p:style>
+          <a:lnRef idx="1">
+            <a:schemeClr val="accent1"/>
+          </a:lnRef>
+          <a:fillRef idx="3">
+            <a:schemeClr val="accent1"/>
+          </a:fillRef>
+          <a:effectRef idx="2">
+            <a:schemeClr val="accent1"/>
+          </a:effectRef>
+          <a:fontRef idx="minor"/>
+        </p:style>
+      </p:sp>
+      <p:sp>
+        <p:nvSpPr>
+          <p:cNvPr id="164" name="TextBox 3"/>
+          <p:cNvSpPr/>
+          <p:nvPr/>
+        </p:nvSpPr>
+        <p:spPr>
+          <a:xfrm>
+            <a:off x="768240" y="1298520"/>
+            <a:ext cx="10604880" cy="227880"/>
+          </a:xfrm>
+          <a:prstGeom prst="rect">
+            <a:avLst/>
+          </a:prstGeom>
+          <a:noFill/>
+          <a:ln w="0">
+            <a:noFill/>
+          </a:ln>
+        </p:spPr>
+        <p:style>
+          <a:lnRef idx="0"/>
+          <a:fillRef idx="0"/>
+          <a:effectRef idx="0"/>
+          <a:fontRef idx="minor"/>
+        </p:style>
+        <p:txBody>
+          <a:bodyPr lIns="0" rIns="0" tIns="0" bIns="0" anchor="t">
+            <a:spAutoFit/>
+          </a:bodyPr>
+          <a:p>
+            <a:pPr>
+              <a:lnSpc>
+                <a:spcPct val="100000"/>
+              </a:lnSpc>
+              <a:buNone/>
+            </a:pPr>
+            <a:r>
+              <a:rPr b="0" i="1" lang="en-US" sz="1500" spc="-1" strike="noStrike">
+                <a:solidFill>
+                  <a:srgbClr val="6b6478"/>
+                </a:solidFill>
+                <a:latin typeface="Arial"/>
+                <a:ea typeface="DejaVu Sans"/>
+              </a:rPr>
+              <a:t>Nie zawsze cały zbiór po równo (przykład clarin-pl/twitteremo → sample 5k)</a:t>
+            </a:r>
+            <a:endParaRPr b="0" lang="pl-PL" sz="1500" spc="-1" strike="noStrike">
+              <a:latin typeface="Arial"/>
+            </a:endParaRPr>
+          </a:p>
+        </p:txBody>
+      </p:sp>
+      <p:sp>
+        <p:nvSpPr>
+          <p:cNvPr id="165" name="Rectangle 4"/>
+          <p:cNvSpPr/>
+          <p:nvPr/>
+        </p:nvSpPr>
+        <p:spPr>
+          <a:xfrm>
+            <a:off x="0" y="6437520"/>
+            <a:ext cx="12189600" cy="12960"/>
+          </a:xfrm>
+          <a:prstGeom prst="rect">
+            <a:avLst/>
+          </a:prstGeom>
+          <a:solidFill>
+            <a:srgbClr val="f2f1f6"/>
+          </a:solidFill>
+          <a:ln>
+            <a:noFill/>
+          </a:ln>
+          <a:effectLst>
+            <a:outerShdw blurRad="39960" dir="5400000" dist="23040" rotWithShape="0">
+              <a:srgbClr val="000000">
+                <a:alpha val="35000"/>
+              </a:srgbClr>
+            </a:outerShdw>
+          </a:effectLst>
+        </p:spPr>
+        <p:style>
+          <a:lnRef idx="1">
+            <a:schemeClr val="accent1"/>
+          </a:lnRef>
+          <a:fillRef idx="3">
+            <a:schemeClr val="accent1"/>
+          </a:fillRef>
+          <a:effectRef idx="2">
+            <a:schemeClr val="accent1"/>
+          </a:effectRef>
+          <a:fontRef idx="minor"/>
+        </p:style>
+      </p:sp>
+      <p:sp>
+        <p:nvSpPr>
+          <p:cNvPr id="166" name="TextBox 5"/>
+          <p:cNvSpPr/>
+          <p:nvPr/>
+        </p:nvSpPr>
+        <p:spPr>
+          <a:xfrm>
+            <a:off x="768240" y="6473880"/>
+            <a:ext cx="8227440" cy="136800"/>
+          </a:xfrm>
+          <a:prstGeom prst="rect">
+            <a:avLst/>
+          </a:prstGeom>
+          <a:noFill/>
+          <a:ln w="0">
+            <a:noFill/>
+          </a:ln>
+        </p:spPr>
+        <p:style>
+          <a:lnRef idx="0"/>
+          <a:fillRef idx="0"/>
+          <a:effectRef idx="0"/>
+          <a:fontRef idx="minor"/>
+        </p:style>
+        <p:txBody>
+          <a:bodyPr lIns="0" rIns="0" tIns="0" bIns="0" anchor="t">
+            <a:spAutoFit/>
+          </a:bodyPr>
+          <a:p>
+            <a:pPr>
+              <a:lnSpc>
+                <a:spcPct val="100000"/>
+              </a:lnSpc>
+              <a:buNone/>
+            </a:pPr>
+            <a:r>
+              <a:rPr b="0" lang="en-US" sz="900" spc="-1" strike="noStrike">
+                <a:solidFill>
+                  <a:srgbClr val="6b6478"/>
+                </a:solidFill>
+                <a:latin typeface="Arial"/>
+                <a:ea typeface="DejaVu Sans"/>
+              </a:rPr>
+              <a:t>DSS 2026 AI Edition  ·  Teoria · Active Learning</a:t>
+            </a:r>
+            <a:endParaRPr b="0" lang="pl-PL" sz="900" spc="-1" strike="noStrike">
+              <a:latin typeface="Arial"/>
+            </a:endParaRPr>
+          </a:p>
+        </p:txBody>
+      </p:sp>
+      <p:sp>
+        <p:nvSpPr>
+          <p:cNvPr id="167" name="TextBox 6"/>
+          <p:cNvSpPr/>
+          <p:nvPr/>
+        </p:nvSpPr>
+        <p:spPr>
+          <a:xfrm>
+            <a:off x="10607040" y="6473880"/>
+            <a:ext cx="820800" cy="136800"/>
+          </a:xfrm>
+          <a:prstGeom prst="rect">
+            <a:avLst/>
+          </a:prstGeom>
+          <a:noFill/>
+          <a:ln w="0">
+            <a:noFill/>
+          </a:ln>
+        </p:spPr>
+        <p:style>
+          <a:lnRef idx="0"/>
+          <a:fillRef idx="0"/>
+          <a:effectRef idx="0"/>
+          <a:fontRef idx="minor"/>
+        </p:style>
+        <p:txBody>
+          <a:bodyPr lIns="0" rIns="0" tIns="0" bIns="0" anchor="t">
+            <a:spAutoFit/>
+          </a:bodyPr>
+          <a:p>
+            <a:pPr algn="r">
+              <a:lnSpc>
+                <a:spcPct val="100000"/>
+              </a:lnSpc>
+              <a:buNone/>
+            </a:pPr>
+            <a:r>
+              <a:rPr b="0" lang="en-US" sz="900" spc="-1" strike="noStrike">
+                <a:solidFill>
+                  <a:srgbClr val="6b6478"/>
+                </a:solidFill>
+                <a:latin typeface="Arial"/>
+                <a:ea typeface="DejaVu Sans"/>
+              </a:rPr>
+              <a:t>9</a:t>
+            </a:r>
+            <a:endParaRPr b="0" lang="pl-PL" sz="900" spc="-1" strike="noStrike">
+              <a:latin typeface="Arial"/>
+            </a:endParaRPr>
+          </a:p>
+        </p:txBody>
+      </p:sp>
+      <p:sp>
+        <p:nvSpPr>
+          <p:cNvPr id="168" name="TextBox 7"/>
+          <p:cNvSpPr/>
+          <p:nvPr/>
+        </p:nvSpPr>
+        <p:spPr>
+          <a:xfrm>
+            <a:off x="768240" y="1828800"/>
+            <a:ext cx="5392800" cy="1692720"/>
+          </a:xfrm>
+          <a:prstGeom prst="rect">
+            <a:avLst/>
+          </a:prstGeom>
+          <a:noFill/>
+          <a:ln w="0">
+            <a:noFill/>
+          </a:ln>
+        </p:spPr>
+        <p:style>
+          <a:lnRef idx="0"/>
+          <a:fillRef idx="0"/>
+          <a:effectRef idx="0"/>
+          <a:fontRef idx="minor"/>
+        </p:style>
+        <p:txBody>
+          <a:bodyPr lIns="90000" rIns="90000" tIns="45000" bIns="45000" anchor="t">
+            <a:spAutoFit/>
+          </a:bodyPr>
+          <a:p>
+            <a:pPr>
+              <a:lnSpc>
+                <a:spcPct val="105000"/>
+              </a:lnSpc>
+              <a:spcAft>
+                <a:spcPts val="799"/>
+              </a:spcAft>
+              <a:buNone/>
+            </a:pPr>
+            <a:r>
+              <a:rPr b="0" lang="en-US" sz="1500" spc="-1" strike="noStrike">
+                <a:solidFill>
+                  <a:srgbClr val="1b0532"/>
+                </a:solidFill>
+                <a:latin typeface="Arial"/>
+                <a:ea typeface="DejaVu Sans"/>
+              </a:rPr>
+              <a:t>▸  </a:t>
+            </a:r>
+            <a:r>
+              <a:rPr b="0" lang="en-US" sz="1500" spc="-1" strike="noStrike">
+                <a:solidFill>
+                  <a:srgbClr val="1b0532"/>
+                </a:solidFill>
+                <a:latin typeface="Arial"/>
+                <a:ea typeface="DejaVu Sans"/>
+              </a:rPr>
+              <a:t>klasy o najgorszych wynikach modelu</a:t>
+            </a:r>
+            <a:endParaRPr b="0" lang="pl-PL" sz="1500" spc="-1" strike="noStrike">
+              <a:latin typeface="Arial"/>
+            </a:endParaRPr>
+          </a:p>
+          <a:p>
+            <a:pPr>
+              <a:lnSpc>
+                <a:spcPct val="105000"/>
+              </a:lnSpc>
+              <a:spcAft>
+                <a:spcPts val="799"/>
+              </a:spcAft>
+              <a:buNone/>
+            </a:pPr>
+            <a:r>
+              <a:rPr b="0" lang="en-US" sz="1500" spc="-1" strike="noStrike">
+                <a:solidFill>
+                  <a:srgbClr val="1b0532"/>
+                </a:solidFill>
+                <a:latin typeface="Arial"/>
+                <a:ea typeface="DejaVu Sans"/>
+              </a:rPr>
+              <a:t>▸  </a:t>
+            </a:r>
+            <a:r>
+              <a:rPr b="0" lang="en-US" sz="1500" spc="-1" strike="noStrike">
+                <a:solidFill>
+                  <a:srgbClr val="1b0532"/>
+                </a:solidFill>
+                <a:latin typeface="Arial"/>
+                <a:ea typeface="DejaVu Sans"/>
+              </a:rPr>
+              <a:t>przykłady z pogranicza kilku klas</a:t>
+            </a:r>
+            <a:endParaRPr b="0" lang="pl-PL" sz="1500" spc="-1" strike="noStrike">
+              <a:latin typeface="Arial"/>
+            </a:endParaRPr>
+          </a:p>
+          <a:p>
+            <a:pPr>
+              <a:lnSpc>
+                <a:spcPct val="105000"/>
+              </a:lnSpc>
+              <a:spcAft>
+                <a:spcPts val="799"/>
+              </a:spcAft>
+              <a:buNone/>
+            </a:pPr>
+            <a:r>
+              <a:rPr b="0" lang="en-US" sz="1500" spc="-1" strike="noStrike">
+                <a:solidFill>
+                  <a:srgbClr val="1b0532"/>
+                </a:solidFill>
+                <a:latin typeface="Arial"/>
+                <a:ea typeface="DejaVu Sans"/>
+              </a:rPr>
+              <a:t>▸  </a:t>
+            </a:r>
+            <a:r>
+              <a:rPr b="0" lang="en-US" sz="1500" spc="-1" strike="noStrike">
+                <a:solidFill>
+                  <a:srgbClr val="1b0532"/>
+                </a:solidFill>
+                <a:latin typeface="Arial"/>
+                <a:ea typeface="DejaVu Sans"/>
+              </a:rPr>
+              <a:t>przypadki ważne biznesowo (wskazane przez człowieka)</a:t>
+            </a:r>
+            <a:endParaRPr b="0" lang="pl-PL" sz="1500" spc="-1" strike="noStrike">
+              <a:latin typeface="Arial"/>
+            </a:endParaRPr>
+          </a:p>
+          <a:p>
+            <a:pPr>
+              <a:lnSpc>
+                <a:spcPct val="105000"/>
+              </a:lnSpc>
+              <a:spcAft>
+                <a:spcPts val="799"/>
+              </a:spcAft>
+              <a:buNone/>
+            </a:pPr>
+            <a:r>
+              <a:rPr b="0" lang="en-US" sz="1500" spc="-1" strike="noStrike">
+                <a:solidFill>
+                  <a:srgbClr val="1b0532"/>
+                </a:solidFill>
+                <a:latin typeface="Arial"/>
+                <a:ea typeface="DejaVu Sans"/>
+              </a:rPr>
+              <a:t>▸  </a:t>
+            </a:r>
+            <a:r>
+              <a:rPr b="0" lang="en-US" sz="1500" spc="-1" strike="noStrike">
+                <a:solidFill>
+                  <a:srgbClr val="1b0532"/>
+                </a:solidFill>
+                <a:latin typeface="Arial"/>
+                <a:ea typeface="DejaVu Sans"/>
+              </a:rPr>
+              <a:t>przykłady o niskiej pewności modelu</a:t>
+            </a:r>
+            <a:endParaRPr b="0" lang="pl-PL" sz="1500" spc="-1" strike="noStrike">
+              <a:latin typeface="Arial"/>
+            </a:endParaRPr>
+          </a:p>
+          <a:p>
+            <a:pPr>
+              <a:lnSpc>
+                <a:spcPct val="105000"/>
+              </a:lnSpc>
+              <a:spcAft>
+                <a:spcPts val="799"/>
+              </a:spcAft>
+              <a:buNone/>
+            </a:pPr>
+            <a:r>
+              <a:rPr b="0" lang="en-US" sz="1500" spc="-1" strike="noStrike">
+                <a:solidFill>
+                  <a:srgbClr val="1b0532"/>
+                </a:solidFill>
+                <a:latin typeface="Arial"/>
+                <a:ea typeface="DejaVu Sans"/>
+              </a:rPr>
+              <a:t>▸  </a:t>
+            </a:r>
+            <a:r>
+              <a:rPr b="0" lang="en-US" sz="1500" spc="-1" strike="noStrike">
+                <a:solidFill>
+                  <a:srgbClr val="1b0532"/>
+                </a:solidFill>
+                <a:latin typeface="Arial"/>
+                <a:ea typeface="DejaVu Sans"/>
+              </a:rPr>
+              <a:t>nietypowe warianty językowe, slang, błędy</a:t>
+            </a:r>
+            <a:endParaRPr b="0" lang="pl-PL" sz="1500" spc="-1" strike="noStrike">
+              <a:latin typeface="Arial"/>
+            </a:endParaRPr>
+          </a:p>
+        </p:txBody>
+      </p:sp>
+      <p:sp>
+        <p:nvSpPr>
+          <p:cNvPr id="169" name="TextBox 8"/>
+          <p:cNvSpPr/>
+          <p:nvPr/>
+        </p:nvSpPr>
+        <p:spPr>
+          <a:xfrm>
+            <a:off x="6400800" y="1737360"/>
+            <a:ext cx="5027040" cy="212760"/>
+          </a:xfrm>
+          <a:prstGeom prst="rect">
+            <a:avLst/>
+          </a:prstGeom>
+          <a:noFill/>
+          <a:ln w="0">
+            <a:noFill/>
+          </a:ln>
+        </p:spPr>
+        <p:style>
+          <a:lnRef idx="0"/>
+          <a:fillRef idx="0"/>
+          <a:effectRef idx="0"/>
+          <a:fontRef idx="minor"/>
+        </p:style>
+        <p:txBody>
+          <a:bodyPr lIns="0" rIns="0" tIns="0" bIns="0" anchor="t">
+            <a:spAutoFit/>
+          </a:bodyPr>
+          <a:p>
+            <a:pPr>
+              <a:lnSpc>
+                <a:spcPct val="100000"/>
+              </a:lnSpc>
+              <a:buNone/>
+            </a:pPr>
+            <a:r>
+              <a:rPr b="1" lang="en-US" sz="1400" spc="-1" strike="noStrike">
+                <a:solidFill>
+                  <a:srgbClr val="1b0532"/>
+                </a:solidFill>
+                <a:latin typeface="Arial"/>
+                <a:ea typeface="DejaVu Sans"/>
+              </a:rPr>
+              <a:t>Proces kontrolowany:</a:t>
+            </a:r>
+            <a:endParaRPr b="0" lang="pl-PL" sz="1400" spc="-1" strike="noStrike">
+              <a:latin typeface="Arial"/>
+            </a:endParaRPr>
+          </a:p>
+        </p:txBody>
+      </p:sp>
+      <p:sp>
+        <p:nvSpPr>
+          <p:cNvPr id="170" name="Rounded Rectangle 9"/>
+          <p:cNvSpPr/>
+          <p:nvPr/>
+        </p:nvSpPr>
+        <p:spPr>
+          <a:xfrm>
+            <a:off x="6400800" y="2076840"/>
+            <a:ext cx="5027040" cy="1794600"/>
+          </a:xfrm>
+          <a:prstGeom prst="roundRect">
+            <a:avLst>
+              <a:gd name="adj" fmla="val 16667"/>
+            </a:avLst>
+          </a:prstGeom>
+          <a:solidFill>
+            <a:srgbClr val="110a22"/>
+          </a:solidFill>
+          <a:ln>
+            <a:noFill/>
+          </a:ln>
+          <a:effectLst>
+            <a:outerShdw blurRad="39960" dir="5400000" dist="23040" rotWithShape="0">
+              <a:srgbClr val="000000">
+                <a:alpha val="35000"/>
+              </a:srgbClr>
+            </a:outerShdw>
+          </a:effectLst>
+        </p:spPr>
+        <p:style>
+          <a:lnRef idx="1">
+            <a:schemeClr val="accent1"/>
+          </a:lnRef>
+          <a:fillRef idx="3">
+            <a:schemeClr val="accent1"/>
+          </a:fillRef>
+          <a:effectRef idx="2">
+            <a:schemeClr val="accent1"/>
+          </a:effectRef>
+          <a:fontRef idx="minor"/>
+        </p:style>
+      </p:sp>
+      <p:sp>
+        <p:nvSpPr>
+          <p:cNvPr id="171" name="TextBox 10"/>
+          <p:cNvSpPr/>
+          <p:nvPr/>
+        </p:nvSpPr>
+        <p:spPr>
+          <a:xfrm>
+            <a:off x="7096320" y="2231280"/>
+            <a:ext cx="3636000" cy="1422720"/>
+          </a:xfrm>
+          <a:prstGeom prst="rect">
+            <a:avLst/>
+          </a:prstGeom>
+          <a:noFill/>
+          <a:ln w="0">
+            <a:noFill/>
+          </a:ln>
+        </p:spPr>
+        <p:style>
+          <a:lnRef idx="0"/>
+          <a:fillRef idx="0"/>
+          <a:effectRef idx="0"/>
+          <a:fontRef idx="minor"/>
+        </p:style>
+        <p:txBody>
           <a:bodyPr wrap="none" lIns="90000" rIns="90000" tIns="45000" bIns="45000" anchor="t">
             <a:spAutoFit/>
           </a:bodyPr>
@@ -30257,14 +31826,14 @@
       </p:sp>
       <p:sp>
         <p:nvSpPr>
-          <p:cNvPr id="138" name=""/>
+          <p:cNvPr id="172" name=""/>
           <p:cNvSpPr/>
           <p:nvPr/>
         </p:nvSpPr>
         <p:spPr>
           <a:xfrm>
             <a:off x="5328000" y="5112720"/>
-            <a:ext cx="1151280" cy="215280"/>
+            <a:ext cx="1150920" cy="214920"/>
           </a:xfrm>
           <a:custGeom>
             <a:avLst/>
@@ -30322,7 +31891,7 @@
       </p:sp>
       <p:pic>
         <p:nvPicPr>
-          <p:cNvPr id="139" name="" descr=""/>
+          <p:cNvPr id="173" name="" descr=""/>
           <p:cNvPicPr/>
           <p:nvPr/>
         </p:nvPicPr>
@@ -30333,7 +31902,7 @@
         <p:spPr>
           <a:xfrm>
             <a:off x="1152000" y="4005000"/>
-            <a:ext cx="3816000" cy="2384640"/>
+            <a:ext cx="3815640" cy="2384280"/>
           </a:xfrm>
           <a:prstGeom prst="rect">
             <a:avLst/>
@@ -30345,7 +31914,7 @@
       </p:pic>
       <p:pic>
         <p:nvPicPr>
-          <p:cNvPr id="140" name="" descr=""/>
+          <p:cNvPr id="174" name="" descr=""/>
           <p:cNvPicPr/>
           <p:nvPr/>
         </p:nvPicPr>
@@ -30356,7 +31925,7 @@
         <p:spPr>
           <a:xfrm>
             <a:off x="6984000" y="4023000"/>
-            <a:ext cx="3816000" cy="2385000"/>
+            <a:ext cx="3815640" cy="2384640"/>
           </a:xfrm>
           <a:prstGeom prst="rect">
             <a:avLst/>
@@ -30366,1749 +31935,6 @@
           </a:ln>
         </p:spPr>
       </p:pic>
-    </p:spTree>
-  </p:cSld>
-  <mc:AlternateContent>
-    <mc:Choice Requires="p14">
-      <p:transition spd="slow" p14:dur="2000"/>
-    </mc:Choice>
-    <mc:Fallback>
-      <p:transition spd="slow"/>
-    </mc:Fallback>
-  </mc:AlternateContent>
-</p:sld>
-</file>
-
-<file path=ppt/slides/slide8.xml><?xml version="1.0" encoding="utf-8"?>
-<p:sld xmlns:a="http://schemas.openxmlformats.org/drawingml/2006/main" xmlns:p="http://schemas.openxmlformats.org/presentationml/2006/main" xmlns:r="http://schemas.openxmlformats.org/officeDocument/2006/relationships" xmlns:p14="http://schemas.microsoft.com/office/powerpoint/2010/main" xmlns:p15="http://schemas.microsoft.com/office/powerpoint/2012/main" xmlns:mc="http://schemas.openxmlformats.org/markup-compatibility/2006">
-  <p:cSld>
-    <p:bg>
-      <p:bgPr>
-        <a:solidFill>
-          <a:srgbClr val="ffffff"/>
-        </a:solidFill>
-      </p:bgPr>
-    </p:bg>
-    <p:spTree>
-      <p:nvGrpSpPr>
-        <p:cNvPr id="1" name=""/>
-        <p:cNvGrpSpPr/>
-        <p:nvPr/>
-      </p:nvGrpSpPr>
-      <p:grpSpPr>
-        <a:xfrm>
-          <a:off x="0" y="0"/>
-          <a:ext cx="0" cy="0"/>
-          <a:chOff x="0" y="0"/>
-          <a:chExt cx="0" cy="0"/>
-        </a:xfrm>
-      </p:grpSpPr>
-      <p:sp>
-        <p:nvSpPr>
-          <p:cNvPr id="141" name="TextBox 1"/>
-          <p:cNvSpPr/>
-          <p:nvPr/>
-        </p:nvSpPr>
-        <p:spPr>
-          <a:xfrm>
-            <a:off x="768240" y="420480"/>
-            <a:ext cx="10605240" cy="441360"/>
-          </a:xfrm>
-          <a:prstGeom prst="rect">
-            <a:avLst/>
-          </a:prstGeom>
-          <a:noFill/>
-          <a:ln w="0">
-            <a:noFill/>
-          </a:ln>
-        </p:spPr>
-        <p:style>
-          <a:lnRef idx="0"/>
-          <a:fillRef idx="0"/>
-          <a:effectRef idx="0"/>
-          <a:fontRef idx="minor"/>
-        </p:style>
-        <p:txBody>
-          <a:bodyPr lIns="0" rIns="0" tIns="0" bIns="0" anchor="t">
-            <a:spAutoFit/>
-          </a:bodyPr>
-          <a:p>
-            <a:pPr>
-              <a:lnSpc>
-                <a:spcPct val="100000"/>
-              </a:lnSpc>
-              <a:buNone/>
-            </a:pPr>
-            <a:r>
-              <a:rPr b="0" lang="en-US" sz="2900" spc="-1" strike="noStrike">
-                <a:solidFill>
-                  <a:srgbClr val="1b0532"/>
-                </a:solidFill>
-                <a:latin typeface="Play"/>
-                <a:ea typeface="DejaVu Sans"/>
-              </a:rPr>
-              <a:t>Klasyfikacja vs generowanie</a:t>
-            </a:r>
-            <a:endParaRPr b="0" lang="pl-PL" sz="2900" spc="-1" strike="noStrike">
-              <a:latin typeface="Arial"/>
-            </a:endParaRPr>
-          </a:p>
-        </p:txBody>
-      </p:sp>
-      <p:sp>
-        <p:nvSpPr>
-          <p:cNvPr id="142" name="Rectangle 2"/>
-          <p:cNvSpPr/>
-          <p:nvPr/>
-        </p:nvSpPr>
-        <p:spPr>
-          <a:xfrm>
-            <a:off x="768240" y="1170360"/>
-            <a:ext cx="1369800" cy="42480"/>
-          </a:xfrm>
-          <a:prstGeom prst="rect">
-            <a:avLst/>
-          </a:prstGeom>
-          <a:solidFill>
-            <a:srgbClr val="00befe"/>
-          </a:solidFill>
-          <a:ln>
-            <a:noFill/>
-          </a:ln>
-          <a:effectLst>
-            <a:outerShdw blurRad="39960" dir="5400000" dist="23040" rotWithShape="0">
-              <a:srgbClr val="000000">
-                <a:alpha val="35000"/>
-              </a:srgbClr>
-            </a:outerShdw>
-          </a:effectLst>
-        </p:spPr>
-        <p:style>
-          <a:lnRef idx="1">
-            <a:schemeClr val="accent1"/>
-          </a:lnRef>
-          <a:fillRef idx="3">
-            <a:schemeClr val="accent1"/>
-          </a:fillRef>
-          <a:effectRef idx="2">
-            <a:schemeClr val="accent1"/>
-          </a:effectRef>
-          <a:fontRef idx="minor"/>
-        </p:style>
-      </p:sp>
-      <p:sp>
-        <p:nvSpPr>
-          <p:cNvPr id="143" name="Rectangle 3"/>
-          <p:cNvSpPr/>
-          <p:nvPr/>
-        </p:nvSpPr>
-        <p:spPr>
-          <a:xfrm>
-            <a:off x="0" y="6437520"/>
-            <a:ext cx="12189960" cy="13320"/>
-          </a:xfrm>
-          <a:prstGeom prst="rect">
-            <a:avLst/>
-          </a:prstGeom>
-          <a:solidFill>
-            <a:srgbClr val="f2f1f6"/>
-          </a:solidFill>
-          <a:ln>
-            <a:noFill/>
-          </a:ln>
-          <a:effectLst>
-            <a:outerShdw blurRad="39960" dir="5400000" dist="23040" rotWithShape="0">
-              <a:srgbClr val="000000">
-                <a:alpha val="35000"/>
-              </a:srgbClr>
-            </a:outerShdw>
-          </a:effectLst>
-        </p:spPr>
-        <p:style>
-          <a:lnRef idx="1">
-            <a:schemeClr val="accent1"/>
-          </a:lnRef>
-          <a:fillRef idx="3">
-            <a:schemeClr val="accent1"/>
-          </a:fillRef>
-          <a:effectRef idx="2">
-            <a:schemeClr val="accent1"/>
-          </a:effectRef>
-          <a:fontRef idx="minor"/>
-        </p:style>
-      </p:sp>
-      <p:sp>
-        <p:nvSpPr>
-          <p:cNvPr id="144" name="TextBox 4"/>
-          <p:cNvSpPr/>
-          <p:nvPr/>
-        </p:nvSpPr>
-        <p:spPr>
-          <a:xfrm>
-            <a:off x="768240" y="6473880"/>
-            <a:ext cx="8227800" cy="136800"/>
-          </a:xfrm>
-          <a:prstGeom prst="rect">
-            <a:avLst/>
-          </a:prstGeom>
-          <a:noFill/>
-          <a:ln w="0">
-            <a:noFill/>
-          </a:ln>
-        </p:spPr>
-        <p:style>
-          <a:lnRef idx="0"/>
-          <a:fillRef idx="0"/>
-          <a:effectRef idx="0"/>
-          <a:fontRef idx="minor"/>
-        </p:style>
-        <p:txBody>
-          <a:bodyPr lIns="0" rIns="0" tIns="0" bIns="0" anchor="t">
-            <a:spAutoFit/>
-          </a:bodyPr>
-          <a:p>
-            <a:pPr>
-              <a:lnSpc>
-                <a:spcPct val="100000"/>
-              </a:lnSpc>
-              <a:buNone/>
-            </a:pPr>
-            <a:r>
-              <a:rPr b="0" lang="en-US" sz="900" spc="-1" strike="noStrike">
-                <a:solidFill>
-                  <a:srgbClr val="6b6478"/>
-                </a:solidFill>
-                <a:latin typeface="Arial"/>
-                <a:ea typeface="DejaVu Sans"/>
-              </a:rPr>
-              <a:t>DSS 2026 AI Edition  ·  Teoria · Modele</a:t>
-            </a:r>
-            <a:endParaRPr b="0" lang="pl-PL" sz="900" spc="-1" strike="noStrike">
-              <a:latin typeface="Arial"/>
-            </a:endParaRPr>
-          </a:p>
-        </p:txBody>
-      </p:sp>
-      <p:sp>
-        <p:nvSpPr>
-          <p:cNvPr id="145" name="TextBox 5"/>
-          <p:cNvSpPr/>
-          <p:nvPr/>
-        </p:nvSpPr>
-        <p:spPr>
-          <a:xfrm>
-            <a:off x="10607040" y="6473880"/>
-            <a:ext cx="821160" cy="136800"/>
-          </a:xfrm>
-          <a:prstGeom prst="rect">
-            <a:avLst/>
-          </a:prstGeom>
-          <a:noFill/>
-          <a:ln w="0">
-            <a:noFill/>
-          </a:ln>
-        </p:spPr>
-        <p:style>
-          <a:lnRef idx="0"/>
-          <a:fillRef idx="0"/>
-          <a:effectRef idx="0"/>
-          <a:fontRef idx="minor"/>
-        </p:style>
-        <p:txBody>
-          <a:bodyPr lIns="0" rIns="0" tIns="0" bIns="0" anchor="t">
-            <a:spAutoFit/>
-          </a:bodyPr>
-          <a:p>
-            <a:pPr algn="r">
-              <a:lnSpc>
-                <a:spcPct val="100000"/>
-              </a:lnSpc>
-              <a:buNone/>
-            </a:pPr>
-            <a:r>
-              <a:rPr b="0" lang="en-US" sz="900" spc="-1" strike="noStrike">
-                <a:solidFill>
-                  <a:srgbClr val="6b6478"/>
-                </a:solidFill>
-                <a:latin typeface="Arial"/>
-                <a:ea typeface="DejaVu Sans"/>
-              </a:rPr>
-              <a:t>7</a:t>
-            </a:r>
-            <a:endParaRPr b="0" lang="pl-PL" sz="900" spc="-1" strike="noStrike">
-              <a:latin typeface="Arial"/>
-            </a:endParaRPr>
-          </a:p>
-        </p:txBody>
-      </p:sp>
-      <p:sp>
-        <p:nvSpPr>
-          <p:cNvPr id="146" name="Rounded Rectangle 6"/>
-          <p:cNvSpPr/>
-          <p:nvPr/>
-        </p:nvSpPr>
-        <p:spPr>
-          <a:xfrm>
-            <a:off x="768240" y="1417320"/>
-            <a:ext cx="5256000" cy="3564360"/>
-          </a:xfrm>
-          <a:prstGeom prst="roundRect">
-            <a:avLst>
-              <a:gd name="adj" fmla="val 16667"/>
-            </a:avLst>
-          </a:prstGeom>
-          <a:solidFill>
-            <a:srgbClr val="ffffff"/>
-          </a:solidFill>
-          <a:ln w="19050">
-            <a:solidFill>
-              <a:srgbClr val="00befe"/>
-            </a:solidFill>
-            <a:round/>
-          </a:ln>
-          <a:effectLst>
-            <a:outerShdw blurRad="39960" dir="5400000" dist="23040" rotWithShape="0">
-              <a:srgbClr val="000000">
-                <a:alpha val="35000"/>
-              </a:srgbClr>
-            </a:outerShdw>
-          </a:effectLst>
-        </p:spPr>
-        <p:style>
-          <a:lnRef idx="1">
-            <a:schemeClr val="accent1"/>
-          </a:lnRef>
-          <a:fillRef idx="3">
-            <a:schemeClr val="accent1"/>
-          </a:fillRef>
-          <a:effectRef idx="2">
-            <a:schemeClr val="accent1"/>
-          </a:effectRef>
-          <a:fontRef idx="minor"/>
-        </p:style>
-      </p:sp>
-      <p:sp>
-        <p:nvSpPr>
-          <p:cNvPr id="147" name="Rounded Rectangle 7"/>
-          <p:cNvSpPr/>
-          <p:nvPr/>
-        </p:nvSpPr>
-        <p:spPr>
-          <a:xfrm>
-            <a:off x="768240" y="1417320"/>
-            <a:ext cx="5256000" cy="546840"/>
-          </a:xfrm>
-          <a:prstGeom prst="roundRect">
-            <a:avLst>
-              <a:gd name="adj" fmla="val 16667"/>
-            </a:avLst>
-          </a:prstGeom>
-          <a:solidFill>
-            <a:srgbClr val="042733"/>
-          </a:solidFill>
-          <a:ln>
-            <a:noFill/>
-          </a:ln>
-          <a:effectLst>
-            <a:outerShdw blurRad="39960" dir="5400000" dist="23040" rotWithShape="0">
-              <a:srgbClr val="000000">
-                <a:alpha val="35000"/>
-              </a:srgbClr>
-            </a:outerShdw>
-          </a:effectLst>
-        </p:spPr>
-        <p:style>
-          <a:lnRef idx="1">
-            <a:schemeClr val="accent1"/>
-          </a:lnRef>
-          <a:fillRef idx="3">
-            <a:schemeClr val="accent1"/>
-          </a:fillRef>
-          <a:effectRef idx="2">
-            <a:schemeClr val="accent1"/>
-          </a:effectRef>
-          <a:fontRef idx="minor"/>
-        </p:style>
-      </p:sp>
-      <p:sp>
-        <p:nvSpPr>
-          <p:cNvPr id="148" name="TextBox 8"/>
-          <p:cNvSpPr/>
-          <p:nvPr/>
-        </p:nvSpPr>
-        <p:spPr>
-          <a:xfrm>
-            <a:off x="768240" y="1472040"/>
-            <a:ext cx="5256000" cy="227880"/>
-          </a:xfrm>
-          <a:prstGeom prst="rect">
-            <a:avLst/>
-          </a:prstGeom>
-          <a:noFill/>
-          <a:ln w="0">
-            <a:noFill/>
-          </a:ln>
-        </p:spPr>
-        <p:style>
-          <a:lnRef idx="0"/>
-          <a:fillRef idx="0"/>
-          <a:effectRef idx="0"/>
-          <a:fontRef idx="minor"/>
-        </p:style>
-        <p:txBody>
-          <a:bodyPr lIns="0" rIns="0" tIns="0" bIns="0" anchor="t">
-            <a:spAutoFit/>
-          </a:bodyPr>
-          <a:p>
-            <a:pPr algn="ctr">
-              <a:lnSpc>
-                <a:spcPct val="100000"/>
-              </a:lnSpc>
-              <a:buNone/>
-            </a:pPr>
-            <a:r>
-              <a:rPr b="1" lang="en-US" sz="1500" spc="-1" strike="noStrike">
-                <a:solidFill>
-                  <a:srgbClr val="00befe"/>
-                </a:solidFill>
-                <a:latin typeface="Arial"/>
-                <a:ea typeface="DejaVu Sans"/>
-              </a:rPr>
-              <a:t>MODEL KLASYFIKACYJNY</a:t>
-            </a:r>
-            <a:endParaRPr b="0" lang="pl-PL" sz="1500" spc="-1" strike="noStrike">
-              <a:latin typeface="Arial"/>
-            </a:endParaRPr>
-          </a:p>
-        </p:txBody>
-      </p:sp>
-      <p:sp>
-        <p:nvSpPr>
-          <p:cNvPr id="149" name="TextBox 9"/>
-          <p:cNvSpPr/>
-          <p:nvPr/>
-        </p:nvSpPr>
-        <p:spPr>
-          <a:xfrm>
-            <a:off x="996840" y="2148840"/>
-            <a:ext cx="1415520" cy="182160"/>
-          </a:xfrm>
-          <a:prstGeom prst="rect">
-            <a:avLst/>
-          </a:prstGeom>
-          <a:noFill/>
-          <a:ln w="0">
-            <a:noFill/>
-          </a:ln>
-        </p:spPr>
-        <p:style>
-          <a:lnRef idx="0"/>
-          <a:fillRef idx="0"/>
-          <a:effectRef idx="0"/>
-          <a:fontRef idx="minor"/>
-        </p:style>
-        <p:txBody>
-          <a:bodyPr lIns="0" rIns="0" tIns="0" bIns="0" anchor="t">
-            <a:spAutoFit/>
-          </a:bodyPr>
-          <a:p>
-            <a:pPr>
-              <a:lnSpc>
-                <a:spcPct val="100000"/>
-              </a:lnSpc>
-              <a:buNone/>
-            </a:pPr>
-            <a:r>
-              <a:rPr b="1" lang="en-US" sz="1200" spc="-1" strike="noStrike">
-                <a:solidFill>
-                  <a:srgbClr val="8b19fe"/>
-                </a:solidFill>
-                <a:latin typeface="Arial"/>
-                <a:ea typeface="DejaVu Sans"/>
-              </a:rPr>
-              <a:t>Wejście</a:t>
-            </a:r>
-            <a:endParaRPr b="0" lang="pl-PL" sz="1200" spc="-1" strike="noStrike">
-              <a:latin typeface="Arial"/>
-            </a:endParaRPr>
-          </a:p>
-        </p:txBody>
-      </p:sp>
-      <p:sp>
-        <p:nvSpPr>
-          <p:cNvPr id="150" name="TextBox 10"/>
-          <p:cNvSpPr/>
-          <p:nvPr/>
-        </p:nvSpPr>
-        <p:spPr>
-          <a:xfrm>
-            <a:off x="2368440" y="2148840"/>
-            <a:ext cx="3472920" cy="190080"/>
-          </a:xfrm>
-          <a:prstGeom prst="rect">
-            <a:avLst/>
-          </a:prstGeom>
-          <a:noFill/>
-          <a:ln w="0">
-            <a:noFill/>
-          </a:ln>
-        </p:spPr>
-        <p:style>
-          <a:lnRef idx="0"/>
-          <a:fillRef idx="0"/>
-          <a:effectRef idx="0"/>
-          <a:fontRef idx="minor"/>
-        </p:style>
-        <p:txBody>
-          <a:bodyPr lIns="0" rIns="0" tIns="0" bIns="0" anchor="t">
-            <a:spAutoFit/>
-          </a:bodyPr>
-          <a:p>
-            <a:pPr>
-              <a:lnSpc>
-                <a:spcPct val="100000"/>
-              </a:lnSpc>
-              <a:buNone/>
-            </a:pPr>
-            <a:r>
-              <a:rPr b="0" lang="en-US" sz="1250" spc="-1" strike="noStrike">
-                <a:solidFill>
-                  <a:srgbClr val="1b0532"/>
-                </a:solidFill>
-                <a:latin typeface="Arial"/>
-                <a:ea typeface="DejaVu Sans"/>
-              </a:rPr>
-              <a:t>„</a:t>
-            </a:r>
-            <a:r>
-              <a:rPr b="0" lang="en-US" sz="1250" spc="-1" strike="noStrike">
-                <a:solidFill>
-                  <a:srgbClr val="1b0532"/>
-                </a:solidFill>
-                <a:latin typeface="Arial"/>
-                <a:ea typeface="DejaVu Sans"/>
-              </a:rPr>
-              <a:t>Nie mogę zalogować się do konta”</a:t>
-            </a:r>
-            <a:endParaRPr b="0" lang="pl-PL" sz="1250" spc="-1" strike="noStrike">
-              <a:latin typeface="Arial"/>
-            </a:endParaRPr>
-          </a:p>
-        </p:txBody>
-      </p:sp>
-      <p:sp>
-        <p:nvSpPr>
-          <p:cNvPr id="151" name="TextBox 11"/>
-          <p:cNvSpPr/>
-          <p:nvPr/>
-        </p:nvSpPr>
-        <p:spPr>
-          <a:xfrm>
-            <a:off x="996840" y="2679120"/>
-            <a:ext cx="1415520" cy="182160"/>
-          </a:xfrm>
-          <a:prstGeom prst="rect">
-            <a:avLst/>
-          </a:prstGeom>
-          <a:noFill/>
-          <a:ln w="0">
-            <a:noFill/>
-          </a:ln>
-        </p:spPr>
-        <p:style>
-          <a:lnRef idx="0"/>
-          <a:fillRef idx="0"/>
-          <a:effectRef idx="0"/>
-          <a:fontRef idx="minor"/>
-        </p:style>
-        <p:txBody>
-          <a:bodyPr lIns="0" rIns="0" tIns="0" bIns="0" anchor="t">
-            <a:spAutoFit/>
-          </a:bodyPr>
-          <a:p>
-            <a:pPr>
-              <a:lnSpc>
-                <a:spcPct val="100000"/>
-              </a:lnSpc>
-              <a:buNone/>
-            </a:pPr>
-            <a:r>
-              <a:rPr b="1" lang="en-US" sz="1200" spc="-1" strike="noStrike">
-                <a:solidFill>
-                  <a:srgbClr val="8b19fe"/>
-                </a:solidFill>
-                <a:latin typeface="Arial"/>
-                <a:ea typeface="DejaVu Sans"/>
-              </a:rPr>
-              <a:t>Wyjście</a:t>
-            </a:r>
-            <a:endParaRPr b="0" lang="pl-PL" sz="1200" spc="-1" strike="noStrike">
-              <a:latin typeface="Arial"/>
-            </a:endParaRPr>
-          </a:p>
-        </p:txBody>
-      </p:sp>
-      <p:sp>
-        <p:nvSpPr>
-          <p:cNvPr id="152" name="TextBox 12"/>
-          <p:cNvSpPr/>
-          <p:nvPr/>
-        </p:nvSpPr>
-        <p:spPr>
-          <a:xfrm>
-            <a:off x="2368440" y="2679120"/>
-            <a:ext cx="3472920" cy="190080"/>
-          </a:xfrm>
-          <a:prstGeom prst="rect">
-            <a:avLst/>
-          </a:prstGeom>
-          <a:noFill/>
-          <a:ln w="0">
-            <a:noFill/>
-          </a:ln>
-        </p:spPr>
-        <p:style>
-          <a:lnRef idx="0"/>
-          <a:fillRef idx="0"/>
-          <a:effectRef idx="0"/>
-          <a:fontRef idx="minor"/>
-        </p:style>
-        <p:txBody>
-          <a:bodyPr lIns="0" rIns="0" tIns="0" bIns="0" anchor="t">
-            <a:spAutoFit/>
-          </a:bodyPr>
-          <a:p>
-            <a:pPr>
-              <a:lnSpc>
-                <a:spcPct val="100000"/>
-              </a:lnSpc>
-              <a:buNone/>
-            </a:pPr>
-            <a:r>
-              <a:rPr b="0" lang="en-US" sz="1250" spc="-1" strike="noStrike">
-                <a:solidFill>
-                  <a:srgbClr val="1b0532"/>
-                </a:solidFill>
-                <a:latin typeface="Arial"/>
-                <a:ea typeface="DejaVu Sans"/>
-              </a:rPr>
-              <a:t>klasa: problem_logowania</a:t>
-            </a:r>
-            <a:endParaRPr b="0" lang="pl-PL" sz="1250" spc="-1" strike="noStrike">
-              <a:latin typeface="Arial"/>
-            </a:endParaRPr>
-          </a:p>
-        </p:txBody>
-      </p:sp>
-      <p:sp>
-        <p:nvSpPr>
-          <p:cNvPr id="153" name="TextBox 13"/>
-          <p:cNvSpPr/>
-          <p:nvPr/>
-        </p:nvSpPr>
-        <p:spPr>
-          <a:xfrm>
-            <a:off x="996840" y="3209400"/>
-            <a:ext cx="1415520" cy="182160"/>
-          </a:xfrm>
-          <a:prstGeom prst="rect">
-            <a:avLst/>
-          </a:prstGeom>
-          <a:noFill/>
-          <a:ln w="0">
-            <a:noFill/>
-          </a:ln>
-        </p:spPr>
-        <p:style>
-          <a:lnRef idx="0"/>
-          <a:fillRef idx="0"/>
-          <a:effectRef idx="0"/>
-          <a:fontRef idx="minor"/>
-        </p:style>
-        <p:txBody>
-          <a:bodyPr lIns="0" rIns="0" tIns="0" bIns="0" anchor="t">
-            <a:spAutoFit/>
-          </a:bodyPr>
-          <a:p>
-            <a:pPr>
-              <a:lnSpc>
-                <a:spcPct val="100000"/>
-              </a:lnSpc>
-              <a:buNone/>
-            </a:pPr>
-            <a:r>
-              <a:rPr b="1" lang="en-US" sz="1200" spc="-1" strike="noStrike">
-                <a:solidFill>
-                  <a:srgbClr val="8b19fe"/>
-                </a:solidFill>
-                <a:latin typeface="Arial"/>
-                <a:ea typeface="DejaVu Sans"/>
-              </a:rPr>
-              <a:t>Dodatkowo</a:t>
-            </a:r>
-            <a:endParaRPr b="0" lang="pl-PL" sz="1200" spc="-1" strike="noStrike">
-              <a:latin typeface="Arial"/>
-            </a:endParaRPr>
-          </a:p>
-        </p:txBody>
-      </p:sp>
-      <p:sp>
-        <p:nvSpPr>
-          <p:cNvPr id="154" name="TextBox 14"/>
-          <p:cNvSpPr/>
-          <p:nvPr/>
-        </p:nvSpPr>
-        <p:spPr>
-          <a:xfrm>
-            <a:off x="2368440" y="3209400"/>
-            <a:ext cx="3472920" cy="190080"/>
-          </a:xfrm>
-          <a:prstGeom prst="rect">
-            <a:avLst/>
-          </a:prstGeom>
-          <a:noFill/>
-          <a:ln w="0">
-            <a:noFill/>
-          </a:ln>
-        </p:spPr>
-        <p:style>
-          <a:lnRef idx="0"/>
-          <a:fillRef idx="0"/>
-          <a:effectRef idx="0"/>
-          <a:fontRef idx="minor"/>
-        </p:style>
-        <p:txBody>
-          <a:bodyPr lIns="0" rIns="0" tIns="0" bIns="0" anchor="t">
-            <a:spAutoFit/>
-          </a:bodyPr>
-          <a:p>
-            <a:pPr>
-              <a:lnSpc>
-                <a:spcPct val="100000"/>
-              </a:lnSpc>
-              <a:buNone/>
-            </a:pPr>
-            <a:r>
-              <a:rPr b="0" lang="en-US" sz="1250" spc="-1" strike="noStrike">
-                <a:solidFill>
-                  <a:srgbClr val="1b0532"/>
-                </a:solidFill>
-                <a:latin typeface="Arial"/>
-                <a:ea typeface="DejaVu Sans"/>
-              </a:rPr>
-              <a:t>prawdopodobieństwa klas + thresholdy</a:t>
-            </a:r>
-            <a:endParaRPr b="0" lang="pl-PL" sz="1250" spc="-1" strike="noStrike">
-              <a:latin typeface="Arial"/>
-            </a:endParaRPr>
-          </a:p>
-        </p:txBody>
-      </p:sp>
-      <p:sp>
-        <p:nvSpPr>
-          <p:cNvPr id="155" name="TextBox 15"/>
-          <p:cNvSpPr/>
-          <p:nvPr/>
-        </p:nvSpPr>
-        <p:spPr>
-          <a:xfrm>
-            <a:off x="996840" y="3740040"/>
-            <a:ext cx="1415520" cy="182160"/>
-          </a:xfrm>
-          <a:prstGeom prst="rect">
-            <a:avLst/>
-          </a:prstGeom>
-          <a:noFill/>
-          <a:ln w="0">
-            <a:noFill/>
-          </a:ln>
-        </p:spPr>
-        <p:style>
-          <a:lnRef idx="0"/>
-          <a:fillRef idx="0"/>
-          <a:effectRef idx="0"/>
-          <a:fontRef idx="minor"/>
-        </p:style>
-        <p:txBody>
-          <a:bodyPr lIns="0" rIns="0" tIns="0" bIns="0" anchor="t">
-            <a:spAutoFit/>
-          </a:bodyPr>
-          <a:p>
-            <a:pPr>
-              <a:lnSpc>
-                <a:spcPct val="100000"/>
-              </a:lnSpc>
-              <a:buNone/>
-            </a:pPr>
-            <a:r>
-              <a:rPr b="1" lang="en-US" sz="1200" spc="-1" strike="noStrike">
-                <a:solidFill>
-                  <a:srgbClr val="8b19fe"/>
-                </a:solidFill>
-                <a:latin typeface="Arial"/>
-                <a:ea typeface="DejaVu Sans"/>
-              </a:rPr>
-              <a:t>Pytanie</a:t>
-            </a:r>
-            <a:endParaRPr b="0" lang="pl-PL" sz="1200" spc="-1" strike="noStrike">
-              <a:latin typeface="Arial"/>
-            </a:endParaRPr>
-          </a:p>
-        </p:txBody>
-      </p:sp>
-      <p:sp>
-        <p:nvSpPr>
-          <p:cNvPr id="156" name="TextBox 16"/>
-          <p:cNvSpPr/>
-          <p:nvPr/>
-        </p:nvSpPr>
-        <p:spPr>
-          <a:xfrm>
-            <a:off x="2368440" y="3740040"/>
-            <a:ext cx="3472920" cy="190080"/>
-          </a:xfrm>
-          <a:prstGeom prst="rect">
-            <a:avLst/>
-          </a:prstGeom>
-          <a:noFill/>
-          <a:ln w="0">
-            <a:noFill/>
-          </a:ln>
-        </p:spPr>
-        <p:style>
-          <a:lnRef idx="0"/>
-          <a:fillRef idx="0"/>
-          <a:effectRef idx="0"/>
-          <a:fontRef idx="minor"/>
-        </p:style>
-        <p:txBody>
-          <a:bodyPr lIns="0" rIns="0" tIns="0" bIns="0" anchor="t">
-            <a:spAutoFit/>
-          </a:bodyPr>
-          <a:p>
-            <a:pPr>
-              <a:lnSpc>
-                <a:spcPct val="100000"/>
-              </a:lnSpc>
-              <a:buNone/>
-            </a:pPr>
-            <a:r>
-              <a:rPr b="0" lang="en-US" sz="1250" spc="-1" strike="noStrike">
-                <a:solidFill>
-                  <a:srgbClr val="1b0532"/>
-                </a:solidFill>
-                <a:latin typeface="Arial"/>
-                <a:ea typeface="DejaVu Sans"/>
-              </a:rPr>
-              <a:t>Do której kategorii należy przykład?</a:t>
-            </a:r>
-            <a:endParaRPr b="0" lang="pl-PL" sz="1250" spc="-1" strike="noStrike">
-              <a:latin typeface="Arial"/>
-            </a:endParaRPr>
-          </a:p>
-        </p:txBody>
-      </p:sp>
-      <p:sp>
-        <p:nvSpPr>
-          <p:cNvPr id="157" name="TextBox 17"/>
-          <p:cNvSpPr/>
-          <p:nvPr/>
-        </p:nvSpPr>
-        <p:spPr>
-          <a:xfrm>
-            <a:off x="996840" y="4270320"/>
-            <a:ext cx="1415520" cy="182160"/>
-          </a:xfrm>
-          <a:prstGeom prst="rect">
-            <a:avLst/>
-          </a:prstGeom>
-          <a:noFill/>
-          <a:ln w="0">
-            <a:noFill/>
-          </a:ln>
-        </p:spPr>
-        <p:style>
-          <a:lnRef idx="0"/>
-          <a:fillRef idx="0"/>
-          <a:effectRef idx="0"/>
-          <a:fontRef idx="minor"/>
-        </p:style>
-        <p:txBody>
-          <a:bodyPr lIns="0" rIns="0" tIns="0" bIns="0" anchor="t">
-            <a:spAutoFit/>
-          </a:bodyPr>
-          <a:p>
-            <a:pPr>
-              <a:lnSpc>
-                <a:spcPct val="100000"/>
-              </a:lnSpc>
-              <a:buNone/>
-            </a:pPr>
-            <a:r>
-              <a:rPr b="1" lang="en-US" sz="1200" spc="-1" strike="noStrike">
-                <a:solidFill>
-                  <a:srgbClr val="8b19fe"/>
-                </a:solidFill>
-                <a:latin typeface="Arial"/>
-                <a:ea typeface="DejaVu Sans"/>
-              </a:rPr>
-              <a:t>Zalety</a:t>
-            </a:r>
-            <a:endParaRPr b="0" lang="pl-PL" sz="1200" spc="-1" strike="noStrike">
-              <a:latin typeface="Arial"/>
-            </a:endParaRPr>
-          </a:p>
-        </p:txBody>
-      </p:sp>
-      <p:sp>
-        <p:nvSpPr>
-          <p:cNvPr id="158" name="TextBox 18"/>
-          <p:cNvSpPr/>
-          <p:nvPr/>
-        </p:nvSpPr>
-        <p:spPr>
-          <a:xfrm>
-            <a:off x="2368440" y="4270320"/>
-            <a:ext cx="3472920" cy="190080"/>
-          </a:xfrm>
-          <a:prstGeom prst="rect">
-            <a:avLst/>
-          </a:prstGeom>
-          <a:noFill/>
-          <a:ln w="0">
-            <a:noFill/>
-          </a:ln>
-        </p:spPr>
-        <p:style>
-          <a:lnRef idx="0"/>
-          <a:fillRef idx="0"/>
-          <a:effectRef idx="0"/>
-          <a:fontRef idx="minor"/>
-        </p:style>
-        <p:txBody>
-          <a:bodyPr lIns="0" rIns="0" tIns="0" bIns="0" anchor="t">
-            <a:spAutoFit/>
-          </a:bodyPr>
-          <a:p>
-            <a:pPr>
-              <a:lnSpc>
-                <a:spcPct val="100000"/>
-              </a:lnSpc>
-              <a:buNone/>
-            </a:pPr>
-            <a:r>
-              <a:rPr b="0" lang="en-US" sz="1250" spc="-1" strike="noStrike">
-                <a:solidFill>
-                  <a:srgbClr val="1b0532"/>
-                </a:solidFill>
-                <a:latin typeface="Arial"/>
-                <a:ea typeface="DejaVu Sans"/>
-              </a:rPr>
-              <a:t>szybki, tani, łatwy do wdrożenia</a:t>
-            </a:r>
-            <a:endParaRPr b="0" lang="pl-PL" sz="1250" spc="-1" strike="noStrike">
-              <a:latin typeface="Arial"/>
-            </a:endParaRPr>
-          </a:p>
-        </p:txBody>
-      </p:sp>
-      <p:sp>
-        <p:nvSpPr>
-          <p:cNvPr id="159" name="Rounded Rectangle 19"/>
-          <p:cNvSpPr/>
-          <p:nvPr/>
-        </p:nvSpPr>
-        <p:spPr>
-          <a:xfrm>
-            <a:off x="6400800" y="1417320"/>
-            <a:ext cx="5256000" cy="3564360"/>
-          </a:xfrm>
-          <a:prstGeom prst="roundRect">
-            <a:avLst>
-              <a:gd name="adj" fmla="val 16667"/>
-            </a:avLst>
-          </a:prstGeom>
-          <a:solidFill>
-            <a:srgbClr val="ffffff"/>
-          </a:solidFill>
-          <a:ln w="19050">
-            <a:solidFill>
-              <a:srgbClr val="8b19fe"/>
-            </a:solidFill>
-            <a:round/>
-          </a:ln>
-          <a:effectLst>
-            <a:outerShdw blurRad="39960" dir="5400000" dist="23040" rotWithShape="0">
-              <a:srgbClr val="000000">
-                <a:alpha val="35000"/>
-              </a:srgbClr>
-            </a:outerShdw>
-          </a:effectLst>
-        </p:spPr>
-        <p:style>
-          <a:lnRef idx="1">
-            <a:schemeClr val="accent1"/>
-          </a:lnRef>
-          <a:fillRef idx="3">
-            <a:schemeClr val="accent1"/>
-          </a:fillRef>
-          <a:effectRef idx="2">
-            <a:schemeClr val="accent1"/>
-          </a:effectRef>
-          <a:fontRef idx="minor"/>
-        </p:style>
-      </p:sp>
-      <p:sp>
-        <p:nvSpPr>
-          <p:cNvPr id="160" name="Rounded Rectangle 20"/>
-          <p:cNvSpPr/>
-          <p:nvPr/>
-        </p:nvSpPr>
-        <p:spPr>
-          <a:xfrm>
-            <a:off x="6400800" y="1417320"/>
-            <a:ext cx="5256000" cy="546840"/>
-          </a:xfrm>
-          <a:prstGeom prst="roundRect">
-            <a:avLst>
-              <a:gd name="adj" fmla="val 16667"/>
-            </a:avLst>
-          </a:prstGeom>
-          <a:solidFill>
-            <a:srgbClr val="042733"/>
-          </a:solidFill>
-          <a:ln>
-            <a:noFill/>
-          </a:ln>
-          <a:effectLst>
-            <a:outerShdw blurRad="39960" dir="5400000" dist="23040" rotWithShape="0">
-              <a:srgbClr val="000000">
-                <a:alpha val="35000"/>
-              </a:srgbClr>
-            </a:outerShdw>
-          </a:effectLst>
-        </p:spPr>
-        <p:style>
-          <a:lnRef idx="1">
-            <a:schemeClr val="accent1"/>
-          </a:lnRef>
-          <a:fillRef idx="3">
-            <a:schemeClr val="accent1"/>
-          </a:fillRef>
-          <a:effectRef idx="2">
-            <a:schemeClr val="accent1"/>
-          </a:effectRef>
-          <a:fontRef idx="minor"/>
-        </p:style>
-      </p:sp>
-      <p:sp>
-        <p:nvSpPr>
-          <p:cNvPr id="161" name="TextBox 21"/>
-          <p:cNvSpPr/>
-          <p:nvPr/>
-        </p:nvSpPr>
-        <p:spPr>
-          <a:xfrm>
-            <a:off x="6400800" y="1472040"/>
-            <a:ext cx="5256000" cy="227880"/>
-          </a:xfrm>
-          <a:prstGeom prst="rect">
-            <a:avLst/>
-          </a:prstGeom>
-          <a:noFill/>
-          <a:ln w="0">
-            <a:noFill/>
-          </a:ln>
-        </p:spPr>
-        <p:style>
-          <a:lnRef idx="0"/>
-          <a:fillRef idx="0"/>
-          <a:effectRef idx="0"/>
-          <a:fontRef idx="minor"/>
-        </p:style>
-        <p:txBody>
-          <a:bodyPr lIns="0" rIns="0" tIns="0" bIns="0" anchor="t">
-            <a:spAutoFit/>
-          </a:bodyPr>
-          <a:p>
-            <a:pPr algn="ctr">
-              <a:lnSpc>
-                <a:spcPct val="100000"/>
-              </a:lnSpc>
-              <a:buNone/>
-            </a:pPr>
-            <a:r>
-              <a:rPr b="1" lang="en-US" sz="1500" spc="-1" strike="noStrike">
-                <a:solidFill>
-                  <a:srgbClr val="00befe"/>
-                </a:solidFill>
-                <a:latin typeface="Arial"/>
-                <a:ea typeface="DejaVu Sans"/>
-              </a:rPr>
-              <a:t>MODEL GENERATYWNY</a:t>
-            </a:r>
-            <a:endParaRPr b="0" lang="pl-PL" sz="1500" spc="-1" strike="noStrike">
-              <a:latin typeface="Arial"/>
-            </a:endParaRPr>
-          </a:p>
-        </p:txBody>
-      </p:sp>
-      <p:sp>
-        <p:nvSpPr>
-          <p:cNvPr id="162" name="TextBox 22"/>
-          <p:cNvSpPr/>
-          <p:nvPr/>
-        </p:nvSpPr>
-        <p:spPr>
-          <a:xfrm>
-            <a:off x="6629400" y="2148840"/>
-            <a:ext cx="1415520" cy="182160"/>
-          </a:xfrm>
-          <a:prstGeom prst="rect">
-            <a:avLst/>
-          </a:prstGeom>
-          <a:noFill/>
-          <a:ln w="0">
-            <a:noFill/>
-          </a:ln>
-        </p:spPr>
-        <p:style>
-          <a:lnRef idx="0"/>
-          <a:fillRef idx="0"/>
-          <a:effectRef idx="0"/>
-          <a:fontRef idx="minor"/>
-        </p:style>
-        <p:txBody>
-          <a:bodyPr lIns="0" rIns="0" tIns="0" bIns="0" anchor="t">
-            <a:spAutoFit/>
-          </a:bodyPr>
-          <a:p>
-            <a:pPr>
-              <a:lnSpc>
-                <a:spcPct val="100000"/>
-              </a:lnSpc>
-              <a:buNone/>
-            </a:pPr>
-            <a:r>
-              <a:rPr b="1" lang="en-US" sz="1200" spc="-1" strike="noStrike">
-                <a:solidFill>
-                  <a:srgbClr val="8b19fe"/>
-                </a:solidFill>
-                <a:latin typeface="Arial"/>
-                <a:ea typeface="DejaVu Sans"/>
-              </a:rPr>
-              <a:t>Wejście</a:t>
-            </a:r>
-            <a:endParaRPr b="0" lang="pl-PL" sz="1200" spc="-1" strike="noStrike">
-              <a:latin typeface="Arial"/>
-            </a:endParaRPr>
-          </a:p>
-        </p:txBody>
-      </p:sp>
-      <p:sp>
-        <p:nvSpPr>
-          <p:cNvPr id="163" name="TextBox 23"/>
-          <p:cNvSpPr/>
-          <p:nvPr/>
-        </p:nvSpPr>
-        <p:spPr>
-          <a:xfrm>
-            <a:off x="8001000" y="2148840"/>
-            <a:ext cx="3472920" cy="190080"/>
-          </a:xfrm>
-          <a:prstGeom prst="rect">
-            <a:avLst/>
-          </a:prstGeom>
-          <a:noFill/>
-          <a:ln w="0">
-            <a:noFill/>
-          </a:ln>
-        </p:spPr>
-        <p:style>
-          <a:lnRef idx="0"/>
-          <a:fillRef idx="0"/>
-          <a:effectRef idx="0"/>
-          <a:fontRef idx="minor"/>
-        </p:style>
-        <p:txBody>
-          <a:bodyPr lIns="0" rIns="0" tIns="0" bIns="0" anchor="t">
-            <a:spAutoFit/>
-          </a:bodyPr>
-          <a:p>
-            <a:pPr>
-              <a:lnSpc>
-                <a:spcPct val="100000"/>
-              </a:lnSpc>
-              <a:buNone/>
-            </a:pPr>
-            <a:r>
-              <a:rPr b="0" lang="en-US" sz="1250" spc="-1" strike="noStrike">
-                <a:solidFill>
-                  <a:srgbClr val="1b0532"/>
-                </a:solidFill>
-                <a:latin typeface="Arial"/>
-                <a:ea typeface="DejaVu Sans"/>
-              </a:rPr>
-              <a:t>prompt: „Wygeneruj alternatywy zdania”</a:t>
-            </a:r>
-            <a:endParaRPr b="0" lang="pl-PL" sz="1250" spc="-1" strike="noStrike">
-              <a:latin typeface="Arial"/>
-            </a:endParaRPr>
-          </a:p>
-        </p:txBody>
-      </p:sp>
-      <p:sp>
-        <p:nvSpPr>
-          <p:cNvPr id="164" name="TextBox 24"/>
-          <p:cNvSpPr/>
-          <p:nvPr/>
-        </p:nvSpPr>
-        <p:spPr>
-          <a:xfrm>
-            <a:off x="6629400" y="2679120"/>
-            <a:ext cx="1415520" cy="182160"/>
-          </a:xfrm>
-          <a:prstGeom prst="rect">
-            <a:avLst/>
-          </a:prstGeom>
-          <a:noFill/>
-          <a:ln w="0">
-            <a:noFill/>
-          </a:ln>
-        </p:spPr>
-        <p:style>
-          <a:lnRef idx="0"/>
-          <a:fillRef idx="0"/>
-          <a:effectRef idx="0"/>
-          <a:fontRef idx="minor"/>
-        </p:style>
-        <p:txBody>
-          <a:bodyPr lIns="0" rIns="0" tIns="0" bIns="0" anchor="t">
-            <a:spAutoFit/>
-          </a:bodyPr>
-          <a:p>
-            <a:pPr>
-              <a:lnSpc>
-                <a:spcPct val="100000"/>
-              </a:lnSpc>
-              <a:buNone/>
-            </a:pPr>
-            <a:r>
-              <a:rPr b="1" lang="en-US" sz="1200" spc="-1" strike="noStrike">
-                <a:solidFill>
-                  <a:srgbClr val="8b19fe"/>
-                </a:solidFill>
-                <a:latin typeface="Arial"/>
-                <a:ea typeface="DejaVu Sans"/>
-              </a:rPr>
-              <a:t>Wyjście</a:t>
-            </a:r>
-            <a:endParaRPr b="0" lang="pl-PL" sz="1200" spc="-1" strike="noStrike">
-              <a:latin typeface="Arial"/>
-            </a:endParaRPr>
-          </a:p>
-        </p:txBody>
-      </p:sp>
-      <p:sp>
-        <p:nvSpPr>
-          <p:cNvPr id="165" name="TextBox 25"/>
-          <p:cNvSpPr/>
-          <p:nvPr/>
-        </p:nvSpPr>
-        <p:spPr>
-          <a:xfrm>
-            <a:off x="8001000" y="2679120"/>
-            <a:ext cx="3472920" cy="190080"/>
-          </a:xfrm>
-          <a:prstGeom prst="rect">
-            <a:avLst/>
-          </a:prstGeom>
-          <a:noFill/>
-          <a:ln w="0">
-            <a:noFill/>
-          </a:ln>
-        </p:spPr>
-        <p:style>
-          <a:lnRef idx="0"/>
-          <a:fillRef idx="0"/>
-          <a:effectRef idx="0"/>
-          <a:fontRef idx="minor"/>
-        </p:style>
-        <p:txBody>
-          <a:bodyPr lIns="0" rIns="0" tIns="0" bIns="0" anchor="t">
-            <a:spAutoFit/>
-          </a:bodyPr>
-          <a:p>
-            <a:pPr>
-              <a:lnSpc>
-                <a:spcPct val="100000"/>
-              </a:lnSpc>
-              <a:buNone/>
-            </a:pPr>
-            <a:r>
-              <a:rPr b="0" lang="en-US" sz="1250" spc="-1" strike="noStrike">
-                <a:solidFill>
-                  <a:srgbClr val="1b0532"/>
-                </a:solidFill>
-                <a:latin typeface="Arial"/>
-                <a:ea typeface="DejaVu Sans"/>
-              </a:rPr>
-              <a:t>nowe teksty (warianty)</a:t>
-            </a:r>
-            <a:endParaRPr b="0" lang="pl-PL" sz="1250" spc="-1" strike="noStrike">
-              <a:latin typeface="Arial"/>
-            </a:endParaRPr>
-          </a:p>
-        </p:txBody>
-      </p:sp>
-      <p:sp>
-        <p:nvSpPr>
-          <p:cNvPr id="166" name="TextBox 26"/>
-          <p:cNvSpPr/>
-          <p:nvPr/>
-        </p:nvSpPr>
-        <p:spPr>
-          <a:xfrm>
-            <a:off x="6629400" y="3209400"/>
-            <a:ext cx="1415520" cy="182160"/>
-          </a:xfrm>
-          <a:prstGeom prst="rect">
-            <a:avLst/>
-          </a:prstGeom>
-          <a:noFill/>
-          <a:ln w="0">
-            <a:noFill/>
-          </a:ln>
-        </p:spPr>
-        <p:style>
-          <a:lnRef idx="0"/>
-          <a:fillRef idx="0"/>
-          <a:effectRef idx="0"/>
-          <a:fontRef idx="minor"/>
-        </p:style>
-        <p:txBody>
-          <a:bodyPr lIns="0" rIns="0" tIns="0" bIns="0" anchor="t">
-            <a:spAutoFit/>
-          </a:bodyPr>
-          <a:p>
-            <a:pPr>
-              <a:lnSpc>
-                <a:spcPct val="100000"/>
-              </a:lnSpc>
-              <a:buNone/>
-            </a:pPr>
-            <a:r>
-              <a:rPr b="1" lang="en-US" sz="1200" spc="-1" strike="noStrike">
-                <a:solidFill>
-                  <a:srgbClr val="8b19fe"/>
-                </a:solidFill>
-                <a:latin typeface="Arial"/>
-                <a:ea typeface="DejaVu Sans"/>
-              </a:rPr>
-              <a:t>Rola</a:t>
-            </a:r>
-            <a:endParaRPr b="0" lang="pl-PL" sz="1200" spc="-1" strike="noStrike">
-              <a:latin typeface="Arial"/>
-            </a:endParaRPr>
-          </a:p>
-        </p:txBody>
-      </p:sp>
-      <p:sp>
-        <p:nvSpPr>
-          <p:cNvPr id="167" name="TextBox 27"/>
-          <p:cNvSpPr/>
-          <p:nvPr/>
-        </p:nvSpPr>
-        <p:spPr>
-          <a:xfrm>
-            <a:off x="8001000" y="3209400"/>
-            <a:ext cx="3472920" cy="190080"/>
-          </a:xfrm>
-          <a:prstGeom prst="rect">
-            <a:avLst/>
-          </a:prstGeom>
-          <a:noFill/>
-          <a:ln w="0">
-            <a:noFill/>
-          </a:ln>
-        </p:spPr>
-        <p:style>
-          <a:lnRef idx="0"/>
-          <a:fillRef idx="0"/>
-          <a:effectRef idx="0"/>
-          <a:fontRef idx="minor"/>
-        </p:style>
-        <p:txBody>
-          <a:bodyPr lIns="0" rIns="0" tIns="0" bIns="0" anchor="t">
-            <a:spAutoFit/>
-          </a:bodyPr>
-          <a:p>
-            <a:pPr>
-              <a:lnSpc>
-                <a:spcPct val="100000"/>
-              </a:lnSpc>
-              <a:buNone/>
-            </a:pPr>
-            <a:r>
-              <a:rPr b="0" lang="en-US" sz="1250" spc="-1" strike="noStrike">
-                <a:solidFill>
-                  <a:srgbClr val="1b0532"/>
-                </a:solidFill>
-                <a:latin typeface="Arial"/>
-                <a:ea typeface="DejaVu Sans"/>
-              </a:rPr>
-              <a:t>pomocnicza — przygotowuje dane</a:t>
-            </a:r>
-            <a:endParaRPr b="0" lang="pl-PL" sz="1250" spc="-1" strike="noStrike">
-              <a:latin typeface="Arial"/>
-            </a:endParaRPr>
-          </a:p>
-        </p:txBody>
-      </p:sp>
-      <p:sp>
-        <p:nvSpPr>
-          <p:cNvPr id="168" name="TextBox 28"/>
-          <p:cNvSpPr/>
-          <p:nvPr/>
-        </p:nvSpPr>
-        <p:spPr>
-          <a:xfrm>
-            <a:off x="6629400" y="3740040"/>
-            <a:ext cx="1415520" cy="182160"/>
-          </a:xfrm>
-          <a:prstGeom prst="rect">
-            <a:avLst/>
-          </a:prstGeom>
-          <a:noFill/>
-          <a:ln w="0">
-            <a:noFill/>
-          </a:ln>
-        </p:spPr>
-        <p:style>
-          <a:lnRef idx="0"/>
-          <a:fillRef idx="0"/>
-          <a:effectRef idx="0"/>
-          <a:fontRef idx="minor"/>
-        </p:style>
-        <p:txBody>
-          <a:bodyPr lIns="0" rIns="0" tIns="0" bIns="0" anchor="t">
-            <a:spAutoFit/>
-          </a:bodyPr>
-          <a:p>
-            <a:pPr>
-              <a:lnSpc>
-                <a:spcPct val="100000"/>
-              </a:lnSpc>
-              <a:buNone/>
-            </a:pPr>
-            <a:r>
-              <a:rPr b="1" lang="en-US" sz="1200" spc="-1" strike="noStrike">
-                <a:solidFill>
-                  <a:srgbClr val="8b19fe"/>
-                </a:solidFill>
-                <a:latin typeface="Arial"/>
-                <a:ea typeface="DejaVu Sans"/>
-              </a:rPr>
-              <a:t>Pytanie</a:t>
-            </a:r>
-            <a:endParaRPr b="0" lang="pl-PL" sz="1200" spc="-1" strike="noStrike">
-              <a:latin typeface="Arial"/>
-            </a:endParaRPr>
-          </a:p>
-        </p:txBody>
-      </p:sp>
-      <p:sp>
-        <p:nvSpPr>
-          <p:cNvPr id="169" name="TextBox 29"/>
-          <p:cNvSpPr/>
-          <p:nvPr/>
-        </p:nvSpPr>
-        <p:spPr>
-          <a:xfrm>
-            <a:off x="8001000" y="3740040"/>
-            <a:ext cx="3472920" cy="190080"/>
-          </a:xfrm>
-          <a:prstGeom prst="rect">
-            <a:avLst/>
-          </a:prstGeom>
-          <a:noFill/>
-          <a:ln w="0">
-            <a:noFill/>
-          </a:ln>
-        </p:spPr>
-        <p:style>
-          <a:lnRef idx="0"/>
-          <a:fillRef idx="0"/>
-          <a:effectRef idx="0"/>
-          <a:fontRef idx="minor"/>
-        </p:style>
-        <p:txBody>
-          <a:bodyPr lIns="0" rIns="0" tIns="0" bIns="0" anchor="t">
-            <a:spAutoFit/>
-          </a:bodyPr>
-          <a:p>
-            <a:pPr>
-              <a:lnSpc>
-                <a:spcPct val="100000"/>
-              </a:lnSpc>
-              <a:buNone/>
-            </a:pPr>
-            <a:r>
-              <a:rPr b="0" lang="en-US" sz="1250" spc="-1" strike="noStrike">
-                <a:solidFill>
-                  <a:srgbClr val="1b0532"/>
-                </a:solidFill>
-                <a:latin typeface="Arial"/>
-                <a:ea typeface="DejaVu Sans"/>
-              </a:rPr>
-              <a:t>Co można wygenerować z kontekstu?</a:t>
-            </a:r>
-            <a:endParaRPr b="0" lang="pl-PL" sz="1250" spc="-1" strike="noStrike">
-              <a:latin typeface="Arial"/>
-            </a:endParaRPr>
-          </a:p>
-        </p:txBody>
-      </p:sp>
-      <p:sp>
-        <p:nvSpPr>
-          <p:cNvPr id="170" name="TextBox 30"/>
-          <p:cNvSpPr/>
-          <p:nvPr/>
-        </p:nvSpPr>
-        <p:spPr>
-          <a:xfrm>
-            <a:off x="6629400" y="4270320"/>
-            <a:ext cx="1415520" cy="182160"/>
-          </a:xfrm>
-          <a:prstGeom prst="rect">
-            <a:avLst/>
-          </a:prstGeom>
-          <a:noFill/>
-          <a:ln w="0">
-            <a:noFill/>
-          </a:ln>
-        </p:spPr>
-        <p:style>
-          <a:lnRef idx="0"/>
-          <a:fillRef idx="0"/>
-          <a:effectRef idx="0"/>
-          <a:fontRef idx="minor"/>
-        </p:style>
-        <p:txBody>
-          <a:bodyPr lIns="0" rIns="0" tIns="0" bIns="0" anchor="t">
-            <a:spAutoFit/>
-          </a:bodyPr>
-          <a:p>
-            <a:pPr>
-              <a:lnSpc>
-                <a:spcPct val="100000"/>
-              </a:lnSpc>
-              <a:buNone/>
-            </a:pPr>
-            <a:r>
-              <a:rPr b="1" lang="en-US" sz="1200" spc="-1" strike="noStrike">
-                <a:solidFill>
-                  <a:srgbClr val="8b19fe"/>
-                </a:solidFill>
-                <a:latin typeface="Arial"/>
-                <a:ea typeface="DejaVu Sans"/>
-              </a:rPr>
-              <a:t>Uwaga</a:t>
-            </a:r>
-            <a:endParaRPr b="0" lang="pl-PL" sz="1200" spc="-1" strike="noStrike">
-              <a:latin typeface="Arial"/>
-            </a:endParaRPr>
-          </a:p>
-        </p:txBody>
-      </p:sp>
-      <p:sp>
-        <p:nvSpPr>
-          <p:cNvPr id="171" name="TextBox 31"/>
-          <p:cNvSpPr/>
-          <p:nvPr/>
-        </p:nvSpPr>
-        <p:spPr>
-          <a:xfrm>
-            <a:off x="8001000" y="4270320"/>
-            <a:ext cx="3472920" cy="190080"/>
-          </a:xfrm>
-          <a:prstGeom prst="rect">
-            <a:avLst/>
-          </a:prstGeom>
-          <a:noFill/>
-          <a:ln w="0">
-            <a:noFill/>
-          </a:ln>
-        </p:spPr>
-        <p:style>
-          <a:lnRef idx="0"/>
-          <a:fillRef idx="0"/>
-          <a:effectRef idx="0"/>
-          <a:fontRef idx="minor"/>
-        </p:style>
-        <p:txBody>
-          <a:bodyPr lIns="0" rIns="0" tIns="0" bIns="0" anchor="t">
-            <a:spAutoFit/>
-          </a:bodyPr>
-          <a:p>
-            <a:pPr>
-              <a:lnSpc>
-                <a:spcPct val="100000"/>
-              </a:lnSpc>
-              <a:buNone/>
-            </a:pPr>
-            <a:r>
-              <a:rPr b="0" lang="en-US" sz="1250" spc="-1" strike="noStrike">
-                <a:solidFill>
-                  <a:srgbClr val="1b0532"/>
-                </a:solidFill>
-                <a:latin typeface="Arial"/>
-                <a:ea typeface="DejaVu Sans"/>
-              </a:rPr>
-              <a:t>nie jest modelem docelowym</a:t>
-            </a:r>
-            <a:endParaRPr b="0" lang="pl-PL" sz="1250" spc="-1" strike="noStrike">
-              <a:latin typeface="Arial"/>
-            </a:endParaRPr>
-          </a:p>
-        </p:txBody>
-      </p:sp>
-      <p:sp>
-        <p:nvSpPr>
-          <p:cNvPr id="172" name="Rounded Rectangle 32"/>
-          <p:cNvSpPr/>
-          <p:nvPr/>
-        </p:nvSpPr>
-        <p:spPr>
-          <a:xfrm>
-            <a:off x="768240" y="5120640"/>
-            <a:ext cx="10650960" cy="592560"/>
-          </a:xfrm>
-          <a:prstGeom prst="roundRect">
-            <a:avLst>
-              <a:gd name="adj" fmla="val 16667"/>
-            </a:avLst>
-          </a:prstGeom>
-          <a:solidFill>
-            <a:srgbClr val="f2f1f6"/>
-          </a:solidFill>
-          <a:ln>
-            <a:noFill/>
-          </a:ln>
-          <a:effectLst>
-            <a:outerShdw blurRad="39960" dir="5400000" dist="23040" rotWithShape="0">
-              <a:srgbClr val="000000">
-                <a:alpha val="35000"/>
-              </a:srgbClr>
-            </a:outerShdw>
-          </a:effectLst>
-        </p:spPr>
-        <p:style>
-          <a:lnRef idx="1">
-            <a:schemeClr val="accent1"/>
-          </a:lnRef>
-          <a:fillRef idx="3">
-            <a:schemeClr val="accent1"/>
-          </a:fillRef>
-          <a:effectRef idx="2">
-            <a:schemeClr val="accent1"/>
-          </a:effectRef>
-          <a:fontRef idx="minor"/>
-        </p:style>
-      </p:sp>
-      <p:sp>
-        <p:nvSpPr>
-          <p:cNvPr id="173" name="Rectangle 33"/>
-          <p:cNvSpPr/>
-          <p:nvPr/>
-        </p:nvSpPr>
-        <p:spPr>
-          <a:xfrm>
-            <a:off x="768240" y="5120640"/>
-            <a:ext cx="48960" cy="592560"/>
-          </a:xfrm>
-          <a:prstGeom prst="rect">
-            <a:avLst/>
-          </a:prstGeom>
-          <a:solidFill>
-            <a:srgbClr val="00befe"/>
-          </a:solidFill>
-          <a:ln>
-            <a:noFill/>
-          </a:ln>
-          <a:effectLst>
-            <a:outerShdw blurRad="39960" dir="5400000" dist="23040" rotWithShape="0">
-              <a:srgbClr val="000000">
-                <a:alpha val="35000"/>
-              </a:srgbClr>
-            </a:outerShdw>
-          </a:effectLst>
-        </p:spPr>
-        <p:style>
-          <a:lnRef idx="1">
-            <a:schemeClr val="accent1"/>
-          </a:lnRef>
-          <a:fillRef idx="3">
-            <a:schemeClr val="accent1"/>
-          </a:fillRef>
-          <a:effectRef idx="2">
-            <a:schemeClr val="accent1"/>
-          </a:effectRef>
-          <a:fontRef idx="minor"/>
-        </p:style>
-      </p:sp>
-      <p:sp>
-        <p:nvSpPr>
-          <p:cNvPr id="174" name="TextBox 34"/>
-          <p:cNvSpPr/>
-          <p:nvPr/>
-        </p:nvSpPr>
-        <p:spPr>
-          <a:xfrm>
-            <a:off x="1024200" y="5331600"/>
-            <a:ext cx="10193760" cy="207000"/>
-          </a:xfrm>
-          <a:prstGeom prst="rect">
-            <a:avLst/>
-          </a:prstGeom>
-          <a:noFill/>
-          <a:ln w="0">
-            <a:noFill/>
-          </a:ln>
-        </p:spPr>
-        <p:style>
-          <a:lnRef idx="0"/>
-          <a:fillRef idx="0"/>
-          <a:effectRef idx="0"/>
-          <a:fontRef idx="minor"/>
-        </p:style>
-        <p:txBody>
-          <a:bodyPr lIns="0" rIns="0" tIns="0" bIns="0" anchor="ctr">
-            <a:spAutoFit/>
-          </a:bodyPr>
-          <a:p>
-            <a:pPr>
-              <a:lnSpc>
-                <a:spcPct val="105000"/>
-              </a:lnSpc>
-              <a:buNone/>
-            </a:pPr>
-            <a:r>
-              <a:rPr b="0" lang="en-US" sz="1300" spc="-1" strike="noStrike">
-                <a:solidFill>
-                  <a:srgbClr val="6b6478"/>
-                </a:solidFill>
-                <a:latin typeface="Arial"/>
-                <a:ea typeface="DejaVu Sans"/>
-              </a:rPr>
-              <a:t>LLM generatywny przygotowuje dane → model klasyfikacyjny uczy się na nich podejmować decyzje.</a:t>
-            </a:r>
-            <a:endParaRPr b="0" lang="pl-PL" sz="1300" spc="-1" strike="noStrike">
-              <a:latin typeface="Arial"/>
-            </a:endParaRPr>
-          </a:p>
-        </p:txBody>
-      </p:sp>
     </p:spTree>
   </p:cSld>
   <mc:AlternateContent>
@@ -32155,7 +31981,7 @@
         <p:spPr>
           <a:xfrm>
             <a:off x="768240" y="420480"/>
-            <a:ext cx="10605240" cy="441360"/>
+            <a:ext cx="10604880" cy="441360"/>
           </a:xfrm>
           <a:prstGeom prst="rect">
             <a:avLst/>
@@ -32207,7 +32033,7 @@
         <p:spPr>
           <a:xfrm>
             <a:off x="768240" y="1170360"/>
-            <a:ext cx="1369800" cy="42480"/>
+            <a:ext cx="1369440" cy="42120"/>
           </a:xfrm>
           <a:prstGeom prst="rect">
             <a:avLst/>
@@ -32248,7 +32074,7 @@
         <p:spPr>
           <a:xfrm>
             <a:off x="768240" y="1298520"/>
-            <a:ext cx="10605240" cy="227880"/>
+            <a:ext cx="10604880" cy="227880"/>
           </a:xfrm>
           <a:prstGeom prst="rect">
             <a:avLst/>
@@ -32300,7 +32126,7 @@
         <p:spPr>
           <a:xfrm>
             <a:off x="0" y="6437520"/>
-            <a:ext cx="12189960" cy="13320"/>
+            <a:ext cx="12189600" cy="12960"/>
           </a:xfrm>
           <a:prstGeom prst="rect">
             <a:avLst/>
@@ -32341,7 +32167,7 @@
         <p:spPr>
           <a:xfrm>
             <a:off x="768240" y="6473880"/>
-            <a:ext cx="8227800" cy="136800"/>
+            <a:ext cx="8227440" cy="136800"/>
           </a:xfrm>
           <a:prstGeom prst="rect">
             <a:avLst/>
@@ -32393,7 +32219,7 @@
         <p:spPr>
           <a:xfrm>
             <a:off x="10607040" y="6473880"/>
-            <a:ext cx="821160" cy="136800"/>
+            <a:ext cx="820800" cy="136800"/>
           </a:xfrm>
           <a:prstGeom prst="rect">
             <a:avLst/>
@@ -32445,7 +32271,7 @@
         <p:spPr>
           <a:xfrm>
             <a:off x="768240" y="1828800"/>
-            <a:ext cx="5393160" cy="227880"/>
+            <a:ext cx="5392800" cy="227880"/>
           </a:xfrm>
           <a:prstGeom prst="rect">
             <a:avLst/>
@@ -32497,7 +32323,7 @@
         <p:spPr>
           <a:xfrm>
             <a:off x="768240" y="2286000"/>
-            <a:ext cx="5484600" cy="1692720"/>
+            <a:ext cx="5484240" cy="1692720"/>
           </a:xfrm>
           <a:prstGeom prst="rect">
             <a:avLst/>
@@ -32698,7 +32524,7 @@
         <p:spPr>
           <a:xfrm>
             <a:off x="6446520" y="1828800"/>
-            <a:ext cx="4981680" cy="2101320"/>
+            <a:ext cx="4981320" cy="2100960"/>
           </a:xfrm>
           <a:prstGeom prst="roundRect">
             <a:avLst>
@@ -32741,7 +32567,7 @@
         <p:spPr>
           <a:xfrm>
             <a:off x="6446520" y="1828800"/>
-            <a:ext cx="48960" cy="2101320"/>
+            <a:ext cx="48600" cy="2100960"/>
           </a:xfrm>
           <a:prstGeom prst="rect">
             <a:avLst/>
@@ -32782,7 +32608,7 @@
         <p:spPr>
           <a:xfrm>
             <a:off x="6702480" y="2267640"/>
-            <a:ext cx="4524480" cy="1261440"/>
+            <a:ext cx="4524120" cy="1261440"/>
           </a:xfrm>
           <a:prstGeom prst="rect">
             <a:avLst/>
@@ -32921,7 +32747,7 @@
         <p:spPr>
           <a:xfrm>
             <a:off x="1199520" y="3960360"/>
-            <a:ext cx="3192120" cy="2462760"/>
+            <a:ext cx="3191760" cy="2462400"/>
           </a:xfrm>
           <a:prstGeom prst="rect">
             <a:avLst/>
@@ -32944,7 +32770,7 @@
         <p:spPr>
           <a:xfrm>
             <a:off x="6050880" y="3972240"/>
-            <a:ext cx="3164760" cy="2441520"/>
+            <a:ext cx="3164400" cy="2441160"/>
           </a:xfrm>
           <a:prstGeom prst="rect">
             <a:avLst/>
@@ -32963,7 +32789,7 @@
         <p:spPr>
           <a:xfrm>
             <a:off x="4608360" y="5184360"/>
-            <a:ext cx="1151280" cy="215280"/>
+            <a:ext cx="1150920" cy="214920"/>
           </a:xfrm>
           <a:custGeom>
             <a:avLst/>

--- a/conf/DSS_20260618/presentation/pptx/DSS_2026_Tutorial.pptx
+++ b/conf/DSS_20260618/presentation/pptx/DSS_2026_Tutorial.pptx
@@ -90,7 +90,7 @@
         <p:txBody>
           <a:bodyPr/>
           <a:p>
-            <a:fld id="{F87F9A81-F035-4C61-ABFA-22393BABF1FE}" type="slidenum">
+            <a:fld id="{84E71060-E972-4C2D-AB26-F6869C246E70}" type="slidenum">
               <a:t>&lt;#&gt;</a:t>
             </a:fld>
           </a:p>
@@ -278,7 +278,7 @@
         <p:txBody>
           <a:bodyPr/>
           <a:p>
-            <a:fld id="{1435677F-853C-41EF-8453-1DD42EC66ACC}" type="slidenum">
+            <a:fld id="{ABA444B5-F50B-4494-A345-F01D17D7D796}" type="slidenum">
               <a:t>&lt;#&gt;</a:t>
             </a:fld>
           </a:p>
@@ -534,7 +534,7 @@
         <p:txBody>
           <a:bodyPr/>
           <a:p>
-            <a:fld id="{8E78B32B-8E32-4AFB-BD33-FCE5DF63E1EB}" type="slidenum">
+            <a:fld id="{88716AE6-D6D9-468B-ACA1-541CD2573BF6}" type="slidenum">
               <a:t>&lt;#&gt;</a:t>
             </a:fld>
           </a:p>
@@ -858,7 +858,7 @@
         <p:txBody>
           <a:bodyPr/>
           <a:p>
-            <a:fld id="{BE5762A2-A5A1-4F90-801C-D2873A6E96F2}" type="slidenum">
+            <a:fld id="{65384249-6640-49BA-A7AD-2648AAE19EDA}" type="slidenum">
               <a:t>&lt;#&gt;</a:t>
             </a:fld>
           </a:p>
@@ -1015,7 +1015,7 @@
         <p:txBody>
           <a:bodyPr/>
           <a:p>
-            <a:fld id="{28E15D07-8E73-47BB-BE08-E76FD806D778}" type="slidenum">
+            <a:fld id="{75D190B6-F4F6-4018-91FD-0A27EE0FCE97}" type="slidenum">
               <a:t>&lt;#&gt;</a:t>
             </a:fld>
           </a:p>
@@ -1169,7 +1169,7 @@
         <p:txBody>
           <a:bodyPr/>
           <a:p>
-            <a:fld id="{D47453A2-7C75-4F31-8C7F-4B6833B8746C}" type="slidenum">
+            <a:fld id="{26F2CD7C-3605-459A-9099-E702E945192C}" type="slidenum">
               <a:t>&lt;#&gt;</a:t>
             </a:fld>
           </a:p>
@@ -1357,7 +1357,7 @@
         <p:txBody>
           <a:bodyPr/>
           <a:p>
-            <a:fld id="{FB86A9CC-5A0D-46A7-90D7-DEC863035CDB}" type="slidenum">
+            <a:fld id="{A4433EBD-8CDE-440B-8F24-63BB750F1E02}" type="slidenum">
               <a:t>&lt;#&gt;</a:t>
             </a:fld>
           </a:p>
@@ -1477,7 +1477,7 @@
         <p:txBody>
           <a:bodyPr/>
           <a:p>
-            <a:fld id="{BAF0B5DD-EB9F-40E9-A26F-69F27895D15E}" type="slidenum">
+            <a:fld id="{617199EB-1F4C-414A-9857-4D1C2F55097B}" type="slidenum">
               <a:t>&lt;#&gt;</a:t>
             </a:fld>
           </a:p>
@@ -1597,7 +1597,7 @@
         <p:txBody>
           <a:bodyPr/>
           <a:p>
-            <a:fld id="{7F4951E1-D6F5-4471-8D35-E29893B2AB23}" type="slidenum">
+            <a:fld id="{543677C7-E803-4061-8295-7A138FDFACD5}" type="slidenum">
               <a:t>&lt;#&gt;</a:t>
             </a:fld>
           </a:p>
@@ -1819,7 +1819,7 @@
         <p:txBody>
           <a:bodyPr/>
           <a:p>
-            <a:fld id="{E655AECB-245B-4B36-8FBA-40B8DE5DECC4}" type="slidenum">
+            <a:fld id="{3C1035F7-23F2-40B3-BC04-5DB19B15F6F1}" type="slidenum">
               <a:t>&lt;#&gt;</a:t>
             </a:fld>
           </a:p>
@@ -2041,7 +2041,7 @@
         <p:txBody>
           <a:bodyPr/>
           <a:p>
-            <a:fld id="{C1CEB98D-8414-4749-8792-8DDB3867598F}" type="slidenum">
+            <a:fld id="{EB135158-3ED6-4D5E-BFFA-2BEB24E12A0B}" type="slidenum">
               <a:t>&lt;#&gt;</a:t>
             </a:fld>
           </a:p>
@@ -2263,7 +2263,7 @@
         <p:txBody>
           <a:bodyPr/>
           <a:p>
-            <a:fld id="{A2DF1B2E-3000-40DA-AEC5-FE1E111A49FC}" type="slidenum">
+            <a:fld id="{29A51D1C-E52F-4ECD-86A7-6EF4889047EE}" type="slidenum">
               <a:t>&lt;#&gt;</a:t>
             </a:fld>
           </a:p>
@@ -2332,7 +2332,7 @@
         <p:spPr>
           <a:xfrm>
             <a:off x="3124080" y="6356520"/>
-            <a:ext cx="2893320" cy="362880"/>
+            <a:ext cx="2892960" cy="362520"/>
           </a:xfrm>
           <a:prstGeom prst="rect">
             <a:avLst/>
@@ -2389,7 +2389,7 @@
         <p:spPr>
           <a:xfrm>
             <a:off x="6553080" y="6356520"/>
-            <a:ext cx="2131560" cy="362880"/>
+            <a:ext cx="2131200" cy="362520"/>
           </a:xfrm>
           <a:prstGeom prst="rect">
             <a:avLst/>
@@ -2424,7 +2424,7 @@
               </a:lnSpc>
               <a:buNone/>
             </a:pPr>
-            <a:fld id="{7AAAF06A-4272-4869-8A0C-CF2B1BDC071B}" type="slidenum">
+            <a:fld id="{A9D3A044-7160-4471-BFC5-F301D059CF9D}" type="slidenum">
               <a:rPr b="0" lang="en-US" sz="1200" spc="-1" strike="noStrike">
                 <a:solidFill>
                   <a:srgbClr val="8b8b8b"/>
@@ -2452,7 +2452,7 @@
         <p:spPr>
           <a:xfrm>
             <a:off x="457200" y="6356520"/>
-            <a:ext cx="2131560" cy="362880"/>
+            <a:ext cx="2131200" cy="362520"/>
           </a:xfrm>
           <a:prstGeom prst="rect">
             <a:avLst/>
@@ -2521,7 +2521,37 @@
               <a:rPr b="0" lang="pl-PL" sz="4400" spc="-1" strike="noStrike">
                 <a:latin typeface="Arial"/>
               </a:rPr>
-              <a:t>Kliknij, aby edytować format tekstu tytułu</a:t>
+              <a:t>Kliknij, </a:t>
+            </a:r>
+            <a:r>
+              <a:rPr b="0" lang="pl-PL" sz="4400" spc="-1" strike="noStrike">
+                <a:latin typeface="Arial"/>
+              </a:rPr>
+              <a:t>aby </a:t>
+            </a:r>
+            <a:r>
+              <a:rPr b="0" lang="pl-PL" sz="4400" spc="-1" strike="noStrike">
+                <a:latin typeface="Arial"/>
+              </a:rPr>
+              <a:t>edytować </a:t>
+            </a:r>
+            <a:r>
+              <a:rPr b="0" lang="pl-PL" sz="4400" spc="-1" strike="noStrike">
+                <a:latin typeface="Arial"/>
+              </a:rPr>
+              <a:t>format </a:t>
+            </a:r>
+            <a:r>
+              <a:rPr b="0" lang="pl-PL" sz="4400" spc="-1" strike="noStrike">
+                <a:latin typeface="Arial"/>
+              </a:rPr>
+              <a:t>tekstu </a:t>
+            </a:r>
+            <a:r>
+              <a:rPr b="0" lang="pl-PL" sz="4400" spc="-1" strike="noStrike">
+                <a:latin typeface="Arial"/>
+              </a:rPr>
+              <a:t>tytułu</a:t>
             </a:r>
             <a:endParaRPr b="0" lang="pl-PL" sz="4400" spc="-1" strike="noStrike">
               <a:latin typeface="Arial"/>
@@ -2765,7 +2795,7 @@
         <p:spPr>
           <a:xfrm>
             <a:off x="0" y="2331720"/>
-            <a:ext cx="1826640" cy="61200"/>
+            <a:ext cx="1826280" cy="60840"/>
           </a:xfrm>
           <a:prstGeom prst="rect">
             <a:avLst/>
@@ -2806,7 +2836,7 @@
         <p:spPr>
           <a:xfrm>
             <a:off x="768240" y="868680"/>
-            <a:ext cx="2283840" cy="212760"/>
+            <a:ext cx="2283480" cy="212760"/>
           </a:xfrm>
           <a:prstGeom prst="rect">
             <a:avLst/>
@@ -2858,7 +2888,7 @@
         <p:spPr>
           <a:xfrm>
             <a:off x="768240" y="2514600"/>
-            <a:ext cx="10422000" cy="1471320"/>
+            <a:ext cx="10421640" cy="1471320"/>
           </a:xfrm>
           <a:prstGeom prst="rect">
             <a:avLst/>
@@ -2931,7 +2961,7 @@
         <p:spPr>
           <a:xfrm>
             <a:off x="768240" y="4343400"/>
-            <a:ext cx="10056240" cy="630360"/>
+            <a:ext cx="10055880" cy="630360"/>
           </a:xfrm>
           <a:prstGeom prst="rect">
             <a:avLst/>
@@ -2983,7 +3013,7 @@
         <p:spPr>
           <a:xfrm>
             <a:off x="768240" y="5623560"/>
-            <a:ext cx="7313040" cy="486360"/>
+            <a:ext cx="7312680" cy="486360"/>
           </a:xfrm>
           <a:prstGeom prst="rect">
             <a:avLst/>
@@ -3060,7 +3090,7 @@
         <p:spPr>
           <a:xfrm>
             <a:off x="10983960" y="6336000"/>
-            <a:ext cx="1061280" cy="596520"/>
+            <a:ext cx="1060920" cy="596160"/>
           </a:xfrm>
           <a:prstGeom prst="rect">
             <a:avLst/>
@@ -3116,7 +3146,7 @@
         <p:spPr>
           <a:xfrm>
             <a:off x="768240" y="420480"/>
-            <a:ext cx="10604880" cy="441360"/>
+            <a:ext cx="10604520" cy="441360"/>
           </a:xfrm>
           <a:prstGeom prst="rect">
             <a:avLst/>
@@ -3168,7 +3198,7 @@
         <p:spPr>
           <a:xfrm>
             <a:off x="768240" y="1170360"/>
-            <a:ext cx="1369440" cy="42120"/>
+            <a:ext cx="1369080" cy="41760"/>
           </a:xfrm>
           <a:prstGeom prst="rect">
             <a:avLst/>
@@ -3209,7 +3239,7 @@
         <p:spPr>
           <a:xfrm>
             <a:off x="768240" y="1298520"/>
-            <a:ext cx="10604880" cy="227880"/>
+            <a:ext cx="10604520" cy="227880"/>
           </a:xfrm>
           <a:prstGeom prst="rect">
             <a:avLst/>
@@ -3261,7 +3291,7 @@
         <p:spPr>
           <a:xfrm>
             <a:off x="0" y="6437520"/>
-            <a:ext cx="12189600" cy="12960"/>
+            <a:ext cx="12189240" cy="12600"/>
           </a:xfrm>
           <a:prstGeom prst="rect">
             <a:avLst/>
@@ -3302,7 +3332,7 @@
         <p:spPr>
           <a:xfrm>
             <a:off x="768240" y="6473880"/>
-            <a:ext cx="8227440" cy="136800"/>
+            <a:ext cx="8227080" cy="136800"/>
           </a:xfrm>
           <a:prstGeom prst="rect">
             <a:avLst/>
@@ -3354,7 +3384,7 @@
         <p:spPr>
           <a:xfrm>
             <a:off x="10607040" y="6473880"/>
-            <a:ext cx="820800" cy="136800"/>
+            <a:ext cx="820440" cy="136800"/>
           </a:xfrm>
           <a:prstGeom prst="rect">
             <a:avLst/>
@@ -3406,7 +3436,7 @@
         <p:spPr>
           <a:xfrm>
             <a:off x="768240" y="1828800"/>
-            <a:ext cx="5027040" cy="1460880"/>
+            <a:ext cx="5026680" cy="1460520"/>
           </a:xfrm>
           <a:prstGeom prst="roundRect">
             <a:avLst>
@@ -3449,7 +3479,7 @@
         <p:spPr>
           <a:xfrm>
             <a:off x="768240" y="1828800"/>
-            <a:ext cx="48600" cy="1460880"/>
+            <a:ext cx="48240" cy="1460520"/>
           </a:xfrm>
           <a:prstGeom prst="rect">
             <a:avLst/>
@@ -3490,7 +3520,7 @@
         <p:spPr>
           <a:xfrm>
             <a:off x="1042560" y="1993320"/>
-            <a:ext cx="4569840" cy="243000"/>
+            <a:ext cx="4569480" cy="243000"/>
           </a:xfrm>
           <a:prstGeom prst="rect">
             <a:avLst/>
@@ -3542,7 +3572,7 @@
         <p:spPr>
           <a:xfrm>
             <a:off x="1042560" y="2423160"/>
-            <a:ext cx="4569840" cy="435240"/>
+            <a:ext cx="4569480" cy="435240"/>
           </a:xfrm>
           <a:prstGeom prst="rect">
             <a:avLst/>
@@ -3594,7 +3624,7 @@
         <p:spPr>
           <a:xfrm>
             <a:off x="6400800" y="1828800"/>
-            <a:ext cx="5027040" cy="1460880"/>
+            <a:ext cx="5026680" cy="1460520"/>
           </a:xfrm>
           <a:prstGeom prst="roundRect">
             <a:avLst>
@@ -3637,7 +3667,7 @@
         <p:spPr>
           <a:xfrm>
             <a:off x="6400800" y="1828800"/>
-            <a:ext cx="48600" cy="1460880"/>
+            <a:ext cx="48240" cy="1460520"/>
           </a:xfrm>
           <a:prstGeom prst="rect">
             <a:avLst/>
@@ -3678,7 +3708,7 @@
         <p:spPr>
           <a:xfrm>
             <a:off x="6675120" y="1993320"/>
-            <a:ext cx="4569840" cy="243000"/>
+            <a:ext cx="4569480" cy="243000"/>
           </a:xfrm>
           <a:prstGeom prst="rect">
             <a:avLst/>
@@ -3730,7 +3760,7 @@
         <p:spPr>
           <a:xfrm>
             <a:off x="6675120" y="2423160"/>
-            <a:ext cx="4569840" cy="435240"/>
+            <a:ext cx="4569480" cy="435240"/>
           </a:xfrm>
           <a:prstGeom prst="rect">
             <a:avLst/>
@@ -3782,7 +3812,7 @@
         <p:spPr>
           <a:xfrm>
             <a:off x="768240" y="3566160"/>
-            <a:ext cx="5027040" cy="1460880"/>
+            <a:ext cx="5026680" cy="1460520"/>
           </a:xfrm>
           <a:prstGeom prst="roundRect">
             <a:avLst>
@@ -3825,7 +3855,7 @@
         <p:spPr>
           <a:xfrm>
             <a:off x="768240" y="3566160"/>
-            <a:ext cx="48600" cy="1460880"/>
+            <a:ext cx="48240" cy="1460520"/>
           </a:xfrm>
           <a:prstGeom prst="rect">
             <a:avLst/>
@@ -3866,7 +3896,7 @@
         <p:spPr>
           <a:xfrm>
             <a:off x="1042560" y="3730680"/>
-            <a:ext cx="4569840" cy="243000"/>
+            <a:ext cx="4569480" cy="243000"/>
           </a:xfrm>
           <a:prstGeom prst="rect">
             <a:avLst/>
@@ -3918,7 +3948,7 @@
         <p:spPr>
           <a:xfrm>
             <a:off x="1042560" y="4160520"/>
-            <a:ext cx="4569840" cy="217440"/>
+            <a:ext cx="4569480" cy="217440"/>
           </a:xfrm>
           <a:prstGeom prst="rect">
             <a:avLst/>
@@ -3970,7 +4000,7 @@
         <p:spPr>
           <a:xfrm>
             <a:off x="6400800" y="3566160"/>
-            <a:ext cx="5027040" cy="1460880"/>
+            <a:ext cx="5026680" cy="1460520"/>
           </a:xfrm>
           <a:prstGeom prst="roundRect">
             <a:avLst>
@@ -4013,7 +4043,7 @@
         <p:spPr>
           <a:xfrm>
             <a:off x="6400800" y="3566160"/>
-            <a:ext cx="48600" cy="1460880"/>
+            <a:ext cx="48240" cy="1460520"/>
           </a:xfrm>
           <a:prstGeom prst="rect">
             <a:avLst/>
@@ -4054,7 +4084,7 @@
         <p:spPr>
           <a:xfrm>
             <a:off x="6675120" y="3730680"/>
-            <a:ext cx="4569840" cy="243000"/>
+            <a:ext cx="4569480" cy="243000"/>
           </a:xfrm>
           <a:prstGeom prst="rect">
             <a:avLst/>
@@ -4106,7 +4136,7 @@
         <p:spPr>
           <a:xfrm>
             <a:off x="6675120" y="4160520"/>
-            <a:ext cx="4569840" cy="217440"/>
+            <a:ext cx="4569480" cy="217440"/>
           </a:xfrm>
           <a:prstGeom prst="rect">
             <a:avLst/>
@@ -4195,7 +4225,7 @@
         <p:spPr>
           <a:xfrm>
             <a:off x="768240" y="420480"/>
-            <a:ext cx="10604880" cy="441360"/>
+            <a:ext cx="10604520" cy="441360"/>
           </a:xfrm>
           <a:prstGeom prst="rect">
             <a:avLst/>
@@ -4247,7 +4277,7 @@
         <p:spPr>
           <a:xfrm>
             <a:off x="768240" y="1170360"/>
-            <a:ext cx="1369440" cy="42120"/>
+            <a:ext cx="1369080" cy="41760"/>
           </a:xfrm>
           <a:prstGeom prst="rect">
             <a:avLst/>
@@ -4288,7 +4318,7 @@
         <p:spPr>
           <a:xfrm>
             <a:off x="0" y="6437520"/>
-            <a:ext cx="12189600" cy="12960"/>
+            <a:ext cx="12189240" cy="12600"/>
           </a:xfrm>
           <a:prstGeom prst="rect">
             <a:avLst/>
@@ -4329,7 +4359,7 @@
         <p:spPr>
           <a:xfrm>
             <a:off x="768240" y="6473880"/>
-            <a:ext cx="8227440" cy="136800"/>
+            <a:ext cx="8227080" cy="136800"/>
           </a:xfrm>
           <a:prstGeom prst="rect">
             <a:avLst/>
@@ -4381,7 +4411,7 @@
         <p:spPr>
           <a:xfrm>
             <a:off x="10607040" y="6473880"/>
-            <a:ext cx="820800" cy="136800"/>
+            <a:ext cx="820440" cy="136800"/>
           </a:xfrm>
           <a:prstGeom prst="rect">
             <a:avLst/>
@@ -4433,7 +4463,7 @@
         <p:spPr>
           <a:xfrm>
             <a:off x="768240" y="1417320"/>
-            <a:ext cx="3381120" cy="1186560"/>
+            <a:ext cx="3380760" cy="1186200"/>
           </a:xfrm>
           <a:prstGeom prst="roundRect">
             <a:avLst>
@@ -4476,7 +4506,7 @@
         <p:spPr>
           <a:xfrm>
             <a:off x="768240" y="1417320"/>
-            <a:ext cx="3381120" cy="455040"/>
+            <a:ext cx="3380760" cy="454680"/>
           </a:xfrm>
           <a:prstGeom prst="roundRect">
             <a:avLst>
@@ -4519,7 +4549,7 @@
         <p:spPr>
           <a:xfrm>
             <a:off x="768240" y="1481400"/>
-            <a:ext cx="3381120" cy="212760"/>
+            <a:ext cx="3380760" cy="212760"/>
           </a:xfrm>
           <a:prstGeom prst="rect">
             <a:avLst/>
@@ -4571,7 +4601,7 @@
         <p:spPr>
           <a:xfrm>
             <a:off x="951120" y="2011680"/>
-            <a:ext cx="3015360" cy="197640"/>
+            <a:ext cx="3015000" cy="197640"/>
           </a:xfrm>
           <a:prstGeom prst="rect">
             <a:avLst/>
@@ -4623,7 +4653,7 @@
         <p:spPr>
           <a:xfrm>
             <a:off x="4380120" y="1417320"/>
-            <a:ext cx="3381120" cy="1186560"/>
+            <a:ext cx="3380760" cy="1186200"/>
           </a:xfrm>
           <a:prstGeom prst="roundRect">
             <a:avLst>
@@ -4666,7 +4696,7 @@
         <p:spPr>
           <a:xfrm>
             <a:off x="4380120" y="1417320"/>
-            <a:ext cx="3381120" cy="455040"/>
+            <a:ext cx="3380760" cy="454680"/>
           </a:xfrm>
           <a:prstGeom prst="roundRect">
             <a:avLst>
@@ -4709,7 +4739,7 @@
         <p:spPr>
           <a:xfrm>
             <a:off x="4380120" y="1481400"/>
-            <a:ext cx="3381120" cy="212760"/>
+            <a:ext cx="3380760" cy="212760"/>
           </a:xfrm>
           <a:prstGeom prst="rect">
             <a:avLst/>
@@ -4761,7 +4791,7 @@
         <p:spPr>
           <a:xfrm>
             <a:off x="4563000" y="2011680"/>
-            <a:ext cx="3015360" cy="197640"/>
+            <a:ext cx="3015000" cy="197640"/>
           </a:xfrm>
           <a:prstGeom prst="rect">
             <a:avLst/>
@@ -4813,7 +4843,7 @@
         <p:spPr>
           <a:xfrm>
             <a:off x="7992000" y="1417320"/>
-            <a:ext cx="3381120" cy="1186560"/>
+            <a:ext cx="3380760" cy="1186200"/>
           </a:xfrm>
           <a:prstGeom prst="roundRect">
             <a:avLst>
@@ -4856,7 +4886,7 @@
         <p:spPr>
           <a:xfrm>
             <a:off x="7992000" y="1417320"/>
-            <a:ext cx="3381120" cy="455040"/>
+            <a:ext cx="3380760" cy="454680"/>
           </a:xfrm>
           <a:prstGeom prst="roundRect">
             <a:avLst>
@@ -4899,7 +4929,7 @@
         <p:spPr>
           <a:xfrm>
             <a:off x="7992000" y="1481400"/>
-            <a:ext cx="3381120" cy="212760"/>
+            <a:ext cx="3380760" cy="212760"/>
           </a:xfrm>
           <a:prstGeom prst="rect">
             <a:avLst/>
@@ -4951,7 +4981,7 @@
         <p:spPr>
           <a:xfrm>
             <a:off x="8174880" y="2011680"/>
-            <a:ext cx="3015360" cy="197640"/>
+            <a:ext cx="3015000" cy="197640"/>
           </a:xfrm>
           <a:prstGeom prst="rect">
             <a:avLst/>
@@ -5003,7 +5033,7 @@
         <p:spPr>
           <a:xfrm>
             <a:off x="768240" y="3017520"/>
-            <a:ext cx="10604880" cy="212760"/>
+            <a:ext cx="10604520" cy="212760"/>
           </a:xfrm>
           <a:prstGeom prst="rect">
             <a:avLst/>
@@ -5055,7 +5085,7 @@
         <p:spPr>
           <a:xfrm>
             <a:off x="768240" y="3474720"/>
-            <a:ext cx="1204920" cy="637920"/>
+            <a:ext cx="1204560" cy="637560"/>
           </a:xfrm>
           <a:prstGeom prst="roundRect">
             <a:avLst>
@@ -5098,7 +5128,7 @@
         <p:spPr>
           <a:xfrm>
             <a:off x="804600" y="3721680"/>
-            <a:ext cx="1131840" cy="144000"/>
+            <a:ext cx="1131480" cy="144000"/>
           </a:xfrm>
           <a:prstGeom prst="rect">
             <a:avLst/>
@@ -5150,7 +5180,7 @@
         <p:spPr>
           <a:xfrm>
             <a:off x="1956960" y="3672360"/>
-            <a:ext cx="162360" cy="242640"/>
+            <a:ext cx="162000" cy="242640"/>
           </a:xfrm>
           <a:prstGeom prst="rect">
             <a:avLst/>
@@ -5202,7 +5232,7 @@
         <p:spPr>
           <a:xfrm>
             <a:off x="2103120" y="3474720"/>
-            <a:ext cx="1204920" cy="637920"/>
+            <a:ext cx="1204560" cy="637560"/>
           </a:xfrm>
           <a:prstGeom prst="roundRect">
             <a:avLst>
@@ -5245,7 +5275,7 @@
         <p:spPr>
           <a:xfrm>
             <a:off x="2139840" y="3721680"/>
-            <a:ext cx="1131840" cy="144000"/>
+            <a:ext cx="1131480" cy="144000"/>
           </a:xfrm>
           <a:prstGeom prst="rect">
             <a:avLst/>
@@ -5297,7 +5327,7 @@
         <p:spPr>
           <a:xfrm>
             <a:off x="3291840" y="3672360"/>
-            <a:ext cx="162360" cy="242640"/>
+            <a:ext cx="162000" cy="242640"/>
           </a:xfrm>
           <a:prstGeom prst="rect">
             <a:avLst/>
@@ -5349,7 +5379,7 @@
         <p:spPr>
           <a:xfrm>
             <a:off x="3438000" y="3474720"/>
-            <a:ext cx="1204920" cy="637920"/>
+            <a:ext cx="1204560" cy="637560"/>
           </a:xfrm>
           <a:prstGeom prst="roundRect">
             <a:avLst>
@@ -5392,7 +5422,7 @@
         <p:spPr>
           <a:xfrm>
             <a:off x="3474720" y="3721680"/>
-            <a:ext cx="1131840" cy="144000"/>
+            <a:ext cx="1131480" cy="144000"/>
           </a:xfrm>
           <a:prstGeom prst="rect">
             <a:avLst/>
@@ -5444,7 +5474,7 @@
         <p:spPr>
           <a:xfrm>
             <a:off x="4626720" y="3672360"/>
-            <a:ext cx="162360" cy="242640"/>
+            <a:ext cx="162000" cy="242640"/>
           </a:xfrm>
           <a:prstGeom prst="rect">
             <a:avLst/>
@@ -5496,7 +5526,7 @@
         <p:spPr>
           <a:xfrm>
             <a:off x="4773240" y="3474720"/>
-            <a:ext cx="1204920" cy="637920"/>
+            <a:ext cx="1204560" cy="637560"/>
           </a:xfrm>
           <a:prstGeom prst="roundRect">
             <a:avLst>
@@ -5539,7 +5569,7 @@
         <p:spPr>
           <a:xfrm>
             <a:off x="4809600" y="3649320"/>
-            <a:ext cx="1131840" cy="288720"/>
+            <a:ext cx="1131480" cy="288720"/>
           </a:xfrm>
           <a:prstGeom prst="rect">
             <a:avLst/>
@@ -5591,7 +5621,7 @@
         <p:spPr>
           <a:xfrm>
             <a:off x="5961960" y="3672360"/>
-            <a:ext cx="162360" cy="242640"/>
+            <a:ext cx="162000" cy="242640"/>
           </a:xfrm>
           <a:prstGeom prst="rect">
             <a:avLst/>
@@ -5643,7 +5673,7 @@
         <p:spPr>
           <a:xfrm>
             <a:off x="6108120" y="3474720"/>
-            <a:ext cx="1204920" cy="637920"/>
+            <a:ext cx="1204560" cy="637560"/>
           </a:xfrm>
           <a:prstGeom prst="roundRect">
             <a:avLst>
@@ -5686,7 +5716,7 @@
         <p:spPr>
           <a:xfrm>
             <a:off x="6144840" y="3721680"/>
-            <a:ext cx="1131840" cy="144000"/>
+            <a:ext cx="1131480" cy="144000"/>
           </a:xfrm>
           <a:prstGeom prst="rect">
             <a:avLst/>
@@ -5738,7 +5768,7 @@
         <p:spPr>
           <a:xfrm>
             <a:off x="7296840" y="3672360"/>
-            <a:ext cx="162360" cy="242640"/>
+            <a:ext cx="162000" cy="242640"/>
           </a:xfrm>
           <a:prstGeom prst="rect">
             <a:avLst/>
@@ -5790,7 +5820,7 @@
         <p:spPr>
           <a:xfrm>
             <a:off x="7443360" y="3474720"/>
-            <a:ext cx="1204920" cy="637920"/>
+            <a:ext cx="1204560" cy="637560"/>
           </a:xfrm>
           <a:prstGeom prst="roundRect">
             <a:avLst>
@@ -5833,7 +5863,7 @@
         <p:spPr>
           <a:xfrm>
             <a:off x="7479720" y="3721680"/>
-            <a:ext cx="1131840" cy="144000"/>
+            <a:ext cx="1131480" cy="144000"/>
           </a:xfrm>
           <a:prstGeom prst="rect">
             <a:avLst/>
@@ -5885,7 +5915,7 @@
         <p:spPr>
           <a:xfrm>
             <a:off x="8632080" y="3672360"/>
-            <a:ext cx="162360" cy="242640"/>
+            <a:ext cx="162000" cy="242640"/>
           </a:xfrm>
           <a:prstGeom prst="rect">
             <a:avLst/>
@@ -5937,7 +5967,7 @@
         <p:spPr>
           <a:xfrm>
             <a:off x="8778240" y="3474720"/>
-            <a:ext cx="1204920" cy="637920"/>
+            <a:ext cx="1204560" cy="637560"/>
           </a:xfrm>
           <a:prstGeom prst="roundRect">
             <a:avLst>
@@ -5980,7 +6010,7 @@
         <p:spPr>
           <a:xfrm>
             <a:off x="8814960" y="3721680"/>
-            <a:ext cx="1131840" cy="144000"/>
+            <a:ext cx="1131480" cy="144000"/>
           </a:xfrm>
           <a:prstGeom prst="rect">
             <a:avLst/>
@@ -6032,7 +6062,7 @@
         <p:spPr>
           <a:xfrm>
             <a:off x="9966960" y="3672360"/>
-            <a:ext cx="162360" cy="242640"/>
+            <a:ext cx="162000" cy="242640"/>
           </a:xfrm>
           <a:prstGeom prst="rect">
             <a:avLst/>
@@ -6084,7 +6114,7 @@
         <p:spPr>
           <a:xfrm>
             <a:off x="10113120" y="3474720"/>
-            <a:ext cx="1204920" cy="637920"/>
+            <a:ext cx="1204560" cy="637560"/>
           </a:xfrm>
           <a:prstGeom prst="roundRect">
             <a:avLst>
@@ -6127,7 +6157,7 @@
         <p:spPr>
           <a:xfrm>
             <a:off x="10149840" y="3721680"/>
-            <a:ext cx="1131840" cy="144000"/>
+            <a:ext cx="1131480" cy="144000"/>
           </a:xfrm>
           <a:prstGeom prst="rect">
             <a:avLst/>
@@ -6179,7 +6209,7 @@
         <p:spPr>
           <a:xfrm>
             <a:off x="768240" y="4389120"/>
-            <a:ext cx="10650600" cy="683640"/>
+            <a:ext cx="10650240" cy="683280"/>
           </a:xfrm>
           <a:prstGeom prst="roundRect">
             <a:avLst>
@@ -6222,7 +6252,7 @@
         <p:spPr>
           <a:xfrm>
             <a:off x="768240" y="4389120"/>
-            <a:ext cx="48600" cy="683640"/>
+            <a:ext cx="48240" cy="683280"/>
           </a:xfrm>
           <a:prstGeom prst="rect">
             <a:avLst/>
@@ -6263,7 +6293,7 @@
         <p:spPr>
           <a:xfrm>
             <a:off x="1024200" y="4542120"/>
-            <a:ext cx="10193400" cy="414720"/>
+            <a:ext cx="10193040" cy="414720"/>
           </a:xfrm>
           <a:prstGeom prst="rect">
             <a:avLst/>
@@ -6352,7 +6382,7 @@
         <p:spPr>
           <a:xfrm>
             <a:off x="683280" y="495000"/>
-            <a:ext cx="11109960" cy="964080"/>
+            <a:ext cx="11109600" cy="963720"/>
           </a:xfrm>
           <a:prstGeom prst="rect">
             <a:avLst/>
@@ -6378,7 +6408,7 @@
         <p:spPr>
           <a:xfrm>
             <a:off x="4010760" y="2105280"/>
-            <a:ext cx="8179200" cy="3029040"/>
+            <a:ext cx="8178840" cy="3028680"/>
           </a:xfrm>
           <a:prstGeom prst="rect">
             <a:avLst/>
@@ -6546,7 +6576,7 @@
         <p:spPr>
           <a:xfrm>
             <a:off x="223200" y="6287400"/>
-            <a:ext cx="540360" cy="362880"/>
+            <a:ext cx="540000" cy="362520"/>
           </a:xfrm>
           <a:prstGeom prst="rect">
             <a:avLst/>
@@ -6572,7 +6602,7 @@
         <p:spPr>
           <a:xfrm>
             <a:off x="765720" y="6287400"/>
-            <a:ext cx="4617720" cy="362880"/>
+            <a:ext cx="4617360" cy="362520"/>
           </a:xfrm>
           <a:prstGeom prst="rect">
             <a:avLst/>
@@ -6598,7 +6628,7 @@
         <p:spPr>
           <a:xfrm>
             <a:off x="3049200" y="3275280"/>
-            <a:ext cx="6091560" cy="363960"/>
+            <a:ext cx="6091200" cy="363960"/>
           </a:xfrm>
           <a:prstGeom prst="rect">
             <a:avLst/>
@@ -6654,7 +6684,7 @@
         <p:spPr>
           <a:xfrm>
             <a:off x="6506640" y="426240"/>
-            <a:ext cx="2634120" cy="1222560"/>
+            <a:ext cx="2633760" cy="1222200"/>
           </a:xfrm>
           <a:prstGeom prst="rect">
             <a:avLst/>
@@ -6678,7 +6708,7 @@
         <p:spPr>
           <a:xfrm>
             <a:off x="500040" y="495000"/>
-            <a:ext cx="2941200" cy="5837400"/>
+            <a:ext cx="2940840" cy="5837040"/>
           </a:xfrm>
           <a:prstGeom prst="rect">
             <a:avLst/>
@@ -6697,7 +6727,7 @@
         <p:spPr>
           <a:xfrm>
             <a:off x="0" y="6437520"/>
-            <a:ext cx="12189600" cy="12960"/>
+            <a:ext cx="12189240" cy="12600"/>
           </a:xfrm>
           <a:prstGeom prst="rect">
             <a:avLst/>
@@ -6879,7 +6909,7 @@
         <p:spPr>
           <a:xfrm>
             <a:off x="825480" y="419760"/>
-            <a:ext cx="5634720" cy="928440"/>
+            <a:ext cx="5634360" cy="928080"/>
           </a:xfrm>
           <a:prstGeom prst="rect">
             <a:avLst/>
@@ -6931,7 +6961,7 @@
         <p:spPr>
           <a:xfrm>
             <a:off x="825480" y="1455840"/>
-            <a:ext cx="5634720" cy="880560"/>
+            <a:ext cx="5634360" cy="880200"/>
           </a:xfrm>
           <a:prstGeom prst="rect">
             <a:avLst/>
@@ -7003,7 +7033,7 @@
         <p:spPr>
           <a:xfrm>
             <a:off x="825480" y="2445480"/>
-            <a:ext cx="5470560" cy="1692360"/>
+            <a:ext cx="5470200" cy="1692000"/>
           </a:xfrm>
           <a:prstGeom prst="roundRect">
             <a:avLst>
@@ -7043,7 +7073,7 @@
         <p:spPr>
           <a:xfrm>
             <a:off x="1074600" y="2777040"/>
-            <a:ext cx="5121360" cy="754560"/>
+            <a:ext cx="5121000" cy="754200"/>
           </a:xfrm>
           <a:prstGeom prst="rect">
             <a:avLst/>
@@ -7095,7 +7125,7 @@
         <p:spPr>
           <a:xfrm>
             <a:off x="1074600" y="3597480"/>
-            <a:ext cx="5121360" cy="450000"/>
+            <a:ext cx="5121000" cy="449640"/>
           </a:xfrm>
           <a:prstGeom prst="rect">
             <a:avLst/>
@@ -7147,7 +7177,7 @@
         <p:spPr>
           <a:xfrm>
             <a:off x="825480" y="4417920"/>
-            <a:ext cx="5470560" cy="1838520"/>
+            <a:ext cx="5470200" cy="1838160"/>
           </a:xfrm>
           <a:prstGeom prst="roundRect">
             <a:avLst>
@@ -7191,7 +7221,7 @@
         <p:spPr>
           <a:xfrm>
             <a:off x="1074600" y="4592880"/>
-            <a:ext cx="4972320" cy="258120"/>
+            <a:ext cx="4971960" cy="257760"/>
           </a:xfrm>
           <a:prstGeom prst="roundRect">
             <a:avLst>
@@ -7221,7 +7251,7 @@
         <p:spPr>
           <a:xfrm>
             <a:off x="1176120" y="4607640"/>
-            <a:ext cx="4918320" cy="243360"/>
+            <a:ext cx="4917960" cy="243000"/>
           </a:xfrm>
           <a:prstGeom prst="rect">
             <a:avLst/>
@@ -7273,7 +7303,7 @@
         <p:spPr>
           <a:xfrm>
             <a:off x="1074600" y="4846680"/>
-            <a:ext cx="5121360" cy="1192680"/>
+            <a:ext cx="5121000" cy="1192320"/>
           </a:xfrm>
           <a:prstGeom prst="rect">
             <a:avLst/>
@@ -7485,7 +7515,7 @@
         <p:spPr>
           <a:xfrm>
             <a:off x="6896160" y="784080"/>
-            <a:ext cx="4276080" cy="4830480"/>
+            <a:ext cx="4275720" cy="4830120"/>
           </a:xfrm>
           <a:prstGeom prst="roundRect">
             <a:avLst>
@@ -7529,7 +7559,7 @@
         <p:spPr>
           <a:xfrm>
             <a:off x="6904440" y="792000"/>
-            <a:ext cx="4260240" cy="4814640"/>
+            <a:ext cx="4259880" cy="4814280"/>
           </a:xfrm>
           <a:prstGeom prst="rect">
             <a:avLst/>
@@ -7548,7 +7578,7 @@
         <p:spPr>
           <a:xfrm>
             <a:off x="6634800" y="5730840"/>
-            <a:ext cx="4799520" cy="251640"/>
+            <a:ext cx="4799160" cy="251280"/>
           </a:xfrm>
           <a:prstGeom prst="rect">
             <a:avLst/>
@@ -7600,7 +7630,7 @@
         <p:spPr>
           <a:xfrm>
             <a:off x="0" y="6437520"/>
-            <a:ext cx="12189600" cy="12960"/>
+            <a:ext cx="12189240" cy="12600"/>
           </a:xfrm>
           <a:prstGeom prst="rect">
             <a:avLst/>
@@ -7745,7 +7775,7 @@
         <p:spPr>
           <a:xfrm>
             <a:off x="825480" y="1360080"/>
-            <a:ext cx="1369440" cy="42120"/>
+            <a:ext cx="1369080" cy="41760"/>
           </a:xfrm>
           <a:prstGeom prst="rect">
             <a:avLst/>
@@ -7823,7 +7853,7 @@
         <p:spPr>
           <a:xfrm>
             <a:off x="1020240" y="571680"/>
-            <a:ext cx="4068000" cy="5027400"/>
+            <a:ext cx="4067640" cy="5027040"/>
           </a:xfrm>
           <a:prstGeom prst="roundRect">
             <a:avLst>
@@ -7869,7 +7899,7 @@
         <p:spPr>
           <a:xfrm>
             <a:off x="1028160" y="579600"/>
-            <a:ext cx="4052160" cy="5011560"/>
+            <a:ext cx="4051800" cy="5011200"/>
           </a:xfrm>
           <a:prstGeom prst="rect">
             <a:avLst/>
@@ -7888,7 +7918,7 @@
         <p:spPr>
           <a:xfrm>
             <a:off x="758520" y="5715360"/>
-            <a:ext cx="4590720" cy="480240"/>
+            <a:ext cx="4590360" cy="479880"/>
           </a:xfrm>
           <a:prstGeom prst="rect">
             <a:avLst/>
@@ -7940,7 +7970,7 @@
         <p:spPr>
           <a:xfrm>
             <a:off x="5691240" y="1323360"/>
-            <a:ext cx="5843520" cy="928440"/>
+            <a:ext cx="5843160" cy="928080"/>
           </a:xfrm>
           <a:prstGeom prst="rect">
             <a:avLst/>
@@ -7992,7 +8022,7 @@
         <p:spPr>
           <a:xfrm>
             <a:off x="5691240" y="2418840"/>
-            <a:ext cx="5843520" cy="880560"/>
+            <a:ext cx="5843160" cy="880200"/>
           </a:xfrm>
           <a:prstGeom prst="rect">
             <a:avLst/>
@@ -8084,7 +8114,7 @@
         <p:spPr>
           <a:xfrm>
             <a:off x="5691240" y="3467880"/>
-            <a:ext cx="2746800" cy="1683000"/>
+            <a:ext cx="2746440" cy="1682640"/>
           </a:xfrm>
           <a:prstGeom prst="roundRect">
             <a:avLst>
@@ -8124,7 +8154,7 @@
         <p:spPr>
           <a:xfrm>
             <a:off x="5927400" y="3687120"/>
-            <a:ext cx="2341800" cy="754560"/>
+            <a:ext cx="2341440" cy="754200"/>
           </a:xfrm>
           <a:prstGeom prst="rect">
             <a:avLst/>
@@ -8176,7 +8206,7 @@
         <p:spPr>
           <a:xfrm>
             <a:off x="5791680" y="4507200"/>
-            <a:ext cx="2646000" cy="450000"/>
+            <a:ext cx="2645640" cy="449640"/>
           </a:xfrm>
           <a:prstGeom prst="rect">
             <a:avLst/>
@@ -8228,7 +8258,7 @@
         <p:spPr>
           <a:xfrm>
             <a:off x="8617680" y="3467880"/>
-            <a:ext cx="2746800" cy="1683000"/>
+            <a:ext cx="2746440" cy="1682640"/>
           </a:xfrm>
           <a:prstGeom prst="roundRect">
             <a:avLst>
@@ -8268,7 +8298,7 @@
         <p:spPr>
           <a:xfrm>
             <a:off x="8854200" y="3678840"/>
-            <a:ext cx="2341800" cy="754560"/>
+            <a:ext cx="2341440" cy="754200"/>
           </a:xfrm>
           <a:prstGeom prst="rect">
             <a:avLst/>
@@ -8320,7 +8350,7 @@
         <p:spPr>
           <a:xfrm>
             <a:off x="8854200" y="4499280"/>
-            <a:ext cx="2341800" cy="465840"/>
+            <a:ext cx="2341440" cy="465480"/>
           </a:xfrm>
           <a:prstGeom prst="rect">
             <a:avLst/>
@@ -8412,7 +8442,7 @@
         <p:spPr>
           <a:xfrm>
             <a:off x="5691240" y="5346720"/>
-            <a:ext cx="5843520" cy="534960"/>
+            <a:ext cx="5843160" cy="534600"/>
           </a:xfrm>
           <a:prstGeom prst="rect">
             <a:avLst/>
@@ -8484,7 +8514,7 @@
         <p:spPr>
           <a:xfrm>
             <a:off x="0" y="6437520"/>
-            <a:ext cx="12189600" cy="12960"/>
+            <a:ext cx="12189240" cy="12600"/>
           </a:xfrm>
           <a:prstGeom prst="rect">
             <a:avLst/>
@@ -8629,7 +8659,7 @@
         <p:spPr>
           <a:xfrm>
             <a:off x="5691240" y="2299320"/>
-            <a:ext cx="1369440" cy="42120"/>
+            <a:ext cx="1369080" cy="41760"/>
           </a:xfrm>
           <a:prstGeom prst="rect">
             <a:avLst/>
@@ -8707,7 +8737,7 @@
         <p:spPr>
           <a:xfrm>
             <a:off x="825480" y="852480"/>
-            <a:ext cx="10855080" cy="475920"/>
+            <a:ext cx="10854720" cy="475560"/>
           </a:xfrm>
           <a:prstGeom prst="rect">
             <a:avLst/>
@@ -8769,7 +8799,7 @@
         <p:spPr>
           <a:xfrm>
             <a:off x="825480" y="1548360"/>
-            <a:ext cx="9154440" cy="594720"/>
+            <a:ext cx="9154080" cy="594360"/>
           </a:xfrm>
           <a:prstGeom prst="rect">
             <a:avLst/>
@@ -8821,7 +8851,7 @@
         <p:spPr>
           <a:xfrm>
             <a:off x="825480" y="2435040"/>
-            <a:ext cx="4717080" cy="3887640"/>
+            <a:ext cx="4716720" cy="3887280"/>
           </a:xfrm>
           <a:prstGeom prst="roundRect">
             <a:avLst>
@@ -8861,7 +8891,7 @@
         <p:spPr>
           <a:xfrm>
             <a:off x="1138320" y="3220920"/>
-            <a:ext cx="4091760" cy="258120"/>
+            <a:ext cx="4091400" cy="257760"/>
           </a:xfrm>
           <a:prstGeom prst="roundRect">
             <a:avLst>
@@ -8891,7 +8921,7 @@
         <p:spPr>
           <a:xfrm>
             <a:off x="1239840" y="3271680"/>
-            <a:ext cx="4011120" cy="181800"/>
+            <a:ext cx="4010760" cy="181440"/>
           </a:xfrm>
           <a:prstGeom prst="rect">
             <a:avLst/>
@@ -8943,7 +8973,7 @@
         <p:spPr>
           <a:xfrm>
             <a:off x="1138320" y="3620880"/>
-            <a:ext cx="211320" cy="286200"/>
+            <a:ext cx="210960" cy="285840"/>
           </a:xfrm>
           <a:prstGeom prst="rect">
             <a:avLst/>
@@ -8961,7 +8991,7 @@
         </p:style>
         <p:txBody>
           <a:bodyPr lIns="16920" rIns="16920" tIns="16920" bIns="16920" anchor="t">
-            <a:normAutofit fontScale="80000"/>
+            <a:normAutofit fontScale="79000"/>
           </a:bodyPr>
           <a:p>
             <a:pPr>
@@ -8995,7 +9025,7 @@
         <p:spPr>
           <a:xfrm>
             <a:off x="1415160" y="3624120"/>
-            <a:ext cx="1160640" cy="279000"/>
+            <a:ext cx="1160280" cy="278640"/>
           </a:xfrm>
           <a:prstGeom prst="rect">
             <a:avLst/>
@@ -9047,7 +9077,7 @@
         <p:spPr>
           <a:xfrm>
             <a:off x="1886040" y="3972240"/>
-            <a:ext cx="390600" cy="252000"/>
+            <a:ext cx="390240" cy="251640"/>
           </a:xfrm>
           <a:prstGeom prst="rect">
             <a:avLst/>
@@ -9065,7 +9095,7 @@
         </p:style>
         <p:txBody>
           <a:bodyPr lIns="16920" rIns="16920" tIns="16920" bIns="16920" anchor="t">
-            <a:normAutofit fontScale="80000"/>
+            <a:normAutofit fontScale="79000"/>
           </a:bodyPr>
           <a:p>
             <a:pPr>
@@ -9099,7 +9129,7 @@
         <p:spPr>
           <a:xfrm>
             <a:off x="1138320" y="4289760"/>
-            <a:ext cx="211320" cy="286200"/>
+            <a:ext cx="210960" cy="285840"/>
           </a:xfrm>
           <a:prstGeom prst="rect">
             <a:avLst/>
@@ -9117,7 +9147,7 @@
         </p:style>
         <p:txBody>
           <a:bodyPr lIns="16920" rIns="16920" tIns="16920" bIns="16920" anchor="t">
-            <a:normAutofit fontScale="80000"/>
+            <a:normAutofit fontScale="79000"/>
           </a:bodyPr>
           <a:p>
             <a:pPr>
@@ -9151,7 +9181,7 @@
         <p:spPr>
           <a:xfrm>
             <a:off x="1415160" y="4293360"/>
-            <a:ext cx="1599840" cy="279000"/>
+            <a:ext cx="1599480" cy="278640"/>
           </a:xfrm>
           <a:prstGeom prst="rect">
             <a:avLst/>
@@ -9203,7 +9233,7 @@
         <p:spPr>
           <a:xfrm>
             <a:off x="1886040" y="4641480"/>
-            <a:ext cx="390600" cy="252000"/>
+            <a:ext cx="390240" cy="251640"/>
           </a:xfrm>
           <a:prstGeom prst="rect">
             <a:avLst/>
@@ -9221,7 +9251,7 @@
         </p:style>
         <p:txBody>
           <a:bodyPr lIns="16920" rIns="16920" tIns="16920" bIns="16920" anchor="t">
-            <a:normAutofit fontScale="80000"/>
+            <a:normAutofit fontScale="79000"/>
           </a:bodyPr>
           <a:p>
             <a:pPr>
@@ -9255,7 +9285,7 @@
         <p:spPr>
           <a:xfrm>
             <a:off x="1138320" y="4958640"/>
-            <a:ext cx="211320" cy="286200"/>
+            <a:ext cx="210960" cy="285840"/>
           </a:xfrm>
           <a:prstGeom prst="rect">
             <a:avLst/>
@@ -9273,7 +9303,7 @@
         </p:style>
         <p:txBody>
           <a:bodyPr lIns="16920" rIns="16920" tIns="16920" bIns="16920" anchor="t">
-            <a:normAutofit fontScale="80000"/>
+            <a:normAutofit fontScale="79000"/>
           </a:bodyPr>
           <a:p>
             <a:pPr>
@@ -9307,7 +9337,7 @@
         <p:spPr>
           <a:xfrm>
             <a:off x="1415160" y="4962240"/>
-            <a:ext cx="1333080" cy="279000"/>
+            <a:ext cx="1332720" cy="278640"/>
           </a:xfrm>
           <a:prstGeom prst="rect">
             <a:avLst/>
@@ -9359,7 +9389,7 @@
         <p:spPr>
           <a:xfrm>
             <a:off x="1290600" y="5310360"/>
-            <a:ext cx="4061880" cy="251640"/>
+            <a:ext cx="4061520" cy="251280"/>
           </a:xfrm>
           <a:prstGeom prst="rect">
             <a:avLst/>
@@ -9421,7 +9451,7 @@
         <p:spPr>
           <a:xfrm>
             <a:off x="5849280" y="2435040"/>
-            <a:ext cx="2680200" cy="1655280"/>
+            <a:ext cx="2679840" cy="1654920"/>
           </a:xfrm>
           <a:prstGeom prst="roundRect">
             <a:avLst>
@@ -9461,7 +9491,7 @@
         <p:spPr>
           <a:xfrm>
             <a:off x="6073200" y="2777400"/>
-            <a:ext cx="2299680" cy="480240"/>
+            <a:ext cx="2299320" cy="479880"/>
           </a:xfrm>
           <a:prstGeom prst="rect">
             <a:avLst/>
@@ -9513,7 +9543,7 @@
         <p:spPr>
           <a:xfrm>
             <a:off x="6073200" y="3323520"/>
-            <a:ext cx="2299680" cy="450000"/>
+            <a:ext cx="2299320" cy="449640"/>
           </a:xfrm>
           <a:prstGeom prst="rect">
             <a:avLst/>
@@ -9565,7 +9595,7 @@
         <p:spPr>
           <a:xfrm>
             <a:off x="8683920" y="2435040"/>
-            <a:ext cx="2680200" cy="1655280"/>
+            <a:ext cx="2679840" cy="1654920"/>
           </a:xfrm>
           <a:prstGeom prst="roundRect">
             <a:avLst>
@@ -9605,7 +9635,7 @@
         <p:spPr>
           <a:xfrm>
             <a:off x="8907840" y="2777400"/>
-            <a:ext cx="2300040" cy="480240"/>
+            <a:ext cx="2299680" cy="479880"/>
           </a:xfrm>
           <a:prstGeom prst="rect">
             <a:avLst/>
@@ -9657,7 +9687,7 @@
         <p:spPr>
           <a:xfrm>
             <a:off x="8907840" y="3323520"/>
-            <a:ext cx="2300040" cy="450000"/>
+            <a:ext cx="2299680" cy="449640"/>
           </a:xfrm>
           <a:prstGeom prst="rect">
             <a:avLst/>
@@ -9709,7 +9739,7 @@
         <p:spPr>
           <a:xfrm>
             <a:off x="5849280" y="4245120"/>
-            <a:ext cx="5515200" cy="2077560"/>
+            <a:ext cx="5514840" cy="2077200"/>
           </a:xfrm>
           <a:prstGeom prst="roundRect">
             <a:avLst>
@@ -9749,7 +9779,7 @@
         <p:spPr>
           <a:xfrm>
             <a:off x="6085800" y="4581360"/>
-            <a:ext cx="1509120" cy="480240"/>
+            <a:ext cx="1508760" cy="479880"/>
           </a:xfrm>
           <a:prstGeom prst="rect">
             <a:avLst/>
@@ -9801,7 +9831,7 @@
         <p:spPr>
           <a:xfrm>
             <a:off x="7673400" y="4755960"/>
-            <a:ext cx="668520" cy="274680"/>
+            <a:ext cx="668160" cy="274320"/>
           </a:xfrm>
           <a:prstGeom prst="rect">
             <a:avLst/>
@@ -9853,7 +9883,7 @@
         <p:spPr>
           <a:xfrm>
             <a:off x="6085800" y="5127120"/>
-            <a:ext cx="5193360" cy="884520"/>
+            <a:ext cx="5193000" cy="884160"/>
           </a:xfrm>
           <a:prstGeom prst="rect">
             <a:avLst/>
@@ -9945,7 +9975,7 @@
         <p:spPr>
           <a:xfrm>
             <a:off x="0" y="6437520"/>
-            <a:ext cx="12189600" cy="12960"/>
+            <a:ext cx="12189240" cy="12600"/>
           </a:xfrm>
           <a:prstGeom prst="rect">
             <a:avLst/>
@@ -10090,7 +10120,7 @@
         <p:spPr>
           <a:xfrm>
             <a:off x="825480" y="1375920"/>
-            <a:ext cx="1369440" cy="42120"/>
+            <a:ext cx="1369080" cy="41760"/>
           </a:xfrm>
           <a:prstGeom prst="rect">
             <a:avLst/>
@@ -10168,7 +10198,7 @@
         <p:spPr>
           <a:xfrm>
             <a:off x="768240" y="1554480"/>
-            <a:ext cx="1826640" cy="48600"/>
+            <a:ext cx="1826280" cy="48240"/>
           </a:xfrm>
           <a:prstGeom prst="rect">
             <a:avLst/>
@@ -10209,7 +10239,7 @@
         <p:spPr>
           <a:xfrm>
             <a:off x="768240" y="1737360"/>
-            <a:ext cx="10422000" cy="578880"/>
+            <a:ext cx="10421640" cy="578880"/>
           </a:xfrm>
           <a:prstGeom prst="rect">
             <a:avLst/>
@@ -10261,7 +10291,7 @@
         <p:spPr>
           <a:xfrm>
             <a:off x="768240" y="2697480"/>
-            <a:ext cx="10056240" cy="273960"/>
+            <a:ext cx="10055880" cy="273960"/>
           </a:xfrm>
           <a:prstGeom prst="rect">
             <a:avLst/>
@@ -10313,7 +10343,7 @@
         <p:spPr>
           <a:xfrm>
             <a:off x="768240" y="3566160"/>
-            <a:ext cx="6398640" cy="1003680"/>
+            <a:ext cx="6398280" cy="1003320"/>
           </a:xfrm>
           <a:prstGeom prst="roundRect">
             <a:avLst>
@@ -10356,7 +10386,7 @@
         <p:spPr>
           <a:xfrm>
             <a:off x="768240" y="3703320"/>
-            <a:ext cx="6398640" cy="197640"/>
+            <a:ext cx="6398280" cy="197640"/>
           </a:xfrm>
           <a:prstGeom prst="rect">
             <a:avLst/>
@@ -10408,7 +10438,7 @@
         <p:spPr>
           <a:xfrm>
             <a:off x="768240" y="4041720"/>
-            <a:ext cx="6398640" cy="365400"/>
+            <a:ext cx="6398280" cy="365400"/>
           </a:xfrm>
           <a:prstGeom prst="rect">
             <a:avLst/>
@@ -10460,7 +10490,7 @@
         <p:spPr>
           <a:xfrm>
             <a:off x="768240" y="5120640"/>
-            <a:ext cx="2558160" cy="227880"/>
+            <a:ext cx="2557800" cy="227880"/>
           </a:xfrm>
           <a:prstGeom prst="rect">
             <a:avLst/>
@@ -10512,7 +10542,7 @@
         <p:spPr>
           <a:xfrm>
             <a:off x="768240" y="5486400"/>
-            <a:ext cx="2558160" cy="197640"/>
+            <a:ext cx="2557800" cy="197640"/>
           </a:xfrm>
           <a:prstGeom prst="rect">
             <a:avLst/>
@@ -10564,7 +10594,7 @@
         <p:spPr>
           <a:xfrm>
             <a:off x="3465720" y="5120640"/>
-            <a:ext cx="2558160" cy="227880"/>
+            <a:ext cx="2557800" cy="227880"/>
           </a:xfrm>
           <a:prstGeom prst="rect">
             <a:avLst/>
@@ -10616,7 +10646,7 @@
         <p:spPr>
           <a:xfrm>
             <a:off x="3465720" y="5486400"/>
-            <a:ext cx="2558160" cy="395640"/>
+            <a:ext cx="2557800" cy="395640"/>
           </a:xfrm>
           <a:prstGeom prst="rect">
             <a:avLst/>
@@ -10668,7 +10698,7 @@
         <p:spPr>
           <a:xfrm>
             <a:off x="6163200" y="5120640"/>
-            <a:ext cx="2558160" cy="227880"/>
+            <a:ext cx="2557800" cy="227880"/>
           </a:xfrm>
           <a:prstGeom prst="rect">
             <a:avLst/>
@@ -10720,7 +10750,7 @@
         <p:spPr>
           <a:xfrm>
             <a:off x="6163200" y="5486400"/>
-            <a:ext cx="2558160" cy="197640"/>
+            <a:ext cx="2557800" cy="197640"/>
           </a:xfrm>
           <a:prstGeom prst="rect">
             <a:avLst/>
@@ -10772,7 +10802,7 @@
         <p:spPr>
           <a:xfrm>
             <a:off x="8860680" y="5120640"/>
-            <a:ext cx="2558160" cy="227880"/>
+            <a:ext cx="2557800" cy="227880"/>
           </a:xfrm>
           <a:prstGeom prst="rect">
             <a:avLst/>
@@ -10824,7 +10854,7 @@
         <p:spPr>
           <a:xfrm>
             <a:off x="8860680" y="5486400"/>
-            <a:ext cx="2558160" cy="197640"/>
+            <a:ext cx="2557800" cy="197640"/>
           </a:xfrm>
           <a:prstGeom prst="rect">
             <a:avLst/>
@@ -10913,7 +10943,7 @@
         <p:spPr>
           <a:xfrm>
             <a:off x="768240" y="2240280"/>
-            <a:ext cx="1826640" cy="974880"/>
+            <a:ext cx="1826280" cy="974880"/>
           </a:xfrm>
           <a:prstGeom prst="rect">
             <a:avLst/>
@@ -10965,7 +10995,7 @@
         <p:spPr>
           <a:xfrm>
             <a:off x="768240" y="3246120"/>
-            <a:ext cx="1826640" cy="48600"/>
+            <a:ext cx="1826280" cy="48240"/>
           </a:xfrm>
           <a:prstGeom prst="rect">
             <a:avLst/>
@@ -11006,7 +11036,7 @@
         <p:spPr>
           <a:xfrm>
             <a:off x="768240" y="3429000"/>
-            <a:ext cx="10422000" cy="639360"/>
+            <a:ext cx="10421640" cy="639360"/>
           </a:xfrm>
           <a:prstGeom prst="rect">
             <a:avLst/>
@@ -11058,7 +11088,7 @@
         <p:spPr>
           <a:xfrm>
             <a:off x="768240" y="4754880"/>
-            <a:ext cx="7313040" cy="243000"/>
+            <a:ext cx="7312680" cy="243000"/>
           </a:xfrm>
           <a:prstGeom prst="rect">
             <a:avLst/>
@@ -11147,7 +11177,7 @@
         <p:spPr>
           <a:xfrm>
             <a:off x="768240" y="420480"/>
-            <a:ext cx="10604880" cy="441360"/>
+            <a:ext cx="10604520" cy="441360"/>
           </a:xfrm>
           <a:prstGeom prst="rect">
             <a:avLst/>
@@ -11199,7 +11229,7 @@
         <p:spPr>
           <a:xfrm>
             <a:off x="768240" y="1170360"/>
-            <a:ext cx="1369440" cy="42120"/>
+            <a:ext cx="1369080" cy="41760"/>
           </a:xfrm>
           <a:prstGeom prst="rect">
             <a:avLst/>
@@ -11240,7 +11270,7 @@
         <p:spPr>
           <a:xfrm>
             <a:off x="0" y="6437520"/>
-            <a:ext cx="12189600" cy="12960"/>
+            <a:ext cx="12189240" cy="12600"/>
           </a:xfrm>
           <a:prstGeom prst="rect">
             <a:avLst/>
@@ -11281,7 +11311,7 @@
         <p:spPr>
           <a:xfrm>
             <a:off x="768240" y="6473880"/>
-            <a:ext cx="8227440" cy="136800"/>
+            <a:ext cx="8227080" cy="136800"/>
           </a:xfrm>
           <a:prstGeom prst="rect">
             <a:avLst/>
@@ -11333,7 +11363,7 @@
         <p:spPr>
           <a:xfrm>
             <a:off x="10607040" y="6473880"/>
-            <a:ext cx="820800" cy="136800"/>
+            <a:ext cx="820440" cy="136800"/>
           </a:xfrm>
           <a:prstGeom prst="rect">
             <a:avLst/>
@@ -12669,7 +12699,7 @@
         <p:spPr>
           <a:xfrm>
             <a:off x="768240" y="4480560"/>
-            <a:ext cx="10650600" cy="683640"/>
+            <a:ext cx="10650240" cy="683280"/>
           </a:xfrm>
           <a:prstGeom prst="roundRect">
             <a:avLst>
@@ -12712,7 +12742,7 @@
         <p:spPr>
           <a:xfrm>
             <a:off x="768240" y="4480560"/>
-            <a:ext cx="48600" cy="683640"/>
+            <a:ext cx="48240" cy="683280"/>
           </a:xfrm>
           <a:prstGeom prst="rect">
             <a:avLst/>
@@ -12753,7 +12783,7 @@
         <p:spPr>
           <a:xfrm>
             <a:off x="1024200" y="4633560"/>
-            <a:ext cx="10193400" cy="414720"/>
+            <a:ext cx="10193040" cy="414720"/>
           </a:xfrm>
           <a:prstGeom prst="rect">
             <a:avLst/>
@@ -12842,7 +12872,7 @@
         <p:spPr>
           <a:xfrm>
             <a:off x="768240" y="420480"/>
-            <a:ext cx="10604880" cy="441360"/>
+            <a:ext cx="10604520" cy="441360"/>
           </a:xfrm>
           <a:prstGeom prst="rect">
             <a:avLst/>
@@ -12894,7 +12924,7 @@
         <p:spPr>
           <a:xfrm>
             <a:off x="768240" y="1170360"/>
-            <a:ext cx="1369440" cy="42120"/>
+            <a:ext cx="1369080" cy="41760"/>
           </a:xfrm>
           <a:prstGeom prst="rect">
             <a:avLst/>
@@ -12935,7 +12965,7 @@
         <p:spPr>
           <a:xfrm>
             <a:off x="768240" y="1298520"/>
-            <a:ext cx="10604880" cy="227880"/>
+            <a:ext cx="10604520" cy="227880"/>
           </a:xfrm>
           <a:prstGeom prst="rect">
             <a:avLst/>
@@ -12987,7 +13017,7 @@
         <p:spPr>
           <a:xfrm>
             <a:off x="0" y="6437520"/>
-            <a:ext cx="12189600" cy="12960"/>
+            <a:ext cx="12189240" cy="12600"/>
           </a:xfrm>
           <a:prstGeom prst="rect">
             <a:avLst/>
@@ -13028,7 +13058,7 @@
         <p:spPr>
           <a:xfrm>
             <a:off x="768240" y="6473880"/>
-            <a:ext cx="8227440" cy="136800"/>
+            <a:ext cx="8227080" cy="136800"/>
           </a:xfrm>
           <a:prstGeom prst="rect">
             <a:avLst/>
@@ -13080,7 +13110,7 @@
         <p:spPr>
           <a:xfrm>
             <a:off x="10607040" y="6473880"/>
-            <a:ext cx="820800" cy="136800"/>
+            <a:ext cx="820440" cy="136800"/>
           </a:xfrm>
           <a:prstGeom prst="rect">
             <a:avLst/>
@@ -13132,7 +13162,7 @@
         <p:spPr>
           <a:xfrm>
             <a:off x="768240" y="1828800"/>
-            <a:ext cx="10650600" cy="601200"/>
+            <a:ext cx="10650240" cy="600840"/>
           </a:xfrm>
           <a:prstGeom prst="roundRect">
             <a:avLst>
@@ -13175,7 +13205,7 @@
         <p:spPr>
           <a:xfrm>
             <a:off x="768240" y="1828800"/>
-            <a:ext cx="1552320" cy="601200"/>
+            <a:ext cx="1551960" cy="600840"/>
           </a:xfrm>
           <a:prstGeom prst="roundRect">
             <a:avLst>
@@ -13218,7 +13248,7 @@
         <p:spPr>
           <a:xfrm>
             <a:off x="768240" y="1938600"/>
-            <a:ext cx="1552320" cy="227880"/>
+            <a:ext cx="1551960" cy="227880"/>
           </a:xfrm>
           <a:prstGeom prst="rect">
             <a:avLst/>
@@ -13270,7 +13300,7 @@
         <p:spPr>
           <a:xfrm>
             <a:off x="2551320" y="2027160"/>
-            <a:ext cx="8593200" cy="204840"/>
+            <a:ext cx="8592840" cy="204840"/>
           </a:xfrm>
           <a:prstGeom prst="rect">
             <a:avLst/>
@@ -13322,7 +13352,7 @@
         <p:spPr>
           <a:xfrm>
             <a:off x="768240" y="2541960"/>
-            <a:ext cx="10650600" cy="601200"/>
+            <a:ext cx="10650240" cy="600840"/>
           </a:xfrm>
           <a:prstGeom prst="roundRect">
             <a:avLst>
@@ -13365,7 +13395,7 @@
         <p:spPr>
           <a:xfrm>
             <a:off x="768240" y="2541960"/>
-            <a:ext cx="1552320" cy="601200"/>
+            <a:ext cx="1551960" cy="600840"/>
           </a:xfrm>
           <a:prstGeom prst="roundRect">
             <a:avLst>
@@ -13408,7 +13438,7 @@
         <p:spPr>
           <a:xfrm>
             <a:off x="768240" y="2651760"/>
-            <a:ext cx="1552320" cy="227880"/>
+            <a:ext cx="1551960" cy="227880"/>
           </a:xfrm>
           <a:prstGeom prst="rect">
             <a:avLst/>
@@ -13460,7 +13490,7 @@
         <p:spPr>
           <a:xfrm>
             <a:off x="2551320" y="2740320"/>
-            <a:ext cx="8593200" cy="204840"/>
+            <a:ext cx="8592840" cy="204840"/>
           </a:xfrm>
           <a:prstGeom prst="rect">
             <a:avLst/>
@@ -13512,7 +13542,7 @@
         <p:spPr>
           <a:xfrm>
             <a:off x="768240" y="3255120"/>
-            <a:ext cx="10650600" cy="601200"/>
+            <a:ext cx="10650240" cy="600840"/>
           </a:xfrm>
           <a:prstGeom prst="roundRect">
             <a:avLst>
@@ -13555,7 +13585,7 @@
         <p:spPr>
           <a:xfrm>
             <a:off x="768240" y="3255120"/>
-            <a:ext cx="1552320" cy="601200"/>
+            <a:ext cx="1551960" cy="600840"/>
           </a:xfrm>
           <a:prstGeom prst="roundRect">
             <a:avLst>
@@ -13598,7 +13628,7 @@
         <p:spPr>
           <a:xfrm>
             <a:off x="768240" y="3364920"/>
-            <a:ext cx="1552320" cy="227880"/>
+            <a:ext cx="1551960" cy="227880"/>
           </a:xfrm>
           <a:prstGeom prst="rect">
             <a:avLst/>
@@ -13650,7 +13680,7 @@
         <p:spPr>
           <a:xfrm>
             <a:off x="2551320" y="3453480"/>
-            <a:ext cx="8593200" cy="204840"/>
+            <a:ext cx="8592840" cy="204840"/>
           </a:xfrm>
           <a:prstGeom prst="rect">
             <a:avLst/>
@@ -15077,7 +15107,7 @@
         <p:spPr>
           <a:xfrm>
             <a:off x="768240" y="420480"/>
-            <a:ext cx="10604880" cy="441360"/>
+            <a:ext cx="10604520" cy="441360"/>
           </a:xfrm>
           <a:prstGeom prst="rect">
             <a:avLst/>
@@ -15129,7 +15159,7 @@
         <p:spPr>
           <a:xfrm>
             <a:off x="768240" y="1170360"/>
-            <a:ext cx="1369440" cy="42120"/>
+            <a:ext cx="1369080" cy="41760"/>
           </a:xfrm>
           <a:prstGeom prst="rect">
             <a:avLst/>
@@ -15170,7 +15200,7 @@
         <p:spPr>
           <a:xfrm>
             <a:off x="0" y="6437520"/>
-            <a:ext cx="12189600" cy="12960"/>
+            <a:ext cx="12189240" cy="12600"/>
           </a:xfrm>
           <a:prstGeom prst="rect">
             <a:avLst/>
@@ -15211,7 +15241,7 @@
         <p:spPr>
           <a:xfrm>
             <a:off x="768240" y="6473880"/>
-            <a:ext cx="8227440" cy="136800"/>
+            <a:ext cx="8227080" cy="136800"/>
           </a:xfrm>
           <a:prstGeom prst="rect">
             <a:avLst/>
@@ -15263,7 +15293,7 @@
         <p:spPr>
           <a:xfrm>
             <a:off x="10607040" y="6473880"/>
-            <a:ext cx="820800" cy="136800"/>
+            <a:ext cx="820440" cy="136800"/>
           </a:xfrm>
           <a:prstGeom prst="rect">
             <a:avLst/>
@@ -15315,7 +15345,7 @@
         <p:spPr>
           <a:xfrm>
             <a:off x="768240" y="1417320"/>
-            <a:ext cx="10604880" cy="784080"/>
+            <a:ext cx="10604520" cy="783720"/>
           </a:xfrm>
           <a:prstGeom prst="roundRect">
             <a:avLst>
@@ -15358,7 +15388,7 @@
         <p:spPr>
           <a:xfrm>
             <a:off x="951120" y="1581840"/>
-            <a:ext cx="455040" cy="455040"/>
+            <a:ext cx="454680" cy="454680"/>
           </a:xfrm>
           <a:prstGeom prst="ellipse">
             <a:avLst/>
@@ -15399,7 +15429,7 @@
         <p:spPr>
           <a:xfrm>
             <a:off x="951120" y="1668240"/>
-            <a:ext cx="455040" cy="273600"/>
+            <a:ext cx="454680" cy="273600"/>
           </a:xfrm>
           <a:prstGeom prst="rect">
             <a:avLst/>
@@ -15451,7 +15481,7 @@
         <p:spPr>
           <a:xfrm>
             <a:off x="1636920" y="1508760"/>
-            <a:ext cx="6398640" cy="243000"/>
+            <a:ext cx="6398280" cy="243000"/>
           </a:xfrm>
           <a:prstGeom prst="rect">
             <a:avLst/>
@@ -15503,7 +15533,7 @@
         <p:spPr>
           <a:xfrm>
             <a:off x="1636920" y="1837800"/>
-            <a:ext cx="7770240" cy="182160"/>
+            <a:ext cx="7769880" cy="182160"/>
           </a:xfrm>
           <a:prstGeom prst="rect">
             <a:avLst/>
@@ -15555,7 +15585,7 @@
         <p:spPr>
           <a:xfrm>
             <a:off x="9546480" y="1703160"/>
-            <a:ext cx="1735200" cy="212400"/>
+            <a:ext cx="1734840" cy="212400"/>
           </a:xfrm>
           <a:prstGeom prst="rect">
             <a:avLst/>
@@ -15607,7 +15637,7 @@
         <p:spPr>
           <a:xfrm>
             <a:off x="768240" y="2350080"/>
-            <a:ext cx="10604880" cy="784080"/>
+            <a:ext cx="10604520" cy="783720"/>
           </a:xfrm>
           <a:prstGeom prst="roundRect">
             <a:avLst>
@@ -15650,7 +15680,7 @@
         <p:spPr>
           <a:xfrm>
             <a:off x="951120" y="2514600"/>
-            <a:ext cx="455040" cy="455040"/>
+            <a:ext cx="454680" cy="454680"/>
           </a:xfrm>
           <a:prstGeom prst="ellipse">
             <a:avLst/>
@@ -15691,7 +15721,7 @@
         <p:spPr>
           <a:xfrm>
             <a:off x="951120" y="2601000"/>
-            <a:ext cx="455040" cy="273600"/>
+            <a:ext cx="454680" cy="273600"/>
           </a:xfrm>
           <a:prstGeom prst="rect">
             <a:avLst/>
@@ -15743,7 +15773,7 @@
         <p:spPr>
           <a:xfrm>
             <a:off x="1636920" y="2441520"/>
-            <a:ext cx="6398640" cy="243000"/>
+            <a:ext cx="6398280" cy="243000"/>
           </a:xfrm>
           <a:prstGeom prst="rect">
             <a:avLst/>
@@ -15795,7 +15825,7 @@
         <p:spPr>
           <a:xfrm>
             <a:off x="1636920" y="2770560"/>
-            <a:ext cx="7770240" cy="182160"/>
+            <a:ext cx="7769880" cy="182160"/>
           </a:xfrm>
           <a:prstGeom prst="rect">
             <a:avLst/>
@@ -15847,7 +15877,7 @@
         <p:spPr>
           <a:xfrm>
             <a:off x="9546480" y="2635920"/>
-            <a:ext cx="1735200" cy="212400"/>
+            <a:ext cx="1734840" cy="212400"/>
           </a:xfrm>
           <a:prstGeom prst="rect">
             <a:avLst/>
@@ -15899,7 +15929,7 @@
         <p:spPr>
           <a:xfrm>
             <a:off x="768240" y="3282840"/>
-            <a:ext cx="10604880" cy="784080"/>
+            <a:ext cx="10604520" cy="783720"/>
           </a:xfrm>
           <a:prstGeom prst="roundRect">
             <a:avLst>
@@ -15942,7 +15972,7 @@
         <p:spPr>
           <a:xfrm>
             <a:off x="951120" y="3447360"/>
-            <a:ext cx="455040" cy="455040"/>
+            <a:ext cx="454680" cy="454680"/>
           </a:xfrm>
           <a:prstGeom prst="ellipse">
             <a:avLst/>
@@ -15983,7 +16013,7 @@
         <p:spPr>
           <a:xfrm>
             <a:off x="951120" y="3533760"/>
-            <a:ext cx="455040" cy="273600"/>
+            <a:ext cx="454680" cy="273600"/>
           </a:xfrm>
           <a:prstGeom prst="rect">
             <a:avLst/>
@@ -16035,7 +16065,7 @@
         <p:spPr>
           <a:xfrm>
             <a:off x="1636920" y="3374280"/>
-            <a:ext cx="6398640" cy="243000"/>
+            <a:ext cx="6398280" cy="243000"/>
           </a:xfrm>
           <a:prstGeom prst="rect">
             <a:avLst/>
@@ -16087,7 +16117,7 @@
         <p:spPr>
           <a:xfrm>
             <a:off x="1636920" y="3703320"/>
-            <a:ext cx="7770240" cy="182160"/>
+            <a:ext cx="7769880" cy="182160"/>
           </a:xfrm>
           <a:prstGeom prst="rect">
             <a:avLst/>
@@ -16139,7 +16169,7 @@
         <p:spPr>
           <a:xfrm>
             <a:off x="9546480" y="3568680"/>
-            <a:ext cx="1735200" cy="212400"/>
+            <a:ext cx="1734840" cy="212400"/>
           </a:xfrm>
           <a:prstGeom prst="rect">
             <a:avLst/>
@@ -16191,7 +16221,7 @@
         <p:spPr>
           <a:xfrm>
             <a:off x="768240" y="4215240"/>
-            <a:ext cx="10604880" cy="784080"/>
+            <a:ext cx="10604520" cy="783720"/>
           </a:xfrm>
           <a:prstGeom prst="roundRect">
             <a:avLst>
@@ -16234,7 +16264,7 @@
         <p:spPr>
           <a:xfrm>
             <a:off x="951120" y="4380120"/>
-            <a:ext cx="455040" cy="455040"/>
+            <a:ext cx="454680" cy="454680"/>
           </a:xfrm>
           <a:prstGeom prst="ellipse">
             <a:avLst/>
@@ -16275,7 +16305,7 @@
         <p:spPr>
           <a:xfrm>
             <a:off x="951120" y="4466160"/>
-            <a:ext cx="455040" cy="273600"/>
+            <a:ext cx="454680" cy="273600"/>
           </a:xfrm>
           <a:prstGeom prst="rect">
             <a:avLst/>
@@ -16327,7 +16357,7 @@
         <p:spPr>
           <a:xfrm>
             <a:off x="1636920" y="4306680"/>
-            <a:ext cx="6398640" cy="243000"/>
+            <a:ext cx="6398280" cy="243000"/>
           </a:xfrm>
           <a:prstGeom prst="rect">
             <a:avLst/>
@@ -16379,7 +16409,7 @@
         <p:spPr>
           <a:xfrm>
             <a:off x="1636920" y="4636080"/>
-            <a:ext cx="7770240" cy="182160"/>
+            <a:ext cx="7769880" cy="182160"/>
           </a:xfrm>
           <a:prstGeom prst="rect">
             <a:avLst/>
@@ -16431,7 +16461,7 @@
         <p:spPr>
           <a:xfrm>
             <a:off x="9546480" y="4501080"/>
-            <a:ext cx="1735200" cy="212400"/>
+            <a:ext cx="1734840" cy="212400"/>
           </a:xfrm>
           <a:prstGeom prst="rect">
             <a:avLst/>
@@ -16483,7 +16513,7 @@
         <p:spPr>
           <a:xfrm>
             <a:off x="768240" y="5148000"/>
-            <a:ext cx="10604880" cy="784080"/>
+            <a:ext cx="10604520" cy="783720"/>
           </a:xfrm>
           <a:prstGeom prst="roundRect">
             <a:avLst>
@@ -16526,7 +16556,7 @@
         <p:spPr>
           <a:xfrm>
             <a:off x="951120" y="5312520"/>
-            <a:ext cx="455040" cy="455040"/>
+            <a:ext cx="454680" cy="454680"/>
           </a:xfrm>
           <a:prstGeom prst="ellipse">
             <a:avLst/>
@@ -16567,7 +16597,7 @@
         <p:spPr>
           <a:xfrm>
             <a:off x="951120" y="5398920"/>
-            <a:ext cx="455040" cy="273600"/>
+            <a:ext cx="454680" cy="273600"/>
           </a:xfrm>
           <a:prstGeom prst="rect">
             <a:avLst/>
@@ -16619,7 +16649,7 @@
         <p:spPr>
           <a:xfrm>
             <a:off x="1636920" y="5239440"/>
-            <a:ext cx="6398640" cy="243000"/>
+            <a:ext cx="6398280" cy="243000"/>
           </a:xfrm>
           <a:prstGeom prst="rect">
             <a:avLst/>
@@ -16671,7 +16701,7 @@
         <p:spPr>
           <a:xfrm>
             <a:off x="1636920" y="5568840"/>
-            <a:ext cx="7770240" cy="182160"/>
+            <a:ext cx="7769880" cy="182160"/>
           </a:xfrm>
           <a:prstGeom prst="rect">
             <a:avLst/>
@@ -16723,7 +16753,7 @@
         <p:spPr>
           <a:xfrm>
             <a:off x="9546480" y="5433840"/>
-            <a:ext cx="1735200" cy="212400"/>
+            <a:ext cx="1734840" cy="212400"/>
           </a:xfrm>
           <a:prstGeom prst="rect">
             <a:avLst/>
@@ -16812,7 +16842,7 @@
         <p:spPr>
           <a:xfrm>
             <a:off x="768240" y="420480"/>
-            <a:ext cx="10604880" cy="441360"/>
+            <a:ext cx="10604520" cy="441360"/>
           </a:xfrm>
           <a:prstGeom prst="rect">
             <a:avLst/>
@@ -16864,7 +16894,7 @@
         <p:spPr>
           <a:xfrm>
             <a:off x="768240" y="1170360"/>
-            <a:ext cx="1369440" cy="42120"/>
+            <a:ext cx="1369080" cy="41760"/>
           </a:xfrm>
           <a:prstGeom prst="rect">
             <a:avLst/>
@@ -16905,7 +16935,7 @@
         <p:spPr>
           <a:xfrm>
             <a:off x="768240" y="1298520"/>
-            <a:ext cx="10604880" cy="227880"/>
+            <a:ext cx="10604520" cy="227880"/>
           </a:xfrm>
           <a:prstGeom prst="rect">
             <a:avLst/>
@@ -16957,7 +16987,7 @@
         <p:spPr>
           <a:xfrm>
             <a:off x="0" y="6437520"/>
-            <a:ext cx="12189600" cy="12960"/>
+            <a:ext cx="12189240" cy="12600"/>
           </a:xfrm>
           <a:prstGeom prst="rect">
             <a:avLst/>
@@ -16998,7 +17028,7 @@
         <p:spPr>
           <a:xfrm>
             <a:off x="768240" y="6473880"/>
-            <a:ext cx="8227440" cy="136800"/>
+            <a:ext cx="8227080" cy="136800"/>
           </a:xfrm>
           <a:prstGeom prst="rect">
             <a:avLst/>
@@ -17050,7 +17080,7 @@
         <p:spPr>
           <a:xfrm>
             <a:off x="10607040" y="6473880"/>
-            <a:ext cx="820800" cy="136800"/>
+            <a:ext cx="820440" cy="136800"/>
           </a:xfrm>
           <a:prstGeom prst="rect">
             <a:avLst/>
@@ -17102,7 +17132,7 @@
         <p:spPr>
           <a:xfrm>
             <a:off x="768240" y="1828800"/>
-            <a:ext cx="5027040" cy="212760"/>
+            <a:ext cx="5026680" cy="212760"/>
           </a:xfrm>
           <a:prstGeom prst="rect">
             <a:avLst/>
@@ -17154,7 +17184,7 @@
         <p:spPr>
           <a:xfrm>
             <a:off x="768240" y="2194560"/>
-            <a:ext cx="5118480" cy="861840"/>
+            <a:ext cx="5118120" cy="861480"/>
           </a:xfrm>
           <a:prstGeom prst="roundRect">
             <a:avLst>
@@ -17301,7 +17331,7 @@
         <p:spPr>
           <a:xfrm>
             <a:off x="6400800" y="1828800"/>
-            <a:ext cx="5027040" cy="212760"/>
+            <a:ext cx="5026680" cy="212760"/>
           </a:xfrm>
           <a:prstGeom prst="rect">
             <a:avLst/>
@@ -17353,7 +17383,7 @@
         <p:spPr>
           <a:xfrm>
             <a:off x="6400800" y="2194560"/>
-            <a:ext cx="5027040" cy="1328400"/>
+            <a:ext cx="5026680" cy="1328040"/>
           </a:xfrm>
           <a:prstGeom prst="roundRect">
             <a:avLst>
@@ -17572,7 +17602,7 @@
         <p:spPr>
           <a:xfrm>
             <a:off x="768240" y="4206240"/>
-            <a:ext cx="10650600" cy="729360"/>
+            <a:ext cx="10650240" cy="729000"/>
           </a:xfrm>
           <a:prstGeom prst="roundRect">
             <a:avLst>
@@ -17615,7 +17645,7 @@
         <p:spPr>
           <a:xfrm>
             <a:off x="768240" y="4206240"/>
-            <a:ext cx="48600" cy="729360"/>
+            <a:ext cx="48240" cy="729000"/>
           </a:xfrm>
           <a:prstGeom prst="rect">
             <a:avLst/>
@@ -17656,7 +17686,7 @@
         <p:spPr>
           <a:xfrm>
             <a:off x="1024200" y="4271040"/>
-            <a:ext cx="10193400" cy="638280"/>
+            <a:ext cx="10193040" cy="638280"/>
           </a:xfrm>
           <a:prstGeom prst="rect">
             <a:avLst/>
@@ -17776,7 +17806,7 @@
         <p:spPr>
           <a:xfrm>
             <a:off x="768240" y="420480"/>
-            <a:ext cx="10604880" cy="441360"/>
+            <a:ext cx="10604520" cy="441360"/>
           </a:xfrm>
           <a:prstGeom prst="rect">
             <a:avLst/>
@@ -17828,7 +17858,7 @@
         <p:spPr>
           <a:xfrm>
             <a:off x="768240" y="1170360"/>
-            <a:ext cx="1369440" cy="42120"/>
+            <a:ext cx="1369080" cy="41760"/>
           </a:xfrm>
           <a:prstGeom prst="rect">
             <a:avLst/>
@@ -17869,7 +17899,7 @@
         <p:spPr>
           <a:xfrm>
             <a:off x="768240" y="1298520"/>
-            <a:ext cx="10604880" cy="227880"/>
+            <a:ext cx="10604520" cy="227880"/>
           </a:xfrm>
           <a:prstGeom prst="rect">
             <a:avLst/>
@@ -17921,7 +17951,7 @@
         <p:spPr>
           <a:xfrm>
             <a:off x="0" y="6437520"/>
-            <a:ext cx="12189600" cy="12960"/>
+            <a:ext cx="12189240" cy="12600"/>
           </a:xfrm>
           <a:prstGeom prst="rect">
             <a:avLst/>
@@ -17962,7 +17992,7 @@
         <p:spPr>
           <a:xfrm>
             <a:off x="768240" y="6473880"/>
-            <a:ext cx="8227440" cy="136800"/>
+            <a:ext cx="8227080" cy="136800"/>
           </a:xfrm>
           <a:prstGeom prst="rect">
             <a:avLst/>
@@ -18014,7 +18044,7 @@
         <p:spPr>
           <a:xfrm>
             <a:off x="10607040" y="6473880"/>
-            <a:ext cx="820800" cy="136800"/>
+            <a:ext cx="820440" cy="136800"/>
           </a:xfrm>
           <a:prstGeom prst="rect">
             <a:avLst/>
@@ -18066,7 +18096,7 @@
         <p:spPr>
           <a:xfrm>
             <a:off x="768240" y="1828800"/>
-            <a:ext cx="5392800" cy="1283760"/>
+            <a:ext cx="5392440" cy="1283760"/>
           </a:xfrm>
           <a:prstGeom prst="rect">
             <a:avLst/>
@@ -18233,7 +18263,7 @@
         <p:spPr>
           <a:xfrm>
             <a:off x="6400800" y="1783080"/>
-            <a:ext cx="5027040" cy="212760"/>
+            <a:ext cx="5026680" cy="212760"/>
           </a:xfrm>
           <a:prstGeom prst="rect">
             <a:avLst/>
@@ -19049,7 +19079,7 @@
         <p:spPr>
           <a:xfrm>
             <a:off x="768240" y="3931920"/>
-            <a:ext cx="5392800" cy="861840"/>
+            <a:ext cx="5392440" cy="861480"/>
           </a:xfrm>
           <a:prstGeom prst="roundRect">
             <a:avLst>
@@ -19206,7 +19236,7 @@
         <p:spPr>
           <a:xfrm>
             <a:off x="768240" y="5074920"/>
-            <a:ext cx="5392800" cy="729360"/>
+            <a:ext cx="5392440" cy="729000"/>
           </a:xfrm>
           <a:prstGeom prst="roundRect">
             <a:avLst>
@@ -19249,7 +19279,7 @@
         <p:spPr>
           <a:xfrm>
             <a:off x="768240" y="5074920"/>
-            <a:ext cx="48600" cy="729360"/>
+            <a:ext cx="48240" cy="729000"/>
           </a:xfrm>
           <a:prstGeom prst="rect">
             <a:avLst/>
@@ -19290,7 +19320,7 @@
         <p:spPr>
           <a:xfrm>
             <a:off x="1024200" y="5139720"/>
-            <a:ext cx="4935600" cy="638280"/>
+            <a:ext cx="4935240" cy="638280"/>
           </a:xfrm>
           <a:prstGeom prst="rect">
             <a:avLst/>
@@ -19410,7 +19440,7 @@
         <p:spPr>
           <a:xfrm>
             <a:off x="768240" y="420480"/>
-            <a:ext cx="10604880" cy="441360"/>
+            <a:ext cx="10604520" cy="441360"/>
           </a:xfrm>
           <a:prstGeom prst="rect">
             <a:avLst/>
@@ -19462,7 +19492,7 @@
         <p:spPr>
           <a:xfrm>
             <a:off x="768240" y="1170360"/>
-            <a:ext cx="1369440" cy="42120"/>
+            <a:ext cx="1369080" cy="41760"/>
           </a:xfrm>
           <a:prstGeom prst="rect">
             <a:avLst/>
@@ -19503,7 +19533,7 @@
         <p:spPr>
           <a:xfrm>
             <a:off x="768240" y="1298520"/>
-            <a:ext cx="10604880" cy="227880"/>
+            <a:ext cx="10604520" cy="227880"/>
           </a:xfrm>
           <a:prstGeom prst="rect">
             <a:avLst/>
@@ -19555,7 +19585,7 @@
         <p:spPr>
           <a:xfrm>
             <a:off x="0" y="6437520"/>
-            <a:ext cx="12189600" cy="12960"/>
+            <a:ext cx="12189240" cy="12600"/>
           </a:xfrm>
           <a:prstGeom prst="rect">
             <a:avLst/>
@@ -19596,7 +19626,7 @@
         <p:spPr>
           <a:xfrm>
             <a:off x="768240" y="6473880"/>
-            <a:ext cx="8227440" cy="136800"/>
+            <a:ext cx="8227080" cy="136800"/>
           </a:xfrm>
           <a:prstGeom prst="rect">
             <a:avLst/>
@@ -19648,7 +19678,7 @@
         <p:spPr>
           <a:xfrm>
             <a:off x="10607040" y="6473880"/>
-            <a:ext cx="820800" cy="136800"/>
+            <a:ext cx="820440" cy="136800"/>
           </a:xfrm>
           <a:prstGeom prst="rect">
             <a:avLst/>
@@ -19700,7 +19730,7 @@
         <p:spPr>
           <a:xfrm>
             <a:off x="768240" y="1828800"/>
-            <a:ext cx="5850000" cy="2027880"/>
+            <a:ext cx="5849640" cy="2027520"/>
           </a:xfrm>
           <a:prstGeom prst="roundRect">
             <a:avLst>
@@ -20012,7 +20042,7 @@
         <p:spPr>
           <a:xfrm>
             <a:off x="6446520" y="1783080"/>
-            <a:ext cx="4935600" cy="212760"/>
+            <a:ext cx="4935240" cy="212760"/>
           </a:xfrm>
           <a:prstGeom prst="rect">
             <a:avLst/>
@@ -20064,7 +20094,7 @@
         <p:spPr>
           <a:xfrm>
             <a:off x="6446520" y="2148840"/>
-            <a:ext cx="4935600" cy="1218960"/>
+            <a:ext cx="4935240" cy="1218960"/>
           </a:xfrm>
           <a:prstGeom prst="rect">
             <a:avLst/>
@@ -20231,7 +20261,7 @@
         <p:spPr>
           <a:xfrm>
             <a:off x="768240" y="4343400"/>
-            <a:ext cx="10650600" cy="1095120"/>
+            <a:ext cx="10650240" cy="1094760"/>
           </a:xfrm>
           <a:prstGeom prst="roundRect">
             <a:avLst>
@@ -20274,7 +20304,7 @@
         <p:spPr>
           <a:xfrm>
             <a:off x="768240" y="4343400"/>
-            <a:ext cx="48600" cy="1095120"/>
+            <a:ext cx="48240" cy="1094760"/>
           </a:xfrm>
           <a:prstGeom prst="rect">
             <a:avLst/>
@@ -20315,7 +20345,7 @@
         <p:spPr>
           <a:xfrm>
             <a:off x="1024200" y="4590360"/>
-            <a:ext cx="10193400" cy="638280"/>
+            <a:ext cx="10193040" cy="638280"/>
           </a:xfrm>
           <a:prstGeom prst="rect">
             <a:avLst/>
@@ -20435,7 +20465,7 @@
         <p:spPr>
           <a:xfrm>
             <a:off x="768240" y="420480"/>
-            <a:ext cx="10604880" cy="441360"/>
+            <a:ext cx="10604520" cy="441360"/>
           </a:xfrm>
           <a:prstGeom prst="rect">
             <a:avLst/>
@@ -20487,7 +20517,7 @@
         <p:spPr>
           <a:xfrm>
             <a:off x="768240" y="1170360"/>
-            <a:ext cx="1369440" cy="42120"/>
+            <a:ext cx="1369080" cy="41760"/>
           </a:xfrm>
           <a:prstGeom prst="rect">
             <a:avLst/>
@@ -20528,7 +20558,7 @@
         <p:spPr>
           <a:xfrm>
             <a:off x="768240" y="1298520"/>
-            <a:ext cx="10604880" cy="227880"/>
+            <a:ext cx="10604520" cy="227880"/>
           </a:xfrm>
           <a:prstGeom prst="rect">
             <a:avLst/>
@@ -20580,7 +20610,7 @@
         <p:spPr>
           <a:xfrm>
             <a:off x="0" y="6437520"/>
-            <a:ext cx="12189600" cy="12960"/>
+            <a:ext cx="12189240" cy="12600"/>
           </a:xfrm>
           <a:prstGeom prst="rect">
             <a:avLst/>
@@ -20621,7 +20651,7 @@
         <p:spPr>
           <a:xfrm>
             <a:off x="768240" y="6473880"/>
-            <a:ext cx="8227440" cy="136800"/>
+            <a:ext cx="8227080" cy="136800"/>
           </a:xfrm>
           <a:prstGeom prst="rect">
             <a:avLst/>
@@ -20673,7 +20703,7 @@
         <p:spPr>
           <a:xfrm>
             <a:off x="10607040" y="6473880"/>
-            <a:ext cx="820800" cy="136800"/>
+            <a:ext cx="820440" cy="136800"/>
           </a:xfrm>
           <a:prstGeom prst="rect">
             <a:avLst/>
@@ -20725,7 +20755,7 @@
         <p:spPr>
           <a:xfrm>
             <a:off x="768240" y="1828800"/>
-            <a:ext cx="5850000" cy="2027880"/>
+            <a:ext cx="5849640" cy="2027520"/>
           </a:xfrm>
           <a:prstGeom prst="roundRect">
             <a:avLst>
@@ -21037,7 +21067,7 @@
         <p:spPr>
           <a:xfrm>
             <a:off x="6446520" y="1783080"/>
-            <a:ext cx="4935600" cy="197640"/>
+            <a:ext cx="4935240" cy="197640"/>
           </a:xfrm>
           <a:prstGeom prst="rect">
             <a:avLst/>
@@ -21089,7 +21119,7 @@
         <p:spPr>
           <a:xfrm>
             <a:off x="6446520" y="2194560"/>
-            <a:ext cx="4935600" cy="1328400"/>
+            <a:ext cx="4935240" cy="1328040"/>
           </a:xfrm>
           <a:prstGeom prst="roundRect">
             <a:avLst>
@@ -21288,7 +21318,7 @@
         <p:spPr>
           <a:xfrm>
             <a:off x="768240" y="4343400"/>
-            <a:ext cx="10650600" cy="1095120"/>
+            <a:ext cx="10650240" cy="1094760"/>
           </a:xfrm>
           <a:prstGeom prst="roundRect">
             <a:avLst>
@@ -21331,7 +21361,7 @@
         <p:spPr>
           <a:xfrm>
             <a:off x="768240" y="4343400"/>
-            <a:ext cx="48600" cy="1095120"/>
+            <a:ext cx="48240" cy="1094760"/>
           </a:xfrm>
           <a:prstGeom prst="rect">
             <a:avLst/>
@@ -21372,7 +21402,7 @@
         <p:spPr>
           <a:xfrm>
             <a:off x="1024200" y="4590360"/>
-            <a:ext cx="10193400" cy="638280"/>
+            <a:ext cx="10193040" cy="638280"/>
           </a:xfrm>
           <a:prstGeom prst="rect">
             <a:avLst/>
@@ -21492,7 +21522,7 @@
         <p:spPr>
           <a:xfrm>
             <a:off x="768240" y="420480"/>
-            <a:ext cx="10604880" cy="441360"/>
+            <a:ext cx="10604520" cy="441360"/>
           </a:xfrm>
           <a:prstGeom prst="rect">
             <a:avLst/>
@@ -21544,7 +21574,7 @@
         <p:spPr>
           <a:xfrm>
             <a:off x="768240" y="1170360"/>
-            <a:ext cx="1369440" cy="42120"/>
+            <a:ext cx="1369080" cy="41760"/>
           </a:xfrm>
           <a:prstGeom prst="rect">
             <a:avLst/>
@@ -21585,7 +21615,7 @@
         <p:spPr>
           <a:xfrm>
             <a:off x="768240" y="1298520"/>
-            <a:ext cx="10604880" cy="227880"/>
+            <a:ext cx="10604520" cy="227880"/>
           </a:xfrm>
           <a:prstGeom prst="rect">
             <a:avLst/>
@@ -21637,7 +21667,7 @@
         <p:spPr>
           <a:xfrm>
             <a:off x="0" y="6437520"/>
-            <a:ext cx="12189600" cy="12960"/>
+            <a:ext cx="12189240" cy="12600"/>
           </a:xfrm>
           <a:prstGeom prst="rect">
             <a:avLst/>
@@ -21678,7 +21708,7 @@
         <p:spPr>
           <a:xfrm>
             <a:off x="768240" y="6473880"/>
-            <a:ext cx="8227440" cy="136800"/>
+            <a:ext cx="8227080" cy="136800"/>
           </a:xfrm>
           <a:prstGeom prst="rect">
             <a:avLst/>
@@ -21730,7 +21760,7 @@
         <p:spPr>
           <a:xfrm>
             <a:off x="10607040" y="6473880"/>
-            <a:ext cx="820800" cy="136800"/>
+            <a:ext cx="820440" cy="136800"/>
           </a:xfrm>
           <a:prstGeom prst="rect">
             <a:avLst/>
@@ -21782,7 +21812,7 @@
         <p:spPr>
           <a:xfrm>
             <a:off x="768240" y="1828800"/>
-            <a:ext cx="5392800" cy="212760"/>
+            <a:ext cx="5392440" cy="212760"/>
           </a:xfrm>
           <a:prstGeom prst="rect">
             <a:avLst/>
@@ -21834,7 +21864,7 @@
         <p:spPr>
           <a:xfrm>
             <a:off x="768240" y="2240280"/>
-            <a:ext cx="5392800" cy="473400"/>
+            <a:ext cx="5392440" cy="473040"/>
           </a:xfrm>
           <a:prstGeom prst="roundRect">
             <a:avLst>
@@ -21877,7 +21907,7 @@
         <p:spPr>
           <a:xfrm>
             <a:off x="768240" y="2240280"/>
-            <a:ext cx="48600" cy="473400"/>
+            <a:ext cx="48240" cy="473040"/>
           </a:xfrm>
           <a:prstGeom prst="rect">
             <a:avLst/>
@@ -21918,7 +21948,7 @@
         <p:spPr>
           <a:xfrm>
             <a:off x="996840" y="2383200"/>
-            <a:ext cx="1460880" cy="197280"/>
+            <a:ext cx="1460520" cy="197280"/>
           </a:xfrm>
           <a:prstGeom prst="rect">
             <a:avLst/>
@@ -21970,7 +22000,7 @@
         <p:spPr>
           <a:xfrm>
             <a:off x="2368440" y="2389680"/>
-            <a:ext cx="3701160" cy="174600"/>
+            <a:ext cx="3700800" cy="174600"/>
           </a:xfrm>
           <a:prstGeom prst="rect">
             <a:avLst/>
@@ -22022,7 +22052,7 @@
         <p:spPr>
           <a:xfrm>
             <a:off x="768240" y="2807280"/>
-            <a:ext cx="5392800" cy="473400"/>
+            <a:ext cx="5392440" cy="473040"/>
           </a:xfrm>
           <a:prstGeom prst="roundRect">
             <a:avLst>
@@ -22065,7 +22095,7 @@
         <p:spPr>
           <a:xfrm>
             <a:off x="768240" y="2807280"/>
-            <a:ext cx="48600" cy="473400"/>
+            <a:ext cx="48240" cy="473040"/>
           </a:xfrm>
           <a:prstGeom prst="rect">
             <a:avLst/>
@@ -22106,7 +22136,7 @@
         <p:spPr>
           <a:xfrm>
             <a:off x="996840" y="2949840"/>
-            <a:ext cx="1460880" cy="197280"/>
+            <a:ext cx="1460520" cy="197280"/>
           </a:xfrm>
           <a:prstGeom prst="rect">
             <a:avLst/>
@@ -22158,7 +22188,7 @@
         <p:spPr>
           <a:xfrm>
             <a:off x="2368440" y="2956680"/>
-            <a:ext cx="3701160" cy="174600"/>
+            <a:ext cx="3700800" cy="174600"/>
           </a:xfrm>
           <a:prstGeom prst="rect">
             <a:avLst/>
@@ -22210,7 +22240,7 @@
         <p:spPr>
           <a:xfrm>
             <a:off x="768240" y="3374280"/>
-            <a:ext cx="5392800" cy="473400"/>
+            <a:ext cx="5392440" cy="473040"/>
           </a:xfrm>
           <a:prstGeom prst="roundRect">
             <a:avLst>
@@ -22253,7 +22283,7 @@
         <p:spPr>
           <a:xfrm>
             <a:off x="768240" y="3374280"/>
-            <a:ext cx="48600" cy="473400"/>
+            <a:ext cx="48240" cy="473040"/>
           </a:xfrm>
           <a:prstGeom prst="rect">
             <a:avLst/>
@@ -22294,7 +22324,7 @@
         <p:spPr>
           <a:xfrm>
             <a:off x="996840" y="3516840"/>
-            <a:ext cx="1460880" cy="197280"/>
+            <a:ext cx="1460520" cy="197280"/>
           </a:xfrm>
           <a:prstGeom prst="rect">
             <a:avLst/>
@@ -22346,7 +22376,7 @@
         <p:spPr>
           <a:xfrm>
             <a:off x="2368440" y="3523680"/>
-            <a:ext cx="3701160" cy="174600"/>
+            <a:ext cx="3700800" cy="174600"/>
           </a:xfrm>
           <a:prstGeom prst="rect">
             <a:avLst/>
@@ -23268,7 +23298,7 @@
         <p:spPr>
           <a:xfrm>
             <a:off x="768240" y="4434840"/>
-            <a:ext cx="5392800" cy="1003680"/>
+            <a:ext cx="5392440" cy="1003320"/>
           </a:xfrm>
           <a:prstGeom prst="roundRect">
             <a:avLst>
@@ -23311,7 +23341,7 @@
         <p:spPr>
           <a:xfrm>
             <a:off x="768240" y="4434840"/>
-            <a:ext cx="48600" cy="1003680"/>
+            <a:ext cx="48240" cy="1003320"/>
           </a:xfrm>
           <a:prstGeom prst="rect">
             <a:avLst/>
@@ -23352,7 +23382,7 @@
         <p:spPr>
           <a:xfrm>
             <a:off x="1024200" y="4636080"/>
-            <a:ext cx="4935600" cy="638280"/>
+            <a:ext cx="4935240" cy="638280"/>
           </a:xfrm>
           <a:prstGeom prst="rect">
             <a:avLst/>
@@ -23472,7 +23502,7 @@
         <p:spPr>
           <a:xfrm>
             <a:off x="768240" y="2240280"/>
-            <a:ext cx="1826640" cy="974880"/>
+            <a:ext cx="1826280" cy="974880"/>
           </a:xfrm>
           <a:prstGeom prst="rect">
             <a:avLst/>
@@ -23524,7 +23554,7 @@
         <p:spPr>
           <a:xfrm>
             <a:off x="768240" y="3246120"/>
-            <a:ext cx="1826640" cy="48600"/>
+            <a:ext cx="1826280" cy="48240"/>
           </a:xfrm>
           <a:prstGeom prst="rect">
             <a:avLst/>
@@ -23565,7 +23595,7 @@
         <p:spPr>
           <a:xfrm>
             <a:off x="768240" y="3429000"/>
-            <a:ext cx="10422000" cy="639360"/>
+            <a:ext cx="10421640" cy="639360"/>
           </a:xfrm>
           <a:prstGeom prst="rect">
             <a:avLst/>
@@ -23617,7 +23647,7 @@
         <p:spPr>
           <a:xfrm>
             <a:off x="768240" y="4754880"/>
-            <a:ext cx="7313040" cy="243000"/>
+            <a:ext cx="7312680" cy="243000"/>
           </a:xfrm>
           <a:prstGeom prst="rect">
             <a:avLst/>
@@ -23706,7 +23736,7 @@
         <p:spPr>
           <a:xfrm>
             <a:off x="768240" y="420480"/>
-            <a:ext cx="10604880" cy="441360"/>
+            <a:ext cx="10604520" cy="441360"/>
           </a:xfrm>
           <a:prstGeom prst="rect">
             <a:avLst/>
@@ -23758,7 +23788,7 @@
         <p:spPr>
           <a:xfrm>
             <a:off x="768240" y="1170360"/>
-            <a:ext cx="1369440" cy="42120"/>
+            <a:ext cx="1369080" cy="41760"/>
           </a:xfrm>
           <a:prstGeom prst="rect">
             <a:avLst/>
@@ -23799,7 +23829,7 @@
         <p:spPr>
           <a:xfrm>
             <a:off x="0" y="6437520"/>
-            <a:ext cx="12189600" cy="12960"/>
+            <a:ext cx="12189240" cy="12600"/>
           </a:xfrm>
           <a:prstGeom prst="rect">
             <a:avLst/>
@@ -23840,7 +23870,7 @@
         <p:spPr>
           <a:xfrm>
             <a:off x="768240" y="6473880"/>
-            <a:ext cx="8227440" cy="136800"/>
+            <a:ext cx="8227080" cy="136800"/>
           </a:xfrm>
           <a:prstGeom prst="rect">
             <a:avLst/>
@@ -23892,7 +23922,7 @@
         <p:spPr>
           <a:xfrm>
             <a:off x="10607040" y="6473880"/>
-            <a:ext cx="820800" cy="136800"/>
+            <a:ext cx="820440" cy="136800"/>
           </a:xfrm>
           <a:prstGeom prst="rect">
             <a:avLst/>
@@ -23944,7 +23974,7 @@
         <p:spPr>
           <a:xfrm>
             <a:off x="768240" y="1417320"/>
-            <a:ext cx="5575680" cy="2321640"/>
+            <a:ext cx="5575320" cy="2321640"/>
           </a:xfrm>
           <a:prstGeom prst="rect">
             <a:avLst/>
@@ -24213,7 +24243,7 @@
         <p:spPr>
           <a:xfrm>
             <a:off x="6583680" y="1371600"/>
-            <a:ext cx="4844160" cy="212760"/>
+            <a:ext cx="4843800" cy="212760"/>
           </a:xfrm>
           <a:prstGeom prst="rect">
             <a:avLst/>
@@ -24265,7 +24295,7 @@
         <p:spPr>
           <a:xfrm>
             <a:off x="6583680" y="1783080"/>
-            <a:ext cx="4844160" cy="1218960"/>
+            <a:ext cx="4843800" cy="1218960"/>
           </a:xfrm>
           <a:prstGeom prst="rect">
             <a:avLst/>
@@ -24432,7 +24462,7 @@
         <p:spPr>
           <a:xfrm>
             <a:off x="6583680" y="4069080"/>
-            <a:ext cx="4844160" cy="866520"/>
+            <a:ext cx="4843800" cy="866160"/>
           </a:xfrm>
           <a:prstGeom prst="roundRect">
             <a:avLst>
@@ -24475,7 +24505,7 @@
         <p:spPr>
           <a:xfrm>
             <a:off x="6583680" y="4069080"/>
-            <a:ext cx="48600" cy="866520"/>
+            <a:ext cx="48240" cy="866160"/>
           </a:xfrm>
           <a:prstGeom prst="rect">
             <a:avLst/>
@@ -24516,7 +24546,7 @@
         <p:spPr>
           <a:xfrm>
             <a:off x="6839640" y="4305600"/>
-            <a:ext cx="4386960" cy="430560"/>
+            <a:ext cx="4386600" cy="430560"/>
           </a:xfrm>
           <a:prstGeom prst="rect">
             <a:avLst/>
@@ -24636,7 +24666,7 @@
         <p:spPr>
           <a:xfrm>
             <a:off x="768240" y="420480"/>
-            <a:ext cx="10604880" cy="441360"/>
+            <a:ext cx="10604520" cy="441360"/>
           </a:xfrm>
           <a:prstGeom prst="rect">
             <a:avLst/>
@@ -24688,7 +24718,7 @@
         <p:spPr>
           <a:xfrm>
             <a:off x="768240" y="1170360"/>
-            <a:ext cx="1369440" cy="42120"/>
+            <a:ext cx="1369080" cy="41760"/>
           </a:xfrm>
           <a:prstGeom prst="rect">
             <a:avLst/>
@@ -24729,7 +24759,7 @@
         <p:spPr>
           <a:xfrm>
             <a:off x="0" y="6437520"/>
-            <a:ext cx="12189600" cy="12960"/>
+            <a:ext cx="12189240" cy="12600"/>
           </a:xfrm>
           <a:prstGeom prst="rect">
             <a:avLst/>
@@ -24770,7 +24800,7 @@
         <p:spPr>
           <a:xfrm>
             <a:off x="768240" y="6473880"/>
-            <a:ext cx="8227440" cy="136800"/>
+            <a:ext cx="8227080" cy="136800"/>
           </a:xfrm>
           <a:prstGeom prst="rect">
             <a:avLst/>
@@ -24822,7 +24852,7 @@
         <p:spPr>
           <a:xfrm>
             <a:off x="10607040" y="6473880"/>
-            <a:ext cx="820800" cy="136800"/>
+            <a:ext cx="820440" cy="136800"/>
           </a:xfrm>
           <a:prstGeom prst="rect">
             <a:avLst/>
@@ -24874,7 +24904,7 @@
         <p:spPr>
           <a:xfrm>
             <a:off x="768240" y="1417320"/>
-            <a:ext cx="3426840" cy="3655440"/>
+            <a:ext cx="3426480" cy="3655080"/>
           </a:xfrm>
           <a:prstGeom prst="roundRect">
             <a:avLst>
@@ -24917,7 +24947,7 @@
         <p:spPr>
           <a:xfrm>
             <a:off x="768240" y="1417320"/>
-            <a:ext cx="3426840" cy="500760"/>
+            <a:ext cx="3426480" cy="500400"/>
           </a:xfrm>
           <a:prstGeom prst="roundRect">
             <a:avLst>
@@ -24960,7 +24990,7 @@
         <p:spPr>
           <a:xfrm>
             <a:off x="768240" y="1490400"/>
-            <a:ext cx="3426840" cy="227880"/>
+            <a:ext cx="3426480" cy="227880"/>
           </a:xfrm>
           <a:prstGeom prst="rect">
             <a:avLst/>
@@ -25012,7 +25042,7 @@
         <p:spPr>
           <a:xfrm>
             <a:off x="996840" y="2103120"/>
-            <a:ext cx="3015360" cy="1232280"/>
+            <a:ext cx="3015000" cy="1232280"/>
           </a:xfrm>
           <a:prstGeom prst="rect">
             <a:avLst/>
@@ -25179,7 +25209,7 @@
         <p:spPr>
           <a:xfrm>
             <a:off x="4380120" y="1417320"/>
-            <a:ext cx="3426840" cy="3655440"/>
+            <a:ext cx="3426480" cy="3655080"/>
           </a:xfrm>
           <a:prstGeom prst="roundRect">
             <a:avLst>
@@ -25222,7 +25252,7 @@
         <p:spPr>
           <a:xfrm>
             <a:off x="4380120" y="1417320"/>
-            <a:ext cx="3426840" cy="500760"/>
+            <a:ext cx="3426480" cy="500400"/>
           </a:xfrm>
           <a:prstGeom prst="roundRect">
             <a:avLst>
@@ -25265,7 +25295,7 @@
         <p:spPr>
           <a:xfrm>
             <a:off x="4380120" y="1490400"/>
-            <a:ext cx="3426840" cy="227880"/>
+            <a:ext cx="3426480" cy="227880"/>
           </a:xfrm>
           <a:prstGeom prst="rect">
             <a:avLst/>
@@ -25317,7 +25347,7 @@
         <p:spPr>
           <a:xfrm>
             <a:off x="4608720" y="2103120"/>
-            <a:ext cx="3015360" cy="1232280"/>
+            <a:ext cx="3015000" cy="1232280"/>
           </a:xfrm>
           <a:prstGeom prst="rect">
             <a:avLst/>
@@ -25484,7 +25514,7 @@
         <p:spPr>
           <a:xfrm>
             <a:off x="7992000" y="1417320"/>
-            <a:ext cx="3426840" cy="3655440"/>
+            <a:ext cx="3426480" cy="3655080"/>
           </a:xfrm>
           <a:prstGeom prst="roundRect">
             <a:avLst>
@@ -25527,7 +25557,7 @@
         <p:spPr>
           <a:xfrm>
             <a:off x="7992000" y="1417320"/>
-            <a:ext cx="3426840" cy="500760"/>
+            <a:ext cx="3426480" cy="500400"/>
           </a:xfrm>
           <a:prstGeom prst="roundRect">
             <a:avLst>
@@ -25570,7 +25600,7 @@
         <p:spPr>
           <a:xfrm>
             <a:off x="7992000" y="1490400"/>
-            <a:ext cx="3426840" cy="227880"/>
+            <a:ext cx="3426480" cy="227880"/>
           </a:xfrm>
           <a:prstGeom prst="rect">
             <a:avLst/>
@@ -25622,7 +25652,7 @@
         <p:spPr>
           <a:xfrm>
             <a:off x="8220600" y="2103120"/>
-            <a:ext cx="3015360" cy="1232280"/>
+            <a:ext cx="3015000" cy="1232280"/>
           </a:xfrm>
           <a:prstGeom prst="rect">
             <a:avLst/>
@@ -25789,7 +25819,7 @@
         <p:spPr>
           <a:xfrm>
             <a:off x="768240" y="5212080"/>
-            <a:ext cx="10650600" cy="500760"/>
+            <a:ext cx="10650240" cy="500400"/>
           </a:xfrm>
           <a:prstGeom prst="roundRect">
             <a:avLst>
@@ -25832,7 +25862,7 @@
         <p:spPr>
           <a:xfrm>
             <a:off x="768240" y="5212080"/>
-            <a:ext cx="48600" cy="500760"/>
+            <a:ext cx="48240" cy="500400"/>
           </a:xfrm>
           <a:prstGeom prst="rect">
             <a:avLst/>
@@ -25873,7 +25903,7 @@
         <p:spPr>
           <a:xfrm>
             <a:off x="1024200" y="5377320"/>
-            <a:ext cx="10193400" cy="207000"/>
+            <a:ext cx="10193040" cy="207000"/>
           </a:xfrm>
           <a:prstGeom prst="rect">
             <a:avLst/>
@@ -25962,7 +25992,7 @@
         <p:spPr>
           <a:xfrm>
             <a:off x="0" y="2606040"/>
-            <a:ext cx="1826640" cy="61200"/>
+            <a:ext cx="1826280" cy="60840"/>
           </a:xfrm>
           <a:prstGeom prst="rect">
             <a:avLst/>
@@ -26003,7 +26033,7 @@
         <p:spPr>
           <a:xfrm>
             <a:off x="768240" y="2788920"/>
-            <a:ext cx="10422000" cy="822600"/>
+            <a:ext cx="10421640" cy="822600"/>
           </a:xfrm>
           <a:prstGeom prst="rect">
             <a:avLst/>
@@ -26055,7 +26085,7 @@
         <p:spPr>
           <a:xfrm>
             <a:off x="768240" y="3977640"/>
-            <a:ext cx="10056240" cy="304560"/>
+            <a:ext cx="10055880" cy="304560"/>
           </a:xfrm>
           <a:prstGeom prst="rect">
             <a:avLst/>
@@ -26107,7 +26137,7 @@
         <p:spPr>
           <a:xfrm>
             <a:off x="768240" y="4754880"/>
-            <a:ext cx="10056240" cy="273960"/>
+            <a:ext cx="10055880" cy="273960"/>
           </a:xfrm>
           <a:prstGeom prst="rect">
             <a:avLst/>
@@ -26159,7 +26189,7 @@
         <p:spPr>
           <a:xfrm>
             <a:off x="768240" y="5852160"/>
-            <a:ext cx="7313040" cy="197640"/>
+            <a:ext cx="7312680" cy="197640"/>
           </a:xfrm>
           <a:prstGeom prst="rect">
             <a:avLst/>
@@ -26194,7 +26224,7 @@
                 <a:latin typeface="Arial"/>
                 <a:ea typeface="DejaVu Sans"/>
               </a:rPr>
-              <a:t>Radlab Developer Services · DSS 2026 AI Edition</a:t>
+              <a:t>radlab.dev · DSS 2026 AI Edition</a:t>
             </a:r>
             <a:endParaRPr b="0" lang="pl-PL" sz="1300" spc="-1" strike="noStrike">
               <a:latin typeface="Arial"/>
@@ -26215,7 +26245,7 @@
         <p:spPr>
           <a:xfrm>
             <a:off x="11016000" y="6170400"/>
-            <a:ext cx="1061280" cy="596520"/>
+            <a:ext cx="1060920" cy="596160"/>
           </a:xfrm>
           <a:prstGeom prst="rect">
             <a:avLst/>
@@ -26271,7 +26301,7 @@
         <p:spPr>
           <a:xfrm>
             <a:off x="768240" y="420480"/>
-            <a:ext cx="10604880" cy="441360"/>
+            <a:ext cx="10604520" cy="441360"/>
           </a:xfrm>
           <a:prstGeom prst="rect">
             <a:avLst/>
@@ -26323,7 +26353,7 @@
         <p:spPr>
           <a:xfrm>
             <a:off x="768240" y="1170360"/>
-            <a:ext cx="1369440" cy="42120"/>
+            <a:ext cx="1369080" cy="41760"/>
           </a:xfrm>
           <a:prstGeom prst="rect">
             <a:avLst/>
@@ -26364,7 +26394,7 @@
         <p:spPr>
           <a:xfrm>
             <a:off x="0" y="6437520"/>
-            <a:ext cx="12189600" cy="12960"/>
+            <a:ext cx="12189240" cy="12600"/>
           </a:xfrm>
           <a:prstGeom prst="rect">
             <a:avLst/>
@@ -26405,7 +26435,7 @@
         <p:spPr>
           <a:xfrm>
             <a:off x="768240" y="6473880"/>
-            <a:ext cx="8227440" cy="136800"/>
+            <a:ext cx="8227080" cy="136800"/>
           </a:xfrm>
           <a:prstGeom prst="rect">
             <a:avLst/>
@@ -26457,7 +26487,7 @@
         <p:spPr>
           <a:xfrm>
             <a:off x="10607040" y="6473880"/>
-            <a:ext cx="820800" cy="136800"/>
+            <a:ext cx="820440" cy="136800"/>
           </a:xfrm>
           <a:prstGeom prst="rect">
             <a:avLst/>
@@ -26509,7 +26539,7 @@
         <p:spPr>
           <a:xfrm>
             <a:off x="768240" y="1417320"/>
-            <a:ext cx="10604880" cy="621720"/>
+            <a:ext cx="10604520" cy="621720"/>
           </a:xfrm>
           <a:prstGeom prst="rect">
             <a:avLst/>
@@ -26561,7 +26591,7 @@
         <p:spPr>
           <a:xfrm>
             <a:off x="768240" y="2423160"/>
-            <a:ext cx="5484240" cy="1958760"/>
+            <a:ext cx="5483880" cy="1958760"/>
           </a:xfrm>
           <a:prstGeom prst="rect">
             <a:avLst/>
@@ -26762,7 +26792,7 @@
         <p:spPr>
           <a:xfrm>
             <a:off x="6583680" y="2423160"/>
-            <a:ext cx="4844160" cy="2375280"/>
+            <a:ext cx="4843800" cy="2374920"/>
           </a:xfrm>
           <a:prstGeom prst="roundRect">
             <a:avLst>
@@ -26805,7 +26835,7 @@
         <p:spPr>
           <a:xfrm>
             <a:off x="6583680" y="2423160"/>
-            <a:ext cx="48600" cy="2375280"/>
+            <a:ext cx="48240" cy="2374920"/>
           </a:xfrm>
           <a:prstGeom prst="rect">
             <a:avLst/>
@@ -26846,7 +26876,7 @@
         <p:spPr>
           <a:xfrm>
             <a:off x="6839640" y="3206160"/>
-            <a:ext cx="4386960" cy="846000"/>
+            <a:ext cx="4386600" cy="846000"/>
           </a:xfrm>
           <a:prstGeom prst="rect">
             <a:avLst/>
@@ -26929,7 +26959,7 @@
         <p:spPr>
           <a:xfrm>
             <a:off x="6583680" y="4983480"/>
-            <a:ext cx="4844160" cy="197640"/>
+            <a:ext cx="4843800" cy="197640"/>
           </a:xfrm>
           <a:prstGeom prst="rect">
             <a:avLst/>
@@ -27018,7 +27048,7 @@
         <p:spPr>
           <a:xfrm>
             <a:off x="768240" y="2240280"/>
-            <a:ext cx="1826640" cy="974880"/>
+            <a:ext cx="1826280" cy="974880"/>
           </a:xfrm>
           <a:prstGeom prst="rect">
             <a:avLst/>
@@ -27070,7 +27100,7 @@
         <p:spPr>
           <a:xfrm>
             <a:off x="768240" y="3246120"/>
-            <a:ext cx="1826640" cy="48600"/>
+            <a:ext cx="1826280" cy="48240"/>
           </a:xfrm>
           <a:prstGeom prst="rect">
             <a:avLst/>
@@ -27111,7 +27141,7 @@
         <p:spPr>
           <a:xfrm>
             <a:off x="768240" y="3429000"/>
-            <a:ext cx="10422000" cy="639360"/>
+            <a:ext cx="10421640" cy="639360"/>
           </a:xfrm>
           <a:prstGeom prst="rect">
             <a:avLst/>
@@ -27163,7 +27193,7 @@
         <p:spPr>
           <a:xfrm>
             <a:off x="768240" y="4754880"/>
-            <a:ext cx="7313040" cy="243000"/>
+            <a:ext cx="7312680" cy="243000"/>
           </a:xfrm>
           <a:prstGeom prst="rect">
             <a:avLst/>
@@ -27252,7 +27282,7 @@
         <p:spPr>
           <a:xfrm>
             <a:off x="768240" y="420480"/>
-            <a:ext cx="10604880" cy="441360"/>
+            <a:ext cx="10604520" cy="441360"/>
           </a:xfrm>
           <a:prstGeom prst="rect">
             <a:avLst/>
@@ -27304,7 +27334,7 @@
         <p:spPr>
           <a:xfrm>
             <a:off x="768240" y="1170360"/>
-            <a:ext cx="1369440" cy="42120"/>
+            <a:ext cx="1369080" cy="41760"/>
           </a:xfrm>
           <a:prstGeom prst="rect">
             <a:avLst/>
@@ -27345,7 +27375,7 @@
         <p:spPr>
           <a:xfrm>
             <a:off x="0" y="6437520"/>
-            <a:ext cx="12189600" cy="12960"/>
+            <a:ext cx="12189240" cy="12600"/>
           </a:xfrm>
           <a:prstGeom prst="rect">
             <a:avLst/>
@@ -27386,7 +27416,7 @@
         <p:spPr>
           <a:xfrm>
             <a:off x="768240" y="6473880"/>
-            <a:ext cx="8227440" cy="136800"/>
+            <a:ext cx="8227080" cy="136800"/>
           </a:xfrm>
           <a:prstGeom prst="rect">
             <a:avLst/>
@@ -27438,7 +27468,7 @@
         <p:spPr>
           <a:xfrm>
             <a:off x="10607040" y="6473880"/>
-            <a:ext cx="820800" cy="136800"/>
+            <a:ext cx="820440" cy="136800"/>
           </a:xfrm>
           <a:prstGeom prst="rect">
             <a:avLst/>
@@ -27490,7 +27520,7 @@
         <p:spPr>
           <a:xfrm>
             <a:off x="768240" y="1417320"/>
-            <a:ext cx="5255640" cy="3564000"/>
+            <a:ext cx="5255280" cy="3563640"/>
           </a:xfrm>
           <a:prstGeom prst="roundRect">
             <a:avLst>
@@ -27536,7 +27566,7 @@
         <p:spPr>
           <a:xfrm>
             <a:off x="768240" y="1417320"/>
-            <a:ext cx="5255640" cy="546480"/>
+            <a:ext cx="5255280" cy="546120"/>
           </a:xfrm>
           <a:prstGeom prst="roundRect">
             <a:avLst>
@@ -27579,7 +27609,7 @@
         <p:spPr>
           <a:xfrm>
             <a:off x="768240" y="1472040"/>
-            <a:ext cx="5255640" cy="227880"/>
+            <a:ext cx="5255280" cy="227880"/>
           </a:xfrm>
           <a:prstGeom prst="rect">
             <a:avLst/>
@@ -27631,7 +27661,7 @@
         <p:spPr>
           <a:xfrm>
             <a:off x="996840" y="2148840"/>
-            <a:ext cx="1415160" cy="182160"/>
+            <a:ext cx="1414800" cy="182160"/>
           </a:xfrm>
           <a:prstGeom prst="rect">
             <a:avLst/>
@@ -27683,7 +27713,7 @@
         <p:spPr>
           <a:xfrm>
             <a:off x="2368440" y="2148840"/>
-            <a:ext cx="3472560" cy="190080"/>
+            <a:ext cx="3472200" cy="190080"/>
           </a:xfrm>
           <a:prstGeom prst="rect">
             <a:avLst/>
@@ -27745,7 +27775,7 @@
         <p:spPr>
           <a:xfrm>
             <a:off x="996840" y="2679120"/>
-            <a:ext cx="1415160" cy="182160"/>
+            <a:ext cx="1414800" cy="182160"/>
           </a:xfrm>
           <a:prstGeom prst="rect">
             <a:avLst/>
@@ -27797,7 +27827,7 @@
         <p:spPr>
           <a:xfrm>
             <a:off x="2368440" y="2679120"/>
-            <a:ext cx="3472560" cy="190080"/>
+            <a:ext cx="3472200" cy="190080"/>
           </a:xfrm>
           <a:prstGeom prst="rect">
             <a:avLst/>
@@ -27849,7 +27879,7 @@
         <p:spPr>
           <a:xfrm>
             <a:off x="996840" y="3209400"/>
-            <a:ext cx="1415160" cy="182160"/>
+            <a:ext cx="1414800" cy="182160"/>
           </a:xfrm>
           <a:prstGeom prst="rect">
             <a:avLst/>
@@ -27901,7 +27931,7 @@
         <p:spPr>
           <a:xfrm>
             <a:off x="2368440" y="3209400"/>
-            <a:ext cx="3472560" cy="190080"/>
+            <a:ext cx="3472200" cy="190080"/>
           </a:xfrm>
           <a:prstGeom prst="rect">
             <a:avLst/>
@@ -27953,7 +27983,7 @@
         <p:spPr>
           <a:xfrm>
             <a:off x="996840" y="3740040"/>
-            <a:ext cx="1415160" cy="182160"/>
+            <a:ext cx="1414800" cy="182160"/>
           </a:xfrm>
           <a:prstGeom prst="rect">
             <a:avLst/>
@@ -28005,7 +28035,7 @@
         <p:spPr>
           <a:xfrm>
             <a:off x="2368440" y="3740040"/>
-            <a:ext cx="3472560" cy="190080"/>
+            <a:ext cx="3472200" cy="190080"/>
           </a:xfrm>
           <a:prstGeom prst="rect">
             <a:avLst/>
@@ -28057,7 +28087,7 @@
         <p:spPr>
           <a:xfrm>
             <a:off x="996840" y="4270320"/>
-            <a:ext cx="1415160" cy="182160"/>
+            <a:ext cx="1414800" cy="182160"/>
           </a:xfrm>
           <a:prstGeom prst="rect">
             <a:avLst/>
@@ -28109,7 +28139,7 @@
         <p:spPr>
           <a:xfrm>
             <a:off x="2368440" y="4270320"/>
-            <a:ext cx="3472560" cy="190080"/>
+            <a:ext cx="3472200" cy="190080"/>
           </a:xfrm>
           <a:prstGeom prst="rect">
             <a:avLst/>
@@ -28161,7 +28191,7 @@
         <p:spPr>
           <a:xfrm>
             <a:off x="6400800" y="1417320"/>
-            <a:ext cx="5255640" cy="3564000"/>
+            <a:ext cx="5255280" cy="3563640"/>
           </a:xfrm>
           <a:prstGeom prst="roundRect">
             <a:avLst>
@@ -28207,7 +28237,7 @@
         <p:spPr>
           <a:xfrm>
             <a:off x="6400800" y="1417320"/>
-            <a:ext cx="5255640" cy="546480"/>
+            <a:ext cx="5255280" cy="546120"/>
           </a:xfrm>
           <a:prstGeom prst="roundRect">
             <a:avLst>
@@ -28250,7 +28280,7 @@
         <p:spPr>
           <a:xfrm>
             <a:off x="6400800" y="1472040"/>
-            <a:ext cx="5255640" cy="227880"/>
+            <a:ext cx="5255280" cy="227880"/>
           </a:xfrm>
           <a:prstGeom prst="rect">
             <a:avLst/>
@@ -28302,7 +28332,7 @@
         <p:spPr>
           <a:xfrm>
             <a:off x="6629400" y="2148840"/>
-            <a:ext cx="1415160" cy="182160"/>
+            <a:ext cx="1414800" cy="182160"/>
           </a:xfrm>
           <a:prstGeom prst="rect">
             <a:avLst/>
@@ -28354,7 +28384,7 @@
         <p:spPr>
           <a:xfrm>
             <a:off x="8001000" y="2148840"/>
-            <a:ext cx="3472560" cy="190080"/>
+            <a:ext cx="3472200" cy="190080"/>
           </a:xfrm>
           <a:prstGeom prst="rect">
             <a:avLst/>
@@ -28406,7 +28436,7 @@
         <p:spPr>
           <a:xfrm>
             <a:off x="6629400" y="2679120"/>
-            <a:ext cx="1415160" cy="182160"/>
+            <a:ext cx="1414800" cy="182160"/>
           </a:xfrm>
           <a:prstGeom prst="rect">
             <a:avLst/>
@@ -28458,7 +28488,7 @@
         <p:spPr>
           <a:xfrm>
             <a:off x="8001000" y="2679120"/>
-            <a:ext cx="3472560" cy="190080"/>
+            <a:ext cx="3472200" cy="190080"/>
           </a:xfrm>
           <a:prstGeom prst="rect">
             <a:avLst/>
@@ -28510,7 +28540,7 @@
         <p:spPr>
           <a:xfrm>
             <a:off x="6629400" y="3209400"/>
-            <a:ext cx="1415160" cy="182160"/>
+            <a:ext cx="1414800" cy="182160"/>
           </a:xfrm>
           <a:prstGeom prst="rect">
             <a:avLst/>
@@ -28562,7 +28592,7 @@
         <p:spPr>
           <a:xfrm>
             <a:off x="8001000" y="3209400"/>
-            <a:ext cx="3472560" cy="190080"/>
+            <a:ext cx="3472200" cy="190080"/>
           </a:xfrm>
           <a:prstGeom prst="rect">
             <a:avLst/>
@@ -28614,7 +28644,7 @@
         <p:spPr>
           <a:xfrm>
             <a:off x="6629400" y="3740040"/>
-            <a:ext cx="1415160" cy="182160"/>
+            <a:ext cx="1414800" cy="182160"/>
           </a:xfrm>
           <a:prstGeom prst="rect">
             <a:avLst/>
@@ -28666,7 +28696,7 @@
         <p:spPr>
           <a:xfrm>
             <a:off x="8001000" y="3740040"/>
-            <a:ext cx="3472560" cy="190080"/>
+            <a:ext cx="3472200" cy="190080"/>
           </a:xfrm>
           <a:prstGeom prst="rect">
             <a:avLst/>
@@ -28718,7 +28748,7 @@
         <p:spPr>
           <a:xfrm>
             <a:off x="6629400" y="4270320"/>
-            <a:ext cx="1415160" cy="182160"/>
+            <a:ext cx="1414800" cy="182160"/>
           </a:xfrm>
           <a:prstGeom prst="rect">
             <a:avLst/>
@@ -28770,7 +28800,7 @@
         <p:spPr>
           <a:xfrm>
             <a:off x="8001000" y="4270320"/>
-            <a:ext cx="3472560" cy="190080"/>
+            <a:ext cx="3472200" cy="190080"/>
           </a:xfrm>
           <a:prstGeom prst="rect">
             <a:avLst/>
@@ -28822,7 +28852,7 @@
         <p:spPr>
           <a:xfrm>
             <a:off x="768240" y="5120640"/>
-            <a:ext cx="10650600" cy="592200"/>
+            <a:ext cx="10650240" cy="591840"/>
           </a:xfrm>
           <a:prstGeom prst="roundRect">
             <a:avLst>
@@ -28865,7 +28895,7 @@
         <p:spPr>
           <a:xfrm>
             <a:off x="768240" y="5120640"/>
-            <a:ext cx="48600" cy="592200"/>
+            <a:ext cx="48240" cy="591840"/>
           </a:xfrm>
           <a:prstGeom prst="rect">
             <a:avLst/>
@@ -28906,7 +28936,7 @@
         <p:spPr>
           <a:xfrm>
             <a:off x="1024200" y="5331600"/>
-            <a:ext cx="10193400" cy="207000"/>
+            <a:ext cx="10193040" cy="207000"/>
           </a:xfrm>
           <a:prstGeom prst="rect">
             <a:avLst/>
@@ -28995,7 +29025,7 @@
         <p:spPr>
           <a:xfrm>
             <a:off x="768240" y="420480"/>
-            <a:ext cx="10604880" cy="441360"/>
+            <a:ext cx="10604520" cy="441360"/>
           </a:xfrm>
           <a:prstGeom prst="rect">
             <a:avLst/>
@@ -29047,7 +29077,7 @@
         <p:spPr>
           <a:xfrm>
             <a:off x="768240" y="1170360"/>
-            <a:ext cx="1369440" cy="42120"/>
+            <a:ext cx="1369080" cy="41760"/>
           </a:xfrm>
           <a:prstGeom prst="rect">
             <a:avLst/>
@@ -29088,7 +29118,7 @@
         <p:spPr>
           <a:xfrm>
             <a:off x="768240" y="1298520"/>
-            <a:ext cx="10604880" cy="227880"/>
+            <a:ext cx="10604520" cy="227880"/>
           </a:xfrm>
           <a:prstGeom prst="rect">
             <a:avLst/>
@@ -29140,7 +29170,7 @@
         <p:spPr>
           <a:xfrm>
             <a:off x="0" y="6437520"/>
-            <a:ext cx="12189600" cy="12960"/>
+            <a:ext cx="12189240" cy="12600"/>
           </a:xfrm>
           <a:prstGeom prst="rect">
             <a:avLst/>
@@ -29181,7 +29211,7 @@
         <p:spPr>
           <a:xfrm>
             <a:off x="768240" y="6473880"/>
-            <a:ext cx="8227440" cy="136800"/>
+            <a:ext cx="8227080" cy="136800"/>
           </a:xfrm>
           <a:prstGeom prst="rect">
             <a:avLst/>
@@ -29233,7 +29263,7 @@
         <p:spPr>
           <a:xfrm>
             <a:off x="10607040" y="6473880"/>
-            <a:ext cx="820800" cy="136800"/>
+            <a:ext cx="820440" cy="136800"/>
           </a:xfrm>
           <a:prstGeom prst="rect">
             <a:avLst/>
@@ -29285,7 +29315,7 @@
         <p:spPr>
           <a:xfrm>
             <a:off x="768240" y="1828800"/>
-            <a:ext cx="5301360" cy="227880"/>
+            <a:ext cx="5301000" cy="227880"/>
           </a:xfrm>
           <a:prstGeom prst="rect">
             <a:avLst/>
@@ -29337,7 +29367,7 @@
         <p:spPr>
           <a:xfrm>
             <a:off x="768240" y="2286000"/>
-            <a:ext cx="5392800" cy="1692720"/>
+            <a:ext cx="5392440" cy="1692720"/>
           </a:xfrm>
           <a:prstGeom prst="rect">
             <a:avLst/>
@@ -29538,7 +29568,7 @@
         <p:spPr>
           <a:xfrm>
             <a:off x="6400800" y="1828800"/>
-            <a:ext cx="5027040" cy="1552320"/>
+            <a:ext cx="5026680" cy="1551960"/>
           </a:xfrm>
           <a:prstGeom prst="roundRect">
             <a:avLst>
@@ -29581,7 +29611,7 @@
         <p:spPr>
           <a:xfrm>
             <a:off x="6400800" y="1828800"/>
-            <a:ext cx="48600" cy="1552320"/>
+            <a:ext cx="48240" cy="1551960"/>
           </a:xfrm>
           <a:prstGeom prst="rect">
             <a:avLst/>
@@ -29622,7 +29652,7 @@
         <p:spPr>
           <a:xfrm>
             <a:off x="6656760" y="2304360"/>
-            <a:ext cx="4569840" cy="638280"/>
+            <a:ext cx="4569480" cy="638280"/>
           </a:xfrm>
           <a:prstGeom prst="rect">
             <a:avLst/>
@@ -29705,7 +29735,7 @@
         <p:spPr>
           <a:xfrm>
             <a:off x="6400800" y="3566160"/>
-            <a:ext cx="5027040" cy="1506600"/>
+            <a:ext cx="5026680" cy="1506240"/>
           </a:xfrm>
           <a:prstGeom prst="roundRect">
             <a:avLst>
@@ -29748,7 +29778,7 @@
         <p:spPr>
           <a:xfrm>
             <a:off x="6400800" y="3566160"/>
-            <a:ext cx="48600" cy="1506600"/>
+            <a:ext cx="48240" cy="1506240"/>
           </a:xfrm>
           <a:prstGeom prst="rect">
             <a:avLst/>
@@ -29789,7 +29819,7 @@
         <p:spPr>
           <a:xfrm>
             <a:off x="6656760" y="3915000"/>
-            <a:ext cx="4569840" cy="846000"/>
+            <a:ext cx="4569480" cy="846000"/>
           </a:xfrm>
           <a:prstGeom prst="rect">
             <a:avLst/>
@@ -29876,7 +29906,7 @@
         <p:spPr>
           <a:xfrm>
             <a:off x="144000" y="4077720"/>
-            <a:ext cx="3036600" cy="1897200"/>
+            <a:ext cx="3036240" cy="1896840"/>
           </a:xfrm>
           <a:prstGeom prst="rect">
             <a:avLst/>
@@ -29899,7 +29929,7 @@
         <p:spPr>
           <a:xfrm>
             <a:off x="3384000" y="4176000"/>
-            <a:ext cx="2922120" cy="1825560"/>
+            <a:ext cx="2921760" cy="1825200"/>
           </a:xfrm>
           <a:prstGeom prst="rect">
             <a:avLst/>
@@ -29918,7 +29948,7 @@
         <p:spPr>
           <a:xfrm>
             <a:off x="864000" y="5976000"/>
-            <a:ext cx="1726920" cy="136800"/>
+            <a:ext cx="1726560" cy="136800"/>
           </a:xfrm>
           <a:prstGeom prst="rect">
             <a:avLst/>
@@ -29970,7 +30000,7 @@
         <p:spPr>
           <a:xfrm>
             <a:off x="3816000" y="6002640"/>
-            <a:ext cx="1726920" cy="273960"/>
+            <a:ext cx="1726560" cy="273960"/>
           </a:xfrm>
           <a:prstGeom prst="rect">
             <a:avLst/>
@@ -30059,7 +30089,7 @@
         <p:spPr>
           <a:xfrm>
             <a:off x="768240" y="420480"/>
-            <a:ext cx="10604880" cy="441360"/>
+            <a:ext cx="10604520" cy="441360"/>
           </a:xfrm>
           <a:prstGeom prst="rect">
             <a:avLst/>
@@ -30111,7 +30141,7 @@
         <p:spPr>
           <a:xfrm>
             <a:off x="768240" y="1170360"/>
-            <a:ext cx="1369440" cy="42120"/>
+            <a:ext cx="1369080" cy="41760"/>
           </a:xfrm>
           <a:prstGeom prst="rect">
             <a:avLst/>
@@ -30152,7 +30182,7 @@
         <p:spPr>
           <a:xfrm>
             <a:off x="768240" y="1298520"/>
-            <a:ext cx="10604880" cy="227880"/>
+            <a:ext cx="10604520" cy="227880"/>
           </a:xfrm>
           <a:prstGeom prst="rect">
             <a:avLst/>
@@ -30204,7 +30234,7 @@
         <p:spPr>
           <a:xfrm>
             <a:off x="0" y="6437520"/>
-            <a:ext cx="12189600" cy="12960"/>
+            <a:ext cx="12189240" cy="12600"/>
           </a:xfrm>
           <a:prstGeom prst="rect">
             <a:avLst/>
@@ -30245,7 +30275,7 @@
         <p:spPr>
           <a:xfrm>
             <a:off x="768240" y="6473880"/>
-            <a:ext cx="8227440" cy="136800"/>
+            <a:ext cx="8227080" cy="136800"/>
           </a:xfrm>
           <a:prstGeom prst="rect">
             <a:avLst/>
@@ -30297,7 +30327,7 @@
         <p:spPr>
           <a:xfrm>
             <a:off x="10607040" y="6473880"/>
-            <a:ext cx="820800" cy="136800"/>
+            <a:ext cx="820440" cy="136800"/>
           </a:xfrm>
           <a:prstGeom prst="rect">
             <a:avLst/>
@@ -30349,7 +30379,7 @@
         <p:spPr>
           <a:xfrm>
             <a:off x="768240" y="1828800"/>
-            <a:ext cx="5118480" cy="227880"/>
+            <a:ext cx="5118120" cy="227880"/>
           </a:xfrm>
           <a:prstGeom prst="rect">
             <a:avLst/>
@@ -30401,7 +30431,7 @@
         <p:spPr>
           <a:xfrm>
             <a:off x="768240" y="2286000"/>
-            <a:ext cx="5301360" cy="1823760"/>
+            <a:ext cx="5301000" cy="1823760"/>
           </a:xfrm>
           <a:prstGeom prst="rect">
             <a:avLst/>
@@ -30602,7 +30632,7 @@
         <p:spPr>
           <a:xfrm>
             <a:off x="6400800" y="1828800"/>
-            <a:ext cx="5027040" cy="227880"/>
+            <a:ext cx="5026680" cy="227880"/>
           </a:xfrm>
           <a:prstGeom prst="rect">
             <a:avLst/>
@@ -30654,7 +30684,7 @@
         <p:spPr>
           <a:xfrm>
             <a:off x="6400800" y="2286000"/>
-            <a:ext cx="5027040" cy="1823760"/>
+            <a:ext cx="5026680" cy="1823760"/>
           </a:xfrm>
           <a:prstGeom prst="rect">
             <a:avLst/>
@@ -30855,7 +30885,7 @@
         <p:spPr>
           <a:xfrm>
             <a:off x="768240" y="5074920"/>
-            <a:ext cx="10650600" cy="866520"/>
+            <a:ext cx="10650240" cy="866160"/>
           </a:xfrm>
           <a:prstGeom prst="roundRect">
             <a:avLst>
@@ -30898,7 +30928,7 @@
         <p:spPr>
           <a:xfrm>
             <a:off x="768240" y="5074920"/>
-            <a:ext cx="48600" cy="866520"/>
+            <a:ext cx="48240" cy="866160"/>
           </a:xfrm>
           <a:prstGeom prst="rect">
             <a:avLst/>
@@ -30939,7 +30969,7 @@
         <p:spPr>
           <a:xfrm>
             <a:off x="1024200" y="5311440"/>
-            <a:ext cx="10193400" cy="430560"/>
+            <a:ext cx="10193040" cy="430560"/>
           </a:xfrm>
           <a:prstGeom prst="rect">
             <a:avLst/>
@@ -31069,7 +31099,7 @@
         <p:spPr>
           <a:xfrm>
             <a:off x="768240" y="420480"/>
-            <a:ext cx="10604880" cy="441360"/>
+            <a:ext cx="10604520" cy="441360"/>
           </a:xfrm>
           <a:prstGeom prst="rect">
             <a:avLst/>
@@ -31121,7 +31151,7 @@
         <p:spPr>
           <a:xfrm>
             <a:off x="768240" y="1170360"/>
-            <a:ext cx="1369440" cy="42120"/>
+            <a:ext cx="1369080" cy="41760"/>
           </a:xfrm>
           <a:prstGeom prst="rect">
             <a:avLst/>
@@ -31162,7 +31192,7 @@
         <p:spPr>
           <a:xfrm>
             <a:off x="768240" y="1298520"/>
-            <a:ext cx="10604880" cy="227880"/>
+            <a:ext cx="10604520" cy="227880"/>
           </a:xfrm>
           <a:prstGeom prst="rect">
             <a:avLst/>
@@ -31214,7 +31244,7 @@
         <p:spPr>
           <a:xfrm>
             <a:off x="0" y="6437520"/>
-            <a:ext cx="12189600" cy="12960"/>
+            <a:ext cx="12189240" cy="12600"/>
           </a:xfrm>
           <a:prstGeom prst="rect">
             <a:avLst/>
@@ -31255,7 +31285,7 @@
         <p:spPr>
           <a:xfrm>
             <a:off x="768240" y="6473880"/>
-            <a:ext cx="8227440" cy="136800"/>
+            <a:ext cx="8227080" cy="136800"/>
           </a:xfrm>
           <a:prstGeom prst="rect">
             <a:avLst/>
@@ -31307,7 +31337,7 @@
         <p:spPr>
           <a:xfrm>
             <a:off x="10607040" y="6473880"/>
-            <a:ext cx="820800" cy="136800"/>
+            <a:ext cx="820440" cy="136800"/>
           </a:xfrm>
           <a:prstGeom prst="rect">
             <a:avLst/>
@@ -31359,7 +31389,7 @@
         <p:spPr>
           <a:xfrm>
             <a:off x="768240" y="1828800"/>
-            <a:ext cx="5392800" cy="1692720"/>
+            <a:ext cx="5392440" cy="1692720"/>
           </a:xfrm>
           <a:prstGeom prst="rect">
             <a:avLst/>
@@ -31560,7 +31590,7 @@
         <p:spPr>
           <a:xfrm>
             <a:off x="6400800" y="1737360"/>
-            <a:ext cx="5027040" cy="212760"/>
+            <a:ext cx="5026680" cy="212760"/>
           </a:xfrm>
           <a:prstGeom prst="rect">
             <a:avLst/>
@@ -31612,7 +31642,7 @@
         <p:spPr>
           <a:xfrm>
             <a:off x="6400800" y="2076840"/>
-            <a:ext cx="5027040" cy="1794600"/>
+            <a:ext cx="5026680" cy="1794240"/>
           </a:xfrm>
           <a:prstGeom prst="roundRect">
             <a:avLst>
@@ -31833,7 +31863,7 @@
         <p:spPr>
           <a:xfrm>
             <a:off x="5328000" y="5112720"/>
-            <a:ext cx="1150920" cy="214920"/>
+            <a:ext cx="1150560" cy="214560"/>
           </a:xfrm>
           <a:custGeom>
             <a:avLst/>
@@ -31902,7 +31932,7 @@
         <p:spPr>
           <a:xfrm>
             <a:off x="1152000" y="4005000"/>
-            <a:ext cx="3815640" cy="2384280"/>
+            <a:ext cx="3815280" cy="2383920"/>
           </a:xfrm>
           <a:prstGeom prst="rect">
             <a:avLst/>
@@ -31925,7 +31955,7 @@
         <p:spPr>
           <a:xfrm>
             <a:off x="6984000" y="4023000"/>
-            <a:ext cx="3815640" cy="2384640"/>
+            <a:ext cx="3815280" cy="2384280"/>
           </a:xfrm>
           <a:prstGeom prst="rect">
             <a:avLst/>
@@ -31981,7 +32011,7 @@
         <p:spPr>
           <a:xfrm>
             <a:off x="768240" y="420480"/>
-            <a:ext cx="10604880" cy="441360"/>
+            <a:ext cx="10604520" cy="441360"/>
           </a:xfrm>
           <a:prstGeom prst="rect">
             <a:avLst/>
@@ -32033,7 +32063,7 @@
         <p:spPr>
           <a:xfrm>
             <a:off x="768240" y="1170360"/>
-            <a:ext cx="1369440" cy="42120"/>
+            <a:ext cx="1369080" cy="41760"/>
           </a:xfrm>
           <a:prstGeom prst="rect">
             <a:avLst/>
@@ -32074,7 +32104,7 @@
         <p:spPr>
           <a:xfrm>
             <a:off x="768240" y="1298520"/>
-            <a:ext cx="10604880" cy="227880"/>
+            <a:ext cx="10604520" cy="227880"/>
           </a:xfrm>
           <a:prstGeom prst="rect">
             <a:avLst/>
@@ -32126,7 +32156,7 @@
         <p:spPr>
           <a:xfrm>
             <a:off x="0" y="6437520"/>
-            <a:ext cx="12189600" cy="12960"/>
+            <a:ext cx="12189240" cy="12600"/>
           </a:xfrm>
           <a:prstGeom prst="rect">
             <a:avLst/>
@@ -32167,7 +32197,7 @@
         <p:spPr>
           <a:xfrm>
             <a:off x="768240" y="6473880"/>
-            <a:ext cx="8227440" cy="136800"/>
+            <a:ext cx="8227080" cy="136800"/>
           </a:xfrm>
           <a:prstGeom prst="rect">
             <a:avLst/>
@@ -32219,7 +32249,7 @@
         <p:spPr>
           <a:xfrm>
             <a:off x="10607040" y="6473880"/>
-            <a:ext cx="820800" cy="136800"/>
+            <a:ext cx="820440" cy="136800"/>
           </a:xfrm>
           <a:prstGeom prst="rect">
             <a:avLst/>
@@ -32271,7 +32301,7 @@
         <p:spPr>
           <a:xfrm>
             <a:off x="768240" y="1828800"/>
-            <a:ext cx="5392800" cy="227880"/>
+            <a:ext cx="5392440" cy="227880"/>
           </a:xfrm>
           <a:prstGeom prst="rect">
             <a:avLst/>
@@ -32323,7 +32353,7 @@
         <p:spPr>
           <a:xfrm>
             <a:off x="768240" y="2286000"/>
-            <a:ext cx="5484240" cy="1692720"/>
+            <a:ext cx="5483880" cy="1692720"/>
           </a:xfrm>
           <a:prstGeom prst="rect">
             <a:avLst/>
@@ -32524,7 +32554,7 @@
         <p:spPr>
           <a:xfrm>
             <a:off x="6446520" y="1828800"/>
-            <a:ext cx="4981320" cy="2100960"/>
+            <a:ext cx="4980960" cy="2100600"/>
           </a:xfrm>
           <a:prstGeom prst="roundRect">
             <a:avLst>
@@ -32567,7 +32597,7 @@
         <p:spPr>
           <a:xfrm>
             <a:off x="6446520" y="1828800"/>
-            <a:ext cx="48600" cy="2100960"/>
+            <a:ext cx="48240" cy="2100600"/>
           </a:xfrm>
           <a:prstGeom prst="rect">
             <a:avLst/>
@@ -32608,7 +32638,7 @@
         <p:spPr>
           <a:xfrm>
             <a:off x="6702480" y="2267640"/>
-            <a:ext cx="4524120" cy="1261440"/>
+            <a:ext cx="4523760" cy="1261440"/>
           </a:xfrm>
           <a:prstGeom prst="rect">
             <a:avLst/>
@@ -32747,7 +32777,7 @@
         <p:spPr>
           <a:xfrm>
             <a:off x="1199520" y="3960360"/>
-            <a:ext cx="3191760" cy="2462400"/>
+            <a:ext cx="3191400" cy="2462040"/>
           </a:xfrm>
           <a:prstGeom prst="rect">
             <a:avLst/>
@@ -32770,7 +32800,7 @@
         <p:spPr>
           <a:xfrm>
             <a:off x="6050880" y="3972240"/>
-            <a:ext cx="3164400" cy="2441160"/>
+            <a:ext cx="3164040" cy="2440800"/>
           </a:xfrm>
           <a:prstGeom prst="rect">
             <a:avLst/>
@@ -32789,7 +32819,7 @@
         <p:spPr>
           <a:xfrm>
             <a:off x="4608360" y="5184360"/>
-            <a:ext cx="1150920" cy="214920"/>
+            <a:ext cx="1150560" cy="214560"/>
           </a:xfrm>
           <a:custGeom>
             <a:avLst/>
